--- a/00 Admin/11 Final Outputs/plan-on-a-page/TapThat_Plan-on-a-Page_A3.pptx
+++ b/00 Admin/11 Final Outputs/plan-on-a-page/TapThat_Plan-on-a-Page_A3.pptx
@@ -1723,7 +1723,7 @@
         </p:nvSpPr>
         <p:spPr>
           <a:xfrm>
-            <a:off x="438898" y="2007180"/>
+            <a:off x="438898" y="1928489"/>
             <a:ext cx="8166764" cy="308610"/>
           </a:xfrm>
           <a:prstGeom prst="rect">
@@ -1782,7 +1782,7 @@
         </p:nvSpPr>
         <p:spPr>
           <a:xfrm>
-            <a:off x="438898" y="2481390"/>
+            <a:off x="438898" y="2324008"/>
             <a:ext cx="8166764" cy="308610"/>
           </a:xfrm>
           <a:prstGeom prst="rect">
@@ -1835,7 +1835,66 @@
       </p:sp>
       <p:sp>
         <p:nvSpPr>
-          <p:cNvPr id="19" name="Shape 16"/>
+          <p:cNvPr id="19" name="Text 16"/>
+          <p:cNvSpPr txBox="1"/>
+          <p:nvPr/>
+        </p:nvSpPr>
+        <p:spPr>
+          <a:xfrm>
+            <a:off x="438898" y="2719527"/>
+            <a:ext cx="8166764" cy="617220"/>
+          </a:xfrm>
+          <a:prstGeom prst="rect">
+            <a:avLst/>
+          </a:prstGeom>
+          <a:noFill/>
+          <a:ln/>
+        </p:spPr>
+        <p:txBody>
+          <a:bodyPr wrap="square" lIns="0" tIns="0" rIns="0" bIns="0" rtlCol="0" anchor="t"/>
+          <a:lstStyle/>
+          <a:p>
+            <a:pPr indent="0" marL="0">
+              <a:lnSpc>
+                <a:spcPts val="1215"/>
+              </a:lnSpc>
+              <a:buNone/>
+            </a:pPr>
+            <a:r>
+              <a:rPr lang="en-US" sz="810" b="1" dirty="0">
+                <a:solidFill>
+                  <a:srgbClr val="0E171F"/>
+                </a:solidFill>
+                <a:latin typeface="Poppins" pitchFamily="34" charset="0"/>
+                <a:ea typeface="Poppins" pitchFamily="34" charset="-122"/>
+                <a:cs typeface="Poppins" pitchFamily="34" charset="-120"/>
+              </a:rPr>
+              <a:t>Why this exists. </a:t>
+            </a:r>
+            <a:pPr indent="0" marL="0">
+              <a:lnSpc>
+                <a:spcPts val="1215"/>
+              </a:lnSpc>
+              <a:buNone/>
+            </a:pPr>
+            <a:r>
+              <a:rPr lang="en-US" sz="810" dirty="0">
+                <a:solidFill>
+                  <a:srgbClr val="4A5565"/>
+                </a:solidFill>
+                <a:latin typeface="Poppins" pitchFamily="34" charset="0"/>
+                <a:ea typeface="Poppins" pitchFamily="34" charset="-122"/>
+                <a:cs typeface="Poppins" pitchFamily="34" charset="-120"/>
+              </a:rPr>
+              <a:t>Christy's reading of the Discovery set was that everything in it is equal, so none of it has shape: everything is important, the best insights are buried inside other insights, and nothing has been stress-tested. Clent asked for three things off the back of it, and they are the test for this page. Belief, because the work is already good. Clarity, on which few things get picked up. Momentum, because a decision made is worth more than a strategy admired.</a:t>
+            </a:r>
+            <a:endParaRPr lang="en-US" sz="810" dirty="0"/>
+          </a:p>
+        </p:txBody>
+      </p:sp>
+      <p:sp>
+        <p:nvSpPr>
+          <p:cNvPr id="20" name="Shape 17"/>
           <p:cNvSpPr/>
           <p:nvPr/>
         </p:nvSpPr>
@@ -1858,7 +1917,7 @@
       </p:sp>
       <p:sp>
         <p:nvSpPr>
-          <p:cNvPr id="20" name="Text 17"/>
+          <p:cNvPr id="21" name="Text 18"/>
           <p:cNvSpPr txBox="1"/>
           <p:nvPr/>
         </p:nvSpPr>
@@ -1900,7 +1959,7 @@
       </p:sp>
       <p:sp>
         <p:nvSpPr>
-          <p:cNvPr id="21" name="Shape 18"/>
+          <p:cNvPr id="22" name="Shape 19"/>
           <p:cNvSpPr/>
           <p:nvPr/>
         </p:nvSpPr>
@@ -1925,7 +1984,7 @@
       </p:sp>
       <p:sp>
         <p:nvSpPr>
-          <p:cNvPr id="22" name="Text 19"/>
+          <p:cNvPr id="23" name="Text 20"/>
           <p:cNvSpPr txBox="1"/>
           <p:nvPr/>
         </p:nvSpPr>
@@ -1967,7 +2026,7 @@
       </p:sp>
       <p:sp>
         <p:nvSpPr>
-          <p:cNvPr id="23" name="Shape 20"/>
+          <p:cNvPr id="24" name="Shape 21"/>
           <p:cNvSpPr/>
           <p:nvPr/>
         </p:nvSpPr>
@@ -1992,7 +2051,7 @@
       </p:sp>
       <p:sp>
         <p:nvSpPr>
-          <p:cNvPr id="24" name="Text 21"/>
+          <p:cNvPr id="25" name="Text 22"/>
           <p:cNvSpPr txBox="1"/>
           <p:nvPr/>
         </p:nvSpPr>
@@ -2034,7 +2093,7 @@
       </p:sp>
       <p:sp>
         <p:nvSpPr>
-          <p:cNvPr id="25" name="Text 22"/>
+          <p:cNvPr id="26" name="Text 23"/>
           <p:cNvSpPr txBox="1"/>
           <p:nvPr/>
         </p:nvSpPr>
@@ -2076,7 +2135,7 @@
       </p:sp>
       <p:sp>
         <p:nvSpPr>
-          <p:cNvPr id="26" name="Shape 23"/>
+          <p:cNvPr id="27" name="Shape 24"/>
           <p:cNvSpPr/>
           <p:nvPr/>
         </p:nvSpPr>
@@ -2101,7 +2160,7 @@
       </p:sp>
       <p:sp>
         <p:nvSpPr>
-          <p:cNvPr id="27" name="Text 24"/>
+          <p:cNvPr id="28" name="Text 25"/>
           <p:cNvSpPr txBox="1"/>
           <p:nvPr/>
         </p:nvSpPr>
@@ -2143,7 +2202,7 @@
       </p:sp>
       <p:sp>
         <p:nvSpPr>
-          <p:cNvPr id="28" name="Text 25"/>
+          <p:cNvPr id="29" name="Text 26"/>
           <p:cNvSpPr txBox="1"/>
           <p:nvPr/>
         </p:nvSpPr>
@@ -2185,7 +2244,7 @@
       </p:sp>
       <p:sp>
         <p:nvSpPr>
-          <p:cNvPr id="29" name="Shape 26"/>
+          <p:cNvPr id="30" name="Shape 27"/>
           <p:cNvSpPr/>
           <p:nvPr/>
         </p:nvSpPr>
@@ -2210,7 +2269,7 @@
       </p:sp>
       <p:sp>
         <p:nvSpPr>
-          <p:cNvPr id="30" name="Text 27"/>
+          <p:cNvPr id="31" name="Text 28"/>
           <p:cNvSpPr txBox="1"/>
           <p:nvPr/>
         </p:nvSpPr>
@@ -2252,7 +2311,7 @@
       </p:sp>
       <p:sp>
         <p:nvSpPr>
-          <p:cNvPr id="31" name="Text 28"/>
+          <p:cNvPr id="32" name="Text 29"/>
           <p:cNvSpPr txBox="1"/>
           <p:nvPr/>
         </p:nvSpPr>
@@ -2294,7 +2353,7 @@
       </p:sp>
       <p:sp>
         <p:nvSpPr>
-          <p:cNvPr id="32" name="Shape 29"/>
+          <p:cNvPr id="33" name="Shape 30"/>
           <p:cNvSpPr/>
           <p:nvPr/>
         </p:nvSpPr>
@@ -2319,7 +2378,7 @@
       </p:sp>
       <p:sp>
         <p:nvSpPr>
-          <p:cNvPr id="33" name="Text 30"/>
+          <p:cNvPr id="34" name="Text 31"/>
           <p:cNvSpPr txBox="1"/>
           <p:nvPr/>
         </p:nvSpPr>
@@ -2361,7 +2420,7 @@
       </p:sp>
       <p:sp>
         <p:nvSpPr>
-          <p:cNvPr id="34" name="Text 31"/>
+          <p:cNvPr id="35" name="Text 32"/>
           <p:cNvSpPr txBox="1"/>
           <p:nvPr/>
         </p:nvSpPr>
@@ -2403,7 +2462,7 @@
       </p:sp>
       <p:sp>
         <p:nvSpPr>
-          <p:cNvPr id="35" name="Shape 32"/>
+          <p:cNvPr id="36" name="Shape 33"/>
           <p:cNvSpPr/>
           <p:nvPr/>
         </p:nvSpPr>
@@ -2428,7 +2487,7 @@
       </p:sp>
       <p:sp>
         <p:nvSpPr>
-          <p:cNvPr id="36" name="Text 33"/>
+          <p:cNvPr id="37" name="Text 34"/>
           <p:cNvSpPr txBox="1"/>
           <p:nvPr/>
         </p:nvSpPr>
@@ -2470,7 +2529,7 @@
       </p:sp>
       <p:sp>
         <p:nvSpPr>
-          <p:cNvPr id="37" name="Text 34"/>
+          <p:cNvPr id="38" name="Text 35"/>
           <p:cNvSpPr txBox="1"/>
           <p:nvPr/>
         </p:nvSpPr>
@@ -2504,7 +2563,7 @@
                 <a:ea typeface="Poppins" pitchFamily="34" charset="-122"/>
                 <a:cs typeface="Poppins" pitchFamily="34" charset="-120"/>
               </a:rPr>
-              <a:t>OF LAPSED CITE CUTTING BACK</a:t>
+              <a:t>OF REFILL CUSTOMERS LAPSE</a:t>
             </a:r>
             <a:endParaRPr lang="en-US" sz="560" dirty="0"/>
           </a:p>
@@ -2512,7 +2571,7 @@
       </p:sp>
       <p:sp>
         <p:nvSpPr>
-          <p:cNvPr id="38" name="Shape 35"/>
+          <p:cNvPr id="39" name="Shape 36"/>
           <p:cNvSpPr/>
           <p:nvPr/>
         </p:nvSpPr>
@@ -2537,7 +2596,7 @@
       </p:sp>
       <p:sp>
         <p:nvSpPr>
-          <p:cNvPr id="39" name="Text 36"/>
+          <p:cNvPr id="40" name="Text 37"/>
           <p:cNvSpPr txBox="1"/>
           <p:nvPr/>
         </p:nvSpPr>
@@ -2579,7 +2638,7 @@
       </p:sp>
       <p:sp>
         <p:nvSpPr>
-          <p:cNvPr id="40" name="Text 37"/>
+          <p:cNvPr id="41" name="Text 38"/>
           <p:cNvSpPr txBox="1"/>
           <p:nvPr/>
         </p:nvSpPr>
@@ -2621,7 +2680,7 @@
       </p:sp>
       <p:sp>
         <p:nvSpPr>
-          <p:cNvPr id="41" name="Shape 38"/>
+          <p:cNvPr id="42" name="Shape 39"/>
           <p:cNvSpPr/>
           <p:nvPr/>
         </p:nvSpPr>
@@ -2646,7 +2705,7 @@
       </p:sp>
       <p:sp>
         <p:nvSpPr>
-          <p:cNvPr id="42" name="Text 39"/>
+          <p:cNvPr id="43" name="Text 40"/>
           <p:cNvSpPr txBox="1"/>
           <p:nvPr/>
         </p:nvSpPr>
@@ -2705,7 +2764,7 @@
       </p:sp>
       <p:sp>
         <p:nvSpPr>
-          <p:cNvPr id="43" name="Shape 40"/>
+          <p:cNvPr id="44" name="Shape 41"/>
           <p:cNvSpPr/>
           <p:nvPr/>
         </p:nvSpPr>
@@ -2730,7 +2789,7 @@
       </p:sp>
       <p:sp>
         <p:nvSpPr>
-          <p:cNvPr id="44" name="Shape 41"/>
+          <p:cNvPr id="45" name="Shape 42"/>
           <p:cNvSpPr/>
           <p:nvPr/>
         </p:nvSpPr>
@@ -2755,7 +2814,7 @@
       </p:sp>
       <p:sp>
         <p:nvSpPr>
-          <p:cNvPr id="45" name="Text 42"/>
+          <p:cNvPr id="46" name="Text 43"/>
           <p:cNvSpPr txBox="1"/>
           <p:nvPr/>
         </p:nvSpPr>
@@ -2797,7 +2856,7 @@
       </p:sp>
       <p:sp>
         <p:nvSpPr>
-          <p:cNvPr id="46" name="Text 43"/>
+          <p:cNvPr id="47" name="Text 44"/>
           <p:cNvSpPr txBox="1"/>
           <p:nvPr/>
         </p:nvSpPr>
@@ -2839,7 +2898,7 @@
       </p:sp>
       <p:sp>
         <p:nvSpPr>
-          <p:cNvPr id="47" name="Text 44"/>
+          <p:cNvPr id="48" name="Text 45"/>
           <p:cNvSpPr txBox="1"/>
           <p:nvPr/>
         </p:nvSpPr>
@@ -2881,7 +2940,7 @@
       </p:sp>
       <p:sp>
         <p:nvSpPr>
-          <p:cNvPr id="48" name="Text 45"/>
+          <p:cNvPr id="49" name="Text 46"/>
           <p:cNvSpPr txBox="1"/>
           <p:nvPr/>
         </p:nvSpPr>
@@ -2940,7 +2999,7 @@
       </p:sp>
       <p:sp>
         <p:nvSpPr>
-          <p:cNvPr id="49" name="Shape 46"/>
+          <p:cNvPr id="50" name="Shape 47"/>
           <p:cNvSpPr/>
           <p:nvPr/>
         </p:nvSpPr>
@@ -2965,7 +3024,7 @@
       </p:sp>
       <p:sp>
         <p:nvSpPr>
-          <p:cNvPr id="50" name="Shape 47"/>
+          <p:cNvPr id="51" name="Shape 48"/>
           <p:cNvSpPr/>
           <p:nvPr/>
         </p:nvSpPr>
@@ -2990,7 +3049,7 @@
       </p:sp>
       <p:sp>
         <p:nvSpPr>
-          <p:cNvPr id="51" name="Text 48"/>
+          <p:cNvPr id="52" name="Text 49"/>
           <p:cNvSpPr txBox="1"/>
           <p:nvPr/>
         </p:nvSpPr>
@@ -3032,7 +3091,7 @@
       </p:sp>
       <p:sp>
         <p:nvSpPr>
-          <p:cNvPr id="52" name="Text 49"/>
+          <p:cNvPr id="53" name="Text 50"/>
           <p:cNvSpPr txBox="1"/>
           <p:nvPr/>
         </p:nvSpPr>
@@ -3074,7 +3133,7 @@
       </p:sp>
       <p:sp>
         <p:nvSpPr>
-          <p:cNvPr id="53" name="Text 50"/>
+          <p:cNvPr id="54" name="Text 51"/>
           <p:cNvSpPr txBox="1"/>
           <p:nvPr/>
         </p:nvSpPr>
@@ -3116,7 +3175,7 @@
       </p:sp>
       <p:sp>
         <p:nvSpPr>
-          <p:cNvPr id="54" name="Text 51"/>
+          <p:cNvPr id="55" name="Text 52"/>
           <p:cNvSpPr txBox="1"/>
           <p:nvPr/>
         </p:nvSpPr>
@@ -3175,7 +3234,7 @@
       </p:sp>
       <p:sp>
         <p:nvSpPr>
-          <p:cNvPr id="55" name="Shape 52"/>
+          <p:cNvPr id="56" name="Shape 53"/>
           <p:cNvSpPr/>
           <p:nvPr/>
         </p:nvSpPr>
@@ -3200,7 +3259,7 @@
       </p:sp>
       <p:sp>
         <p:nvSpPr>
-          <p:cNvPr id="56" name="Shape 53"/>
+          <p:cNvPr id="57" name="Shape 54"/>
           <p:cNvSpPr/>
           <p:nvPr/>
         </p:nvSpPr>
@@ -3225,7 +3284,7 @@
       </p:sp>
       <p:sp>
         <p:nvSpPr>
-          <p:cNvPr id="57" name="Text 54"/>
+          <p:cNvPr id="58" name="Text 55"/>
           <p:cNvSpPr txBox="1"/>
           <p:nvPr/>
         </p:nvSpPr>
@@ -3267,7 +3326,7 @@
       </p:sp>
       <p:sp>
         <p:nvSpPr>
-          <p:cNvPr id="58" name="Text 55"/>
+          <p:cNvPr id="59" name="Text 56"/>
           <p:cNvSpPr txBox="1"/>
           <p:nvPr/>
         </p:nvSpPr>
@@ -3309,7 +3368,7 @@
       </p:sp>
       <p:sp>
         <p:nvSpPr>
-          <p:cNvPr id="59" name="Text 56"/>
+          <p:cNvPr id="60" name="Text 57"/>
           <p:cNvSpPr txBox="1"/>
           <p:nvPr/>
         </p:nvSpPr>
@@ -3351,7 +3410,7 @@
       </p:sp>
       <p:sp>
         <p:nvSpPr>
-          <p:cNvPr id="60" name="Text 57"/>
+          <p:cNvPr id="61" name="Text 58"/>
           <p:cNvSpPr txBox="1"/>
           <p:nvPr/>
         </p:nvSpPr>
@@ -3410,7 +3469,7 @@
       </p:sp>
       <p:sp>
         <p:nvSpPr>
-          <p:cNvPr id="61" name="Shape 58"/>
+          <p:cNvPr id="62" name="Shape 59"/>
           <p:cNvSpPr/>
           <p:nvPr/>
         </p:nvSpPr>
@@ -3435,7 +3494,7 @@
       </p:sp>
       <p:sp>
         <p:nvSpPr>
-          <p:cNvPr id="62" name="Shape 59"/>
+          <p:cNvPr id="63" name="Shape 60"/>
           <p:cNvSpPr/>
           <p:nvPr/>
         </p:nvSpPr>
@@ -3460,7 +3519,7 @@
       </p:sp>
       <p:sp>
         <p:nvSpPr>
-          <p:cNvPr id="63" name="Text 60"/>
+          <p:cNvPr id="64" name="Text 61"/>
           <p:cNvSpPr txBox="1"/>
           <p:nvPr/>
         </p:nvSpPr>
@@ -3502,7 +3561,7 @@
       </p:sp>
       <p:sp>
         <p:nvSpPr>
-          <p:cNvPr id="64" name="Text 61"/>
+          <p:cNvPr id="65" name="Text 62"/>
           <p:cNvSpPr txBox="1"/>
           <p:nvPr/>
         </p:nvSpPr>
@@ -3544,7 +3603,7 @@
       </p:sp>
       <p:sp>
         <p:nvSpPr>
-          <p:cNvPr id="65" name="Text 62"/>
+          <p:cNvPr id="66" name="Text 63"/>
           <p:cNvSpPr txBox="1"/>
           <p:nvPr/>
         </p:nvSpPr>
@@ -3586,7 +3645,7 @@
       </p:sp>
       <p:sp>
         <p:nvSpPr>
-          <p:cNvPr id="66" name="Text 63"/>
+          <p:cNvPr id="67" name="Text 64"/>
           <p:cNvSpPr txBox="1"/>
           <p:nvPr/>
         </p:nvSpPr>
@@ -3645,7 +3704,7 @@
       </p:sp>
       <p:sp>
         <p:nvSpPr>
-          <p:cNvPr id="67" name="Shape 64"/>
+          <p:cNvPr id="68" name="Shape 65"/>
           <p:cNvSpPr/>
           <p:nvPr/>
         </p:nvSpPr>
@@ -3670,7 +3729,7 @@
       </p:sp>
       <p:sp>
         <p:nvSpPr>
-          <p:cNvPr id="68" name="Text 65"/>
+          <p:cNvPr id="69" name="Text 66"/>
           <p:cNvSpPr txBox="1"/>
           <p:nvPr/>
         </p:nvSpPr>
@@ -3712,7 +3771,7 @@
       </p:sp>
       <p:sp>
         <p:nvSpPr>
-          <p:cNvPr id="69" name="Shape 66"/>
+          <p:cNvPr id="70" name="Shape 67"/>
           <p:cNvSpPr/>
           <p:nvPr/>
         </p:nvSpPr>
@@ -3739,7 +3798,7 @@
       </p:sp>
       <p:sp>
         <p:nvSpPr>
-          <p:cNvPr id="70" name="Text 67"/>
+          <p:cNvPr id="71" name="Text 68"/>
           <p:cNvSpPr txBox="1"/>
           <p:nvPr/>
         </p:nvSpPr>
@@ -3778,7 +3837,7 @@
       </p:sp>
       <p:sp>
         <p:nvSpPr>
-          <p:cNvPr id="71" name="Text 68"/>
+          <p:cNvPr id="72" name="Text 69"/>
           <p:cNvSpPr txBox="1"/>
           <p:nvPr/>
         </p:nvSpPr>
@@ -3820,7 +3879,7 @@
       </p:sp>
       <p:sp>
         <p:nvSpPr>
-          <p:cNvPr id="72" name="Shape 69"/>
+          <p:cNvPr id="73" name="Shape 70"/>
           <p:cNvSpPr/>
           <p:nvPr/>
         </p:nvSpPr>
@@ -3847,7 +3906,7 @@
       </p:sp>
       <p:sp>
         <p:nvSpPr>
-          <p:cNvPr id="73" name="Text 70"/>
+          <p:cNvPr id="74" name="Text 71"/>
           <p:cNvSpPr txBox="1"/>
           <p:nvPr/>
         </p:nvSpPr>
@@ -3886,7 +3945,7 @@
       </p:sp>
       <p:sp>
         <p:nvSpPr>
-          <p:cNvPr id="74" name="Text 71"/>
+          <p:cNvPr id="75" name="Text 72"/>
           <p:cNvSpPr txBox="1"/>
           <p:nvPr/>
         </p:nvSpPr>
@@ -3928,7 +3987,7 @@
       </p:sp>
       <p:sp>
         <p:nvSpPr>
-          <p:cNvPr id="75" name="Shape 72"/>
+          <p:cNvPr id="76" name="Shape 73"/>
           <p:cNvSpPr/>
           <p:nvPr/>
         </p:nvSpPr>
@@ -3955,7 +4014,7 @@
       </p:sp>
       <p:sp>
         <p:nvSpPr>
-          <p:cNvPr id="76" name="Text 73"/>
+          <p:cNvPr id="77" name="Text 74"/>
           <p:cNvSpPr txBox="1"/>
           <p:nvPr/>
         </p:nvSpPr>
@@ -3994,7 +4053,7 @@
       </p:sp>
       <p:sp>
         <p:nvSpPr>
-          <p:cNvPr id="77" name="Text 74"/>
+          <p:cNvPr id="78" name="Text 75"/>
           <p:cNvSpPr txBox="1"/>
           <p:nvPr/>
         </p:nvSpPr>
@@ -4036,7 +4095,7 @@
       </p:sp>
       <p:sp>
         <p:nvSpPr>
-          <p:cNvPr id="78" name="Shape 75"/>
+          <p:cNvPr id="79" name="Shape 76"/>
           <p:cNvSpPr/>
           <p:nvPr/>
         </p:nvSpPr>
@@ -4059,7 +4118,7 @@
       </p:sp>
       <p:sp>
         <p:nvSpPr>
-          <p:cNvPr id="79" name="Text 76"/>
+          <p:cNvPr id="80" name="Text 77"/>
           <p:cNvSpPr txBox="1"/>
           <p:nvPr/>
         </p:nvSpPr>
@@ -4101,7 +4160,7 @@
       </p:sp>
       <p:sp>
         <p:nvSpPr>
-          <p:cNvPr id="80" name="Shape 77"/>
+          <p:cNvPr id="81" name="Shape 78"/>
           <p:cNvSpPr/>
           <p:nvPr/>
         </p:nvSpPr>
@@ -4126,7 +4185,7 @@
       </p:sp>
       <p:sp>
         <p:nvSpPr>
-          <p:cNvPr id="81" name="Text 78"/>
+          <p:cNvPr id="82" name="Text 79"/>
           <p:cNvSpPr txBox="1"/>
           <p:nvPr/>
         </p:nvSpPr>
@@ -5326,7 +5385,7 @@
       </p:graphicFrame>
       <p:sp>
         <p:nvSpPr>
-          <p:cNvPr id="83" name="Shape 79"/>
+          <p:cNvPr id="84" name="Shape 80"/>
           <p:cNvSpPr/>
           <p:nvPr/>
         </p:nvSpPr>
@@ -5349,7 +5408,7 @@
       </p:sp>
       <p:sp>
         <p:nvSpPr>
-          <p:cNvPr id="84" name="Text 80"/>
+          <p:cNvPr id="85" name="Text 81"/>
           <p:cNvSpPr txBox="1"/>
           <p:nvPr/>
         </p:nvSpPr>
@@ -5391,7 +5450,7 @@
       </p:sp>
       <p:sp>
         <p:nvSpPr>
-          <p:cNvPr id="85" name="Shape 81"/>
+          <p:cNvPr id="86" name="Shape 82"/>
           <p:cNvSpPr/>
           <p:nvPr/>
         </p:nvSpPr>
@@ -5416,7 +5475,7 @@
       </p:sp>
       <p:sp>
         <p:nvSpPr>
-          <p:cNvPr id="86" name="Shape 82"/>
+          <p:cNvPr id="87" name="Shape 83"/>
           <p:cNvSpPr/>
           <p:nvPr/>
         </p:nvSpPr>
@@ -5441,7 +5500,7 @@
       </p:sp>
       <p:sp>
         <p:nvSpPr>
-          <p:cNvPr id="87" name="Text 83"/>
+          <p:cNvPr id="88" name="Text 84"/>
           <p:cNvSpPr txBox="1"/>
           <p:nvPr/>
         </p:nvSpPr>
@@ -5483,7 +5542,7 @@
       </p:sp>
       <p:sp>
         <p:nvSpPr>
-          <p:cNvPr id="88" name="Shape 84"/>
+          <p:cNvPr id="89" name="Shape 85"/>
           <p:cNvSpPr/>
           <p:nvPr/>
         </p:nvSpPr>
@@ -5508,7 +5567,7 @@
       </p:sp>
       <p:sp>
         <p:nvSpPr>
-          <p:cNvPr id="89" name="Text 85"/>
+          <p:cNvPr id="90" name="Text 86"/>
           <p:cNvSpPr txBox="1"/>
           <p:nvPr/>
         </p:nvSpPr>
@@ -5567,7 +5626,7 @@
       </p:sp>
       <p:sp>
         <p:nvSpPr>
-          <p:cNvPr id="90" name="Shape 86"/>
+          <p:cNvPr id="91" name="Shape 87"/>
           <p:cNvSpPr/>
           <p:nvPr/>
         </p:nvSpPr>
@@ -5592,7 +5651,7 @@
       </p:sp>
       <p:sp>
         <p:nvSpPr>
-          <p:cNvPr id="91" name="Text 87"/>
+          <p:cNvPr id="92" name="Text 88"/>
           <p:cNvSpPr txBox="1"/>
           <p:nvPr/>
         </p:nvSpPr>
@@ -5651,7 +5710,7 @@
       </p:sp>
       <p:sp>
         <p:nvSpPr>
-          <p:cNvPr id="92" name="Shape 88"/>
+          <p:cNvPr id="93" name="Shape 89"/>
           <p:cNvSpPr/>
           <p:nvPr/>
         </p:nvSpPr>
@@ -5676,7 +5735,7 @@
       </p:sp>
       <p:sp>
         <p:nvSpPr>
-          <p:cNvPr id="93" name="Text 89"/>
+          <p:cNvPr id="94" name="Text 90"/>
           <p:cNvSpPr txBox="1"/>
           <p:nvPr/>
         </p:nvSpPr>
@@ -5735,7 +5794,7 @@
       </p:sp>
       <p:sp>
         <p:nvSpPr>
-          <p:cNvPr id="94" name="Shape 90"/>
+          <p:cNvPr id="95" name="Shape 91"/>
           <p:cNvSpPr/>
           <p:nvPr/>
         </p:nvSpPr>
@@ -5760,7 +5819,7 @@
       </p:sp>
       <p:sp>
         <p:nvSpPr>
-          <p:cNvPr id="95" name="Text 91"/>
+          <p:cNvPr id="96" name="Text 92"/>
           <p:cNvSpPr txBox="1"/>
           <p:nvPr/>
         </p:nvSpPr>
@@ -5819,7 +5878,7 @@
       </p:sp>
       <p:sp>
         <p:nvSpPr>
-          <p:cNvPr id="96" name="Shape 92"/>
+          <p:cNvPr id="97" name="Shape 93"/>
           <p:cNvSpPr/>
           <p:nvPr/>
         </p:nvSpPr>
@@ -5844,7 +5903,7 @@
       </p:sp>
       <p:sp>
         <p:nvSpPr>
-          <p:cNvPr id="97" name="Text 93"/>
+          <p:cNvPr id="98" name="Text 94"/>
           <p:cNvSpPr txBox="1"/>
           <p:nvPr/>
         </p:nvSpPr>
@@ -5903,7 +5962,7 @@
       </p:sp>
       <p:sp>
         <p:nvSpPr>
-          <p:cNvPr id="98" name="Shape 94"/>
+          <p:cNvPr id="99" name="Shape 95"/>
           <p:cNvSpPr/>
           <p:nvPr/>
         </p:nvSpPr>
@@ -5926,7 +5985,7 @@
       </p:sp>
       <p:sp>
         <p:nvSpPr>
-          <p:cNvPr id="99" name="Text 95"/>
+          <p:cNvPr id="100" name="Text 96"/>
           <p:cNvSpPr txBox="1"/>
           <p:nvPr/>
         </p:nvSpPr>
@@ -8471,7 +8530,7 @@
         </p:nvSpPr>
         <p:spPr>
           <a:xfrm>
-            <a:off x="5298934" y="5030983"/>
+            <a:off x="5298934" y="4969828"/>
             <a:ext cx="4521737" cy="308610"/>
           </a:xfrm>
           <a:prstGeom prst="rect">
@@ -8530,7 +8589,7 @@
         </p:nvSpPr>
         <p:spPr>
           <a:xfrm>
-            <a:off x="5298934" y="5505193"/>
+            <a:off x="5298934" y="5382884"/>
             <a:ext cx="4521737" cy="308610"/>
           </a:xfrm>
           <a:prstGeom prst="rect">
@@ -8558,7 +8617,7 @@
                 <a:ea typeface="Poppins" pitchFamily="34" charset="-122"/>
                 <a:cs typeface="Poppins" pitchFamily="34" charset="-120"/>
               </a:rPr>
-              <a:t>The story is cost per schooner at home against a pub schooner at $10 to $18. </a:t>
+              <a:t>The story is cost per schooner at home against a pub schooner at $12 to $18. </a:t>
             </a:r>
             <a:pPr indent="0" marL="0">
               <a:lnSpc>
@@ -8589,7 +8648,7 @@
         </p:nvSpPr>
         <p:spPr>
           <a:xfrm>
-            <a:off x="5298934" y="5979403"/>
+            <a:off x="5298934" y="5795939"/>
             <a:ext cx="4521737" cy="308610"/>
           </a:xfrm>
           <a:prstGeom prst="rect">
@@ -8642,7 +8701,66 @@
       </p:sp>
       <p:sp>
         <p:nvSpPr>
-          <p:cNvPr id="48" name="Shape 44"/>
+          <p:cNvPr id="48" name="Text 44"/>
+          <p:cNvSpPr txBox="1"/>
+          <p:nvPr/>
+        </p:nvSpPr>
+        <p:spPr>
+          <a:xfrm>
+            <a:off x="5298934" y="6208995"/>
+            <a:ext cx="4521737" cy="462915"/>
+          </a:xfrm>
+          <a:prstGeom prst="rect">
+            <a:avLst/>
+          </a:prstGeom>
+          <a:noFill/>
+          <a:ln/>
+        </p:spPr>
+        <p:txBody>
+          <a:bodyPr wrap="square" lIns="0" tIns="0" rIns="0" bIns="0" rtlCol="0" anchor="t"/>
+          <a:lstStyle/>
+          <a:p>
+            <a:pPr indent="0" marL="0">
+              <a:lnSpc>
+                <a:spcPts val="1215"/>
+              </a:lnSpc>
+              <a:buNone/>
+            </a:pPr>
+            <a:r>
+              <a:rPr lang="en-US" sz="810" b="1" dirty="0">
+                <a:solidFill>
+                  <a:srgbClr val="0E171F"/>
+                </a:solidFill>
+                <a:latin typeface="Poppins" pitchFamily="34" charset="0"/>
+                <a:ea typeface="Poppins" pitchFamily="34" charset="-122"/>
+                <a:cs typeface="Poppins" pitchFamily="34" charset="-120"/>
+              </a:rPr>
+              <a:t>Two membership programmes are running against one business. </a:t>
+            </a:r>
+            <a:pPr indent="0" marL="0">
+              <a:lnSpc>
+                <a:spcPts val="1215"/>
+              </a:lnSpc>
+              <a:buNone/>
+            </a:pPr>
+            <a:r>
+              <a:rPr lang="en-US" sz="810" dirty="0">
+                <a:solidFill>
+                  <a:srgbClr val="4A5565"/>
+                </a:solidFill>
+                <a:latin typeface="Poppins" pitchFamily="34" charset="0"/>
+                <a:ea typeface="Poppins" pitchFamily="34" charset="-122"/>
+                <a:cs typeface="Poppins" pitchFamily="34" charset="-120"/>
+              </a:rPr>
+              <a:t>If the room becomes a destination and refills lead, one of them is paying for a shape the business no longer has. Redesign both around the refill, or drop one.</a:t>
+            </a:r>
+            <a:endParaRPr lang="en-US" sz="810" dirty="0"/>
+          </a:p>
+        </p:txBody>
+      </p:sp>
+      <p:sp>
+        <p:nvSpPr>
+          <p:cNvPr id="49" name="Shape 45"/>
           <p:cNvSpPr/>
           <p:nvPr/>
         </p:nvSpPr>
@@ -8665,7 +8783,7 @@
       </p:sp>
       <p:sp>
         <p:nvSpPr>
-          <p:cNvPr id="49" name="Text 45"/>
+          <p:cNvPr id="50" name="Text 46"/>
           <p:cNvSpPr txBox="1"/>
           <p:nvPr/>
         </p:nvSpPr>
@@ -8707,7 +8825,7 @@
       </p:sp>
       <p:sp>
         <p:nvSpPr>
-          <p:cNvPr id="50" name="Shape 46"/>
+          <p:cNvPr id="51" name="Shape 47"/>
           <p:cNvSpPr/>
           <p:nvPr/>
         </p:nvSpPr>
@@ -8732,7 +8850,7 @@
       </p:sp>
       <p:sp>
         <p:nvSpPr>
-          <p:cNvPr id="51" name="Text 47"/>
+          <p:cNvPr id="52" name="Text 48"/>
           <p:cNvSpPr txBox="1"/>
           <p:nvPr/>
         </p:nvSpPr>
@@ -8774,7 +8892,7 @@
       </p:sp>
       <p:sp>
         <p:nvSpPr>
-          <p:cNvPr id="52" name="Text 48"/>
+          <p:cNvPr id="53" name="Text 49"/>
           <p:cNvSpPr txBox="1"/>
           <p:nvPr/>
         </p:nvSpPr>
@@ -8808,7 +8926,7 @@
                 <a:ea typeface="Poppins" pitchFamily="34" charset="-122"/>
                 <a:cs typeface="Poppins" pitchFamily="34" charset="-120"/>
               </a:rPr>
-              <a:t>Raised by Justin. Genuinely two-sided, and no decision was taken.</a:t>
+              <a:t>Christy raised it. Tap That pushed back. No decision was taken.</a:t>
             </a:r>
             <a:endParaRPr lang="en-US" sz="920" dirty="0"/>
           </a:p>
@@ -8816,13 +8934,131 @@
       </p:sp>
       <p:sp>
         <p:nvSpPr>
-          <p:cNvPr id="53" name="Text 49"/>
+          <p:cNvPr id="54" name="Text 50"/>
           <p:cNvSpPr txBox="1"/>
           <p:nvPr/>
         </p:nvSpPr>
         <p:spPr>
           <a:xfrm>
             <a:off x="10158970" y="4883612"/>
+            <a:ext cx="4521737" cy="462915"/>
+          </a:xfrm>
+          <a:prstGeom prst="rect">
+            <a:avLst/>
+          </a:prstGeom>
+          <a:noFill/>
+          <a:ln/>
+        </p:spPr>
+        <p:txBody>
+          <a:bodyPr wrap="square" lIns="0" tIns="0" rIns="0" bIns="0" rtlCol="0" anchor="t"/>
+          <a:lstStyle/>
+          <a:p>
+            <a:pPr indent="0" marL="0">
+              <a:lnSpc>
+                <a:spcPts val="1215"/>
+              </a:lnSpc>
+              <a:buNone/>
+            </a:pPr>
+            <a:r>
+              <a:rPr lang="en-US" sz="810" b="1" dirty="0">
+                <a:solidFill>
+                  <a:srgbClr val="0E171F"/>
+                </a:solidFill>
+                <a:latin typeface="Poppins" pitchFamily="34" charset="0"/>
+                <a:ea typeface="Poppins" pitchFamily="34" charset="-122"/>
+                <a:cs typeface="Poppins" pitchFamily="34" charset="-120"/>
+              </a:rPr>
+              <a:t>For: </a:t>
+            </a:r>
+            <a:pPr indent="0" marL="0">
+              <a:lnSpc>
+                <a:spcPts val="1215"/>
+              </a:lnSpc>
+              <a:buNone/>
+            </a:pPr>
+            <a:r>
+              <a:rPr lang="en-US" sz="810" dirty="0">
+                <a:solidFill>
+                  <a:srgbClr val="4A5565"/>
+                </a:solidFill>
+                <a:latin typeface="Poppins" pitchFamily="34" charset="0"/>
+                <a:ea typeface="Poppins" pitchFamily="34" charset="-122"/>
+                <a:cs typeface="Poppins" pitchFamily="34" charset="-120"/>
+              </a:rPr>
+              <a:t>a bottle shop is where people who drink beer find out the brand exists at all, which no amount of keg marketing reaches. It also opens bars and restaurants that will not give up a tap, and shipping cans goes further than shipping kegs.</a:t>
+            </a:r>
+            <a:endParaRPr lang="en-US" sz="810" dirty="0"/>
+          </a:p>
+        </p:txBody>
+      </p:sp>
+      <p:sp>
+        <p:nvSpPr>
+          <p:cNvPr id="55" name="Text 51"/>
+          <p:cNvSpPr txBox="1"/>
+          <p:nvPr/>
+        </p:nvSpPr>
+        <p:spPr>
+          <a:xfrm>
+            <a:off x="10158970" y="5512127"/>
+            <a:ext cx="4521737" cy="617220"/>
+          </a:xfrm>
+          <a:prstGeom prst="rect">
+            <a:avLst/>
+          </a:prstGeom>
+          <a:noFill/>
+          <a:ln/>
+        </p:spPr>
+        <p:txBody>
+          <a:bodyPr wrap="square" lIns="0" tIns="0" rIns="0" bIns="0" rtlCol="0" anchor="t"/>
+          <a:lstStyle/>
+          <a:p>
+            <a:pPr indent="0" marL="0">
+              <a:lnSpc>
+                <a:spcPts val="1215"/>
+              </a:lnSpc>
+              <a:buNone/>
+            </a:pPr>
+            <a:r>
+              <a:rPr lang="en-US" sz="810" b="1" dirty="0">
+                <a:solidFill>
+                  <a:srgbClr val="0E171F"/>
+                </a:solidFill>
+                <a:latin typeface="Poppins" pitchFamily="34" charset="0"/>
+                <a:ea typeface="Poppins" pitchFamily="34" charset="-122"/>
+                <a:cs typeface="Poppins" pitchFamily="34" charset="-120"/>
+              </a:rPr>
+              <a:t>Against: </a:t>
+            </a:r>
+            <a:pPr indent="0" marL="0">
+              <a:lnSpc>
+                <a:spcPts val="1215"/>
+              </a:lnSpc>
+              <a:buNone/>
+            </a:pPr>
+            <a:r>
+              <a:rPr lang="en-US" sz="810" dirty="0">
+                <a:solidFill>
+                  <a:srgbClr val="4A5565"/>
+                </a:solidFill>
+                <a:latin typeface="Poppins" pitchFamily="34" charset="0"/>
+                <a:ea typeface="Poppins" pitchFamily="34" charset="-122"/>
+                <a:cs typeface="Poppins" pitchFamily="34" charset="-120"/>
+              </a:rPr>
+              <a:t>low margin, high effort, and it competes directly with the refill model this plan is built on. Tap That has already priced a small line at eight cans a minute and parked it, on the grounds that it adds a thing to a business that is not yet nailing the things it has.</a:t>
+            </a:r>
+            <a:endParaRPr lang="en-US" sz="810" dirty="0"/>
+          </a:p>
+        </p:txBody>
+      </p:sp>
+      <p:sp>
+        <p:nvSpPr>
+          <p:cNvPr id="56" name="Text 52"/>
+          <p:cNvSpPr txBox="1"/>
+          <p:nvPr/>
+        </p:nvSpPr>
+        <p:spPr>
+          <a:xfrm>
+            <a:off x="10158970" y="6294947"/>
             <a:ext cx="4521737" cy="308610"/>
           </a:xfrm>
           <a:prstGeom prst="rect">
@@ -8850,7 +9086,7 @@
                 <a:ea typeface="Poppins" pitchFamily="34" charset="-122"/>
                 <a:cs typeface="Poppins" pitchFamily="34" charset="-120"/>
               </a:rPr>
-              <a:t>For: </a:t>
+              <a:t>What would settle it: </a:t>
             </a:r>
             <a:pPr indent="0" marL="0">
               <a:lnSpc>
@@ -8867,7 +9103,7 @@
                 <a:ea typeface="Poppins" pitchFamily="34" charset="-122"/>
                 <a:cs typeface="Poppins" pitchFamily="34" charset="-120"/>
               </a:rPr>
-              <a:t>it reaches people who would never otherwise meet the brand, opens bottle shops, and opens bars and restaurants that will not give up a tap.</a:t>
+              <a:t>a costed run through the cannery contact next door, priced against Earth Brew at about $36 a four-pack. Premium small batch, not a price fight.</a:t>
             </a:r>
             <a:endParaRPr lang="en-US" sz="810" dirty="0"/>
           </a:p>
@@ -8875,125 +9111,7 @@
       </p:sp>
       <p:sp>
         <p:nvSpPr>
-          <p:cNvPr id="54" name="Text 50"/>
-          <p:cNvSpPr txBox="1"/>
-          <p:nvPr/>
-        </p:nvSpPr>
-        <p:spPr>
-          <a:xfrm>
-            <a:off x="10158970" y="5357822"/>
-            <a:ext cx="4521737" cy="308610"/>
-          </a:xfrm>
-          <a:prstGeom prst="rect">
-            <a:avLst/>
-          </a:prstGeom>
-          <a:noFill/>
-          <a:ln/>
-        </p:spPr>
-        <p:txBody>
-          <a:bodyPr wrap="square" lIns="0" tIns="0" rIns="0" bIns="0" rtlCol="0" anchor="t"/>
-          <a:lstStyle/>
-          <a:p>
-            <a:pPr indent="0" marL="0">
-              <a:lnSpc>
-                <a:spcPts val="1215"/>
-              </a:lnSpc>
-              <a:buNone/>
-            </a:pPr>
-            <a:r>
-              <a:rPr lang="en-US" sz="810" b="1" dirty="0">
-                <a:solidFill>
-                  <a:srgbClr val="0E171F"/>
-                </a:solidFill>
-                <a:latin typeface="Poppins" pitchFamily="34" charset="0"/>
-                <a:ea typeface="Poppins" pitchFamily="34" charset="-122"/>
-                <a:cs typeface="Poppins" pitchFamily="34" charset="-120"/>
-              </a:rPr>
-              <a:t>Against: </a:t>
-            </a:r>
-            <a:pPr indent="0" marL="0">
-              <a:lnSpc>
-                <a:spcPts val="1215"/>
-              </a:lnSpc>
-              <a:buNone/>
-            </a:pPr>
-            <a:r>
-              <a:rPr lang="en-US" sz="810" dirty="0">
-                <a:solidFill>
-                  <a:srgbClr val="4A5565"/>
-                </a:solidFill>
-                <a:latin typeface="Poppins" pitchFamily="34" charset="0"/>
-                <a:ea typeface="Poppins" pitchFamily="34" charset="-122"/>
-                <a:cs typeface="Poppins" pitchFamily="34" charset="-120"/>
-              </a:rPr>
-              <a:t>low margin, high effort, and it competes directly with the refill model this plan is built on.</a:t>
-            </a:r>
-            <a:endParaRPr lang="en-US" sz="810" dirty="0"/>
-          </a:p>
-        </p:txBody>
-      </p:sp>
-      <p:sp>
-        <p:nvSpPr>
-          <p:cNvPr id="55" name="Text 51"/>
-          <p:cNvSpPr txBox="1"/>
-          <p:nvPr/>
-        </p:nvSpPr>
-        <p:spPr>
-          <a:xfrm>
-            <a:off x="10158970" y="5832032"/>
-            <a:ext cx="4521737" cy="308610"/>
-          </a:xfrm>
-          <a:prstGeom prst="rect">
-            <a:avLst/>
-          </a:prstGeom>
-          <a:noFill/>
-          <a:ln/>
-        </p:spPr>
-        <p:txBody>
-          <a:bodyPr wrap="square" lIns="0" tIns="0" rIns="0" bIns="0" rtlCol="0" anchor="t"/>
-          <a:lstStyle/>
-          <a:p>
-            <a:pPr indent="0" marL="0">
-              <a:lnSpc>
-                <a:spcPts val="1215"/>
-              </a:lnSpc>
-              <a:buNone/>
-            </a:pPr>
-            <a:r>
-              <a:rPr lang="en-US" sz="810" b="1" dirty="0">
-                <a:solidFill>
-                  <a:srgbClr val="0E171F"/>
-                </a:solidFill>
-                <a:latin typeface="Poppins" pitchFamily="34" charset="0"/>
-                <a:ea typeface="Poppins" pitchFamily="34" charset="-122"/>
-                <a:cs typeface="Poppins" pitchFamily="34" charset="-120"/>
-              </a:rPr>
-              <a:t>What would settle it: </a:t>
-            </a:r>
-            <a:pPr indent="0" marL="0">
-              <a:lnSpc>
-                <a:spcPts val="1215"/>
-              </a:lnSpc>
-              <a:buNone/>
-            </a:pPr>
-            <a:r>
-              <a:rPr lang="en-US" sz="810" dirty="0">
-                <a:solidFill>
-                  <a:srgbClr val="4A5565"/>
-                </a:solidFill>
-                <a:latin typeface="Poppins" pitchFamily="34" charset="0"/>
-                <a:ea typeface="Poppins" pitchFamily="34" charset="-122"/>
-                <a:cs typeface="Poppins" pitchFamily="34" charset="-120"/>
-              </a:rPr>
-              <a:t>a costed run through the cannery contact next door, priced against Earth Brew at about $36 a four-pack. Premium small batch, not a price fight.</a:t>
-            </a:r>
-            <a:endParaRPr lang="en-US" sz="810" dirty="0"/>
-          </a:p>
-        </p:txBody>
-      </p:sp>
-      <p:sp>
-        <p:nvSpPr>
-          <p:cNvPr id="56" name="Shape 52"/>
+          <p:cNvPr id="57" name="Shape 53"/>
           <p:cNvSpPr/>
           <p:nvPr/>
         </p:nvSpPr>
@@ -9016,7 +9134,7 @@
       </p:sp>
       <p:sp>
         <p:nvSpPr>
-          <p:cNvPr id="57" name="Text 53"/>
+          <p:cNvPr id="58" name="Text 54"/>
           <p:cNvSpPr txBox="1"/>
           <p:nvPr/>
         </p:nvSpPr>
@@ -9058,7 +9176,7 @@
       </p:sp>
       <p:sp>
         <p:nvSpPr>
-          <p:cNvPr id="58" name="Shape 54"/>
+          <p:cNvPr id="59" name="Shape 55"/>
           <p:cNvSpPr/>
           <p:nvPr/>
         </p:nvSpPr>
@@ -9083,7 +9201,7 @@
       </p:sp>
       <p:sp>
         <p:nvSpPr>
-          <p:cNvPr id="59" name="Text 55"/>
+          <p:cNvPr id="60" name="Text 56"/>
           <p:cNvSpPr txBox="1"/>
           <p:nvPr/>
         </p:nvSpPr>
@@ -9125,7 +9243,7 @@
       </p:sp>
       <p:sp>
         <p:nvSpPr>
-          <p:cNvPr id="60" name="Shape 56"/>
+          <p:cNvPr id="61" name="Shape 57"/>
           <p:cNvSpPr/>
           <p:nvPr/>
         </p:nvSpPr>
@@ -9150,7 +9268,7 @@
       </p:sp>
       <p:sp>
         <p:nvSpPr>
-          <p:cNvPr id="61" name="Text 57"/>
+          <p:cNvPr id="62" name="Text 58"/>
           <p:cNvSpPr txBox="1"/>
           <p:nvPr/>
         </p:nvSpPr>
@@ -9209,7 +9327,7 @@
       </p:sp>
       <p:sp>
         <p:nvSpPr>
-          <p:cNvPr id="62" name="Shape 58"/>
+          <p:cNvPr id="63" name="Shape 59"/>
           <p:cNvSpPr/>
           <p:nvPr/>
         </p:nvSpPr>
@@ -9234,7 +9352,7 @@
       </p:sp>
       <p:sp>
         <p:nvSpPr>
-          <p:cNvPr id="63" name="Text 59"/>
+          <p:cNvPr id="64" name="Text 60"/>
           <p:cNvSpPr txBox="1"/>
           <p:nvPr/>
         </p:nvSpPr>
@@ -9293,7 +9411,7 @@
       </p:sp>
       <p:sp>
         <p:nvSpPr>
-          <p:cNvPr id="64" name="Shape 60"/>
+          <p:cNvPr id="65" name="Shape 61"/>
           <p:cNvSpPr/>
           <p:nvPr/>
         </p:nvSpPr>
@@ -9318,7 +9436,7 @@
       </p:sp>
       <p:sp>
         <p:nvSpPr>
-          <p:cNvPr id="65" name="Text 61"/>
+          <p:cNvPr id="66" name="Text 62"/>
           <p:cNvSpPr txBox="1"/>
           <p:nvPr/>
         </p:nvSpPr>
@@ -9377,7 +9495,7 @@
       </p:sp>
       <p:sp>
         <p:nvSpPr>
-          <p:cNvPr id="66" name="Shape 62"/>
+          <p:cNvPr id="67" name="Shape 63"/>
           <p:cNvSpPr/>
           <p:nvPr/>
         </p:nvSpPr>
@@ -9402,7 +9520,7 @@
       </p:sp>
       <p:sp>
         <p:nvSpPr>
-          <p:cNvPr id="67" name="Text 63"/>
+          <p:cNvPr id="68" name="Text 64"/>
           <p:cNvSpPr txBox="1"/>
           <p:nvPr/>
         </p:nvSpPr>
@@ -9461,7 +9579,7 @@
       </p:sp>
       <p:sp>
         <p:nvSpPr>
-          <p:cNvPr id="68" name="Shape 64"/>
+          <p:cNvPr id="69" name="Shape 65"/>
           <p:cNvSpPr/>
           <p:nvPr/>
         </p:nvSpPr>
@@ -9486,7 +9604,7 @@
       </p:sp>
       <p:sp>
         <p:nvSpPr>
-          <p:cNvPr id="69" name="Text 65"/>
+          <p:cNvPr id="70" name="Text 66"/>
           <p:cNvSpPr txBox="1"/>
           <p:nvPr/>
         </p:nvSpPr>
@@ -9545,7 +9663,7 @@
       </p:sp>
       <p:sp>
         <p:nvSpPr>
-          <p:cNvPr id="70" name="Shape 66"/>
+          <p:cNvPr id="71" name="Shape 67"/>
           <p:cNvSpPr/>
           <p:nvPr/>
         </p:nvSpPr>
@@ -9570,7 +9688,7 @@
       </p:sp>
       <p:sp>
         <p:nvSpPr>
-          <p:cNvPr id="71" name="Text 67"/>
+          <p:cNvPr id="72" name="Text 68"/>
           <p:cNvSpPr txBox="1"/>
           <p:nvPr/>
         </p:nvSpPr>
@@ -9612,7 +9730,7 @@
       </p:sp>
       <p:sp>
         <p:nvSpPr>
-          <p:cNvPr id="72" name="Shape 68"/>
+          <p:cNvPr id="73" name="Shape 69"/>
           <p:cNvSpPr/>
           <p:nvPr/>
         </p:nvSpPr>
@@ -9637,7 +9755,7 @@
       </p:sp>
       <p:sp>
         <p:nvSpPr>
-          <p:cNvPr id="73" name="Text 69"/>
+          <p:cNvPr id="74" name="Text 70"/>
           <p:cNvSpPr txBox="1"/>
           <p:nvPr/>
         </p:nvSpPr>
@@ -9696,7 +9814,7 @@
       </p:sp>
       <p:sp>
         <p:nvSpPr>
-          <p:cNvPr id="74" name="Shape 70"/>
+          <p:cNvPr id="75" name="Shape 71"/>
           <p:cNvSpPr/>
           <p:nvPr/>
         </p:nvSpPr>
@@ -9721,7 +9839,7 @@
       </p:sp>
       <p:sp>
         <p:nvSpPr>
-          <p:cNvPr id="75" name="Text 71"/>
+          <p:cNvPr id="76" name="Text 72"/>
           <p:cNvSpPr txBox="1"/>
           <p:nvPr/>
         </p:nvSpPr>
@@ -9780,7 +9898,7 @@
       </p:sp>
       <p:sp>
         <p:nvSpPr>
-          <p:cNvPr id="76" name="Shape 72"/>
+          <p:cNvPr id="77" name="Shape 73"/>
           <p:cNvSpPr/>
           <p:nvPr/>
         </p:nvSpPr>
@@ -9805,7 +9923,7 @@
       </p:sp>
       <p:sp>
         <p:nvSpPr>
-          <p:cNvPr id="77" name="Text 73"/>
+          <p:cNvPr id="78" name="Text 74"/>
           <p:cNvSpPr txBox="1"/>
           <p:nvPr/>
         </p:nvSpPr>
@@ -9864,7 +9982,7 @@
       </p:sp>
       <p:sp>
         <p:nvSpPr>
-          <p:cNvPr id="78" name="Shape 74"/>
+          <p:cNvPr id="79" name="Shape 75"/>
           <p:cNvSpPr/>
           <p:nvPr/>
         </p:nvSpPr>
@@ -9889,7 +10007,7 @@
       </p:sp>
       <p:sp>
         <p:nvSpPr>
-          <p:cNvPr id="79" name="Text 75"/>
+          <p:cNvPr id="80" name="Text 76"/>
           <p:cNvSpPr txBox="1"/>
           <p:nvPr/>
         </p:nvSpPr>
@@ -9948,7 +10066,7 @@
       </p:sp>
       <p:sp>
         <p:nvSpPr>
-          <p:cNvPr id="80" name="Shape 76"/>
+          <p:cNvPr id="81" name="Shape 77"/>
           <p:cNvSpPr/>
           <p:nvPr/>
         </p:nvSpPr>
@@ -9971,7 +10089,7 @@
       </p:sp>
       <p:sp>
         <p:nvSpPr>
-          <p:cNvPr id="81" name="Text 77"/>
+          <p:cNvPr id="82" name="Text 78"/>
           <p:cNvSpPr txBox="1"/>
           <p:nvPr/>
         </p:nvSpPr>
@@ -10535,7 +10653,7 @@
         </p:nvSpPr>
         <p:spPr>
           <a:xfrm>
-            <a:off x="438898" y="1988282"/>
+            <a:off x="438898" y="1928317"/>
             <a:ext cx="5736746" cy="308610"/>
           </a:xfrm>
           <a:prstGeom prst="rect">
@@ -10577,7 +10695,7 @@
         </p:nvSpPr>
         <p:spPr>
           <a:xfrm>
-            <a:off x="438898" y="2462492"/>
+            <a:off x="438898" y="2342562"/>
             <a:ext cx="5736746" cy="308610"/>
           </a:xfrm>
           <a:prstGeom prst="rect">
@@ -10613,7 +10731,66 @@
       </p:sp>
       <p:sp>
         <p:nvSpPr>
-          <p:cNvPr id="19" name="Shape 16"/>
+          <p:cNvPr id="19" name="Text 16"/>
+          <p:cNvSpPr txBox="1"/>
+          <p:nvPr/>
+        </p:nvSpPr>
+        <p:spPr>
+          <a:xfrm>
+            <a:off x="438898" y="2756807"/>
+            <a:ext cx="5736746" cy="462915"/>
+          </a:xfrm>
+          <a:prstGeom prst="rect">
+            <a:avLst/>
+          </a:prstGeom>
+          <a:noFill/>
+          <a:ln/>
+        </p:spPr>
+        <p:txBody>
+          <a:bodyPr wrap="square" lIns="0" tIns="0" rIns="0" bIns="0" rtlCol="0" anchor="t"/>
+          <a:lstStyle/>
+          <a:p>
+            <a:pPr indent="0" marL="0">
+              <a:lnSpc>
+                <a:spcPts val="1215"/>
+              </a:lnSpc>
+              <a:buNone/>
+            </a:pPr>
+            <a:r>
+              <a:rPr lang="en-US" sz="810" b="1" dirty="0">
+                <a:solidFill>
+                  <a:srgbClr val="0E171F"/>
+                </a:solidFill>
+                <a:latin typeface="Poppins" pitchFamily="34" charset="0"/>
+                <a:ea typeface="Poppins" pitchFamily="34" charset="-122"/>
+                <a:cs typeface="Poppins" pitchFamily="34" charset="-120"/>
+              </a:rPr>
+              <a:t>Look for what the category does badly, not what it does well. </a:t>
+            </a:r>
+            <a:pPr indent="0" marL="0">
+              <a:lnSpc>
+                <a:spcPts val="1215"/>
+              </a:lnSpc>
+              <a:buNone/>
+            </a:pPr>
+            <a:r>
+              <a:rPr lang="en-US" sz="810" dirty="0">
+                <a:solidFill>
+                  <a:srgbClr val="4A5565"/>
+                </a:solidFill>
+                <a:latin typeface="Poppins" pitchFamily="34" charset="0"/>
+                <a:ea typeface="Poppins" pitchFamily="34" charset="-122"/>
+                <a:cs typeface="Poppins" pitchFamily="34" charset="-120"/>
+              </a:rPr>
+              <a:t>Christy's example was a New York restaurant that benchmarked where everyone else was weakest, found it was beer, and made beer the thing it celebrated. The pub does beer at home badly. That is the same gap.</a:t>
+            </a:r>
+            <a:endParaRPr lang="en-US" sz="810" dirty="0"/>
+          </a:p>
+        </p:txBody>
+      </p:sp>
+      <p:sp>
+        <p:nvSpPr>
+          <p:cNvPr id="20" name="Shape 17"/>
           <p:cNvSpPr/>
           <p:nvPr/>
         </p:nvSpPr>
@@ -10636,7 +10813,7 @@
       </p:sp>
       <p:sp>
         <p:nvSpPr>
-          <p:cNvPr id="20" name="Text 17"/>
+          <p:cNvPr id="21" name="Text 18"/>
           <p:cNvSpPr txBox="1"/>
           <p:nvPr/>
         </p:nvSpPr>
@@ -10678,7 +10855,7 @@
       </p:sp>
       <p:sp>
         <p:nvSpPr>
-          <p:cNvPr id="21" name="Shape 18"/>
+          <p:cNvPr id="22" name="Shape 19"/>
           <p:cNvSpPr/>
           <p:nvPr/>
         </p:nvSpPr>
@@ -10703,7 +10880,7 @@
       </p:sp>
       <p:sp>
         <p:nvSpPr>
-          <p:cNvPr id="22" name="Text 19"/>
+          <p:cNvPr id="23" name="Text 20"/>
           <p:cNvSpPr txBox="1"/>
           <p:nvPr/>
         </p:nvSpPr>
@@ -10745,7 +10922,7 @@
       </p:sp>
       <p:sp>
         <p:nvSpPr>
-          <p:cNvPr id="23" name="Text 20"/>
+          <p:cNvPr id="24" name="Text 21"/>
           <p:cNvSpPr txBox="1"/>
           <p:nvPr/>
         </p:nvSpPr>
@@ -10787,7 +10964,7 @@
       </p:sp>
       <p:sp>
         <p:nvSpPr>
-          <p:cNvPr id="24" name="Text 21"/>
+          <p:cNvPr id="25" name="Text 22"/>
           <p:cNvSpPr txBox="1"/>
           <p:nvPr/>
         </p:nvSpPr>
@@ -10838,7 +11015,7 @@
                 <a:ea typeface="Poppins" pitchFamily="34" charset="-122"/>
                 <a:cs typeface="Poppins" pitchFamily="34" charset="-120"/>
               </a:rPr>
-              <a:t>$10 to $18 pub schooner</a:t>
+              <a:t>$12 to $18 pub schooner</a:t>
             </a:r>
             <a:pPr indent="0" marL="0">
               <a:lnSpc>
@@ -10863,7 +11040,7 @@
       </p:sp>
       <p:sp>
         <p:nvSpPr>
-          <p:cNvPr id="25" name="Text 22"/>
+          <p:cNvPr id="26" name="Text 23"/>
           <p:cNvSpPr txBox="1"/>
           <p:nvPr/>
         </p:nvSpPr>
@@ -10922,7 +11099,7 @@
       </p:sp>
       <p:sp>
         <p:nvSpPr>
-          <p:cNvPr id="26" name="Text 23"/>
+          <p:cNvPr id="27" name="Text 24"/>
           <p:cNvSpPr txBox="1"/>
           <p:nvPr/>
         </p:nvSpPr>
@@ -10981,7 +11158,7 @@
       </p:sp>
       <p:sp>
         <p:nvSpPr>
-          <p:cNvPr id="27" name="Shape 24"/>
+          <p:cNvPr id="28" name="Shape 25"/>
           <p:cNvSpPr/>
           <p:nvPr/>
         </p:nvSpPr>
@@ -11004,7 +11181,7 @@
       </p:sp>
       <p:sp>
         <p:nvSpPr>
-          <p:cNvPr id="28" name="Text 25"/>
+          <p:cNvPr id="29" name="Text 26"/>
           <p:cNvSpPr txBox="1"/>
           <p:nvPr/>
         </p:nvSpPr>
@@ -11046,7 +11223,7 @@
       </p:sp>
       <p:sp>
         <p:nvSpPr>
-          <p:cNvPr id="29" name="Shape 26"/>
+          <p:cNvPr id="30" name="Shape 27"/>
           <p:cNvSpPr/>
           <p:nvPr/>
         </p:nvSpPr>
@@ -11071,7 +11248,7 @@
       </p:sp>
       <p:sp>
         <p:nvSpPr>
-          <p:cNvPr id="30" name="Text 27"/>
+          <p:cNvPr id="31" name="Text 28"/>
           <p:cNvSpPr txBox="1"/>
           <p:nvPr/>
         </p:nvSpPr>
@@ -11113,7 +11290,7 @@
       </p:sp>
       <p:sp>
         <p:nvSpPr>
-          <p:cNvPr id="31" name="Text 28"/>
+          <p:cNvPr id="32" name="Text 29"/>
           <p:cNvSpPr txBox="1"/>
           <p:nvPr/>
         </p:nvSpPr>
@@ -11172,7 +11349,7 @@
       </p:sp>
       <p:sp>
         <p:nvSpPr>
-          <p:cNvPr id="32" name="Text 29"/>
+          <p:cNvPr id="33" name="Text 30"/>
           <p:cNvSpPr txBox="1"/>
           <p:nvPr/>
         </p:nvSpPr>
@@ -11231,7 +11408,7 @@
       </p:sp>
       <p:sp>
         <p:nvSpPr>
-          <p:cNvPr id="33" name="Text 30"/>
+          <p:cNvPr id="34" name="Text 31"/>
           <p:cNvSpPr txBox="1"/>
           <p:nvPr/>
         </p:nvSpPr>
@@ -11290,7 +11467,7 @@
       </p:sp>
       <p:sp>
         <p:nvSpPr>
-          <p:cNvPr id="34" name="Shape 31"/>
+          <p:cNvPr id="35" name="Shape 32"/>
           <p:cNvSpPr/>
           <p:nvPr/>
         </p:nvSpPr>
@@ -11313,7 +11490,7 @@
       </p:sp>
       <p:sp>
         <p:nvSpPr>
-          <p:cNvPr id="35" name="Text 32"/>
+          <p:cNvPr id="36" name="Text 33"/>
           <p:cNvSpPr txBox="1"/>
           <p:nvPr/>
         </p:nvSpPr>
@@ -11355,7 +11532,7 @@
       </p:sp>
       <p:sp>
         <p:nvSpPr>
-          <p:cNvPr id="36" name="Shape 33"/>
+          <p:cNvPr id="37" name="Shape 34"/>
           <p:cNvSpPr/>
           <p:nvPr/>
         </p:nvSpPr>
@@ -11380,7 +11557,7 @@
       </p:sp>
       <p:sp>
         <p:nvSpPr>
-          <p:cNvPr id="37" name="Text 34"/>
+          <p:cNvPr id="38" name="Text 35"/>
           <p:cNvSpPr txBox="1"/>
           <p:nvPr/>
         </p:nvSpPr>
@@ -11422,7 +11599,7 @@
       </p:sp>
       <p:sp>
         <p:nvSpPr>
-          <p:cNvPr id="38" name="Text 35"/>
+          <p:cNvPr id="39" name="Text 36"/>
           <p:cNvSpPr txBox="1"/>
           <p:nvPr/>
         </p:nvSpPr>
@@ -11464,7 +11641,7 @@
       </p:sp>
       <p:sp>
         <p:nvSpPr>
-          <p:cNvPr id="39" name="Text 36"/>
+          <p:cNvPr id="40" name="Text 37"/>
           <p:cNvSpPr txBox="1"/>
           <p:nvPr/>
         </p:nvSpPr>
@@ -11523,7 +11700,7 @@
       </p:sp>
       <p:sp>
         <p:nvSpPr>
-          <p:cNvPr id="40" name="Text 37"/>
+          <p:cNvPr id="41" name="Text 38"/>
           <p:cNvSpPr txBox="1"/>
           <p:nvPr/>
         </p:nvSpPr>
@@ -11582,7 +11759,7 @@
       </p:sp>
       <p:sp>
         <p:nvSpPr>
-          <p:cNvPr id="41" name="Text 38"/>
+          <p:cNvPr id="42" name="Text 39"/>
           <p:cNvSpPr txBox="1"/>
           <p:nvPr/>
         </p:nvSpPr>
@@ -11641,7 +11818,7 @@
       </p:sp>
       <p:sp>
         <p:nvSpPr>
-          <p:cNvPr id="42" name="Shape 39"/>
+          <p:cNvPr id="43" name="Shape 40"/>
           <p:cNvSpPr/>
           <p:nvPr/>
         </p:nvSpPr>
@@ -11664,7 +11841,7 @@
       </p:sp>
       <p:sp>
         <p:nvSpPr>
-          <p:cNvPr id="43" name="Text 40"/>
+          <p:cNvPr id="44" name="Text 41"/>
           <p:cNvSpPr txBox="1"/>
           <p:nvPr/>
         </p:nvSpPr>
@@ -11706,7 +11883,7 @@
       </p:sp>
       <p:sp>
         <p:nvSpPr>
-          <p:cNvPr id="44" name="Shape 41"/>
+          <p:cNvPr id="45" name="Shape 42"/>
           <p:cNvSpPr/>
           <p:nvPr/>
         </p:nvSpPr>
@@ -11731,7 +11908,7 @@
       </p:sp>
       <p:sp>
         <p:nvSpPr>
-          <p:cNvPr id="45" name="Text 42"/>
+          <p:cNvPr id="46" name="Text 43"/>
           <p:cNvSpPr txBox="1"/>
           <p:nvPr/>
         </p:nvSpPr>
@@ -11773,7 +11950,7 @@
       </p:sp>
       <p:sp>
         <p:nvSpPr>
-          <p:cNvPr id="46" name="Shape 43"/>
+          <p:cNvPr id="47" name="Shape 44"/>
           <p:cNvSpPr/>
           <p:nvPr/>
         </p:nvSpPr>
@@ -11798,7 +11975,7 @@
       </p:sp>
       <p:sp>
         <p:nvSpPr>
-          <p:cNvPr id="47" name="Text 44"/>
+          <p:cNvPr id="48" name="Text 45"/>
           <p:cNvSpPr txBox="1"/>
           <p:nvPr/>
         </p:nvSpPr>
@@ -11857,7 +12034,7 @@
       </p:sp>
       <p:sp>
         <p:nvSpPr>
-          <p:cNvPr id="48" name="Shape 45"/>
+          <p:cNvPr id="49" name="Shape 46"/>
           <p:cNvSpPr/>
           <p:nvPr/>
         </p:nvSpPr>
@@ -11882,7 +12059,7 @@
       </p:sp>
       <p:sp>
         <p:nvSpPr>
-          <p:cNvPr id="49" name="Text 46"/>
+          <p:cNvPr id="50" name="Text 47"/>
           <p:cNvSpPr txBox="1"/>
           <p:nvPr/>
         </p:nvSpPr>
@@ -11941,7 +12118,7 @@
       </p:sp>
       <p:sp>
         <p:nvSpPr>
-          <p:cNvPr id="50" name="Shape 47"/>
+          <p:cNvPr id="51" name="Shape 48"/>
           <p:cNvSpPr/>
           <p:nvPr/>
         </p:nvSpPr>
@@ -11966,7 +12143,7 @@
       </p:sp>
       <p:sp>
         <p:nvSpPr>
-          <p:cNvPr id="51" name="Text 48"/>
+          <p:cNvPr id="52" name="Text 49"/>
           <p:cNvSpPr txBox="1"/>
           <p:nvPr/>
         </p:nvSpPr>
@@ -12025,7 +12202,7 @@
       </p:sp>
       <p:sp>
         <p:nvSpPr>
-          <p:cNvPr id="52" name="Shape 49"/>
+          <p:cNvPr id="53" name="Shape 50"/>
           <p:cNvSpPr/>
           <p:nvPr/>
         </p:nvSpPr>
@@ -12050,7 +12227,7 @@
       </p:sp>
       <p:sp>
         <p:nvSpPr>
-          <p:cNvPr id="53" name="Text 50"/>
+          <p:cNvPr id="54" name="Text 51"/>
           <p:cNvSpPr txBox="1"/>
           <p:nvPr/>
         </p:nvSpPr>
@@ -12109,7 +12286,7 @@
       </p:sp>
       <p:sp>
         <p:nvSpPr>
-          <p:cNvPr id="54" name="Shape 51"/>
+          <p:cNvPr id="55" name="Shape 52"/>
           <p:cNvSpPr/>
           <p:nvPr/>
         </p:nvSpPr>
@@ -12134,7 +12311,7 @@
       </p:sp>
       <p:sp>
         <p:nvSpPr>
-          <p:cNvPr id="55" name="Text 52"/>
+          <p:cNvPr id="56" name="Text 53"/>
           <p:cNvSpPr txBox="1"/>
           <p:nvPr/>
         </p:nvSpPr>
@@ -12193,7 +12370,7 @@
       </p:sp>
       <p:sp>
         <p:nvSpPr>
-          <p:cNvPr id="56" name="Shape 53"/>
+          <p:cNvPr id="57" name="Shape 54"/>
           <p:cNvSpPr/>
           <p:nvPr/>
         </p:nvSpPr>
@@ -12218,7 +12395,7 @@
       </p:sp>
       <p:sp>
         <p:nvSpPr>
-          <p:cNvPr id="57" name="Text 54"/>
+          <p:cNvPr id="58" name="Text 55"/>
           <p:cNvSpPr txBox="1"/>
           <p:nvPr/>
         </p:nvSpPr>
@@ -12260,7 +12437,7 @@
       </p:sp>
       <p:sp>
         <p:nvSpPr>
-          <p:cNvPr id="58" name="Shape 55"/>
+          <p:cNvPr id="59" name="Shape 56"/>
           <p:cNvSpPr/>
           <p:nvPr/>
         </p:nvSpPr>
@@ -12285,7 +12462,7 @@
       </p:sp>
       <p:sp>
         <p:nvSpPr>
-          <p:cNvPr id="59" name="Text 56"/>
+          <p:cNvPr id="60" name="Text 57"/>
           <p:cNvSpPr txBox="1"/>
           <p:nvPr/>
         </p:nvSpPr>
@@ -12344,7 +12521,7 @@
       </p:sp>
       <p:sp>
         <p:nvSpPr>
-          <p:cNvPr id="60" name="Shape 57"/>
+          <p:cNvPr id="61" name="Shape 58"/>
           <p:cNvSpPr/>
           <p:nvPr/>
         </p:nvSpPr>
@@ -12369,7 +12546,7 @@
       </p:sp>
       <p:sp>
         <p:nvSpPr>
-          <p:cNvPr id="61" name="Text 58"/>
+          <p:cNvPr id="62" name="Text 59"/>
           <p:cNvSpPr txBox="1"/>
           <p:nvPr/>
         </p:nvSpPr>
@@ -12428,7 +12605,7 @@
       </p:sp>
       <p:sp>
         <p:nvSpPr>
-          <p:cNvPr id="62" name="Shape 59"/>
+          <p:cNvPr id="63" name="Shape 60"/>
           <p:cNvSpPr/>
           <p:nvPr/>
         </p:nvSpPr>
@@ -12453,7 +12630,7 @@
       </p:sp>
       <p:sp>
         <p:nvSpPr>
-          <p:cNvPr id="63" name="Text 60"/>
+          <p:cNvPr id="64" name="Text 61"/>
           <p:cNvSpPr txBox="1"/>
           <p:nvPr/>
         </p:nvSpPr>
@@ -12512,7 +12689,7 @@
       </p:sp>
       <p:sp>
         <p:nvSpPr>
-          <p:cNvPr id="64" name="Shape 61"/>
+          <p:cNvPr id="65" name="Shape 62"/>
           <p:cNvSpPr/>
           <p:nvPr/>
         </p:nvSpPr>
@@ -12537,7 +12714,7 @@
       </p:sp>
       <p:sp>
         <p:nvSpPr>
-          <p:cNvPr id="65" name="Text 62"/>
+          <p:cNvPr id="66" name="Text 63"/>
           <p:cNvSpPr txBox="1"/>
           <p:nvPr/>
         </p:nvSpPr>
@@ -12596,7 +12773,7 @@
       </p:sp>
       <p:sp>
         <p:nvSpPr>
-          <p:cNvPr id="66" name="Shape 63"/>
+          <p:cNvPr id="67" name="Shape 64"/>
           <p:cNvSpPr/>
           <p:nvPr/>
         </p:nvSpPr>
@@ -12621,7 +12798,7 @@
       </p:sp>
       <p:sp>
         <p:nvSpPr>
-          <p:cNvPr id="67" name="Text 64"/>
+          <p:cNvPr id="68" name="Text 65"/>
           <p:cNvSpPr txBox="1"/>
           <p:nvPr/>
         </p:nvSpPr>
@@ -12663,7 +12840,7 @@
       </p:sp>
       <p:sp>
         <p:nvSpPr>
-          <p:cNvPr id="68" name="Text 65"/>
+          <p:cNvPr id="69" name="Text 66"/>
           <p:cNvSpPr txBox="1"/>
           <p:nvPr/>
         </p:nvSpPr>
@@ -12722,7 +12899,7 @@
       </p:sp>
       <p:sp>
         <p:nvSpPr>
-          <p:cNvPr id="69" name="Text 66"/>
+          <p:cNvPr id="70" name="Text 67"/>
           <p:cNvSpPr txBox="1"/>
           <p:nvPr/>
         </p:nvSpPr>
@@ -12781,7 +12958,7 @@
       </p:sp>
       <p:sp>
         <p:nvSpPr>
-          <p:cNvPr id="70" name="Text 67"/>
+          <p:cNvPr id="71" name="Text 68"/>
           <p:cNvSpPr txBox="1"/>
           <p:nvPr/>
         </p:nvSpPr>
@@ -12840,7 +13017,7 @@
       </p:sp>
       <p:sp>
         <p:nvSpPr>
-          <p:cNvPr id="71" name="Shape 68"/>
+          <p:cNvPr id="72" name="Shape 69"/>
           <p:cNvSpPr/>
           <p:nvPr/>
         </p:nvSpPr>
@@ -12863,7 +13040,7 @@
       </p:sp>
       <p:sp>
         <p:nvSpPr>
-          <p:cNvPr id="72" name="Text 69"/>
+          <p:cNvPr id="73" name="Text 70"/>
           <p:cNvSpPr txBox="1"/>
           <p:nvPr/>
         </p:nvSpPr>
@@ -14457,7 +14634,7 @@
                 <a:gridCol w="3011009"/>
                 <a:gridCol w="3940746"/>
               </a:tblGrid>
-              <a:tr h="382850">
+              <a:tr h="399629">
                 <a:tc>
                   <a:txBody>
                     <a:bodyPr/>
@@ -14565,7 +14742,7 @@
                   </a:tcPr>
                 </a:tc>
               </a:tr>
-              <a:tr h="519325">
+              <a:tr h="536103">
                 <a:tc>
                   <a:txBody>
                     <a:bodyPr/>
@@ -14697,7 +14874,7 @@
                   </a:tcPr>
                 </a:tc>
               </a:tr>
-              <a:tr h="401875">
+              <a:tr h="418653">
                 <a:tc>
                   <a:txBody>
                     <a:bodyPr/>
@@ -14805,7 +14982,7 @@
                   </a:tcPr>
                 </a:tc>
               </a:tr>
-              <a:tr h="519325">
+              <a:tr h="418653">
                 <a:tc>
                   <a:txBody>
                     <a:bodyPr/>
@@ -14827,30 +15004,6 @@
                           <a:cs typeface="Poppins" pitchFamily="34" charset="-120"/>
                         </a:rPr>
                         <a:t>Lapsed, cutting back</a:t>
-                      </a:r>
-                      <a:endParaRPr lang="en-US" sz="680" dirty="0">
-                        <a:latin typeface="Poppins" charset="0"/>
-                        <a:ea typeface="Poppins" charset="0"/>
-                        <a:cs typeface="Poppins" charset="0"/>
-                      </a:endParaRPr>
-                    </a:p>
-                    <a:p>
-                      <a:pPr algn="l" indent="0" marL="0">
-                        <a:lnSpc>
-                          <a:spcPts val="925"/>
-                        </a:lnSpc>
-                        <a:buNone/>
-                      </a:pPr>
-                      <a:r>
-                        <a:rPr lang="en-US" sz="680" dirty="0">
-                          <a:solidFill>
-                            <a:srgbClr val="4A5565"/>
-                          </a:solidFill>
-                          <a:latin typeface="Poppins" pitchFamily="34" charset="0"/>
-                          <a:ea typeface="Poppins" pitchFamily="34" charset="-122"/>
-                          <a:cs typeface="Poppins" pitchFamily="34" charset="-120"/>
-                        </a:rPr>
-                        <a:t>40% of lapsed</a:t>
                       </a:r>
                       <a:endParaRPr lang="en-US" sz="680" dirty="0">
                         <a:latin typeface="Poppins" charset="0"/>
@@ -14937,7 +15090,7 @@
                   </a:tcPr>
                 </a:tc>
               </a:tr>
-              <a:tr h="401875">
+              <a:tr h="418653">
                 <a:tc>
                   <a:txBody>
                     <a:bodyPr/>
@@ -15045,7 +15198,7 @@
                   </a:tcPr>
                 </a:tc>
               </a:tr>
-              <a:tr h="401875">
+              <a:tr h="418653">
                 <a:tc>
                   <a:txBody>
                     <a:bodyPr/>
@@ -15153,7 +15306,7 @@
                   </a:tcPr>
                 </a:tc>
               </a:tr>
-              <a:tr h="401875">
+              <a:tr h="418653">
                 <a:tc>
                   <a:txBody>
                     <a:bodyPr/>
@@ -15382,7 +15535,7 @@
         </p:nvSpPr>
         <p:spPr>
           <a:xfrm>
-            <a:off x="7728952" y="4522549"/>
+            <a:off x="7728952" y="4508661"/>
             <a:ext cx="6951755" cy="462915"/>
           </a:xfrm>
           <a:prstGeom prst="rect">
@@ -15424,7 +15577,7 @@
         </p:nvSpPr>
         <p:spPr>
           <a:xfrm>
-            <a:off x="7728952" y="5105340"/>
+            <a:off x="7728952" y="5077565"/>
             <a:ext cx="6951755" cy="150724"/>
           </a:xfrm>
           <a:prstGeom prst="rect">
@@ -15466,7 +15619,7 @@
         </p:nvSpPr>
         <p:spPr>
           <a:xfrm>
-            <a:off x="7728952" y="5375940"/>
+            <a:off x="7728952" y="5334278"/>
             <a:ext cx="6951755" cy="462915"/>
           </a:xfrm>
           <a:prstGeom prst="rect">
@@ -15508,7 +15661,7 @@
         </p:nvSpPr>
         <p:spPr>
           <a:xfrm>
-            <a:off x="7728952" y="5958731"/>
+            <a:off x="7728952" y="5903181"/>
             <a:ext cx="6951755" cy="150724"/>
           </a:xfrm>
           <a:prstGeom prst="rect">
@@ -15550,8 +15703,8 @@
         </p:nvSpPr>
         <p:spPr>
           <a:xfrm>
-            <a:off x="7728952" y="6229331"/>
-            <a:ext cx="6951755" cy="308610"/>
+            <a:off x="7728952" y="6159894"/>
+            <a:ext cx="6951755" cy="462915"/>
           </a:xfrm>
           <a:prstGeom prst="rect">
             <a:avLst/>
@@ -15578,7 +15731,7 @@
                 <a:ea typeface="Poppins" pitchFamily="34" charset="-122"/>
                 <a:cs typeface="Poppins" pitchFamily="34" charset="-120"/>
               </a:rPr>
-              <a:t>Forty per cent cite cutting back, and the rest mostly just did not get around to it. One message cannot serve both. The first group needs the low and non-alcoholic range, the second needs one tap to reorder.</a:t>
+              <a:t>About 40% of refill customers lapse, and what they say is that they did not get around to it. That is friction, not a decision, and it is the most actionable segment in the base. A separate group is cutting back, and the CRM shows it. One message cannot serve both: the first needs one tap to reorder, the second needs the low and non-alcoholic range.</a:t>
             </a:r>
             <a:endParaRPr lang="en-US" sz="810" dirty="0"/>
           </a:p>
@@ -15766,8 +15919,8 @@
         </p:nvSpPr>
         <p:spPr>
           <a:xfrm>
-            <a:off x="438898" y="8247350"/>
-            <a:ext cx="4521737" cy="308610"/>
+            <a:off x="438898" y="8201059"/>
+            <a:ext cx="4521737" cy="617220"/>
           </a:xfrm>
           <a:prstGeom prst="rect">
             <a:avLst/>
@@ -15811,7 +15964,7 @@
                 <a:ea typeface="Poppins" pitchFamily="34" charset="-122"/>
                 <a:cs typeface="Poppins" pitchFamily="34" charset="-120"/>
               </a:rPr>
-              <a:t>a full-timer or a commissioned agent, targets and KPIs, a pipeline that lives in the CRM rather than in someone's head.</a:t>
+              <a:t>a full-timer or a commissioned agent, targets and KPIs, a pipeline in the CRM rather than in someone's head. The room put it at about twelve touch points before a venue buys beer, and Tap That has the first one and almost none of the eleven after it.</a:t>
             </a:r>
             <a:endParaRPr lang="en-US" sz="810" dirty="0"/>
           </a:p>
@@ -15825,7 +15978,7 @@
         </p:nvSpPr>
         <p:spPr>
           <a:xfrm>
-            <a:off x="438898" y="8705585"/>
+            <a:off x="438898" y="8921612"/>
             <a:ext cx="4521737" cy="462915"/>
           </a:xfrm>
           <a:prstGeom prst="rect">
@@ -15884,7 +16037,7 @@
         </p:nvSpPr>
         <p:spPr>
           <a:xfrm>
-            <a:off x="438898" y="9318125"/>
+            <a:off x="438898" y="9487860"/>
             <a:ext cx="4521737" cy="462915"/>
           </a:xfrm>
           <a:prstGeom prst="rect">
@@ -15929,7 +16082,7 @@
                 <a:ea typeface="Poppins" pitchFamily="34" charset="-122"/>
                 <a:cs typeface="Poppins" pitchFamily="34" charset="-120"/>
               </a:rPr>
-              <a:t>Contractual lock-in is not the same as satisfaction. Find the pain points in locked venues and build a packaged offer that fits alongside the contract, profit share included if that is what it takes.</a:t>
+              <a:t>Lock-in is not satisfaction. Venues are already forming buying groups to get around it. Find the pain points and build an offer that fits alongside the contract.</a:t>
             </a:r>
             <a:endParaRPr lang="en-US" sz="810" dirty="0"/>
           </a:p>
@@ -18472,7 +18625,7 @@
                 <a:ea typeface="Poppins" pitchFamily="34" charset="-122"/>
                 <a:cs typeface="Poppins" pitchFamily="34" charset="-120"/>
               </a:rPr>
-              <a:t>Lapsed split into cutting back and forgot</a:t>
+              <a:t>Lapsed split into forgot and cutting back</a:t>
             </a:r>
             <a:endParaRPr lang="en-US" sz="740" dirty="0"/>
           </a:p>
@@ -19407,7 +19560,7 @@
                 <a:gridCol w="2702456"/>
                 <a:gridCol w="591456"/>
               </a:tblGrid>
-              <a:tr h="319567">
+              <a:tr h="303282">
                 <a:tc>
                   <a:txBody>
                     <a:bodyPr/>
@@ -19568,7 +19721,7 @@
                   </a:tcPr>
                 </a:tc>
               </a:tr>
-              <a:tr h="449132">
+              <a:tr h="432847">
                 <a:tc>
                   <a:txBody>
                     <a:bodyPr/>
@@ -19729,7 +19882,7 @@
                   </a:tcPr>
                 </a:tc>
               </a:tr>
-              <a:tr h="335137">
+              <a:tr h="318852">
                 <a:tc>
                   <a:txBody>
                     <a:bodyPr/>
@@ -19890,7 +20043,7 @@
                   </a:tcPr>
                 </a:tc>
               </a:tr>
-              <a:tr h="335137">
+              <a:tr h="318852">
                 <a:tc>
                   <a:txBody>
                     <a:bodyPr/>
@@ -20051,7 +20204,7 @@
                   </a:tcPr>
                 </a:tc>
               </a:tr>
-              <a:tr h="335137">
+              <a:tr h="318852">
                 <a:tc>
                   <a:txBody>
                     <a:bodyPr/>
@@ -20212,7 +20365,7 @@
                   </a:tcPr>
                 </a:tc>
               </a:tr>
-              <a:tr h="335137">
+              <a:tr h="318852">
                 <a:tc>
                   <a:txBody>
                     <a:bodyPr/>
@@ -20373,7 +20526,7 @@
                   </a:tcPr>
                 </a:tc>
               </a:tr>
-              <a:tr h="335137">
+              <a:tr h="432847">
                 <a:tc>
                   <a:txBody>
                     <a:bodyPr/>
@@ -20394,7 +20547,7 @@
                           <a:ea typeface="Poppins" pitchFamily="34" charset="-122"/>
                           <a:cs typeface="Poppins" pitchFamily="34" charset="-120"/>
                         </a:rPr>
-                        <a:t>Cannery next door</a:t>
+                        <a:t>Cannery contact</a:t>
                       </a:r>
                       <a:endParaRPr lang="en-US" sz="660" dirty="0">
                         <a:latin typeface="Poppins" charset="0"/>
@@ -20447,7 +20600,7 @@
                           <a:ea typeface="Poppins" pitchFamily="34" charset="-122"/>
                           <a:cs typeface="Poppins" pitchFamily="34" charset="-120"/>
                         </a:rPr>
-                        <a:t>Costed feasibility, to settle the canning call</a:t>
+                        <a:t>Clent's neighbour, former head of the country's largest cannery. Costed feasibility</a:t>
                       </a:r>
                       <a:endParaRPr lang="en-US" sz="660" dirty="0">
                         <a:latin typeface="Poppins" charset="0"/>
@@ -21002,12 +21155,13 @@
             <a:tbl>
               <a:tblPr/>
               <a:tblGrid>
-                <a:gridCol w="2944562"/>
-                <a:gridCol w="980632"/>
-                <a:gridCol w="1888554"/>
-                <a:gridCol w="900479"/>
-                <a:gridCol w="1141657"/>
-                <a:gridCol w="1525889"/>
+                <a:gridCol w="3112742"/>
+                <a:gridCol w="1036641"/>
+                <a:gridCol w="1215982"/>
+                <a:gridCol w="993326"/>
+                <a:gridCol w="951910"/>
+                <a:gridCol w="1206863"/>
+                <a:gridCol w="864307"/>
               </a:tblGrid>
               <a:tr h="275851">
                 <a:tc>
@@ -21136,7 +21290,60 @@
                           <a:ea typeface="Poppins" pitchFamily="34" charset="-122"/>
                           <a:cs typeface="Poppins" pitchFamily="34" charset="-120"/>
                         </a:rPr>
-                        <a:t>Tap That team</a:t>
+                        <a:t>Chrissy</a:t>
+                      </a:r>
+                      <a:endParaRPr lang="en-US" sz="620" dirty="0">
+                        <a:latin typeface="Poppins" charset="0"/>
+                        <a:ea typeface="Poppins" charset="0"/>
+                        <a:cs typeface="Poppins" charset="0"/>
+                      </a:endParaRPr>
+                    </a:p>
+                  </a:txBody>
+                  <a:tcPr marL="50400" marR="50400" marT="50400" marB="50400" anchor="ctr">
+                    <a:lnL w="0" cap="flat" cmpd="sng" algn="ctr">
+                      <a:noFill/>
+                    </a:lnL>
+                    <a:lnR w="0" cap="flat" cmpd="sng" algn="ctr">
+                      <a:noFill/>
+                    </a:lnR>
+                    <a:lnT w="0" cap="flat" cmpd="sng" algn="ctr">
+                      <a:noFill/>
+                    </a:lnT>
+                    <a:lnB w="7620" cap="flat" cmpd="sng" algn="ctr">
+                      <a:solidFill>
+                        <a:srgbClr val="E3E7EC"/>
+                      </a:solidFill>
+                      <a:prstDash val="solid"/>
+                      <a:round/>
+                      <a:headEnd type="none" w="med" len="med"/>
+                      <a:tailEnd type="none" w="med" len="med"/>
+                    </a:lnB>
+                    <a:solidFill>
+                      <a:srgbClr val="0E171F"/>
+                    </a:solidFill>
+                  </a:tcPr>
+                </a:tc>
+                <a:tc>
+                  <a:txBody>
+                    <a:bodyPr/>
+                    <a:lstStyle/>
+                    <a:p>
+                      <a:pPr algn="ctr" indent="0" marL="0">
+                        <a:lnSpc>
+                          <a:spcPts val="775"/>
+                        </a:lnSpc>
+                        <a:buNone/>
+                      </a:pPr>
+                      <a:r>
+                        <a:rPr lang="en-US" sz="620" b="1" spc="62" kern="0" dirty="0">
+                          <a:solidFill>
+                            <a:srgbClr val="FFFFFF"/>
+                          </a:solidFill>
+                          <a:latin typeface="Poppins" pitchFamily="34" charset="0"/>
+                          <a:ea typeface="Poppins" pitchFamily="34" charset="-122"/>
+                          <a:cs typeface="Poppins" pitchFamily="34" charset="-120"/>
+                        </a:rPr>
+                        <a:t>Harry</a:t>
                       </a:r>
                       <a:endParaRPr lang="en-US" sz="620" dirty="0">
                         <a:latin typeface="Poppins" charset="0"/>
@@ -21295,7 +21502,7 @@
                           <a:ea typeface="Poppins" pitchFamily="34" charset="-122"/>
                           <a:cs typeface="Poppins" pitchFamily="34" charset="-120"/>
                         </a:rPr>
-                        <a:t>JP delivery</a:t>
+                        <a:t>JP</a:t>
                       </a:r>
                       <a:endParaRPr lang="en-US" sz="620" dirty="0">
                         <a:latin typeface="Poppins" charset="0"/>
@@ -21448,6 +21655,59 @@
                         <a:buNone/>
                       </a:pPr>
                       <a:r>
+                        <a:rPr lang="en-US" sz="670" b="1" dirty="0">
+                          <a:solidFill>
+                            <a:srgbClr val="0E171F"/>
+                          </a:solidFill>
+                          <a:latin typeface="Poppins" pitchFamily="34" charset="0"/>
+                          <a:ea typeface="Poppins" pitchFamily="34" charset="-122"/>
+                          <a:cs typeface="Poppins" pitchFamily="34" charset="-120"/>
+                        </a:rPr>
+                        <a:t>A</a:t>
+                      </a:r>
+                      <a:endParaRPr lang="en-US" sz="670" dirty="0">
+                        <a:latin typeface="Poppins" charset="0"/>
+                        <a:ea typeface="Poppins" charset="0"/>
+                        <a:cs typeface="Poppins" charset="0"/>
+                      </a:endParaRPr>
+                    </a:p>
+                  </a:txBody>
+                  <a:tcPr marL="50400" marR="50400" marT="50400" marB="50400" anchor="t">
+                    <a:lnL w="0" cap="flat" cmpd="sng" algn="ctr">
+                      <a:noFill/>
+                    </a:lnL>
+                    <a:lnR w="0" cap="flat" cmpd="sng" algn="ctr">
+                      <a:noFill/>
+                    </a:lnR>
+                    <a:lnT w="0" cap="flat" cmpd="sng" algn="ctr">
+                      <a:noFill/>
+                    </a:lnT>
+                    <a:lnB w="7620" cap="flat" cmpd="sng" algn="ctr">
+                      <a:solidFill>
+                        <a:srgbClr val="E3E7EC"/>
+                      </a:solidFill>
+                      <a:prstDash val="solid"/>
+                      <a:round/>
+                      <a:headEnd type="none" w="med" len="med"/>
+                      <a:tailEnd type="none" w="med" len="med"/>
+                    </a:lnB>
+                    <a:solidFill>
+                      <a:srgbClr val="F5F7FA"/>
+                    </a:solidFill>
+                  </a:tcPr>
+                </a:tc>
+                <a:tc>
+                  <a:txBody>
+                    <a:bodyPr/>
+                    <a:lstStyle/>
+                    <a:p>
+                      <a:pPr algn="ctr" indent="0" marL="0">
+                        <a:lnSpc>
+                          <a:spcPts val="911"/>
+                        </a:lnSpc>
+                        <a:buNone/>
+                      </a:pPr>
+                      <a:r>
                         <a:rPr lang="en-US" sz="670" dirty="0">
                           <a:solidFill>
                             <a:srgbClr val="4A5565"/>
@@ -21882,6 +22142,59 @@
                           <a:ea typeface="Poppins" pitchFamily="34" charset="-122"/>
                           <a:cs typeface="Poppins" pitchFamily="34" charset="-120"/>
                         </a:rPr>
+                        <a:t>C</a:t>
+                      </a:r>
+                      <a:endParaRPr lang="en-US" sz="670" dirty="0">
+                        <a:latin typeface="Poppins" charset="0"/>
+                        <a:ea typeface="Poppins" charset="0"/>
+                        <a:cs typeface="Poppins" charset="0"/>
+                      </a:endParaRPr>
+                    </a:p>
+                  </a:txBody>
+                  <a:tcPr marL="50400" marR="50400" marT="50400" marB="50400" anchor="t">
+                    <a:lnL w="0" cap="flat" cmpd="sng" algn="ctr">
+                      <a:noFill/>
+                    </a:lnL>
+                    <a:lnR w="0" cap="flat" cmpd="sng" algn="ctr">
+                      <a:noFill/>
+                    </a:lnR>
+                    <a:lnT w="0" cap="flat" cmpd="sng" algn="ctr">
+                      <a:noFill/>
+                    </a:lnT>
+                    <a:lnB w="7620" cap="flat" cmpd="sng" algn="ctr">
+                      <a:solidFill>
+                        <a:srgbClr val="E3E7EC"/>
+                      </a:solidFill>
+                      <a:prstDash val="solid"/>
+                      <a:round/>
+                      <a:headEnd type="none" w="med" len="med"/>
+                      <a:tailEnd type="none" w="med" len="med"/>
+                    </a:lnB>
+                    <a:solidFill>
+                      <a:srgbClr val="FFFFFF"/>
+                    </a:solidFill>
+                  </a:tcPr>
+                </a:tc>
+                <a:tc>
+                  <a:txBody>
+                    <a:bodyPr/>
+                    <a:lstStyle/>
+                    <a:p>
+                      <a:pPr algn="ctr" indent="0" marL="0">
+                        <a:lnSpc>
+                          <a:spcPts val="911"/>
+                        </a:lnSpc>
+                        <a:buNone/>
+                      </a:pPr>
+                      <a:r>
+                        <a:rPr lang="en-US" sz="670" dirty="0">
+                          <a:solidFill>
+                            <a:srgbClr val="4A5565"/>
+                          </a:solidFill>
+                          <a:latin typeface="Poppins" pitchFamily="34" charset="0"/>
+                          <a:ea typeface="Poppins" pitchFamily="34" charset="-122"/>
+                          <a:cs typeface="Poppins" pitchFamily="34" charset="-120"/>
+                        </a:rPr>
                         <a:t>–</a:t>
                       </a:r>
                       <a:endParaRPr lang="en-US" sz="670" dirty="0">
@@ -22096,7 +22409,60 @@
                           <a:ea typeface="Poppins" pitchFamily="34" charset="-122"/>
                           <a:cs typeface="Poppins" pitchFamily="34" charset="-120"/>
                         </a:rPr>
-                        <a:t>R</a:t>
+                        <a:t>C</a:t>
+                      </a:r>
+                      <a:endParaRPr lang="en-US" sz="670" dirty="0">
+                        <a:latin typeface="Poppins" charset="0"/>
+                        <a:ea typeface="Poppins" charset="0"/>
+                        <a:cs typeface="Poppins" charset="0"/>
+                      </a:endParaRPr>
+                    </a:p>
+                  </a:txBody>
+                  <a:tcPr marL="50400" marR="50400" marT="50400" marB="50400" anchor="t">
+                    <a:lnL w="0" cap="flat" cmpd="sng" algn="ctr">
+                      <a:noFill/>
+                    </a:lnL>
+                    <a:lnR w="0" cap="flat" cmpd="sng" algn="ctr">
+                      <a:noFill/>
+                    </a:lnR>
+                    <a:lnT w="0" cap="flat" cmpd="sng" algn="ctr">
+                      <a:noFill/>
+                    </a:lnT>
+                    <a:lnB w="7620" cap="flat" cmpd="sng" algn="ctr">
+                      <a:solidFill>
+                        <a:srgbClr val="E3E7EC"/>
+                      </a:solidFill>
+                      <a:prstDash val="solid"/>
+                      <a:round/>
+                      <a:headEnd type="none" w="med" len="med"/>
+                      <a:tailEnd type="none" w="med" len="med"/>
+                    </a:lnB>
+                    <a:solidFill>
+                      <a:srgbClr val="F5F7FA"/>
+                    </a:solidFill>
+                  </a:tcPr>
+                </a:tc>
+                <a:tc>
+                  <a:txBody>
+                    <a:bodyPr/>
+                    <a:lstStyle/>
+                    <a:p>
+                      <a:pPr algn="ctr" indent="0" marL="0">
+                        <a:lnSpc>
+                          <a:spcPts val="911"/>
+                        </a:lnSpc>
+                        <a:buNone/>
+                      </a:pPr>
+                      <a:r>
+                        <a:rPr lang="en-US" sz="670" dirty="0">
+                          <a:solidFill>
+                            <a:srgbClr val="4A5565"/>
+                          </a:solidFill>
+                          <a:latin typeface="Poppins" pitchFamily="34" charset="0"/>
+                          <a:ea typeface="Poppins" pitchFamily="34" charset="-122"/>
+                          <a:cs typeface="Poppins" pitchFamily="34" charset="-120"/>
+                        </a:rPr>
+                        <a:t>C</a:t>
                       </a:r>
                       <a:endParaRPr lang="en-US" sz="670" dirty="0">
                         <a:latin typeface="Poppins" charset="0"/>
@@ -22408,6 +22774,59 @@
                         <a:buNone/>
                       </a:pPr>
                       <a:r>
+                        <a:rPr lang="en-US" sz="670" dirty="0">
+                          <a:solidFill>
+                            <a:srgbClr val="4A5565"/>
+                          </a:solidFill>
+                          <a:latin typeface="Poppins" pitchFamily="34" charset="0"/>
+                          <a:ea typeface="Poppins" pitchFamily="34" charset="-122"/>
+                          <a:cs typeface="Poppins" pitchFamily="34" charset="-120"/>
+                        </a:rPr>
+                        <a:t>C</a:t>
+                      </a:r>
+                      <a:endParaRPr lang="en-US" sz="670" dirty="0">
+                        <a:latin typeface="Poppins" charset="0"/>
+                        <a:ea typeface="Poppins" charset="0"/>
+                        <a:cs typeface="Poppins" charset="0"/>
+                      </a:endParaRPr>
+                    </a:p>
+                  </a:txBody>
+                  <a:tcPr marL="50400" marR="50400" marT="50400" marB="50400" anchor="t">
+                    <a:lnL w="0" cap="flat" cmpd="sng" algn="ctr">
+                      <a:noFill/>
+                    </a:lnL>
+                    <a:lnR w="0" cap="flat" cmpd="sng" algn="ctr">
+                      <a:noFill/>
+                    </a:lnR>
+                    <a:lnT w="0" cap="flat" cmpd="sng" algn="ctr">
+                      <a:noFill/>
+                    </a:lnT>
+                    <a:lnB w="7620" cap="flat" cmpd="sng" algn="ctr">
+                      <a:solidFill>
+                        <a:srgbClr val="E3E7EC"/>
+                      </a:solidFill>
+                      <a:prstDash val="solid"/>
+                      <a:round/>
+                      <a:headEnd type="none" w="med" len="med"/>
+                      <a:tailEnd type="none" w="med" len="med"/>
+                    </a:lnB>
+                    <a:solidFill>
+                      <a:srgbClr val="FFFFFF"/>
+                    </a:solidFill>
+                  </a:tcPr>
+                </a:tc>
+                <a:tc>
+                  <a:txBody>
+                    <a:bodyPr/>
+                    <a:lstStyle/>
+                    <a:p>
+                      <a:pPr algn="ctr" indent="0" marL="0">
+                        <a:lnSpc>
+                          <a:spcPts val="911"/>
+                        </a:lnSpc>
+                        <a:buNone/>
+                      </a:pPr>
+                      <a:r>
                         <a:rPr lang="en-US" sz="670" b="1" dirty="0">
                           <a:solidFill>
                             <a:srgbClr val="0E171F"/>
@@ -22781,6 +23200,59 @@
                         <a:buNone/>
                       </a:pPr>
                       <a:r>
+                        <a:rPr lang="en-US" sz="670" dirty="0">
+                          <a:solidFill>
+                            <a:srgbClr val="4A5565"/>
+                          </a:solidFill>
+                          <a:latin typeface="Poppins" pitchFamily="34" charset="0"/>
+                          <a:ea typeface="Poppins" pitchFamily="34" charset="-122"/>
+                          <a:cs typeface="Poppins" pitchFamily="34" charset="-120"/>
+                        </a:rPr>
+                        <a:t>–</a:t>
+                      </a:r>
+                      <a:endParaRPr lang="en-US" sz="670" dirty="0">
+                        <a:latin typeface="Poppins" charset="0"/>
+                        <a:ea typeface="Poppins" charset="0"/>
+                        <a:cs typeface="Poppins" charset="0"/>
+                      </a:endParaRPr>
+                    </a:p>
+                  </a:txBody>
+                  <a:tcPr marL="50400" marR="50400" marT="50400" marB="50400" anchor="t">
+                    <a:lnL w="0" cap="flat" cmpd="sng" algn="ctr">
+                      <a:noFill/>
+                    </a:lnL>
+                    <a:lnR w="0" cap="flat" cmpd="sng" algn="ctr">
+                      <a:noFill/>
+                    </a:lnR>
+                    <a:lnT w="0" cap="flat" cmpd="sng" algn="ctr">
+                      <a:noFill/>
+                    </a:lnT>
+                    <a:lnB w="7620" cap="flat" cmpd="sng" algn="ctr">
+                      <a:solidFill>
+                        <a:srgbClr val="E3E7EC"/>
+                      </a:solidFill>
+                      <a:prstDash val="solid"/>
+                      <a:round/>
+                      <a:headEnd type="none" w="med" len="med"/>
+                      <a:tailEnd type="none" w="med" len="med"/>
+                    </a:lnB>
+                    <a:solidFill>
+                      <a:srgbClr val="F5F7FA"/>
+                    </a:solidFill>
+                  </a:tcPr>
+                </a:tc>
+                <a:tc>
+                  <a:txBody>
+                    <a:bodyPr/>
+                    <a:lstStyle/>
+                    <a:p>
+                      <a:pPr algn="ctr" indent="0" marL="0">
+                        <a:lnSpc>
+                          <a:spcPts val="911"/>
+                        </a:lnSpc>
+                        <a:buNone/>
+                      </a:pPr>
+                      <a:r>
                         <a:rPr lang="en-US" sz="670" b="1" dirty="0">
                           <a:solidFill>
                             <a:srgbClr val="0E171F"/>
@@ -23109,6 +23581,59 @@
                           <a:ea typeface="Poppins" pitchFamily="34" charset="-122"/>
                           <a:cs typeface="Poppins" pitchFamily="34" charset="-120"/>
                         </a:rPr>
+                        <a:t>R</a:t>
+                      </a:r>
+                      <a:endParaRPr lang="en-US" sz="670" dirty="0">
+                        <a:latin typeface="Poppins" charset="0"/>
+                        <a:ea typeface="Poppins" charset="0"/>
+                        <a:cs typeface="Poppins" charset="0"/>
+                      </a:endParaRPr>
+                    </a:p>
+                  </a:txBody>
+                  <a:tcPr marL="50400" marR="50400" marT="50400" marB="50400" anchor="t">
+                    <a:lnL w="0" cap="flat" cmpd="sng" algn="ctr">
+                      <a:noFill/>
+                    </a:lnL>
+                    <a:lnR w="0" cap="flat" cmpd="sng" algn="ctr">
+                      <a:noFill/>
+                    </a:lnR>
+                    <a:lnT w="0" cap="flat" cmpd="sng" algn="ctr">
+                      <a:noFill/>
+                    </a:lnT>
+                    <a:lnB w="7620" cap="flat" cmpd="sng" algn="ctr">
+                      <a:solidFill>
+                        <a:srgbClr val="E3E7EC"/>
+                      </a:solidFill>
+                      <a:prstDash val="solid"/>
+                      <a:round/>
+                      <a:headEnd type="none" w="med" len="med"/>
+                      <a:tailEnd type="none" w="med" len="med"/>
+                    </a:lnB>
+                    <a:solidFill>
+                      <a:srgbClr val="FFFFFF"/>
+                    </a:solidFill>
+                  </a:tcPr>
+                </a:tc>
+                <a:tc>
+                  <a:txBody>
+                    <a:bodyPr/>
+                    <a:lstStyle/>
+                    <a:p>
+                      <a:pPr algn="ctr" indent="0" marL="0">
+                        <a:lnSpc>
+                          <a:spcPts val="911"/>
+                        </a:lnSpc>
+                        <a:buNone/>
+                      </a:pPr>
+                      <a:r>
+                        <a:rPr lang="en-US" sz="670" dirty="0">
+                          <a:solidFill>
+                            <a:srgbClr val="4A5565"/>
+                          </a:solidFill>
+                          <a:latin typeface="Poppins" pitchFamily="34" charset="0"/>
+                          <a:ea typeface="Poppins" pitchFamily="34" charset="-122"/>
+                          <a:cs typeface="Poppins" pitchFamily="34" charset="-120"/>
+                        </a:rPr>
                         <a:t>–</a:t>
                       </a:r>
                       <a:endParaRPr lang="en-US" sz="670" dirty="0">
@@ -23376,6 +23901,59 @@
                           <a:ea typeface="Poppins" pitchFamily="34" charset="-122"/>
                           <a:cs typeface="Poppins" pitchFamily="34" charset="-120"/>
                         </a:rPr>
+                        <a:t>–</a:t>
+                      </a:r>
+                      <a:endParaRPr lang="en-US" sz="670" dirty="0">
+                        <a:latin typeface="Poppins" charset="0"/>
+                        <a:ea typeface="Poppins" charset="0"/>
+                        <a:cs typeface="Poppins" charset="0"/>
+                      </a:endParaRPr>
+                    </a:p>
+                  </a:txBody>
+                  <a:tcPr marL="50400" marR="50400" marT="50400" marB="50400" anchor="t">
+                    <a:lnL w="0" cap="flat" cmpd="sng" algn="ctr">
+                      <a:noFill/>
+                    </a:lnL>
+                    <a:lnR w="0" cap="flat" cmpd="sng" algn="ctr">
+                      <a:noFill/>
+                    </a:lnR>
+                    <a:lnT w="0" cap="flat" cmpd="sng" algn="ctr">
+                      <a:noFill/>
+                    </a:lnT>
+                    <a:lnB w="7620" cap="flat" cmpd="sng" algn="ctr">
+                      <a:solidFill>
+                        <a:srgbClr val="E3E7EC"/>
+                      </a:solidFill>
+                      <a:prstDash val="solid"/>
+                      <a:round/>
+                      <a:headEnd type="none" w="med" len="med"/>
+                      <a:tailEnd type="none" w="med" len="med"/>
+                    </a:lnB>
+                    <a:solidFill>
+                      <a:srgbClr val="F5F7FA"/>
+                    </a:solidFill>
+                  </a:tcPr>
+                </a:tc>
+                <a:tc>
+                  <a:txBody>
+                    <a:bodyPr/>
+                    <a:lstStyle/>
+                    <a:p>
+                      <a:pPr algn="ctr" indent="0" marL="0">
+                        <a:lnSpc>
+                          <a:spcPts val="911"/>
+                        </a:lnSpc>
+                        <a:buNone/>
+                      </a:pPr>
+                      <a:r>
+                        <a:rPr lang="en-US" sz="670" dirty="0">
+                          <a:solidFill>
+                            <a:srgbClr val="4A5565"/>
+                          </a:solidFill>
+                          <a:latin typeface="Poppins" pitchFamily="34" charset="0"/>
+                          <a:ea typeface="Poppins" pitchFamily="34" charset="-122"/>
+                          <a:cs typeface="Poppins" pitchFamily="34" charset="-120"/>
+                        </a:rPr>
                         <a:t>C</a:t>
                       </a:r>
                       <a:endParaRPr lang="en-US" sz="670" dirty="0">
@@ -23632,7 +24210,7 @@
                 <a:ea typeface="Poppins" pitchFamily="34" charset="-122"/>
                 <a:cs typeface="Poppins" pitchFamily="34" charset="-120"/>
               </a:rPr>
-              <a:t>Draft for the next conversation. Names against rows is the point, so nothing sits with everybody.</a:t>
+              <a:t>Draft for the next conversation. Wholesale has no R on purpose: that is the hire. Harry carries activation, as agreed in the catch-up.</a:t>
             </a:r>
             <a:endParaRPr lang="en-US" sz="700" dirty="0"/>
           </a:p>

--- a/00 Admin/11 Final Outputs/plan-on-a-page/TapThat_Plan-on-a-Page_A3.pptx
+++ b/00 Admin/11 Final Outputs/plan-on-a-page/TapThat_Plan-on-a-Page_A3.pptx
@@ -2563,7 +2563,7 @@
                 <a:ea typeface="Poppins" pitchFamily="34" charset="-122"/>
                 <a:cs typeface="Poppins" pitchFamily="34" charset="-120"/>
               </a:rPr>
-              <a:t>OF REFILL CUSTOMERS LAPSE</a:t>
+              <a:t>LAPSED, REASON SPLIT UNSETTLED</a:t>
             </a:r>
             <a:endParaRPr lang="en-US" sz="560" dirty="0"/>
           </a:p>
@@ -15535,7 +15535,7 @@
         </p:nvSpPr>
         <p:spPr>
           <a:xfrm>
-            <a:off x="7728952" y="4508661"/>
+            <a:off x="7728952" y="4494774"/>
             <a:ext cx="6951755" cy="462915"/>
           </a:xfrm>
           <a:prstGeom prst="rect">
@@ -15577,7 +15577,7 @@
         </p:nvSpPr>
         <p:spPr>
           <a:xfrm>
-            <a:off x="7728952" y="5077565"/>
+            <a:off x="7728952" y="5049790"/>
             <a:ext cx="6951755" cy="150724"/>
           </a:xfrm>
           <a:prstGeom prst="rect">
@@ -15619,7 +15619,7 @@
         </p:nvSpPr>
         <p:spPr>
           <a:xfrm>
-            <a:off x="7728952" y="5334278"/>
+            <a:off x="7728952" y="5292615"/>
             <a:ext cx="6951755" cy="462915"/>
           </a:xfrm>
           <a:prstGeom prst="rect">
@@ -15661,7 +15661,7 @@
         </p:nvSpPr>
         <p:spPr>
           <a:xfrm>
-            <a:off x="7728952" y="5903181"/>
+            <a:off x="7728952" y="5847632"/>
             <a:ext cx="6951755" cy="150724"/>
           </a:xfrm>
           <a:prstGeom prst="rect">
@@ -15703,8 +15703,8 @@
         </p:nvSpPr>
         <p:spPr>
           <a:xfrm>
-            <a:off x="7728952" y="6159894"/>
-            <a:ext cx="6951755" cy="462915"/>
+            <a:off x="7728952" y="6090457"/>
+            <a:ext cx="6951755" cy="617220"/>
           </a:xfrm>
           <a:prstGeom prst="rect">
             <a:avLst/>
@@ -15731,7 +15731,41 @@
                 <a:ea typeface="Poppins" pitchFamily="34" charset="-122"/>
                 <a:cs typeface="Poppins" pitchFamily="34" charset="-120"/>
               </a:rPr>
-              <a:t>About 40% of refill customers lapse, and what they say is that they did not get around to it. That is friction, not a decision, and it is the most actionable segment in the base. A separate group is cutting back, and the CRM shows it. One message cannot serve both: the first needs one tap to reorder, the second needs the low and non-alcoholic range.</a:t>
+              <a:t>Two cohorts, and one message is currently going to both. Some are cutting back, which needs the low and non-alcoholic range. Some simply did not get around to it, which is friction and needs one tap to reorder. </a:t>
+            </a:r>
+            <a:pPr indent="0" marL="0">
+              <a:lnSpc>
+                <a:spcPts val="1215"/>
+              </a:lnSpc>
+              <a:buNone/>
+            </a:pPr>
+            <a:r>
+              <a:rPr lang="en-US" sz="810" b="1" dirty="0">
+                <a:solidFill>
+                  <a:srgbClr val="0E171F"/>
+                </a:solidFill>
+                <a:latin typeface="Poppins" pitchFamily="34" charset="0"/>
+                <a:ea typeface="Poppins" pitchFamily="34" charset="-122"/>
+                <a:cs typeface="Poppins" pitchFamily="34" charset="-120"/>
+              </a:rPr>
+              <a:t>The split between them is not established. </a:t>
+            </a:r>
+            <a:pPr indent="0" marL="0">
+              <a:lnSpc>
+                <a:spcPts val="1215"/>
+              </a:lnSpc>
+              <a:buNone/>
+            </a:pPr>
+            <a:r>
+              <a:rPr lang="en-US" sz="810" dirty="0">
+                <a:solidFill>
+                  <a:srgbClr val="4A5565"/>
+                </a:solidFill>
+                <a:latin typeface="Poppins" pitchFamily="34" charset="0"/>
+                <a:ea typeface="Poppins" pitchFamily="34" charset="-122"/>
+                <a:cs typeface="Poppins" pitchFamily="34" charset="-120"/>
+              </a:rPr>
+              <a:t>The deck puts 40% on cutting back; in the room Christy put 40% on the lapse rate itself and said what they report is not getting around to it. Read it off the CRM before either message is written.</a:t>
             </a:r>
             <a:endParaRPr lang="en-US" sz="810" dirty="0"/>
           </a:p>

--- a/00 Admin/11 Final Outputs/plan-on-a-page/TapThat_Plan-on-a-Page_A3.pptx
+++ b/00 Admin/11 Final Outputs/plan-on-a-page/TapThat_Plan-on-a-Page_A3.pptx
@@ -1294,81 +1294,39 @@
           </a:p>
         </p:txBody>
       </p:sp>
-      <p:sp>
-        <p:nvSpPr>
-          <p:cNvPr id="4" name="Shape 1"/>
+      <p:pic>
+        <p:nvPicPr>
+          <p:cNvPr id="4" name="Image 1" descr="../site/brand/jewell-wordmark.png">    </p:cNvPr>
+          <p:cNvPicPr>
+            <a:picLocks noChangeAspect="1"/>
+          </p:cNvPicPr>
+          <p:nvPr/>
+        </p:nvPicPr>
+        <p:blipFill>
+          <a:blip r:embed="rId2"/>
+          <a:stretch>
+            <a:fillRect/>
+          </a:stretch>
+        </p:blipFill>
+        <p:spPr>
+          <a:xfrm>
+            <a:off x="13915605" y="394290"/>
+            <a:ext cx="880302" cy="194400"/>
+          </a:xfrm>
+          <a:prstGeom prst="rect">
+            <a:avLst/>
+          </a:prstGeom>
+        </p:spPr>
+      </p:pic>
+      <p:sp>
+        <p:nvSpPr>
+          <p:cNvPr id="5" name="Shape 1"/>
           <p:cNvSpPr/>
           <p:nvPr/>
         </p:nvSpPr>
         <p:spPr>
           <a:xfrm>
-            <a:off x="13650938" y="365760"/>
-            <a:ext cx="1144969" cy="251460"/>
-          </a:xfrm>
-          <a:prstGeom prst="roundRect">
-            <a:avLst>
-              <a:gd name="adj" fmla="val 50000"/>
-            </a:avLst>
-          </a:prstGeom>
-          <a:solidFill>
-            <a:srgbClr val="0E171F"/>
-          </a:solidFill>
-          <a:ln w="9525">
-            <a:solidFill>
-              <a:srgbClr val="0E171F"/>
-            </a:solidFill>
-            <a:prstDash val="solid"/>
-          </a:ln>
-        </p:spPr>
-      </p:sp>
-      <p:sp>
-        <p:nvSpPr>
-          <p:cNvPr id="5" name="Text 2"/>
-          <p:cNvSpPr txBox="1"/>
-          <p:nvPr/>
-        </p:nvSpPr>
-        <p:spPr>
-          <a:xfrm>
-            <a:off x="13650938" y="365760"/>
-            <a:ext cx="1144969" cy="251460"/>
-          </a:xfrm>
-          <a:prstGeom prst="rect">
-            <a:avLst/>
-          </a:prstGeom>
-          <a:noFill/>
-          <a:ln/>
-        </p:spPr>
-        <p:txBody>
-          <a:bodyPr wrap="square" lIns="0" tIns="0" rIns="0" bIns="0" rtlCol="0" anchor="ctr"/>
-          <a:lstStyle/>
-          <a:p>
-            <a:pPr algn="ctr" indent="0" marL="0">
-              <a:buNone/>
-            </a:pPr>
-            <a:r>
-              <a:rPr lang="en-US" sz="650" b="1" spc="78" kern="0" dirty="0">
-                <a:solidFill>
-                  <a:srgbClr val="FFFFFF"/>
-                </a:solidFill>
-                <a:latin typeface="Poppins" pitchFamily="34" charset="0"/>
-                <a:ea typeface="Poppins" pitchFamily="34" charset="-122"/>
-                <a:cs typeface="Poppins" pitchFamily="34" charset="-120"/>
-              </a:rPr>
-              <a:t>JEWELL PROJECTS</a:t>
-            </a:r>
-            <a:endParaRPr lang="en-US" sz="650" dirty="0"/>
-          </a:p>
-        </p:txBody>
-      </p:sp>
-      <p:sp>
-        <p:nvSpPr>
-          <p:cNvPr id="6" name="Shape 3"/>
-          <p:cNvSpPr/>
-          <p:nvPr/>
-        </p:nvSpPr>
-        <p:spPr>
-          <a:xfrm>
-            <a:off x="12410462" y="365760"/>
+            <a:off x="12693129" y="365760"/>
             <a:ext cx="1150475" cy="251460"/>
           </a:xfrm>
           <a:prstGeom prst="roundRect">
@@ -1389,13 +1347,13 @@
       </p:sp>
       <p:sp>
         <p:nvSpPr>
-          <p:cNvPr id="7" name="Text 4"/>
+          <p:cNvPr id="6" name="Text 2"/>
           <p:cNvSpPr txBox="1"/>
           <p:nvPr/>
         </p:nvSpPr>
         <p:spPr>
           <a:xfrm>
-            <a:off x="12410462" y="365760"/>
+            <a:off x="12693129" y="365760"/>
             <a:ext cx="1150475" cy="251460"/>
           </a:xfrm>
           <a:prstGeom prst="rect">
@@ -1428,13 +1386,13 @@
       </p:sp>
       <p:sp>
         <p:nvSpPr>
-          <p:cNvPr id="8" name="Shape 5"/>
+          <p:cNvPr id="7" name="Shape 3"/>
           <p:cNvSpPr/>
           <p:nvPr/>
         </p:nvSpPr>
         <p:spPr>
           <a:xfrm>
-            <a:off x="11102419" y="365760"/>
+            <a:off x="11385086" y="365760"/>
             <a:ext cx="1218043" cy="251460"/>
           </a:xfrm>
           <a:prstGeom prst="roundRect">
@@ -1455,13 +1413,13 @@
       </p:sp>
       <p:sp>
         <p:nvSpPr>
-          <p:cNvPr id="9" name="Text 6"/>
+          <p:cNvPr id="8" name="Text 4"/>
           <p:cNvSpPr txBox="1"/>
           <p:nvPr/>
         </p:nvSpPr>
         <p:spPr>
           <a:xfrm>
-            <a:off x="11102419" y="365760"/>
+            <a:off x="11385086" y="365760"/>
             <a:ext cx="1218043" cy="251460"/>
           </a:xfrm>
           <a:prstGeom prst="rect">
@@ -1494,13 +1452,13 @@
       </p:sp>
       <p:sp>
         <p:nvSpPr>
-          <p:cNvPr id="10" name="Shape 7"/>
+          <p:cNvPr id="9" name="Shape 5"/>
           <p:cNvSpPr/>
           <p:nvPr/>
         </p:nvSpPr>
         <p:spPr>
           <a:xfrm>
-            <a:off x="10260952" y="365760"/>
+            <a:off x="10543619" y="365760"/>
             <a:ext cx="751467" cy="251460"/>
           </a:xfrm>
           <a:prstGeom prst="roundRect">
@@ -1513,7 +1471,7 @@
           </a:solidFill>
           <a:ln w="9525">
             <a:solidFill>
-              <a:srgbClr val="E3E7EC"/>
+              <a:srgbClr val="0066FF"/>
             </a:solidFill>
             <a:prstDash val="solid"/>
           </a:ln>
@@ -1521,13 +1479,13 @@
       </p:sp>
       <p:sp>
         <p:nvSpPr>
-          <p:cNvPr id="11" name="Text 8"/>
+          <p:cNvPr id="10" name="Text 6"/>
           <p:cNvSpPr txBox="1"/>
           <p:nvPr/>
         </p:nvSpPr>
         <p:spPr>
           <a:xfrm>
-            <a:off x="10260952" y="365760"/>
+            <a:off x="10543619" y="365760"/>
             <a:ext cx="751467" cy="251460"/>
           </a:xfrm>
           <a:prstGeom prst="rect">
@@ -1546,7 +1504,7 @@
             <a:r>
               <a:rPr lang="en-US" sz="650" b="1" spc="78" kern="0" dirty="0">
                 <a:solidFill>
-                  <a:srgbClr val="4A5565"/>
+                  <a:srgbClr val="0066FF"/>
                 </a:solidFill>
                 <a:latin typeface="Poppins" pitchFamily="34" charset="0"/>
                 <a:ea typeface="Poppins" pitchFamily="34" charset="-122"/>
@@ -1560,7 +1518,7 @@
       </p:sp>
       <p:sp>
         <p:nvSpPr>
-          <p:cNvPr id="12" name="Shape 9"/>
+          <p:cNvPr id="11" name="Shape 7"/>
           <p:cNvSpPr/>
           <p:nvPr/>
         </p:nvSpPr>
@@ -1583,7 +1541,7 @@
       </p:sp>
       <p:sp>
         <p:nvSpPr>
-          <p:cNvPr id="13" name="Shape 10"/>
+          <p:cNvPr id="12" name="Shape 8"/>
           <p:cNvSpPr/>
           <p:nvPr/>
         </p:nvSpPr>
@@ -1608,7 +1566,7 @@
       </p:sp>
       <p:sp>
         <p:nvSpPr>
-          <p:cNvPr id="14" name="Shape 11"/>
+          <p:cNvPr id="13" name="Shape 9"/>
           <p:cNvSpPr/>
           <p:nvPr/>
         </p:nvSpPr>
@@ -1633,7 +1591,7 @@
       </p:sp>
       <p:sp>
         <p:nvSpPr>
-          <p:cNvPr id="15" name="Text 12"/>
+          <p:cNvPr id="14" name="Text 10"/>
           <p:cNvSpPr txBox="1"/>
           <p:nvPr/>
         </p:nvSpPr>
@@ -1675,7 +1633,7 @@
       </p:sp>
       <p:sp>
         <p:nvSpPr>
-          <p:cNvPr id="16" name="Text 13"/>
+          <p:cNvPr id="15" name="Text 11"/>
           <p:cNvSpPr txBox="1"/>
           <p:nvPr/>
         </p:nvSpPr>
@@ -1717,7 +1675,7 @@
       </p:sp>
       <p:sp>
         <p:nvSpPr>
-          <p:cNvPr id="17" name="Text 14"/>
+          <p:cNvPr id="16" name="Text 12"/>
           <p:cNvSpPr txBox="1"/>
           <p:nvPr/>
         </p:nvSpPr>
@@ -1776,7 +1734,7 @@
       </p:sp>
       <p:sp>
         <p:nvSpPr>
-          <p:cNvPr id="18" name="Text 15"/>
+          <p:cNvPr id="17" name="Text 13"/>
           <p:cNvSpPr txBox="1"/>
           <p:nvPr/>
         </p:nvSpPr>
@@ -1835,7 +1793,7 @@
       </p:sp>
       <p:sp>
         <p:nvSpPr>
-          <p:cNvPr id="19" name="Text 16"/>
+          <p:cNvPr id="18" name="Text 14"/>
           <p:cNvSpPr txBox="1"/>
           <p:nvPr/>
         </p:nvSpPr>
@@ -1894,7 +1852,7 @@
       </p:sp>
       <p:sp>
         <p:nvSpPr>
-          <p:cNvPr id="20" name="Shape 17"/>
+          <p:cNvPr id="19" name="Shape 15"/>
           <p:cNvSpPr/>
           <p:nvPr/>
         </p:nvSpPr>
@@ -1917,7 +1875,7 @@
       </p:sp>
       <p:sp>
         <p:nvSpPr>
-          <p:cNvPr id="21" name="Text 18"/>
+          <p:cNvPr id="20" name="Text 16"/>
           <p:cNvSpPr txBox="1"/>
           <p:nvPr/>
         </p:nvSpPr>
@@ -1959,7 +1917,7 @@
       </p:sp>
       <p:sp>
         <p:nvSpPr>
-          <p:cNvPr id="22" name="Shape 19"/>
+          <p:cNvPr id="21" name="Shape 17"/>
           <p:cNvSpPr/>
           <p:nvPr/>
         </p:nvSpPr>
@@ -1984,7 +1942,7 @@
       </p:sp>
       <p:sp>
         <p:nvSpPr>
-          <p:cNvPr id="23" name="Text 20"/>
+          <p:cNvPr id="22" name="Text 18"/>
           <p:cNvSpPr txBox="1"/>
           <p:nvPr/>
         </p:nvSpPr>
@@ -2026,7 +1984,7 @@
       </p:sp>
       <p:sp>
         <p:nvSpPr>
-          <p:cNvPr id="24" name="Shape 21"/>
+          <p:cNvPr id="23" name="Shape 19"/>
           <p:cNvSpPr/>
           <p:nvPr/>
         </p:nvSpPr>
@@ -2051,7 +2009,7 @@
       </p:sp>
       <p:sp>
         <p:nvSpPr>
-          <p:cNvPr id="25" name="Text 22"/>
+          <p:cNvPr id="24" name="Text 20"/>
           <p:cNvSpPr txBox="1"/>
           <p:nvPr/>
         </p:nvSpPr>
@@ -2093,7 +2051,7 @@
       </p:sp>
       <p:sp>
         <p:nvSpPr>
-          <p:cNvPr id="26" name="Text 23"/>
+          <p:cNvPr id="25" name="Text 21"/>
           <p:cNvSpPr txBox="1"/>
           <p:nvPr/>
         </p:nvSpPr>
@@ -2135,7 +2093,7 @@
       </p:sp>
       <p:sp>
         <p:nvSpPr>
-          <p:cNvPr id="27" name="Shape 24"/>
+          <p:cNvPr id="26" name="Shape 22"/>
           <p:cNvSpPr/>
           <p:nvPr/>
         </p:nvSpPr>
@@ -2160,7 +2118,7 @@
       </p:sp>
       <p:sp>
         <p:nvSpPr>
-          <p:cNvPr id="28" name="Text 25"/>
+          <p:cNvPr id="27" name="Text 23"/>
           <p:cNvSpPr txBox="1"/>
           <p:nvPr/>
         </p:nvSpPr>
@@ -2202,7 +2160,7 @@
       </p:sp>
       <p:sp>
         <p:nvSpPr>
-          <p:cNvPr id="29" name="Text 26"/>
+          <p:cNvPr id="28" name="Text 24"/>
           <p:cNvSpPr txBox="1"/>
           <p:nvPr/>
         </p:nvSpPr>
@@ -2244,7 +2202,7 @@
       </p:sp>
       <p:sp>
         <p:nvSpPr>
-          <p:cNvPr id="30" name="Shape 27"/>
+          <p:cNvPr id="29" name="Shape 25"/>
           <p:cNvSpPr/>
           <p:nvPr/>
         </p:nvSpPr>
@@ -2269,7 +2227,7 @@
       </p:sp>
       <p:sp>
         <p:nvSpPr>
-          <p:cNvPr id="31" name="Text 28"/>
+          <p:cNvPr id="30" name="Text 26"/>
           <p:cNvSpPr txBox="1"/>
           <p:nvPr/>
         </p:nvSpPr>
@@ -2311,7 +2269,7 @@
       </p:sp>
       <p:sp>
         <p:nvSpPr>
-          <p:cNvPr id="32" name="Text 29"/>
+          <p:cNvPr id="31" name="Text 27"/>
           <p:cNvSpPr txBox="1"/>
           <p:nvPr/>
         </p:nvSpPr>
@@ -2353,7 +2311,7 @@
       </p:sp>
       <p:sp>
         <p:nvSpPr>
-          <p:cNvPr id="33" name="Shape 30"/>
+          <p:cNvPr id="32" name="Shape 28"/>
           <p:cNvSpPr/>
           <p:nvPr/>
         </p:nvSpPr>
@@ -2378,7 +2336,7 @@
       </p:sp>
       <p:sp>
         <p:nvSpPr>
-          <p:cNvPr id="34" name="Text 31"/>
+          <p:cNvPr id="33" name="Text 29"/>
           <p:cNvSpPr txBox="1"/>
           <p:nvPr/>
         </p:nvSpPr>
@@ -2420,7 +2378,7 @@
       </p:sp>
       <p:sp>
         <p:nvSpPr>
-          <p:cNvPr id="35" name="Text 32"/>
+          <p:cNvPr id="34" name="Text 30"/>
           <p:cNvSpPr txBox="1"/>
           <p:nvPr/>
         </p:nvSpPr>
@@ -2462,7 +2420,7 @@
       </p:sp>
       <p:sp>
         <p:nvSpPr>
-          <p:cNvPr id="36" name="Shape 33"/>
+          <p:cNvPr id="35" name="Shape 31"/>
           <p:cNvSpPr/>
           <p:nvPr/>
         </p:nvSpPr>
@@ -2487,7 +2445,7 @@
       </p:sp>
       <p:sp>
         <p:nvSpPr>
-          <p:cNvPr id="37" name="Text 34"/>
+          <p:cNvPr id="36" name="Text 32"/>
           <p:cNvSpPr txBox="1"/>
           <p:nvPr/>
         </p:nvSpPr>
@@ -2529,7 +2487,7 @@
       </p:sp>
       <p:sp>
         <p:nvSpPr>
-          <p:cNvPr id="38" name="Text 35"/>
+          <p:cNvPr id="37" name="Text 33"/>
           <p:cNvSpPr txBox="1"/>
           <p:nvPr/>
         </p:nvSpPr>
@@ -2571,7 +2529,7 @@
       </p:sp>
       <p:sp>
         <p:nvSpPr>
-          <p:cNvPr id="39" name="Shape 36"/>
+          <p:cNvPr id="38" name="Shape 34"/>
           <p:cNvSpPr/>
           <p:nvPr/>
         </p:nvSpPr>
@@ -2596,7 +2554,7 @@
       </p:sp>
       <p:sp>
         <p:nvSpPr>
-          <p:cNvPr id="40" name="Text 37"/>
+          <p:cNvPr id="39" name="Text 35"/>
           <p:cNvSpPr txBox="1"/>
           <p:nvPr/>
         </p:nvSpPr>
@@ -2638,7 +2596,7 @@
       </p:sp>
       <p:sp>
         <p:nvSpPr>
-          <p:cNvPr id="41" name="Text 38"/>
+          <p:cNvPr id="40" name="Text 36"/>
           <p:cNvSpPr txBox="1"/>
           <p:nvPr/>
         </p:nvSpPr>
@@ -2680,7 +2638,7 @@
       </p:sp>
       <p:sp>
         <p:nvSpPr>
-          <p:cNvPr id="42" name="Shape 39"/>
+          <p:cNvPr id="41" name="Shape 37"/>
           <p:cNvSpPr/>
           <p:nvPr/>
         </p:nvSpPr>
@@ -2705,7 +2663,7 @@
       </p:sp>
       <p:sp>
         <p:nvSpPr>
-          <p:cNvPr id="43" name="Text 40"/>
+          <p:cNvPr id="42" name="Text 38"/>
           <p:cNvSpPr txBox="1"/>
           <p:nvPr/>
         </p:nvSpPr>
@@ -2764,7 +2722,7 @@
       </p:sp>
       <p:sp>
         <p:nvSpPr>
-          <p:cNvPr id="44" name="Shape 41"/>
+          <p:cNvPr id="43" name="Shape 39"/>
           <p:cNvSpPr/>
           <p:nvPr/>
         </p:nvSpPr>
@@ -2789,7 +2747,7 @@
       </p:sp>
       <p:sp>
         <p:nvSpPr>
-          <p:cNvPr id="45" name="Shape 42"/>
+          <p:cNvPr id="44" name="Shape 40"/>
           <p:cNvSpPr/>
           <p:nvPr/>
         </p:nvSpPr>
@@ -2814,7 +2772,7 @@
       </p:sp>
       <p:sp>
         <p:nvSpPr>
-          <p:cNvPr id="46" name="Text 43"/>
+          <p:cNvPr id="45" name="Text 41"/>
           <p:cNvSpPr txBox="1"/>
           <p:nvPr/>
         </p:nvSpPr>
@@ -2856,7 +2814,7 @@
       </p:sp>
       <p:sp>
         <p:nvSpPr>
-          <p:cNvPr id="47" name="Text 44"/>
+          <p:cNvPr id="46" name="Text 42"/>
           <p:cNvSpPr txBox="1"/>
           <p:nvPr/>
         </p:nvSpPr>
@@ -2898,7 +2856,7 @@
       </p:sp>
       <p:sp>
         <p:nvSpPr>
-          <p:cNvPr id="48" name="Text 45"/>
+          <p:cNvPr id="47" name="Text 43"/>
           <p:cNvSpPr txBox="1"/>
           <p:nvPr/>
         </p:nvSpPr>
@@ -2940,7 +2898,7 @@
       </p:sp>
       <p:sp>
         <p:nvSpPr>
-          <p:cNvPr id="49" name="Text 46"/>
+          <p:cNvPr id="48" name="Text 44"/>
           <p:cNvSpPr txBox="1"/>
           <p:nvPr/>
         </p:nvSpPr>
@@ -2999,7 +2957,7 @@
       </p:sp>
       <p:sp>
         <p:nvSpPr>
-          <p:cNvPr id="50" name="Shape 47"/>
+          <p:cNvPr id="49" name="Shape 45"/>
           <p:cNvSpPr/>
           <p:nvPr/>
         </p:nvSpPr>
@@ -3024,7 +2982,7 @@
       </p:sp>
       <p:sp>
         <p:nvSpPr>
-          <p:cNvPr id="51" name="Shape 48"/>
+          <p:cNvPr id="50" name="Shape 46"/>
           <p:cNvSpPr/>
           <p:nvPr/>
         </p:nvSpPr>
@@ -3049,7 +3007,7 @@
       </p:sp>
       <p:sp>
         <p:nvSpPr>
-          <p:cNvPr id="52" name="Text 49"/>
+          <p:cNvPr id="51" name="Text 47"/>
           <p:cNvSpPr txBox="1"/>
           <p:nvPr/>
         </p:nvSpPr>
@@ -3091,7 +3049,7 @@
       </p:sp>
       <p:sp>
         <p:nvSpPr>
-          <p:cNvPr id="53" name="Text 50"/>
+          <p:cNvPr id="52" name="Text 48"/>
           <p:cNvSpPr txBox="1"/>
           <p:nvPr/>
         </p:nvSpPr>
@@ -3133,7 +3091,7 @@
       </p:sp>
       <p:sp>
         <p:nvSpPr>
-          <p:cNvPr id="54" name="Text 51"/>
+          <p:cNvPr id="53" name="Text 49"/>
           <p:cNvSpPr txBox="1"/>
           <p:nvPr/>
         </p:nvSpPr>
@@ -3175,7 +3133,7 @@
       </p:sp>
       <p:sp>
         <p:nvSpPr>
-          <p:cNvPr id="55" name="Text 52"/>
+          <p:cNvPr id="54" name="Text 50"/>
           <p:cNvSpPr txBox="1"/>
           <p:nvPr/>
         </p:nvSpPr>
@@ -3234,7 +3192,7 @@
       </p:sp>
       <p:sp>
         <p:nvSpPr>
-          <p:cNvPr id="56" name="Shape 53"/>
+          <p:cNvPr id="55" name="Shape 51"/>
           <p:cNvSpPr/>
           <p:nvPr/>
         </p:nvSpPr>
@@ -3259,7 +3217,7 @@
       </p:sp>
       <p:sp>
         <p:nvSpPr>
-          <p:cNvPr id="57" name="Shape 54"/>
+          <p:cNvPr id="56" name="Shape 52"/>
           <p:cNvSpPr/>
           <p:nvPr/>
         </p:nvSpPr>
@@ -3284,7 +3242,7 @@
       </p:sp>
       <p:sp>
         <p:nvSpPr>
-          <p:cNvPr id="58" name="Text 55"/>
+          <p:cNvPr id="57" name="Text 53"/>
           <p:cNvSpPr txBox="1"/>
           <p:nvPr/>
         </p:nvSpPr>
@@ -3326,7 +3284,7 @@
       </p:sp>
       <p:sp>
         <p:nvSpPr>
-          <p:cNvPr id="59" name="Text 56"/>
+          <p:cNvPr id="58" name="Text 54"/>
           <p:cNvSpPr txBox="1"/>
           <p:nvPr/>
         </p:nvSpPr>
@@ -3368,7 +3326,7 @@
       </p:sp>
       <p:sp>
         <p:nvSpPr>
-          <p:cNvPr id="60" name="Text 57"/>
+          <p:cNvPr id="59" name="Text 55"/>
           <p:cNvSpPr txBox="1"/>
           <p:nvPr/>
         </p:nvSpPr>
@@ -3410,7 +3368,7 @@
       </p:sp>
       <p:sp>
         <p:nvSpPr>
-          <p:cNvPr id="61" name="Text 58"/>
+          <p:cNvPr id="60" name="Text 56"/>
           <p:cNvSpPr txBox="1"/>
           <p:nvPr/>
         </p:nvSpPr>
@@ -3469,7 +3427,7 @@
       </p:sp>
       <p:sp>
         <p:nvSpPr>
-          <p:cNvPr id="62" name="Shape 59"/>
+          <p:cNvPr id="61" name="Shape 57"/>
           <p:cNvSpPr/>
           <p:nvPr/>
         </p:nvSpPr>
@@ -3494,7 +3452,7 @@
       </p:sp>
       <p:sp>
         <p:nvSpPr>
-          <p:cNvPr id="63" name="Shape 60"/>
+          <p:cNvPr id="62" name="Shape 58"/>
           <p:cNvSpPr/>
           <p:nvPr/>
         </p:nvSpPr>
@@ -3519,7 +3477,7 @@
       </p:sp>
       <p:sp>
         <p:nvSpPr>
-          <p:cNvPr id="64" name="Text 61"/>
+          <p:cNvPr id="63" name="Text 59"/>
           <p:cNvSpPr txBox="1"/>
           <p:nvPr/>
         </p:nvSpPr>
@@ -3561,7 +3519,7 @@
       </p:sp>
       <p:sp>
         <p:nvSpPr>
-          <p:cNvPr id="65" name="Text 62"/>
+          <p:cNvPr id="64" name="Text 60"/>
           <p:cNvSpPr txBox="1"/>
           <p:nvPr/>
         </p:nvSpPr>
@@ -3603,7 +3561,7 @@
       </p:sp>
       <p:sp>
         <p:nvSpPr>
-          <p:cNvPr id="66" name="Text 63"/>
+          <p:cNvPr id="65" name="Text 61"/>
           <p:cNvSpPr txBox="1"/>
           <p:nvPr/>
         </p:nvSpPr>
@@ -3645,7 +3603,7 @@
       </p:sp>
       <p:sp>
         <p:nvSpPr>
-          <p:cNvPr id="67" name="Text 64"/>
+          <p:cNvPr id="66" name="Text 62"/>
           <p:cNvSpPr txBox="1"/>
           <p:nvPr/>
         </p:nvSpPr>
@@ -3704,7 +3662,7 @@
       </p:sp>
       <p:sp>
         <p:nvSpPr>
-          <p:cNvPr id="68" name="Shape 65"/>
+          <p:cNvPr id="67" name="Shape 63"/>
           <p:cNvSpPr/>
           <p:nvPr/>
         </p:nvSpPr>
@@ -3729,7 +3687,7 @@
       </p:sp>
       <p:sp>
         <p:nvSpPr>
-          <p:cNvPr id="69" name="Text 66"/>
+          <p:cNvPr id="68" name="Text 64"/>
           <p:cNvSpPr txBox="1"/>
           <p:nvPr/>
         </p:nvSpPr>
@@ -3771,7 +3729,7 @@
       </p:sp>
       <p:sp>
         <p:nvSpPr>
-          <p:cNvPr id="70" name="Shape 67"/>
+          <p:cNvPr id="69" name="Shape 65"/>
           <p:cNvSpPr/>
           <p:nvPr/>
         </p:nvSpPr>
@@ -3798,7 +3756,7 @@
       </p:sp>
       <p:sp>
         <p:nvSpPr>
-          <p:cNvPr id="71" name="Text 68"/>
+          <p:cNvPr id="70" name="Text 66"/>
           <p:cNvSpPr txBox="1"/>
           <p:nvPr/>
         </p:nvSpPr>
@@ -3837,7 +3795,7 @@
       </p:sp>
       <p:sp>
         <p:nvSpPr>
-          <p:cNvPr id="72" name="Text 69"/>
+          <p:cNvPr id="71" name="Text 67"/>
           <p:cNvSpPr txBox="1"/>
           <p:nvPr/>
         </p:nvSpPr>
@@ -3879,7 +3837,7 @@
       </p:sp>
       <p:sp>
         <p:nvSpPr>
-          <p:cNvPr id="73" name="Shape 70"/>
+          <p:cNvPr id="72" name="Shape 68"/>
           <p:cNvSpPr/>
           <p:nvPr/>
         </p:nvSpPr>
@@ -3906,7 +3864,7 @@
       </p:sp>
       <p:sp>
         <p:nvSpPr>
-          <p:cNvPr id="74" name="Text 71"/>
+          <p:cNvPr id="73" name="Text 69"/>
           <p:cNvSpPr txBox="1"/>
           <p:nvPr/>
         </p:nvSpPr>
@@ -3945,7 +3903,7 @@
       </p:sp>
       <p:sp>
         <p:nvSpPr>
-          <p:cNvPr id="75" name="Text 72"/>
+          <p:cNvPr id="74" name="Text 70"/>
           <p:cNvSpPr txBox="1"/>
           <p:nvPr/>
         </p:nvSpPr>
@@ -3987,7 +3945,7 @@
       </p:sp>
       <p:sp>
         <p:nvSpPr>
-          <p:cNvPr id="76" name="Shape 73"/>
+          <p:cNvPr id="75" name="Shape 71"/>
           <p:cNvSpPr/>
           <p:nvPr/>
         </p:nvSpPr>
@@ -4014,7 +3972,7 @@
       </p:sp>
       <p:sp>
         <p:nvSpPr>
-          <p:cNvPr id="77" name="Text 74"/>
+          <p:cNvPr id="76" name="Text 72"/>
           <p:cNvSpPr txBox="1"/>
           <p:nvPr/>
         </p:nvSpPr>
@@ -4053,7 +4011,7 @@
       </p:sp>
       <p:sp>
         <p:nvSpPr>
-          <p:cNvPr id="78" name="Text 75"/>
+          <p:cNvPr id="77" name="Text 73"/>
           <p:cNvSpPr txBox="1"/>
           <p:nvPr/>
         </p:nvSpPr>
@@ -4095,7 +4053,7 @@
       </p:sp>
       <p:sp>
         <p:nvSpPr>
-          <p:cNvPr id="79" name="Shape 76"/>
+          <p:cNvPr id="78" name="Shape 74"/>
           <p:cNvSpPr/>
           <p:nvPr/>
         </p:nvSpPr>
@@ -4118,7 +4076,7 @@
       </p:sp>
       <p:sp>
         <p:nvSpPr>
-          <p:cNvPr id="80" name="Text 77"/>
+          <p:cNvPr id="79" name="Text 75"/>
           <p:cNvSpPr txBox="1"/>
           <p:nvPr/>
         </p:nvSpPr>
@@ -4160,7 +4118,7 @@
       </p:sp>
       <p:sp>
         <p:nvSpPr>
-          <p:cNvPr id="81" name="Shape 78"/>
+          <p:cNvPr id="80" name="Shape 76"/>
           <p:cNvSpPr/>
           <p:nvPr/>
         </p:nvSpPr>
@@ -4185,7 +4143,7 @@
       </p:sp>
       <p:sp>
         <p:nvSpPr>
-          <p:cNvPr id="82" name="Text 79"/>
+          <p:cNvPr id="81" name="Text 77"/>
           <p:cNvSpPr txBox="1"/>
           <p:nvPr/>
         </p:nvSpPr>
@@ -5385,7 +5343,7 @@
       </p:graphicFrame>
       <p:sp>
         <p:nvSpPr>
-          <p:cNvPr id="84" name="Shape 80"/>
+          <p:cNvPr id="83" name="Shape 78"/>
           <p:cNvSpPr/>
           <p:nvPr/>
         </p:nvSpPr>
@@ -5408,7 +5366,7 @@
       </p:sp>
       <p:sp>
         <p:nvSpPr>
-          <p:cNvPr id="85" name="Text 81"/>
+          <p:cNvPr id="84" name="Text 79"/>
           <p:cNvSpPr txBox="1"/>
           <p:nvPr/>
         </p:nvSpPr>
@@ -5450,7 +5408,7 @@
       </p:sp>
       <p:sp>
         <p:nvSpPr>
-          <p:cNvPr id="86" name="Shape 82"/>
+          <p:cNvPr id="85" name="Shape 80"/>
           <p:cNvSpPr/>
           <p:nvPr/>
         </p:nvSpPr>
@@ -5475,7 +5433,7 @@
       </p:sp>
       <p:sp>
         <p:nvSpPr>
-          <p:cNvPr id="87" name="Shape 83"/>
+          <p:cNvPr id="86" name="Shape 81"/>
           <p:cNvSpPr/>
           <p:nvPr/>
         </p:nvSpPr>
@@ -5500,7 +5458,7 @@
       </p:sp>
       <p:sp>
         <p:nvSpPr>
-          <p:cNvPr id="88" name="Text 84"/>
+          <p:cNvPr id="87" name="Text 82"/>
           <p:cNvSpPr txBox="1"/>
           <p:nvPr/>
         </p:nvSpPr>
@@ -5542,7 +5500,7 @@
       </p:sp>
       <p:sp>
         <p:nvSpPr>
-          <p:cNvPr id="89" name="Shape 85"/>
+          <p:cNvPr id="88" name="Shape 83"/>
           <p:cNvSpPr/>
           <p:nvPr/>
         </p:nvSpPr>
@@ -5567,7 +5525,7 @@
       </p:sp>
       <p:sp>
         <p:nvSpPr>
-          <p:cNvPr id="90" name="Text 86"/>
+          <p:cNvPr id="89" name="Text 84"/>
           <p:cNvSpPr txBox="1"/>
           <p:nvPr/>
         </p:nvSpPr>
@@ -5626,7 +5584,7 @@
       </p:sp>
       <p:sp>
         <p:nvSpPr>
-          <p:cNvPr id="91" name="Shape 87"/>
+          <p:cNvPr id="90" name="Shape 85"/>
           <p:cNvSpPr/>
           <p:nvPr/>
         </p:nvSpPr>
@@ -5651,7 +5609,7 @@
       </p:sp>
       <p:sp>
         <p:nvSpPr>
-          <p:cNvPr id="92" name="Text 88"/>
+          <p:cNvPr id="91" name="Text 86"/>
           <p:cNvSpPr txBox="1"/>
           <p:nvPr/>
         </p:nvSpPr>
@@ -5710,7 +5668,7 @@
       </p:sp>
       <p:sp>
         <p:nvSpPr>
-          <p:cNvPr id="93" name="Shape 89"/>
+          <p:cNvPr id="92" name="Shape 87"/>
           <p:cNvSpPr/>
           <p:nvPr/>
         </p:nvSpPr>
@@ -5735,7 +5693,7 @@
       </p:sp>
       <p:sp>
         <p:nvSpPr>
-          <p:cNvPr id="94" name="Text 90"/>
+          <p:cNvPr id="93" name="Text 88"/>
           <p:cNvSpPr txBox="1"/>
           <p:nvPr/>
         </p:nvSpPr>
@@ -5794,7 +5752,7 @@
       </p:sp>
       <p:sp>
         <p:nvSpPr>
-          <p:cNvPr id="95" name="Shape 91"/>
+          <p:cNvPr id="94" name="Shape 89"/>
           <p:cNvSpPr/>
           <p:nvPr/>
         </p:nvSpPr>
@@ -5819,7 +5777,7 @@
       </p:sp>
       <p:sp>
         <p:nvSpPr>
-          <p:cNvPr id="96" name="Text 92"/>
+          <p:cNvPr id="95" name="Text 90"/>
           <p:cNvSpPr txBox="1"/>
           <p:nvPr/>
         </p:nvSpPr>
@@ -5878,7 +5836,7 @@
       </p:sp>
       <p:sp>
         <p:nvSpPr>
-          <p:cNvPr id="97" name="Shape 93"/>
+          <p:cNvPr id="96" name="Shape 91"/>
           <p:cNvSpPr/>
           <p:nvPr/>
         </p:nvSpPr>
@@ -5903,7 +5861,7 @@
       </p:sp>
       <p:sp>
         <p:nvSpPr>
-          <p:cNvPr id="98" name="Text 94"/>
+          <p:cNvPr id="97" name="Text 92"/>
           <p:cNvSpPr txBox="1"/>
           <p:nvPr/>
         </p:nvSpPr>
@@ -5962,7 +5920,7 @@
       </p:sp>
       <p:sp>
         <p:nvSpPr>
-          <p:cNvPr id="99" name="Shape 95"/>
+          <p:cNvPr id="98" name="Shape 93"/>
           <p:cNvSpPr/>
           <p:nvPr/>
         </p:nvSpPr>
@@ -5985,7 +5943,7 @@
       </p:sp>
       <p:sp>
         <p:nvSpPr>
-          <p:cNvPr id="100" name="Text 96"/>
+          <p:cNvPr id="99" name="Text 94"/>
           <p:cNvSpPr txBox="1"/>
           <p:nvPr/>
         </p:nvSpPr>
@@ -6120,81 +6078,39 @@
           </a:p>
         </p:txBody>
       </p:sp>
-      <p:sp>
-        <p:nvSpPr>
-          <p:cNvPr id="4" name="Shape 1"/>
+      <p:pic>
+        <p:nvPicPr>
+          <p:cNvPr id="4" name="Image 1" descr="../site/brand/jewell-wordmark.png">    </p:cNvPr>
+          <p:cNvPicPr>
+            <a:picLocks noChangeAspect="1"/>
+          </p:cNvPicPr>
+          <p:nvPr/>
+        </p:nvPicPr>
+        <p:blipFill>
+          <a:blip r:embed="rId2"/>
+          <a:stretch>
+            <a:fillRect/>
+          </a:stretch>
+        </p:blipFill>
+        <p:spPr>
+          <a:xfrm>
+            <a:off x="13915605" y="394290"/>
+            <a:ext cx="880302" cy="194400"/>
+          </a:xfrm>
+          <a:prstGeom prst="rect">
+            <a:avLst/>
+          </a:prstGeom>
+        </p:spPr>
+      </p:pic>
+      <p:sp>
+        <p:nvSpPr>
+          <p:cNvPr id="5" name="Shape 1"/>
           <p:cNvSpPr/>
           <p:nvPr/>
         </p:nvSpPr>
         <p:spPr>
           <a:xfrm>
-            <a:off x="13650938" y="365760"/>
-            <a:ext cx="1144969" cy="251460"/>
-          </a:xfrm>
-          <a:prstGeom prst="roundRect">
-            <a:avLst>
-              <a:gd name="adj" fmla="val 50000"/>
-            </a:avLst>
-          </a:prstGeom>
-          <a:solidFill>
-            <a:srgbClr val="0E171F"/>
-          </a:solidFill>
-          <a:ln w="9525">
-            <a:solidFill>
-              <a:srgbClr val="0E171F"/>
-            </a:solidFill>
-            <a:prstDash val="solid"/>
-          </a:ln>
-        </p:spPr>
-      </p:sp>
-      <p:sp>
-        <p:nvSpPr>
-          <p:cNvPr id="5" name="Text 2"/>
-          <p:cNvSpPr txBox="1"/>
-          <p:nvPr/>
-        </p:nvSpPr>
-        <p:spPr>
-          <a:xfrm>
-            <a:off x="13650938" y="365760"/>
-            <a:ext cx="1144969" cy="251460"/>
-          </a:xfrm>
-          <a:prstGeom prst="rect">
-            <a:avLst/>
-          </a:prstGeom>
-          <a:noFill/>
-          <a:ln/>
-        </p:spPr>
-        <p:txBody>
-          <a:bodyPr wrap="square" lIns="0" tIns="0" rIns="0" bIns="0" rtlCol="0" anchor="ctr"/>
-          <a:lstStyle/>
-          <a:p>
-            <a:pPr algn="ctr" indent="0" marL="0">
-              <a:buNone/>
-            </a:pPr>
-            <a:r>
-              <a:rPr lang="en-US" sz="650" b="1" spc="78" kern="0" dirty="0">
-                <a:solidFill>
-                  <a:srgbClr val="FFFFFF"/>
-                </a:solidFill>
-                <a:latin typeface="Poppins" pitchFamily="34" charset="0"/>
-                <a:ea typeface="Poppins" pitchFamily="34" charset="-122"/>
-                <a:cs typeface="Poppins" pitchFamily="34" charset="-120"/>
-              </a:rPr>
-              <a:t>JEWELL PROJECTS</a:t>
-            </a:r>
-            <a:endParaRPr lang="en-US" sz="650" dirty="0"/>
-          </a:p>
-        </p:txBody>
-      </p:sp>
-      <p:sp>
-        <p:nvSpPr>
-          <p:cNvPr id="6" name="Shape 3"/>
-          <p:cNvSpPr/>
-          <p:nvPr/>
-        </p:nvSpPr>
-        <p:spPr>
-          <a:xfrm>
-            <a:off x="12410462" y="365760"/>
+            <a:off x="12693129" y="365760"/>
             <a:ext cx="1150475" cy="251460"/>
           </a:xfrm>
           <a:prstGeom prst="roundRect">
@@ -6215,13 +6131,13 @@
       </p:sp>
       <p:sp>
         <p:nvSpPr>
-          <p:cNvPr id="7" name="Text 4"/>
+          <p:cNvPr id="6" name="Text 2"/>
           <p:cNvSpPr txBox="1"/>
           <p:nvPr/>
         </p:nvSpPr>
         <p:spPr>
           <a:xfrm>
-            <a:off x="12410462" y="365760"/>
+            <a:off x="12693129" y="365760"/>
             <a:ext cx="1150475" cy="251460"/>
           </a:xfrm>
           <a:prstGeom prst="rect">
@@ -6254,13 +6170,13 @@
       </p:sp>
       <p:sp>
         <p:nvSpPr>
-          <p:cNvPr id="8" name="Shape 5"/>
+          <p:cNvPr id="7" name="Shape 3"/>
           <p:cNvSpPr/>
           <p:nvPr/>
         </p:nvSpPr>
         <p:spPr>
           <a:xfrm>
-            <a:off x="11102419" y="365760"/>
+            <a:off x="11385086" y="365760"/>
             <a:ext cx="1218043" cy="251460"/>
           </a:xfrm>
           <a:prstGeom prst="roundRect">
@@ -6281,13 +6197,13 @@
       </p:sp>
       <p:sp>
         <p:nvSpPr>
-          <p:cNvPr id="9" name="Text 6"/>
+          <p:cNvPr id="8" name="Text 4"/>
           <p:cNvSpPr txBox="1"/>
           <p:nvPr/>
         </p:nvSpPr>
         <p:spPr>
           <a:xfrm>
-            <a:off x="11102419" y="365760"/>
+            <a:off x="11385086" y="365760"/>
             <a:ext cx="1218043" cy="251460"/>
           </a:xfrm>
           <a:prstGeom prst="rect">
@@ -6320,13 +6236,13 @@
       </p:sp>
       <p:sp>
         <p:nvSpPr>
-          <p:cNvPr id="10" name="Shape 7"/>
+          <p:cNvPr id="9" name="Shape 5"/>
           <p:cNvSpPr/>
           <p:nvPr/>
         </p:nvSpPr>
         <p:spPr>
           <a:xfrm>
-            <a:off x="10061373" y="365760"/>
+            <a:off x="10344040" y="365760"/>
             <a:ext cx="951046" cy="251460"/>
           </a:xfrm>
           <a:prstGeom prst="roundRect">
@@ -6339,7 +6255,7 @@
           </a:solidFill>
           <a:ln w="9525">
             <a:solidFill>
-              <a:srgbClr val="E3E7EC"/>
+              <a:srgbClr val="0066FF"/>
             </a:solidFill>
             <a:prstDash val="solid"/>
           </a:ln>
@@ -6347,13 +6263,13 @@
       </p:sp>
       <p:sp>
         <p:nvSpPr>
-          <p:cNvPr id="11" name="Text 8"/>
+          <p:cNvPr id="10" name="Text 6"/>
           <p:cNvSpPr txBox="1"/>
           <p:nvPr/>
         </p:nvSpPr>
         <p:spPr>
           <a:xfrm>
-            <a:off x="10061373" y="365760"/>
+            <a:off x="10344040" y="365760"/>
             <a:ext cx="951046" cy="251460"/>
           </a:xfrm>
           <a:prstGeom prst="rect">
@@ -6372,7 +6288,7 @@
             <a:r>
               <a:rPr lang="en-US" sz="650" b="1" spc="78" kern="0" dirty="0">
                 <a:solidFill>
-                  <a:srgbClr val="4A5565"/>
+                  <a:srgbClr val="0066FF"/>
                 </a:solidFill>
                 <a:latin typeface="Poppins" pitchFamily="34" charset="0"/>
                 <a:ea typeface="Poppins" pitchFamily="34" charset="-122"/>
@@ -6386,7 +6302,7 @@
       </p:sp>
       <p:sp>
         <p:nvSpPr>
-          <p:cNvPr id="12" name="Shape 9"/>
+          <p:cNvPr id="11" name="Shape 7"/>
           <p:cNvSpPr/>
           <p:nvPr/>
         </p:nvSpPr>
@@ -6409,7 +6325,7 @@
       </p:sp>
       <p:sp>
         <p:nvSpPr>
-          <p:cNvPr id="13" name="Shape 10"/>
+          <p:cNvPr id="12" name="Shape 8"/>
           <p:cNvSpPr/>
           <p:nvPr/>
         </p:nvSpPr>
@@ -6434,7 +6350,7 @@
       </p:sp>
       <p:sp>
         <p:nvSpPr>
-          <p:cNvPr id="14" name="Shape 11"/>
+          <p:cNvPr id="13" name="Shape 9"/>
           <p:cNvSpPr/>
           <p:nvPr/>
         </p:nvSpPr>
@@ -6459,7 +6375,7 @@
       </p:sp>
       <p:sp>
         <p:nvSpPr>
-          <p:cNvPr id="15" name="Text 12"/>
+          <p:cNvPr id="14" name="Text 10"/>
           <p:cNvSpPr txBox="1"/>
           <p:nvPr/>
         </p:nvSpPr>
@@ -6501,7 +6417,7 @@
       </p:sp>
       <p:sp>
         <p:nvSpPr>
-          <p:cNvPr id="16" name="Text 13"/>
+          <p:cNvPr id="15" name="Text 11"/>
           <p:cNvSpPr txBox="1"/>
           <p:nvPr/>
         </p:nvSpPr>
@@ -6543,7 +6459,7 @@
       </p:sp>
       <p:sp>
         <p:nvSpPr>
-          <p:cNvPr id="17" name="Text 14"/>
+          <p:cNvPr id="16" name="Text 12"/>
           <p:cNvSpPr txBox="1"/>
           <p:nvPr/>
         </p:nvSpPr>
@@ -6619,7 +6535,7 @@
       </p:sp>
       <p:sp>
         <p:nvSpPr>
-          <p:cNvPr id="18" name="Text 15"/>
+          <p:cNvPr id="17" name="Text 13"/>
           <p:cNvSpPr txBox="1"/>
           <p:nvPr/>
         </p:nvSpPr>
@@ -6678,7 +6594,7 @@
       </p:sp>
       <p:sp>
         <p:nvSpPr>
-          <p:cNvPr id="19" name="Text 16"/>
+          <p:cNvPr id="18" name="Text 14"/>
           <p:cNvSpPr txBox="1"/>
           <p:nvPr/>
         </p:nvSpPr>
@@ -6737,7 +6653,7 @@
       </p:sp>
       <p:sp>
         <p:nvSpPr>
-          <p:cNvPr id="20" name="Shape 17"/>
+          <p:cNvPr id="19" name="Shape 15"/>
           <p:cNvSpPr/>
           <p:nvPr/>
         </p:nvSpPr>
@@ -6760,7 +6676,7 @@
       </p:sp>
       <p:sp>
         <p:nvSpPr>
-          <p:cNvPr id="21" name="Text 18"/>
+          <p:cNvPr id="20" name="Text 16"/>
           <p:cNvSpPr txBox="1"/>
           <p:nvPr/>
         </p:nvSpPr>
@@ -6802,7 +6718,7 @@
       </p:sp>
       <p:sp>
         <p:nvSpPr>
-          <p:cNvPr id="22" name="Shape 19"/>
+          <p:cNvPr id="21" name="Shape 17"/>
           <p:cNvSpPr/>
           <p:nvPr/>
         </p:nvSpPr>
@@ -6827,7 +6743,7 @@
       </p:sp>
       <p:sp>
         <p:nvSpPr>
-          <p:cNvPr id="23" name="Text 20"/>
+          <p:cNvPr id="22" name="Text 18"/>
           <p:cNvSpPr txBox="1"/>
           <p:nvPr/>
         </p:nvSpPr>
@@ -7773,7 +7689,7 @@
       </p:graphicFrame>
       <p:sp>
         <p:nvSpPr>
-          <p:cNvPr id="25" name="Shape 21"/>
+          <p:cNvPr id="24" name="Shape 19"/>
           <p:cNvSpPr/>
           <p:nvPr/>
         </p:nvSpPr>
@@ -7796,7 +7712,7 @@
       </p:sp>
       <p:sp>
         <p:nvSpPr>
-          <p:cNvPr id="26" name="Text 22"/>
+          <p:cNvPr id="25" name="Text 20"/>
           <p:cNvSpPr txBox="1"/>
           <p:nvPr/>
         </p:nvSpPr>
@@ -7838,7 +7754,7 @@
       </p:sp>
       <p:sp>
         <p:nvSpPr>
-          <p:cNvPr id="27" name="Shape 23"/>
+          <p:cNvPr id="26" name="Shape 21"/>
           <p:cNvSpPr/>
           <p:nvPr/>
         </p:nvSpPr>
@@ -7863,7 +7779,7 @@
       </p:sp>
       <p:sp>
         <p:nvSpPr>
-          <p:cNvPr id="28" name="Text 24"/>
+          <p:cNvPr id="27" name="Text 22"/>
           <p:cNvSpPr txBox="1"/>
           <p:nvPr/>
         </p:nvSpPr>
@@ -7905,7 +7821,7 @@
       </p:sp>
       <p:sp>
         <p:nvSpPr>
-          <p:cNvPr id="29" name="Shape 25"/>
+          <p:cNvPr id="28" name="Shape 23"/>
           <p:cNvSpPr/>
           <p:nvPr/>
         </p:nvSpPr>
@@ -7930,7 +7846,7 @@
       </p:sp>
       <p:sp>
         <p:nvSpPr>
-          <p:cNvPr id="30" name="Text 26"/>
+          <p:cNvPr id="29" name="Text 24"/>
           <p:cNvSpPr txBox="1"/>
           <p:nvPr/>
         </p:nvSpPr>
@@ -7972,7 +7888,7 @@
       </p:sp>
       <p:sp>
         <p:nvSpPr>
-          <p:cNvPr id="31" name="Text 27"/>
+          <p:cNvPr id="30" name="Text 25"/>
           <p:cNvSpPr txBox="1"/>
           <p:nvPr/>
         </p:nvSpPr>
@@ -8014,7 +7930,7 @@
       </p:sp>
       <p:sp>
         <p:nvSpPr>
-          <p:cNvPr id="32" name="Shape 28"/>
+          <p:cNvPr id="31" name="Shape 26"/>
           <p:cNvSpPr/>
           <p:nvPr/>
         </p:nvSpPr>
@@ -8039,7 +7955,7 @@
       </p:sp>
       <p:sp>
         <p:nvSpPr>
-          <p:cNvPr id="33" name="Text 29"/>
+          <p:cNvPr id="32" name="Text 27"/>
           <p:cNvSpPr txBox="1"/>
           <p:nvPr/>
         </p:nvSpPr>
@@ -8081,7 +7997,7 @@
       </p:sp>
       <p:sp>
         <p:nvSpPr>
-          <p:cNvPr id="34" name="Text 30"/>
+          <p:cNvPr id="33" name="Text 28"/>
           <p:cNvSpPr txBox="1"/>
           <p:nvPr/>
         </p:nvSpPr>
@@ -8123,7 +8039,7 @@
       </p:sp>
       <p:sp>
         <p:nvSpPr>
-          <p:cNvPr id="35" name="Shape 31"/>
+          <p:cNvPr id="34" name="Shape 29"/>
           <p:cNvSpPr/>
           <p:nvPr/>
         </p:nvSpPr>
@@ -8148,7 +8064,7 @@
       </p:sp>
       <p:sp>
         <p:nvSpPr>
-          <p:cNvPr id="36" name="Text 32"/>
+          <p:cNvPr id="35" name="Text 30"/>
           <p:cNvSpPr txBox="1"/>
           <p:nvPr/>
         </p:nvSpPr>
@@ -8190,7 +8106,7 @@
       </p:sp>
       <p:sp>
         <p:nvSpPr>
-          <p:cNvPr id="37" name="Text 33"/>
+          <p:cNvPr id="36" name="Text 31"/>
           <p:cNvSpPr txBox="1"/>
           <p:nvPr/>
         </p:nvSpPr>
@@ -8232,7 +8148,7 @@
       </p:sp>
       <p:sp>
         <p:nvSpPr>
-          <p:cNvPr id="38" name="Text 34"/>
+          <p:cNvPr id="37" name="Text 32"/>
           <p:cNvSpPr txBox="1"/>
           <p:nvPr/>
         </p:nvSpPr>
@@ -8274,7 +8190,7 @@
       </p:sp>
       <p:sp>
         <p:nvSpPr>
-          <p:cNvPr id="39" name="Text 35"/>
+          <p:cNvPr id="38" name="Text 33"/>
           <p:cNvSpPr txBox="1"/>
           <p:nvPr/>
         </p:nvSpPr>
@@ -8333,7 +8249,7 @@
       </p:sp>
       <p:sp>
         <p:nvSpPr>
-          <p:cNvPr id="40" name="Shape 36"/>
+          <p:cNvPr id="39" name="Shape 34"/>
           <p:cNvSpPr/>
           <p:nvPr/>
         </p:nvSpPr>
@@ -8356,7 +8272,7 @@
       </p:sp>
       <p:sp>
         <p:nvSpPr>
-          <p:cNvPr id="41" name="Text 37"/>
+          <p:cNvPr id="40" name="Text 35"/>
           <p:cNvSpPr txBox="1"/>
           <p:nvPr/>
         </p:nvSpPr>
@@ -8398,7 +8314,7 @@
       </p:sp>
       <p:sp>
         <p:nvSpPr>
-          <p:cNvPr id="42" name="Shape 38"/>
+          <p:cNvPr id="41" name="Shape 36"/>
           <p:cNvSpPr/>
           <p:nvPr/>
         </p:nvSpPr>
@@ -8423,7 +8339,7 @@
       </p:sp>
       <p:sp>
         <p:nvSpPr>
-          <p:cNvPr id="43" name="Text 39"/>
+          <p:cNvPr id="42" name="Text 37"/>
           <p:cNvSpPr txBox="1"/>
           <p:nvPr/>
         </p:nvSpPr>
@@ -8465,7 +8381,7 @@
       </p:sp>
       <p:sp>
         <p:nvSpPr>
-          <p:cNvPr id="44" name="Text 40"/>
+          <p:cNvPr id="43" name="Text 38"/>
           <p:cNvSpPr txBox="1"/>
           <p:nvPr/>
         </p:nvSpPr>
@@ -8524,7 +8440,7 @@
       </p:sp>
       <p:sp>
         <p:nvSpPr>
-          <p:cNvPr id="45" name="Text 41"/>
+          <p:cNvPr id="44" name="Text 39"/>
           <p:cNvSpPr txBox="1"/>
           <p:nvPr/>
         </p:nvSpPr>
@@ -8583,7 +8499,7 @@
       </p:sp>
       <p:sp>
         <p:nvSpPr>
-          <p:cNvPr id="46" name="Text 42"/>
+          <p:cNvPr id="45" name="Text 40"/>
           <p:cNvSpPr txBox="1"/>
           <p:nvPr/>
         </p:nvSpPr>
@@ -8642,7 +8558,7 @@
       </p:sp>
       <p:sp>
         <p:nvSpPr>
-          <p:cNvPr id="47" name="Text 43"/>
+          <p:cNvPr id="46" name="Text 41"/>
           <p:cNvSpPr txBox="1"/>
           <p:nvPr/>
         </p:nvSpPr>
@@ -8701,7 +8617,7 @@
       </p:sp>
       <p:sp>
         <p:nvSpPr>
-          <p:cNvPr id="48" name="Text 44"/>
+          <p:cNvPr id="47" name="Text 42"/>
           <p:cNvSpPr txBox="1"/>
           <p:nvPr/>
         </p:nvSpPr>
@@ -8760,7 +8676,7 @@
       </p:sp>
       <p:sp>
         <p:nvSpPr>
-          <p:cNvPr id="49" name="Shape 45"/>
+          <p:cNvPr id="48" name="Shape 43"/>
           <p:cNvSpPr/>
           <p:nvPr/>
         </p:nvSpPr>
@@ -8783,7 +8699,7 @@
       </p:sp>
       <p:sp>
         <p:nvSpPr>
-          <p:cNvPr id="50" name="Text 46"/>
+          <p:cNvPr id="49" name="Text 44"/>
           <p:cNvSpPr txBox="1"/>
           <p:nvPr/>
         </p:nvSpPr>
@@ -8825,7 +8741,7 @@
       </p:sp>
       <p:sp>
         <p:nvSpPr>
-          <p:cNvPr id="51" name="Shape 47"/>
+          <p:cNvPr id="50" name="Shape 45"/>
           <p:cNvSpPr/>
           <p:nvPr/>
         </p:nvSpPr>
@@ -8850,7 +8766,7 @@
       </p:sp>
       <p:sp>
         <p:nvSpPr>
-          <p:cNvPr id="52" name="Text 48"/>
+          <p:cNvPr id="51" name="Text 46"/>
           <p:cNvSpPr txBox="1"/>
           <p:nvPr/>
         </p:nvSpPr>
@@ -8892,7 +8808,7 @@
       </p:sp>
       <p:sp>
         <p:nvSpPr>
-          <p:cNvPr id="53" name="Text 49"/>
+          <p:cNvPr id="52" name="Text 47"/>
           <p:cNvSpPr txBox="1"/>
           <p:nvPr/>
         </p:nvSpPr>
@@ -8934,7 +8850,7 @@
       </p:sp>
       <p:sp>
         <p:nvSpPr>
-          <p:cNvPr id="54" name="Text 50"/>
+          <p:cNvPr id="53" name="Text 48"/>
           <p:cNvSpPr txBox="1"/>
           <p:nvPr/>
         </p:nvSpPr>
@@ -8993,7 +8909,7 @@
       </p:sp>
       <p:sp>
         <p:nvSpPr>
-          <p:cNvPr id="55" name="Text 51"/>
+          <p:cNvPr id="54" name="Text 49"/>
           <p:cNvSpPr txBox="1"/>
           <p:nvPr/>
         </p:nvSpPr>
@@ -9052,7 +8968,7 @@
       </p:sp>
       <p:sp>
         <p:nvSpPr>
-          <p:cNvPr id="56" name="Text 52"/>
+          <p:cNvPr id="55" name="Text 50"/>
           <p:cNvSpPr txBox="1"/>
           <p:nvPr/>
         </p:nvSpPr>
@@ -9111,7 +9027,7 @@
       </p:sp>
       <p:sp>
         <p:nvSpPr>
-          <p:cNvPr id="57" name="Shape 53"/>
+          <p:cNvPr id="56" name="Shape 51"/>
           <p:cNvSpPr/>
           <p:nvPr/>
         </p:nvSpPr>
@@ -9134,7 +9050,7 @@
       </p:sp>
       <p:sp>
         <p:nvSpPr>
-          <p:cNvPr id="58" name="Text 54"/>
+          <p:cNvPr id="57" name="Text 52"/>
           <p:cNvSpPr txBox="1"/>
           <p:nvPr/>
         </p:nvSpPr>
@@ -9176,7 +9092,7 @@
       </p:sp>
       <p:sp>
         <p:nvSpPr>
-          <p:cNvPr id="59" name="Shape 55"/>
+          <p:cNvPr id="58" name="Shape 53"/>
           <p:cNvSpPr/>
           <p:nvPr/>
         </p:nvSpPr>
@@ -9201,7 +9117,7 @@
       </p:sp>
       <p:sp>
         <p:nvSpPr>
-          <p:cNvPr id="60" name="Text 56"/>
+          <p:cNvPr id="59" name="Text 54"/>
           <p:cNvSpPr txBox="1"/>
           <p:nvPr/>
         </p:nvSpPr>
@@ -9243,7 +9159,7 @@
       </p:sp>
       <p:sp>
         <p:nvSpPr>
-          <p:cNvPr id="61" name="Shape 57"/>
+          <p:cNvPr id="60" name="Shape 55"/>
           <p:cNvSpPr/>
           <p:nvPr/>
         </p:nvSpPr>
@@ -9268,7 +9184,7 @@
       </p:sp>
       <p:sp>
         <p:nvSpPr>
-          <p:cNvPr id="62" name="Text 58"/>
+          <p:cNvPr id="61" name="Text 56"/>
           <p:cNvSpPr txBox="1"/>
           <p:nvPr/>
         </p:nvSpPr>
@@ -9327,7 +9243,7 @@
       </p:sp>
       <p:sp>
         <p:nvSpPr>
-          <p:cNvPr id="63" name="Shape 59"/>
+          <p:cNvPr id="62" name="Shape 57"/>
           <p:cNvSpPr/>
           <p:nvPr/>
         </p:nvSpPr>
@@ -9352,7 +9268,7 @@
       </p:sp>
       <p:sp>
         <p:nvSpPr>
-          <p:cNvPr id="64" name="Text 60"/>
+          <p:cNvPr id="63" name="Text 58"/>
           <p:cNvSpPr txBox="1"/>
           <p:nvPr/>
         </p:nvSpPr>
@@ -9411,7 +9327,7 @@
       </p:sp>
       <p:sp>
         <p:nvSpPr>
-          <p:cNvPr id="65" name="Shape 61"/>
+          <p:cNvPr id="64" name="Shape 59"/>
           <p:cNvSpPr/>
           <p:nvPr/>
         </p:nvSpPr>
@@ -9436,7 +9352,7 @@
       </p:sp>
       <p:sp>
         <p:nvSpPr>
-          <p:cNvPr id="66" name="Text 62"/>
+          <p:cNvPr id="65" name="Text 60"/>
           <p:cNvSpPr txBox="1"/>
           <p:nvPr/>
         </p:nvSpPr>
@@ -9495,7 +9411,7 @@
       </p:sp>
       <p:sp>
         <p:nvSpPr>
-          <p:cNvPr id="67" name="Shape 63"/>
+          <p:cNvPr id="66" name="Shape 61"/>
           <p:cNvSpPr/>
           <p:nvPr/>
         </p:nvSpPr>
@@ -9520,7 +9436,7 @@
       </p:sp>
       <p:sp>
         <p:nvSpPr>
-          <p:cNvPr id="68" name="Text 64"/>
+          <p:cNvPr id="67" name="Text 62"/>
           <p:cNvSpPr txBox="1"/>
           <p:nvPr/>
         </p:nvSpPr>
@@ -9579,7 +9495,7 @@
       </p:sp>
       <p:sp>
         <p:nvSpPr>
-          <p:cNvPr id="69" name="Shape 65"/>
+          <p:cNvPr id="68" name="Shape 63"/>
           <p:cNvSpPr/>
           <p:nvPr/>
         </p:nvSpPr>
@@ -9604,7 +9520,7 @@
       </p:sp>
       <p:sp>
         <p:nvSpPr>
-          <p:cNvPr id="70" name="Text 66"/>
+          <p:cNvPr id="69" name="Text 64"/>
           <p:cNvSpPr txBox="1"/>
           <p:nvPr/>
         </p:nvSpPr>
@@ -9663,7 +9579,7 @@
       </p:sp>
       <p:sp>
         <p:nvSpPr>
-          <p:cNvPr id="71" name="Shape 67"/>
+          <p:cNvPr id="70" name="Shape 65"/>
           <p:cNvSpPr/>
           <p:nvPr/>
         </p:nvSpPr>
@@ -9688,7 +9604,7 @@
       </p:sp>
       <p:sp>
         <p:nvSpPr>
-          <p:cNvPr id="72" name="Text 68"/>
+          <p:cNvPr id="71" name="Text 66"/>
           <p:cNvSpPr txBox="1"/>
           <p:nvPr/>
         </p:nvSpPr>
@@ -9730,7 +9646,7 @@
       </p:sp>
       <p:sp>
         <p:nvSpPr>
-          <p:cNvPr id="73" name="Shape 69"/>
+          <p:cNvPr id="72" name="Shape 67"/>
           <p:cNvSpPr/>
           <p:nvPr/>
         </p:nvSpPr>
@@ -9755,7 +9671,7 @@
       </p:sp>
       <p:sp>
         <p:nvSpPr>
-          <p:cNvPr id="74" name="Text 70"/>
+          <p:cNvPr id="73" name="Text 68"/>
           <p:cNvSpPr txBox="1"/>
           <p:nvPr/>
         </p:nvSpPr>
@@ -9814,7 +9730,7 @@
       </p:sp>
       <p:sp>
         <p:nvSpPr>
-          <p:cNvPr id="75" name="Shape 71"/>
+          <p:cNvPr id="74" name="Shape 69"/>
           <p:cNvSpPr/>
           <p:nvPr/>
         </p:nvSpPr>
@@ -9839,7 +9755,7 @@
       </p:sp>
       <p:sp>
         <p:nvSpPr>
-          <p:cNvPr id="76" name="Text 72"/>
+          <p:cNvPr id="75" name="Text 70"/>
           <p:cNvSpPr txBox="1"/>
           <p:nvPr/>
         </p:nvSpPr>
@@ -9898,7 +9814,7 @@
       </p:sp>
       <p:sp>
         <p:nvSpPr>
-          <p:cNvPr id="77" name="Shape 73"/>
+          <p:cNvPr id="76" name="Shape 71"/>
           <p:cNvSpPr/>
           <p:nvPr/>
         </p:nvSpPr>
@@ -9923,7 +9839,7 @@
       </p:sp>
       <p:sp>
         <p:nvSpPr>
-          <p:cNvPr id="78" name="Text 74"/>
+          <p:cNvPr id="77" name="Text 72"/>
           <p:cNvSpPr txBox="1"/>
           <p:nvPr/>
         </p:nvSpPr>
@@ -9982,7 +9898,7 @@
       </p:sp>
       <p:sp>
         <p:nvSpPr>
-          <p:cNvPr id="79" name="Shape 75"/>
+          <p:cNvPr id="78" name="Shape 73"/>
           <p:cNvSpPr/>
           <p:nvPr/>
         </p:nvSpPr>
@@ -10007,7 +9923,7 @@
       </p:sp>
       <p:sp>
         <p:nvSpPr>
-          <p:cNvPr id="80" name="Text 76"/>
+          <p:cNvPr id="79" name="Text 74"/>
           <p:cNvSpPr txBox="1"/>
           <p:nvPr/>
         </p:nvSpPr>
@@ -10066,7 +9982,7 @@
       </p:sp>
       <p:sp>
         <p:nvSpPr>
-          <p:cNvPr id="81" name="Shape 77"/>
+          <p:cNvPr id="80" name="Shape 75"/>
           <p:cNvSpPr/>
           <p:nvPr/>
         </p:nvSpPr>
@@ -10089,7 +10005,7 @@
       </p:sp>
       <p:sp>
         <p:nvSpPr>
-          <p:cNvPr id="82" name="Text 78"/>
+          <p:cNvPr id="81" name="Text 76"/>
           <p:cNvSpPr txBox="1"/>
           <p:nvPr/>
         </p:nvSpPr>
@@ -10224,81 +10140,39 @@
           </a:p>
         </p:txBody>
       </p:sp>
-      <p:sp>
-        <p:nvSpPr>
-          <p:cNvPr id="4" name="Shape 1"/>
+      <p:pic>
+        <p:nvPicPr>
+          <p:cNvPr id="4" name="Image 1" descr="../site/brand/jewell-wordmark.png">    </p:cNvPr>
+          <p:cNvPicPr>
+            <a:picLocks noChangeAspect="1"/>
+          </p:cNvPicPr>
+          <p:nvPr/>
+        </p:nvPicPr>
+        <p:blipFill>
+          <a:blip r:embed="rId2"/>
+          <a:stretch>
+            <a:fillRect/>
+          </a:stretch>
+        </p:blipFill>
+        <p:spPr>
+          <a:xfrm>
+            <a:off x="13915605" y="394290"/>
+            <a:ext cx="880302" cy="194400"/>
+          </a:xfrm>
+          <a:prstGeom prst="rect">
+            <a:avLst/>
+          </a:prstGeom>
+        </p:spPr>
+      </p:pic>
+      <p:sp>
+        <p:nvSpPr>
+          <p:cNvPr id="5" name="Shape 1"/>
           <p:cNvSpPr/>
           <p:nvPr/>
         </p:nvSpPr>
         <p:spPr>
           <a:xfrm>
-            <a:off x="13650938" y="365760"/>
-            <a:ext cx="1144969" cy="251460"/>
-          </a:xfrm>
-          <a:prstGeom prst="roundRect">
-            <a:avLst>
-              <a:gd name="adj" fmla="val 50000"/>
-            </a:avLst>
-          </a:prstGeom>
-          <a:solidFill>
-            <a:srgbClr val="0E171F"/>
-          </a:solidFill>
-          <a:ln w="9525">
-            <a:solidFill>
-              <a:srgbClr val="0E171F"/>
-            </a:solidFill>
-            <a:prstDash val="solid"/>
-          </a:ln>
-        </p:spPr>
-      </p:sp>
-      <p:sp>
-        <p:nvSpPr>
-          <p:cNvPr id="5" name="Text 2"/>
-          <p:cNvSpPr txBox="1"/>
-          <p:nvPr/>
-        </p:nvSpPr>
-        <p:spPr>
-          <a:xfrm>
-            <a:off x="13650938" y="365760"/>
-            <a:ext cx="1144969" cy="251460"/>
-          </a:xfrm>
-          <a:prstGeom prst="rect">
-            <a:avLst/>
-          </a:prstGeom>
-          <a:noFill/>
-          <a:ln/>
-        </p:spPr>
-        <p:txBody>
-          <a:bodyPr wrap="square" lIns="0" tIns="0" rIns="0" bIns="0" rtlCol="0" anchor="ctr"/>
-          <a:lstStyle/>
-          <a:p>
-            <a:pPr algn="ctr" indent="0" marL="0">
-              <a:buNone/>
-            </a:pPr>
-            <a:r>
-              <a:rPr lang="en-US" sz="650" b="1" spc="78" kern="0" dirty="0">
-                <a:solidFill>
-                  <a:srgbClr val="FFFFFF"/>
-                </a:solidFill>
-                <a:latin typeface="Poppins" pitchFamily="34" charset="0"/>
-                <a:ea typeface="Poppins" pitchFamily="34" charset="-122"/>
-                <a:cs typeface="Poppins" pitchFamily="34" charset="-120"/>
-              </a:rPr>
-              <a:t>JEWELL PROJECTS</a:t>
-            </a:r>
-            <a:endParaRPr lang="en-US" sz="650" dirty="0"/>
-          </a:p>
-        </p:txBody>
-      </p:sp>
-      <p:sp>
-        <p:nvSpPr>
-          <p:cNvPr id="6" name="Shape 3"/>
-          <p:cNvSpPr/>
-          <p:nvPr/>
-        </p:nvSpPr>
-        <p:spPr>
-          <a:xfrm>
-            <a:off x="12410462" y="365760"/>
+            <a:off x="12693129" y="365760"/>
             <a:ext cx="1150475" cy="251460"/>
           </a:xfrm>
           <a:prstGeom prst="roundRect">
@@ -10319,13 +10193,13 @@
       </p:sp>
       <p:sp>
         <p:nvSpPr>
-          <p:cNvPr id="7" name="Text 4"/>
+          <p:cNvPr id="6" name="Text 2"/>
           <p:cNvSpPr txBox="1"/>
           <p:nvPr/>
         </p:nvSpPr>
         <p:spPr>
           <a:xfrm>
-            <a:off x="12410462" y="365760"/>
+            <a:off x="12693129" y="365760"/>
             <a:ext cx="1150475" cy="251460"/>
           </a:xfrm>
           <a:prstGeom prst="rect">
@@ -10358,13 +10232,13 @@
       </p:sp>
       <p:sp>
         <p:nvSpPr>
-          <p:cNvPr id="8" name="Shape 5"/>
+          <p:cNvPr id="7" name="Shape 3"/>
           <p:cNvSpPr/>
           <p:nvPr/>
         </p:nvSpPr>
         <p:spPr>
           <a:xfrm>
-            <a:off x="11102419" y="365760"/>
+            <a:off x="11385086" y="365760"/>
             <a:ext cx="1218043" cy="251460"/>
           </a:xfrm>
           <a:prstGeom prst="roundRect">
@@ -10385,13 +10259,13 @@
       </p:sp>
       <p:sp>
         <p:nvSpPr>
-          <p:cNvPr id="9" name="Text 6"/>
+          <p:cNvPr id="8" name="Text 4"/>
           <p:cNvSpPr txBox="1"/>
           <p:nvPr/>
         </p:nvSpPr>
         <p:spPr>
           <a:xfrm>
-            <a:off x="11102419" y="365760"/>
+            <a:off x="11385086" y="365760"/>
             <a:ext cx="1218043" cy="251460"/>
           </a:xfrm>
           <a:prstGeom prst="rect">
@@ -10424,13 +10298,13 @@
       </p:sp>
       <p:sp>
         <p:nvSpPr>
-          <p:cNvPr id="10" name="Shape 7"/>
+          <p:cNvPr id="9" name="Shape 5"/>
           <p:cNvSpPr/>
           <p:nvPr/>
         </p:nvSpPr>
         <p:spPr>
           <a:xfrm>
-            <a:off x="10045300" y="365760"/>
+            <a:off x="10327967" y="365760"/>
             <a:ext cx="967119" cy="251460"/>
           </a:xfrm>
           <a:prstGeom prst="roundRect">
@@ -10443,7 +10317,7 @@
           </a:solidFill>
           <a:ln w="9525">
             <a:solidFill>
-              <a:srgbClr val="E3E7EC"/>
+              <a:srgbClr val="0066FF"/>
             </a:solidFill>
             <a:prstDash val="solid"/>
           </a:ln>
@@ -10451,13 +10325,13 @@
       </p:sp>
       <p:sp>
         <p:nvSpPr>
-          <p:cNvPr id="11" name="Text 8"/>
+          <p:cNvPr id="10" name="Text 6"/>
           <p:cNvSpPr txBox="1"/>
           <p:nvPr/>
         </p:nvSpPr>
         <p:spPr>
           <a:xfrm>
-            <a:off x="10045300" y="365760"/>
+            <a:off x="10327967" y="365760"/>
             <a:ext cx="967119" cy="251460"/>
           </a:xfrm>
           <a:prstGeom prst="rect">
@@ -10476,7 +10350,7 @@
             <a:r>
               <a:rPr lang="en-US" sz="650" b="1" spc="78" kern="0" dirty="0">
                 <a:solidFill>
-                  <a:srgbClr val="4A5565"/>
+                  <a:srgbClr val="0066FF"/>
                 </a:solidFill>
                 <a:latin typeface="Poppins" pitchFamily="34" charset="0"/>
                 <a:ea typeface="Poppins" pitchFamily="34" charset="-122"/>
@@ -10490,7 +10364,7 @@
       </p:sp>
       <p:sp>
         <p:nvSpPr>
-          <p:cNvPr id="12" name="Shape 9"/>
+          <p:cNvPr id="11" name="Shape 7"/>
           <p:cNvSpPr/>
           <p:nvPr/>
         </p:nvSpPr>
@@ -10513,7 +10387,7 @@
       </p:sp>
       <p:sp>
         <p:nvSpPr>
-          <p:cNvPr id="13" name="Shape 10"/>
+          <p:cNvPr id="12" name="Shape 8"/>
           <p:cNvSpPr/>
           <p:nvPr/>
         </p:nvSpPr>
@@ -10538,7 +10412,7 @@
       </p:sp>
       <p:sp>
         <p:nvSpPr>
-          <p:cNvPr id="14" name="Shape 11"/>
+          <p:cNvPr id="13" name="Shape 9"/>
           <p:cNvSpPr/>
           <p:nvPr/>
         </p:nvSpPr>
@@ -10563,7 +10437,7 @@
       </p:sp>
       <p:sp>
         <p:nvSpPr>
-          <p:cNvPr id="15" name="Text 12"/>
+          <p:cNvPr id="14" name="Text 10"/>
           <p:cNvSpPr txBox="1"/>
           <p:nvPr/>
         </p:nvSpPr>
@@ -10605,7 +10479,7 @@
       </p:sp>
       <p:sp>
         <p:nvSpPr>
-          <p:cNvPr id="16" name="Text 13"/>
+          <p:cNvPr id="15" name="Text 11"/>
           <p:cNvSpPr txBox="1"/>
           <p:nvPr/>
         </p:nvSpPr>
@@ -10647,7 +10521,7 @@
       </p:sp>
       <p:sp>
         <p:nvSpPr>
-          <p:cNvPr id="17" name="Text 14"/>
+          <p:cNvPr id="16" name="Text 12"/>
           <p:cNvSpPr txBox="1"/>
           <p:nvPr/>
         </p:nvSpPr>
@@ -10689,7 +10563,7 @@
       </p:sp>
       <p:sp>
         <p:nvSpPr>
-          <p:cNvPr id="18" name="Text 15"/>
+          <p:cNvPr id="17" name="Text 13"/>
           <p:cNvSpPr txBox="1"/>
           <p:nvPr/>
         </p:nvSpPr>
@@ -10731,7 +10605,7 @@
       </p:sp>
       <p:sp>
         <p:nvSpPr>
-          <p:cNvPr id="19" name="Text 16"/>
+          <p:cNvPr id="18" name="Text 14"/>
           <p:cNvSpPr txBox="1"/>
           <p:nvPr/>
         </p:nvSpPr>
@@ -10790,7 +10664,7 @@
       </p:sp>
       <p:sp>
         <p:nvSpPr>
-          <p:cNvPr id="20" name="Shape 17"/>
+          <p:cNvPr id="19" name="Shape 15"/>
           <p:cNvSpPr/>
           <p:nvPr/>
         </p:nvSpPr>
@@ -10813,7 +10687,7 @@
       </p:sp>
       <p:sp>
         <p:nvSpPr>
-          <p:cNvPr id="21" name="Text 18"/>
+          <p:cNvPr id="20" name="Text 16"/>
           <p:cNvSpPr txBox="1"/>
           <p:nvPr/>
         </p:nvSpPr>
@@ -10855,7 +10729,7 @@
       </p:sp>
       <p:sp>
         <p:nvSpPr>
-          <p:cNvPr id="22" name="Shape 19"/>
+          <p:cNvPr id="21" name="Shape 17"/>
           <p:cNvSpPr/>
           <p:nvPr/>
         </p:nvSpPr>
@@ -10880,7 +10754,7 @@
       </p:sp>
       <p:sp>
         <p:nvSpPr>
-          <p:cNvPr id="23" name="Text 20"/>
+          <p:cNvPr id="22" name="Text 18"/>
           <p:cNvSpPr txBox="1"/>
           <p:nvPr/>
         </p:nvSpPr>
@@ -10922,7 +10796,7 @@
       </p:sp>
       <p:sp>
         <p:nvSpPr>
-          <p:cNvPr id="24" name="Text 21"/>
+          <p:cNvPr id="23" name="Text 19"/>
           <p:cNvSpPr txBox="1"/>
           <p:nvPr/>
         </p:nvSpPr>
@@ -10964,7 +10838,7 @@
       </p:sp>
       <p:sp>
         <p:nvSpPr>
-          <p:cNvPr id="25" name="Text 22"/>
+          <p:cNvPr id="24" name="Text 20"/>
           <p:cNvSpPr txBox="1"/>
           <p:nvPr/>
         </p:nvSpPr>
@@ -11040,7 +10914,7 @@
       </p:sp>
       <p:sp>
         <p:nvSpPr>
-          <p:cNvPr id="26" name="Text 23"/>
+          <p:cNvPr id="25" name="Text 21"/>
           <p:cNvSpPr txBox="1"/>
           <p:nvPr/>
         </p:nvSpPr>
@@ -11099,7 +10973,7 @@
       </p:sp>
       <p:sp>
         <p:nvSpPr>
-          <p:cNvPr id="27" name="Text 24"/>
+          <p:cNvPr id="26" name="Text 22"/>
           <p:cNvSpPr txBox="1"/>
           <p:nvPr/>
         </p:nvSpPr>
@@ -11158,7 +11032,7 @@
       </p:sp>
       <p:sp>
         <p:nvSpPr>
-          <p:cNvPr id="28" name="Shape 25"/>
+          <p:cNvPr id="27" name="Shape 23"/>
           <p:cNvSpPr/>
           <p:nvPr/>
         </p:nvSpPr>
@@ -11181,7 +11055,7 @@
       </p:sp>
       <p:sp>
         <p:nvSpPr>
-          <p:cNvPr id="29" name="Text 26"/>
+          <p:cNvPr id="28" name="Text 24"/>
           <p:cNvSpPr txBox="1"/>
           <p:nvPr/>
         </p:nvSpPr>
@@ -11223,7 +11097,7 @@
       </p:sp>
       <p:sp>
         <p:nvSpPr>
-          <p:cNvPr id="30" name="Shape 27"/>
+          <p:cNvPr id="29" name="Shape 25"/>
           <p:cNvSpPr/>
           <p:nvPr/>
         </p:nvSpPr>
@@ -11248,7 +11122,7 @@
       </p:sp>
       <p:sp>
         <p:nvSpPr>
-          <p:cNvPr id="31" name="Text 28"/>
+          <p:cNvPr id="30" name="Text 26"/>
           <p:cNvSpPr txBox="1"/>
           <p:nvPr/>
         </p:nvSpPr>
@@ -11290,7 +11164,7 @@
       </p:sp>
       <p:sp>
         <p:nvSpPr>
-          <p:cNvPr id="32" name="Text 29"/>
+          <p:cNvPr id="31" name="Text 27"/>
           <p:cNvSpPr txBox="1"/>
           <p:nvPr/>
         </p:nvSpPr>
@@ -11349,7 +11223,7 @@
       </p:sp>
       <p:sp>
         <p:nvSpPr>
-          <p:cNvPr id="33" name="Text 30"/>
+          <p:cNvPr id="32" name="Text 28"/>
           <p:cNvSpPr txBox="1"/>
           <p:nvPr/>
         </p:nvSpPr>
@@ -11408,7 +11282,7 @@
       </p:sp>
       <p:sp>
         <p:nvSpPr>
-          <p:cNvPr id="34" name="Text 31"/>
+          <p:cNvPr id="33" name="Text 29"/>
           <p:cNvSpPr txBox="1"/>
           <p:nvPr/>
         </p:nvSpPr>
@@ -11467,7 +11341,7 @@
       </p:sp>
       <p:sp>
         <p:nvSpPr>
-          <p:cNvPr id="35" name="Shape 32"/>
+          <p:cNvPr id="34" name="Shape 30"/>
           <p:cNvSpPr/>
           <p:nvPr/>
         </p:nvSpPr>
@@ -11490,7 +11364,7 @@
       </p:sp>
       <p:sp>
         <p:nvSpPr>
-          <p:cNvPr id="36" name="Text 33"/>
+          <p:cNvPr id="35" name="Text 31"/>
           <p:cNvSpPr txBox="1"/>
           <p:nvPr/>
         </p:nvSpPr>
@@ -11532,7 +11406,7 @@
       </p:sp>
       <p:sp>
         <p:nvSpPr>
-          <p:cNvPr id="37" name="Shape 34"/>
+          <p:cNvPr id="36" name="Shape 32"/>
           <p:cNvSpPr/>
           <p:nvPr/>
         </p:nvSpPr>
@@ -11557,7 +11431,7 @@
       </p:sp>
       <p:sp>
         <p:nvSpPr>
-          <p:cNvPr id="38" name="Text 35"/>
+          <p:cNvPr id="37" name="Text 33"/>
           <p:cNvSpPr txBox="1"/>
           <p:nvPr/>
         </p:nvSpPr>
@@ -11599,7 +11473,7 @@
       </p:sp>
       <p:sp>
         <p:nvSpPr>
-          <p:cNvPr id="39" name="Text 36"/>
+          <p:cNvPr id="38" name="Text 34"/>
           <p:cNvSpPr txBox="1"/>
           <p:nvPr/>
         </p:nvSpPr>
@@ -11641,7 +11515,7 @@
       </p:sp>
       <p:sp>
         <p:nvSpPr>
-          <p:cNvPr id="40" name="Text 37"/>
+          <p:cNvPr id="39" name="Text 35"/>
           <p:cNvSpPr txBox="1"/>
           <p:nvPr/>
         </p:nvSpPr>
@@ -11700,7 +11574,7 @@
       </p:sp>
       <p:sp>
         <p:nvSpPr>
-          <p:cNvPr id="41" name="Text 38"/>
+          <p:cNvPr id="40" name="Text 36"/>
           <p:cNvSpPr txBox="1"/>
           <p:nvPr/>
         </p:nvSpPr>
@@ -11759,7 +11633,7 @@
       </p:sp>
       <p:sp>
         <p:nvSpPr>
-          <p:cNvPr id="42" name="Text 39"/>
+          <p:cNvPr id="41" name="Text 37"/>
           <p:cNvSpPr txBox="1"/>
           <p:nvPr/>
         </p:nvSpPr>
@@ -11818,7 +11692,7 @@
       </p:sp>
       <p:sp>
         <p:nvSpPr>
-          <p:cNvPr id="43" name="Shape 40"/>
+          <p:cNvPr id="42" name="Shape 38"/>
           <p:cNvSpPr/>
           <p:nvPr/>
         </p:nvSpPr>
@@ -11841,7 +11715,7 @@
       </p:sp>
       <p:sp>
         <p:nvSpPr>
-          <p:cNvPr id="44" name="Text 41"/>
+          <p:cNvPr id="43" name="Text 39"/>
           <p:cNvSpPr txBox="1"/>
           <p:nvPr/>
         </p:nvSpPr>
@@ -11883,7 +11757,7 @@
       </p:sp>
       <p:sp>
         <p:nvSpPr>
-          <p:cNvPr id="45" name="Shape 42"/>
+          <p:cNvPr id="44" name="Shape 40"/>
           <p:cNvSpPr/>
           <p:nvPr/>
         </p:nvSpPr>
@@ -11908,7 +11782,7 @@
       </p:sp>
       <p:sp>
         <p:nvSpPr>
-          <p:cNvPr id="46" name="Text 43"/>
+          <p:cNvPr id="45" name="Text 41"/>
           <p:cNvSpPr txBox="1"/>
           <p:nvPr/>
         </p:nvSpPr>
@@ -11950,7 +11824,7 @@
       </p:sp>
       <p:sp>
         <p:nvSpPr>
-          <p:cNvPr id="47" name="Shape 44"/>
+          <p:cNvPr id="46" name="Shape 42"/>
           <p:cNvSpPr/>
           <p:nvPr/>
         </p:nvSpPr>
@@ -11975,7 +11849,7 @@
       </p:sp>
       <p:sp>
         <p:nvSpPr>
-          <p:cNvPr id="48" name="Text 45"/>
+          <p:cNvPr id="47" name="Text 43"/>
           <p:cNvSpPr txBox="1"/>
           <p:nvPr/>
         </p:nvSpPr>
@@ -12034,7 +11908,7 @@
       </p:sp>
       <p:sp>
         <p:nvSpPr>
-          <p:cNvPr id="49" name="Shape 46"/>
+          <p:cNvPr id="48" name="Shape 44"/>
           <p:cNvSpPr/>
           <p:nvPr/>
         </p:nvSpPr>
@@ -12059,7 +11933,7 @@
       </p:sp>
       <p:sp>
         <p:nvSpPr>
-          <p:cNvPr id="50" name="Text 47"/>
+          <p:cNvPr id="49" name="Text 45"/>
           <p:cNvSpPr txBox="1"/>
           <p:nvPr/>
         </p:nvSpPr>
@@ -12118,7 +11992,7 @@
       </p:sp>
       <p:sp>
         <p:nvSpPr>
-          <p:cNvPr id="51" name="Shape 48"/>
+          <p:cNvPr id="50" name="Shape 46"/>
           <p:cNvSpPr/>
           <p:nvPr/>
         </p:nvSpPr>
@@ -12143,7 +12017,7 @@
       </p:sp>
       <p:sp>
         <p:nvSpPr>
-          <p:cNvPr id="52" name="Text 49"/>
+          <p:cNvPr id="51" name="Text 47"/>
           <p:cNvSpPr txBox="1"/>
           <p:nvPr/>
         </p:nvSpPr>
@@ -12202,7 +12076,7 @@
       </p:sp>
       <p:sp>
         <p:nvSpPr>
-          <p:cNvPr id="53" name="Shape 50"/>
+          <p:cNvPr id="52" name="Shape 48"/>
           <p:cNvSpPr/>
           <p:nvPr/>
         </p:nvSpPr>
@@ -12227,7 +12101,7 @@
       </p:sp>
       <p:sp>
         <p:nvSpPr>
-          <p:cNvPr id="54" name="Text 51"/>
+          <p:cNvPr id="53" name="Text 49"/>
           <p:cNvSpPr txBox="1"/>
           <p:nvPr/>
         </p:nvSpPr>
@@ -12286,7 +12160,7 @@
       </p:sp>
       <p:sp>
         <p:nvSpPr>
-          <p:cNvPr id="55" name="Shape 52"/>
+          <p:cNvPr id="54" name="Shape 50"/>
           <p:cNvSpPr/>
           <p:nvPr/>
         </p:nvSpPr>
@@ -12311,7 +12185,7 @@
       </p:sp>
       <p:sp>
         <p:nvSpPr>
-          <p:cNvPr id="56" name="Text 53"/>
+          <p:cNvPr id="55" name="Text 51"/>
           <p:cNvSpPr txBox="1"/>
           <p:nvPr/>
         </p:nvSpPr>
@@ -12370,7 +12244,7 @@
       </p:sp>
       <p:sp>
         <p:nvSpPr>
-          <p:cNvPr id="57" name="Shape 54"/>
+          <p:cNvPr id="56" name="Shape 52"/>
           <p:cNvSpPr/>
           <p:nvPr/>
         </p:nvSpPr>
@@ -12395,7 +12269,7 @@
       </p:sp>
       <p:sp>
         <p:nvSpPr>
-          <p:cNvPr id="58" name="Text 55"/>
+          <p:cNvPr id="57" name="Text 53"/>
           <p:cNvSpPr txBox="1"/>
           <p:nvPr/>
         </p:nvSpPr>
@@ -12437,7 +12311,7 @@
       </p:sp>
       <p:sp>
         <p:nvSpPr>
-          <p:cNvPr id="59" name="Shape 56"/>
+          <p:cNvPr id="58" name="Shape 54"/>
           <p:cNvSpPr/>
           <p:nvPr/>
         </p:nvSpPr>
@@ -12462,7 +12336,7 @@
       </p:sp>
       <p:sp>
         <p:nvSpPr>
-          <p:cNvPr id="60" name="Text 57"/>
+          <p:cNvPr id="59" name="Text 55"/>
           <p:cNvSpPr txBox="1"/>
           <p:nvPr/>
         </p:nvSpPr>
@@ -12521,7 +12395,7 @@
       </p:sp>
       <p:sp>
         <p:nvSpPr>
-          <p:cNvPr id="61" name="Shape 58"/>
+          <p:cNvPr id="60" name="Shape 56"/>
           <p:cNvSpPr/>
           <p:nvPr/>
         </p:nvSpPr>
@@ -12546,7 +12420,7 @@
       </p:sp>
       <p:sp>
         <p:nvSpPr>
-          <p:cNvPr id="62" name="Text 59"/>
+          <p:cNvPr id="61" name="Text 57"/>
           <p:cNvSpPr txBox="1"/>
           <p:nvPr/>
         </p:nvSpPr>
@@ -12605,7 +12479,7 @@
       </p:sp>
       <p:sp>
         <p:nvSpPr>
-          <p:cNvPr id="63" name="Shape 60"/>
+          <p:cNvPr id="62" name="Shape 58"/>
           <p:cNvSpPr/>
           <p:nvPr/>
         </p:nvSpPr>
@@ -12630,7 +12504,7 @@
       </p:sp>
       <p:sp>
         <p:nvSpPr>
-          <p:cNvPr id="64" name="Text 61"/>
+          <p:cNvPr id="63" name="Text 59"/>
           <p:cNvSpPr txBox="1"/>
           <p:nvPr/>
         </p:nvSpPr>
@@ -12689,7 +12563,7 @@
       </p:sp>
       <p:sp>
         <p:nvSpPr>
-          <p:cNvPr id="65" name="Shape 62"/>
+          <p:cNvPr id="64" name="Shape 60"/>
           <p:cNvSpPr/>
           <p:nvPr/>
         </p:nvSpPr>
@@ -12714,7 +12588,7 @@
       </p:sp>
       <p:sp>
         <p:nvSpPr>
-          <p:cNvPr id="66" name="Text 63"/>
+          <p:cNvPr id="65" name="Text 61"/>
           <p:cNvSpPr txBox="1"/>
           <p:nvPr/>
         </p:nvSpPr>
@@ -12773,7 +12647,7 @@
       </p:sp>
       <p:sp>
         <p:nvSpPr>
-          <p:cNvPr id="67" name="Shape 64"/>
+          <p:cNvPr id="66" name="Shape 62"/>
           <p:cNvSpPr/>
           <p:nvPr/>
         </p:nvSpPr>
@@ -12798,7 +12672,7 @@
       </p:sp>
       <p:sp>
         <p:nvSpPr>
-          <p:cNvPr id="68" name="Text 65"/>
+          <p:cNvPr id="67" name="Text 63"/>
           <p:cNvSpPr txBox="1"/>
           <p:nvPr/>
         </p:nvSpPr>
@@ -12840,7 +12714,7 @@
       </p:sp>
       <p:sp>
         <p:nvSpPr>
-          <p:cNvPr id="69" name="Text 66"/>
+          <p:cNvPr id="68" name="Text 64"/>
           <p:cNvSpPr txBox="1"/>
           <p:nvPr/>
         </p:nvSpPr>
@@ -12899,7 +12773,7 @@
       </p:sp>
       <p:sp>
         <p:nvSpPr>
-          <p:cNvPr id="70" name="Text 67"/>
+          <p:cNvPr id="69" name="Text 65"/>
           <p:cNvSpPr txBox="1"/>
           <p:nvPr/>
         </p:nvSpPr>
@@ -12958,7 +12832,7 @@
       </p:sp>
       <p:sp>
         <p:nvSpPr>
-          <p:cNvPr id="71" name="Text 68"/>
+          <p:cNvPr id="70" name="Text 66"/>
           <p:cNvSpPr txBox="1"/>
           <p:nvPr/>
         </p:nvSpPr>
@@ -13017,7 +12891,7 @@
       </p:sp>
       <p:sp>
         <p:nvSpPr>
-          <p:cNvPr id="72" name="Shape 69"/>
+          <p:cNvPr id="71" name="Shape 67"/>
           <p:cNvSpPr/>
           <p:nvPr/>
         </p:nvSpPr>
@@ -13040,7 +12914,7 @@
       </p:sp>
       <p:sp>
         <p:nvSpPr>
-          <p:cNvPr id="73" name="Text 70"/>
+          <p:cNvPr id="72" name="Text 68"/>
           <p:cNvSpPr txBox="1"/>
           <p:nvPr/>
         </p:nvSpPr>
@@ -13175,81 +13049,39 @@
           </a:p>
         </p:txBody>
       </p:sp>
-      <p:sp>
-        <p:nvSpPr>
-          <p:cNvPr id="4" name="Shape 1"/>
+      <p:pic>
+        <p:nvPicPr>
+          <p:cNvPr id="4" name="Image 1" descr="../site/brand/jewell-wordmark.png">    </p:cNvPr>
+          <p:cNvPicPr>
+            <a:picLocks noChangeAspect="1"/>
+          </p:cNvPicPr>
+          <p:nvPr/>
+        </p:nvPicPr>
+        <p:blipFill>
+          <a:blip r:embed="rId2"/>
+          <a:stretch>
+            <a:fillRect/>
+          </a:stretch>
+        </p:blipFill>
+        <p:spPr>
+          <a:xfrm>
+            <a:off x="13915605" y="394290"/>
+            <a:ext cx="880302" cy="194400"/>
+          </a:xfrm>
+          <a:prstGeom prst="rect">
+            <a:avLst/>
+          </a:prstGeom>
+        </p:spPr>
+      </p:pic>
+      <p:sp>
+        <p:nvSpPr>
+          <p:cNvPr id="5" name="Shape 1"/>
           <p:cNvSpPr/>
           <p:nvPr/>
         </p:nvSpPr>
         <p:spPr>
           <a:xfrm>
-            <a:off x="13650938" y="365760"/>
-            <a:ext cx="1144969" cy="251460"/>
-          </a:xfrm>
-          <a:prstGeom prst="roundRect">
-            <a:avLst>
-              <a:gd name="adj" fmla="val 50000"/>
-            </a:avLst>
-          </a:prstGeom>
-          <a:solidFill>
-            <a:srgbClr val="0E171F"/>
-          </a:solidFill>
-          <a:ln w="9525">
-            <a:solidFill>
-              <a:srgbClr val="0E171F"/>
-            </a:solidFill>
-            <a:prstDash val="solid"/>
-          </a:ln>
-        </p:spPr>
-      </p:sp>
-      <p:sp>
-        <p:nvSpPr>
-          <p:cNvPr id="5" name="Text 2"/>
-          <p:cNvSpPr txBox="1"/>
-          <p:nvPr/>
-        </p:nvSpPr>
-        <p:spPr>
-          <a:xfrm>
-            <a:off x="13650938" y="365760"/>
-            <a:ext cx="1144969" cy="251460"/>
-          </a:xfrm>
-          <a:prstGeom prst="rect">
-            <a:avLst/>
-          </a:prstGeom>
-          <a:noFill/>
-          <a:ln/>
-        </p:spPr>
-        <p:txBody>
-          <a:bodyPr wrap="square" lIns="0" tIns="0" rIns="0" bIns="0" rtlCol="0" anchor="ctr"/>
-          <a:lstStyle/>
-          <a:p>
-            <a:pPr algn="ctr" indent="0" marL="0">
-              <a:buNone/>
-            </a:pPr>
-            <a:r>
-              <a:rPr lang="en-US" sz="650" b="1" spc="78" kern="0" dirty="0">
-                <a:solidFill>
-                  <a:srgbClr val="FFFFFF"/>
-                </a:solidFill>
-                <a:latin typeface="Poppins" pitchFamily="34" charset="0"/>
-                <a:ea typeface="Poppins" pitchFamily="34" charset="-122"/>
-                <a:cs typeface="Poppins" pitchFamily="34" charset="-120"/>
-              </a:rPr>
-              <a:t>JEWELL PROJECTS</a:t>
-            </a:r>
-            <a:endParaRPr lang="en-US" sz="650" dirty="0"/>
-          </a:p>
-        </p:txBody>
-      </p:sp>
-      <p:sp>
-        <p:nvSpPr>
-          <p:cNvPr id="6" name="Shape 3"/>
-          <p:cNvSpPr/>
-          <p:nvPr/>
-        </p:nvSpPr>
-        <p:spPr>
-          <a:xfrm>
-            <a:off x="12410462" y="365760"/>
+            <a:off x="12693129" y="365760"/>
             <a:ext cx="1150475" cy="251460"/>
           </a:xfrm>
           <a:prstGeom prst="roundRect">
@@ -13270,13 +13102,13 @@
       </p:sp>
       <p:sp>
         <p:nvSpPr>
-          <p:cNvPr id="7" name="Text 4"/>
+          <p:cNvPr id="6" name="Text 2"/>
           <p:cNvSpPr txBox="1"/>
           <p:nvPr/>
         </p:nvSpPr>
         <p:spPr>
           <a:xfrm>
-            <a:off x="12410462" y="365760"/>
+            <a:off x="12693129" y="365760"/>
             <a:ext cx="1150475" cy="251460"/>
           </a:xfrm>
           <a:prstGeom prst="rect">
@@ -13309,13 +13141,13 @@
       </p:sp>
       <p:sp>
         <p:nvSpPr>
-          <p:cNvPr id="8" name="Shape 5"/>
+          <p:cNvPr id="7" name="Shape 3"/>
           <p:cNvSpPr/>
           <p:nvPr/>
         </p:nvSpPr>
         <p:spPr>
           <a:xfrm>
-            <a:off x="11102419" y="365760"/>
+            <a:off x="11385086" y="365760"/>
             <a:ext cx="1218043" cy="251460"/>
           </a:xfrm>
           <a:prstGeom prst="roundRect">
@@ -13336,13 +13168,13 @@
       </p:sp>
       <p:sp>
         <p:nvSpPr>
-          <p:cNvPr id="9" name="Text 6"/>
+          <p:cNvPr id="8" name="Text 4"/>
           <p:cNvSpPr txBox="1"/>
           <p:nvPr/>
         </p:nvSpPr>
         <p:spPr>
           <a:xfrm>
-            <a:off x="11102419" y="365760"/>
+            <a:off x="11385086" y="365760"/>
             <a:ext cx="1218043" cy="251460"/>
           </a:xfrm>
           <a:prstGeom prst="rect">
@@ -13375,13 +13207,13 @@
       </p:sp>
       <p:sp>
         <p:nvSpPr>
-          <p:cNvPr id="10" name="Shape 7"/>
+          <p:cNvPr id="9" name="Shape 5"/>
           <p:cNvSpPr/>
           <p:nvPr/>
         </p:nvSpPr>
         <p:spPr>
           <a:xfrm>
-            <a:off x="10042472" y="365760"/>
+            <a:off x="10325139" y="365760"/>
             <a:ext cx="969947" cy="251460"/>
           </a:xfrm>
           <a:prstGeom prst="roundRect">
@@ -13394,7 +13226,7 @@
           </a:solidFill>
           <a:ln w="9525">
             <a:solidFill>
-              <a:srgbClr val="E3E7EC"/>
+              <a:srgbClr val="0066FF"/>
             </a:solidFill>
             <a:prstDash val="solid"/>
           </a:ln>
@@ -13402,13 +13234,13 @@
       </p:sp>
       <p:sp>
         <p:nvSpPr>
-          <p:cNvPr id="11" name="Text 8"/>
+          <p:cNvPr id="10" name="Text 6"/>
           <p:cNvSpPr txBox="1"/>
           <p:nvPr/>
         </p:nvSpPr>
         <p:spPr>
           <a:xfrm>
-            <a:off x="10042472" y="365760"/>
+            <a:off x="10325139" y="365760"/>
             <a:ext cx="969947" cy="251460"/>
           </a:xfrm>
           <a:prstGeom prst="rect">
@@ -13427,7 +13259,7 @@
             <a:r>
               <a:rPr lang="en-US" sz="650" b="1" spc="78" kern="0" dirty="0">
                 <a:solidFill>
-                  <a:srgbClr val="4A5565"/>
+                  <a:srgbClr val="0066FF"/>
                 </a:solidFill>
                 <a:latin typeface="Poppins" pitchFamily="34" charset="0"/>
                 <a:ea typeface="Poppins" pitchFamily="34" charset="-122"/>
@@ -13441,7 +13273,7 @@
       </p:sp>
       <p:sp>
         <p:nvSpPr>
-          <p:cNvPr id="12" name="Shape 9"/>
+          <p:cNvPr id="11" name="Shape 7"/>
           <p:cNvSpPr/>
           <p:nvPr/>
         </p:nvSpPr>
@@ -13464,7 +13296,7 @@
       </p:sp>
       <p:sp>
         <p:nvSpPr>
-          <p:cNvPr id="13" name="Shape 10"/>
+          <p:cNvPr id="12" name="Shape 8"/>
           <p:cNvSpPr/>
           <p:nvPr/>
         </p:nvSpPr>
@@ -13489,7 +13321,7 @@
       </p:sp>
       <p:sp>
         <p:nvSpPr>
-          <p:cNvPr id="14" name="Shape 11"/>
+          <p:cNvPr id="13" name="Shape 9"/>
           <p:cNvSpPr/>
           <p:nvPr/>
         </p:nvSpPr>
@@ -13514,7 +13346,7 @@
       </p:sp>
       <p:sp>
         <p:nvSpPr>
-          <p:cNvPr id="15" name="Text 12"/>
+          <p:cNvPr id="14" name="Text 10"/>
           <p:cNvSpPr txBox="1"/>
           <p:nvPr/>
         </p:nvSpPr>
@@ -13556,7 +13388,7 @@
       </p:sp>
       <p:sp>
         <p:nvSpPr>
-          <p:cNvPr id="16" name="Text 13"/>
+          <p:cNvPr id="15" name="Text 11"/>
           <p:cNvSpPr txBox="1"/>
           <p:nvPr/>
         </p:nvSpPr>
@@ -13598,7 +13430,7 @@
       </p:sp>
       <p:sp>
         <p:nvSpPr>
-          <p:cNvPr id="17" name="Shape 14"/>
+          <p:cNvPr id="16" name="Shape 12"/>
           <p:cNvSpPr/>
           <p:nvPr/>
         </p:nvSpPr>
@@ -13623,7 +13455,7 @@
       </p:sp>
       <p:sp>
         <p:nvSpPr>
-          <p:cNvPr id="18" name="Shape 15"/>
+          <p:cNvPr id="17" name="Shape 13"/>
           <p:cNvSpPr/>
           <p:nvPr/>
         </p:nvSpPr>
@@ -13648,7 +13480,7 @@
       </p:sp>
       <p:sp>
         <p:nvSpPr>
-          <p:cNvPr id="19" name="Text 16"/>
+          <p:cNvPr id="18" name="Text 14"/>
           <p:cNvSpPr txBox="1"/>
           <p:nvPr/>
         </p:nvSpPr>
@@ -13690,7 +13522,7 @@
       </p:sp>
       <p:sp>
         <p:nvSpPr>
-          <p:cNvPr id="20" name="Text 17"/>
+          <p:cNvPr id="19" name="Text 15"/>
           <p:cNvSpPr txBox="1"/>
           <p:nvPr/>
         </p:nvSpPr>
@@ -13732,7 +13564,7 @@
       </p:sp>
       <p:sp>
         <p:nvSpPr>
-          <p:cNvPr id="21" name="Text 18"/>
+          <p:cNvPr id="20" name="Text 16"/>
           <p:cNvSpPr txBox="1"/>
           <p:nvPr/>
         </p:nvSpPr>
@@ -13774,7 +13606,7 @@
       </p:sp>
       <p:sp>
         <p:nvSpPr>
-          <p:cNvPr id="22" name="Shape 19"/>
+          <p:cNvPr id="21" name="Shape 17"/>
           <p:cNvSpPr/>
           <p:nvPr/>
         </p:nvSpPr>
@@ -13799,7 +13631,7 @@
       </p:sp>
       <p:sp>
         <p:nvSpPr>
-          <p:cNvPr id="23" name="Shape 20"/>
+          <p:cNvPr id="22" name="Shape 18"/>
           <p:cNvSpPr/>
           <p:nvPr/>
         </p:nvSpPr>
@@ -13824,7 +13656,7 @@
       </p:sp>
       <p:sp>
         <p:nvSpPr>
-          <p:cNvPr id="24" name="Text 21"/>
+          <p:cNvPr id="23" name="Text 19"/>
           <p:cNvSpPr txBox="1"/>
           <p:nvPr/>
         </p:nvSpPr>
@@ -13866,7 +13698,7 @@
       </p:sp>
       <p:sp>
         <p:nvSpPr>
-          <p:cNvPr id="25" name="Text 22"/>
+          <p:cNvPr id="24" name="Text 20"/>
           <p:cNvSpPr txBox="1"/>
           <p:nvPr/>
         </p:nvSpPr>
@@ -13908,7 +13740,7 @@
       </p:sp>
       <p:sp>
         <p:nvSpPr>
-          <p:cNvPr id="26" name="Text 23"/>
+          <p:cNvPr id="25" name="Text 21"/>
           <p:cNvSpPr txBox="1"/>
           <p:nvPr/>
         </p:nvSpPr>
@@ -13950,7 +13782,7 @@
       </p:sp>
       <p:sp>
         <p:nvSpPr>
-          <p:cNvPr id="27" name="Shape 24"/>
+          <p:cNvPr id="26" name="Shape 22"/>
           <p:cNvSpPr/>
           <p:nvPr/>
         </p:nvSpPr>
@@ -13975,7 +13807,7 @@
       </p:sp>
       <p:sp>
         <p:nvSpPr>
-          <p:cNvPr id="28" name="Shape 25"/>
+          <p:cNvPr id="27" name="Shape 23"/>
           <p:cNvSpPr/>
           <p:nvPr/>
         </p:nvSpPr>
@@ -14000,7 +13832,7 @@
       </p:sp>
       <p:sp>
         <p:nvSpPr>
-          <p:cNvPr id="29" name="Text 26"/>
+          <p:cNvPr id="28" name="Text 24"/>
           <p:cNvSpPr txBox="1"/>
           <p:nvPr/>
         </p:nvSpPr>
@@ -14042,7 +13874,7 @@
       </p:sp>
       <p:sp>
         <p:nvSpPr>
-          <p:cNvPr id="30" name="Text 27"/>
+          <p:cNvPr id="29" name="Text 25"/>
           <p:cNvSpPr txBox="1"/>
           <p:nvPr/>
         </p:nvSpPr>
@@ -14084,7 +13916,7 @@
       </p:sp>
       <p:sp>
         <p:nvSpPr>
-          <p:cNvPr id="31" name="Text 28"/>
+          <p:cNvPr id="30" name="Text 26"/>
           <p:cNvSpPr txBox="1"/>
           <p:nvPr/>
         </p:nvSpPr>
@@ -14126,7 +13958,7 @@
       </p:sp>
       <p:sp>
         <p:nvSpPr>
-          <p:cNvPr id="32" name="Shape 29"/>
+          <p:cNvPr id="31" name="Shape 27"/>
           <p:cNvSpPr/>
           <p:nvPr/>
         </p:nvSpPr>
@@ -14151,7 +13983,7 @@
       </p:sp>
       <p:sp>
         <p:nvSpPr>
-          <p:cNvPr id="33" name="Shape 30"/>
+          <p:cNvPr id="32" name="Shape 28"/>
           <p:cNvSpPr/>
           <p:nvPr/>
         </p:nvSpPr>
@@ -14176,7 +14008,7 @@
       </p:sp>
       <p:sp>
         <p:nvSpPr>
-          <p:cNvPr id="34" name="Text 31"/>
+          <p:cNvPr id="33" name="Text 29"/>
           <p:cNvSpPr txBox="1"/>
           <p:nvPr/>
         </p:nvSpPr>
@@ -14218,7 +14050,7 @@
       </p:sp>
       <p:sp>
         <p:nvSpPr>
-          <p:cNvPr id="35" name="Text 32"/>
+          <p:cNvPr id="34" name="Text 30"/>
           <p:cNvSpPr txBox="1"/>
           <p:nvPr/>
         </p:nvSpPr>
@@ -14260,7 +14092,7 @@
       </p:sp>
       <p:sp>
         <p:nvSpPr>
-          <p:cNvPr id="36" name="Text 33"/>
+          <p:cNvPr id="35" name="Text 31"/>
           <p:cNvSpPr txBox="1"/>
           <p:nvPr/>
         </p:nvSpPr>
@@ -14302,7 +14134,7 @@
       </p:sp>
       <p:sp>
         <p:nvSpPr>
-          <p:cNvPr id="37" name="Shape 34"/>
+          <p:cNvPr id="36" name="Shape 32"/>
           <p:cNvSpPr/>
           <p:nvPr/>
         </p:nvSpPr>
@@ -14327,7 +14159,7 @@
       </p:sp>
       <p:sp>
         <p:nvSpPr>
-          <p:cNvPr id="38" name="Shape 35"/>
+          <p:cNvPr id="37" name="Shape 33"/>
           <p:cNvSpPr/>
           <p:nvPr/>
         </p:nvSpPr>
@@ -14352,7 +14184,7 @@
       </p:sp>
       <p:sp>
         <p:nvSpPr>
-          <p:cNvPr id="39" name="Text 36"/>
+          <p:cNvPr id="38" name="Text 34"/>
           <p:cNvSpPr txBox="1"/>
           <p:nvPr/>
         </p:nvSpPr>
@@ -14394,7 +14226,7 @@
       </p:sp>
       <p:sp>
         <p:nvSpPr>
-          <p:cNvPr id="40" name="Text 37"/>
+          <p:cNvPr id="39" name="Text 35"/>
           <p:cNvSpPr txBox="1"/>
           <p:nvPr/>
         </p:nvSpPr>
@@ -14436,7 +14268,7 @@
       </p:sp>
       <p:sp>
         <p:nvSpPr>
-          <p:cNvPr id="41" name="Text 38"/>
+          <p:cNvPr id="40" name="Text 36"/>
           <p:cNvSpPr txBox="1"/>
           <p:nvPr/>
         </p:nvSpPr>
@@ -14478,7 +14310,7 @@
       </p:sp>
       <p:sp>
         <p:nvSpPr>
-          <p:cNvPr id="42" name="Shape 39"/>
+          <p:cNvPr id="41" name="Shape 37"/>
           <p:cNvSpPr/>
           <p:nvPr/>
         </p:nvSpPr>
@@ -14501,7 +14333,7 @@
       </p:sp>
       <p:sp>
         <p:nvSpPr>
-          <p:cNvPr id="43" name="Text 40"/>
+          <p:cNvPr id="42" name="Text 38"/>
           <p:cNvSpPr txBox="1"/>
           <p:nvPr/>
         </p:nvSpPr>
@@ -14543,7 +14375,7 @@
       </p:sp>
       <p:sp>
         <p:nvSpPr>
-          <p:cNvPr id="44" name="Shape 41"/>
+          <p:cNvPr id="43" name="Shape 39"/>
           <p:cNvSpPr/>
           <p:nvPr/>
         </p:nvSpPr>
@@ -14568,7 +14400,7 @@
       </p:sp>
       <p:sp>
         <p:nvSpPr>
-          <p:cNvPr id="45" name="Text 42"/>
+          <p:cNvPr id="44" name="Text 40"/>
           <p:cNvSpPr txBox="1"/>
           <p:nvPr/>
         </p:nvSpPr>
@@ -15420,7 +15252,7 @@
       </p:graphicFrame>
       <p:sp>
         <p:nvSpPr>
-          <p:cNvPr id="47" name="Shape 43"/>
+          <p:cNvPr id="46" name="Shape 41"/>
           <p:cNvSpPr/>
           <p:nvPr/>
         </p:nvSpPr>
@@ -15445,7 +15277,7 @@
       </p:sp>
       <p:sp>
         <p:nvSpPr>
-          <p:cNvPr id="48" name="Text 44"/>
+          <p:cNvPr id="47" name="Text 42"/>
           <p:cNvSpPr txBox="1"/>
           <p:nvPr/>
         </p:nvSpPr>
@@ -15487,7 +15319,7 @@
       </p:sp>
       <p:sp>
         <p:nvSpPr>
-          <p:cNvPr id="49" name="Text 45"/>
+          <p:cNvPr id="48" name="Text 43"/>
           <p:cNvSpPr txBox="1"/>
           <p:nvPr/>
         </p:nvSpPr>
@@ -15529,7 +15361,7 @@
       </p:sp>
       <p:sp>
         <p:nvSpPr>
-          <p:cNvPr id="50" name="Text 46"/>
+          <p:cNvPr id="49" name="Text 44"/>
           <p:cNvSpPr txBox="1"/>
           <p:nvPr/>
         </p:nvSpPr>
@@ -15571,7 +15403,7 @@
       </p:sp>
       <p:sp>
         <p:nvSpPr>
-          <p:cNvPr id="51" name="Text 47"/>
+          <p:cNvPr id="50" name="Text 45"/>
           <p:cNvSpPr txBox="1"/>
           <p:nvPr/>
         </p:nvSpPr>
@@ -15613,7 +15445,7 @@
       </p:sp>
       <p:sp>
         <p:nvSpPr>
-          <p:cNvPr id="52" name="Text 48"/>
+          <p:cNvPr id="51" name="Text 46"/>
           <p:cNvSpPr txBox="1"/>
           <p:nvPr/>
         </p:nvSpPr>
@@ -15655,7 +15487,7 @@
       </p:sp>
       <p:sp>
         <p:nvSpPr>
-          <p:cNvPr id="53" name="Text 49"/>
+          <p:cNvPr id="52" name="Text 47"/>
           <p:cNvSpPr txBox="1"/>
           <p:nvPr/>
         </p:nvSpPr>
@@ -15697,7 +15529,7 @@
       </p:sp>
       <p:sp>
         <p:nvSpPr>
-          <p:cNvPr id="54" name="Text 50"/>
+          <p:cNvPr id="53" name="Text 48"/>
           <p:cNvSpPr txBox="1"/>
           <p:nvPr/>
         </p:nvSpPr>
@@ -15773,7 +15605,7 @@
       </p:sp>
       <p:sp>
         <p:nvSpPr>
-          <p:cNvPr id="55" name="Shape 51"/>
+          <p:cNvPr id="54" name="Shape 49"/>
           <p:cNvSpPr/>
           <p:nvPr/>
         </p:nvSpPr>
@@ -15796,7 +15628,7 @@
       </p:sp>
       <p:sp>
         <p:nvSpPr>
-          <p:cNvPr id="56" name="Text 52"/>
+          <p:cNvPr id="55" name="Text 50"/>
           <p:cNvSpPr txBox="1"/>
           <p:nvPr/>
         </p:nvSpPr>
@@ -15838,7 +15670,7 @@
       </p:sp>
       <p:sp>
         <p:nvSpPr>
-          <p:cNvPr id="57" name="Shape 53"/>
+          <p:cNvPr id="56" name="Shape 51"/>
           <p:cNvSpPr/>
           <p:nvPr/>
         </p:nvSpPr>
@@ -15863,7 +15695,7 @@
       </p:sp>
       <p:sp>
         <p:nvSpPr>
-          <p:cNvPr id="58" name="Text 54"/>
+          <p:cNvPr id="57" name="Text 52"/>
           <p:cNvSpPr txBox="1"/>
           <p:nvPr/>
         </p:nvSpPr>
@@ -15905,7 +15737,7 @@
       </p:sp>
       <p:sp>
         <p:nvSpPr>
-          <p:cNvPr id="59" name="Text 55"/>
+          <p:cNvPr id="58" name="Text 53"/>
           <p:cNvSpPr txBox="1"/>
           <p:nvPr/>
         </p:nvSpPr>
@@ -15947,7 +15779,7 @@
       </p:sp>
       <p:sp>
         <p:nvSpPr>
-          <p:cNvPr id="60" name="Text 56"/>
+          <p:cNvPr id="59" name="Text 54"/>
           <p:cNvSpPr txBox="1"/>
           <p:nvPr/>
         </p:nvSpPr>
@@ -16006,7 +15838,7 @@
       </p:sp>
       <p:sp>
         <p:nvSpPr>
-          <p:cNvPr id="61" name="Text 57"/>
+          <p:cNvPr id="60" name="Text 55"/>
           <p:cNvSpPr txBox="1"/>
           <p:nvPr/>
         </p:nvSpPr>
@@ -16065,7 +15897,7 @@
       </p:sp>
       <p:sp>
         <p:nvSpPr>
-          <p:cNvPr id="62" name="Text 58"/>
+          <p:cNvPr id="61" name="Text 56"/>
           <p:cNvSpPr txBox="1"/>
           <p:nvPr/>
         </p:nvSpPr>
@@ -16124,7 +15956,7 @@
       </p:sp>
       <p:sp>
         <p:nvSpPr>
-          <p:cNvPr id="63" name="Shape 59"/>
+          <p:cNvPr id="62" name="Shape 57"/>
           <p:cNvSpPr/>
           <p:nvPr/>
         </p:nvSpPr>
@@ -16147,7 +15979,7 @@
       </p:sp>
       <p:sp>
         <p:nvSpPr>
-          <p:cNvPr id="64" name="Text 60"/>
+          <p:cNvPr id="63" name="Text 58"/>
           <p:cNvSpPr txBox="1"/>
           <p:nvPr/>
         </p:nvSpPr>
@@ -16189,7 +16021,7 @@
       </p:sp>
       <p:sp>
         <p:nvSpPr>
-          <p:cNvPr id="65" name="Shape 61"/>
+          <p:cNvPr id="64" name="Shape 59"/>
           <p:cNvSpPr/>
           <p:nvPr/>
         </p:nvSpPr>
@@ -16214,7 +16046,7 @@
       </p:sp>
       <p:sp>
         <p:nvSpPr>
-          <p:cNvPr id="66" name="Text 62"/>
+          <p:cNvPr id="65" name="Text 60"/>
           <p:cNvSpPr txBox="1"/>
           <p:nvPr/>
         </p:nvSpPr>
@@ -16256,7 +16088,7 @@
       </p:sp>
       <p:sp>
         <p:nvSpPr>
-          <p:cNvPr id="67" name="Text 63"/>
+          <p:cNvPr id="66" name="Text 61"/>
           <p:cNvSpPr txBox="1"/>
           <p:nvPr/>
         </p:nvSpPr>
@@ -16298,7 +16130,7 @@
       </p:sp>
       <p:sp>
         <p:nvSpPr>
-          <p:cNvPr id="68" name="Text 64"/>
+          <p:cNvPr id="67" name="Text 62"/>
           <p:cNvSpPr txBox="1"/>
           <p:nvPr/>
         </p:nvSpPr>
@@ -16357,7 +16189,7 @@
       </p:sp>
       <p:sp>
         <p:nvSpPr>
-          <p:cNvPr id="69" name="Text 65"/>
+          <p:cNvPr id="68" name="Text 63"/>
           <p:cNvSpPr txBox="1"/>
           <p:nvPr/>
         </p:nvSpPr>
@@ -16416,7 +16248,7 @@
       </p:sp>
       <p:sp>
         <p:nvSpPr>
-          <p:cNvPr id="70" name="Text 66"/>
+          <p:cNvPr id="69" name="Text 64"/>
           <p:cNvSpPr txBox="1"/>
           <p:nvPr/>
         </p:nvSpPr>
@@ -16475,7 +16307,7 @@
       </p:sp>
       <p:sp>
         <p:nvSpPr>
-          <p:cNvPr id="71" name="Shape 67"/>
+          <p:cNvPr id="70" name="Shape 65"/>
           <p:cNvSpPr/>
           <p:nvPr/>
         </p:nvSpPr>
@@ -16500,7 +16332,7 @@
       </p:sp>
       <p:sp>
         <p:nvSpPr>
-          <p:cNvPr id="72" name="Text 68"/>
+          <p:cNvPr id="71" name="Text 66"/>
           <p:cNvSpPr txBox="1"/>
           <p:nvPr/>
         </p:nvSpPr>
@@ -16542,7 +16374,7 @@
       </p:sp>
       <p:sp>
         <p:nvSpPr>
-          <p:cNvPr id="73" name="Shape 69"/>
+          <p:cNvPr id="72" name="Shape 67"/>
           <p:cNvSpPr/>
           <p:nvPr/>
         </p:nvSpPr>
@@ -16567,7 +16399,7 @@
       </p:sp>
       <p:sp>
         <p:nvSpPr>
-          <p:cNvPr id="74" name="Text 70"/>
+          <p:cNvPr id="73" name="Text 68"/>
           <p:cNvSpPr txBox="1"/>
           <p:nvPr/>
         </p:nvSpPr>
@@ -16609,7 +16441,7 @@
       </p:sp>
       <p:sp>
         <p:nvSpPr>
-          <p:cNvPr id="75" name="Text 71"/>
+          <p:cNvPr id="74" name="Text 69"/>
           <p:cNvSpPr txBox="1"/>
           <p:nvPr/>
         </p:nvSpPr>
@@ -16651,7 +16483,7 @@
       </p:sp>
       <p:sp>
         <p:nvSpPr>
-          <p:cNvPr id="76" name="Shape 72"/>
+          <p:cNvPr id="75" name="Shape 70"/>
           <p:cNvSpPr/>
           <p:nvPr/>
         </p:nvSpPr>
@@ -16676,7 +16508,7 @@
       </p:sp>
       <p:sp>
         <p:nvSpPr>
-          <p:cNvPr id="77" name="Text 73"/>
+          <p:cNvPr id="76" name="Text 71"/>
           <p:cNvSpPr txBox="1"/>
           <p:nvPr/>
         </p:nvSpPr>
@@ -16718,7 +16550,7 @@
       </p:sp>
       <p:sp>
         <p:nvSpPr>
-          <p:cNvPr id="78" name="Text 74"/>
+          <p:cNvPr id="77" name="Text 72"/>
           <p:cNvSpPr txBox="1"/>
           <p:nvPr/>
         </p:nvSpPr>
@@ -16760,7 +16592,7 @@
       </p:sp>
       <p:sp>
         <p:nvSpPr>
-          <p:cNvPr id="79" name="Shape 75"/>
+          <p:cNvPr id="78" name="Shape 73"/>
           <p:cNvSpPr/>
           <p:nvPr/>
         </p:nvSpPr>
@@ -16785,7 +16617,7 @@
       </p:sp>
       <p:sp>
         <p:nvSpPr>
-          <p:cNvPr id="80" name="Text 76"/>
+          <p:cNvPr id="79" name="Text 74"/>
           <p:cNvSpPr txBox="1"/>
           <p:nvPr/>
         </p:nvSpPr>
@@ -16827,7 +16659,7 @@
       </p:sp>
       <p:sp>
         <p:nvSpPr>
-          <p:cNvPr id="81" name="Text 77"/>
+          <p:cNvPr id="80" name="Text 75"/>
           <p:cNvSpPr txBox="1"/>
           <p:nvPr/>
         </p:nvSpPr>
@@ -16869,7 +16701,7 @@
       </p:sp>
       <p:sp>
         <p:nvSpPr>
-          <p:cNvPr id="82" name="Shape 78"/>
+          <p:cNvPr id="81" name="Shape 76"/>
           <p:cNvSpPr/>
           <p:nvPr/>
         </p:nvSpPr>
@@ -16894,7 +16726,7 @@
       </p:sp>
       <p:sp>
         <p:nvSpPr>
-          <p:cNvPr id="83" name="Text 79"/>
+          <p:cNvPr id="82" name="Text 77"/>
           <p:cNvSpPr txBox="1"/>
           <p:nvPr/>
         </p:nvSpPr>
@@ -16936,7 +16768,7 @@
       </p:sp>
       <p:sp>
         <p:nvSpPr>
-          <p:cNvPr id="84" name="Text 80"/>
+          <p:cNvPr id="83" name="Text 78"/>
           <p:cNvSpPr txBox="1"/>
           <p:nvPr/>
         </p:nvSpPr>
@@ -16978,7 +16810,7 @@
       </p:sp>
       <p:sp>
         <p:nvSpPr>
-          <p:cNvPr id="85" name="Text 81"/>
+          <p:cNvPr id="84" name="Text 79"/>
           <p:cNvSpPr txBox="1"/>
           <p:nvPr/>
         </p:nvSpPr>
@@ -17037,7 +16869,7 @@
       </p:sp>
       <p:sp>
         <p:nvSpPr>
-          <p:cNvPr id="86" name="Text 82"/>
+          <p:cNvPr id="85" name="Text 80"/>
           <p:cNvSpPr txBox="1"/>
           <p:nvPr/>
         </p:nvSpPr>
@@ -17189,81 +17021,39 @@
           </a:p>
         </p:txBody>
       </p:sp>
-      <p:sp>
-        <p:nvSpPr>
-          <p:cNvPr id="4" name="Shape 1"/>
+      <p:pic>
+        <p:nvPicPr>
+          <p:cNvPr id="4" name="Image 1" descr="../site/brand/jewell-wordmark.png">    </p:cNvPr>
+          <p:cNvPicPr>
+            <a:picLocks noChangeAspect="1"/>
+          </p:cNvPicPr>
+          <p:nvPr/>
+        </p:nvPicPr>
+        <p:blipFill>
+          <a:blip r:embed="rId2"/>
+          <a:stretch>
+            <a:fillRect/>
+          </a:stretch>
+        </p:blipFill>
+        <p:spPr>
+          <a:xfrm>
+            <a:off x="13915605" y="394290"/>
+            <a:ext cx="880302" cy="194400"/>
+          </a:xfrm>
+          <a:prstGeom prst="rect">
+            <a:avLst/>
+          </a:prstGeom>
+        </p:spPr>
+      </p:pic>
+      <p:sp>
+        <p:nvSpPr>
+          <p:cNvPr id="5" name="Shape 1"/>
           <p:cNvSpPr/>
           <p:nvPr/>
         </p:nvSpPr>
         <p:spPr>
           <a:xfrm>
-            <a:off x="13650938" y="365760"/>
-            <a:ext cx="1144969" cy="251460"/>
-          </a:xfrm>
-          <a:prstGeom prst="roundRect">
-            <a:avLst>
-              <a:gd name="adj" fmla="val 50000"/>
-            </a:avLst>
-          </a:prstGeom>
-          <a:solidFill>
-            <a:srgbClr val="0E171F"/>
-          </a:solidFill>
-          <a:ln w="9525">
-            <a:solidFill>
-              <a:srgbClr val="0E171F"/>
-            </a:solidFill>
-            <a:prstDash val="solid"/>
-          </a:ln>
-        </p:spPr>
-      </p:sp>
-      <p:sp>
-        <p:nvSpPr>
-          <p:cNvPr id="5" name="Text 2"/>
-          <p:cNvSpPr txBox="1"/>
-          <p:nvPr/>
-        </p:nvSpPr>
-        <p:spPr>
-          <a:xfrm>
-            <a:off x="13650938" y="365760"/>
-            <a:ext cx="1144969" cy="251460"/>
-          </a:xfrm>
-          <a:prstGeom prst="rect">
-            <a:avLst/>
-          </a:prstGeom>
-          <a:noFill/>
-          <a:ln/>
-        </p:spPr>
-        <p:txBody>
-          <a:bodyPr wrap="square" lIns="0" tIns="0" rIns="0" bIns="0" rtlCol="0" anchor="ctr"/>
-          <a:lstStyle/>
-          <a:p>
-            <a:pPr algn="ctr" indent="0" marL="0">
-              <a:buNone/>
-            </a:pPr>
-            <a:r>
-              <a:rPr lang="en-US" sz="650" b="1" spc="78" kern="0" dirty="0">
-                <a:solidFill>
-                  <a:srgbClr val="FFFFFF"/>
-                </a:solidFill>
-                <a:latin typeface="Poppins" pitchFamily="34" charset="0"/>
-                <a:ea typeface="Poppins" pitchFamily="34" charset="-122"/>
-                <a:cs typeface="Poppins" pitchFamily="34" charset="-120"/>
-              </a:rPr>
-              <a:t>JEWELL PROJECTS</a:t>
-            </a:r>
-            <a:endParaRPr lang="en-US" sz="650" dirty="0"/>
-          </a:p>
-        </p:txBody>
-      </p:sp>
-      <p:sp>
-        <p:nvSpPr>
-          <p:cNvPr id="6" name="Shape 3"/>
-          <p:cNvSpPr/>
-          <p:nvPr/>
-        </p:nvSpPr>
-        <p:spPr>
-          <a:xfrm>
-            <a:off x="12410462" y="365760"/>
+            <a:off x="12693129" y="365760"/>
             <a:ext cx="1150475" cy="251460"/>
           </a:xfrm>
           <a:prstGeom prst="roundRect">
@@ -17284,13 +17074,13 @@
       </p:sp>
       <p:sp>
         <p:nvSpPr>
-          <p:cNvPr id="7" name="Text 4"/>
+          <p:cNvPr id="6" name="Text 2"/>
           <p:cNvSpPr txBox="1"/>
           <p:nvPr/>
         </p:nvSpPr>
         <p:spPr>
           <a:xfrm>
-            <a:off x="12410462" y="365760"/>
+            <a:off x="12693129" y="365760"/>
             <a:ext cx="1150475" cy="251460"/>
           </a:xfrm>
           <a:prstGeom prst="rect">
@@ -17323,13 +17113,13 @@
       </p:sp>
       <p:sp>
         <p:nvSpPr>
-          <p:cNvPr id="8" name="Shape 5"/>
+          <p:cNvPr id="7" name="Shape 3"/>
           <p:cNvSpPr/>
           <p:nvPr/>
         </p:nvSpPr>
         <p:spPr>
           <a:xfrm>
-            <a:off x="11102419" y="365760"/>
+            <a:off x="11385086" y="365760"/>
             <a:ext cx="1218043" cy="251460"/>
           </a:xfrm>
           <a:prstGeom prst="roundRect">
@@ -17350,13 +17140,13 @@
       </p:sp>
       <p:sp>
         <p:nvSpPr>
-          <p:cNvPr id="9" name="Text 6"/>
+          <p:cNvPr id="8" name="Text 4"/>
           <p:cNvSpPr txBox="1"/>
           <p:nvPr/>
         </p:nvSpPr>
         <p:spPr>
           <a:xfrm>
-            <a:off x="11102419" y="365760"/>
+            <a:off x="11385086" y="365760"/>
             <a:ext cx="1218043" cy="251460"/>
           </a:xfrm>
           <a:prstGeom prst="rect">
@@ -17389,13 +17179,13 @@
       </p:sp>
       <p:sp>
         <p:nvSpPr>
-          <p:cNvPr id="10" name="Shape 7"/>
+          <p:cNvPr id="9" name="Shape 5"/>
           <p:cNvSpPr/>
           <p:nvPr/>
         </p:nvSpPr>
         <p:spPr>
           <a:xfrm>
-            <a:off x="10036519" y="365760"/>
+            <a:off x="10319186" y="365760"/>
             <a:ext cx="975900" cy="251460"/>
           </a:xfrm>
           <a:prstGeom prst="roundRect">
@@ -17408,7 +17198,7 @@
           </a:solidFill>
           <a:ln w="9525">
             <a:solidFill>
-              <a:srgbClr val="E3E7EC"/>
+              <a:srgbClr val="0066FF"/>
             </a:solidFill>
             <a:prstDash val="solid"/>
           </a:ln>
@@ -17416,13 +17206,13 @@
       </p:sp>
       <p:sp>
         <p:nvSpPr>
-          <p:cNvPr id="11" name="Text 8"/>
+          <p:cNvPr id="10" name="Text 6"/>
           <p:cNvSpPr txBox="1"/>
           <p:nvPr/>
         </p:nvSpPr>
         <p:spPr>
           <a:xfrm>
-            <a:off x="10036519" y="365760"/>
+            <a:off x="10319186" y="365760"/>
             <a:ext cx="975900" cy="251460"/>
           </a:xfrm>
           <a:prstGeom prst="rect">
@@ -17441,7 +17231,7 @@
             <a:r>
               <a:rPr lang="en-US" sz="650" b="1" spc="78" kern="0" dirty="0">
                 <a:solidFill>
-                  <a:srgbClr val="4A5565"/>
+                  <a:srgbClr val="0066FF"/>
                 </a:solidFill>
                 <a:latin typeface="Poppins" pitchFamily="34" charset="0"/>
                 <a:ea typeface="Poppins" pitchFamily="34" charset="-122"/>
@@ -17455,7 +17245,7 @@
       </p:sp>
       <p:sp>
         <p:nvSpPr>
-          <p:cNvPr id="12" name="Shape 9"/>
+          <p:cNvPr id="11" name="Shape 7"/>
           <p:cNvSpPr/>
           <p:nvPr/>
         </p:nvSpPr>
@@ -17478,7 +17268,7 @@
       </p:sp>
       <p:sp>
         <p:nvSpPr>
-          <p:cNvPr id="13" name="Shape 10"/>
+          <p:cNvPr id="12" name="Shape 8"/>
           <p:cNvSpPr/>
           <p:nvPr/>
         </p:nvSpPr>
@@ -17503,7 +17293,7 @@
       </p:sp>
       <p:sp>
         <p:nvSpPr>
-          <p:cNvPr id="14" name="Shape 11"/>
+          <p:cNvPr id="13" name="Shape 9"/>
           <p:cNvSpPr/>
           <p:nvPr/>
         </p:nvSpPr>
@@ -17528,7 +17318,7 @@
       </p:sp>
       <p:sp>
         <p:nvSpPr>
-          <p:cNvPr id="15" name="Text 12"/>
+          <p:cNvPr id="14" name="Text 10"/>
           <p:cNvSpPr txBox="1"/>
           <p:nvPr/>
         </p:nvSpPr>
@@ -17587,7 +17377,7 @@
       </p:sp>
       <p:sp>
         <p:nvSpPr>
-          <p:cNvPr id="16" name="Shape 13"/>
+          <p:cNvPr id="15" name="Shape 11"/>
           <p:cNvSpPr/>
           <p:nvPr/>
         </p:nvSpPr>
@@ -17612,7 +17402,7 @@
       </p:sp>
       <p:sp>
         <p:nvSpPr>
-          <p:cNvPr id="17" name="Shape 14"/>
+          <p:cNvPr id="16" name="Shape 12"/>
           <p:cNvSpPr/>
           <p:nvPr/>
         </p:nvSpPr>
@@ -17637,7 +17427,7 @@
       </p:sp>
       <p:sp>
         <p:nvSpPr>
-          <p:cNvPr id="18" name="Text 15"/>
+          <p:cNvPr id="17" name="Text 13"/>
           <p:cNvSpPr txBox="1"/>
           <p:nvPr/>
         </p:nvSpPr>
@@ -17679,7 +17469,7 @@
       </p:sp>
       <p:sp>
         <p:nvSpPr>
-          <p:cNvPr id="19" name="Shape 16"/>
+          <p:cNvPr id="18" name="Shape 14"/>
           <p:cNvSpPr/>
           <p:nvPr/>
         </p:nvSpPr>
@@ -17704,7 +17494,7 @@
       </p:sp>
       <p:sp>
         <p:nvSpPr>
-          <p:cNvPr id="20" name="Text 17"/>
+          <p:cNvPr id="19" name="Text 15"/>
           <p:cNvSpPr txBox="1"/>
           <p:nvPr/>
         </p:nvSpPr>
@@ -17746,7 +17536,7 @@
       </p:sp>
       <p:sp>
         <p:nvSpPr>
-          <p:cNvPr id="21" name="Shape 18"/>
+          <p:cNvPr id="20" name="Shape 16"/>
           <p:cNvSpPr/>
           <p:nvPr/>
         </p:nvSpPr>
@@ -17771,7 +17561,7 @@
       </p:sp>
       <p:sp>
         <p:nvSpPr>
-          <p:cNvPr id="22" name="Text 19"/>
+          <p:cNvPr id="21" name="Text 17"/>
           <p:cNvSpPr txBox="1"/>
           <p:nvPr/>
         </p:nvSpPr>
@@ -17813,7 +17603,7 @@
       </p:sp>
       <p:sp>
         <p:nvSpPr>
-          <p:cNvPr id="23" name="Shape 20"/>
+          <p:cNvPr id="22" name="Shape 18"/>
           <p:cNvSpPr/>
           <p:nvPr/>
         </p:nvSpPr>
@@ -17838,7 +17628,7 @@
       </p:sp>
       <p:sp>
         <p:nvSpPr>
-          <p:cNvPr id="24" name="Text 21"/>
+          <p:cNvPr id="23" name="Text 19"/>
           <p:cNvSpPr txBox="1"/>
           <p:nvPr/>
         </p:nvSpPr>
@@ -17880,7 +17670,7 @@
       </p:sp>
       <p:sp>
         <p:nvSpPr>
-          <p:cNvPr id="25" name="Shape 22"/>
+          <p:cNvPr id="24" name="Shape 20"/>
           <p:cNvSpPr/>
           <p:nvPr/>
         </p:nvSpPr>
@@ -17905,7 +17695,7 @@
       </p:sp>
       <p:sp>
         <p:nvSpPr>
-          <p:cNvPr id="26" name="Text 23"/>
+          <p:cNvPr id="25" name="Text 21"/>
           <p:cNvSpPr txBox="1"/>
           <p:nvPr/>
         </p:nvSpPr>
@@ -17947,7 +17737,7 @@
       </p:sp>
       <p:sp>
         <p:nvSpPr>
-          <p:cNvPr id="27" name="Shape 24"/>
+          <p:cNvPr id="26" name="Shape 22"/>
           <p:cNvSpPr/>
           <p:nvPr/>
         </p:nvSpPr>
@@ -17972,7 +17762,7 @@
       </p:sp>
       <p:sp>
         <p:nvSpPr>
-          <p:cNvPr id="28" name="Shape 25"/>
+          <p:cNvPr id="27" name="Shape 23"/>
           <p:cNvSpPr/>
           <p:nvPr/>
         </p:nvSpPr>
@@ -17997,7 +17787,7 @@
       </p:sp>
       <p:sp>
         <p:nvSpPr>
-          <p:cNvPr id="29" name="Text 26"/>
+          <p:cNvPr id="28" name="Text 24"/>
           <p:cNvSpPr txBox="1"/>
           <p:nvPr/>
         </p:nvSpPr>
@@ -18039,7 +17829,7 @@
       </p:sp>
       <p:sp>
         <p:nvSpPr>
-          <p:cNvPr id="30" name="Shape 27"/>
+          <p:cNvPr id="29" name="Shape 25"/>
           <p:cNvSpPr/>
           <p:nvPr/>
         </p:nvSpPr>
@@ -18064,7 +17854,7 @@
       </p:sp>
       <p:sp>
         <p:nvSpPr>
-          <p:cNvPr id="31" name="Text 28"/>
+          <p:cNvPr id="30" name="Text 26"/>
           <p:cNvSpPr txBox="1"/>
           <p:nvPr/>
         </p:nvSpPr>
@@ -18106,7 +17896,7 @@
       </p:sp>
       <p:sp>
         <p:nvSpPr>
-          <p:cNvPr id="32" name="Shape 29"/>
+          <p:cNvPr id="31" name="Shape 27"/>
           <p:cNvSpPr/>
           <p:nvPr/>
         </p:nvSpPr>
@@ -18131,7 +17921,7 @@
       </p:sp>
       <p:sp>
         <p:nvSpPr>
-          <p:cNvPr id="33" name="Text 30"/>
+          <p:cNvPr id="32" name="Text 28"/>
           <p:cNvSpPr txBox="1"/>
           <p:nvPr/>
         </p:nvSpPr>
@@ -18173,7 +17963,7 @@
       </p:sp>
       <p:sp>
         <p:nvSpPr>
-          <p:cNvPr id="34" name="Shape 31"/>
+          <p:cNvPr id="33" name="Shape 29"/>
           <p:cNvSpPr/>
           <p:nvPr/>
         </p:nvSpPr>
@@ -18198,7 +17988,7 @@
       </p:sp>
       <p:sp>
         <p:nvSpPr>
-          <p:cNvPr id="35" name="Text 32"/>
+          <p:cNvPr id="34" name="Text 30"/>
           <p:cNvSpPr txBox="1"/>
           <p:nvPr/>
         </p:nvSpPr>
@@ -18240,7 +18030,7 @@
       </p:sp>
       <p:sp>
         <p:nvSpPr>
-          <p:cNvPr id="36" name="Shape 33"/>
+          <p:cNvPr id="35" name="Shape 31"/>
           <p:cNvSpPr/>
           <p:nvPr/>
         </p:nvSpPr>
@@ -18265,7 +18055,7 @@
       </p:sp>
       <p:sp>
         <p:nvSpPr>
-          <p:cNvPr id="37" name="Text 34"/>
+          <p:cNvPr id="36" name="Text 32"/>
           <p:cNvSpPr txBox="1"/>
           <p:nvPr/>
         </p:nvSpPr>
@@ -18307,7 +18097,7 @@
       </p:sp>
       <p:sp>
         <p:nvSpPr>
-          <p:cNvPr id="38" name="Shape 35"/>
+          <p:cNvPr id="37" name="Shape 33"/>
           <p:cNvSpPr/>
           <p:nvPr/>
         </p:nvSpPr>
@@ -18332,7 +18122,7 @@
       </p:sp>
       <p:sp>
         <p:nvSpPr>
-          <p:cNvPr id="39" name="Shape 36"/>
+          <p:cNvPr id="38" name="Shape 34"/>
           <p:cNvSpPr/>
           <p:nvPr/>
         </p:nvSpPr>
@@ -18357,7 +18147,7 @@
       </p:sp>
       <p:sp>
         <p:nvSpPr>
-          <p:cNvPr id="40" name="Text 37"/>
+          <p:cNvPr id="39" name="Text 35"/>
           <p:cNvSpPr txBox="1"/>
           <p:nvPr/>
         </p:nvSpPr>
@@ -18399,7 +18189,7 @@
       </p:sp>
       <p:sp>
         <p:nvSpPr>
-          <p:cNvPr id="41" name="Shape 38"/>
+          <p:cNvPr id="40" name="Shape 36"/>
           <p:cNvSpPr/>
           <p:nvPr/>
         </p:nvSpPr>
@@ -18424,7 +18214,7 @@
       </p:sp>
       <p:sp>
         <p:nvSpPr>
-          <p:cNvPr id="42" name="Text 39"/>
+          <p:cNvPr id="41" name="Text 37"/>
           <p:cNvSpPr txBox="1"/>
           <p:nvPr/>
         </p:nvSpPr>
@@ -18466,7 +18256,7 @@
       </p:sp>
       <p:sp>
         <p:nvSpPr>
-          <p:cNvPr id="43" name="Shape 40"/>
+          <p:cNvPr id="42" name="Shape 38"/>
           <p:cNvSpPr/>
           <p:nvPr/>
         </p:nvSpPr>
@@ -18491,7 +18281,7 @@
       </p:sp>
       <p:sp>
         <p:nvSpPr>
-          <p:cNvPr id="44" name="Text 41"/>
+          <p:cNvPr id="43" name="Text 39"/>
           <p:cNvSpPr txBox="1"/>
           <p:nvPr/>
         </p:nvSpPr>
@@ -18533,7 +18323,7 @@
       </p:sp>
       <p:sp>
         <p:nvSpPr>
-          <p:cNvPr id="45" name="Shape 42"/>
+          <p:cNvPr id="44" name="Shape 40"/>
           <p:cNvSpPr/>
           <p:nvPr/>
         </p:nvSpPr>
@@ -18558,7 +18348,7 @@
       </p:sp>
       <p:sp>
         <p:nvSpPr>
-          <p:cNvPr id="46" name="Text 43"/>
+          <p:cNvPr id="45" name="Text 41"/>
           <p:cNvSpPr txBox="1"/>
           <p:nvPr/>
         </p:nvSpPr>
@@ -18600,7 +18390,7 @@
       </p:sp>
       <p:sp>
         <p:nvSpPr>
-          <p:cNvPr id="47" name="Shape 44"/>
+          <p:cNvPr id="46" name="Shape 42"/>
           <p:cNvSpPr/>
           <p:nvPr/>
         </p:nvSpPr>
@@ -18625,7 +18415,7 @@
       </p:sp>
       <p:sp>
         <p:nvSpPr>
-          <p:cNvPr id="48" name="Text 45"/>
+          <p:cNvPr id="47" name="Text 43"/>
           <p:cNvSpPr txBox="1"/>
           <p:nvPr/>
         </p:nvSpPr>
@@ -18667,7 +18457,7 @@
       </p:sp>
       <p:sp>
         <p:nvSpPr>
-          <p:cNvPr id="49" name="Shape 46"/>
+          <p:cNvPr id="48" name="Shape 44"/>
           <p:cNvSpPr/>
           <p:nvPr/>
         </p:nvSpPr>
@@ -18692,7 +18482,7 @@
       </p:sp>
       <p:sp>
         <p:nvSpPr>
-          <p:cNvPr id="50" name="Shape 47"/>
+          <p:cNvPr id="49" name="Shape 45"/>
           <p:cNvSpPr/>
           <p:nvPr/>
         </p:nvSpPr>
@@ -18717,7 +18507,7 @@
       </p:sp>
       <p:sp>
         <p:nvSpPr>
-          <p:cNvPr id="51" name="Text 48"/>
+          <p:cNvPr id="50" name="Text 46"/>
           <p:cNvSpPr txBox="1"/>
           <p:nvPr/>
         </p:nvSpPr>
@@ -18759,7 +18549,7 @@
       </p:sp>
       <p:sp>
         <p:nvSpPr>
-          <p:cNvPr id="52" name="Shape 49"/>
+          <p:cNvPr id="51" name="Shape 47"/>
           <p:cNvSpPr/>
           <p:nvPr/>
         </p:nvSpPr>
@@ -18784,7 +18574,7 @@
       </p:sp>
       <p:sp>
         <p:nvSpPr>
-          <p:cNvPr id="53" name="Text 50"/>
+          <p:cNvPr id="52" name="Text 48"/>
           <p:cNvSpPr txBox="1"/>
           <p:nvPr/>
         </p:nvSpPr>
@@ -18826,7 +18616,7 @@
       </p:sp>
       <p:sp>
         <p:nvSpPr>
-          <p:cNvPr id="54" name="Shape 51"/>
+          <p:cNvPr id="53" name="Shape 49"/>
           <p:cNvSpPr/>
           <p:nvPr/>
         </p:nvSpPr>
@@ -18851,7 +18641,7 @@
       </p:sp>
       <p:sp>
         <p:nvSpPr>
-          <p:cNvPr id="55" name="Text 52"/>
+          <p:cNvPr id="54" name="Text 50"/>
           <p:cNvSpPr txBox="1"/>
           <p:nvPr/>
         </p:nvSpPr>
@@ -18893,7 +18683,7 @@
       </p:sp>
       <p:sp>
         <p:nvSpPr>
-          <p:cNvPr id="56" name="Shape 53"/>
+          <p:cNvPr id="55" name="Shape 51"/>
           <p:cNvSpPr/>
           <p:nvPr/>
         </p:nvSpPr>
@@ -18918,7 +18708,7 @@
       </p:sp>
       <p:sp>
         <p:nvSpPr>
-          <p:cNvPr id="57" name="Text 54"/>
+          <p:cNvPr id="56" name="Text 52"/>
           <p:cNvSpPr txBox="1"/>
           <p:nvPr/>
         </p:nvSpPr>
@@ -18960,7 +18750,7 @@
       </p:sp>
       <p:sp>
         <p:nvSpPr>
-          <p:cNvPr id="58" name="Shape 55"/>
+          <p:cNvPr id="57" name="Shape 53"/>
           <p:cNvSpPr/>
           <p:nvPr/>
         </p:nvSpPr>
@@ -18985,7 +18775,7 @@
       </p:sp>
       <p:sp>
         <p:nvSpPr>
-          <p:cNvPr id="59" name="Text 56"/>
+          <p:cNvPr id="58" name="Text 54"/>
           <p:cNvSpPr txBox="1"/>
           <p:nvPr/>
         </p:nvSpPr>
@@ -19027,7 +18817,7 @@
       </p:sp>
       <p:sp>
         <p:nvSpPr>
-          <p:cNvPr id="60" name="Shape 57"/>
+          <p:cNvPr id="59" name="Shape 55"/>
           <p:cNvSpPr/>
           <p:nvPr/>
         </p:nvSpPr>
@@ -19050,7 +18840,7 @@
       </p:sp>
       <p:sp>
         <p:nvSpPr>
-          <p:cNvPr id="61" name="Text 58"/>
+          <p:cNvPr id="60" name="Text 56"/>
           <p:cNvSpPr txBox="1"/>
           <p:nvPr/>
         </p:nvSpPr>
@@ -19092,7 +18882,7 @@
       </p:sp>
       <p:sp>
         <p:nvSpPr>
-          <p:cNvPr id="62" name="Shape 59"/>
+          <p:cNvPr id="61" name="Shape 57"/>
           <p:cNvSpPr/>
           <p:nvPr/>
         </p:nvSpPr>
@@ -19117,7 +18907,7 @@
       </p:sp>
       <p:sp>
         <p:nvSpPr>
-          <p:cNvPr id="63" name="Text 60"/>
+          <p:cNvPr id="62" name="Text 58"/>
           <p:cNvSpPr txBox="1"/>
           <p:nvPr/>
         </p:nvSpPr>
@@ -19159,7 +18949,7 @@
       </p:sp>
       <p:sp>
         <p:nvSpPr>
-          <p:cNvPr id="64" name="Text 61"/>
+          <p:cNvPr id="63" name="Text 59"/>
           <p:cNvSpPr txBox="1"/>
           <p:nvPr/>
         </p:nvSpPr>
@@ -19201,7 +18991,7 @@
       </p:sp>
       <p:sp>
         <p:nvSpPr>
-          <p:cNvPr id="65" name="Text 62"/>
+          <p:cNvPr id="64" name="Text 60"/>
           <p:cNvSpPr txBox="1"/>
           <p:nvPr/>
         </p:nvSpPr>
@@ -19260,7 +19050,7 @@
       </p:sp>
       <p:sp>
         <p:nvSpPr>
-          <p:cNvPr id="66" name="Text 63"/>
+          <p:cNvPr id="65" name="Text 61"/>
           <p:cNvSpPr txBox="1"/>
           <p:nvPr/>
         </p:nvSpPr>
@@ -19319,7 +19109,7 @@
       </p:sp>
       <p:sp>
         <p:nvSpPr>
-          <p:cNvPr id="67" name="Text 64"/>
+          <p:cNvPr id="66" name="Text 62"/>
           <p:cNvSpPr txBox="1"/>
           <p:nvPr/>
         </p:nvSpPr>
@@ -19378,7 +19168,7 @@
       </p:sp>
       <p:sp>
         <p:nvSpPr>
-          <p:cNvPr id="68" name="Text 65"/>
+          <p:cNvPr id="67" name="Text 63"/>
           <p:cNvSpPr txBox="1"/>
           <p:nvPr/>
         </p:nvSpPr>
@@ -19437,7 +19227,7 @@
       </p:sp>
       <p:sp>
         <p:nvSpPr>
-          <p:cNvPr id="69" name="Shape 66"/>
+          <p:cNvPr id="68" name="Shape 64"/>
           <p:cNvSpPr/>
           <p:nvPr/>
         </p:nvSpPr>
@@ -19460,7 +19250,7 @@
       </p:sp>
       <p:sp>
         <p:nvSpPr>
-          <p:cNvPr id="70" name="Text 67"/>
+          <p:cNvPr id="69" name="Text 65"/>
           <p:cNvSpPr txBox="1"/>
           <p:nvPr/>
         </p:nvSpPr>
@@ -19502,7 +19292,7 @@
       </p:sp>
       <p:sp>
         <p:nvSpPr>
-          <p:cNvPr id="71" name="Shape 68"/>
+          <p:cNvPr id="70" name="Shape 66"/>
           <p:cNvSpPr/>
           <p:nvPr/>
         </p:nvSpPr>
@@ -19527,7 +19317,7 @@
       </p:sp>
       <p:sp>
         <p:nvSpPr>
-          <p:cNvPr id="72" name="Text 69"/>
+          <p:cNvPr id="71" name="Text 67"/>
           <p:cNvSpPr txBox="1"/>
           <p:nvPr/>
         </p:nvSpPr>
@@ -20727,7 +20517,7 @@
       </p:graphicFrame>
       <p:sp>
         <p:nvSpPr>
-          <p:cNvPr id="74" name="Shape 70"/>
+          <p:cNvPr id="73" name="Shape 68"/>
           <p:cNvSpPr/>
           <p:nvPr/>
         </p:nvSpPr>
@@ -20750,7 +20540,7 @@
       </p:sp>
       <p:sp>
         <p:nvSpPr>
-          <p:cNvPr id="75" name="Text 71"/>
+          <p:cNvPr id="74" name="Text 69"/>
           <p:cNvSpPr txBox="1"/>
           <p:nvPr/>
         </p:nvSpPr>
@@ -20792,7 +20582,7 @@
       </p:sp>
       <p:sp>
         <p:nvSpPr>
-          <p:cNvPr id="76" name="Shape 72"/>
+          <p:cNvPr id="75" name="Shape 70"/>
           <p:cNvSpPr/>
           <p:nvPr/>
         </p:nvSpPr>
@@ -20817,7 +20607,7 @@
       </p:sp>
       <p:sp>
         <p:nvSpPr>
-          <p:cNvPr id="77" name="Text 73"/>
+          <p:cNvPr id="76" name="Text 71"/>
           <p:cNvSpPr txBox="1"/>
           <p:nvPr/>
         </p:nvSpPr>
@@ -20859,7 +20649,7 @@
       </p:sp>
       <p:sp>
         <p:nvSpPr>
-          <p:cNvPr id="78" name="Text 74"/>
+          <p:cNvPr id="77" name="Text 72"/>
           <p:cNvSpPr txBox="1"/>
           <p:nvPr/>
         </p:nvSpPr>
@@ -20901,7 +20691,7 @@
       </p:sp>
       <p:sp>
         <p:nvSpPr>
-          <p:cNvPr id="79" name="Text 75"/>
+          <p:cNvPr id="78" name="Text 73"/>
           <p:cNvSpPr txBox="1"/>
           <p:nvPr/>
         </p:nvSpPr>
@@ -20960,7 +20750,7 @@
       </p:sp>
       <p:sp>
         <p:nvSpPr>
-          <p:cNvPr id="80" name="Text 76"/>
+          <p:cNvPr id="79" name="Text 74"/>
           <p:cNvSpPr txBox="1"/>
           <p:nvPr/>
         </p:nvSpPr>
@@ -21019,7 +20809,7 @@
       </p:sp>
       <p:sp>
         <p:nvSpPr>
-          <p:cNvPr id="81" name="Shape 77"/>
+          <p:cNvPr id="80" name="Shape 75"/>
           <p:cNvSpPr/>
           <p:nvPr/>
         </p:nvSpPr>
@@ -21042,7 +20832,7 @@
       </p:sp>
       <p:sp>
         <p:nvSpPr>
-          <p:cNvPr id="82" name="Text 78"/>
+          <p:cNvPr id="81" name="Text 76"/>
           <p:cNvSpPr txBox="1"/>
           <p:nvPr/>
         </p:nvSpPr>
@@ -21084,7 +20874,7 @@
       </p:sp>
       <p:sp>
         <p:nvSpPr>
-          <p:cNvPr id="83" name="Shape 79"/>
+          <p:cNvPr id="82" name="Shape 77"/>
           <p:cNvSpPr/>
           <p:nvPr/>
         </p:nvSpPr>
@@ -21109,7 +20899,7 @@
       </p:sp>
       <p:sp>
         <p:nvSpPr>
-          <p:cNvPr id="84" name="Text 80"/>
+          <p:cNvPr id="83" name="Text 78"/>
           <p:cNvSpPr txBox="1"/>
           <p:nvPr/>
         </p:nvSpPr>
@@ -24187,7 +23977,7 @@
       </p:graphicFrame>
       <p:sp>
         <p:nvSpPr>
-          <p:cNvPr id="86" name="Shape 81"/>
+          <p:cNvPr id="85" name="Shape 79"/>
           <p:cNvSpPr/>
           <p:nvPr/>
         </p:nvSpPr>
@@ -24210,7 +24000,7 @@
       </p:sp>
       <p:sp>
         <p:nvSpPr>
-          <p:cNvPr id="87" name="Text 82"/>
+          <p:cNvPr id="86" name="Text 80"/>
           <p:cNvSpPr txBox="1"/>
           <p:nvPr/>
         </p:nvSpPr>
@@ -24252,7 +24042,7 @@
       </p:sp>
       <p:sp>
         <p:nvSpPr>
-          <p:cNvPr id="88" name="Shape 83"/>
+          <p:cNvPr id="87" name="Shape 81"/>
           <p:cNvSpPr/>
           <p:nvPr/>
         </p:nvSpPr>
@@ -24277,7 +24067,7 @@
       </p:sp>
       <p:sp>
         <p:nvSpPr>
-          <p:cNvPr id="89" name="Text 84"/>
+          <p:cNvPr id="88" name="Text 82"/>
           <p:cNvSpPr txBox="1"/>
           <p:nvPr/>
         </p:nvSpPr>
@@ -24319,7 +24109,7 @@
       </p:sp>
       <p:sp>
         <p:nvSpPr>
-          <p:cNvPr id="90" name="Shape 85"/>
+          <p:cNvPr id="89" name="Shape 83"/>
           <p:cNvSpPr/>
           <p:nvPr/>
         </p:nvSpPr>
@@ -24344,7 +24134,7 @@
       </p:sp>
       <p:sp>
         <p:nvSpPr>
-          <p:cNvPr id="91" name="Text 86"/>
+          <p:cNvPr id="90" name="Text 84"/>
           <p:cNvSpPr txBox="1"/>
           <p:nvPr/>
         </p:nvSpPr>
@@ -24403,7 +24193,7 @@
       </p:sp>
       <p:sp>
         <p:nvSpPr>
-          <p:cNvPr id="92" name="Shape 87"/>
+          <p:cNvPr id="91" name="Shape 85"/>
           <p:cNvSpPr/>
           <p:nvPr/>
         </p:nvSpPr>
@@ -24428,7 +24218,7 @@
       </p:sp>
       <p:sp>
         <p:nvSpPr>
-          <p:cNvPr id="93" name="Text 88"/>
+          <p:cNvPr id="92" name="Text 86"/>
           <p:cNvSpPr txBox="1"/>
           <p:nvPr/>
         </p:nvSpPr>
@@ -24487,7 +24277,7 @@
       </p:sp>
       <p:sp>
         <p:nvSpPr>
-          <p:cNvPr id="94" name="Shape 89"/>
+          <p:cNvPr id="93" name="Shape 87"/>
           <p:cNvSpPr/>
           <p:nvPr/>
         </p:nvSpPr>
@@ -24512,7 +24302,7 @@
       </p:sp>
       <p:sp>
         <p:nvSpPr>
-          <p:cNvPr id="95" name="Text 90"/>
+          <p:cNvPr id="94" name="Text 88"/>
           <p:cNvSpPr txBox="1"/>
           <p:nvPr/>
         </p:nvSpPr>
@@ -24571,7 +24361,7 @@
       </p:sp>
       <p:sp>
         <p:nvSpPr>
-          <p:cNvPr id="96" name="Shape 91"/>
+          <p:cNvPr id="95" name="Shape 89"/>
           <p:cNvSpPr/>
           <p:nvPr/>
         </p:nvSpPr>
@@ -24596,7 +24386,7 @@
       </p:sp>
       <p:sp>
         <p:nvSpPr>
-          <p:cNvPr id="97" name="Text 92"/>
+          <p:cNvPr id="96" name="Text 90"/>
           <p:cNvSpPr txBox="1"/>
           <p:nvPr/>
         </p:nvSpPr>
@@ -24655,7 +24445,7 @@
       </p:sp>
       <p:sp>
         <p:nvSpPr>
-          <p:cNvPr id="98" name="Shape 93"/>
+          <p:cNvPr id="97" name="Shape 91"/>
           <p:cNvSpPr/>
           <p:nvPr/>
         </p:nvSpPr>
@@ -24680,7 +24470,7 @@
       </p:sp>
       <p:sp>
         <p:nvSpPr>
-          <p:cNvPr id="99" name="Text 94"/>
+          <p:cNvPr id="98" name="Text 92"/>
           <p:cNvSpPr txBox="1"/>
           <p:nvPr/>
         </p:nvSpPr>
@@ -24739,7 +24529,7 @@
       </p:sp>
       <p:sp>
         <p:nvSpPr>
-          <p:cNvPr id="100" name="Shape 95"/>
+          <p:cNvPr id="99" name="Shape 93"/>
           <p:cNvSpPr/>
           <p:nvPr/>
         </p:nvSpPr>
@@ -24762,7 +24552,7 @@
       </p:sp>
       <p:sp>
         <p:nvSpPr>
-          <p:cNvPr id="101" name="Text 96"/>
+          <p:cNvPr id="100" name="Text 94"/>
           <p:cNvSpPr txBox="1"/>
           <p:nvPr/>
         </p:nvSpPr>

--- a/00 Admin/11 Final Outputs/plan-on-a-page/TapThat_Plan-on-a-Page_A3.pptx
+++ b/00 Admin/11 Final Outputs/plan-on-a-page/TapThat_Plan-on-a-Page_A3.pptx
@@ -1326,8 +1326,8 @@
         </p:nvSpPr>
         <p:spPr>
           <a:xfrm>
-            <a:off x="12693129" y="365760"/>
-            <a:ext cx="1150475" cy="251460"/>
+            <a:off x="12678246" y="365760"/>
+            <a:ext cx="1165358" cy="251460"/>
           </a:xfrm>
           <a:prstGeom prst="roundRect">
             <a:avLst>
@@ -1353,8 +1353,8 @@
         </p:nvSpPr>
         <p:spPr>
           <a:xfrm>
-            <a:off x="12693129" y="365760"/>
-            <a:ext cx="1150475" cy="251460"/>
+            <a:off x="12678246" y="365760"/>
+            <a:ext cx="1165358" cy="251460"/>
           </a:xfrm>
           <a:prstGeom prst="rect">
             <a:avLst/>
@@ -1378,7 +1378,7 @@
                 <a:ea typeface="Poppins" pitchFamily="34" charset="-122"/>
                 <a:cs typeface="Poppins" pitchFamily="34" charset="-120"/>
               </a:rPr>
-              <a:t>V01 · 15 SEPT 2026</a:t>
+              <a:t>V02 · 16 SEPT 2026</a:t>
             </a:r>
             <a:endParaRPr lang="en-US" sz="650" dirty="0"/>
           </a:p>
@@ -1392,7 +1392,7 @@
         </p:nvSpPr>
         <p:spPr>
           <a:xfrm>
-            <a:off x="11385086" y="365760"/>
+            <a:off x="11370203" y="365760"/>
             <a:ext cx="1218043" cy="251460"/>
           </a:xfrm>
           <a:prstGeom prst="roundRect">
@@ -1419,7 +1419,7 @@
         </p:nvSpPr>
         <p:spPr>
           <a:xfrm>
-            <a:off x="11385086" y="365760"/>
+            <a:off x="11370203" y="365760"/>
             <a:ext cx="1218043" cy="251460"/>
           </a:xfrm>
           <a:prstGeom prst="rect">
@@ -1458,7 +1458,7 @@
         </p:nvSpPr>
         <p:spPr>
           <a:xfrm>
-            <a:off x="10543619" y="365760"/>
+            <a:off x="10528736" y="365760"/>
             <a:ext cx="751467" cy="251460"/>
           </a:xfrm>
           <a:prstGeom prst="roundRect">
@@ -1485,7 +1485,7 @@
         </p:nvSpPr>
         <p:spPr>
           <a:xfrm>
-            <a:off x="10543619" y="365760"/>
+            <a:off x="10528736" y="365760"/>
             <a:ext cx="751467" cy="251460"/>
           </a:xfrm>
           <a:prstGeom prst="rect">
@@ -1640,7 +1640,7 @@
         <p:spPr>
           <a:xfrm>
             <a:off x="438898" y="1400636"/>
-            <a:ext cx="8166764" cy="440944"/>
+            <a:ext cx="8166764" cy="661416"/>
           </a:xfrm>
           <a:prstGeom prst="rect">
             <a:avLst/>
@@ -1667,7 +1667,7 @@
                 <a:ea typeface="Poppins" pitchFamily="34" charset="-122"/>
                 <a:cs typeface="Poppins" pitchFamily="34" charset="-120"/>
               </a:rPr>
-              <a:t>1,000 keg systems in the market. Every decision gets tested against whether it moves that number.</a:t>
+              <a:t>1,000 active keg refillers by year three, across the Gold Coast, Brisbane and Northern Rivers, residential and commercial, with 250 at six months (March 2027). Every decision gets tested against whether it moves that number.</a:t>
             </a:r>
             <a:endParaRPr lang="en-US" sz="1400" dirty="0"/>
           </a:p>
@@ -1681,8 +1681,8 @@
         </p:nvSpPr>
         <p:spPr>
           <a:xfrm>
-            <a:off x="438898" y="1928489"/>
-            <a:ext cx="8166764" cy="308610"/>
+            <a:off x="438898" y="2139036"/>
+            <a:ext cx="8166764" cy="462915"/>
           </a:xfrm>
           <a:prstGeom prst="rect">
             <a:avLst/>
@@ -1726,7 +1726,7 @@
                 <a:ea typeface="Poppins" pitchFamily="34" charset="-122"/>
                 <a:cs typeface="Poppins" pitchFamily="34" charset="-120"/>
               </a:rPr>
-              <a:t>refills lead, and the Tap Room stops being run as a walk-in venue. It becomes a destination that sells events, tours and functions. The two halves have been cancelling each other out, because a good refill business takes traffic out of the room.</a:t>
+              <a:t>Justin's own three-way, not yet settled: a Taproom selling kegs, a Showroom selling beers, or an Event space doing both. JP recommended pausing walk-in trade to protect the refill business; Justin's own priority is to grow taproom traffic from local business, functions and ticketed music.</a:t>
             </a:r>
             <a:endParaRPr lang="en-US" sz="810" dirty="0"/>
           </a:p>
@@ -1740,7 +1740,7 @@
         </p:nvSpPr>
         <p:spPr>
           <a:xfrm>
-            <a:off x="438898" y="2324008"/>
+            <a:off x="438898" y="2678935"/>
             <a:ext cx="8166764" cy="308610"/>
           </a:xfrm>
           <a:prstGeom prst="rect">
@@ -1785,7 +1785,7 @@
                 <a:ea typeface="Poppins" pitchFamily="34" charset="-122"/>
                 <a:cs typeface="Poppins" pitchFamily="34" charset="-120"/>
               </a:rPr>
-              <a:t>Marketing time keeps going to the half that loses money, the best insights stay buried in a long document, and 1,000 systems stays a number on a slide.</a:t>
+              <a:t>Marketing time gets split across three shapes at once, the best insights stay buried in a long document, and 1,000 refillers stays a number on a page.</a:t>
             </a:r>
             <a:endParaRPr lang="en-US" sz="810" dirty="0"/>
           </a:p>
@@ -1799,8 +1799,8 @@
         </p:nvSpPr>
         <p:spPr>
           <a:xfrm>
-            <a:off x="438898" y="2719527"/>
-            <a:ext cx="8166764" cy="617220"/>
+            <a:off x="438898" y="3064528"/>
+            <a:ext cx="8166764" cy="308610"/>
           </a:xfrm>
           <a:prstGeom prst="rect">
             <a:avLst/>
@@ -1844,7 +1844,7 @@
                 <a:ea typeface="Poppins" pitchFamily="34" charset="-122"/>
                 <a:cs typeface="Poppins" pitchFamily="34" charset="-120"/>
               </a:rPr>
-              <a:t>Christy's reading of the Discovery set was that everything in it is equal, so none of it has shape: everything is important, the best insights are buried inside other insights, and nothing has been stress-tested. Clent asked for three things off the back of it, and they are the test for this page. Belief, because the work is already good. Clarity, on which few things get picked up. Momentum, because a decision made is worth more than a strategy admired.</a:t>
+              <a:t>Christy's reading of the Discovery set: everything in it is equal, so none of it has shape. Clent asked for three things off the back of it: belief, clarity, momentum, because a decision made beats a strategy admired.</a:t>
             </a:r>
             <a:endParaRPr lang="en-US" sz="810" dirty="0"/>
           </a:p>
@@ -1909,7 +1909,7 @@
                 <a:ea typeface="Poppins" pitchFamily="34" charset="-122"/>
                 <a:cs typeface="Poppins" pitchFamily="34" charset="-120"/>
               </a:rPr>
-              <a:t>North star proposed by Christy in the 15 September catch-up. Numbers on this sheet come from the Discovery pack unless marked.</a:t>
+              <a:t>North star is Justin's, from his plan on a page. JP framed it in the catch-up as 1,000 systems; refillers is the better measure, since a system not refilling is worth nothing.</a:t>
             </a:r>
             <a:endParaRPr lang="en-US" sz="700" dirty="0"/>
           </a:p>
@@ -2152,7 +2152,7 @@
                 <a:ea typeface="Poppins" pitchFamily="34" charset="-122"/>
                 <a:cs typeface="Poppins" pitchFamily="34" charset="-120"/>
               </a:rPr>
-              <a:t>206</a:t>
+              <a:t>250</a:t>
             </a:r>
             <a:endParaRPr lang="en-US" sz="1400" dirty="0"/>
           </a:p>
@@ -2194,7 +2194,7 @@
                 <a:ea typeface="Poppins" pitchFamily="34" charset="-122"/>
                 <a:cs typeface="Poppins" pitchFamily="34" charset="-120"/>
               </a:rPr>
-              <a:t>SYSTEMS IN THE DATABASE</a:t>
+              <a:t>ACTIVE REFILLERS AT SIX MONTHS</a:t>
             </a:r>
             <a:endParaRPr lang="en-US" sz="560" dirty="0"/>
           </a:p>
@@ -2261,7 +2261,7 @@
                 <a:ea typeface="Poppins" pitchFamily="34" charset="-122"/>
                 <a:cs typeface="Poppins" pitchFamily="34" charset="-120"/>
               </a:rPr>
-              <a:t>56%</a:t>
+              <a:t>1,000</a:t>
             </a:r>
             <a:endParaRPr lang="en-US" sz="1400" dirty="0"/>
           </a:p>
@@ -2303,7 +2303,7 @@
                 <a:ea typeface="Poppins" pitchFamily="34" charset="-122"/>
                 <a:cs typeface="Poppins" pitchFamily="34" charset="-120"/>
               </a:rPr>
-              <a:t>BOUGHT THEIR SYSTEM ELSEWHERE</a:t>
+              <a:t>ACTIVE REFILLERS BY YEAR THREE</a:t>
             </a:r>
             <a:endParaRPr lang="en-US" sz="560" dirty="0"/>
           </a:p>
@@ -2370,7 +2370,7 @@
                 <a:ea typeface="Poppins" pitchFamily="34" charset="-122"/>
                 <a:cs typeface="Poppins" pitchFamily="34" charset="-120"/>
               </a:rPr>
-              <a:t>~9×</a:t>
+              <a:t>56%</a:t>
             </a:r>
             <a:endParaRPr lang="en-US" sz="1400" dirty="0"/>
           </a:p>
@@ -2412,7 +2412,7 @@
                 <a:ea typeface="Poppins" pitchFamily="34" charset="-122"/>
                 <a:cs typeface="Poppins" pitchFamily="34" charset="-120"/>
               </a:rPr>
-              <a:t>THE CLIMB TO 1,000 FROM HERE</a:t>
+              <a:t>BOUGHT THEIR SYSTEM ELSEWHERE</a:t>
             </a:r>
             <a:endParaRPr lang="en-US" sz="560" dirty="0"/>
           </a:p>
@@ -2479,7 +2479,7 @@
                 <a:ea typeface="Poppins" pitchFamily="34" charset="-122"/>
                 <a:cs typeface="Poppins" pitchFamily="34" charset="-120"/>
               </a:rPr>
-              <a:t>40%</a:t>
+              <a:t>$2.55 vs $12+</a:t>
             </a:r>
             <a:endParaRPr lang="en-US" sz="1400" dirty="0"/>
           </a:p>
@@ -2521,7 +2521,7 @@
                 <a:ea typeface="Poppins" pitchFamily="34" charset="-122"/>
                 <a:cs typeface="Poppins" pitchFamily="34" charset="-120"/>
               </a:rPr>
-              <a:t>LAPSED, REASON SPLIT UNSETTLED</a:t>
+              <a:t>HOME SCHOONER PRICE VS PUB</a:t>
             </a:r>
             <a:endParaRPr lang="en-US" sz="560" dirty="0"/>
           </a:p>
@@ -2848,7 +2848,7 @@
                 <a:ea typeface="Poppins" pitchFamily="34" charset="-122"/>
                 <a:cs typeface="Poppins" pitchFamily="34" charset="-120"/>
               </a:rPr>
-              <a:t>Stop funding the losing half.</a:t>
+              <a:t>Settle the shape, then the split.</a:t>
             </a:r>
             <a:endParaRPr lang="en-US" sz="960" dirty="0"/>
           </a:p>
@@ -2890,7 +2890,7 @@
                 <a:ea typeface="Poppins" pitchFamily="34" charset="-122"/>
                 <a:cs typeface="Poppins" pitchFamily="34" charset="-120"/>
               </a:rPr>
-              <a:t>Pause walk-in trading and redirect that spend into refills and wholesale. Resource wholesale properly, because one account is worth about ten households and it is currently falling through the cracks.</a:t>
+              <a:t>Justin's own 30-day call: a Taproom selling kegs, a Showroom selling beers, or an Event space doing both. Alongside it, clarity on who is buying, residential vs commercial, and where the energy goes.</a:t>
             </a:r>
             <a:endParaRPr lang="en-US" sz="790" dirty="0"/>
           </a:p>
@@ -2949,7 +2949,7 @@
                 <a:ea typeface="Poppins" pitchFamily="34" charset="-122"/>
                 <a:cs typeface="Poppins" pitchFamily="34" charset="-120"/>
               </a:rPr>
-              <a:t>Justin confirms the walk-in call, and wholesale gets a person with a target.</a:t>
+              <a:t>Justin picks the shape and the residential-vs-commercial split, inside 30 days.</a:t>
             </a:r>
             <a:endParaRPr lang="en-US" sz="790" dirty="0"/>
           </a:p>
@@ -3083,7 +3083,7 @@
                 <a:ea typeface="Poppins" pitchFamily="34" charset="-122"/>
                 <a:cs typeface="Poppins" pitchFamily="34" charset="-120"/>
               </a:rPr>
-              <a:t>Own the category, not the price.</a:t>
+              <a:t>Every household deserves beer on tap.</a:t>
             </a:r>
             <a:endParaRPr lang="en-US" sz="960" dirty="0"/>
           </a:p>
@@ -3125,7 +3125,7 @@
                 <a:ea typeface="Poppins" pitchFamily="34" charset="-122"/>
                 <a:cs typeface="Poppins" pitchFamily="34" charset="-120"/>
               </a:rPr>
-              <a:t>The enemy is the overpriced pub, not the operator across the road. Cut the tail of about 19 brews to a set of heroes, put the Crafted award everywhere, and start designing for her.</a:t>
+              <a:t>Justin's own line for the business, aimed at homeowners who entertain, venues, sports clubs and restaurants. Confirming key messaging for each target market is a 30-day item.</a:t>
             </a:r>
             <a:endParaRPr lang="en-US" sz="790" dirty="0"/>
           </a:p>
@@ -3184,7 +3184,7 @@
                 <a:ea typeface="Poppins" pitchFamily="34" charset="-122"/>
                 <a:cs typeface="Poppins" pitchFamily="34" charset="-120"/>
               </a:rPr>
-              <a:t>the award goes on the site, the room and the decals this month.</a:t>
+              <a:t>confirm key messaging by target market, inside 30 days.</a:t>
             </a:r>
             <a:endParaRPr lang="en-US" sz="790" dirty="0"/>
           </a:p>
@@ -3318,7 +3318,7 @@
                 <a:ea typeface="Poppins" pitchFamily="34" charset="-122"/>
                 <a:cs typeface="Poppins" pitchFamily="34" charset="-120"/>
               </a:rPr>
-              <a:t>Connect the system before spending more.</a:t>
+              <a:t>Switch the owners who already have a system.</a:t>
             </a:r>
             <a:endParaRPr lang="en-US" sz="960" dirty="0"/>
           </a:p>
@@ -3333,7 +3333,7 @@
         <p:spPr>
           <a:xfrm>
             <a:off x="7707352" y="4679120"/>
-            <a:ext cx="3292328" cy="593954"/>
+            <a:ext cx="3292328" cy="445465"/>
           </a:xfrm>
           <a:prstGeom prst="rect">
             <a:avLst/>
@@ -3360,7 +3360,7 @@
                 <a:ea typeface="Poppins" pitchFamily="34" charset="-122"/>
                 <a:cs typeface="Poppins" pitchFamily="34" charset="-120"/>
               </a:rPr>
-              <a:t>Website, POS and CRM do not talk to each other, so every campaign underperforms. Then convert the owners who already bought elsewhere and take the friction out of reordering.</a:t>
+              <a:t>Justin's number one priority: find every existing keg system owner and move them onto Tap That refills. Alongside it, the website upgrade plus SEM, and a referral programme with JVPs.</a:t>
             </a:r>
             <a:endParaRPr lang="en-US" sz="790" dirty="0"/>
           </a:p>
@@ -3374,7 +3374,7 @@
         </p:nvSpPr>
         <p:spPr>
           <a:xfrm>
-            <a:off x="7707352" y="5337874"/>
+            <a:off x="7707352" y="5189385"/>
             <a:ext cx="3292328" cy="296977"/>
           </a:xfrm>
           <a:prstGeom prst="rect">
@@ -3419,7 +3419,7 @@
                 <a:ea typeface="Poppins" pitchFamily="34" charset="-122"/>
                 <a:cs typeface="Poppins" pitchFamily="34" charset="-120"/>
               </a:rPr>
-              <a:t>connect the three systems, then replace the 90-day SMS.</a:t>
+              <a:t>build the outreach list of existing system owners and start the switch.</a:t>
             </a:r>
             <a:endParaRPr lang="en-US" sz="790" dirty="0"/>
           </a:p>
@@ -3553,7 +3553,7 @@
                 <a:ea typeface="Poppins" pitchFamily="34" charset="-122"/>
                 <a:cs typeface="Poppins" pitchFamily="34" charset="-120"/>
               </a:rPr>
-              <a:t>Sell the room as a destination.</a:t>
+              <a:t>Oktoberfest, then grow the room.</a:t>
             </a:r>
             <a:endParaRPr lang="en-US" sz="960" dirty="0"/>
           </a:p>
@@ -3595,7 +3595,7 @@
                 <a:ea typeface="Poppins" pitchFamily="34" charset="-122"/>
                 <a:cs typeface="Poppins" pitchFamily="34" charset="-120"/>
               </a:rPr>
-              <a:t>Tours, weddings, functions and ticketed events, with the artwork and the booking path already built. Partnerships where the systems are already being sold.</a:t>
+              <a:t>A successful Oktoberfest and keg system giveaway first. Then taproom traffic from local business, functions and ticketed music events, Justin's own priority for the room.</a:t>
             </a:r>
             <a:endParaRPr lang="en-US" sz="790" dirty="0"/>
           </a:p>
@@ -3654,7 +3654,7 @@
                 <a:ea typeface="Poppins" pitchFamily="34" charset="-122"/>
                 <a:cs typeface="Poppins" pitchFamily="34" charset="-120"/>
               </a:rPr>
-              <a:t>get on the tour circuit and open the Harvey Norman conversation.</a:t>
+              <a:t>deliver Oktoberfest and the giveaway, then book the first ticketed music night.</a:t>
             </a:r>
             <a:endParaRPr lang="en-US" sz="790" dirty="0"/>
           </a:p>
@@ -3736,7 +3736,7 @@
         <p:spPr>
           <a:xfrm>
             <a:off x="438898" y="7617652"/>
-            <a:ext cx="548640" cy="205740"/>
+            <a:ext cx="677440" cy="205740"/>
           </a:xfrm>
           <a:prstGeom prst="roundRect">
             <a:avLst>
@@ -3763,7 +3763,7 @@
         <p:spPr>
           <a:xfrm>
             <a:off x="438898" y="7617652"/>
-            <a:ext cx="548640" cy="205740"/>
+            <a:ext cx="677440" cy="205740"/>
           </a:xfrm>
           <a:prstGeom prst="rect">
             <a:avLst/>
@@ -3787,7 +3787,7 @@
                 <a:ea typeface="Poppins" pitchFamily="34" charset="-122"/>
                 <a:cs typeface="Poppins" pitchFamily="34" charset="-120"/>
               </a:rPr>
-              <a:t>NOW</a:t>
+              <a:t>30 DAYS</a:t>
             </a:r>
             <a:endParaRPr lang="en-US" sz="640" dirty="0"/>
           </a:p>
@@ -3801,8 +3801,8 @@
         </p:nvSpPr>
         <p:spPr>
           <a:xfrm>
-            <a:off x="1170418" y="7604851"/>
-            <a:ext cx="3790217" cy="308610"/>
+            <a:off x="1280929" y="7604851"/>
+            <a:ext cx="3679705" cy="237744"/>
           </a:xfrm>
           <a:prstGeom prst="rect">
             <a:avLst/>
@@ -3829,7 +3829,7 @@
                 <a:ea typeface="Poppins" pitchFamily="34" charset="-122"/>
                 <a:cs typeface="Poppins" pitchFamily="34" charset="-120"/>
               </a:rPr>
-              <a:t>Justin picks the moves he is committing to. Connect the data. Pause walk-in spend.</a:t>
+              <a:t>The shape decision, KPIs and growth targets, meeting rhythm agreed.</a:t>
             </a:r>
             <a:endParaRPr lang="en-US" sz="810" dirty="0"/>
           </a:p>
@@ -3843,8 +3843,8 @@
         </p:nvSpPr>
         <p:spPr>
           <a:xfrm>
-            <a:off x="438898" y="8713753"/>
-            <a:ext cx="548640" cy="205740"/>
+            <a:off x="438898" y="7927584"/>
+            <a:ext cx="677440" cy="205740"/>
           </a:xfrm>
           <a:prstGeom prst="roundRect">
             <a:avLst>
@@ -3870,8 +3870,8 @@
         </p:nvSpPr>
         <p:spPr>
           <a:xfrm>
-            <a:off x="438898" y="8713753"/>
-            <a:ext cx="548640" cy="205740"/>
+            <a:off x="438898" y="7927584"/>
+            <a:ext cx="677440" cy="205740"/>
           </a:xfrm>
           <a:prstGeom prst="rect">
             <a:avLst/>
@@ -3895,7 +3895,7 @@
                 <a:ea typeface="Poppins" pitchFamily="34" charset="-122"/>
                 <a:cs typeface="Poppins" pitchFamily="34" charset="-120"/>
               </a:rPr>
-              <a:t>NEXT</a:t>
+              <a:t>3 MONTHS</a:t>
             </a:r>
             <a:endParaRPr lang="en-US" sz="640" dirty="0"/>
           </a:p>
@@ -3909,8 +3909,8 @@
         </p:nvSpPr>
         <p:spPr>
           <a:xfrm>
-            <a:off x="1170418" y="8700952"/>
-            <a:ext cx="3790217" cy="308610"/>
+            <a:off x="1280929" y="7914782"/>
+            <a:ext cx="3679705" cy="308610"/>
           </a:xfrm>
           <a:prstGeom prst="rect">
             <a:avLst/>
@@ -3937,7 +3937,7 @@
                 <a:ea typeface="Poppins" pitchFamily="34" charset="-122"/>
                 <a:cs typeface="Poppins" pitchFamily="34" charset="-120"/>
               </a:rPr>
-              <a:t>Convert existing owners. Fix reorder friction. Stand wholesale up as a role with targets.</a:t>
+              <a:t>Website, GoTab and SEM live; existing owners contacted; next hire decided.</a:t>
             </a:r>
             <a:endParaRPr lang="en-US" sz="810" dirty="0"/>
           </a:p>
@@ -3951,8 +3951,8 @@
         </p:nvSpPr>
         <p:spPr>
           <a:xfrm>
-            <a:off x="438898" y="9809854"/>
-            <a:ext cx="548640" cy="205740"/>
+            <a:off x="438898" y="8308381"/>
+            <a:ext cx="677440" cy="205740"/>
           </a:xfrm>
           <a:prstGeom prst="roundRect">
             <a:avLst>
@@ -3978,8 +3978,8 @@
         </p:nvSpPr>
         <p:spPr>
           <a:xfrm>
-            <a:off x="438898" y="9809854"/>
-            <a:ext cx="548640" cy="205740"/>
+            <a:off x="438898" y="8308381"/>
+            <a:ext cx="677440" cy="205740"/>
           </a:xfrm>
           <a:prstGeom prst="rect">
             <a:avLst/>
@@ -4003,7 +4003,7 @@
                 <a:ea typeface="Poppins" pitchFamily="34" charset="-122"/>
                 <a:cs typeface="Poppins" pitchFamily="34" charset="-120"/>
               </a:rPr>
-              <a:t>LATER</a:t>
+              <a:t>6 MONTHS</a:t>
             </a:r>
             <a:endParaRPr lang="en-US" sz="640" dirty="0"/>
           </a:p>
@@ -4017,8 +4017,8 @@
         </p:nvSpPr>
         <p:spPr>
           <a:xfrm>
-            <a:off x="1170418" y="9797053"/>
-            <a:ext cx="3790217" cy="308610"/>
+            <a:off x="1280929" y="8295580"/>
+            <a:ext cx="3679705" cy="237744"/>
           </a:xfrm>
           <a:prstGeom prst="rect">
             <a:avLst/>
@@ -4045,7 +4045,7 @@
                 <a:ea typeface="Poppins" pitchFamily="34" charset="-122"/>
                 <a:cs typeface="Poppins" pitchFamily="34" charset="-120"/>
               </a:rPr>
-              <a:t>Range rationalisation, the wellness line, designing for her, and the duopoly workaround.</a:t>
+              <a:t>250 active keg refillers; a clear career pathway for Chris and Harry.</a:t>
             </a:r>
             <a:endParaRPr lang="en-US" sz="810" dirty="0"/>
           </a:p>
@@ -4059,7 +4059,439 @@
         </p:nvSpPr>
         <p:spPr>
           <a:xfrm>
-            <a:off x="438898" y="10183264"/>
+            <a:off x="438898" y="8618313"/>
+            <a:ext cx="677440" cy="205740"/>
+          </a:xfrm>
+          <a:prstGeom prst="roundRect">
+            <a:avLst>
+              <a:gd name="adj" fmla="val 50000"/>
+            </a:avLst>
+          </a:prstGeom>
+          <a:solidFill>
+            <a:srgbClr val="0E171F"/>
+          </a:solidFill>
+          <a:ln w="12700">
+            <a:solidFill>
+              <a:srgbClr val="333333"/>
+            </a:solidFill>
+            <a:prstDash val="solid"/>
+          </a:ln>
+        </p:spPr>
+      </p:sp>
+      <p:sp>
+        <p:nvSpPr>
+          <p:cNvPr id="79" name="Text 75"/>
+          <p:cNvSpPr txBox="1"/>
+          <p:nvPr/>
+        </p:nvSpPr>
+        <p:spPr>
+          <a:xfrm>
+            <a:off x="438898" y="8618313"/>
+            <a:ext cx="677440" cy="205740"/>
+          </a:xfrm>
+          <a:prstGeom prst="rect">
+            <a:avLst/>
+          </a:prstGeom>
+          <a:noFill/>
+          <a:ln/>
+        </p:spPr>
+        <p:txBody>
+          <a:bodyPr wrap="square" lIns="0" tIns="0" rIns="0" bIns="0" rtlCol="0" anchor="ctr"/>
+          <a:lstStyle/>
+          <a:p>
+            <a:pPr algn="ctr" indent="0" marL="0">
+              <a:buNone/>
+            </a:pPr>
+            <a:r>
+              <a:rPr lang="en-US" sz="640" b="1" spc="64" kern="0" dirty="0">
+                <a:solidFill>
+                  <a:srgbClr val="FFFFFF"/>
+                </a:solidFill>
+                <a:latin typeface="Poppins" pitchFamily="34" charset="0"/>
+                <a:ea typeface="Poppins" pitchFamily="34" charset="-122"/>
+                <a:cs typeface="Poppins" pitchFamily="34" charset="-120"/>
+              </a:rPr>
+              <a:t>1 YEAR</a:t>
+            </a:r>
+            <a:endParaRPr lang="en-US" sz="640" dirty="0"/>
+          </a:p>
+        </p:txBody>
+      </p:sp>
+      <p:sp>
+        <p:nvSpPr>
+          <p:cNvPr id="80" name="Text 76"/>
+          <p:cNvSpPr txBox="1"/>
+          <p:nvPr/>
+        </p:nvSpPr>
+        <p:spPr>
+          <a:xfrm>
+            <a:off x="1280929" y="8605511"/>
+            <a:ext cx="3679705" cy="308610"/>
+          </a:xfrm>
+          <a:prstGeom prst="rect">
+            <a:avLst/>
+          </a:prstGeom>
+          <a:noFill/>
+          <a:ln/>
+        </p:spPr>
+        <p:txBody>
+          <a:bodyPr wrap="square" lIns="0" tIns="0" rIns="0" bIns="0" rtlCol="0" anchor="t"/>
+          <a:lstStyle/>
+          <a:p>
+            <a:pPr indent="0" marL="0">
+              <a:lnSpc>
+                <a:spcPts val="1215"/>
+              </a:lnSpc>
+              <a:buNone/>
+            </a:pPr>
+            <a:r>
+              <a:rPr lang="en-US" sz="810" dirty="0">
+                <a:solidFill>
+                  <a:srgbClr val="4A5565"/>
+                </a:solidFill>
+                <a:latin typeface="Poppins" pitchFamily="34" charset="0"/>
+                <a:ea typeface="Poppins" pitchFamily="34" charset="-122"/>
+                <a:cs typeface="Poppins" pitchFamily="34" charset="-120"/>
+              </a:rPr>
+              <a:t>Referrals and JVPs driving most sales; cashflow positive, Justin on a wage.</a:t>
+            </a:r>
+            <a:endParaRPr lang="en-US" sz="810" dirty="0"/>
+          </a:p>
+        </p:txBody>
+      </p:sp>
+      <p:sp>
+        <p:nvSpPr>
+          <p:cNvPr id="81" name="Shape 77"/>
+          <p:cNvSpPr/>
+          <p:nvPr/>
+        </p:nvSpPr>
+        <p:spPr>
+          <a:xfrm>
+            <a:off x="438898" y="8999110"/>
+            <a:ext cx="677440" cy="205740"/>
+          </a:xfrm>
+          <a:prstGeom prst="roundRect">
+            <a:avLst>
+              <a:gd name="adj" fmla="val 50000"/>
+            </a:avLst>
+          </a:prstGeom>
+          <a:solidFill>
+            <a:srgbClr val="0E171F"/>
+          </a:solidFill>
+          <a:ln w="12700">
+            <a:solidFill>
+              <a:srgbClr val="333333"/>
+            </a:solidFill>
+            <a:prstDash val="solid"/>
+          </a:ln>
+        </p:spPr>
+      </p:sp>
+      <p:sp>
+        <p:nvSpPr>
+          <p:cNvPr id="82" name="Text 78"/>
+          <p:cNvSpPr txBox="1"/>
+          <p:nvPr/>
+        </p:nvSpPr>
+        <p:spPr>
+          <a:xfrm>
+            <a:off x="438898" y="8999110"/>
+            <a:ext cx="677440" cy="205740"/>
+          </a:xfrm>
+          <a:prstGeom prst="rect">
+            <a:avLst/>
+          </a:prstGeom>
+          <a:noFill/>
+          <a:ln/>
+        </p:spPr>
+        <p:txBody>
+          <a:bodyPr wrap="square" lIns="0" tIns="0" rIns="0" bIns="0" rtlCol="0" anchor="ctr"/>
+          <a:lstStyle/>
+          <a:p>
+            <a:pPr algn="ctr" indent="0" marL="0">
+              <a:buNone/>
+            </a:pPr>
+            <a:r>
+              <a:rPr lang="en-US" sz="640" b="1" spc="64" kern="0" dirty="0">
+                <a:solidFill>
+                  <a:srgbClr val="FFFFFF"/>
+                </a:solidFill>
+                <a:latin typeface="Poppins" pitchFamily="34" charset="0"/>
+                <a:ea typeface="Poppins" pitchFamily="34" charset="-122"/>
+                <a:cs typeface="Poppins" pitchFamily="34" charset="-120"/>
+              </a:rPr>
+              <a:t>3 YEARS</a:t>
+            </a:r>
+            <a:endParaRPr lang="en-US" sz="640" dirty="0"/>
+          </a:p>
+        </p:txBody>
+      </p:sp>
+      <p:sp>
+        <p:nvSpPr>
+          <p:cNvPr id="83" name="Text 79"/>
+          <p:cNvSpPr txBox="1"/>
+          <p:nvPr/>
+        </p:nvSpPr>
+        <p:spPr>
+          <a:xfrm>
+            <a:off x="1280929" y="8986309"/>
+            <a:ext cx="3679705" cy="308610"/>
+          </a:xfrm>
+          <a:prstGeom prst="rect">
+            <a:avLst/>
+          </a:prstGeom>
+          <a:noFill/>
+          <a:ln/>
+        </p:spPr>
+        <p:txBody>
+          <a:bodyPr wrap="square" lIns="0" tIns="0" rIns="0" bIns="0" rtlCol="0" anchor="t"/>
+          <a:lstStyle/>
+          <a:p>
+            <a:pPr indent="0" marL="0">
+              <a:lnSpc>
+                <a:spcPts val="1215"/>
+              </a:lnSpc>
+              <a:buNone/>
+            </a:pPr>
+            <a:r>
+              <a:rPr lang="en-US" sz="810" dirty="0">
+                <a:solidFill>
+                  <a:srgbClr val="4A5565"/>
+                </a:solidFill>
+                <a:latin typeface="Poppins" pitchFamily="34" charset="0"/>
+                <a:ea typeface="Poppins" pitchFamily="34" charset="-122"/>
+                <a:cs typeface="Poppins" pitchFamily="34" charset="-120"/>
+              </a:rPr>
+              <a:t>1,000 active keg refillers: Gold Coast, Brisbane, Northern Rivers, residential and commercial.</a:t>
+            </a:r>
+            <a:endParaRPr lang="en-US" sz="810" dirty="0"/>
+          </a:p>
+        </p:txBody>
+      </p:sp>
+      <p:sp>
+        <p:nvSpPr>
+          <p:cNvPr id="84" name="Shape 80"/>
+          <p:cNvSpPr/>
+          <p:nvPr/>
+        </p:nvSpPr>
+        <p:spPr>
+          <a:xfrm>
+            <a:off x="438898" y="9379908"/>
+            <a:ext cx="677440" cy="205740"/>
+          </a:xfrm>
+          <a:prstGeom prst="roundRect">
+            <a:avLst>
+              <a:gd name="adj" fmla="val 50000"/>
+            </a:avLst>
+          </a:prstGeom>
+          <a:solidFill>
+            <a:srgbClr val="0E171F"/>
+          </a:solidFill>
+          <a:ln w="12700">
+            <a:solidFill>
+              <a:srgbClr val="333333"/>
+            </a:solidFill>
+            <a:prstDash val="solid"/>
+          </a:ln>
+        </p:spPr>
+      </p:sp>
+      <p:sp>
+        <p:nvSpPr>
+          <p:cNvPr id="85" name="Text 81"/>
+          <p:cNvSpPr txBox="1"/>
+          <p:nvPr/>
+        </p:nvSpPr>
+        <p:spPr>
+          <a:xfrm>
+            <a:off x="438898" y="9379908"/>
+            <a:ext cx="677440" cy="205740"/>
+          </a:xfrm>
+          <a:prstGeom prst="rect">
+            <a:avLst/>
+          </a:prstGeom>
+          <a:noFill/>
+          <a:ln/>
+        </p:spPr>
+        <p:txBody>
+          <a:bodyPr wrap="square" lIns="0" tIns="0" rIns="0" bIns="0" rtlCol="0" anchor="ctr"/>
+          <a:lstStyle/>
+          <a:p>
+            <a:pPr algn="ctr" indent="0" marL="0">
+              <a:buNone/>
+            </a:pPr>
+            <a:r>
+              <a:rPr lang="en-US" sz="640" b="1" spc="64" kern="0" dirty="0">
+                <a:solidFill>
+                  <a:srgbClr val="FFFFFF"/>
+                </a:solidFill>
+                <a:latin typeface="Poppins" pitchFamily="34" charset="0"/>
+                <a:ea typeface="Poppins" pitchFamily="34" charset="-122"/>
+                <a:cs typeface="Poppins" pitchFamily="34" charset="-120"/>
+              </a:rPr>
+              <a:t>5 YEARS</a:t>
+            </a:r>
+            <a:endParaRPr lang="en-US" sz="640" dirty="0"/>
+          </a:p>
+        </p:txBody>
+      </p:sp>
+      <p:sp>
+        <p:nvSpPr>
+          <p:cNvPr id="86" name="Text 82"/>
+          <p:cNvSpPr txBox="1"/>
+          <p:nvPr/>
+        </p:nvSpPr>
+        <p:spPr>
+          <a:xfrm>
+            <a:off x="1280929" y="9367106"/>
+            <a:ext cx="3679705" cy="308610"/>
+          </a:xfrm>
+          <a:prstGeom prst="rect">
+            <a:avLst/>
+          </a:prstGeom>
+          <a:noFill/>
+          <a:ln/>
+        </p:spPr>
+        <p:txBody>
+          <a:bodyPr wrap="square" lIns="0" tIns="0" rIns="0" bIns="0" rtlCol="0" anchor="t"/>
+          <a:lstStyle/>
+          <a:p>
+            <a:pPr indent="0" marL="0">
+              <a:lnSpc>
+                <a:spcPts val="1215"/>
+              </a:lnSpc>
+              <a:buNone/>
+            </a:pPr>
+            <a:r>
+              <a:rPr lang="en-US" sz="810" dirty="0">
+                <a:solidFill>
+                  <a:srgbClr val="4A5565"/>
+                </a:solidFill>
+                <a:latin typeface="Poppins" pitchFamily="34" charset="0"/>
+                <a:ea typeface="Poppins" pitchFamily="34" charset="-122"/>
+                <a:cs typeface="Poppins" pitchFamily="34" charset="-120"/>
+              </a:rPr>
+              <a:t>Rapid expansion: external investment, franchising, and a production facility.</a:t>
+            </a:r>
+            <a:endParaRPr lang="en-US" sz="810" dirty="0"/>
+          </a:p>
+        </p:txBody>
+      </p:sp>
+      <p:sp>
+        <p:nvSpPr>
+          <p:cNvPr id="87" name="Shape 83"/>
+          <p:cNvSpPr/>
+          <p:nvPr/>
+        </p:nvSpPr>
+        <p:spPr>
+          <a:xfrm>
+            <a:off x="438898" y="9760705"/>
+            <a:ext cx="677440" cy="205740"/>
+          </a:xfrm>
+          <a:prstGeom prst="roundRect">
+            <a:avLst>
+              <a:gd name="adj" fmla="val 50000"/>
+            </a:avLst>
+          </a:prstGeom>
+          <a:solidFill>
+            <a:srgbClr val="0E171F"/>
+          </a:solidFill>
+          <a:ln w="12700">
+            <a:solidFill>
+              <a:srgbClr val="333333"/>
+            </a:solidFill>
+            <a:prstDash val="solid"/>
+          </a:ln>
+        </p:spPr>
+      </p:sp>
+      <p:sp>
+        <p:nvSpPr>
+          <p:cNvPr id="88" name="Text 84"/>
+          <p:cNvSpPr txBox="1"/>
+          <p:nvPr/>
+        </p:nvSpPr>
+        <p:spPr>
+          <a:xfrm>
+            <a:off x="438898" y="9760705"/>
+            <a:ext cx="677440" cy="205740"/>
+          </a:xfrm>
+          <a:prstGeom prst="rect">
+            <a:avLst/>
+          </a:prstGeom>
+          <a:noFill/>
+          <a:ln/>
+        </p:spPr>
+        <p:txBody>
+          <a:bodyPr wrap="square" lIns="0" tIns="0" rIns="0" bIns="0" rtlCol="0" anchor="ctr"/>
+          <a:lstStyle/>
+          <a:p>
+            <a:pPr algn="ctr" indent="0" marL="0">
+              <a:buNone/>
+            </a:pPr>
+            <a:r>
+              <a:rPr lang="en-US" sz="640" b="1" spc="64" kern="0" dirty="0">
+                <a:solidFill>
+                  <a:srgbClr val="FFFFFF"/>
+                </a:solidFill>
+                <a:latin typeface="Poppins" pitchFamily="34" charset="0"/>
+                <a:ea typeface="Poppins" pitchFamily="34" charset="-122"/>
+                <a:cs typeface="Poppins" pitchFamily="34" charset="-120"/>
+              </a:rPr>
+              <a:t>10 YEARS</a:t>
+            </a:r>
+            <a:endParaRPr lang="en-US" sz="640" dirty="0"/>
+          </a:p>
+        </p:txBody>
+      </p:sp>
+      <p:sp>
+        <p:nvSpPr>
+          <p:cNvPr id="89" name="Text 85"/>
+          <p:cNvSpPr txBox="1"/>
+          <p:nvPr/>
+        </p:nvSpPr>
+        <p:spPr>
+          <a:xfrm>
+            <a:off x="1280929" y="9747904"/>
+            <a:ext cx="3679705" cy="237744"/>
+          </a:xfrm>
+          <a:prstGeom prst="rect">
+            <a:avLst/>
+          </a:prstGeom>
+          <a:noFill/>
+          <a:ln/>
+        </p:spPr>
+        <p:txBody>
+          <a:bodyPr wrap="square" lIns="0" tIns="0" rIns="0" bIns="0" rtlCol="0" anchor="t"/>
+          <a:lstStyle/>
+          <a:p>
+            <a:pPr indent="0" marL="0">
+              <a:lnSpc>
+                <a:spcPts val="1215"/>
+              </a:lnSpc>
+              <a:buNone/>
+            </a:pPr>
+            <a:r>
+              <a:rPr lang="en-US" sz="810" dirty="0">
+                <a:solidFill>
+                  <a:srgbClr val="4A5565"/>
+                </a:solidFill>
+                <a:latin typeface="Poppins" pitchFamily="34" charset="0"/>
+                <a:ea typeface="Poppins" pitchFamily="34" charset="-122"/>
+                <a:cs typeface="Poppins" pitchFamily="34" charset="-120"/>
+              </a:rPr>
+              <a:t>Exit: sell the business, in Justin's own words, "the sucker".</a:t>
+            </a:r>
+            <a:endParaRPr lang="en-US" sz="810" dirty="0"/>
+          </a:p>
+        </p:txBody>
+      </p:sp>
+      <p:sp>
+        <p:nvSpPr>
+          <p:cNvPr id="90" name="Shape 86"/>
+          <p:cNvSpPr/>
+          <p:nvPr/>
+        </p:nvSpPr>
+        <p:spPr>
+          <a:xfrm>
+            <a:off x="438898" y="10063249"/>
             <a:ext cx="4521737" cy="0"/>
           </a:xfrm>
           <a:prstGeom prst="line">
@@ -4076,14 +4508,14 @@
       </p:sp>
       <p:sp>
         <p:nvSpPr>
-          <p:cNvPr id="79" name="Text 75"/>
+          <p:cNvPr id="91" name="Text 87"/>
           <p:cNvSpPr txBox="1"/>
           <p:nvPr/>
         </p:nvSpPr>
         <p:spPr>
           <a:xfrm>
-            <a:off x="438898" y="10240864"/>
-            <a:ext cx="4521737" cy="120015"/>
+            <a:off x="438898" y="10120849"/>
+            <a:ext cx="4521737" cy="240030"/>
           </a:xfrm>
           <a:prstGeom prst="rect">
             <a:avLst/>
@@ -4110,7 +4542,7 @@
                 <a:ea typeface="Poppins" pitchFamily="34" charset="-122"/>
                 <a:cs typeface="Poppins" pitchFamily="34" charset="-120"/>
               </a:rPr>
-              <a:t>Nothing in Later starts until the Now column is done. That is the discipline the plan is buying.</a:t>
+              <a:t>This ladder is Justin's, from his plan on a page. JP's proposed sprints on the Activation sheet now sit inside it.</a:t>
             </a:r>
             <a:endParaRPr lang="en-US" sz="700" dirty="0"/>
           </a:p>
@@ -4118,7 +4550,7 @@
       </p:sp>
       <p:sp>
         <p:nvSpPr>
-          <p:cNvPr id="80" name="Shape 76"/>
+          <p:cNvPr id="92" name="Shape 88"/>
           <p:cNvSpPr/>
           <p:nvPr/>
         </p:nvSpPr>
@@ -4143,7 +4575,7 @@
       </p:sp>
       <p:sp>
         <p:nvSpPr>
-          <p:cNvPr id="81" name="Text 77"/>
+          <p:cNvPr id="93" name="Text 89"/>
           <p:cNvSpPr txBox="1"/>
           <p:nvPr/>
         </p:nvSpPr>
@@ -4206,9 +4638,9 @@
             <a:tbl>
               <a:tblPr/>
               <a:tblGrid>
-                <a:gridCol w="1966441"/>
-                <a:gridCol w="1382760"/>
-                <a:gridCol w="1172536"/>
+                <a:gridCol w="2354867"/>
+                <a:gridCol w="625530"/>
+                <a:gridCol w="1541340"/>
               </a:tblGrid>
               <a:tr h="343913">
                 <a:tc>
@@ -4498,7 +4930,7 @@
                           <a:ea typeface="Poppins" pitchFamily="34" charset="-122"/>
                           <a:cs typeface="Poppins" pitchFamily="34" charset="-120"/>
                         </a:rPr>
-                        <a:t>Clent, Christy</a:t>
+                        <a:t>Chris, Harry, Clent, Christy</a:t>
                       </a:r>
                       <a:endParaRPr lang="en-US" sz="660" dirty="0">
                         <a:latin typeface="Poppins" charset="0"/>
@@ -4553,7 +4985,60 @@
                           <a:ea typeface="Poppins" pitchFamily="34" charset="-122"/>
                           <a:cs typeface="Poppins" pitchFamily="34" charset="-120"/>
                         </a:rPr>
-                        <a:t>Connected data and CRM</a:t>
+                        <a:t>Website, GoTab + Fishbowl, SEM</a:t>
+                      </a:r>
+                      <a:endParaRPr lang="en-US" sz="660" dirty="0">
+                        <a:latin typeface="Poppins" charset="0"/>
+                        <a:ea typeface="Poppins" charset="0"/>
+                        <a:cs typeface="Poppins" charset="0"/>
+                      </a:endParaRPr>
+                    </a:p>
+                  </a:txBody>
+                  <a:tcPr marL="46800" marR="46800" marT="46800" marB="46800" anchor="t">
+                    <a:lnL w="0" cap="flat" cmpd="sng" algn="ctr">
+                      <a:noFill/>
+                    </a:lnL>
+                    <a:lnR w="0" cap="flat" cmpd="sng" algn="ctr">
+                      <a:noFill/>
+                    </a:lnR>
+                    <a:lnT w="0" cap="flat" cmpd="sng" algn="ctr">
+                      <a:noFill/>
+                    </a:lnT>
+                    <a:lnB w="7620" cap="flat" cmpd="sng" algn="ctr">
+                      <a:solidFill>
+                        <a:srgbClr val="E3E7EC"/>
+                      </a:solidFill>
+                      <a:prstDash val="solid"/>
+                      <a:round/>
+                      <a:headEnd type="none" w="med" len="med"/>
+                      <a:tailEnd type="none" w="med" len="med"/>
+                    </a:lnB>
+                    <a:solidFill>
+                      <a:srgbClr val="FFFFFF"/>
+                    </a:solidFill>
+                  </a:tcPr>
+                </a:tc>
+                <a:tc>
+                  <a:txBody>
+                    <a:bodyPr/>
+                    <a:lstStyle/>
+                    <a:p>
+                      <a:pPr algn="l" indent="0" marL="0">
+                        <a:lnSpc>
+                          <a:spcPts val="898"/>
+                        </a:lnSpc>
+                        <a:buNone/>
+                      </a:pPr>
+                      <a:r>
+                        <a:rPr lang="en-US" sz="660" dirty="0">
+                          <a:solidFill>
+                            <a:srgbClr val="4A5565"/>
+                          </a:solidFill>
+                          <a:latin typeface="Poppins" pitchFamily="34" charset="0"/>
+                          <a:ea typeface="Poppins" pitchFamily="34" charset="-122"/>
+                          <a:cs typeface="Poppins" pitchFamily="34" charset="-120"/>
+                        </a:rPr>
+                        <a:t>Justin</a:t>
                       </a:r>
                       <a:endParaRPr lang="en-US" sz="660" dirty="0">
                         <a:latin typeface="Poppins" charset="0"/>
@@ -4639,6 +5124,8 @@
                     </a:solidFill>
                   </a:tcPr>
                 </a:tc>
+              </a:tr>
+              <a:tr h="359483">
                 <a:tc>
                   <a:txBody>
                     <a:bodyPr/>
@@ -4659,7 +5146,274 @@
                           <a:ea typeface="Poppins" pitchFamily="34" charset="-122"/>
                           <a:cs typeface="Poppins" pitchFamily="34" charset="-120"/>
                         </a:rPr>
-                        <a:t>Tap That</a:t>
+                        <a:t>Existing owners and referral programme</a:t>
+                      </a:r>
+                      <a:endParaRPr lang="en-US" sz="660" dirty="0">
+                        <a:latin typeface="Poppins" charset="0"/>
+                        <a:ea typeface="Poppins" charset="0"/>
+                        <a:cs typeface="Poppins" charset="0"/>
+                      </a:endParaRPr>
+                    </a:p>
+                  </a:txBody>
+                  <a:tcPr marL="46800" marR="46800" marT="46800" marB="46800" anchor="t">
+                    <a:lnL w="0" cap="flat" cmpd="sng" algn="ctr">
+                      <a:noFill/>
+                    </a:lnL>
+                    <a:lnR w="0" cap="flat" cmpd="sng" algn="ctr">
+                      <a:noFill/>
+                    </a:lnR>
+                    <a:lnT w="0" cap="flat" cmpd="sng" algn="ctr">
+                      <a:noFill/>
+                    </a:lnT>
+                    <a:lnB w="7620" cap="flat" cmpd="sng" algn="ctr">
+                      <a:solidFill>
+                        <a:srgbClr val="E3E7EC"/>
+                      </a:solidFill>
+                      <a:prstDash val="solid"/>
+                      <a:round/>
+                      <a:headEnd type="none" w="med" len="med"/>
+                      <a:tailEnd type="none" w="med" len="med"/>
+                    </a:lnB>
+                    <a:solidFill>
+                      <a:srgbClr val="F5F7FA"/>
+                    </a:solidFill>
+                  </a:tcPr>
+                </a:tc>
+                <a:tc>
+                  <a:txBody>
+                    <a:bodyPr/>
+                    <a:lstStyle/>
+                    <a:p>
+                      <a:pPr algn="l" indent="0" marL="0">
+                        <a:lnSpc>
+                          <a:spcPts val="898"/>
+                        </a:lnSpc>
+                        <a:buNone/>
+                      </a:pPr>
+                      <a:r>
+                        <a:rPr lang="en-US" sz="660" dirty="0">
+                          <a:solidFill>
+                            <a:srgbClr val="4A5565"/>
+                          </a:solidFill>
+                          <a:latin typeface="Poppins" pitchFamily="34" charset="0"/>
+                          <a:ea typeface="Poppins" pitchFamily="34" charset="-122"/>
+                          <a:cs typeface="Poppins" pitchFamily="34" charset="-120"/>
+                        </a:rPr>
+                        <a:t>Harry</a:t>
+                      </a:r>
+                      <a:endParaRPr lang="en-US" sz="660" dirty="0">
+                        <a:latin typeface="Poppins" charset="0"/>
+                        <a:ea typeface="Poppins" charset="0"/>
+                        <a:cs typeface="Poppins" charset="0"/>
+                      </a:endParaRPr>
+                    </a:p>
+                  </a:txBody>
+                  <a:tcPr marL="46800" marR="46800" marT="46800" marB="46800" anchor="t">
+                    <a:lnL w="0" cap="flat" cmpd="sng" algn="ctr">
+                      <a:noFill/>
+                    </a:lnL>
+                    <a:lnR w="0" cap="flat" cmpd="sng" algn="ctr">
+                      <a:noFill/>
+                    </a:lnR>
+                    <a:lnT w="0" cap="flat" cmpd="sng" algn="ctr">
+                      <a:noFill/>
+                    </a:lnT>
+                    <a:lnB w="7620" cap="flat" cmpd="sng" algn="ctr">
+                      <a:solidFill>
+                        <a:srgbClr val="E3E7EC"/>
+                      </a:solidFill>
+                      <a:prstDash val="solid"/>
+                      <a:round/>
+                      <a:headEnd type="none" w="med" len="med"/>
+                      <a:tailEnd type="none" w="med" len="med"/>
+                    </a:lnB>
+                    <a:solidFill>
+                      <a:srgbClr val="F5F7FA"/>
+                    </a:solidFill>
+                  </a:tcPr>
+                </a:tc>
+                <a:tc>
+                  <a:txBody>
+                    <a:bodyPr/>
+                    <a:lstStyle/>
+                    <a:p>
+                      <a:pPr algn="l" indent="0" marL="0">
+                        <a:lnSpc>
+                          <a:spcPts val="898"/>
+                        </a:lnSpc>
+                        <a:buNone/>
+                      </a:pPr>
+                      <a:r>
+                        <a:rPr lang="en-US" sz="660" dirty="0">
+                          <a:solidFill>
+                            <a:srgbClr val="4A5565"/>
+                          </a:solidFill>
+                          <a:latin typeface="Poppins" pitchFamily="34" charset="0"/>
+                          <a:ea typeface="Poppins" pitchFamily="34" charset="-122"/>
+                          <a:cs typeface="Poppins" pitchFamily="34" charset="-120"/>
+                        </a:rPr>
+                        <a:t>Clent</a:t>
+                      </a:r>
+                      <a:endParaRPr lang="en-US" sz="660" dirty="0">
+                        <a:latin typeface="Poppins" charset="0"/>
+                        <a:ea typeface="Poppins" charset="0"/>
+                        <a:cs typeface="Poppins" charset="0"/>
+                      </a:endParaRPr>
+                    </a:p>
+                  </a:txBody>
+                  <a:tcPr marL="46800" marR="46800" marT="46800" marB="46800" anchor="t">
+                    <a:lnL w="0" cap="flat" cmpd="sng" algn="ctr">
+                      <a:noFill/>
+                    </a:lnL>
+                    <a:lnR w="0" cap="flat" cmpd="sng" algn="ctr">
+                      <a:noFill/>
+                    </a:lnR>
+                    <a:lnT w="0" cap="flat" cmpd="sng" algn="ctr">
+                      <a:noFill/>
+                    </a:lnT>
+                    <a:lnB w="7620" cap="flat" cmpd="sng" algn="ctr">
+                      <a:solidFill>
+                        <a:srgbClr val="E3E7EC"/>
+                      </a:solidFill>
+                      <a:prstDash val="solid"/>
+                      <a:round/>
+                      <a:headEnd type="none" w="med" len="med"/>
+                      <a:tailEnd type="none" w="med" len="med"/>
+                    </a:lnB>
+                    <a:solidFill>
+                      <a:srgbClr val="F5F7FA"/>
+                    </a:solidFill>
+                  </a:tcPr>
+                </a:tc>
+              </a:tr>
+              <a:tr h="359483">
+                <a:tc>
+                  <a:txBody>
+                    <a:bodyPr/>
+                    <a:lstStyle/>
+                    <a:p>
+                      <a:pPr algn="l" indent="0" marL="0">
+                        <a:lnSpc>
+                          <a:spcPts val="898"/>
+                        </a:lnSpc>
+                        <a:buNone/>
+                      </a:pPr>
+                      <a:r>
+                        <a:rPr lang="en-US" sz="660" dirty="0">
+                          <a:solidFill>
+                            <a:srgbClr val="4A5565"/>
+                          </a:solidFill>
+                          <a:latin typeface="Poppins" pitchFamily="34" charset="0"/>
+                          <a:ea typeface="Poppins" pitchFamily="34" charset="-122"/>
+                          <a:cs typeface="Poppins" pitchFamily="34" charset="-120"/>
+                        </a:rPr>
+                        <a:t>Taproom, events, Oktoberfest</a:t>
+                      </a:r>
+                      <a:endParaRPr lang="en-US" sz="660" dirty="0">
+                        <a:latin typeface="Poppins" charset="0"/>
+                        <a:ea typeface="Poppins" charset="0"/>
+                        <a:cs typeface="Poppins" charset="0"/>
+                      </a:endParaRPr>
+                    </a:p>
+                  </a:txBody>
+                  <a:tcPr marL="46800" marR="46800" marT="46800" marB="46800" anchor="t">
+                    <a:lnL w="0" cap="flat" cmpd="sng" algn="ctr">
+                      <a:noFill/>
+                    </a:lnL>
+                    <a:lnR w="0" cap="flat" cmpd="sng" algn="ctr">
+                      <a:noFill/>
+                    </a:lnR>
+                    <a:lnT w="0" cap="flat" cmpd="sng" algn="ctr">
+                      <a:noFill/>
+                    </a:lnT>
+                    <a:lnB w="7620" cap="flat" cmpd="sng" algn="ctr">
+                      <a:solidFill>
+                        <a:srgbClr val="E3E7EC"/>
+                      </a:solidFill>
+                      <a:prstDash val="solid"/>
+                      <a:round/>
+                      <a:headEnd type="none" w="med" len="med"/>
+                      <a:tailEnd type="none" w="med" len="med"/>
+                    </a:lnB>
+                    <a:solidFill>
+                      <a:srgbClr val="FFFFFF"/>
+                    </a:solidFill>
+                  </a:tcPr>
+                </a:tc>
+                <a:tc>
+                  <a:txBody>
+                    <a:bodyPr/>
+                    <a:lstStyle/>
+                    <a:p>
+                      <a:pPr algn="l" indent="0" marL="0">
+                        <a:lnSpc>
+                          <a:spcPts val="898"/>
+                        </a:lnSpc>
+                        <a:buNone/>
+                      </a:pPr>
+                      <a:r>
+                        <a:rPr lang="en-US" sz="660" dirty="0">
+                          <a:solidFill>
+                            <a:srgbClr val="4A5565"/>
+                          </a:solidFill>
+                          <a:latin typeface="Poppins" pitchFamily="34" charset="0"/>
+                          <a:ea typeface="Poppins" pitchFamily="34" charset="-122"/>
+                          <a:cs typeface="Poppins" pitchFamily="34" charset="-120"/>
+                        </a:rPr>
+                        <a:t>Chris</a:t>
+                      </a:r>
+                      <a:endParaRPr lang="en-US" sz="660" dirty="0">
+                        <a:latin typeface="Poppins" charset="0"/>
+                        <a:ea typeface="Poppins" charset="0"/>
+                        <a:cs typeface="Poppins" charset="0"/>
+                      </a:endParaRPr>
+                    </a:p>
+                  </a:txBody>
+                  <a:tcPr marL="46800" marR="46800" marT="46800" marB="46800" anchor="t">
+                    <a:lnL w="0" cap="flat" cmpd="sng" algn="ctr">
+                      <a:noFill/>
+                    </a:lnL>
+                    <a:lnR w="0" cap="flat" cmpd="sng" algn="ctr">
+                      <a:noFill/>
+                    </a:lnR>
+                    <a:lnT w="0" cap="flat" cmpd="sng" algn="ctr">
+                      <a:noFill/>
+                    </a:lnT>
+                    <a:lnB w="7620" cap="flat" cmpd="sng" algn="ctr">
+                      <a:solidFill>
+                        <a:srgbClr val="E3E7EC"/>
+                      </a:solidFill>
+                      <a:prstDash val="solid"/>
+                      <a:round/>
+                      <a:headEnd type="none" w="med" len="med"/>
+                      <a:tailEnd type="none" w="med" len="med"/>
+                    </a:lnB>
+                    <a:solidFill>
+                      <a:srgbClr val="FFFFFF"/>
+                    </a:solidFill>
+                  </a:tcPr>
+                </a:tc>
+                <a:tc>
+                  <a:txBody>
+                    <a:bodyPr/>
+                    <a:lstStyle/>
+                    <a:p>
+                      <a:pPr algn="l" indent="0" marL="0">
+                        <a:lnSpc>
+                          <a:spcPts val="898"/>
+                        </a:lnSpc>
+                        <a:buNone/>
+                      </a:pPr>
+                      <a:r>
+                        <a:rPr lang="en-US" sz="660" dirty="0">
+                          <a:solidFill>
+                            <a:srgbClr val="4A5565"/>
+                          </a:solidFill>
+                          <a:latin typeface="Poppins" pitchFamily="34" charset="0"/>
+                          <a:ea typeface="Poppins" pitchFamily="34" charset="-122"/>
+                          <a:cs typeface="Poppins" pitchFamily="34" charset="-120"/>
+                        </a:rPr>
+                        <a:t>Harry</a:t>
                       </a:r>
                       <a:endParaRPr lang="en-US" sz="660" dirty="0">
                         <a:latin typeface="Poppins" charset="0"/>
@@ -4714,60 +5468,7 @@
                           <a:ea typeface="Poppins" pitchFamily="34" charset="-122"/>
                           <a:cs typeface="Poppins" pitchFamily="34" charset="-120"/>
                         </a:rPr>
-                        <a:t>Wholesale</a:t>
-                      </a:r>
-                      <a:endParaRPr lang="en-US" sz="660" dirty="0">
-                        <a:latin typeface="Poppins" charset="0"/>
-                        <a:ea typeface="Poppins" charset="0"/>
-                        <a:cs typeface="Poppins" charset="0"/>
-                      </a:endParaRPr>
-                    </a:p>
-                  </a:txBody>
-                  <a:tcPr marL="46800" marR="46800" marT="46800" marB="46800" anchor="t">
-                    <a:lnL w="0" cap="flat" cmpd="sng" algn="ctr">
-                      <a:noFill/>
-                    </a:lnL>
-                    <a:lnR w="0" cap="flat" cmpd="sng" algn="ctr">
-                      <a:noFill/>
-                    </a:lnR>
-                    <a:lnT w="0" cap="flat" cmpd="sng" algn="ctr">
-                      <a:noFill/>
-                    </a:lnT>
-                    <a:lnB w="7620" cap="flat" cmpd="sng" algn="ctr">
-                      <a:solidFill>
-                        <a:srgbClr val="E3E7EC"/>
-                      </a:solidFill>
-                      <a:prstDash val="solid"/>
-                      <a:round/>
-                      <a:headEnd type="none" w="med" len="med"/>
-                      <a:tailEnd type="none" w="med" len="med"/>
-                    </a:lnB>
-                    <a:solidFill>
-                      <a:srgbClr val="F5F7FA"/>
-                    </a:solidFill>
-                  </a:tcPr>
-                </a:tc>
-                <a:tc>
-                  <a:txBody>
-                    <a:bodyPr/>
-                    <a:lstStyle/>
-                    <a:p>
-                      <a:pPr algn="l" indent="0" marL="0">
-                        <a:lnSpc>
-                          <a:spcPts val="898"/>
-                        </a:lnSpc>
-                        <a:buNone/>
-                      </a:pPr>
-                      <a:r>
-                        <a:rPr lang="en-US" sz="660" dirty="0">
-                          <a:solidFill>
-                            <a:srgbClr val="4A5565"/>
-                          </a:solidFill>
-                          <a:latin typeface="Poppins" pitchFamily="34" charset="0"/>
-                          <a:ea typeface="Poppins" pitchFamily="34" charset="-122"/>
-                          <a:cs typeface="Poppins" pitchFamily="34" charset="-120"/>
-                        </a:rPr>
-                        <a:t>New hire or agent</a:t>
+                        <a:t>Wholesale and next hire</a:t>
                       </a:r>
                       <a:endParaRPr lang="en-US" sz="660" dirty="0">
                         <a:latin typeface="Poppins" charset="0"/>
@@ -4853,222 +5554,6 @@
                     </a:solidFill>
                   </a:tcPr>
                 </a:tc>
-              </a:tr>
-              <a:tr h="359483">
-                <a:tc>
-                  <a:txBody>
-                    <a:bodyPr/>
-                    <a:lstStyle/>
-                    <a:p>
-                      <a:pPr algn="l" indent="0" marL="0">
-                        <a:lnSpc>
-                          <a:spcPts val="898"/>
-                        </a:lnSpc>
-                        <a:buNone/>
-                      </a:pPr>
-                      <a:r>
-                        <a:rPr lang="en-US" sz="660" dirty="0">
-                          <a:solidFill>
-                            <a:srgbClr val="4A5565"/>
-                          </a:solidFill>
-                          <a:latin typeface="Poppins" pitchFamily="34" charset="0"/>
-                          <a:ea typeface="Poppins" pitchFamily="34" charset="-122"/>
-                          <a:cs typeface="Poppins" pitchFamily="34" charset="-120"/>
-                        </a:rPr>
-                        <a:t>Destination programme</a:t>
-                      </a:r>
-                      <a:endParaRPr lang="en-US" sz="660" dirty="0">
-                        <a:latin typeface="Poppins" charset="0"/>
-                        <a:ea typeface="Poppins" charset="0"/>
-                        <a:cs typeface="Poppins" charset="0"/>
-                      </a:endParaRPr>
-                    </a:p>
-                  </a:txBody>
-                  <a:tcPr marL="46800" marR="46800" marT="46800" marB="46800" anchor="t">
-                    <a:lnL w="0" cap="flat" cmpd="sng" algn="ctr">
-                      <a:noFill/>
-                    </a:lnL>
-                    <a:lnR w="0" cap="flat" cmpd="sng" algn="ctr">
-                      <a:noFill/>
-                    </a:lnR>
-                    <a:lnT w="0" cap="flat" cmpd="sng" algn="ctr">
-                      <a:noFill/>
-                    </a:lnT>
-                    <a:lnB w="7620" cap="flat" cmpd="sng" algn="ctr">
-                      <a:solidFill>
-                        <a:srgbClr val="E3E7EC"/>
-                      </a:solidFill>
-                      <a:prstDash val="solid"/>
-                      <a:round/>
-                      <a:headEnd type="none" w="med" len="med"/>
-                      <a:tailEnd type="none" w="med" len="med"/>
-                    </a:lnB>
-                    <a:solidFill>
-                      <a:srgbClr val="FFFFFF"/>
-                    </a:solidFill>
-                  </a:tcPr>
-                </a:tc>
-                <a:tc>
-                  <a:txBody>
-                    <a:bodyPr/>
-                    <a:lstStyle/>
-                    <a:p>
-                      <a:pPr algn="l" indent="0" marL="0">
-                        <a:lnSpc>
-                          <a:spcPts val="898"/>
-                        </a:lnSpc>
-                        <a:buNone/>
-                      </a:pPr>
-                      <a:r>
-                        <a:rPr lang="en-US" sz="660" dirty="0">
-                          <a:solidFill>
-                            <a:srgbClr val="4A5565"/>
-                          </a:solidFill>
-                          <a:latin typeface="Poppins" pitchFamily="34" charset="0"/>
-                          <a:ea typeface="Poppins" pitchFamily="34" charset="-122"/>
-                          <a:cs typeface="Poppins" pitchFamily="34" charset="-120"/>
-                        </a:rPr>
-                        <a:t>Tap That</a:t>
-                      </a:r>
-                      <a:endParaRPr lang="en-US" sz="660" dirty="0">
-                        <a:latin typeface="Poppins" charset="0"/>
-                        <a:ea typeface="Poppins" charset="0"/>
-                        <a:cs typeface="Poppins" charset="0"/>
-                      </a:endParaRPr>
-                    </a:p>
-                  </a:txBody>
-                  <a:tcPr marL="46800" marR="46800" marT="46800" marB="46800" anchor="t">
-                    <a:lnL w="0" cap="flat" cmpd="sng" algn="ctr">
-                      <a:noFill/>
-                    </a:lnL>
-                    <a:lnR w="0" cap="flat" cmpd="sng" algn="ctr">
-                      <a:noFill/>
-                    </a:lnR>
-                    <a:lnT w="0" cap="flat" cmpd="sng" algn="ctr">
-                      <a:noFill/>
-                    </a:lnT>
-                    <a:lnB w="7620" cap="flat" cmpd="sng" algn="ctr">
-                      <a:solidFill>
-                        <a:srgbClr val="E3E7EC"/>
-                      </a:solidFill>
-                      <a:prstDash val="solid"/>
-                      <a:round/>
-                      <a:headEnd type="none" w="med" len="med"/>
-                      <a:tailEnd type="none" w="med" len="med"/>
-                    </a:lnB>
-                    <a:solidFill>
-                      <a:srgbClr val="FFFFFF"/>
-                    </a:solidFill>
-                  </a:tcPr>
-                </a:tc>
-                <a:tc>
-                  <a:txBody>
-                    <a:bodyPr/>
-                    <a:lstStyle/>
-                    <a:p>
-                      <a:pPr algn="l" indent="0" marL="0">
-                        <a:lnSpc>
-                          <a:spcPts val="898"/>
-                        </a:lnSpc>
-                        <a:buNone/>
-                      </a:pPr>
-                      <a:r>
-                        <a:rPr lang="en-US" sz="660" dirty="0">
-                          <a:solidFill>
-                            <a:srgbClr val="4A5565"/>
-                          </a:solidFill>
-                          <a:latin typeface="Poppins" pitchFamily="34" charset="0"/>
-                          <a:ea typeface="Poppins" pitchFamily="34" charset="-122"/>
-                          <a:cs typeface="Poppins" pitchFamily="34" charset="-120"/>
-                        </a:rPr>
-                        <a:t>Jewell Projects</a:t>
-                      </a:r>
-                      <a:endParaRPr lang="en-US" sz="660" dirty="0">
-                        <a:latin typeface="Poppins" charset="0"/>
-                        <a:ea typeface="Poppins" charset="0"/>
-                        <a:cs typeface="Poppins" charset="0"/>
-                      </a:endParaRPr>
-                    </a:p>
-                  </a:txBody>
-                  <a:tcPr marL="46800" marR="46800" marT="46800" marB="46800" anchor="t">
-                    <a:lnL w="0" cap="flat" cmpd="sng" algn="ctr">
-                      <a:noFill/>
-                    </a:lnL>
-                    <a:lnR w="0" cap="flat" cmpd="sng" algn="ctr">
-                      <a:noFill/>
-                    </a:lnR>
-                    <a:lnT w="0" cap="flat" cmpd="sng" algn="ctr">
-                      <a:noFill/>
-                    </a:lnT>
-                    <a:lnB w="7620" cap="flat" cmpd="sng" algn="ctr">
-                      <a:solidFill>
-                        <a:srgbClr val="E3E7EC"/>
-                      </a:solidFill>
-                      <a:prstDash val="solid"/>
-                      <a:round/>
-                      <a:headEnd type="none" w="med" len="med"/>
-                      <a:tailEnd type="none" w="med" len="med"/>
-                    </a:lnB>
-                    <a:solidFill>
-                      <a:srgbClr val="FFFFFF"/>
-                    </a:solidFill>
-                  </a:tcPr>
-                </a:tc>
-              </a:tr>
-              <a:tr h="359483">
-                <a:tc>
-                  <a:txBody>
-                    <a:bodyPr/>
-                    <a:lstStyle/>
-                    <a:p>
-                      <a:pPr algn="l" indent="0" marL="0">
-                        <a:lnSpc>
-                          <a:spcPts val="898"/>
-                        </a:lnSpc>
-                        <a:buNone/>
-                      </a:pPr>
-                      <a:r>
-                        <a:rPr lang="en-US" sz="660" dirty="0">
-                          <a:solidFill>
-                            <a:srgbClr val="4A5565"/>
-                          </a:solidFill>
-                          <a:latin typeface="Poppins" pitchFamily="34" charset="0"/>
-                          <a:ea typeface="Poppins" pitchFamily="34" charset="-122"/>
-                          <a:cs typeface="Poppins" pitchFamily="34" charset="-120"/>
-                        </a:rPr>
-                        <a:t>Partnerships</a:t>
-                      </a:r>
-                      <a:endParaRPr lang="en-US" sz="660" dirty="0">
-                        <a:latin typeface="Poppins" charset="0"/>
-                        <a:ea typeface="Poppins" charset="0"/>
-                        <a:cs typeface="Poppins" charset="0"/>
-                      </a:endParaRPr>
-                    </a:p>
-                  </a:txBody>
-                  <a:tcPr marL="46800" marR="46800" marT="46800" marB="46800" anchor="t">
-                    <a:lnL w="0" cap="flat" cmpd="sng" algn="ctr">
-                      <a:noFill/>
-                    </a:lnL>
-                    <a:lnR w="0" cap="flat" cmpd="sng" algn="ctr">
-                      <a:noFill/>
-                    </a:lnR>
-                    <a:lnT w="0" cap="flat" cmpd="sng" algn="ctr">
-                      <a:noFill/>
-                    </a:lnT>
-                    <a:lnB w="7620" cap="flat" cmpd="sng" algn="ctr">
-                      <a:solidFill>
-                        <a:srgbClr val="E3E7EC"/>
-                      </a:solidFill>
-                      <a:prstDash val="solid"/>
-                      <a:round/>
-                      <a:headEnd type="none" w="med" len="med"/>
-                      <a:tailEnd type="none" w="med" len="med"/>
-                    </a:lnB>
-                    <a:solidFill>
-                      <a:srgbClr val="F5F7FA"/>
-                    </a:solidFill>
-                  </a:tcPr>
-                </a:tc>
                 <a:tc>
                   <a:txBody>
                     <a:bodyPr/>
@@ -5090,59 +5575,6 @@
                           <a:cs typeface="Poppins" pitchFamily="34" charset="-120"/>
                         </a:rPr>
                         <a:t>Clent</a:t>
-                      </a:r>
-                      <a:endParaRPr lang="en-US" sz="660" dirty="0">
-                        <a:latin typeface="Poppins" charset="0"/>
-                        <a:ea typeface="Poppins" charset="0"/>
-                        <a:cs typeface="Poppins" charset="0"/>
-                      </a:endParaRPr>
-                    </a:p>
-                  </a:txBody>
-                  <a:tcPr marL="46800" marR="46800" marT="46800" marB="46800" anchor="t">
-                    <a:lnL w="0" cap="flat" cmpd="sng" algn="ctr">
-                      <a:noFill/>
-                    </a:lnL>
-                    <a:lnR w="0" cap="flat" cmpd="sng" algn="ctr">
-                      <a:noFill/>
-                    </a:lnR>
-                    <a:lnT w="0" cap="flat" cmpd="sng" algn="ctr">
-                      <a:noFill/>
-                    </a:lnT>
-                    <a:lnB w="7620" cap="flat" cmpd="sng" algn="ctr">
-                      <a:solidFill>
-                        <a:srgbClr val="E3E7EC"/>
-                      </a:solidFill>
-                      <a:prstDash val="solid"/>
-                      <a:round/>
-                      <a:headEnd type="none" w="med" len="med"/>
-                      <a:tailEnd type="none" w="med" len="med"/>
-                    </a:lnB>
-                    <a:solidFill>
-                      <a:srgbClr val="F5F7FA"/>
-                    </a:solidFill>
-                  </a:tcPr>
-                </a:tc>
-                <a:tc>
-                  <a:txBody>
-                    <a:bodyPr/>
-                    <a:lstStyle/>
-                    <a:p>
-                      <a:pPr algn="l" indent="0" marL="0">
-                        <a:lnSpc>
-                          <a:spcPts val="898"/>
-                        </a:lnSpc>
-                        <a:buNone/>
-                      </a:pPr>
-                      <a:r>
-                        <a:rPr lang="en-US" sz="660" dirty="0">
-                          <a:solidFill>
-                            <a:srgbClr val="4A5565"/>
-                          </a:solidFill>
-                          <a:latin typeface="Poppins" pitchFamily="34" charset="0"/>
-                          <a:ea typeface="Poppins" pitchFamily="34" charset="-122"/>
-                          <a:cs typeface="Poppins" pitchFamily="34" charset="-120"/>
-                        </a:rPr>
-                        <a:t>Justin</a:t>
                       </a:r>
                       <a:endParaRPr lang="en-US" sz="660" dirty="0">
                         <a:latin typeface="Poppins" charset="0"/>
@@ -5197,7 +5629,7 @@
                           <a:ea typeface="Poppins" pitchFamily="34" charset="-122"/>
                           <a:cs typeface="Poppins" pitchFamily="34" charset="-120"/>
                         </a:rPr>
-                        <a:t>Brand and range</a:t>
+                        <a:t>Brand and messaging</a:t>
                       </a:r>
                       <a:endParaRPr lang="en-US" sz="660" dirty="0">
                         <a:latin typeface="Poppins" charset="0"/>
@@ -5343,7 +5775,7 @@
       </p:graphicFrame>
       <p:sp>
         <p:nvSpPr>
-          <p:cNvPr id="83" name="Shape 78"/>
+          <p:cNvPr id="95" name="Shape 90"/>
           <p:cNvSpPr/>
           <p:nvPr/>
         </p:nvSpPr>
@@ -5366,7 +5798,7 @@
       </p:sp>
       <p:sp>
         <p:nvSpPr>
-          <p:cNvPr id="84" name="Text 79"/>
+          <p:cNvPr id="96" name="Text 91"/>
           <p:cNvSpPr txBox="1"/>
           <p:nvPr/>
         </p:nvSpPr>
@@ -5408,7 +5840,7 @@
       </p:sp>
       <p:sp>
         <p:nvSpPr>
-          <p:cNvPr id="85" name="Shape 80"/>
+          <p:cNvPr id="97" name="Shape 92"/>
           <p:cNvSpPr/>
           <p:nvPr/>
         </p:nvSpPr>
@@ -5433,7 +5865,7 @@
       </p:sp>
       <p:sp>
         <p:nvSpPr>
-          <p:cNvPr id="86" name="Shape 81"/>
+          <p:cNvPr id="98" name="Shape 93"/>
           <p:cNvSpPr/>
           <p:nvPr/>
         </p:nvSpPr>
@@ -5458,7 +5890,7 @@
       </p:sp>
       <p:sp>
         <p:nvSpPr>
-          <p:cNvPr id="87" name="Text 82"/>
+          <p:cNvPr id="99" name="Text 94"/>
           <p:cNvSpPr txBox="1"/>
           <p:nvPr/>
         </p:nvSpPr>
@@ -5500,7 +5932,7 @@
       </p:sp>
       <p:sp>
         <p:nvSpPr>
-          <p:cNvPr id="88" name="Shape 83"/>
+          <p:cNvPr id="100" name="Shape 95"/>
           <p:cNvSpPr/>
           <p:nvPr/>
         </p:nvSpPr>
@@ -5525,14 +5957,14 @@
       </p:sp>
       <p:sp>
         <p:nvSpPr>
-          <p:cNvPr id="89" name="Text 84"/>
+          <p:cNvPr id="101" name="Text 96"/>
           <p:cNvSpPr txBox="1"/>
           <p:nvPr/>
         </p:nvSpPr>
         <p:spPr>
           <a:xfrm>
             <a:off x="10266970" y="7617652"/>
-            <a:ext cx="4413737" cy="129794"/>
+            <a:ext cx="4413737" cy="259588"/>
           </a:xfrm>
           <a:prstGeom prst="rect">
             <a:avLst/>
@@ -5559,7 +5991,7 @@
                 <a:ea typeface="Poppins" pitchFamily="34" charset="-122"/>
                 <a:cs typeface="Poppins" pitchFamily="34" charset="-120"/>
               </a:rPr>
-              <a:t>Do we pause walk-in trading? </a:t>
+              <a:t>Taproom, Showroom, or Event space doing both? </a:t>
             </a:r>
             <a:pPr indent="0" marL="0">
               <a:lnSpc>
@@ -5576,7 +6008,7 @@
                 <a:ea typeface="Poppins" pitchFamily="34" charset="-122"/>
                 <a:cs typeface="Poppins" pitchFamily="34" charset="-120"/>
               </a:rPr>
-              <a:t>Everything on the Business sheet follows from this one.</a:t>
+              <a:t>JP's recommendation is to pause walk-in trade; Justin has not accepted that.</a:t>
             </a:r>
             <a:endParaRPr lang="en-US" sz="730" dirty="0"/>
           </a:p>
@@ -5584,13 +6016,13 @@
       </p:sp>
       <p:sp>
         <p:nvSpPr>
-          <p:cNvPr id="90" name="Shape 85"/>
+          <p:cNvPr id="102" name="Shape 97"/>
           <p:cNvSpPr/>
           <p:nvPr/>
         </p:nvSpPr>
         <p:spPr>
           <a:xfrm>
-            <a:off x="10158970" y="8183994"/>
+            <a:off x="10158970" y="8207727"/>
             <a:ext cx="50400" cy="50400"/>
           </a:xfrm>
           <a:prstGeom prst="rect">
@@ -5609,13 +6041,13 @@
       </p:sp>
       <p:sp>
         <p:nvSpPr>
-          <p:cNvPr id="91" name="Text 86"/>
+          <p:cNvPr id="103" name="Text 98"/>
           <p:cNvSpPr txBox="1"/>
           <p:nvPr/>
         </p:nvSpPr>
         <p:spPr>
           <a:xfrm>
-            <a:off x="10266970" y="8147954"/>
+            <a:off x="10266970" y="8171688"/>
             <a:ext cx="4413737" cy="129794"/>
           </a:xfrm>
           <a:prstGeom prst="rect">
@@ -5643,24 +6075,7 @@
                 <a:ea typeface="Poppins" pitchFamily="34" charset="-122"/>
                 <a:cs typeface="Poppins" pitchFamily="34" charset="-120"/>
               </a:rPr>
-              <a:t>Do we resource wholesale? </a:t>
-            </a:r>
-            <a:pPr indent="0" marL="0">
-              <a:lnSpc>
-                <a:spcPts val="1022"/>
-              </a:lnSpc>
-              <a:buNone/>
-            </a:pPr>
-            <a:r>
-              <a:rPr lang="en-US" sz="730" dirty="0">
-                <a:solidFill>
-                  <a:srgbClr val="4A5565"/>
-                </a:solidFill>
-                <a:latin typeface="Poppins" pitchFamily="34" charset="0"/>
-                <a:ea typeface="Poppins" pitchFamily="34" charset="-122"/>
-                <a:cs typeface="Poppins" pitchFamily="34" charset="-120"/>
-              </a:rPr>
-              <a:t>A person with targets, not a founder in spare hours.</a:t>
+              <a:t>Residential vs commercial: who is buying, and where does the energy go?</a:t>
             </a:r>
             <a:endParaRPr lang="en-US" sz="730" dirty="0"/>
           </a:p>
@@ -5668,13 +6083,13 @@
       </p:sp>
       <p:sp>
         <p:nvSpPr>
-          <p:cNvPr id="92" name="Shape 87"/>
+          <p:cNvPr id="104" name="Shape 99"/>
           <p:cNvSpPr/>
           <p:nvPr/>
         </p:nvSpPr>
         <p:spPr>
           <a:xfrm>
-            <a:off x="10158970" y="8714296"/>
+            <a:off x="10158970" y="8631969"/>
             <a:ext cx="50400" cy="50400"/>
           </a:xfrm>
           <a:prstGeom prst="rect">
@@ -5693,13 +6108,13 @@
       </p:sp>
       <p:sp>
         <p:nvSpPr>
-          <p:cNvPr id="93" name="Text 88"/>
+          <p:cNvPr id="105" name="Text 100"/>
           <p:cNvSpPr txBox="1"/>
           <p:nvPr/>
         </p:nvSpPr>
         <p:spPr>
           <a:xfrm>
-            <a:off x="10266970" y="8678257"/>
+            <a:off x="10266970" y="8595930"/>
             <a:ext cx="4413737" cy="129794"/>
           </a:xfrm>
           <a:prstGeom prst="rect">
@@ -5727,24 +6142,7 @@
                 <a:ea typeface="Poppins" pitchFamily="34" charset="-122"/>
                 <a:cs typeface="Poppins" pitchFamily="34" charset="-120"/>
               </a:rPr>
-              <a:t>Canning: in or out? </a:t>
-            </a:r>
-            <a:pPr indent="0" marL="0">
-              <a:lnSpc>
-                <a:spcPts val="1022"/>
-              </a:lnSpc>
-              <a:buNone/>
-            </a:pPr>
-            <a:r>
-              <a:rPr lang="en-US" sz="730" dirty="0">
-                <a:solidFill>
-                  <a:srgbClr val="4A5565"/>
-                </a:solidFill>
-                <a:latin typeface="Poppins" pitchFamily="34" charset="0"/>
-                <a:ea typeface="Poppins" pitchFamily="34" charset="-122"/>
-                <a:cs typeface="Poppins" pitchFamily="34" charset="-120"/>
-              </a:rPr>
-              <a:t>It buys awareness and it competes with the refill model.</a:t>
+              <a:t>External support, or do we try to do everything ourselves?</a:t>
             </a:r>
             <a:endParaRPr lang="en-US" sz="730" dirty="0"/>
           </a:p>
@@ -5752,13 +6150,13 @@
       </p:sp>
       <p:sp>
         <p:nvSpPr>
-          <p:cNvPr id="94" name="Shape 89"/>
+          <p:cNvPr id="106" name="Shape 101"/>
           <p:cNvSpPr/>
           <p:nvPr/>
         </p:nvSpPr>
         <p:spPr>
           <a:xfrm>
-            <a:off x="10158970" y="9244598"/>
+            <a:off x="10158970" y="9056211"/>
             <a:ext cx="50400" cy="50400"/>
           </a:xfrm>
           <a:prstGeom prst="rect">
@@ -5777,14 +6175,14 @@
       </p:sp>
       <p:sp>
         <p:nvSpPr>
-          <p:cNvPr id="95" name="Text 90"/>
+          <p:cNvPr id="107" name="Text 102"/>
           <p:cNvSpPr txBox="1"/>
           <p:nvPr/>
         </p:nvSpPr>
         <p:spPr>
           <a:xfrm>
-            <a:off x="10266970" y="9208559"/>
-            <a:ext cx="4413737" cy="259588"/>
+            <a:off x="10266970" y="9020172"/>
+            <a:ext cx="4413737" cy="129794"/>
           </a:xfrm>
           <a:prstGeom prst="rect">
             <a:avLst/>
@@ -5811,24 +6209,7 @@
                 <a:ea typeface="Poppins" pitchFamily="34" charset="-122"/>
                 <a:cs typeface="Poppins" pitchFamily="34" charset="-120"/>
               </a:rPr>
-              <a:t>Does membership attach to every system sale? </a:t>
-            </a:r>
-            <a:pPr indent="0" marL="0">
-              <a:lnSpc>
-                <a:spcPts val="1022"/>
-              </a:lnSpc>
-              <a:buNone/>
-            </a:pPr>
-            <a:r>
-              <a:rPr lang="en-US" sz="730" dirty="0">
-                <a:solidFill>
-                  <a:srgbClr val="4A5565"/>
-                </a:solidFill>
-                <a:latin typeface="Poppins" pitchFamily="34" charset="0"/>
-                <a:ea typeface="Poppins" pitchFamily="34" charset="-122"/>
-                <a:cs typeface="Poppins" pitchFamily="34" charset="-120"/>
-              </a:rPr>
-              <a:t>Non-members leak at 44%, members at 18%.</a:t>
+              <a:t>The next hire: brewer vs wholesale plus bar coverage, hybrid either way.</a:t>
             </a:r>
             <a:endParaRPr lang="en-US" sz="730" dirty="0"/>
           </a:p>
@@ -5836,13 +6217,13 @@
       </p:sp>
       <p:sp>
         <p:nvSpPr>
-          <p:cNvPr id="96" name="Shape 91"/>
+          <p:cNvPr id="108" name="Shape 103"/>
           <p:cNvSpPr/>
           <p:nvPr/>
         </p:nvSpPr>
         <p:spPr>
           <a:xfrm>
-            <a:off x="10158970" y="9904695"/>
+            <a:off x="10158970" y="9480453"/>
             <a:ext cx="50400" cy="50400"/>
           </a:xfrm>
           <a:prstGeom prst="rect">
@@ -5861,7 +6242,91 @@
       </p:sp>
       <p:sp>
         <p:nvSpPr>
-          <p:cNvPr id="97" name="Text 92"/>
+          <p:cNvPr id="109" name="Text 104"/>
+          <p:cNvSpPr txBox="1"/>
+          <p:nvPr/>
+        </p:nvSpPr>
+        <p:spPr>
+          <a:xfrm>
+            <a:off x="10266970" y="9444413"/>
+            <a:ext cx="4413737" cy="129794"/>
+          </a:xfrm>
+          <a:prstGeom prst="rect">
+            <a:avLst/>
+          </a:prstGeom>
+          <a:noFill/>
+          <a:ln/>
+        </p:spPr>
+        <p:txBody>
+          <a:bodyPr wrap="square" lIns="0" tIns="0" rIns="0" bIns="0" rtlCol="0" anchor="t"/>
+          <a:lstStyle/>
+          <a:p>
+            <a:pPr indent="0" marL="0">
+              <a:lnSpc>
+                <a:spcPts val="1022"/>
+              </a:lnSpc>
+              <a:buNone/>
+            </a:pPr>
+            <a:r>
+              <a:rPr lang="en-US" sz="730" b="1" dirty="0">
+                <a:solidFill>
+                  <a:srgbClr val="0E171F"/>
+                </a:solidFill>
+                <a:latin typeface="Poppins" pitchFamily="34" charset="0"/>
+                <a:ea typeface="Poppins" pitchFamily="34" charset="-122"/>
+                <a:cs typeface="Poppins" pitchFamily="34" charset="-120"/>
+              </a:rPr>
+              <a:t>KPIs and growth targets: </a:t>
+            </a:r>
+            <a:pPr indent="0" marL="0">
+              <a:lnSpc>
+                <a:spcPts val="1022"/>
+              </a:lnSpc>
+              <a:buNone/>
+            </a:pPr>
+            <a:r>
+              <a:rPr lang="en-US" sz="730" dirty="0">
+                <a:solidFill>
+                  <a:srgbClr val="4A5565"/>
+                </a:solidFill>
+                <a:latin typeface="Poppins" pitchFamily="34" charset="0"/>
+                <a:ea typeface="Poppins" pitchFamily="34" charset="-122"/>
+                <a:cs typeface="Poppins" pitchFamily="34" charset="-120"/>
+              </a:rPr>
+              <a:t>keg system sales, active keg refillers, wholesale accounts.</a:t>
+            </a:r>
+            <a:endParaRPr lang="en-US" sz="730" dirty="0"/>
+          </a:p>
+        </p:txBody>
+      </p:sp>
+      <p:sp>
+        <p:nvSpPr>
+          <p:cNvPr id="110" name="Shape 105"/>
+          <p:cNvSpPr/>
+          <p:nvPr/>
+        </p:nvSpPr>
+        <p:spPr>
+          <a:xfrm>
+            <a:off x="10158970" y="9904695"/>
+            <a:ext cx="50400" cy="50400"/>
+          </a:xfrm>
+          <a:prstGeom prst="rect">
+            <a:avLst/>
+          </a:prstGeom>
+          <a:solidFill>
+            <a:srgbClr val="0066FF"/>
+          </a:solidFill>
+          <a:ln w="12700">
+            <a:solidFill>
+              <a:srgbClr val="333333"/>
+            </a:solidFill>
+            <a:prstDash val="solid"/>
+          </a:ln>
+        </p:spPr>
+      </p:sp>
+      <p:sp>
+        <p:nvSpPr>
+          <p:cNvPr id="111" name="Text 106"/>
           <p:cNvSpPr txBox="1"/>
           <p:nvPr/>
         </p:nvSpPr>
@@ -5895,24 +6360,7 @@
                 <a:ea typeface="Poppins" pitchFamily="34" charset="-122"/>
                 <a:cs typeface="Poppins" pitchFamily="34" charset="-120"/>
               </a:rPr>
-              <a:t>How far do we cut the range? </a:t>
-            </a:r>
-            <a:pPr indent="0" marL="0">
-              <a:lnSpc>
-                <a:spcPts val="1022"/>
-              </a:lnSpc>
-              <a:buNone/>
-            </a:pPr>
-            <a:r>
-              <a:rPr lang="en-US" sz="730" dirty="0">
-                <a:solidFill>
-                  <a:srgbClr val="4A5565"/>
-                </a:solidFill>
-                <a:latin typeface="Poppins" pitchFamily="34" charset="0"/>
-                <a:ea typeface="Poppins" pitchFamily="34" charset="-122"/>
-                <a:cs typeface="Poppins" pitchFamily="34" charset="-120"/>
-              </a:rPr>
-              <a:t>Heroes need the marketing that the tail is absorbing.</a:t>
+              <a:t>Meeting rhythm and agenda.</a:t>
             </a:r>
             <a:endParaRPr lang="en-US" sz="730" dirty="0"/>
           </a:p>
@@ -5920,7 +6368,7 @@
       </p:sp>
       <p:sp>
         <p:nvSpPr>
-          <p:cNvPr id="98" name="Shape 93"/>
+          <p:cNvPr id="112" name="Shape 107"/>
           <p:cNvSpPr/>
           <p:nvPr/>
         </p:nvSpPr>
@@ -5943,7 +6391,7 @@
       </p:sp>
       <p:sp>
         <p:nvSpPr>
-          <p:cNvPr id="99" name="Text 94"/>
+          <p:cNvPr id="113" name="Text 108"/>
           <p:cNvSpPr txBox="1"/>
           <p:nvPr/>
         </p:nvSpPr>
@@ -5977,7 +6425,7 @@
                 <a:ea typeface="Poppins" pitchFamily="34" charset="-122"/>
                 <a:cs typeface="Poppins" pitchFamily="34" charset="-120"/>
               </a:rPr>
-              <a:t>Agreed in the catch-up: the team reviews the deck and comes back with the commitments before the next conversation.</a:t>
+              <a:t>Justin's own 30-day list, returned 16 September. The team's review of the JP deck was the agreed next step from the catch-up.</a:t>
             </a:r>
             <a:endParaRPr lang="en-US" sz="700" dirty="0"/>
           </a:p>
@@ -6110,8 +6558,8 @@
         </p:nvSpPr>
         <p:spPr>
           <a:xfrm>
-            <a:off x="12693129" y="365760"/>
-            <a:ext cx="1150475" cy="251460"/>
+            <a:off x="12678246" y="365760"/>
+            <a:ext cx="1165358" cy="251460"/>
           </a:xfrm>
           <a:prstGeom prst="roundRect">
             <a:avLst>
@@ -6137,8 +6585,8 @@
         </p:nvSpPr>
         <p:spPr>
           <a:xfrm>
-            <a:off x="12693129" y="365760"/>
-            <a:ext cx="1150475" cy="251460"/>
+            <a:off x="12678246" y="365760"/>
+            <a:ext cx="1165358" cy="251460"/>
           </a:xfrm>
           <a:prstGeom prst="rect">
             <a:avLst/>
@@ -6162,7 +6610,7 @@
                 <a:ea typeface="Poppins" pitchFamily="34" charset="-122"/>
                 <a:cs typeface="Poppins" pitchFamily="34" charset="-120"/>
               </a:rPr>
-              <a:t>V01 · 15 SEPT 2026</a:t>
+              <a:t>V02 · 16 SEPT 2026</a:t>
             </a:r>
             <a:endParaRPr lang="en-US" sz="650" dirty="0"/>
           </a:p>
@@ -6176,7 +6624,7 @@
         </p:nvSpPr>
         <p:spPr>
           <a:xfrm>
-            <a:off x="11385086" y="365760"/>
+            <a:off x="11370203" y="365760"/>
             <a:ext cx="1218043" cy="251460"/>
           </a:xfrm>
           <a:prstGeom prst="roundRect">
@@ -6203,7 +6651,7 @@
         </p:nvSpPr>
         <p:spPr>
           <a:xfrm>
-            <a:off x="11385086" y="365760"/>
+            <a:off x="11370203" y="365760"/>
             <a:ext cx="1218043" cy="251460"/>
           </a:xfrm>
           <a:prstGeom prst="rect">
@@ -6242,7 +6690,7 @@
         </p:nvSpPr>
         <p:spPr>
           <a:xfrm>
-            <a:off x="10344040" y="365760"/>
+            <a:off x="10329157" y="365760"/>
             <a:ext cx="951046" cy="251460"/>
           </a:xfrm>
           <a:prstGeom prst="roundRect">
@@ -6269,7 +6717,7 @@
         </p:nvSpPr>
         <p:spPr>
           <a:xfrm>
-            <a:off x="10344040" y="365760"/>
+            <a:off x="10329157" y="365760"/>
             <a:ext cx="951046" cy="251460"/>
           </a:xfrm>
           <a:prstGeom prst="rect">
@@ -6465,7 +6913,7 @@
         </p:nvSpPr>
         <p:spPr>
           <a:xfrm>
-            <a:off x="438898" y="1975684"/>
+            <a:off x="438898" y="1956014"/>
             <a:ext cx="6951755" cy="462915"/>
           </a:xfrm>
           <a:prstGeom prst="rect">
@@ -6541,7 +6989,7 @@
         </p:nvSpPr>
         <p:spPr>
           <a:xfrm>
-            <a:off x="438898" y="2604199"/>
+            <a:off x="438898" y="2564859"/>
             <a:ext cx="6951755" cy="308610"/>
           </a:xfrm>
           <a:prstGeom prst="rect">
@@ -6600,8 +7048,8 @@
         </p:nvSpPr>
         <p:spPr>
           <a:xfrm>
-            <a:off x="438898" y="3078409"/>
-            <a:ext cx="6951755" cy="308610"/>
+            <a:off x="438898" y="3019399"/>
+            <a:ext cx="6951755" cy="462915"/>
           </a:xfrm>
           <a:prstGeom prst="rect">
             <a:avLst/>
@@ -6628,7 +7076,7 @@
                 <a:ea typeface="Poppins" pitchFamily="34" charset="-122"/>
                 <a:cs typeface="Poppins" pitchFamily="34" charset="-120"/>
               </a:rPr>
-              <a:t>Reshaping means three concrete things: </a:t>
+              <a:t>Justin frames the direction question as three-way: </a:t>
             </a:r>
             <a:pPr indent="0" marL="0">
               <a:lnSpc>
@@ -6645,7 +7093,7 @@
                 <a:ea typeface="Poppins" pitchFamily="34" charset="-122"/>
                 <a:cs typeface="Poppins" pitchFamily="34" charset="-120"/>
               </a:rPr>
-              <a:t>the room stops being staffed for walk-in trade it does not get, the spend that was chasing footfall moves to refills and wholesale, and somebody owns wholesale as a job rather than as an evening.</a:t>
+              <a:t>a Taproom selling kegs, a Showroom selling beers, or an Event space doing both. JP's recommendation is the first or the third, with walk-in paused. Justin's own priority list keeps taproom trade alive, growing it from local business, functions and ticketed music.</a:t>
             </a:r>
             <a:endParaRPr lang="en-US" sz="810" dirty="0"/>
           </a:p>
@@ -6777,7 +7225,7 @@
                 <a:ea typeface="Poppins" pitchFamily="34" charset="-122"/>
                 <a:cs typeface="Poppins" pitchFamily="34" charset="-120"/>
               </a:rPr>
-              <a:t>THE FOUR UNITS, AND THE CALL ON EACH</a:t>
+              <a:t>THE FIVE UNITS, AND THE CALL ON EACH</a:t>
             </a:r>
             <a:endParaRPr lang="en-US" sz="680" dirty="0"/>
           </a:p>
@@ -6806,11 +7254,11 @@
             <a:tbl>
               <a:tblPr/>
               <a:tblGrid>
-                <a:gridCol w="986122"/>
-                <a:gridCol w="3587739"/>
-                <a:gridCol w="2377893"/>
+                <a:gridCol w="982902"/>
+                <a:gridCol w="2984426"/>
+                <a:gridCol w="2984426"/>
               </a:tblGrid>
-              <a:tr h="464509">
+              <a:tr h="343907">
                 <a:tc>
                   <a:txBody>
                     <a:bodyPr/>
@@ -6971,7 +7419,7 @@
                   </a:tcPr>
                 </a:tc>
               </a:tr>
-              <a:tr h="485261">
+              <a:tr h="483836">
                 <a:tc>
                   <a:txBody>
                     <a:bodyPr/>
@@ -6992,7 +7440,7 @@
                           <a:ea typeface="Poppins" pitchFamily="34" charset="-122"/>
                           <a:cs typeface="Poppins" pitchFamily="34" charset="-120"/>
                         </a:rPr>
-                        <a:t>Refills</a:t>
+                        <a:t>Keg systems</a:t>
                       </a:r>
                       <a:endParaRPr lang="en-US" sz="690" dirty="0">
                         <a:latin typeface="Poppins" charset="0"/>
@@ -7045,7 +7493,7 @@
                           <a:ea typeface="Poppins" pitchFamily="34" charset="-122"/>
                           <a:cs typeface="Poppins" pitchFamily="34" charset="-120"/>
                         </a:rPr>
-                        <a:t>96–113 active, at MVP, reached with no push</a:t>
+                        <a:t>Sold near cost</a:t>
                       </a:r>
                       <a:endParaRPr lang="en-US" sz="690" dirty="0">
                         <a:latin typeface="Poppins" charset="0"/>
@@ -7075,6 +7523,184 @@
                     </a:lnB>
                     <a:solidFill>
                       <a:srgbClr val="F5F7FA"/>
+                    </a:solidFill>
+                  </a:tcPr>
+                </a:tc>
+                <a:tc>
+                  <a:txBody>
+                    <a:bodyPr/>
+                    <a:lstStyle/>
+                    <a:p>
+                      <a:pPr algn="l" indent="0" marL="0">
+                        <a:lnSpc>
+                          <a:spcPts val="938"/>
+                        </a:lnSpc>
+                        <a:buNone/>
+                      </a:pPr>
+                      <a:r>
+                        <a:rPr lang="en-US" sz="690" b="1" dirty="0">
+                          <a:solidFill>
+                            <a:srgbClr val="0E171F"/>
+                          </a:solidFill>
+                          <a:latin typeface="Poppins" pitchFamily="34" charset="0"/>
+                          <a:ea typeface="Poppins" pitchFamily="34" charset="-122"/>
+                          <a:cs typeface="Poppins" pitchFamily="34" charset="-120"/>
+                        </a:rPr>
+                        <a:t>Lease-to-buy. </a:t>
+                      </a:r>
+                      <a:pPr algn="l" indent="0" marL="0">
+                        <a:lnSpc>
+                          <a:spcPts val="938"/>
+                        </a:lnSpc>
+                        <a:buNone/>
+                      </a:pPr>
+                      <a:r>
+                        <a:rPr lang="en-US" sz="690" dirty="0">
+                          <a:solidFill>
+                            <a:srgbClr val="4A5565"/>
+                          </a:solidFill>
+                          <a:latin typeface="Poppins" pitchFamily="34" charset="0"/>
+                          <a:ea typeface="Poppins" pitchFamily="34" charset="-122"/>
+                          <a:cs typeface="Poppins" pitchFamily="34" charset="-120"/>
+                        </a:rPr>
+                        <a:t>Plus a delivery service, Justin's three-month item</a:t>
+                      </a:r>
+                      <a:endParaRPr lang="en-US" sz="690" dirty="0">
+                        <a:latin typeface="Poppins" charset="0"/>
+                        <a:ea typeface="Poppins" charset="0"/>
+                        <a:cs typeface="Poppins" charset="0"/>
+                      </a:endParaRPr>
+                    </a:p>
+                  </a:txBody>
+                  <a:tcPr marL="54000" marR="54000" marT="54000" marB="54000" anchor="t">
+                    <a:lnL w="0" cap="flat" cmpd="sng" algn="ctr">
+                      <a:noFill/>
+                    </a:lnL>
+                    <a:lnR w="0" cap="flat" cmpd="sng" algn="ctr">
+                      <a:noFill/>
+                    </a:lnR>
+                    <a:lnT w="0" cap="flat" cmpd="sng" algn="ctr">
+                      <a:noFill/>
+                    </a:lnT>
+                    <a:lnB w="7620" cap="flat" cmpd="sng" algn="ctr">
+                      <a:solidFill>
+                        <a:srgbClr val="E3E7EC"/>
+                      </a:solidFill>
+                      <a:prstDash val="solid"/>
+                      <a:round/>
+                      <a:headEnd type="none" w="med" len="med"/>
+                      <a:tailEnd type="none" w="med" len="med"/>
+                    </a:lnB>
+                    <a:solidFill>
+                      <a:srgbClr val="F5F7FA"/>
+                    </a:solidFill>
+                  </a:tcPr>
+                </a:tc>
+              </a:tr>
+              <a:tr h="483836">
+                <a:tc>
+                  <a:txBody>
+                    <a:bodyPr/>
+                    <a:lstStyle/>
+                    <a:p>
+                      <a:pPr algn="l" indent="0" marL="0">
+                        <a:lnSpc>
+                          <a:spcPts val="938"/>
+                        </a:lnSpc>
+                        <a:buNone/>
+                      </a:pPr>
+                      <a:r>
+                        <a:rPr lang="en-US" sz="690" b="1" dirty="0">
+                          <a:solidFill>
+                            <a:srgbClr val="0E171F"/>
+                          </a:solidFill>
+                          <a:latin typeface="Poppins" pitchFamily="34" charset="0"/>
+                          <a:ea typeface="Poppins" pitchFamily="34" charset="-122"/>
+                          <a:cs typeface="Poppins" pitchFamily="34" charset="-120"/>
+                        </a:rPr>
+                        <a:t>Refills</a:t>
+                      </a:r>
+                      <a:endParaRPr lang="en-US" sz="690" dirty="0">
+                        <a:latin typeface="Poppins" charset="0"/>
+                        <a:ea typeface="Poppins" charset="0"/>
+                        <a:cs typeface="Poppins" charset="0"/>
+                      </a:endParaRPr>
+                    </a:p>
+                  </a:txBody>
+                  <a:tcPr marL="54000" marR="54000" marT="54000" marB="54000" anchor="t">
+                    <a:lnL w="0" cap="flat" cmpd="sng" algn="ctr">
+                      <a:noFill/>
+                    </a:lnL>
+                    <a:lnR w="0" cap="flat" cmpd="sng" algn="ctr">
+                      <a:noFill/>
+                    </a:lnR>
+                    <a:lnT w="0" cap="flat" cmpd="sng" algn="ctr">
+                      <a:noFill/>
+                    </a:lnT>
+                    <a:lnB w="7620" cap="flat" cmpd="sng" algn="ctr">
+                      <a:solidFill>
+                        <a:srgbClr val="E3E7EC"/>
+                      </a:solidFill>
+                      <a:prstDash val="solid"/>
+                      <a:round/>
+                      <a:headEnd type="none" w="med" len="med"/>
+                      <a:tailEnd type="none" w="med" len="med"/>
+                    </a:lnB>
+                    <a:solidFill>
+                      <a:srgbClr val="FFFFFF"/>
+                    </a:solidFill>
+                  </a:tcPr>
+                </a:tc>
+                <a:tc>
+                  <a:txBody>
+                    <a:bodyPr/>
+                    <a:lstStyle/>
+                    <a:p>
+                      <a:pPr algn="l" indent="0" marL="0">
+                        <a:lnSpc>
+                          <a:spcPts val="938"/>
+                        </a:lnSpc>
+                        <a:buNone/>
+                      </a:pPr>
+                      <a:r>
+                        <a:rPr lang="en-US" sz="690" dirty="0">
+                          <a:solidFill>
+                            <a:srgbClr val="4A5565"/>
+                          </a:solidFill>
+                          <a:latin typeface="Poppins" pitchFamily="34" charset="0"/>
+                          <a:ea typeface="Poppins" pitchFamily="34" charset="-122"/>
+                          <a:cs typeface="Poppins" pitchFamily="34" charset="-120"/>
+                        </a:rPr>
+                        <a:t>96–113 active, residential and commercial, no push</a:t>
+                      </a:r>
+                      <a:endParaRPr lang="en-US" sz="690" dirty="0">
+                        <a:latin typeface="Poppins" charset="0"/>
+                        <a:ea typeface="Poppins" charset="0"/>
+                        <a:cs typeface="Poppins" charset="0"/>
+                      </a:endParaRPr>
+                    </a:p>
+                  </a:txBody>
+                  <a:tcPr marL="54000" marR="54000" marT="54000" marB="54000" anchor="t">
+                    <a:lnL w="0" cap="flat" cmpd="sng" algn="ctr">
+                      <a:noFill/>
+                    </a:lnL>
+                    <a:lnR w="0" cap="flat" cmpd="sng" algn="ctr">
+                      <a:noFill/>
+                    </a:lnR>
+                    <a:lnT w="0" cap="flat" cmpd="sng" algn="ctr">
+                      <a:noFill/>
+                    </a:lnT>
+                    <a:lnB w="7620" cap="flat" cmpd="sng" algn="ctr">
+                      <a:solidFill>
+                        <a:srgbClr val="E3E7EC"/>
+                      </a:solidFill>
+                      <a:prstDash val="solid"/>
+                      <a:round/>
+                      <a:headEnd type="none" w="med" len="med"/>
+                      <a:tailEnd type="none" w="med" len="med"/>
+                    </a:lnB>
+                    <a:solidFill>
+                      <a:srgbClr val="FFFFFF"/>
                     </a:solidFill>
                   </a:tcPr>
                 </a:tc>
@@ -7115,7 +7741,7 @@
                           <a:ea typeface="Poppins" pitchFamily="34" charset="-122"/>
                           <a:cs typeface="Poppins" pitchFamily="34" charset="-120"/>
                         </a:rPr>
-                        <a:t>This is the business</a:t>
+                        <a:t>This is the business. 250 by March 2027, 1,000 by year three</a:t>
                       </a:r>
                       <a:endParaRPr lang="en-US" sz="690" dirty="0">
                         <a:latin typeface="Poppins" charset="0"/>
@@ -7144,12 +7770,12 @@
                       <a:tailEnd type="none" w="med" len="med"/>
                     </a:lnB>
                     <a:solidFill>
-                      <a:srgbClr val="F5F7FA"/>
+                      <a:srgbClr val="FFFFFF"/>
                     </a:solidFill>
                   </a:tcPr>
                 </a:tc>
               </a:tr>
-              <a:tr h="485261">
+              <a:tr h="364659">
                 <a:tc>
                   <a:txBody>
                     <a:bodyPr/>
@@ -7170,7 +7796,185 @@
                           <a:ea typeface="Poppins" pitchFamily="34" charset="-122"/>
                           <a:cs typeface="Poppins" pitchFamily="34" charset="-120"/>
                         </a:rPr>
-                        <a:t>Tap Room</a:t>
+                        <a:t>Taproom</a:t>
+                      </a:r>
+                      <a:endParaRPr lang="en-US" sz="690" dirty="0">
+                        <a:latin typeface="Poppins" charset="0"/>
+                        <a:ea typeface="Poppins" charset="0"/>
+                        <a:cs typeface="Poppins" charset="0"/>
+                      </a:endParaRPr>
+                    </a:p>
+                  </a:txBody>
+                  <a:tcPr marL="54000" marR="54000" marT="54000" marB="54000" anchor="t">
+                    <a:lnL w="0" cap="flat" cmpd="sng" algn="ctr">
+                      <a:noFill/>
+                    </a:lnL>
+                    <a:lnR w="0" cap="flat" cmpd="sng" algn="ctr">
+                      <a:noFill/>
+                    </a:lnR>
+                    <a:lnT w="0" cap="flat" cmpd="sng" algn="ctr">
+                      <a:noFill/>
+                    </a:lnT>
+                    <a:lnB w="7620" cap="flat" cmpd="sng" algn="ctr">
+                      <a:solidFill>
+                        <a:srgbClr val="E3E7EC"/>
+                      </a:solidFill>
+                      <a:prstDash val="solid"/>
+                      <a:round/>
+                      <a:headEnd type="none" w="med" len="med"/>
+                      <a:tailEnd type="none" w="med" len="med"/>
+                    </a:lnB>
+                    <a:solidFill>
+                      <a:srgbClr val="F5F7FA"/>
+                    </a:solidFill>
+                  </a:tcPr>
+                </a:tc>
+                <a:tc>
+                  <a:txBody>
+                    <a:bodyPr/>
+                    <a:lstStyle/>
+                    <a:p>
+                      <a:pPr algn="l" indent="0" marL="0">
+                        <a:lnSpc>
+                          <a:spcPts val="938"/>
+                        </a:lnSpc>
+                        <a:buNone/>
+                      </a:pPr>
+                      <a:r>
+                        <a:rPr lang="en-US" sz="690" dirty="0">
+                          <a:solidFill>
+                            <a:srgbClr val="4A5565"/>
+                          </a:solidFill>
+                          <a:latin typeface="Poppins" pitchFamily="34" charset="0"/>
+                          <a:ea typeface="Poppins" pitchFamily="34" charset="-122"/>
+                          <a:cs typeface="Poppins" pitchFamily="34" charset="-120"/>
+                        </a:rPr>
+                        <a:t>Walk-ins, local business, functions and events</a:t>
+                      </a:r>
+                      <a:endParaRPr lang="en-US" sz="690" dirty="0">
+                        <a:latin typeface="Poppins" charset="0"/>
+                        <a:ea typeface="Poppins" charset="0"/>
+                        <a:cs typeface="Poppins" charset="0"/>
+                      </a:endParaRPr>
+                    </a:p>
+                  </a:txBody>
+                  <a:tcPr marL="54000" marR="54000" marT="54000" marB="54000" anchor="t">
+                    <a:lnL w="0" cap="flat" cmpd="sng" algn="ctr">
+                      <a:noFill/>
+                    </a:lnL>
+                    <a:lnR w="0" cap="flat" cmpd="sng" algn="ctr">
+                      <a:noFill/>
+                    </a:lnR>
+                    <a:lnT w="0" cap="flat" cmpd="sng" algn="ctr">
+                      <a:noFill/>
+                    </a:lnT>
+                    <a:lnB w="7620" cap="flat" cmpd="sng" algn="ctr">
+                      <a:solidFill>
+                        <a:srgbClr val="E3E7EC"/>
+                      </a:solidFill>
+                      <a:prstDash val="solid"/>
+                      <a:round/>
+                      <a:headEnd type="none" w="med" len="med"/>
+                      <a:tailEnd type="none" w="med" len="med"/>
+                    </a:lnB>
+                    <a:solidFill>
+                      <a:srgbClr val="F5F7FA"/>
+                    </a:solidFill>
+                  </a:tcPr>
+                </a:tc>
+                <a:tc>
+                  <a:txBody>
+                    <a:bodyPr/>
+                    <a:lstStyle/>
+                    <a:p>
+                      <a:pPr algn="l" indent="0" marL="0">
+                        <a:lnSpc>
+                          <a:spcPts val="938"/>
+                        </a:lnSpc>
+                        <a:buNone/>
+                      </a:pPr>
+                      <a:r>
+                        <a:rPr lang="en-US" sz="690" b="1" dirty="0">
+                          <a:solidFill>
+                            <a:srgbClr val="0E171F"/>
+                          </a:solidFill>
+                          <a:latin typeface="Poppins" pitchFamily="34" charset="0"/>
+                          <a:ea typeface="Poppins" pitchFamily="34" charset="-122"/>
+                          <a:cs typeface="Poppins" pitchFamily="34" charset="-120"/>
+                        </a:rPr>
+                        <a:t>Decide. </a:t>
+                      </a:r>
+                      <a:pPr algn="l" indent="0" marL="0">
+                        <a:lnSpc>
+                          <a:spcPts val="938"/>
+                        </a:lnSpc>
+                        <a:buNone/>
+                      </a:pPr>
+                      <a:r>
+                        <a:rPr lang="en-US" sz="690" dirty="0">
+                          <a:solidFill>
+                            <a:srgbClr val="4A5565"/>
+                          </a:solidFill>
+                          <a:latin typeface="Poppins" pitchFamily="34" charset="0"/>
+                          <a:ea typeface="Poppins" pitchFamily="34" charset="-122"/>
+                          <a:cs typeface="Poppins" pitchFamily="34" charset="-120"/>
+                        </a:rPr>
+                        <a:t>Justin's three-way, decided in 30 days</a:t>
+                      </a:r>
+                      <a:endParaRPr lang="en-US" sz="690" dirty="0">
+                        <a:latin typeface="Poppins" charset="0"/>
+                        <a:ea typeface="Poppins" charset="0"/>
+                        <a:cs typeface="Poppins" charset="0"/>
+                      </a:endParaRPr>
+                    </a:p>
+                  </a:txBody>
+                  <a:tcPr marL="54000" marR="54000" marT="54000" marB="54000" anchor="t">
+                    <a:lnL w="0" cap="flat" cmpd="sng" algn="ctr">
+                      <a:noFill/>
+                    </a:lnL>
+                    <a:lnR w="0" cap="flat" cmpd="sng" algn="ctr">
+                      <a:noFill/>
+                    </a:lnR>
+                    <a:lnT w="0" cap="flat" cmpd="sng" algn="ctr">
+                      <a:noFill/>
+                    </a:lnT>
+                    <a:lnB w="7620" cap="flat" cmpd="sng" algn="ctr">
+                      <a:solidFill>
+                        <a:srgbClr val="E3E7EC"/>
+                      </a:solidFill>
+                      <a:prstDash val="solid"/>
+                      <a:round/>
+                      <a:headEnd type="none" w="med" len="med"/>
+                      <a:tailEnd type="none" w="med" len="med"/>
+                    </a:lnB>
+                    <a:solidFill>
+                      <a:srgbClr val="F5F7FA"/>
+                    </a:solidFill>
+                  </a:tcPr>
+                </a:tc>
+              </a:tr>
+              <a:tr h="364659">
+                <a:tc>
+                  <a:txBody>
+                    <a:bodyPr/>
+                    <a:lstStyle/>
+                    <a:p>
+                      <a:pPr algn="l" indent="0" marL="0">
+                        <a:lnSpc>
+                          <a:spcPts val="938"/>
+                        </a:lnSpc>
+                        <a:buNone/>
+                      </a:pPr>
+                      <a:r>
+                        <a:rPr lang="en-US" sz="690" b="1" dirty="0">
+                          <a:solidFill>
+                            <a:srgbClr val="0E171F"/>
+                          </a:solidFill>
+                          <a:latin typeface="Poppins" pitchFamily="34" charset="0"/>
+                          <a:ea typeface="Poppins" pitchFamily="34" charset="-122"/>
+                          <a:cs typeface="Poppins" pitchFamily="34" charset="-120"/>
+                        </a:rPr>
+                        <a:t>Wholesale</a:t>
                       </a:r>
                       <a:endParaRPr lang="en-US" sz="690" dirty="0">
                         <a:latin typeface="Poppins" charset="0"/>
@@ -7223,7 +8027,7 @@
                           <a:ea typeface="Poppins" pitchFamily="34" charset="-122"/>
                           <a:cs typeface="Poppins" pitchFamily="34" charset="-120"/>
                         </a:rPr>
-                        <a:t>Walk-in trade does not cover it. Events already do</a:t>
+                        <a:t>Approaches come in, nothing converts</a:t>
                       </a:r>
                       <a:endParaRPr lang="en-US" sz="690" dirty="0">
                         <a:latin typeface="Poppins" charset="0"/>
@@ -7253,184 +8057,6 @@
                     </a:lnB>
                     <a:solidFill>
                       <a:srgbClr val="FFFFFF"/>
-                    </a:solidFill>
-                  </a:tcPr>
-                </a:tc>
-                <a:tc>
-                  <a:txBody>
-                    <a:bodyPr/>
-                    <a:lstStyle/>
-                    <a:p>
-                      <a:pPr algn="l" indent="0" marL="0">
-                        <a:lnSpc>
-                          <a:spcPts val="938"/>
-                        </a:lnSpc>
-                        <a:buNone/>
-                      </a:pPr>
-                      <a:r>
-                        <a:rPr lang="en-US" sz="690" b="1" dirty="0">
-                          <a:solidFill>
-                            <a:srgbClr val="0E171F"/>
-                          </a:solidFill>
-                          <a:latin typeface="Poppins" pitchFamily="34" charset="0"/>
-                          <a:ea typeface="Poppins" pitchFamily="34" charset="-122"/>
-                          <a:cs typeface="Poppins" pitchFamily="34" charset="-120"/>
-                        </a:rPr>
-                        <a:t>Pivot. </a:t>
-                      </a:r>
-                      <a:pPr algn="l" indent="0" marL="0">
-                        <a:lnSpc>
-                          <a:spcPts val="938"/>
-                        </a:lnSpc>
-                        <a:buNone/>
-                      </a:pPr>
-                      <a:r>
-                        <a:rPr lang="en-US" sz="690" dirty="0">
-                          <a:solidFill>
-                            <a:srgbClr val="4A5565"/>
-                          </a:solidFill>
-                          <a:latin typeface="Poppins" pitchFamily="34" charset="0"/>
-                          <a:ea typeface="Poppins" pitchFamily="34" charset="-122"/>
-                          <a:cs typeface="Poppins" pitchFamily="34" charset="-120"/>
-                        </a:rPr>
-                        <a:t>Destination, not walk-in</a:t>
-                      </a:r>
-                      <a:endParaRPr lang="en-US" sz="690" dirty="0">
-                        <a:latin typeface="Poppins" charset="0"/>
-                        <a:ea typeface="Poppins" charset="0"/>
-                        <a:cs typeface="Poppins" charset="0"/>
-                      </a:endParaRPr>
-                    </a:p>
-                  </a:txBody>
-                  <a:tcPr marL="54000" marR="54000" marT="54000" marB="54000" anchor="t">
-                    <a:lnL w="0" cap="flat" cmpd="sng" algn="ctr">
-                      <a:noFill/>
-                    </a:lnL>
-                    <a:lnR w="0" cap="flat" cmpd="sng" algn="ctr">
-                      <a:noFill/>
-                    </a:lnR>
-                    <a:lnT w="0" cap="flat" cmpd="sng" algn="ctr">
-                      <a:noFill/>
-                    </a:lnT>
-                    <a:lnB w="7620" cap="flat" cmpd="sng" algn="ctr">
-                      <a:solidFill>
-                        <a:srgbClr val="E3E7EC"/>
-                      </a:solidFill>
-                      <a:prstDash val="solid"/>
-                      <a:round/>
-                      <a:headEnd type="none" w="med" len="med"/>
-                      <a:tailEnd type="none" w="med" len="med"/>
-                    </a:lnB>
-                    <a:solidFill>
-                      <a:srgbClr val="FFFFFF"/>
-                    </a:solidFill>
-                  </a:tcPr>
-                </a:tc>
-              </a:tr>
-              <a:tr h="485261">
-                <a:tc>
-                  <a:txBody>
-                    <a:bodyPr/>
-                    <a:lstStyle/>
-                    <a:p>
-                      <a:pPr algn="l" indent="0" marL="0">
-                        <a:lnSpc>
-                          <a:spcPts val="938"/>
-                        </a:lnSpc>
-                        <a:buNone/>
-                      </a:pPr>
-                      <a:r>
-                        <a:rPr lang="en-US" sz="690" b="1" dirty="0">
-                          <a:solidFill>
-                            <a:srgbClr val="0E171F"/>
-                          </a:solidFill>
-                          <a:latin typeface="Poppins" pitchFamily="34" charset="0"/>
-                          <a:ea typeface="Poppins" pitchFamily="34" charset="-122"/>
-                          <a:cs typeface="Poppins" pitchFamily="34" charset="-120"/>
-                        </a:rPr>
-                        <a:t>Wholesale</a:t>
-                      </a:r>
-                      <a:endParaRPr lang="en-US" sz="690" dirty="0">
-                        <a:latin typeface="Poppins" charset="0"/>
-                        <a:ea typeface="Poppins" charset="0"/>
-                        <a:cs typeface="Poppins" charset="0"/>
-                      </a:endParaRPr>
-                    </a:p>
-                  </a:txBody>
-                  <a:tcPr marL="54000" marR="54000" marT="54000" marB="54000" anchor="t">
-                    <a:lnL w="0" cap="flat" cmpd="sng" algn="ctr">
-                      <a:noFill/>
-                    </a:lnL>
-                    <a:lnR w="0" cap="flat" cmpd="sng" algn="ctr">
-                      <a:noFill/>
-                    </a:lnR>
-                    <a:lnT w="0" cap="flat" cmpd="sng" algn="ctr">
-                      <a:noFill/>
-                    </a:lnT>
-                    <a:lnB w="7620" cap="flat" cmpd="sng" algn="ctr">
-                      <a:solidFill>
-                        <a:srgbClr val="E3E7EC"/>
-                      </a:solidFill>
-                      <a:prstDash val="solid"/>
-                      <a:round/>
-                      <a:headEnd type="none" w="med" len="med"/>
-                      <a:tailEnd type="none" w="med" len="med"/>
-                    </a:lnB>
-                    <a:solidFill>
-                      <a:srgbClr val="F5F7FA"/>
-                    </a:solidFill>
-                  </a:tcPr>
-                </a:tc>
-                <a:tc>
-                  <a:txBody>
-                    <a:bodyPr/>
-                    <a:lstStyle/>
-                    <a:p>
-                      <a:pPr algn="l" indent="0" marL="0">
-                        <a:lnSpc>
-                          <a:spcPts val="938"/>
-                        </a:lnSpc>
-                        <a:buNone/>
-                      </a:pPr>
-                      <a:r>
-                        <a:rPr lang="en-US" sz="690" dirty="0">
-                          <a:solidFill>
-                            <a:srgbClr val="4A5565"/>
-                          </a:solidFill>
-                          <a:latin typeface="Poppins" pitchFamily="34" charset="0"/>
-                          <a:ea typeface="Poppins" pitchFamily="34" charset="-122"/>
-                          <a:cs typeface="Poppins" pitchFamily="34" charset="-120"/>
-                        </a:rPr>
-                        <a:t>Approaches come in, nothing converts</a:t>
-                      </a:r>
-                      <a:endParaRPr lang="en-US" sz="690" dirty="0">
-                        <a:latin typeface="Poppins" charset="0"/>
-                        <a:ea typeface="Poppins" charset="0"/>
-                        <a:cs typeface="Poppins" charset="0"/>
-                      </a:endParaRPr>
-                    </a:p>
-                  </a:txBody>
-                  <a:tcPr marL="54000" marR="54000" marT="54000" marB="54000" anchor="t">
-                    <a:lnL w="0" cap="flat" cmpd="sng" algn="ctr">
-                      <a:noFill/>
-                    </a:lnL>
-                    <a:lnR w="0" cap="flat" cmpd="sng" algn="ctr">
-                      <a:noFill/>
-                    </a:lnR>
-                    <a:lnT w="0" cap="flat" cmpd="sng" algn="ctr">
-                      <a:noFill/>
-                    </a:lnT>
-                    <a:lnB w="7620" cap="flat" cmpd="sng" algn="ctr">
-                      <a:solidFill>
-                        <a:srgbClr val="E3E7EC"/>
-                      </a:solidFill>
-                      <a:prstDash val="solid"/>
-                      <a:round/>
-                      <a:headEnd type="none" w="med" len="med"/>
-                      <a:tailEnd type="none" w="med" len="med"/>
-                    </a:lnB>
-                    <a:solidFill>
-                      <a:srgbClr val="F5F7FA"/>
                     </a:solidFill>
                   </a:tcPr>
                 </a:tc>
@@ -7471,7 +8097,7 @@
                           <a:ea typeface="Poppins" pitchFamily="34" charset="-122"/>
                           <a:cs typeface="Poppins" pitchFamily="34" charset="-120"/>
                         </a:rPr>
-                        <a:t>A role with targets</a:t>
+                        <a:t>Next hire is brewer vs wholesale plus bar, hybrid</a:t>
                       </a:r>
                       <a:endParaRPr lang="en-US" sz="690" dirty="0">
                         <a:latin typeface="Poppins" charset="0"/>
@@ -7500,12 +8126,12 @@
                       <a:tailEnd type="none" w="med" len="med"/>
                     </a:lnB>
                     <a:solidFill>
-                      <a:srgbClr val="F5F7FA"/>
+                      <a:srgbClr val="FFFFFF"/>
                     </a:solidFill>
                   </a:tcPr>
                 </a:tc>
               </a:tr>
-              <a:tr h="485261">
+              <a:tr h="364659">
                 <a:tc>
                   <a:txBody>
                     <a:bodyPr/>
@@ -7526,7 +8152,7 @@
                           <a:ea typeface="Poppins" pitchFamily="34" charset="-122"/>
                           <a:cs typeface="Poppins" pitchFamily="34" charset="-120"/>
                         </a:rPr>
-                        <a:t>Canning</a:t>
+                        <a:t>Merchandise</a:t>
                       </a:r>
                       <a:endParaRPr lang="en-US" sz="690" dirty="0">
                         <a:latin typeface="Poppins" charset="0"/>
@@ -7555,7 +8181,7 @@
                       <a:tailEnd type="none" w="med" len="med"/>
                     </a:lnB>
                     <a:solidFill>
-                      <a:srgbClr val="FFFFFF"/>
+                      <a:srgbClr val="F5F7FA"/>
                     </a:solidFill>
                   </a:tcPr>
                 </a:tc>
@@ -7579,7 +8205,7 @@
                           <a:ea typeface="Poppins" pitchFamily="34" charset="-122"/>
                           <a:cs typeface="Poppins" pitchFamily="34" charset="-120"/>
                         </a:rPr>
-                        <a:t>Not started. Opens bottle shops and bars</a:t>
+                        <a:t>Line five in Justin's plan</a:t>
                       </a:r>
                       <a:endParaRPr lang="en-US" sz="690" dirty="0">
                         <a:latin typeface="Poppins" charset="0"/>
@@ -7608,7 +8234,7 @@
                       <a:tailEnd type="none" w="med" len="med"/>
                     </a:lnB>
                     <a:solidFill>
-                      <a:srgbClr val="FFFFFF"/>
+                      <a:srgbClr val="F5F7FA"/>
                     </a:solidFill>
                   </a:tcPr>
                 </a:tc>
@@ -7632,24 +8258,7 @@
                           <a:ea typeface="Poppins" pitchFamily="34" charset="-122"/>
                           <a:cs typeface="Poppins" pitchFamily="34" charset="-120"/>
                         </a:rPr>
-                        <a:t>Decide. </a:t>
-                      </a:r>
-                      <a:pPr algn="l" indent="0" marL="0">
-                        <a:lnSpc>
-                          <a:spcPts val="938"/>
-                        </a:lnSpc>
-                        <a:buNone/>
-                      </a:pPr>
-                      <a:r>
-                        <a:rPr lang="en-US" sz="690" dirty="0">
-                          <a:solidFill>
-                            <a:srgbClr val="4A5565"/>
-                          </a:solidFill>
-                          <a:latin typeface="Poppins" pitchFamily="34" charset="0"/>
-                          <a:ea typeface="Poppins" pitchFamily="34" charset="-122"/>
-                          <a:cs typeface="Poppins" pitchFamily="34" charset="-120"/>
-                        </a:rPr>
-                        <a:t>See the box below</a:t>
+                        <a:t>Keep it small.</a:t>
                       </a:r>
                       <a:endParaRPr lang="en-US" sz="690" dirty="0">
                         <a:latin typeface="Poppins" charset="0"/>
@@ -7678,7 +8287,7 @@
                       <a:tailEnd type="none" w="med" len="med"/>
                     </a:lnB>
                     <a:solidFill>
-                      <a:srgbClr val="FFFFFF"/>
+                      <a:srgbClr val="F5F7FA"/>
                     </a:solidFill>
                   </a:tcPr>
                 </a:tc>
@@ -7746,7 +8355,7 @@
                 <a:ea typeface="Poppins" pitchFamily="34" charset="-122"/>
                 <a:cs typeface="Poppins" pitchFamily="34" charset="-120"/>
               </a:rPr>
-              <a:t>The Tap Room is not being closed. It is being asked to earn its keep a different way.</a:t>
+              <a:t>Canning is not in Justin's plan at all. Consistent with the room.</a:t>
             </a:r>
             <a:endParaRPr lang="en-US" sz="700" dirty="0"/>
           </a:p>
@@ -7880,7 +8489,7 @@
                 <a:ea typeface="Poppins" pitchFamily="34" charset="-122"/>
                 <a:cs typeface="Poppins" pitchFamily="34" charset="-120"/>
               </a:rPr>
-              <a:t>206</a:t>
+              <a:t>250</a:t>
             </a:r>
             <a:endParaRPr lang="en-US" sz="1300" dirty="0"/>
           </a:p>
@@ -7922,7 +8531,7 @@
                 <a:ea typeface="Poppins" pitchFamily="34" charset="-122"/>
                 <a:cs typeface="Poppins" pitchFamily="34" charset="-120"/>
               </a:rPr>
-              <a:t>SYSTEMS IN THE DATABASE NOW</a:t>
+              <a:t>ACTIVE REFILLERS AT SIX MONTHS</a:t>
             </a:r>
             <a:endParaRPr lang="en-US" sz="550" dirty="0"/>
           </a:p>
@@ -7989,7 +8598,7 @@
                 <a:ea typeface="Poppins" pitchFamily="34" charset="-122"/>
                 <a:cs typeface="Poppins" pitchFamily="34" charset="-120"/>
               </a:rPr>
-              <a:t>~9×</a:t>
+              <a:t>1,000</a:t>
             </a:r>
             <a:endParaRPr lang="en-US" sz="1300" dirty="0"/>
           </a:p>
@@ -8031,7 +8640,7 @@
                 <a:ea typeface="Poppins" pitchFamily="34" charset="-122"/>
                 <a:cs typeface="Poppins" pitchFamily="34" charset="-120"/>
               </a:rPr>
-              <a:t>MULTIPLE NEEDED TO HIT 1,000</a:t>
+              <a:t>BY YEAR THREE, GC, BRISBANE, NORTHERN RIVERS</a:t>
             </a:r>
             <a:endParaRPr lang="en-US" sz="550" dirty="0"/>
           </a:p>
@@ -8098,7 +8707,7 @@
                 <a:ea typeface="Poppins" pitchFamily="34" charset="-122"/>
                 <a:cs typeface="Poppins" pitchFamily="34" charset="-120"/>
               </a:rPr>
-              <a:t>116</a:t>
+              <a:t>~$50k</a:t>
             </a:r>
             <a:endParaRPr lang="en-US" sz="1300" dirty="0"/>
           </a:p>
@@ -8140,7 +8749,7 @@
                 <a:ea typeface="Poppins" pitchFamily="34" charset="-122"/>
                 <a:cs typeface="Poppins" pitchFamily="34" charset="-120"/>
               </a:rPr>
-              <a:t>OWNERS WHO BOUGHT ELSEWHERE</a:t>
+              <a:t>BREAKEVEN, JUSTIN'S FIGURE, PERIOD NOT STATED</a:t>
             </a:r>
             <a:endParaRPr lang="en-US" sz="550" dirty="0"/>
           </a:p>
@@ -8182,7 +8791,7 @@
                 <a:ea typeface="Poppins" pitchFamily="34" charset="-122"/>
                 <a:cs typeface="Poppins" pitchFamily="34" charset="-120"/>
               </a:rPr>
-              <a:t>The cheapest growth is the 116 who already own a system and already refill here. Their objections are overcome. Nobody has to be sold on the idea of beer at home.</a:t>
+              <a:t>The cheapest growth is still the 116 who already own a system and already refill here. Their objections are overcome. Nobody has to be sold on the idea of beer at home.</a:t>
             </a:r>
             <a:endParaRPr lang="en-US" sz="810" dirty="0"/>
           </a:p>
@@ -8197,7 +8806,7 @@
         <p:spPr>
           <a:xfrm>
             <a:off x="438898" y="5768105"/>
-            <a:ext cx="4521737" cy="308610"/>
+            <a:ext cx="4521737" cy="462915"/>
           </a:xfrm>
           <a:prstGeom prst="rect">
             <a:avLst/>
@@ -8241,7 +8850,7 @@
                 <a:ea typeface="Poppins" pitchFamily="34" charset="-122"/>
                 <a:cs typeface="Poppins" pitchFamily="34" charset="-120"/>
               </a:rPr>
-              <a:t>Harvey Norman, Kegland and Benchy each put Tap That in front of people who have already bought the hardware.</a:t>
+              <a:t>Harvey Norman, Kegland and Benchy each put Tap That in front of people who have already bought the hardware. Justin's one-year marker is cashflow positive, with JM taking a wage.</a:t>
             </a:r>
             <a:endParaRPr lang="en-US" sz="810" dirty="0"/>
           </a:p>
@@ -8306,7 +8915,7 @@
                 <a:ea typeface="Poppins" pitchFamily="34" charset="-122"/>
                 <a:cs typeface="Poppins" pitchFamily="34" charset="-120"/>
               </a:rPr>
-              <a:t>A nine-times climb is not a marketing target, it is a distribution target. It needs partners, not posts.</a:t>
+              <a:t>The climb to 1,000 is not a marketing target, it is a distribution target. It needs partners, not posts.</a:t>
             </a:r>
             <a:endParaRPr lang="en-US" sz="700" dirty="0"/>
           </a:p>
@@ -8446,7 +9055,7 @@
         </p:nvSpPr>
         <p:spPr>
           <a:xfrm>
-            <a:off x="5298934" y="4969828"/>
+            <a:off x="5298934" y="4952469"/>
             <a:ext cx="4521737" cy="308610"/>
           </a:xfrm>
           <a:prstGeom prst="rect">
@@ -8505,7 +9114,7 @@
         </p:nvSpPr>
         <p:spPr>
           <a:xfrm>
-            <a:off x="5298934" y="5382884"/>
+            <a:off x="5298934" y="5348165"/>
             <a:ext cx="4521737" cy="308610"/>
           </a:xfrm>
           <a:prstGeom prst="rect">
@@ -8533,7 +9142,7 @@
                 <a:ea typeface="Poppins" pitchFamily="34" charset="-122"/>
                 <a:cs typeface="Poppins" pitchFamily="34" charset="-120"/>
               </a:rPr>
-              <a:t>The story is cost per schooner at home against a pub schooner at $12 to $18. </a:t>
+              <a:t>$2.55 a schooner at home, 2.5 cases for the price of one. </a:t>
             </a:r>
             <a:pPr indent="0" marL="0">
               <a:lnSpc>
@@ -8550,7 +9159,7 @@
                 <a:ea typeface="Poppins" pitchFamily="34" charset="-122"/>
                 <a:cs typeface="Poppins" pitchFamily="34" charset="-120"/>
               </a:rPr>
-              <a:t>Not sticker price on a keg.</a:t>
+              <a:t>Against $12+ at the pub and $80+ for a case at the bottleshop.</a:t>
             </a:r>
             <a:endParaRPr lang="en-US" sz="810" dirty="0"/>
           </a:p>
@@ -8564,7 +9173,7 @@
         </p:nvSpPr>
         <p:spPr>
           <a:xfrm>
-            <a:off x="5298934" y="5795939"/>
+            <a:off x="5298934" y="5743861"/>
             <a:ext cx="4521737" cy="308610"/>
           </a:xfrm>
           <a:prstGeom prst="rect">
@@ -8623,8 +9232,8 @@
         </p:nvSpPr>
         <p:spPr>
           <a:xfrm>
-            <a:off x="5298934" y="6208995"/>
-            <a:ext cx="4521737" cy="462915"/>
+            <a:off x="5298934" y="6139558"/>
+            <a:ext cx="4521737" cy="617220"/>
           </a:xfrm>
           <a:prstGeom prst="rect">
             <a:avLst/>
@@ -8668,7 +9277,7 @@
                 <a:ea typeface="Poppins" pitchFamily="34" charset="-122"/>
                 <a:cs typeface="Poppins" pitchFamily="34" charset="-120"/>
               </a:rPr>
-              <a:t>If the room becomes a destination and refills lead, one of them is paying for a shape the business no longer has. Redesign both around the refill, or drop one.</a:t>
+              <a:t>If the room becomes a destination and refills lead, one of them is paying for a shape the business no longer has. Redesign both around the refill, or drop one. Justin lists a taproom membership as a three-month item, so the tension is live.</a:t>
             </a:r>
             <a:endParaRPr lang="en-US" sz="810" dirty="0"/>
           </a:p>
@@ -8733,7 +9342,7 @@
                 <a:ea typeface="Poppins" pitchFamily="34" charset="-122"/>
                 <a:cs typeface="Poppins" pitchFamily="34" charset="-120"/>
               </a:rPr>
-              <a:t>The at-home per-schooner figure is not settled. Three different sets of maths are in circulation and one is on a live ad. Settle it before it goes in any collateral.</a:t>
+              <a:t>The open item is no longer which maths, it is making sure the live ad and every piece of collateral carry $2.55.</a:t>
             </a:r>
             <a:endParaRPr lang="en-US" sz="700" dirty="0"/>
           </a:p>
@@ -8842,7 +9451,7 @@
                 <a:ea typeface="Poppins" pitchFamily="34" charset="-122"/>
                 <a:cs typeface="Poppins" pitchFamily="34" charset="-120"/>
               </a:rPr>
-              <a:t>Christy raised it. Tap That pushed back. No decision was taken.</a:t>
+              <a:t>Christy raised it. Tap That pushed back. It is not in Justin's plan.</a:t>
             </a:r>
             <a:endParaRPr lang="en-US" sz="920" dirty="0"/>
           </a:p>
@@ -8857,7 +9466,7 @@
         <p:spPr>
           <a:xfrm>
             <a:off x="10158970" y="4883612"/>
-            <a:ext cx="4521737" cy="462915"/>
+            <a:ext cx="4521737" cy="308610"/>
           </a:xfrm>
           <a:prstGeom prst="rect">
             <a:avLst/>
@@ -8901,7 +9510,7 @@
                 <a:ea typeface="Poppins" pitchFamily="34" charset="-122"/>
                 <a:cs typeface="Poppins" pitchFamily="34" charset="-120"/>
               </a:rPr>
-              <a:t>a bottle shop is where people who drink beer find out the brand exists at all, which no amount of keg marketing reaches. It also opens bars and restaurants that will not give up a tap, and shipping cans goes further than shipping kegs.</a:t>
+              <a:t>a bottle shop is where people find out the brand exists, which no keg marketing reaches. It also opens bars and restaurants that will not give up a tap.</a:t>
             </a:r>
             <a:endParaRPr lang="en-US" sz="810" dirty="0"/>
           </a:p>
@@ -8915,8 +9524,8 @@
         </p:nvSpPr>
         <p:spPr>
           <a:xfrm>
-            <a:off x="10158970" y="5512127"/>
-            <a:ext cx="4521737" cy="617220"/>
+            <a:off x="10158970" y="5357822"/>
+            <a:ext cx="4521737" cy="308610"/>
           </a:xfrm>
           <a:prstGeom prst="rect">
             <a:avLst/>
@@ -8960,7 +9569,7 @@
                 <a:ea typeface="Poppins" pitchFamily="34" charset="-122"/>
                 <a:cs typeface="Poppins" pitchFamily="34" charset="-120"/>
               </a:rPr>
-              <a:t>low margin, high effort, and it competes directly with the refill model this plan is built on. Tap That has already priced a small line at eight cans a minute and parked it, on the grounds that it adds a thing to a business that is not yet nailing the things it has.</a:t>
+              <a:t>low margin, high effort, and it competes directly with the refill model this plan is built on. Tap That has already priced a small line and parked it.</a:t>
             </a:r>
             <a:endParaRPr lang="en-US" sz="810" dirty="0"/>
           </a:p>
@@ -8974,7 +9583,7 @@
         </p:nvSpPr>
         <p:spPr>
           <a:xfrm>
-            <a:off x="10158970" y="6294947"/>
+            <a:off x="10158970" y="5832032"/>
             <a:ext cx="4521737" cy="308610"/>
           </a:xfrm>
           <a:prstGeom prst="rect">
@@ -9019,7 +9628,7 @@
                 <a:ea typeface="Poppins" pitchFamily="34" charset="-122"/>
                 <a:cs typeface="Poppins" pitchFamily="34" charset="-120"/>
               </a:rPr>
-              <a:t>a costed run through the cannery contact next door, priced against Earth Brew at about $36 a four-pack. Premium small batch, not a price fight.</a:t>
+              <a:t>a costed run through the cannery contact next door, priced against Earth Brew at about $36 a four-pack.</a:t>
             </a:r>
             <a:endParaRPr lang="en-US" sz="810" dirty="0"/>
           </a:p>
@@ -9218,7 +9827,7 @@
                 <a:ea typeface="Poppins" pitchFamily="34" charset="-122"/>
                 <a:cs typeface="Poppins" pitchFamily="34" charset="-120"/>
               </a:rPr>
-              <a:t>Pause walk-in trading? </a:t>
+              <a:t>The three-way shape question. </a:t>
             </a:r>
             <a:pPr indent="0" marL="0">
               <a:lnSpc>
@@ -9235,7 +9844,7 @@
                 <a:ea typeface="Poppins" pitchFamily="34" charset="-122"/>
                 <a:cs typeface="Poppins" pitchFamily="34" charset="-120"/>
               </a:rPr>
-              <a:t>Owner: Justin. The rest of the plan assumes yes.</a:t>
+              <a:t>Taproom, showroom or event space. Owner: Justin.</a:t>
             </a:r>
             <a:endParaRPr lang="en-US" sz="800" dirty="0"/>
           </a:p>
@@ -9249,7 +9858,7 @@
         </p:nvSpPr>
         <p:spPr>
           <a:xfrm>
-            <a:off x="438898" y="8427093"/>
+            <a:off x="438898" y="8305043"/>
             <a:ext cx="50400" cy="50400"/>
           </a:xfrm>
           <a:prstGeom prst="rect">
@@ -9274,7 +9883,7 @@
         </p:nvSpPr>
         <p:spPr>
           <a:xfrm>
-            <a:off x="546898" y="8381783"/>
+            <a:off x="546898" y="8259732"/>
             <a:ext cx="6843755" cy="148336"/>
           </a:xfrm>
           <a:prstGeom prst="rect">
@@ -9302,7 +9911,7 @@
                 <a:ea typeface="Poppins" pitchFamily="34" charset="-122"/>
                 <a:cs typeface="Poppins" pitchFamily="34" charset="-120"/>
               </a:rPr>
-              <a:t>Fund a wholesale role? </a:t>
+              <a:t>Residential vs commercial. </a:t>
             </a:r>
             <a:pPr indent="0" marL="0">
               <a:lnSpc>
@@ -9319,7 +9928,7 @@
                 <a:ea typeface="Poppins" pitchFamily="34" charset="-122"/>
                 <a:cs typeface="Poppins" pitchFamily="34" charset="-120"/>
               </a:rPr>
-              <a:t>Full-timer or commissioned agent, with KPIs either way.</a:t>
+              <a:t>Where the energy goes.</a:t>
             </a:r>
             <a:endParaRPr lang="en-US" sz="800" dirty="0"/>
           </a:p>
@@ -9333,7 +9942,7 @@
         </p:nvSpPr>
         <p:spPr>
           <a:xfrm>
-            <a:off x="438898" y="9037347"/>
+            <a:off x="438898" y="8793245"/>
             <a:ext cx="50400" cy="50400"/>
           </a:xfrm>
           <a:prstGeom prst="rect">
@@ -9358,7 +9967,7 @@
         </p:nvSpPr>
         <p:spPr>
           <a:xfrm>
-            <a:off x="546898" y="8992036"/>
+            <a:off x="546898" y="8747935"/>
             <a:ext cx="6843755" cy="148336"/>
           </a:xfrm>
           <a:prstGeom prst="rect">
@@ -9386,7 +9995,7 @@
                 <a:ea typeface="Poppins" pitchFamily="34" charset="-122"/>
                 <a:cs typeface="Poppins" pitchFamily="34" charset="-120"/>
               </a:rPr>
-              <a:t>Attach membership to every system sale? </a:t>
+              <a:t>External support vs in-house. </a:t>
             </a:r>
             <a:pPr indent="0" marL="0">
               <a:lnSpc>
@@ -9403,7 +10012,7 @@
                 <a:ea typeface="Poppins" pitchFamily="34" charset="-122"/>
                 <a:cs typeface="Poppins" pitchFamily="34" charset="-120"/>
               </a:rPr>
-              <a:t>Retention maths says yes.</a:t>
+              <a:t>Do it ourselves or bring it in.</a:t>
             </a:r>
             <a:endParaRPr lang="en-US" sz="800" dirty="0"/>
           </a:p>
@@ -9417,7 +10026,7 @@
         </p:nvSpPr>
         <p:spPr>
           <a:xfrm>
-            <a:off x="438898" y="9647600"/>
+            <a:off x="438898" y="9281448"/>
             <a:ext cx="50400" cy="50400"/>
           </a:xfrm>
           <a:prstGeom prst="rect">
@@ -9442,7 +10051,7 @@
         </p:nvSpPr>
         <p:spPr>
           <a:xfrm>
-            <a:off x="546898" y="9602290"/>
+            <a:off x="546898" y="9236138"/>
             <a:ext cx="6843755" cy="148336"/>
           </a:xfrm>
           <a:prstGeom prst="rect">
@@ -9470,7 +10079,7 @@
                 <a:ea typeface="Poppins" pitchFamily="34" charset="-122"/>
                 <a:cs typeface="Poppins" pitchFamily="34" charset="-120"/>
               </a:rPr>
-              <a:t>Commission the canning feasibility? </a:t>
+              <a:t>Next hire. </a:t>
             </a:r>
             <a:pPr indent="0" marL="0">
               <a:lnSpc>
@@ -9487,7 +10096,7 @@
                 <a:ea typeface="Poppins" pitchFamily="34" charset="-122"/>
                 <a:cs typeface="Poppins" pitchFamily="34" charset="-120"/>
               </a:rPr>
-              <a:t>A number, not an opinion.</a:t>
+              <a:t>Brewer vs wholesale plus bar coverage, hybrid.</a:t>
             </a:r>
             <a:endParaRPr lang="en-US" sz="800" dirty="0"/>
           </a:p>
@@ -9501,7 +10110,7 @@
         </p:nvSpPr>
         <p:spPr>
           <a:xfrm>
-            <a:off x="438898" y="10257854"/>
+            <a:off x="438898" y="9769651"/>
             <a:ext cx="50400" cy="50400"/>
           </a:xfrm>
           <a:prstGeom prst="rect">
@@ -9526,6 +10135,90 @@
         </p:nvSpPr>
         <p:spPr>
           <a:xfrm>
+            <a:off x="546898" y="9724340"/>
+            <a:ext cx="6843755" cy="148336"/>
+          </a:xfrm>
+          <a:prstGeom prst="rect">
+            <a:avLst/>
+          </a:prstGeom>
+          <a:noFill/>
+          <a:ln/>
+        </p:spPr>
+        <p:txBody>
+          <a:bodyPr wrap="square" lIns="0" tIns="0" rIns="0" bIns="0" rtlCol="0" anchor="t"/>
+          <a:lstStyle/>
+          <a:p>
+            <a:pPr indent="0" marL="0">
+              <a:lnSpc>
+                <a:spcPts val="1168"/>
+              </a:lnSpc>
+              <a:buNone/>
+            </a:pPr>
+            <a:r>
+              <a:rPr lang="en-US" sz="800" b="1" dirty="0">
+                <a:solidFill>
+                  <a:srgbClr val="0E171F"/>
+                </a:solidFill>
+                <a:latin typeface="Poppins" pitchFamily="34" charset="0"/>
+                <a:ea typeface="Poppins" pitchFamily="34" charset="-122"/>
+                <a:cs typeface="Poppins" pitchFamily="34" charset="-120"/>
+              </a:rPr>
+              <a:t>KPIs and growth targets. </a:t>
+            </a:r>
+            <a:pPr indent="0" marL="0">
+              <a:lnSpc>
+                <a:spcPts val="1168"/>
+              </a:lnSpc>
+              <a:buNone/>
+            </a:pPr>
+            <a:r>
+              <a:rPr lang="en-US" sz="800" dirty="0">
+                <a:solidFill>
+                  <a:srgbClr val="4A5565"/>
+                </a:solidFill>
+                <a:latin typeface="Poppins" pitchFamily="34" charset="0"/>
+                <a:ea typeface="Poppins" pitchFamily="34" charset="-122"/>
+                <a:cs typeface="Poppins" pitchFamily="34" charset="-120"/>
+              </a:rPr>
+              <a:t>Keg system sales, active keg refillers, wholesale accounts.</a:t>
+            </a:r>
+            <a:endParaRPr lang="en-US" sz="800" dirty="0"/>
+          </a:p>
+        </p:txBody>
+      </p:sp>
+      <p:sp>
+        <p:nvSpPr>
+          <p:cNvPr id="70" name="Shape 65"/>
+          <p:cNvSpPr/>
+          <p:nvPr/>
+        </p:nvSpPr>
+        <p:spPr>
+          <a:xfrm>
+            <a:off x="438898" y="10257854"/>
+            <a:ext cx="50400" cy="50400"/>
+          </a:xfrm>
+          <a:prstGeom prst="rect">
+            <a:avLst/>
+          </a:prstGeom>
+          <a:solidFill>
+            <a:srgbClr val="0066FF"/>
+          </a:solidFill>
+          <a:ln w="12700">
+            <a:solidFill>
+              <a:srgbClr val="333333"/>
+            </a:solidFill>
+            <a:prstDash val="solid"/>
+          </a:ln>
+        </p:spPr>
+      </p:sp>
+      <p:sp>
+        <p:nvSpPr>
+          <p:cNvPr id="71" name="Text 66"/>
+          <p:cNvSpPr txBox="1"/>
+          <p:nvPr/>
+        </p:nvSpPr>
+        <p:spPr>
+          <a:xfrm>
             <a:off x="546898" y="10212543"/>
             <a:ext cx="6843755" cy="148336"/>
           </a:xfrm>
@@ -9554,7 +10247,7 @@
                 <a:ea typeface="Poppins" pitchFamily="34" charset="-122"/>
                 <a:cs typeface="Poppins" pitchFamily="34" charset="-120"/>
               </a:rPr>
-              <a:t>Settle the per-schooner figure. </a:t>
+              <a:t>Settle $2.55. </a:t>
             </a:r>
             <a:pPr indent="0" marL="0">
               <a:lnSpc>
@@ -9571,7 +10264,7 @@
                 <a:ea typeface="Poppins" pitchFamily="34" charset="-122"/>
                 <a:cs typeface="Poppins" pitchFamily="34" charset="-120"/>
               </a:rPr>
-              <a:t>Then pull or correct the live ad.</a:t>
+              <a:t>The number on the live ad.</a:t>
             </a:r>
             <a:endParaRPr lang="en-US" sz="800" dirty="0"/>
           </a:p>
@@ -9579,7 +10272,7 @@
       </p:sp>
       <p:sp>
         <p:nvSpPr>
-          <p:cNvPr id="70" name="Shape 65"/>
+          <p:cNvPr id="72" name="Shape 67"/>
           <p:cNvSpPr/>
           <p:nvPr/>
         </p:nvSpPr>
@@ -9604,7 +10297,7 @@
       </p:sp>
       <p:sp>
         <p:nvSpPr>
-          <p:cNvPr id="71" name="Text 66"/>
+          <p:cNvPr id="73" name="Text 68"/>
           <p:cNvSpPr txBox="1"/>
           <p:nvPr/>
         </p:nvSpPr>
@@ -9646,7 +10339,7 @@
       </p:sp>
       <p:sp>
         <p:nvSpPr>
-          <p:cNvPr id="72" name="Shape 67"/>
+          <p:cNvPr id="74" name="Shape 69"/>
           <p:cNvSpPr/>
           <p:nvPr/>
         </p:nvSpPr>
@@ -9671,7 +10364,7 @@
       </p:sp>
       <p:sp>
         <p:nvSpPr>
-          <p:cNvPr id="73" name="Text 68"/>
+          <p:cNvPr id="75" name="Text 70"/>
           <p:cNvSpPr txBox="1"/>
           <p:nvPr/>
         </p:nvSpPr>
@@ -9730,13 +10423,13 @@
       </p:sp>
       <p:sp>
         <p:nvSpPr>
-          <p:cNvPr id="74" name="Shape 69"/>
+          <p:cNvPr id="76" name="Shape 71"/>
           <p:cNvSpPr/>
           <p:nvPr/>
         </p:nvSpPr>
         <p:spPr>
           <a:xfrm>
-            <a:off x="7728952" y="8549706"/>
+            <a:off x="7728952" y="8500261"/>
             <a:ext cx="50400" cy="50400"/>
           </a:xfrm>
           <a:prstGeom prst="rect">
@@ -9755,13 +10448,13 @@
       </p:sp>
       <p:sp>
         <p:nvSpPr>
-          <p:cNvPr id="75" name="Text 70"/>
+          <p:cNvPr id="77" name="Text 72"/>
           <p:cNvSpPr txBox="1"/>
           <p:nvPr/>
         </p:nvSpPr>
         <p:spPr>
           <a:xfrm>
-            <a:off x="7836952" y="8504396"/>
+            <a:off x="7836952" y="8454950"/>
             <a:ext cx="6843755" cy="148336"/>
           </a:xfrm>
           <a:prstGeom prst="rect">
@@ -9814,13 +10507,13 @@
       </p:sp>
       <p:sp>
         <p:nvSpPr>
-          <p:cNvPr id="76" name="Shape 71"/>
+          <p:cNvPr id="78" name="Shape 73"/>
           <p:cNvSpPr/>
           <p:nvPr/>
         </p:nvSpPr>
         <p:spPr>
           <a:xfrm>
-            <a:off x="7728952" y="9282572"/>
+            <a:off x="7728952" y="9183682"/>
             <a:ext cx="50400" cy="50400"/>
           </a:xfrm>
           <a:prstGeom prst="rect">
@@ -9839,14 +10532,14 @@
       </p:sp>
       <p:sp>
         <p:nvSpPr>
-          <p:cNvPr id="77" name="Text 72"/>
+          <p:cNvPr id="79" name="Text 74"/>
           <p:cNvSpPr txBox="1"/>
           <p:nvPr/>
         </p:nvSpPr>
         <p:spPr>
           <a:xfrm>
-            <a:off x="7836952" y="9237262"/>
-            <a:ext cx="6843755" cy="148336"/>
+            <a:off x="7836952" y="9138371"/>
+            <a:ext cx="6843755" cy="296672"/>
           </a:xfrm>
           <a:prstGeom prst="rect">
             <a:avLst/>
@@ -9873,7 +10566,7 @@
                 <a:ea typeface="Poppins" pitchFamily="34" charset="-122"/>
                 <a:cs typeface="Poppins" pitchFamily="34" charset="-120"/>
               </a:rPr>
-              <a:t>Cutting the range too fast. </a:t>
+              <a:t>Chris is trapped in production. </a:t>
             </a:r>
             <a:pPr indent="0" marL="0">
               <a:lnSpc>
@@ -9890,7 +10583,7 @@
                 <a:ea typeface="Poppins" pitchFamily="34" charset="-122"/>
                 <a:cs typeface="Poppins" pitchFamily="34" charset="-120"/>
               </a:rPr>
-              <a:t>The tail costs money, but some of it is why people come.</a:t>
+              <a:t>Justin's words: highly valued and intelligent, but the business needs his time and knowledge freed up.</a:t>
             </a:r>
             <a:endParaRPr lang="en-US" sz="800" dirty="0"/>
           </a:p>
@@ -9898,7 +10591,7 @@
       </p:sp>
       <p:sp>
         <p:nvSpPr>
-          <p:cNvPr id="78" name="Shape 73"/>
+          <p:cNvPr id="80" name="Shape 75"/>
           <p:cNvSpPr/>
           <p:nvPr/>
         </p:nvSpPr>
@@ -9923,7 +10616,7 @@
       </p:sp>
       <p:sp>
         <p:nvSpPr>
-          <p:cNvPr id="79" name="Text 74"/>
+          <p:cNvPr id="81" name="Text 76"/>
           <p:cNvSpPr txBox="1"/>
           <p:nvPr/>
         </p:nvSpPr>
@@ -9982,7 +10675,7 @@
       </p:sp>
       <p:sp>
         <p:nvSpPr>
-          <p:cNvPr id="80" name="Shape 75"/>
+          <p:cNvPr id="82" name="Shape 77"/>
           <p:cNvSpPr/>
           <p:nvPr/>
         </p:nvSpPr>
@@ -10005,7 +10698,7 @@
       </p:sp>
       <p:sp>
         <p:nvSpPr>
-          <p:cNvPr id="81" name="Text 76"/>
+          <p:cNvPr id="83" name="Text 78"/>
           <p:cNvSpPr txBox="1"/>
           <p:nvPr/>
         </p:nvSpPr>
@@ -10172,8 +10865,8 @@
         </p:nvSpPr>
         <p:spPr>
           <a:xfrm>
-            <a:off x="12693129" y="365760"/>
-            <a:ext cx="1150475" cy="251460"/>
+            <a:off x="12678246" y="365760"/>
+            <a:ext cx="1165358" cy="251460"/>
           </a:xfrm>
           <a:prstGeom prst="roundRect">
             <a:avLst>
@@ -10199,8 +10892,8 @@
         </p:nvSpPr>
         <p:spPr>
           <a:xfrm>
-            <a:off x="12693129" y="365760"/>
-            <a:ext cx="1150475" cy="251460"/>
+            <a:off x="12678246" y="365760"/>
+            <a:ext cx="1165358" cy="251460"/>
           </a:xfrm>
           <a:prstGeom prst="rect">
             <a:avLst/>
@@ -10224,7 +10917,7 @@
                 <a:ea typeface="Poppins" pitchFamily="34" charset="-122"/>
                 <a:cs typeface="Poppins" pitchFamily="34" charset="-120"/>
               </a:rPr>
-              <a:t>V01 · 15 SEPT 2026</a:t>
+              <a:t>V02 · 16 SEPT 2026</a:t>
             </a:r>
             <a:endParaRPr lang="en-US" sz="650" dirty="0"/>
           </a:p>
@@ -10238,7 +10931,7 @@
         </p:nvSpPr>
         <p:spPr>
           <a:xfrm>
-            <a:off x="11385086" y="365760"/>
+            <a:off x="11370203" y="365760"/>
             <a:ext cx="1218043" cy="251460"/>
           </a:xfrm>
           <a:prstGeom prst="roundRect">
@@ -10265,7 +10958,7 @@
         </p:nvSpPr>
         <p:spPr>
           <a:xfrm>
-            <a:off x="11385086" y="365760"/>
+            <a:off x="11370203" y="365760"/>
             <a:ext cx="1218043" cy="251460"/>
           </a:xfrm>
           <a:prstGeom prst="rect">
@@ -10304,7 +10997,7 @@
         </p:nvSpPr>
         <p:spPr>
           <a:xfrm>
-            <a:off x="10327967" y="365760"/>
+            <a:off x="10313084" y="365760"/>
             <a:ext cx="967119" cy="251460"/>
           </a:xfrm>
           <a:prstGeom prst="roundRect">
@@ -10331,7 +11024,7 @@
         </p:nvSpPr>
         <p:spPr>
           <a:xfrm>
-            <a:off x="10327967" y="365760"/>
+            <a:off x="10313084" y="365760"/>
             <a:ext cx="967119" cy="251460"/>
           </a:xfrm>
           <a:prstGeom prst="rect">
@@ -10528,7 +11221,7 @@
         <p:spPr>
           <a:xfrm>
             <a:off x="438898" y="1928317"/>
-            <a:ext cx="5736746" cy="308610"/>
+            <a:ext cx="5736746" cy="462915"/>
           </a:xfrm>
           <a:prstGeom prst="rect">
             <a:avLst/>
@@ -10547,6 +11240,23 @@
               <a:buNone/>
             </a:pPr>
             <a:r>
+              <a:rPr lang="en-US" sz="810" b="1" dirty="0">
+                <a:solidFill>
+                  <a:srgbClr val="0E171F"/>
+                </a:solidFill>
+                <a:latin typeface="Poppins" pitchFamily="34" charset="0"/>
+                <a:ea typeface="Poppins" pitchFamily="34" charset="-122"/>
+                <a:cs typeface="Poppins" pitchFamily="34" charset="-120"/>
+              </a:rPr>
+              <a:t>"Every household in Australia deserves beer on tap." </a:t>
+            </a:r>
+            <a:pPr indent="0" marL="0">
+              <a:lnSpc>
+                <a:spcPts val="1215"/>
+              </a:lnSpc>
+              <a:buNone/>
+            </a:pPr>
+            <a:r>
               <a:rPr lang="en-US" sz="810" dirty="0">
                 <a:solidFill>
                   <a:srgbClr val="4A5565"/>
@@ -10555,7 +11265,7 @@
                 <a:ea typeface="Poppins" pitchFamily="34" charset="-122"/>
                 <a:cs typeface="Poppins" pitchFamily="34" charset="-120"/>
               </a:rPr>
-              <a:t>Tap That is not a brewery that also delivers. It is the way a household stops paying pub prices. That framing changes who the competitor is, what the range should be, and who the marketing is talking to.</a:t>
+              <a:t>Justin's own line, and the goal is bringing people together. Catching up with friends at a venue is stressful, rushed and expensive. Catching up at home is made easy: pub-quality beer and non-beer on tap, and a set-up that is the envy of your friends.</a:t>
             </a:r>
             <a:endParaRPr lang="en-US" sz="810" dirty="0"/>
           </a:p>
@@ -10569,7 +11279,7 @@
         </p:nvSpPr>
         <p:spPr>
           <a:xfrm>
-            <a:off x="438898" y="2342562"/>
+            <a:off x="438898" y="2496867"/>
             <a:ext cx="5736746" cy="308610"/>
           </a:xfrm>
           <a:prstGeom prst="rect">
@@ -10611,8 +11321,8 @@
         </p:nvSpPr>
         <p:spPr>
           <a:xfrm>
-            <a:off x="438898" y="2756807"/>
-            <a:ext cx="5736746" cy="462915"/>
+            <a:off x="438898" y="2911112"/>
+            <a:ext cx="5736746" cy="308610"/>
           </a:xfrm>
           <a:prstGeom prst="rect">
             <a:avLst/>
@@ -10656,7 +11366,7 @@
                 <a:ea typeface="Poppins" pitchFamily="34" charset="-122"/>
                 <a:cs typeface="Poppins" pitchFamily="34" charset="-120"/>
               </a:rPr>
-              <a:t>Christy's example was a New York restaurant that benchmarked where everyone else was weakest, found it was beer, and made beer the thing it celebrated. The pub does beer at home badly. That is the same gap.</a:t>
+              <a:t>The pub does beer at home badly. That is the gap.</a:t>
             </a:r>
             <a:endParaRPr lang="en-US" sz="810" dirty="0"/>
           </a:p>
@@ -10803,7 +11513,7 @@
         <p:spPr>
           <a:xfrm>
             <a:off x="6513943" y="1400636"/>
-            <a:ext cx="8166764" cy="161239"/>
+            <a:ext cx="8166764" cy="322478"/>
           </a:xfrm>
           <a:prstGeom prst="rect">
             <a:avLst/>
@@ -10830,7 +11540,7 @@
                 <a:ea typeface="Poppins" pitchFamily="34" charset="-122"/>
                 <a:cs typeface="Poppins" pitchFamily="34" charset="-120"/>
               </a:rPr>
-              <a:t>Overpriced pubs. Not the duopoly, not A&amp;A, not the keg delivery operators.</a:t>
+              <a:t>Pubs at $12+ a schooner, bottleshops at $80+ a case, and home brew supply stores. Not the duopoly, not A&amp;A, not the keg delivery operators.</a:t>
             </a:r>
             <a:endParaRPr lang="en-US" sz="920" dirty="0"/>
           </a:p>
@@ -10844,7 +11554,7 @@
         </p:nvSpPr>
         <p:spPr>
           <a:xfrm>
-            <a:off x="6513943" y="1727475"/>
+            <a:off x="6513943" y="1888714"/>
             <a:ext cx="8166764" cy="308610"/>
           </a:xfrm>
           <a:prstGeom prst="rect">
@@ -10872,7 +11582,7 @@
                 <a:ea typeface="Poppins" pitchFamily="34" charset="-122"/>
                 <a:cs typeface="Poppins" pitchFamily="34" charset="-120"/>
               </a:rPr>
-              <a:t>Every price conversation should be unit economics against a </a:t>
+              <a:t>Justin's own words: </a:t>
             </a:r>
             <a:pPr indent="0" marL="0">
               <a:lnSpc>
@@ -10889,7 +11599,7 @@
                 <a:ea typeface="Poppins" pitchFamily="34" charset="-122"/>
                 <a:cs typeface="Poppins" pitchFamily="34" charset="-120"/>
               </a:rPr>
-              <a:t>$12 to $18 pub schooner</a:t>
+              <a:t>the more people drinking craft beer and not XXXX, the better. </a:t>
             </a:r>
             <a:pPr indent="0" marL="0">
               <a:lnSpc>
@@ -10906,7 +11616,41 @@
                 <a:ea typeface="Poppins" pitchFamily="34" charset="-122"/>
                 <a:cs typeface="Poppins" pitchFamily="34" charset="-120"/>
               </a:rPr>
-              <a:t>. Being dearer than another keg supplier is defensible. Losing a sticker fight is not, and A&amp;A cannot be beaten on sticker without giving away the margin this business runs on.</a:t>
+              <a:t>Other breweries are not the enemy. Every price conversation should be unit economics: </a:t>
+            </a:r>
+            <a:pPr indent="0" marL="0">
+              <a:lnSpc>
+                <a:spcPts val="1215"/>
+              </a:lnSpc>
+              <a:buNone/>
+            </a:pPr>
+            <a:r>
+              <a:rPr lang="en-US" sz="810" b="1" dirty="0">
+                <a:solidFill>
+                  <a:srgbClr val="0E171F"/>
+                </a:solidFill>
+                <a:latin typeface="Poppins" pitchFamily="34" charset="0"/>
+                <a:ea typeface="Poppins" pitchFamily="34" charset="-122"/>
+                <a:cs typeface="Poppins" pitchFamily="34" charset="-120"/>
+              </a:rPr>
+              <a:t>$2.55 a schooner at home against $12+ at the pub</a:t>
+            </a:r>
+            <a:pPr indent="0" marL="0">
+              <a:lnSpc>
+                <a:spcPts val="1215"/>
+              </a:lnSpc>
+              <a:buNone/>
+            </a:pPr>
+            <a:r>
+              <a:rPr lang="en-US" sz="810" dirty="0">
+                <a:solidFill>
+                  <a:srgbClr val="4A5565"/>
+                </a:solidFill>
+                <a:latin typeface="Poppins" pitchFamily="34" charset="0"/>
+                <a:ea typeface="Poppins" pitchFamily="34" charset="-122"/>
+                <a:cs typeface="Poppins" pitchFamily="34" charset="-120"/>
+              </a:rPr>
+              <a:t>, 2.5 cases for the price of one.</a:t>
             </a:r>
             <a:endParaRPr lang="en-US" sz="810" dirty="0"/>
           </a:p>
@@ -10920,7 +11664,7 @@
         </p:nvSpPr>
         <p:spPr>
           <a:xfrm>
-            <a:off x="6513943" y="2201685"/>
+            <a:off x="6513943" y="2362924"/>
             <a:ext cx="8166764" cy="154305"/>
           </a:xfrm>
           <a:prstGeom prst="rect">
@@ -10979,8 +11723,8 @@
         </p:nvSpPr>
         <p:spPr>
           <a:xfrm>
-            <a:off x="6513943" y="2521590"/>
-            <a:ext cx="8166764" cy="308610"/>
+            <a:off x="6513943" y="2682829"/>
+            <a:ext cx="8166764" cy="154305"/>
           </a:xfrm>
           <a:prstGeom prst="rect">
             <a:avLst/>
@@ -11024,7 +11768,7 @@
                 <a:ea typeface="Poppins" pitchFamily="34" charset="-122"/>
                 <a:cs typeface="Poppins" pitchFamily="34" charset="-120"/>
               </a:rPr>
-              <a:t>and they have merged with Burleigh Homebrew. The competitor that set the price anchor is not in good health, which makes following them down worse than pointless.</a:t>
+              <a:t>and they have merged with Burleigh Homebrew. Following a competitor in that state down on price is worse than pointless.</a:t>
             </a:r>
             <a:endParaRPr lang="en-US" sz="810" dirty="0"/>
           </a:p>
@@ -11089,7 +11833,7 @@
                 <a:ea typeface="Poppins" pitchFamily="34" charset="-122"/>
                 <a:cs typeface="Poppins" pitchFamily="34" charset="-120"/>
               </a:rPr>
-              <a:t>The at-home per-schooner figure still needs settling. Use the comparison, not a number, until it is.</a:t>
+              <a:t>The at-home figure is settled: $2.55 a schooner. Every piece of collateral and the live ad should carry it.</a:t>
             </a:r>
             <a:endParaRPr lang="en-US" sz="700" dirty="0"/>
           </a:p>
@@ -11521,8 +12265,8 @@
         </p:nvSpPr>
         <p:spPr>
           <a:xfrm>
-            <a:off x="5298934" y="4473272"/>
-            <a:ext cx="4521737" cy="462915"/>
+            <a:off x="5298934" y="4465361"/>
+            <a:ext cx="4521737" cy="771525"/>
           </a:xfrm>
           <a:prstGeom prst="rect">
             <a:avLst/>
@@ -11566,7 +12310,24 @@
                 <a:ea typeface="Poppins" pitchFamily="34" charset="-122"/>
                 <a:cs typeface="Poppins" pitchFamily="34" charset="-120"/>
               </a:rPr>
-              <a:t>if women are not coming, men will not follow.</a:t>
+              <a:t>if women are not coming, men will not follow. </a:t>
+            </a:r>
+            <a:pPr indent="0" marL="0">
+              <a:lnSpc>
+                <a:spcPts val="1215"/>
+              </a:lnSpc>
+              <a:buNone/>
+            </a:pPr>
+            <a:r>
+              <a:rPr lang="en-US" sz="810" dirty="0">
+                <a:solidFill>
+                  <a:srgbClr val="4A5565"/>
+                </a:solidFill>
+                <a:latin typeface="Poppins" pitchFamily="34" charset="0"/>
+                <a:ea typeface="Poppins" pitchFamily="34" charset="-122"/>
+                <a:cs typeface="Poppins" pitchFamily="34" charset="-120"/>
+              </a:rPr>
+              <a:t>Justin's target segments, sharehouses, DINKs, young families, baby boomers, high-volume drinkers, cashed-up tradies, are households, and designing for her is how those households say yes.</a:t>
             </a:r>
             <a:endParaRPr lang="en-US" sz="810" dirty="0"/>
           </a:p>
@@ -11580,7 +12341,7 @@
         </p:nvSpPr>
         <p:spPr>
           <a:xfrm>
-            <a:off x="5298934" y="5101787"/>
+            <a:off x="5298934" y="5394575"/>
             <a:ext cx="4521737" cy="462915"/>
           </a:xfrm>
           <a:prstGeom prst="rect">
@@ -11639,7 +12400,7 @@
         </p:nvSpPr>
         <p:spPr>
           <a:xfrm>
-            <a:off x="5298934" y="5730302"/>
+            <a:off x="5298934" y="6015179"/>
             <a:ext cx="4521737" cy="462915"/>
           </a:xfrm>
           <a:prstGeom prst="rect">
@@ -11914,7 +12675,7 @@
         </p:nvSpPr>
         <p:spPr>
           <a:xfrm>
-            <a:off x="10158970" y="4948855"/>
+            <a:off x="10158970" y="4884847"/>
             <a:ext cx="50400" cy="50400"/>
           </a:xfrm>
           <a:prstGeom prst="rect">
@@ -11939,8 +12700,8 @@
         </p:nvSpPr>
         <p:spPr>
           <a:xfrm>
-            <a:off x="10266970" y="4913704"/>
-            <a:ext cx="4413737" cy="128016"/>
+            <a:off x="10266970" y="4849696"/>
+            <a:ext cx="4413737" cy="256032"/>
           </a:xfrm>
           <a:prstGeom prst="rect">
             <a:avLst/>
@@ -11967,7 +12728,7 @@
                 <a:ea typeface="Poppins" pitchFamily="34" charset="-122"/>
                 <a:cs typeface="Poppins" pitchFamily="34" charset="-120"/>
               </a:rPr>
-              <a:t>Fits any system. </a:t>
+              <a:t>Fits any system, no CO2 with Talos kegs. </a:t>
             </a:r>
             <a:pPr indent="0" marL="0">
               <a:lnSpc>
@@ -11984,7 +12745,7 @@
                 <a:ea typeface="Poppins" pitchFamily="34" charset="-122"/>
                 <a:cs typeface="Poppins" pitchFamily="34" charset="-120"/>
               </a:rPr>
-              <a:t>A buying objection answered, currently below the fold.</a:t>
+              <a:t>Two buying objections answered, both currently below the fold.</a:t>
             </a:r>
             <a:endParaRPr lang="en-US" sz="720" dirty="0"/>
           </a:p>
@@ -12051,7 +12812,7 @@
                 <a:ea typeface="Poppins" pitchFamily="34" charset="-122"/>
                 <a:cs typeface="Poppins" pitchFamily="34" charset="-120"/>
               </a:rPr>
-              <a:t>No CO2 with Talos kegs. </a:t>
+              <a:t>1,000 giveaway entries and strong reviews. </a:t>
             </a:r>
             <a:pPr indent="0" marL="0">
               <a:lnSpc>
@@ -12068,7 +12829,7 @@
                 <a:ea typeface="Poppins" pitchFamily="34" charset="-122"/>
                 <a:cs typeface="Poppins" pitchFamily="34" charset="-120"/>
               </a:rPr>
-              <a:t>Gas bottle management is a real barrier for new owners and this removes it.</a:t>
+              <a:t>Demand for the hardware is demonstrated, and the reviews are present but unpromoted and invisible to AI search.</a:t>
             </a:r>
             <a:endParaRPr lang="en-US" sz="720" dirty="0"/>
           </a:p>
@@ -12082,7 +12843,7 @@
         </p:nvSpPr>
         <p:spPr>
           <a:xfrm>
-            <a:off x="10158970" y="6355382"/>
+            <a:off x="10158970" y="6291374"/>
             <a:ext cx="50400" cy="50400"/>
           </a:xfrm>
           <a:prstGeom prst="rect">
@@ -12107,8 +12868,8 @@
         </p:nvSpPr>
         <p:spPr>
           <a:xfrm>
-            <a:off x="10266970" y="6320231"/>
-            <a:ext cx="4413737" cy="128016"/>
+            <a:off x="10266970" y="6256223"/>
+            <a:ext cx="4413737" cy="256032"/>
           </a:xfrm>
           <a:prstGeom prst="rect">
             <a:avLst/>
@@ -12135,7 +12896,7 @@
                 <a:ea typeface="Poppins" pitchFamily="34" charset="-122"/>
                 <a:cs typeface="Poppins" pitchFamily="34" charset="-120"/>
               </a:rPr>
-              <a:t>1,000 giveaway entries. </a:t>
+              <a:t>Named brand ambassadors and UGC providers. </a:t>
             </a:r>
             <a:pPr indent="0" marL="0">
               <a:lnSpc>
@@ -12152,7 +12913,7 @@
                 <a:ea typeface="Poppins" pitchFamily="34" charset="-122"/>
                 <a:cs typeface="Poppins" pitchFamily="34" charset="-120"/>
               </a:rPr>
-              <a:t>Demand for the hardware is demonstrated, not assumed.</a:t>
+              <a:t>Kurt, Troy, Mitch, Aden and Ash, Justin's own list, ready to deploy within three months.</a:t>
             </a:r>
             <a:endParaRPr lang="en-US" sz="720" dirty="0"/>
           </a:p>
@@ -12219,7 +12980,7 @@
                 <a:ea typeface="Poppins" pitchFamily="34" charset="-122"/>
                 <a:cs typeface="Poppins" pitchFamily="34" charset="-120"/>
               </a:rPr>
-              <a:t>Strong reviews. </a:t>
+              <a:t>Oktoberfest, with the keg system giveaway. </a:t>
             </a:r>
             <a:pPr indent="0" marL="0">
               <a:lnSpc>
@@ -12236,7 +12997,7 @@
                 <a:ea typeface="Poppins" pitchFamily="34" charset="-122"/>
                 <a:cs typeface="Poppins" pitchFamily="34" charset="-120"/>
               </a:rPr>
-              <a:t>Present, unpromoted, and invisible to AI search.</a:t>
+              <a:t>A proof moment in the next 30 days.</a:t>
             </a:r>
             <a:endParaRPr lang="en-US" sz="720" dirty="0"/>
           </a:p>
@@ -12622,7 +13383,7 @@
                 <a:ea typeface="Poppins" pitchFamily="34" charset="-122"/>
                 <a:cs typeface="Poppins" pitchFamily="34" charset="-120"/>
               </a:rPr>
-              <a:t>Category language. </a:t>
+              <a:t>30 days, per Justin. </a:t>
             </a:r>
             <a:pPr indent="0" marL="0">
               <a:lnSpc>
@@ -12639,7 +13400,7 @@
                 <a:ea typeface="Poppins" pitchFamily="34" charset="-122"/>
                 <a:cs typeface="Poppins" pitchFamily="34" charset="-120"/>
               </a:rPr>
-              <a:t>Commercial brewer invites mainstream price comparison. The category needs a name of its own.</a:t>
+              <a:t>Confirm key messaging for each target market, and get the customer journey mapped.</a:t>
             </a:r>
             <a:endParaRPr lang="en-US" sz="730" dirty="0"/>
           </a:p>
@@ -12780,7 +13541,7 @@
         <p:spPr>
           <a:xfrm>
             <a:off x="7728952" y="8069880"/>
-            <a:ext cx="6951755" cy="308610"/>
+            <a:ext cx="6951755" cy="462915"/>
           </a:xfrm>
           <a:prstGeom prst="rect">
             <a:avLst/>
@@ -12824,7 +13585,7 @@
                 <a:ea typeface="Poppins" pitchFamily="34" charset="-122"/>
                 <a:cs typeface="Poppins" pitchFamily="34" charset="-120"/>
               </a:rPr>
-              <a:t>Cheeky for names and moments, at exactly the level the trading name sets. Plain and generous for money, service and responsibility. Never crude beyond the name's own wink, never beer-snob, never discount-shouty.</a:t>
+              <a:t>Cheeky for names and moments, at exactly the level the trading name sets. Plain and generous for money, service and responsibility. Never crude beyond the name's own wink, never beer-snob, never discount-shouty. Justin's own register, be the envy of your friends, cashed-up tradies, sets the ceiling for how far the cheek goes.</a:t>
             </a:r>
             <a:endParaRPr lang="en-US" sz="810" dirty="0"/>
           </a:p>
@@ -12838,7 +13599,7 @@
         </p:nvSpPr>
         <p:spPr>
           <a:xfrm>
-            <a:off x="7728952" y="8544090"/>
+            <a:off x="7728952" y="8698395"/>
             <a:ext cx="6951755" cy="308610"/>
           </a:xfrm>
           <a:prstGeom prst="rect">
@@ -13081,8 +13842,8 @@
         </p:nvSpPr>
         <p:spPr>
           <a:xfrm>
-            <a:off x="12693129" y="365760"/>
-            <a:ext cx="1150475" cy="251460"/>
+            <a:off x="12678246" y="365760"/>
+            <a:ext cx="1165358" cy="251460"/>
           </a:xfrm>
           <a:prstGeom prst="roundRect">
             <a:avLst>
@@ -13108,8 +13869,8 @@
         </p:nvSpPr>
         <p:spPr>
           <a:xfrm>
-            <a:off x="12693129" y="365760"/>
-            <a:ext cx="1150475" cy="251460"/>
+            <a:off x="12678246" y="365760"/>
+            <a:ext cx="1165358" cy="251460"/>
           </a:xfrm>
           <a:prstGeom prst="rect">
             <a:avLst/>
@@ -13133,7 +13894,7 @@
                 <a:ea typeface="Poppins" pitchFamily="34" charset="-122"/>
                 <a:cs typeface="Poppins" pitchFamily="34" charset="-120"/>
               </a:rPr>
-              <a:t>V01 · 15 SEPT 2026</a:t>
+              <a:t>V02 · 16 SEPT 2026</a:t>
             </a:r>
             <a:endParaRPr lang="en-US" sz="650" dirty="0"/>
           </a:p>
@@ -13147,7 +13908,7 @@
         </p:nvSpPr>
         <p:spPr>
           <a:xfrm>
-            <a:off x="11385086" y="365760"/>
+            <a:off x="11370203" y="365760"/>
             <a:ext cx="1218043" cy="251460"/>
           </a:xfrm>
           <a:prstGeom prst="roundRect">
@@ -13174,7 +13935,7 @@
         </p:nvSpPr>
         <p:spPr>
           <a:xfrm>
-            <a:off x="11385086" y="365760"/>
+            <a:off x="11370203" y="365760"/>
             <a:ext cx="1218043" cy="251460"/>
           </a:xfrm>
           <a:prstGeom prst="rect">
@@ -13213,7 +13974,7 @@
         </p:nvSpPr>
         <p:spPr>
           <a:xfrm>
-            <a:off x="10325139" y="365760"/>
+            <a:off x="10310256" y="365760"/>
             <a:ext cx="969947" cy="251460"/>
           </a:xfrm>
           <a:prstGeom prst="roundRect">
@@ -13240,7 +14001,7 @@
         </p:nvSpPr>
         <p:spPr>
           <a:xfrm>
-            <a:off x="10325139" y="365760"/>
+            <a:off x="10310256" y="365760"/>
             <a:ext cx="969947" cy="251460"/>
           </a:xfrm>
           <a:prstGeom prst="rect">
@@ -13571,7 +14332,7 @@
         <p:spPr>
           <a:xfrm>
             <a:off x="532498" y="2221808"/>
-            <a:ext cx="2574842" cy="135331"/>
+            <a:ext cx="2574842" cy="270662"/>
           </a:xfrm>
           <a:prstGeom prst="rect">
             <a:avLst/>
@@ -13598,7 +14359,24 @@
                 <a:ea typeface="Poppins" pitchFamily="34" charset="-122"/>
                 <a:cs typeface="Poppins" pitchFamily="34" charset="-120"/>
               </a:rPr>
-              <a:t>Needs: somewhere to send the traffic.</a:t>
+              <a:t>Needs: somewhere to send the traffic. </a:t>
+            </a:r>
+            <a:pPr indent="0" marL="0">
+              <a:lnSpc>
+                <a:spcPts val="1066"/>
+              </a:lnSpc>
+              <a:buNone/>
+            </a:pPr>
+            <a:r>
+              <a:rPr lang="en-US" sz="740" dirty="0">
+                <a:solidFill>
+                  <a:srgbClr val="4A5565"/>
+                </a:solidFill>
+                <a:latin typeface="Poppins" pitchFamily="34" charset="0"/>
+                <a:ea typeface="Poppins" pitchFamily="34" charset="-122"/>
+                <a:cs typeface="Poppins" pitchFamily="34" charset="-120"/>
+              </a:rPr>
+              <a:t>Justin's 3-month item: a confirmed budget breakdown.</a:t>
             </a:r>
             <a:endParaRPr lang="en-US" sz="740" dirty="0"/>
           </a:p>
@@ -13690,7 +14468,7 @@
                 <a:ea typeface="Poppins" pitchFamily="34" charset="-122"/>
                 <a:cs typeface="Poppins" pitchFamily="34" charset="-120"/>
               </a:rPr>
-              <a:t>WEBSITE</a:t>
+              <a:t>WEBSITE + SEM</a:t>
             </a:r>
             <a:endParaRPr lang="en-US" sz="660" dirty="0"/>
           </a:p>
@@ -13747,7 +14525,7 @@
         <p:spPr>
           <a:xfrm>
             <a:off x="3402439" y="2357140"/>
-            <a:ext cx="2574842" cy="135331"/>
+            <a:ext cx="2574842" cy="270662"/>
           </a:xfrm>
           <a:prstGeom prst="rect">
             <a:avLst/>
@@ -13774,7 +14552,24 @@
                 <a:ea typeface="Poppins" pitchFamily="34" charset="-122"/>
                 <a:cs typeface="Poppins" pitchFamily="34" charset="-120"/>
               </a:rPr>
-              <a:t>Needs: a buy path, proof, and an FAQ.</a:t>
+              <a:t>Justin's priority two, 3-month item: </a:t>
+            </a:r>
+            <a:pPr indent="0" marL="0">
+              <a:lnSpc>
+                <a:spcPts val="1066"/>
+              </a:lnSpc>
+              <a:buNone/>
+            </a:pPr>
+            <a:r>
+              <a:rPr lang="en-US" sz="740" dirty="0">
+                <a:solidFill>
+                  <a:srgbClr val="4A5565"/>
+                </a:solidFill>
+                <a:latin typeface="Poppins" pitchFamily="34" charset="0"/>
+                <a:ea typeface="Poppins" pitchFamily="34" charset="-122"/>
+                <a:cs typeface="Poppins" pitchFamily="34" charset="-120"/>
+              </a:rPr>
+              <a:t>website upgrade plus SEM, with a buy path, proof and an FAQ.</a:t>
             </a:r>
             <a:endParaRPr lang="en-US" sz="740" dirty="0"/>
           </a:p>
@@ -13866,7 +14661,7 @@
                 <a:ea typeface="Poppins" pitchFamily="34" charset="-122"/>
                 <a:cs typeface="Poppins" pitchFamily="34" charset="-120"/>
               </a:rPr>
-              <a:t>POS</a:t>
+              <a:t>POS AND INVENTORY</a:t>
             </a:r>
             <a:endParaRPr lang="en-US" sz="660" dirty="0"/>
           </a:p>
@@ -13923,7 +14718,7 @@
         <p:spPr>
           <a:xfrm>
             <a:off x="6272381" y="2357140"/>
-            <a:ext cx="2574842" cy="135331"/>
+            <a:ext cx="2574842" cy="270662"/>
           </a:xfrm>
           <a:prstGeom prst="rect">
             <a:avLst/>
@@ -13950,7 +14745,24 @@
                 <a:ea typeface="Poppins" pitchFamily="34" charset="-122"/>
                 <a:cs typeface="Poppins" pitchFamily="34" charset="-120"/>
               </a:rPr>
-              <a:t>Needs: to write back to the CRM.</a:t>
+              <a:t>Justin's 3-month item: </a:t>
+            </a:r>
+            <a:pPr indent="0" marL="0">
+              <a:lnSpc>
+                <a:spcPts val="1066"/>
+              </a:lnSpc>
+              <a:buNone/>
+            </a:pPr>
+            <a:r>
+              <a:rPr lang="en-US" sz="740" dirty="0">
+                <a:solidFill>
+                  <a:srgbClr val="4A5565"/>
+                </a:solidFill>
+                <a:latin typeface="Poppins" pitchFamily="34" charset="0"/>
+                <a:ea typeface="Poppins" pitchFamily="34" charset="-122"/>
+                <a:cs typeface="Poppins" pitchFamily="34" charset="-120"/>
+              </a:rPr>
+              <a:t>transition to GoTab plus Fishbowl, writing back to the CRM.</a:t>
             </a:r>
             <a:endParaRPr lang="en-US" sz="740" dirty="0"/>
           </a:p>
@@ -14099,7 +14911,7 @@
         <p:spPr>
           <a:xfrm>
             <a:off x="9142322" y="2357140"/>
-            <a:ext cx="2574842" cy="135331"/>
+            <a:ext cx="2574842" cy="405994"/>
           </a:xfrm>
           <a:prstGeom prst="rect">
             <a:avLst/>
@@ -14126,7 +14938,24 @@
                 <a:ea typeface="Poppins" pitchFamily="34" charset="-122"/>
                 <a:cs typeface="Poppins" pitchFamily="34" charset="-120"/>
               </a:rPr>
-              <a:t>Needs: consumption triggers and segments.</a:t>
+              <a:t>Needs: consumption triggers and segments. </a:t>
+            </a:r>
+            <a:pPr indent="0" marL="0">
+              <a:lnSpc>
+                <a:spcPts val="1066"/>
+              </a:lnSpc>
+              <a:buNone/>
+            </a:pPr>
+            <a:r>
+              <a:rPr lang="en-US" sz="740" dirty="0">
+                <a:solidFill>
+                  <a:srgbClr val="4A5565"/>
+                </a:solidFill>
+                <a:latin typeface="Poppins" pitchFamily="34" charset="0"/>
+                <a:ea typeface="Poppins" pitchFamily="34" charset="-122"/>
+                <a:cs typeface="Poppins" pitchFamily="34" charset="-120"/>
+              </a:rPr>
+              <a:t>Justin's 3-month item: a system for re-engaging lapsed keg customers.</a:t>
             </a:r>
             <a:endParaRPr lang="en-US" sz="740" dirty="0"/>
           </a:p>
@@ -14275,7 +15104,7 @@
         <p:spPr>
           <a:xfrm>
             <a:off x="12012264" y="2357140"/>
-            <a:ext cx="2574842" cy="135331"/>
+            <a:ext cx="2574842" cy="405994"/>
           </a:xfrm>
           <a:prstGeom prst="rect">
             <a:avLst/>
@@ -14302,7 +15131,24 @@
                 <a:ea typeface="Poppins" pitchFamily="34" charset="-122"/>
                 <a:cs typeface="Poppins" pitchFamily="34" charset="-120"/>
               </a:rPr>
-              <a:t>Needs: memberships, vouchers, delivery.</a:t>
+              <a:t>Must support at launch: </a:t>
+            </a:r>
+            <a:pPr indent="0" marL="0">
+              <a:lnSpc>
+                <a:spcPts val="1066"/>
+              </a:lnSpc>
+              <a:buNone/>
+            </a:pPr>
+            <a:r>
+              <a:rPr lang="en-US" sz="740" dirty="0">
+                <a:solidFill>
+                  <a:srgbClr val="4A5565"/>
+                </a:solidFill>
+                <a:latin typeface="Poppins" pitchFamily="34" charset="0"/>
+                <a:ea typeface="Poppins" pitchFamily="34" charset="-122"/>
+                <a:cs typeface="Poppins" pitchFamily="34" charset="-120"/>
+              </a:rPr>
+              <a:t>memberships, vouchers, delivery, lease-to-buy systems and the keg delivery service.</a:t>
             </a:r>
             <a:endParaRPr lang="en-US" sz="740" dirty="0"/>
           </a:p>
@@ -14463,10 +15309,10 @@
             <a:tbl>
               <a:tblPr/>
               <a:tblGrid>
-                <a:gridCol w="3011009"/>
-                <a:gridCol w="3940746"/>
+                <a:gridCol w="3475877"/>
+                <a:gridCol w="3475877"/>
               </a:tblGrid>
-              <a:tr h="399629">
+              <a:tr h="332616">
                 <a:tc>
                   <a:txBody>
                     <a:bodyPr/>
@@ -14574,7 +15420,247 @@
                   </a:tcPr>
                 </a:tc>
               </a:tr>
-              <a:tr h="536103">
+              <a:tr h="351641">
+                <a:tc>
+                  <a:txBody>
+                    <a:bodyPr/>
+                    <a:lstStyle/>
+                    <a:p>
+                      <a:pPr algn="l" indent="0" marL="0">
+                        <a:lnSpc>
+                          <a:spcPts val="925"/>
+                        </a:lnSpc>
+                        <a:buNone/>
+                      </a:pPr>
+                      <a:r>
+                        <a:rPr lang="en-US" sz="680" b="1" dirty="0">
+                          <a:solidFill>
+                            <a:srgbClr val="0E171F"/>
+                          </a:solidFill>
+                          <a:latin typeface="Poppins" pitchFamily="34" charset="0"/>
+                          <a:ea typeface="Poppins" pitchFamily="34" charset="-122"/>
+                          <a:cs typeface="Poppins" pitchFamily="34" charset="-120"/>
+                        </a:rPr>
+                        <a:t>Residential vs commercial</a:t>
+                      </a:r>
+                      <a:endParaRPr lang="en-US" sz="680" dirty="0">
+                        <a:latin typeface="Poppins" charset="0"/>
+                        <a:ea typeface="Poppins" charset="0"/>
+                        <a:cs typeface="Poppins" charset="0"/>
+                      </a:endParaRPr>
+                    </a:p>
+                  </a:txBody>
+                  <a:tcPr marL="50400" marR="50400" marT="50400" marB="50400" anchor="t">
+                    <a:lnL w="0" cap="flat" cmpd="sng" algn="ctr">
+                      <a:noFill/>
+                    </a:lnL>
+                    <a:lnR w="0" cap="flat" cmpd="sng" algn="ctr">
+                      <a:noFill/>
+                    </a:lnR>
+                    <a:lnT w="0" cap="flat" cmpd="sng" algn="ctr">
+                      <a:noFill/>
+                    </a:lnT>
+                    <a:lnB w="7620" cap="flat" cmpd="sng" algn="ctr">
+                      <a:solidFill>
+                        <a:srgbClr val="E3E7EC"/>
+                      </a:solidFill>
+                      <a:prstDash val="solid"/>
+                      <a:round/>
+                      <a:headEnd type="none" w="med" len="med"/>
+                      <a:tailEnd type="none" w="med" len="med"/>
+                    </a:lnB>
+                    <a:solidFill>
+                      <a:srgbClr val="F5F7FA"/>
+                    </a:solidFill>
+                  </a:tcPr>
+                </a:tc>
+                <a:tc>
+                  <a:txBody>
+                    <a:bodyPr/>
+                    <a:lstStyle/>
+                    <a:p>
+                      <a:pPr algn="l" indent="0" marL="0">
+                        <a:lnSpc>
+                          <a:spcPts val="925"/>
+                        </a:lnSpc>
+                        <a:buNone/>
+                      </a:pPr>
+                      <a:r>
+                        <a:rPr lang="en-US" sz="680" dirty="0">
+                          <a:solidFill>
+                            <a:srgbClr val="4A5565"/>
+                          </a:solidFill>
+                          <a:latin typeface="Poppins" pitchFamily="34" charset="0"/>
+                          <a:ea typeface="Poppins" pitchFamily="34" charset="-122"/>
+                          <a:cs typeface="Poppins" pitchFamily="34" charset="-120"/>
+                        </a:rPr>
+                        <a:t>Justin's 30-day call: where the energy goes</a:t>
+                      </a:r>
+                      <a:endParaRPr lang="en-US" sz="680" dirty="0">
+                        <a:latin typeface="Poppins" charset="0"/>
+                        <a:ea typeface="Poppins" charset="0"/>
+                        <a:cs typeface="Poppins" charset="0"/>
+                      </a:endParaRPr>
+                    </a:p>
+                  </a:txBody>
+                  <a:tcPr marL="50400" marR="50400" marT="50400" marB="50400" anchor="t">
+                    <a:lnL w="0" cap="flat" cmpd="sng" algn="ctr">
+                      <a:noFill/>
+                    </a:lnL>
+                    <a:lnR w="0" cap="flat" cmpd="sng" algn="ctr">
+                      <a:noFill/>
+                    </a:lnR>
+                    <a:lnT w="0" cap="flat" cmpd="sng" algn="ctr">
+                      <a:noFill/>
+                    </a:lnT>
+                    <a:lnB w="7620" cap="flat" cmpd="sng" algn="ctr">
+                      <a:solidFill>
+                        <a:srgbClr val="E3E7EC"/>
+                      </a:solidFill>
+                      <a:prstDash val="solid"/>
+                      <a:round/>
+                      <a:headEnd type="none" w="med" len="med"/>
+                      <a:tailEnd type="none" w="med" len="med"/>
+                    </a:lnB>
+                    <a:solidFill>
+                      <a:srgbClr val="F5F7FA"/>
+                    </a:solidFill>
+                  </a:tcPr>
+                </a:tc>
+              </a:tr>
+              <a:tr h="469090">
+                <a:tc>
+                  <a:txBody>
+                    <a:bodyPr/>
+                    <a:lstStyle/>
+                    <a:p>
+                      <a:pPr algn="l" indent="0" marL="0">
+                        <a:lnSpc>
+                          <a:spcPts val="925"/>
+                        </a:lnSpc>
+                        <a:buNone/>
+                      </a:pPr>
+                      <a:r>
+                        <a:rPr lang="en-US" sz="680" b="1" dirty="0">
+                          <a:solidFill>
+                            <a:srgbClr val="0E171F"/>
+                          </a:solidFill>
+                          <a:latin typeface="Poppins" pitchFamily="34" charset="0"/>
+                          <a:ea typeface="Poppins" pitchFamily="34" charset="-122"/>
+                          <a:cs typeface="Poppins" pitchFamily="34" charset="-120"/>
+                        </a:rPr>
+                        <a:t>Household segments</a:t>
+                      </a:r>
+                      <a:endParaRPr lang="en-US" sz="680" dirty="0">
+                        <a:latin typeface="Poppins" charset="0"/>
+                        <a:ea typeface="Poppins" charset="0"/>
+                        <a:cs typeface="Poppins" charset="0"/>
+                      </a:endParaRPr>
+                    </a:p>
+                    <a:p>
+                      <a:pPr algn="l" indent="0" marL="0">
+                        <a:lnSpc>
+                          <a:spcPts val="925"/>
+                        </a:lnSpc>
+                        <a:buNone/>
+                      </a:pPr>
+                      <a:r>
+                        <a:rPr lang="en-US" sz="680" dirty="0">
+                          <a:solidFill>
+                            <a:srgbClr val="4A5565"/>
+                          </a:solidFill>
+                          <a:latin typeface="Poppins" pitchFamily="34" charset="0"/>
+                          <a:ea typeface="Poppins" pitchFamily="34" charset="-122"/>
+                          <a:cs typeface="Poppins" pitchFamily="34" charset="-120"/>
+                        </a:rPr>
+                        <a:t>Sharehouses, DINKs, young families, boomers, high-volume drinkers, tradies</a:t>
+                      </a:r>
+                      <a:endParaRPr lang="en-US" sz="680" dirty="0">
+                        <a:latin typeface="Poppins" charset="0"/>
+                        <a:ea typeface="Poppins" charset="0"/>
+                        <a:cs typeface="Poppins" charset="0"/>
+                      </a:endParaRPr>
+                    </a:p>
+                  </a:txBody>
+                  <a:tcPr marL="50400" marR="50400" marT="50400" marB="50400" anchor="t">
+                    <a:lnL w="0" cap="flat" cmpd="sng" algn="ctr">
+                      <a:noFill/>
+                    </a:lnL>
+                    <a:lnR w="0" cap="flat" cmpd="sng" algn="ctr">
+                      <a:noFill/>
+                    </a:lnR>
+                    <a:lnT w="0" cap="flat" cmpd="sng" algn="ctr">
+                      <a:noFill/>
+                    </a:lnT>
+                    <a:lnB w="7620" cap="flat" cmpd="sng" algn="ctr">
+                      <a:solidFill>
+                        <a:srgbClr val="E3E7EC"/>
+                      </a:solidFill>
+                      <a:prstDash val="solid"/>
+                      <a:round/>
+                      <a:headEnd type="none" w="med" len="med"/>
+                      <a:tailEnd type="none" w="med" len="med"/>
+                    </a:lnB>
+                    <a:solidFill>
+                      <a:srgbClr val="FFFFFF"/>
+                    </a:solidFill>
+                  </a:tcPr>
+                </a:tc>
+                <a:tc>
+                  <a:txBody>
+                    <a:bodyPr/>
+                    <a:lstStyle/>
+                    <a:p>
+                      <a:pPr algn="l" indent="0" marL="0">
+                        <a:lnSpc>
+                          <a:spcPts val="925"/>
+                        </a:lnSpc>
+                        <a:buNone/>
+                      </a:pPr>
+                      <a:r>
+                        <a:rPr lang="en-US" sz="680" dirty="0">
+                          <a:solidFill>
+                            <a:srgbClr val="4A5565"/>
+                          </a:solidFill>
+                          <a:latin typeface="Poppins" pitchFamily="34" charset="0"/>
+                          <a:ea typeface="Poppins" pitchFamily="34" charset="-122"/>
+                          <a:cs typeface="Poppins" pitchFamily="34" charset="-120"/>
+                        </a:rPr>
+                        <a:t>Catching up with friends made easy. $2.55 a schooner</a:t>
+                      </a:r>
+                      <a:endParaRPr lang="en-US" sz="680" dirty="0">
+                        <a:latin typeface="Poppins" charset="0"/>
+                        <a:ea typeface="Poppins" charset="0"/>
+                        <a:cs typeface="Poppins" charset="0"/>
+                      </a:endParaRPr>
+                    </a:p>
+                  </a:txBody>
+                  <a:tcPr marL="50400" marR="50400" marT="50400" marB="50400" anchor="t">
+                    <a:lnL w="0" cap="flat" cmpd="sng" algn="ctr">
+                      <a:noFill/>
+                    </a:lnL>
+                    <a:lnR w="0" cap="flat" cmpd="sng" algn="ctr">
+                      <a:noFill/>
+                    </a:lnR>
+                    <a:lnT w="0" cap="flat" cmpd="sng" algn="ctr">
+                      <a:noFill/>
+                    </a:lnT>
+                    <a:lnB w="7620" cap="flat" cmpd="sng" algn="ctr">
+                      <a:solidFill>
+                        <a:srgbClr val="E3E7EC"/>
+                      </a:solidFill>
+                      <a:prstDash val="solid"/>
+                      <a:round/>
+                      <a:headEnd type="none" w="med" len="med"/>
+                      <a:tailEnd type="none" w="med" len="med"/>
+                    </a:lnB>
+                    <a:solidFill>
+                      <a:srgbClr val="FFFFFF"/>
+                    </a:solidFill>
+                  </a:tcPr>
+                </a:tc>
+              </a:tr>
+              <a:tr h="469090">
                 <a:tc>
                   <a:txBody>
                     <a:bodyPr/>
@@ -14706,7 +15792,7 @@
                   </a:tcPr>
                 </a:tc>
               </a:tr>
-              <a:tr h="418653">
+              <a:tr h="351641">
                 <a:tc>
                   <a:txBody>
                     <a:bodyPr/>
@@ -14814,7 +15900,7 @@
                   </a:tcPr>
                 </a:tc>
               </a:tr>
-              <a:tr h="418653">
+              <a:tr h="351641">
                 <a:tc>
                   <a:txBody>
                     <a:bodyPr/>
@@ -14922,7 +16008,7 @@
                   </a:tcPr>
                 </a:tc>
               </a:tr>
-              <a:tr h="418653">
+              <a:tr h="351641">
                 <a:tc>
                   <a:txBody>
                     <a:bodyPr/>
@@ -15030,7 +16116,7 @@
                   </a:tcPr>
                 </a:tc>
               </a:tr>
-              <a:tr h="418653">
+              <a:tr h="351641">
                 <a:tc>
                   <a:txBody>
                     <a:bodyPr/>
@@ -15051,7 +16137,7 @@
                           <a:ea typeface="Poppins" pitchFamily="34" charset="-122"/>
                           <a:cs typeface="Poppins" pitchFamily="34" charset="-120"/>
                         </a:rPr>
-                        <a:t>Tour and event operators</a:t>
+                        <a:t>Venues and clubs</a:t>
                       </a:r>
                       <a:endParaRPr lang="en-US" sz="680" dirty="0">
                         <a:latin typeface="Poppins" charset="0"/>
@@ -15104,7 +16190,7 @@
                           <a:ea typeface="Poppins" pitchFamily="34" charset="-122"/>
                           <a:cs typeface="Poppins" pitchFamily="34" charset="-120"/>
                         </a:rPr>
-                        <a:t>Award-winning stop, parking for a bus, a tasting they can sell</a:t>
+                        <a:t>Margin, exclusivity, club-branded kegs, season guarantees</a:t>
                       </a:r>
                       <a:endParaRPr lang="en-US" sz="680" dirty="0">
                         <a:latin typeface="Poppins" charset="0"/>
@@ -15138,114 +16224,6 @@
                   </a:tcPr>
                 </a:tc>
               </a:tr>
-              <a:tr h="418653">
-                <a:tc>
-                  <a:txBody>
-                    <a:bodyPr/>
-                    <a:lstStyle/>
-                    <a:p>
-                      <a:pPr algn="l" indent="0" marL="0">
-                        <a:lnSpc>
-                          <a:spcPts val="925"/>
-                        </a:lnSpc>
-                        <a:buNone/>
-                      </a:pPr>
-                      <a:r>
-                        <a:rPr lang="en-US" sz="680" b="1" dirty="0">
-                          <a:solidFill>
-                            <a:srgbClr val="0E171F"/>
-                          </a:solidFill>
-                          <a:latin typeface="Poppins" pitchFamily="34" charset="0"/>
-                          <a:ea typeface="Poppins" pitchFamily="34" charset="-122"/>
-                          <a:cs typeface="Poppins" pitchFamily="34" charset="-120"/>
-                        </a:rPr>
-                        <a:t>Venues and clubs</a:t>
-                      </a:r>
-                      <a:endParaRPr lang="en-US" sz="680" dirty="0">
-                        <a:latin typeface="Poppins" charset="0"/>
-                        <a:ea typeface="Poppins" charset="0"/>
-                        <a:cs typeface="Poppins" charset="0"/>
-                      </a:endParaRPr>
-                    </a:p>
-                  </a:txBody>
-                  <a:tcPr marL="50400" marR="50400" marT="50400" marB="50400" anchor="t">
-                    <a:lnL w="0" cap="flat" cmpd="sng" algn="ctr">
-                      <a:noFill/>
-                    </a:lnL>
-                    <a:lnR w="0" cap="flat" cmpd="sng" algn="ctr">
-                      <a:noFill/>
-                    </a:lnR>
-                    <a:lnT w="0" cap="flat" cmpd="sng" algn="ctr">
-                      <a:noFill/>
-                    </a:lnT>
-                    <a:lnB w="7620" cap="flat" cmpd="sng" algn="ctr">
-                      <a:solidFill>
-                        <a:srgbClr val="E3E7EC"/>
-                      </a:solidFill>
-                      <a:prstDash val="solid"/>
-                      <a:round/>
-                      <a:headEnd type="none" w="med" len="med"/>
-                      <a:tailEnd type="none" w="med" len="med"/>
-                    </a:lnB>
-                    <a:solidFill>
-                      <a:srgbClr val="FFFFFF"/>
-                    </a:solidFill>
-                  </a:tcPr>
-                </a:tc>
-                <a:tc>
-                  <a:txBody>
-                    <a:bodyPr/>
-                    <a:lstStyle/>
-                    <a:p>
-                      <a:pPr algn="l" indent="0" marL="0">
-                        <a:lnSpc>
-                          <a:spcPts val="925"/>
-                        </a:lnSpc>
-                        <a:buNone/>
-                      </a:pPr>
-                      <a:r>
-                        <a:rPr lang="en-US" sz="680" dirty="0">
-                          <a:solidFill>
-                            <a:srgbClr val="4A5565"/>
-                          </a:solidFill>
-                          <a:latin typeface="Poppins" pitchFamily="34" charset="0"/>
-                          <a:ea typeface="Poppins" pitchFamily="34" charset="-122"/>
-                          <a:cs typeface="Poppins" pitchFamily="34" charset="-120"/>
-                        </a:rPr>
-                        <a:t>Margin, exclusivity, club-branded kegs, season guarantees</a:t>
-                      </a:r>
-                      <a:endParaRPr lang="en-US" sz="680" dirty="0">
-                        <a:latin typeface="Poppins" charset="0"/>
-                        <a:ea typeface="Poppins" charset="0"/>
-                        <a:cs typeface="Poppins" charset="0"/>
-                      </a:endParaRPr>
-                    </a:p>
-                  </a:txBody>
-                  <a:tcPr marL="50400" marR="50400" marT="50400" marB="50400" anchor="t">
-                    <a:lnL w="0" cap="flat" cmpd="sng" algn="ctr">
-                      <a:noFill/>
-                    </a:lnL>
-                    <a:lnR w="0" cap="flat" cmpd="sng" algn="ctr">
-                      <a:noFill/>
-                    </a:lnR>
-                    <a:lnT w="0" cap="flat" cmpd="sng" algn="ctr">
-                      <a:noFill/>
-                    </a:lnT>
-                    <a:lnB w="7620" cap="flat" cmpd="sng" algn="ctr">
-                      <a:solidFill>
-                        <a:srgbClr val="E3E7EC"/>
-                      </a:solidFill>
-                      <a:prstDash val="solid"/>
-                      <a:round/>
-                      <a:headEnd type="none" w="med" len="med"/>
-                      <a:tailEnd type="none" w="med" len="med"/>
-                    </a:lnB>
-                    <a:solidFill>
-                      <a:srgbClr val="FFFFFF"/>
-                    </a:solidFill>
-                  </a:tcPr>
-                </a:tc>
-              </a:tr>
             </a:tbl>
           </a:graphicData>
         </a:graphic>
@@ -15367,7 +16345,7 @@
         </p:nvSpPr>
         <p:spPr>
           <a:xfrm>
-            <a:off x="7728952" y="4494774"/>
+            <a:off x="7728952" y="4485456"/>
             <a:ext cx="6951755" cy="462915"/>
           </a:xfrm>
           <a:prstGeom prst="rect">
@@ -15395,7 +16373,7 @@
                 <a:ea typeface="Poppins" pitchFamily="34" charset="-122"/>
                 <a:cs typeface="Poppins" pitchFamily="34" charset="-120"/>
               </a:rPr>
-              <a:t>Gift with purchase or a first-keg-free voucher tied to Harvey Norman system sales. Buy the Kegland and corny keg owner databases. Pursue the Benchy partnership. The model is the one kitchen installers use with Bunnings: they sell the hardware, we are the named first call for what goes in it.</a:t>
+              <a:t>Justin's priority one, with a 3-month item: a strategy to transition every existing keg system owner onto Tap That refills. Voucher tied to Harvey Norman sales, the Kegland and corny keg databases, and Benchy. Bunnings-installer model: they sell hardware, we are named first call.</a:t>
             </a:r>
             <a:endParaRPr lang="en-US" sz="810" dirty="0"/>
           </a:p>
@@ -15409,7 +16387,7 @@
         </p:nvSpPr>
         <p:spPr>
           <a:xfrm>
-            <a:off x="7728952" y="5049790"/>
+            <a:off x="7728952" y="5031155"/>
             <a:ext cx="6951755" cy="150724"/>
           </a:xfrm>
           <a:prstGeom prst="rect">
@@ -15451,8 +16429,8 @@
         </p:nvSpPr>
         <p:spPr>
           <a:xfrm>
-            <a:off x="7728952" y="5292615"/>
-            <a:ext cx="6951755" cy="462915"/>
+            <a:off x="7728952" y="5264662"/>
+            <a:ext cx="6951755" cy="308610"/>
           </a:xfrm>
           <a:prstGeom prst="rect">
             <a:avLst/>
@@ -15479,7 +16457,7 @@
                 <a:ea typeface="Poppins" pitchFamily="34" charset="-122"/>
                 <a:cs typeface="Poppins" pitchFamily="34" charset="-120"/>
               </a:rPr>
-              <a:t>Free delivery works and the margin comes back in dollars, not percent. Replace the blanket 90-day SMS with consumption-triggered reminders, because about 60% reorder within three months and 40% take longer, and one clock fails both. Lead on no CO2. Rethink party rental so a minimum keg guarantee covers the hire fee instead of a $75 barrier.</a:t>
+              <a:t>Free delivery and consumption-triggered reminders replace the 90-day SMS. Justin's launch items: lease-to-buy systems and a keg delivery service.</a:t>
             </a:r>
             <a:endParaRPr lang="en-US" sz="810" dirty="0"/>
           </a:p>
@@ -15493,7 +16471,7 @@
         </p:nvSpPr>
         <p:spPr>
           <a:xfrm>
-            <a:off x="7728952" y="5847632"/>
+            <a:off x="7728952" y="5656056"/>
             <a:ext cx="6951755" cy="150724"/>
           </a:xfrm>
           <a:prstGeom prst="rect">
@@ -15535,8 +16513,8 @@
         </p:nvSpPr>
         <p:spPr>
           <a:xfrm>
-            <a:off x="7728952" y="6090457"/>
-            <a:ext cx="6951755" cy="617220"/>
+            <a:off x="7728952" y="5889563"/>
+            <a:ext cx="6951755" cy="308610"/>
           </a:xfrm>
           <a:prstGeom prst="rect">
             <a:avLst/>
@@ -15563,7 +16541,7 @@
                 <a:ea typeface="Poppins" pitchFamily="34" charset="-122"/>
                 <a:cs typeface="Poppins" pitchFamily="34" charset="-120"/>
               </a:rPr>
-              <a:t>Two cohorts, and one message is currently going to both. Some are cutting back, which needs the low and non-alcoholic range. Some simply did not get around to it, which is friction and needs one tap to reorder. </a:t>
+              <a:t>Some are cutting back, needing the low and non-alcoholic range; some just forgot, needing one tap to reorder. </a:t>
             </a:r>
             <a:pPr indent="0" marL="0">
               <a:lnSpc>
@@ -15580,7 +16558,7 @@
                 <a:ea typeface="Poppins" pitchFamily="34" charset="-122"/>
                 <a:cs typeface="Poppins" pitchFamily="34" charset="-120"/>
               </a:rPr>
-              <a:t>The split between them is not established. </a:t>
+              <a:t>The split is not established. </a:t>
             </a:r>
             <a:pPr indent="0" marL="0">
               <a:lnSpc>
@@ -15597,7 +16575,7 @@
                 <a:ea typeface="Poppins" pitchFamily="34" charset="-122"/>
                 <a:cs typeface="Poppins" pitchFamily="34" charset="-120"/>
               </a:rPr>
-              <a:t>The deck puts 40% on cutting back; in the room Christy put 40% on the lapse rate itself and said what they report is not getting around to it. Read it off the CRM before either message is written.</a:t>
+              <a:t>Justin's 3-month item: a re-engagement system for lapsed customers.</a:t>
             </a:r>
             <a:endParaRPr lang="en-US" sz="810" dirty="0"/>
           </a:p>
@@ -15605,13 +16583,97 @@
       </p:sp>
       <p:sp>
         <p:nvSpPr>
-          <p:cNvPr id="54" name="Shape 49"/>
+          <p:cNvPr id="54" name="Text 49"/>
+          <p:cNvSpPr txBox="1"/>
+          <p:nvPr/>
+        </p:nvSpPr>
+        <p:spPr>
+          <a:xfrm>
+            <a:off x="7728952" y="6280956"/>
+            <a:ext cx="6951755" cy="150724"/>
+          </a:xfrm>
+          <a:prstGeom prst="rect">
+            <a:avLst/>
+          </a:prstGeom>
+          <a:noFill/>
+          <a:ln/>
+        </p:spPr>
+        <p:txBody>
+          <a:bodyPr wrap="square" lIns="0" tIns="0" rIns="0" bIns="0" rtlCol="0" anchor="t"/>
+          <a:lstStyle/>
+          <a:p>
+            <a:pPr indent="0" marL="0">
+              <a:lnSpc>
+                <a:spcPts val="1187"/>
+              </a:lnSpc>
+              <a:buNone/>
+            </a:pPr>
+            <a:r>
+              <a:rPr lang="en-US" sz="860" b="1" dirty="0">
+                <a:solidFill>
+                  <a:srgbClr val="0E171F"/>
+                </a:solidFill>
+                <a:latin typeface="Poppins" pitchFamily="34" charset="0"/>
+                <a:ea typeface="Poppins" pitchFamily="34" charset="-122"/>
+                <a:cs typeface="Poppins" pitchFamily="34" charset="-120"/>
+              </a:rPr>
+              <a:t>04 · Referrals, JVPs and online drive system sales.</a:t>
+            </a:r>
+            <a:endParaRPr lang="en-US" sz="860" dirty="0"/>
+          </a:p>
+        </p:txBody>
+      </p:sp>
+      <p:sp>
+        <p:nvSpPr>
+          <p:cNvPr id="55" name="Text 50"/>
+          <p:cNvSpPr txBox="1"/>
+          <p:nvPr/>
+        </p:nvSpPr>
+        <p:spPr>
+          <a:xfrm>
+            <a:off x="7728952" y="6514464"/>
+            <a:ext cx="6951755" cy="308610"/>
+          </a:xfrm>
+          <a:prstGeom prst="rect">
+            <a:avLst/>
+          </a:prstGeom>
+          <a:noFill/>
+          <a:ln/>
+        </p:spPr>
+        <p:txBody>
+          <a:bodyPr wrap="square" lIns="0" tIns="0" rIns="0" bIns="0" rtlCol="0" anchor="t"/>
+          <a:lstStyle/>
+          <a:p>
+            <a:pPr indent="0" marL="0">
+              <a:lnSpc>
+                <a:spcPts val="1215"/>
+              </a:lnSpc>
+              <a:buNone/>
+            </a:pPr>
+            <a:r>
+              <a:rPr lang="en-US" sz="810" dirty="0">
+                <a:solidFill>
+                  <a:srgbClr val="4A5565"/>
+                </a:solidFill>
+                <a:latin typeface="Poppins" pitchFamily="34" charset="0"/>
+                <a:ea typeface="Poppins" pitchFamily="34" charset="-122"/>
+                <a:cs typeface="Poppins" pitchFamily="34" charset="-120"/>
+              </a:rPr>
+              <a:t>Justin's priority three and one-year marker for most keg sales. 3-month items: referral programme and Bring a Mate live; JVP/referral list built, outreach started; UGC/ambassador content (Kurt, Troy, Mitch, Aden, Ash) ready.</a:t>
+            </a:r>
+            <a:endParaRPr lang="en-US" sz="810" dirty="0"/>
+          </a:p>
+        </p:txBody>
+      </p:sp>
+      <p:sp>
+        <p:nvSpPr>
+          <p:cNvPr id="56" name="Shape 51"/>
           <p:cNvSpPr/>
           <p:nvPr/>
         </p:nvSpPr>
         <p:spPr>
           <a:xfrm>
-            <a:off x="7728952" y="6983318"/>
+            <a:off x="7728952" y="7103333"/>
             <a:ext cx="6951755" cy="0"/>
           </a:xfrm>
           <a:prstGeom prst="line">
@@ -15628,14 +16690,14 @@
       </p:sp>
       <p:sp>
         <p:nvSpPr>
-          <p:cNvPr id="55" name="Text 50"/>
+          <p:cNvPr id="57" name="Text 52"/>
           <p:cNvSpPr txBox="1"/>
           <p:nvPr/>
         </p:nvSpPr>
         <p:spPr>
           <a:xfrm>
-            <a:off x="7728952" y="7040918"/>
-            <a:ext cx="6951755" cy="240030"/>
+            <a:off x="7728952" y="7160933"/>
+            <a:ext cx="6951755" cy="120015"/>
           </a:xfrm>
           <a:prstGeom prst="rect">
             <a:avLst/>
@@ -15662,7 +16724,7 @@
                 <a:ea typeface="Poppins" pitchFamily="34" charset="-122"/>
                 <a:cs typeface="Poppins" pitchFamily="34" charset="-120"/>
               </a:rPr>
-              <a:t>Jewell Projects holds Harvey Norman contacts at franchisee level, plus a contact who has done 20,000-plus installs for Harvey Norman, JB Hi-Fi and The Good Guys.</a:t>
+              <a:t>JP holds Harvey Norman franchisee contacts, plus a contact with 20,000-plus installs across Harvey Norman, JB Hi-Fi and Good Guys.</a:t>
             </a:r>
             <a:endParaRPr lang="en-US" sz="700" dirty="0"/>
           </a:p>
@@ -15670,7 +16732,7 @@
       </p:sp>
       <p:sp>
         <p:nvSpPr>
-          <p:cNvPr id="56" name="Shape 51"/>
+          <p:cNvPr id="58" name="Shape 53"/>
           <p:cNvSpPr/>
           <p:nvPr/>
         </p:nvSpPr>
@@ -15695,7 +16757,7 @@
       </p:sp>
       <p:sp>
         <p:nvSpPr>
-          <p:cNvPr id="57" name="Text 52"/>
+          <p:cNvPr id="59" name="Text 54"/>
           <p:cNvSpPr txBox="1"/>
           <p:nvPr/>
         </p:nvSpPr>
@@ -15737,114 +16799,13 @@
       </p:sp>
       <p:sp>
         <p:nvSpPr>
-          <p:cNvPr id="58" name="Text 53"/>
-          <p:cNvSpPr txBox="1"/>
-          <p:nvPr/>
-        </p:nvSpPr>
-        <p:spPr>
-          <a:xfrm>
-            <a:off x="438898" y="7789116"/>
-            <a:ext cx="4521737" cy="308610"/>
-          </a:xfrm>
-          <a:prstGeom prst="rect">
-            <a:avLst/>
-          </a:prstGeom>
-          <a:noFill/>
-          <a:ln/>
-        </p:spPr>
-        <p:txBody>
-          <a:bodyPr wrap="square" lIns="0" tIns="0" rIns="0" bIns="0" rtlCol="0" anchor="t"/>
-          <a:lstStyle/>
-          <a:p>
-            <a:pPr indent="0" marL="0">
-              <a:lnSpc>
-                <a:spcPts val="1215"/>
-              </a:lnSpc>
-              <a:buNone/>
-            </a:pPr>
-            <a:r>
-              <a:rPr lang="en-US" sz="810" dirty="0">
-                <a:solidFill>
-                  <a:srgbClr val="4A5565"/>
-                </a:solidFill>
-                <a:latin typeface="Poppins" pitchFamily="34" charset="0"/>
-                <a:ea typeface="Poppins" pitchFamily="34" charset="-122"/>
-                <a:cs typeface="Poppins" pitchFamily="34" charset="-120"/>
-              </a:rPr>
-              <a:t>Bars have approached Tap That and it still has not converted. That is not a demand problem, it is the absence of follow-up and sales experience.</a:t>
-            </a:r>
-            <a:endParaRPr lang="en-US" sz="810" dirty="0"/>
-          </a:p>
-        </p:txBody>
-      </p:sp>
-      <p:sp>
-        <p:nvSpPr>
-          <p:cNvPr id="59" name="Text 54"/>
-          <p:cNvSpPr txBox="1"/>
-          <p:nvPr/>
-        </p:nvSpPr>
-        <p:spPr>
-          <a:xfrm>
-            <a:off x="438898" y="8201059"/>
-            <a:ext cx="4521737" cy="617220"/>
-          </a:xfrm>
-          <a:prstGeom prst="rect">
-            <a:avLst/>
-          </a:prstGeom>
-          <a:noFill/>
-          <a:ln/>
-        </p:spPr>
-        <p:txBody>
-          <a:bodyPr wrap="square" lIns="0" tIns="0" rIns="0" bIns="0" rtlCol="0" anchor="t"/>
-          <a:lstStyle/>
-          <a:p>
-            <a:pPr indent="0" marL="0">
-              <a:lnSpc>
-                <a:spcPts val="1215"/>
-              </a:lnSpc>
-              <a:buNone/>
-            </a:pPr>
-            <a:r>
-              <a:rPr lang="en-US" sz="810" b="1" dirty="0">
-                <a:solidFill>
-                  <a:srgbClr val="0E171F"/>
-                </a:solidFill>
-                <a:latin typeface="Poppins" pitchFamily="34" charset="0"/>
-                <a:ea typeface="Poppins" pitchFamily="34" charset="-122"/>
-                <a:cs typeface="Poppins" pitchFamily="34" charset="-120"/>
-              </a:rPr>
-              <a:t>Stand it up properly: </a:t>
-            </a:r>
-            <a:pPr indent="0" marL="0">
-              <a:lnSpc>
-                <a:spcPts val="1215"/>
-              </a:lnSpc>
-              <a:buNone/>
-            </a:pPr>
-            <a:r>
-              <a:rPr lang="en-US" sz="810" dirty="0">
-                <a:solidFill>
-                  <a:srgbClr val="4A5565"/>
-                </a:solidFill>
-                <a:latin typeface="Poppins" pitchFamily="34" charset="0"/>
-                <a:ea typeface="Poppins" pitchFamily="34" charset="-122"/>
-                <a:cs typeface="Poppins" pitchFamily="34" charset="-120"/>
-              </a:rPr>
-              <a:t>a full-timer or a commissioned agent, targets and KPIs, a pipeline in the CRM rather than in someone's head. The room put it at about twelve touch points before a venue buys beer, and Tap That has the first one and almost none of the eleven after it.</a:t>
-            </a:r>
-            <a:endParaRPr lang="en-US" sz="810" dirty="0"/>
-          </a:p>
-        </p:txBody>
-      </p:sp>
-      <p:sp>
-        <p:nvSpPr>
           <p:cNvPr id="60" name="Text 55"/>
           <p:cNvSpPr txBox="1"/>
           <p:nvPr/>
         </p:nvSpPr>
         <p:spPr>
           <a:xfrm>
-            <a:off x="438898" y="8921612"/>
+            <a:off x="438898" y="7789116"/>
             <a:ext cx="4521737" cy="462915"/>
           </a:xfrm>
           <a:prstGeom prst="rect">
@@ -15864,23 +16825,6 @@
               <a:buNone/>
             </a:pPr>
             <a:r>
-              <a:rPr lang="en-US" sz="810" b="1" dirty="0">
-                <a:solidFill>
-                  <a:srgbClr val="0E171F"/>
-                </a:solidFill>
-                <a:latin typeface="Poppins" pitchFamily="34" charset="0"/>
-                <a:ea typeface="Poppins" pitchFamily="34" charset="-122"/>
-                <a:cs typeface="Poppins" pitchFamily="34" charset="-120"/>
-              </a:rPr>
-              <a:t>Then go after the shape of it: </a:t>
-            </a:r>
-            <a:pPr indent="0" marL="0">
-              <a:lnSpc>
-                <a:spcPts val="1215"/>
-              </a:lnSpc>
-              <a:buNone/>
-            </a:pPr>
-            <a:r>
               <a:rPr lang="en-US" sz="810" dirty="0">
                 <a:solidFill>
                   <a:srgbClr val="4A5565"/>
@@ -15889,7 +16833,7 @@
                 <a:ea typeface="Poppins" pitchFamily="34" charset="-122"/>
                 <a:cs typeface="Poppins" pitchFamily="34" charset="-120"/>
               </a:rPr>
-              <a:t>custom systems for sporting clubs, club-branded kegs, minimum guarantees per season, and moving rigs from footy to cricket so they earn year-round.</a:t>
+              <a:t>Bars have approached Tap That and it still has not converted. That is not a demand problem, it is the absence of follow-up and sales experience. Justin's priority five, with a 3-month item: outreach to event venues and niched venues.</a:t>
             </a:r>
             <a:endParaRPr lang="en-US" sz="810" dirty="0"/>
           </a:p>
@@ -15903,7 +16847,66 @@
         </p:nvSpPr>
         <p:spPr>
           <a:xfrm>
-            <a:off x="438898" y="9487860"/>
+            <a:off x="438898" y="8332218"/>
+            <a:ext cx="4521737" cy="771525"/>
+          </a:xfrm>
+          <a:prstGeom prst="rect">
+            <a:avLst/>
+          </a:prstGeom>
+          <a:noFill/>
+          <a:ln/>
+        </p:spPr>
+        <p:txBody>
+          <a:bodyPr wrap="square" lIns="0" tIns="0" rIns="0" bIns="0" rtlCol="0" anchor="t"/>
+          <a:lstStyle/>
+          <a:p>
+            <a:pPr indent="0" marL="0">
+              <a:lnSpc>
+                <a:spcPts val="1215"/>
+              </a:lnSpc>
+              <a:buNone/>
+            </a:pPr>
+            <a:r>
+              <a:rPr lang="en-US" sz="810" b="1" dirty="0">
+                <a:solidFill>
+                  <a:srgbClr val="0E171F"/>
+                </a:solidFill>
+                <a:latin typeface="Poppins" pitchFamily="34" charset="0"/>
+                <a:ea typeface="Poppins" pitchFamily="34" charset="-122"/>
+                <a:cs typeface="Poppins" pitchFamily="34" charset="-120"/>
+              </a:rPr>
+              <a:t>Stand it up properly: </a:t>
+            </a:r>
+            <a:pPr indent="0" marL="0">
+              <a:lnSpc>
+                <a:spcPts val="1215"/>
+              </a:lnSpc>
+              <a:buNone/>
+            </a:pPr>
+            <a:r>
+              <a:rPr lang="en-US" sz="810" dirty="0">
+                <a:solidFill>
+                  <a:srgbClr val="4A5565"/>
+                </a:solidFill>
+                <a:latin typeface="Poppins" pitchFamily="34" charset="0"/>
+                <a:ea typeface="Poppins" pitchFamily="34" charset="-122"/>
+                <a:cs typeface="Poppins" pitchFamily="34" charset="-120"/>
+              </a:rPr>
+              <a:t>a full-timer or a commissioned agent, targets and KPIs, a pipeline in the CRM rather than in someone's head. The room put it at about twelve touch points before a venue buys beer, and Tap That has the first one and almost none of the eleven after it. The next hire is undecided between a brewer and wholesale plus bar coverage, hybrid either way.</a:t>
+            </a:r>
+            <a:endParaRPr lang="en-US" sz="810" dirty="0"/>
+          </a:p>
+        </p:txBody>
+      </p:sp>
+      <p:sp>
+        <p:nvSpPr>
+          <p:cNvPr id="62" name="Text 57"/>
+          <p:cNvSpPr txBox="1"/>
+          <p:nvPr/>
+        </p:nvSpPr>
+        <p:spPr>
+          <a:xfrm>
+            <a:off x="438898" y="9183931"/>
             <a:ext cx="4521737" cy="462915"/>
           </a:xfrm>
           <a:prstGeom prst="rect">
@@ -15931,6 +16934,65 @@
                 <a:ea typeface="Poppins" pitchFamily="34" charset="-122"/>
                 <a:cs typeface="Poppins" pitchFamily="34" charset="-120"/>
               </a:rPr>
+              <a:t>Then go after the shape of it: </a:t>
+            </a:r>
+            <a:pPr indent="0" marL="0">
+              <a:lnSpc>
+                <a:spcPts val="1215"/>
+              </a:lnSpc>
+              <a:buNone/>
+            </a:pPr>
+            <a:r>
+              <a:rPr lang="en-US" sz="810" dirty="0">
+                <a:solidFill>
+                  <a:srgbClr val="4A5565"/>
+                </a:solidFill>
+                <a:latin typeface="Poppins" pitchFamily="34" charset="0"/>
+                <a:ea typeface="Poppins" pitchFamily="34" charset="-122"/>
+                <a:cs typeface="Poppins" pitchFamily="34" charset="-120"/>
+              </a:rPr>
+              <a:t>custom systems for sporting clubs, club-branded kegs, minimum guarantees per season, and moving rigs from footy to cricket so they earn year-round.</a:t>
+            </a:r>
+            <a:endParaRPr lang="en-US" sz="810" dirty="0"/>
+          </a:p>
+        </p:txBody>
+      </p:sp>
+      <p:sp>
+        <p:nvSpPr>
+          <p:cNvPr id="63" name="Text 58"/>
+          <p:cNvSpPr txBox="1"/>
+          <p:nvPr/>
+        </p:nvSpPr>
+        <p:spPr>
+          <a:xfrm>
+            <a:off x="438898" y="9727033"/>
+            <a:ext cx="4521737" cy="308610"/>
+          </a:xfrm>
+          <a:prstGeom prst="rect">
+            <a:avLst/>
+          </a:prstGeom>
+          <a:noFill/>
+          <a:ln/>
+        </p:spPr>
+        <p:txBody>
+          <a:bodyPr wrap="square" lIns="0" tIns="0" rIns="0" bIns="0" rtlCol="0" anchor="t"/>
+          <a:lstStyle/>
+          <a:p>
+            <a:pPr indent="0" marL="0">
+              <a:lnSpc>
+                <a:spcPts val="1215"/>
+              </a:lnSpc>
+              <a:buNone/>
+            </a:pPr>
+            <a:r>
+              <a:rPr lang="en-US" sz="810" b="1" dirty="0">
+                <a:solidFill>
+                  <a:srgbClr val="0E171F"/>
+                </a:solidFill>
+                <a:latin typeface="Poppins" pitchFamily="34" charset="0"/>
+                <a:ea typeface="Poppins" pitchFamily="34" charset="-122"/>
+                <a:cs typeface="Poppins" pitchFamily="34" charset="-120"/>
+              </a:rPr>
               <a:t>And work around the duopoly. </a:t>
             </a:r>
             <a:pPr indent="0" marL="0">
@@ -15948,7 +17010,7 @@
                 <a:ea typeface="Poppins" pitchFamily="34" charset="-122"/>
                 <a:cs typeface="Poppins" pitchFamily="34" charset="-120"/>
               </a:rPr>
-              <a:t>Lock-in is not satisfaction. Venues are already forming buying groups to get around it. Find the pain points and build an offer that fits alongside the contract.</a:t>
+              <a:t>Lock-in is not satisfaction, and venues are already forming buying groups to get around it.</a:t>
             </a:r>
             <a:endParaRPr lang="en-US" sz="810" dirty="0"/>
           </a:p>
@@ -15956,7 +17018,7 @@
       </p:sp>
       <p:sp>
         <p:nvSpPr>
-          <p:cNvPr id="62" name="Shape 57"/>
+          <p:cNvPr id="64" name="Shape 59"/>
           <p:cNvSpPr/>
           <p:nvPr/>
         </p:nvSpPr>
@@ -15979,7 +17041,7 @@
       </p:sp>
       <p:sp>
         <p:nvSpPr>
-          <p:cNvPr id="63" name="Text 58"/>
+          <p:cNvPr id="65" name="Text 60"/>
           <p:cNvSpPr txBox="1"/>
           <p:nvPr/>
         </p:nvSpPr>
@@ -16021,7 +17083,7 @@
       </p:sp>
       <p:sp>
         <p:nvSpPr>
-          <p:cNvPr id="64" name="Shape 59"/>
+          <p:cNvPr id="66" name="Shape 61"/>
           <p:cNvSpPr/>
           <p:nvPr/>
         </p:nvSpPr>
@@ -16046,7 +17108,7 @@
       </p:sp>
       <p:sp>
         <p:nvSpPr>
-          <p:cNvPr id="65" name="Text 60"/>
+          <p:cNvPr id="67" name="Text 62"/>
           <p:cNvSpPr txBox="1"/>
           <p:nvPr/>
         </p:nvSpPr>
@@ -16088,7 +17150,7 @@
       </p:sp>
       <p:sp>
         <p:nvSpPr>
-          <p:cNvPr id="66" name="Text 61"/>
+          <p:cNvPr id="68" name="Text 63"/>
           <p:cNvSpPr txBox="1"/>
           <p:nvPr/>
         </p:nvSpPr>
@@ -16130,7 +17192,7 @@
       </p:sp>
       <p:sp>
         <p:nvSpPr>
-          <p:cNvPr id="67" name="Text 62"/>
+          <p:cNvPr id="69" name="Text 64"/>
           <p:cNvSpPr txBox="1"/>
           <p:nvPr/>
         </p:nvSpPr>
@@ -16181,7 +17243,7 @@
                 <a:ea typeface="Poppins" pitchFamily="34" charset="-122"/>
                 <a:cs typeface="Poppins" pitchFamily="34" charset="-120"/>
               </a:rPr>
-              <a:t>a real About page, an FAQ that answers the buying objections, reviews on the site rather than off it, and the awards page the Crafted win deserves.</a:t>
+              <a:t>a real About page, an FAQ that answers the buying objections, reviews on the site, and the awards page the Crafted win deserves. Justin's tech item, SEM, runs alongside these GEO basics, not instead of them.</a:t>
             </a:r>
             <a:endParaRPr lang="en-US" sz="810" dirty="0"/>
           </a:p>
@@ -16189,7 +17251,7 @@
       </p:sp>
       <p:sp>
         <p:nvSpPr>
-          <p:cNvPr id="68" name="Text 63"/>
+          <p:cNvPr id="70" name="Text 65"/>
           <p:cNvSpPr txBox="1"/>
           <p:nvPr/>
         </p:nvSpPr>
@@ -16248,7 +17310,7 @@
       </p:sp>
       <p:sp>
         <p:nvSpPr>
-          <p:cNvPr id="69" name="Text 64"/>
+          <p:cNvPr id="71" name="Text 66"/>
           <p:cNvSpPr txBox="1"/>
           <p:nvPr/>
         </p:nvSpPr>
@@ -16307,7 +17369,7 @@
       </p:sp>
       <p:sp>
         <p:nvSpPr>
-          <p:cNvPr id="70" name="Shape 65"/>
+          <p:cNvPr id="72" name="Shape 67"/>
           <p:cNvSpPr/>
           <p:nvPr/>
         </p:nvSpPr>
@@ -16332,7 +17394,7 @@
       </p:sp>
       <p:sp>
         <p:nvSpPr>
-          <p:cNvPr id="71" name="Text 66"/>
+          <p:cNvPr id="73" name="Text 68"/>
           <p:cNvSpPr txBox="1"/>
           <p:nvPr/>
         </p:nvSpPr>
@@ -16374,14 +17436,14 @@
       </p:sp>
       <p:sp>
         <p:nvSpPr>
-          <p:cNvPr id="72" name="Shape 67"/>
+          <p:cNvPr id="74" name="Shape 69"/>
           <p:cNvSpPr/>
           <p:nvPr/>
         </p:nvSpPr>
         <p:spPr>
           <a:xfrm>
             <a:off x="10158970" y="7789116"/>
-            <a:ext cx="2224868" cy="458111"/>
+            <a:ext cx="2224868" cy="546122"/>
           </a:xfrm>
           <a:prstGeom prst="rect">
             <a:avLst/>
@@ -16399,7 +17461,7 @@
       </p:sp>
       <p:sp>
         <p:nvSpPr>
-          <p:cNvPr id="73" name="Text 68"/>
+          <p:cNvPr id="75" name="Text 70"/>
           <p:cNvSpPr txBox="1"/>
           <p:nvPr/>
         </p:nvSpPr>
@@ -16441,14 +17503,14 @@
       </p:sp>
       <p:sp>
         <p:nvSpPr>
-          <p:cNvPr id="74" name="Text 69"/>
+          <p:cNvPr id="76" name="Text 71"/>
           <p:cNvSpPr txBox="1"/>
           <p:nvPr/>
         </p:nvSpPr>
         <p:spPr>
           <a:xfrm>
             <a:off x="10266970" y="8118536"/>
-            <a:ext cx="2008868" cy="88011"/>
+            <a:ext cx="2008868" cy="176022"/>
           </a:xfrm>
           <a:prstGeom prst="rect">
             <a:avLst/>
@@ -16475,7 +17537,7 @@
                 <a:ea typeface="Poppins" pitchFamily="34" charset="-122"/>
                 <a:cs typeface="Poppins" pitchFamily="34" charset="-120"/>
               </a:rPr>
-              <a:t>IN MARKET, AGAINST 1,000</a:t>
+              <a:t>KEG SYSTEM SALES</a:t>
             </a:r>
             <a:endParaRPr lang="en-US" sz="550" dirty="0"/>
           </a:p>
@@ -16483,14 +17545,14 @@
       </p:sp>
       <p:sp>
         <p:nvSpPr>
-          <p:cNvPr id="75" name="Shape 70"/>
+          <p:cNvPr id="77" name="Shape 72"/>
           <p:cNvSpPr/>
           <p:nvPr/>
         </p:nvSpPr>
         <p:spPr>
           <a:xfrm>
             <a:off x="12455838" y="7789116"/>
-            <a:ext cx="2224868" cy="458111"/>
+            <a:ext cx="2224868" cy="546122"/>
           </a:xfrm>
           <a:prstGeom prst="rect">
             <a:avLst/>
@@ -16508,7 +17570,7 @@
       </p:sp>
       <p:sp>
         <p:nvSpPr>
-          <p:cNvPr id="76" name="Text 71"/>
+          <p:cNvPr id="78" name="Text 73"/>
           <p:cNvSpPr txBox="1"/>
           <p:nvPr/>
         </p:nvSpPr>
@@ -16542,7 +17604,7 @@
                 <a:ea typeface="Poppins" pitchFamily="34" charset="-122"/>
                 <a:cs typeface="Poppins" pitchFamily="34" charset="-120"/>
               </a:rPr>
-              <a:t>Active</a:t>
+              <a:t>Refillers</a:t>
             </a:r>
             <a:endParaRPr lang="en-US" sz="1100" dirty="0"/>
           </a:p>
@@ -16550,14 +17612,14 @@
       </p:sp>
       <p:sp>
         <p:nvSpPr>
-          <p:cNvPr id="77" name="Text 72"/>
+          <p:cNvPr id="79" name="Text 74"/>
           <p:cNvSpPr txBox="1"/>
           <p:nvPr/>
         </p:nvSpPr>
         <p:spPr>
           <a:xfrm>
             <a:off x="12563838" y="8118536"/>
-            <a:ext cx="2008868" cy="88011"/>
+            <a:ext cx="2008868" cy="176022"/>
           </a:xfrm>
           <a:prstGeom prst="rect">
             <a:avLst/>
@@ -16584,7 +17646,7 @@
                 <a:ea typeface="Poppins" pitchFamily="34" charset="-122"/>
                 <a:cs typeface="Poppins" pitchFamily="34" charset="-120"/>
               </a:rPr>
-              <a:t>REFILL CUSTOMERS, ONE DEFINITION</a:t>
+              <a:t>ACTIVE KEG REFILLERS, AGAINST 250 THEN 1,000</a:t>
             </a:r>
             <a:endParaRPr lang="en-US" sz="550" dirty="0"/>
           </a:p>
@@ -16592,14 +17654,14 @@
       </p:sp>
       <p:sp>
         <p:nvSpPr>
-          <p:cNvPr id="78" name="Shape 73"/>
+          <p:cNvPr id="80" name="Shape 75"/>
           <p:cNvSpPr/>
           <p:nvPr/>
         </p:nvSpPr>
         <p:spPr>
           <a:xfrm>
-            <a:off x="10158970" y="8319227"/>
-            <a:ext cx="2224868" cy="458111"/>
+            <a:off x="10158970" y="8407238"/>
+            <a:ext cx="2224868" cy="546122"/>
           </a:xfrm>
           <a:prstGeom prst="rect">
             <a:avLst/>
@@ -16617,13 +17679,13 @@
       </p:sp>
       <p:sp>
         <p:nvSpPr>
-          <p:cNvPr id="79" name="Text 74"/>
+          <p:cNvPr id="81" name="Text 76"/>
           <p:cNvSpPr txBox="1"/>
           <p:nvPr/>
         </p:nvSpPr>
         <p:spPr>
           <a:xfrm>
-            <a:off x="10266970" y="8405627"/>
+            <a:off x="10266970" y="8493638"/>
             <a:ext cx="2008868" cy="185420"/>
           </a:xfrm>
           <a:prstGeom prst="rect">
@@ -16651,7 +17713,7 @@
                 <a:ea typeface="Poppins" pitchFamily="34" charset="-122"/>
                 <a:cs typeface="Poppins" pitchFamily="34" charset="-120"/>
               </a:rPr>
-              <a:t>Leak</a:t>
+              <a:t>Accounts</a:t>
             </a:r>
             <a:endParaRPr lang="en-US" sz="1100" dirty="0"/>
           </a:p>
@@ -16659,14 +17721,14 @@
       </p:sp>
       <p:sp>
         <p:nvSpPr>
-          <p:cNvPr id="80" name="Text 75"/>
+          <p:cNvPr id="82" name="Text 77"/>
           <p:cNvSpPr txBox="1"/>
           <p:nvPr/>
         </p:nvSpPr>
         <p:spPr>
           <a:xfrm>
-            <a:off x="10266970" y="8648647"/>
-            <a:ext cx="2008868" cy="88011"/>
+            <a:off x="10266970" y="8736658"/>
+            <a:ext cx="2008868" cy="176022"/>
           </a:xfrm>
           <a:prstGeom prst="rect">
             <a:avLst/>
@@ -16693,7 +17755,7 @@
                 <a:ea typeface="Poppins" pitchFamily="34" charset="-122"/>
                 <a:cs typeface="Poppins" pitchFamily="34" charset="-120"/>
               </a:rPr>
-              <a:t>LAPSE RATE, MEMBER VS NON-MEMBER</a:t>
+              <a:t>WHOLESALE ACCOUNTS</a:t>
             </a:r>
             <a:endParaRPr lang="en-US" sz="550" dirty="0"/>
           </a:p>
@@ -16701,14 +17763,14 @@
       </p:sp>
       <p:sp>
         <p:nvSpPr>
-          <p:cNvPr id="81" name="Shape 76"/>
+          <p:cNvPr id="83" name="Shape 78"/>
           <p:cNvSpPr/>
           <p:nvPr/>
         </p:nvSpPr>
         <p:spPr>
           <a:xfrm>
-            <a:off x="12455838" y="8319227"/>
-            <a:ext cx="2224868" cy="458111"/>
+            <a:off x="12455838" y="8407238"/>
+            <a:ext cx="2224868" cy="546122"/>
           </a:xfrm>
           <a:prstGeom prst="rect">
             <a:avLst/>
@@ -16726,98 +17788,14 @@
       </p:sp>
       <p:sp>
         <p:nvSpPr>
-          <p:cNvPr id="82" name="Text 77"/>
-          <p:cNvSpPr txBox="1"/>
-          <p:nvPr/>
-        </p:nvSpPr>
-        <p:spPr>
-          <a:xfrm>
-            <a:off x="12563838" y="8405627"/>
-            <a:ext cx="2008868" cy="185420"/>
-          </a:xfrm>
-          <a:prstGeom prst="rect">
-            <a:avLst/>
-          </a:prstGeom>
-          <a:noFill/>
-          <a:ln/>
-        </p:spPr>
-        <p:txBody>
-          <a:bodyPr wrap="square" lIns="0" tIns="0" rIns="0" bIns="0" rtlCol="0" anchor="t"/>
-          <a:lstStyle/>
-          <a:p>
-            <a:pPr indent="0" marL="0">
-              <a:lnSpc>
-                <a:spcPts val="1100"/>
-              </a:lnSpc>
-              <a:buNone/>
-            </a:pPr>
-            <a:r>
-              <a:rPr lang="en-US" sz="1100" b="1" dirty="0">
-                <a:solidFill>
-                  <a:srgbClr val="0066FF"/>
-                </a:solidFill>
-                <a:latin typeface="Poppins" pitchFamily="34" charset="0"/>
-                <a:ea typeface="Poppins" pitchFamily="34" charset="-122"/>
-                <a:cs typeface="Poppins" pitchFamily="34" charset="-120"/>
-              </a:rPr>
-              <a:t>Accounts</a:t>
-            </a:r>
-            <a:endParaRPr lang="en-US" sz="1100" dirty="0"/>
-          </a:p>
-        </p:txBody>
-      </p:sp>
-      <p:sp>
-        <p:nvSpPr>
-          <p:cNvPr id="83" name="Text 78"/>
-          <p:cNvSpPr txBox="1"/>
-          <p:nvPr/>
-        </p:nvSpPr>
-        <p:spPr>
-          <a:xfrm>
-            <a:off x="12563838" y="8648647"/>
-            <a:ext cx="2008868" cy="88011"/>
-          </a:xfrm>
-          <a:prstGeom prst="rect">
-            <a:avLst/>
-          </a:prstGeom>
-          <a:noFill/>
-          <a:ln/>
-        </p:spPr>
-        <p:txBody>
-          <a:bodyPr wrap="square" lIns="0" tIns="0" rIns="0" bIns="0" rtlCol="0" anchor="t"/>
-          <a:lstStyle/>
-          <a:p>
-            <a:pPr indent="0" marL="0">
-              <a:lnSpc>
-                <a:spcPts val="693"/>
-              </a:lnSpc>
-              <a:buNone/>
-            </a:pPr>
-            <a:r>
-              <a:rPr lang="en-US" sz="550" b="1" spc="55" kern="0" dirty="0">
-                <a:solidFill>
-                  <a:srgbClr val="4A5565"/>
-                </a:solidFill>
-                <a:latin typeface="Poppins" pitchFamily="34" charset="0"/>
-                <a:ea typeface="Poppins" pitchFamily="34" charset="-122"/>
-                <a:cs typeface="Poppins" pitchFamily="34" charset="-120"/>
-              </a:rPr>
-              <a:t>WHOLESALE, AND KEGS PER ACCOUNT</a:t>
-            </a:r>
-            <a:endParaRPr lang="en-US" sz="550" dirty="0"/>
-          </a:p>
-        </p:txBody>
-      </p:sp>
-      <p:sp>
-        <p:nvSpPr>
           <p:cNvPr id="84" name="Text 79"/>
           <p:cNvSpPr txBox="1"/>
           <p:nvPr/>
         </p:nvSpPr>
         <p:spPr>
           <a:xfrm>
-            <a:off x="10158970" y="8942938"/>
-            <a:ext cx="4521737" cy="154305"/>
+            <a:off x="12563838" y="8493638"/>
+            <a:ext cx="2008868" cy="185420"/>
           </a:xfrm>
           <a:prstGeom prst="rect">
             <a:avLst/>
@@ -16831,39 +17809,22 @@
           <a:p>
             <a:pPr indent="0" marL="0">
               <a:lnSpc>
-                <a:spcPts val="1215"/>
-              </a:lnSpc>
-              <a:buNone/>
-            </a:pPr>
-            <a:r>
-              <a:rPr lang="en-US" sz="810" b="1" dirty="0">
-                <a:solidFill>
-                  <a:srgbClr val="0E171F"/>
-                </a:solidFill>
-                <a:latin typeface="Poppins" pitchFamily="34" charset="0"/>
-                <a:ea typeface="Poppins" pitchFamily="34" charset="-122"/>
-                <a:cs typeface="Poppins" pitchFamily="34" charset="-120"/>
-              </a:rPr>
-              <a:t>One report, monthly, four numbers. </a:t>
-            </a:r>
-            <a:pPr indent="0" marL="0">
-              <a:lnSpc>
-                <a:spcPts val="1215"/>
-              </a:lnSpc>
-              <a:buNone/>
-            </a:pPr>
-            <a:r>
-              <a:rPr lang="en-US" sz="810" dirty="0">
-                <a:solidFill>
-                  <a:srgbClr val="4A5565"/>
-                </a:solidFill>
-                <a:latin typeface="Poppins" pitchFamily="34" charset="0"/>
-                <a:ea typeface="Poppins" pitchFamily="34" charset="-122"/>
-                <a:cs typeface="Poppins" pitchFamily="34" charset="-120"/>
-              </a:rPr>
-              <a:t>Not a dashboard nobody opens.</a:t>
-            </a:r>
-            <a:endParaRPr lang="en-US" sz="810" dirty="0"/>
+                <a:spcPts val="1100"/>
+              </a:lnSpc>
+              <a:buNone/>
+            </a:pPr>
+            <a:r>
+              <a:rPr lang="en-US" sz="1100" b="1" dirty="0">
+                <a:solidFill>
+                  <a:srgbClr val="0066FF"/>
+                </a:solidFill>
+                <a:latin typeface="Poppins" pitchFamily="34" charset="0"/>
+                <a:ea typeface="Poppins" pitchFamily="34" charset="-122"/>
+                <a:cs typeface="Poppins" pitchFamily="34" charset="-120"/>
+              </a:rPr>
+              <a:t>Leak</a:t>
+            </a:r>
+            <a:endParaRPr lang="en-US" sz="1100" dirty="0"/>
           </a:p>
         </p:txBody>
       </p:sp>
@@ -16875,7 +17836,108 @@
         </p:nvSpPr>
         <p:spPr>
           <a:xfrm>
-            <a:off x="10158970" y="9262843"/>
+            <a:off x="12563838" y="8736658"/>
+            <a:ext cx="2008868" cy="176022"/>
+          </a:xfrm>
+          <a:prstGeom prst="rect">
+            <a:avLst/>
+          </a:prstGeom>
+          <a:noFill/>
+          <a:ln/>
+        </p:spPr>
+        <p:txBody>
+          <a:bodyPr wrap="square" lIns="0" tIns="0" rIns="0" bIns="0" rtlCol="0" anchor="t"/>
+          <a:lstStyle/>
+          <a:p>
+            <a:pPr indent="0" marL="0">
+              <a:lnSpc>
+                <a:spcPts val="693"/>
+              </a:lnSpc>
+              <a:buNone/>
+            </a:pPr>
+            <a:r>
+              <a:rPr lang="en-US" sz="550" b="1" spc="55" kern="0" dirty="0">
+                <a:solidFill>
+                  <a:srgbClr val="4A5565"/>
+                </a:solidFill>
+                <a:latin typeface="Poppins" pitchFamily="34" charset="0"/>
+                <a:ea typeface="Poppins" pitchFamily="34" charset="-122"/>
+                <a:cs typeface="Poppins" pitchFamily="34" charset="-120"/>
+              </a:rPr>
+              <a:t>LAPSE RATE, MEMBER VS NON-MEMBER</a:t>
+            </a:r>
+            <a:endParaRPr lang="en-US" sz="550" dirty="0"/>
+          </a:p>
+        </p:txBody>
+      </p:sp>
+      <p:sp>
+        <p:nvSpPr>
+          <p:cNvPr id="86" name="Text 81"/>
+          <p:cNvSpPr txBox="1"/>
+          <p:nvPr/>
+        </p:nvSpPr>
+        <p:spPr>
+          <a:xfrm>
+            <a:off x="10158970" y="9118960"/>
+            <a:ext cx="4521737" cy="154305"/>
+          </a:xfrm>
+          <a:prstGeom prst="rect">
+            <a:avLst/>
+          </a:prstGeom>
+          <a:noFill/>
+          <a:ln/>
+        </p:spPr>
+        <p:txBody>
+          <a:bodyPr wrap="square" lIns="0" tIns="0" rIns="0" bIns="0" rtlCol="0" anchor="t"/>
+          <a:lstStyle/>
+          <a:p>
+            <a:pPr indent="0" marL="0">
+              <a:lnSpc>
+                <a:spcPts val="1215"/>
+              </a:lnSpc>
+              <a:buNone/>
+            </a:pPr>
+            <a:r>
+              <a:rPr lang="en-US" sz="810" b="1" dirty="0">
+                <a:solidFill>
+                  <a:srgbClr val="0E171F"/>
+                </a:solidFill>
+                <a:latin typeface="Poppins" pitchFamily="34" charset="0"/>
+                <a:ea typeface="Poppins" pitchFamily="34" charset="-122"/>
+                <a:cs typeface="Poppins" pitchFamily="34" charset="-120"/>
+              </a:rPr>
+              <a:t>One report, monthly, four numbers. </a:t>
+            </a:r>
+            <a:pPr indent="0" marL="0">
+              <a:lnSpc>
+                <a:spcPts val="1215"/>
+              </a:lnSpc>
+              <a:buNone/>
+            </a:pPr>
+            <a:r>
+              <a:rPr lang="en-US" sz="810" dirty="0">
+                <a:solidFill>
+                  <a:srgbClr val="4A5565"/>
+                </a:solidFill>
+                <a:latin typeface="Poppins" pitchFamily="34" charset="0"/>
+                <a:ea typeface="Poppins" pitchFamily="34" charset="-122"/>
+                <a:cs typeface="Poppins" pitchFamily="34" charset="-120"/>
+              </a:rPr>
+              <a:t>Not a dashboard nobody opens.</a:t>
+            </a:r>
+            <a:endParaRPr lang="en-US" sz="810" dirty="0"/>
+          </a:p>
+        </p:txBody>
+      </p:sp>
+      <p:sp>
+        <p:nvSpPr>
+          <p:cNvPr id="87" name="Text 82"/>
+          <p:cNvSpPr txBox="1"/>
+          <p:nvPr/>
+        </p:nvSpPr>
+        <p:spPr>
+          <a:xfrm>
+            <a:off x="10158970" y="9438865"/>
             <a:ext cx="4521737" cy="308610"/>
           </a:xfrm>
           <a:prstGeom prst="rect">
@@ -16903,7 +17965,7 @@
                 <a:ea typeface="Poppins" pitchFamily="34" charset="-122"/>
                 <a:cs typeface="Poppins" pitchFamily="34" charset="-120"/>
               </a:rPr>
-              <a:t>Active customer is currently defined three ways. </a:t>
+              <a:t>Justin's KPI is active keg refillers, defined three ways today. </a:t>
             </a:r>
             <a:pPr indent="0" marL="0">
               <a:lnSpc>
@@ -16920,7 +17982,7 @@
                 <a:ea typeface="Poppins" pitchFamily="34" charset="-122"/>
                 <a:cs typeface="Poppins" pitchFamily="34" charset="-120"/>
               </a:rPr>
-              <a:t>Pick one before the first report, or the number will be argued about instead of acted on.</a:t>
+              <a:t>Define it once before the first report, or the number will be argued about instead of acted on.</a:t>
             </a:r>
             <a:endParaRPr lang="en-US" sz="810" dirty="0"/>
           </a:p>
@@ -17053,8 +18115,8 @@
         </p:nvSpPr>
         <p:spPr>
           <a:xfrm>
-            <a:off x="12693129" y="365760"/>
-            <a:ext cx="1150475" cy="251460"/>
+            <a:off x="12678246" y="365760"/>
+            <a:ext cx="1165358" cy="251460"/>
           </a:xfrm>
           <a:prstGeom prst="roundRect">
             <a:avLst>
@@ -17080,8 +18142,8 @@
         </p:nvSpPr>
         <p:spPr>
           <a:xfrm>
-            <a:off x="12693129" y="365760"/>
-            <a:ext cx="1150475" cy="251460"/>
+            <a:off x="12678246" y="365760"/>
+            <a:ext cx="1165358" cy="251460"/>
           </a:xfrm>
           <a:prstGeom prst="rect">
             <a:avLst/>
@@ -17105,7 +18167,7 @@
                 <a:ea typeface="Poppins" pitchFamily="34" charset="-122"/>
                 <a:cs typeface="Poppins" pitchFamily="34" charset="-120"/>
               </a:rPr>
-              <a:t>V01 · 15 SEPT 2026</a:t>
+              <a:t>V02 · 16 SEPT 2026</a:t>
             </a:r>
             <a:endParaRPr lang="en-US" sz="650" dirty="0"/>
           </a:p>
@@ -17119,7 +18181,7 @@
         </p:nvSpPr>
         <p:spPr>
           <a:xfrm>
-            <a:off x="11385086" y="365760"/>
+            <a:off x="11370203" y="365760"/>
             <a:ext cx="1218043" cy="251460"/>
           </a:xfrm>
           <a:prstGeom prst="roundRect">
@@ -17146,7 +18208,7 @@
         </p:nvSpPr>
         <p:spPr>
           <a:xfrm>
-            <a:off x="11385086" y="365760"/>
+            <a:off x="11370203" y="365760"/>
             <a:ext cx="1218043" cy="251460"/>
           </a:xfrm>
           <a:prstGeom prst="rect">
@@ -17185,7 +18247,7 @@
         </p:nvSpPr>
         <p:spPr>
           <a:xfrm>
-            <a:off x="10319186" y="365760"/>
+            <a:off x="10304303" y="365760"/>
             <a:ext cx="975900" cy="251460"/>
           </a:xfrm>
           <a:prstGeom prst="roundRect">
@@ -17212,7 +18274,7 @@
         </p:nvSpPr>
         <p:spPr>
           <a:xfrm>
-            <a:off x="10319186" y="365760"/>
+            <a:off x="10304303" y="365760"/>
             <a:ext cx="975900" cy="251460"/>
           </a:xfrm>
           <a:prstGeom prst="rect">
@@ -17352,7 +18414,7 @@
                 <a:ea typeface="Poppins" pitchFamily="34" charset="-122"/>
                 <a:cs typeface="Poppins" pitchFamily="34" charset="-120"/>
               </a:rPr>
-              <a:t>NINETY DAYS</a:t>
+              <a:t>JUSTIN'S LADDER</a:t>
             </a:r>
             <a:pPr indent="0" marL="0">
               <a:lnSpc>
@@ -17369,7 +18431,7 @@
                 <a:ea typeface="Poppins" pitchFamily="34" charset="-122"/>
                 <a:cs typeface="Poppins" pitchFamily="34" charset="-120"/>
               </a:rPr>
-              <a:t>  : proposed, and dated off the 15 September catch-up</a:t>
+              <a:t>  : his own horizons, dated from 16 September</a:t>
             </a:r>
             <a:endParaRPr lang="en-US" sz="680" dirty="0"/>
           </a:p>
@@ -17461,7 +18523,7 @@
                 <a:ea typeface="Poppins" pitchFamily="34" charset="-122"/>
                 <a:cs typeface="Poppins" pitchFamily="34" charset="-120"/>
               </a:rPr>
-              <a:t>NOW · TO FRI 18 SEPT</a:t>
+              <a:t>30 DAYS · TO MID-OCTOBER</a:t>
             </a:r>
             <a:endParaRPr lang="en-US" sz="650" dirty="0"/>
           </a:p>
@@ -17528,7 +18590,7 @@
                 <a:ea typeface="Poppins" pitchFamily="34" charset="-122"/>
                 <a:cs typeface="Poppins" pitchFamily="34" charset="-120"/>
               </a:rPr>
-              <a:t>Justin returns the committed moves</a:t>
+              <a:t>Three-way shape decision: taproom, showroom or event space</a:t>
             </a:r>
             <a:endParaRPr lang="en-US" sz="740" dirty="0"/>
           </a:p>
@@ -17595,7 +18657,7 @@
                 <a:ea typeface="Poppins" pitchFamily="34" charset="-122"/>
                 <a:cs typeface="Poppins" pitchFamily="34" charset="-120"/>
               </a:rPr>
-              <a:t>Clent and Christy regroup after Thu 17th</a:t>
+              <a:t>Customer journey mapped, key messaging confirmed</a:t>
             </a:r>
             <a:endParaRPr lang="en-US" sz="740" dirty="0"/>
           </a:p>
@@ -17662,7 +18724,7 @@
                 <a:ea typeface="Poppins" pitchFamily="34" charset="-122"/>
                 <a:cs typeface="Poppins" pitchFamily="34" charset="-120"/>
               </a:rPr>
-              <a:t>Settle the per-schooner figure, pull or fix the live ad</a:t>
+              <a:t>KPIs, growth targets and meeting rhythm set</a:t>
             </a:r>
             <a:endParaRPr lang="en-US" sz="740" dirty="0"/>
           </a:p>
@@ -17729,7 +18791,7 @@
                 <a:ea typeface="Poppins" pitchFamily="34" charset="-122"/>
                 <a:cs typeface="Poppins" pitchFamily="34" charset="-120"/>
               </a:rPr>
-              <a:t>Pick one definition of an active customer</a:t>
+              <a:t>Residential vs commercial, external support vs in-house</a:t>
             </a:r>
             <a:endParaRPr lang="en-US" sz="740" dirty="0"/>
           </a:p>
@@ -17738,6 +18800,140 @@
       <p:sp>
         <p:nvSpPr>
           <p:cNvPr id="26" name="Shape 22"/>
+          <p:cNvSpPr/>
+          <p:nvPr/>
+        </p:nvSpPr>
+        <p:spPr>
+          <a:xfrm>
+            <a:off x="532498" y="2403626"/>
+            <a:ext cx="50400" cy="50400"/>
+          </a:xfrm>
+          <a:prstGeom prst="rect">
+            <a:avLst/>
+          </a:prstGeom>
+          <a:solidFill>
+            <a:srgbClr val="0066FF"/>
+          </a:solidFill>
+          <a:ln w="12700">
+            <a:solidFill>
+              <a:srgbClr val="333333"/>
+            </a:solidFill>
+            <a:prstDash val="solid"/>
+          </a:ln>
+        </p:spPr>
+      </p:sp>
+      <p:sp>
+        <p:nvSpPr>
+          <p:cNvPr id="27" name="Text 23"/>
+          <p:cNvSpPr txBox="1"/>
+          <p:nvPr/>
+        </p:nvSpPr>
+        <p:spPr>
+          <a:xfrm>
+            <a:off x="626098" y="2365757"/>
+            <a:ext cx="3198728" cy="133452"/>
+          </a:xfrm>
+          <a:prstGeom prst="rect">
+            <a:avLst/>
+          </a:prstGeom>
+          <a:noFill/>
+          <a:ln/>
+        </p:spPr>
+        <p:txBody>
+          <a:bodyPr wrap="square" lIns="0" tIns="0" rIns="0" bIns="0" rtlCol="0" anchor="t"/>
+          <a:lstStyle/>
+          <a:p>
+            <a:pPr indent="0" marL="0">
+              <a:lnSpc>
+                <a:spcPts val="1051"/>
+              </a:lnSpc>
+              <a:buNone/>
+            </a:pPr>
+            <a:r>
+              <a:rPr lang="en-US" sz="740" dirty="0">
+                <a:solidFill>
+                  <a:srgbClr val="4A5565"/>
+                </a:solidFill>
+                <a:latin typeface="Poppins" pitchFamily="34" charset="0"/>
+                <a:ea typeface="Poppins" pitchFamily="34" charset="-122"/>
+                <a:cs typeface="Poppins" pitchFamily="34" charset="-120"/>
+              </a:rPr>
+              <a:t>Brand ambassadors named: Kurt, Troy, Mitch, Aden, Ash</a:t>
+            </a:r>
+            <a:endParaRPr lang="en-US" sz="740" dirty="0"/>
+          </a:p>
+        </p:txBody>
+      </p:sp>
+      <p:sp>
+        <p:nvSpPr>
+          <p:cNvPr id="28" name="Shape 24"/>
+          <p:cNvSpPr/>
+          <p:nvPr/>
+        </p:nvSpPr>
+        <p:spPr>
+          <a:xfrm>
+            <a:off x="532498" y="2580277"/>
+            <a:ext cx="50400" cy="50400"/>
+          </a:xfrm>
+          <a:prstGeom prst="rect">
+            <a:avLst/>
+          </a:prstGeom>
+          <a:solidFill>
+            <a:srgbClr val="0066FF"/>
+          </a:solidFill>
+          <a:ln w="12700">
+            <a:solidFill>
+              <a:srgbClr val="333333"/>
+            </a:solidFill>
+            <a:prstDash val="solid"/>
+          </a:ln>
+        </p:spPr>
+      </p:sp>
+      <p:sp>
+        <p:nvSpPr>
+          <p:cNvPr id="29" name="Text 25"/>
+          <p:cNvSpPr txBox="1"/>
+          <p:nvPr/>
+        </p:nvSpPr>
+        <p:spPr>
+          <a:xfrm>
+            <a:off x="626098" y="2542409"/>
+            <a:ext cx="3198728" cy="133452"/>
+          </a:xfrm>
+          <a:prstGeom prst="rect">
+            <a:avLst/>
+          </a:prstGeom>
+          <a:noFill/>
+          <a:ln/>
+        </p:spPr>
+        <p:txBody>
+          <a:bodyPr wrap="square" lIns="0" tIns="0" rIns="0" bIns="0" rtlCol="0" anchor="t"/>
+          <a:lstStyle/>
+          <a:p>
+            <a:pPr indent="0" marL="0">
+              <a:lnSpc>
+                <a:spcPts val="1051"/>
+              </a:lnSpc>
+              <a:buNone/>
+            </a:pPr>
+            <a:r>
+              <a:rPr lang="en-US" sz="740" dirty="0">
+                <a:solidFill>
+                  <a:srgbClr val="4A5565"/>
+                </a:solidFill>
+                <a:latin typeface="Poppins" pitchFamily="34" charset="0"/>
+                <a:ea typeface="Poppins" pitchFamily="34" charset="-122"/>
+                <a:cs typeface="Poppins" pitchFamily="34" charset="-120"/>
+              </a:rPr>
+              <a:t>Oktoberfest and the keg system giveaway</a:t>
+            </a:r>
+            <a:endParaRPr lang="en-US" sz="740" dirty="0"/>
+          </a:p>
+        </p:txBody>
+      </p:sp>
+      <p:sp>
+        <p:nvSpPr>
+          <p:cNvPr id="30" name="Shape 26"/>
           <p:cNvSpPr/>
           <p:nvPr/>
         </p:nvSpPr>
@@ -17762,7 +18958,7 @@
       </p:sp>
       <p:sp>
         <p:nvSpPr>
-          <p:cNvPr id="27" name="Shape 23"/>
+          <p:cNvPr id="31" name="Shape 27"/>
           <p:cNvSpPr/>
           <p:nvPr/>
         </p:nvSpPr>
@@ -17787,7 +18983,7 @@
       </p:sp>
       <p:sp>
         <p:nvSpPr>
-          <p:cNvPr id="28" name="Text 24"/>
+          <p:cNvPr id="32" name="Text 28"/>
           <p:cNvSpPr txBox="1"/>
           <p:nvPr/>
         </p:nvSpPr>
@@ -17821,7 +19017,7 @@
                 <a:ea typeface="Poppins" pitchFamily="34" charset="-122"/>
                 <a:cs typeface="Poppins" pitchFamily="34" charset="-120"/>
               </a:rPr>
-              <a:t>SPRINT 1 · 22 SEPT TO 17 OCT</a:t>
+              <a:t>3 MONTHS · TO MID-DECEMBER</a:t>
             </a:r>
             <a:endParaRPr lang="en-US" sz="650" dirty="0"/>
           </a:p>
@@ -17829,7 +19025,7 @@
       </p:sp>
       <p:sp>
         <p:nvSpPr>
-          <p:cNvPr id="29" name="Shape 25"/>
+          <p:cNvPr id="33" name="Shape 29"/>
           <p:cNvSpPr/>
           <p:nvPr/>
         </p:nvSpPr>
@@ -17854,7 +19050,7 @@
       </p:sp>
       <p:sp>
         <p:nvSpPr>
-          <p:cNvPr id="30" name="Text 26"/>
+          <p:cNvPr id="34" name="Text 30"/>
           <p:cNvSpPr txBox="1"/>
           <p:nvPr/>
         </p:nvSpPr>
@@ -17888,7 +19084,7 @@
                 <a:ea typeface="Poppins" pitchFamily="34" charset="-122"/>
                 <a:cs typeface="Poppins" pitchFamily="34" charset="-120"/>
               </a:rPr>
-              <a:t>Connect website, POS and CRM</a:t>
+              <a:t>Website upgrade, SEM, GoTab and Fishbowl transition</a:t>
             </a:r>
             <a:endParaRPr lang="en-US" sz="740" dirty="0"/>
           </a:p>
@@ -17896,7 +19092,7 @@
       </p:sp>
       <p:sp>
         <p:nvSpPr>
-          <p:cNvPr id="31" name="Shape 27"/>
+          <p:cNvPr id="35" name="Shape 31"/>
           <p:cNvSpPr/>
           <p:nvPr/>
         </p:nvSpPr>
@@ -17921,7 +19117,7 @@
       </p:sp>
       <p:sp>
         <p:nvSpPr>
-          <p:cNvPr id="32" name="Text 28"/>
+          <p:cNvPr id="36" name="Text 32"/>
           <p:cNvSpPr txBox="1"/>
           <p:nvPr/>
         </p:nvSpPr>
@@ -17955,7 +19151,7 @@
                 <a:ea typeface="Poppins" pitchFamily="34" charset="-122"/>
                 <a:cs typeface="Poppins" pitchFamily="34" charset="-120"/>
               </a:rPr>
-              <a:t>Consumption-triggered reminders replace the 90-day SMS</a:t>
+              <a:t>Lease-to-buy keg systems and delivery service</a:t>
             </a:r>
             <a:endParaRPr lang="en-US" sz="740" dirty="0"/>
           </a:p>
@@ -17963,7 +19159,7 @@
       </p:sp>
       <p:sp>
         <p:nvSpPr>
-          <p:cNvPr id="33" name="Shape 29"/>
+          <p:cNvPr id="37" name="Shape 33"/>
           <p:cNvSpPr/>
           <p:nvPr/>
         </p:nvSpPr>
@@ -17988,7 +19184,7 @@
       </p:sp>
       <p:sp>
         <p:nvSpPr>
-          <p:cNvPr id="34" name="Text 30"/>
+          <p:cNvPr id="38" name="Text 34"/>
           <p:cNvSpPr txBox="1"/>
           <p:nvPr/>
         </p:nvSpPr>
@@ -18022,7 +19218,7 @@
                 <a:ea typeface="Poppins" pitchFamily="34" charset="-122"/>
                 <a:cs typeface="Poppins" pitchFamily="34" charset="-120"/>
               </a:rPr>
-              <a:t>Destination offer live: tours, weddings, functions</a:t>
+              <a:t>JVPs, referral partners; referral programme, Bring a Mate</a:t>
             </a:r>
             <a:endParaRPr lang="en-US" sz="740" dirty="0"/>
           </a:p>
@@ -18030,7 +19226,7 @@
       </p:sp>
       <p:sp>
         <p:nvSpPr>
-          <p:cNvPr id="35" name="Shape 31"/>
+          <p:cNvPr id="39" name="Shape 35"/>
           <p:cNvSpPr/>
           <p:nvPr/>
         </p:nvSpPr>
@@ -18055,7 +19251,7 @@
       </p:sp>
       <p:sp>
         <p:nvSpPr>
-          <p:cNvPr id="36" name="Text 32"/>
+          <p:cNvPr id="40" name="Text 36"/>
           <p:cNvSpPr txBox="1"/>
           <p:nvPr/>
         </p:nvSpPr>
@@ -18089,7 +19285,7 @@
                 <a:ea typeface="Poppins" pitchFamily="34" charset="-122"/>
                 <a:cs typeface="Poppins" pitchFamily="34" charset="-120"/>
               </a:rPr>
-              <a:t>Harvey Norman and Kegland conversations opened</a:t>
+              <a:t>Existing-owner switch strategy, lapsed re-engagement system</a:t>
             </a:r>
             <a:endParaRPr lang="en-US" sz="740" dirty="0"/>
           </a:p>
@@ -18097,7 +19293,141 @@
       </p:sp>
       <p:sp>
         <p:nvSpPr>
-          <p:cNvPr id="37" name="Shape 33"/>
+          <p:cNvPr id="41" name="Shape 37"/>
+          <p:cNvSpPr/>
+          <p:nvPr/>
+        </p:nvSpPr>
+        <p:spPr>
+          <a:xfrm>
+            <a:off x="4119925" y="2403626"/>
+            <a:ext cx="50400" cy="50400"/>
+          </a:xfrm>
+          <a:prstGeom prst="rect">
+            <a:avLst/>
+          </a:prstGeom>
+          <a:solidFill>
+            <a:srgbClr val="0066FF"/>
+          </a:solidFill>
+          <a:ln w="12700">
+            <a:solidFill>
+              <a:srgbClr val="333333"/>
+            </a:solidFill>
+            <a:prstDash val="solid"/>
+          </a:ln>
+        </p:spPr>
+      </p:sp>
+      <p:sp>
+        <p:nvSpPr>
+          <p:cNvPr id="42" name="Text 38"/>
+          <p:cNvSpPr txBox="1"/>
+          <p:nvPr/>
+        </p:nvSpPr>
+        <p:spPr>
+          <a:xfrm>
+            <a:off x="4213525" y="2365757"/>
+            <a:ext cx="3198728" cy="133452"/>
+          </a:xfrm>
+          <a:prstGeom prst="rect">
+            <a:avLst/>
+          </a:prstGeom>
+          <a:noFill/>
+          <a:ln/>
+        </p:spPr>
+        <p:txBody>
+          <a:bodyPr wrap="square" lIns="0" tIns="0" rIns="0" bIns="0" rtlCol="0" anchor="t"/>
+          <a:lstStyle/>
+          <a:p>
+            <a:pPr indent="0" marL="0">
+              <a:lnSpc>
+                <a:spcPts val="1051"/>
+              </a:lnSpc>
+              <a:buNone/>
+            </a:pPr>
+            <a:r>
+              <a:rPr lang="en-US" sz="740" dirty="0">
+                <a:solidFill>
+                  <a:srgbClr val="4A5565"/>
+                </a:solidFill>
+                <a:latin typeface="Poppins" pitchFamily="34" charset="0"/>
+                <a:ea typeface="Poppins" pitchFamily="34" charset="-122"/>
+                <a:cs typeface="Poppins" pitchFamily="34" charset="-120"/>
+              </a:rPr>
+              <a:t>Taproom: local business, events, membership</a:t>
+            </a:r>
+            <a:endParaRPr lang="en-US" sz="740" dirty="0"/>
+          </a:p>
+        </p:txBody>
+      </p:sp>
+      <p:sp>
+        <p:nvSpPr>
+          <p:cNvPr id="43" name="Shape 39"/>
+          <p:cNvSpPr/>
+          <p:nvPr/>
+        </p:nvSpPr>
+        <p:spPr>
+          <a:xfrm>
+            <a:off x="4119925" y="2580277"/>
+            <a:ext cx="50400" cy="50400"/>
+          </a:xfrm>
+          <a:prstGeom prst="rect">
+            <a:avLst/>
+          </a:prstGeom>
+          <a:solidFill>
+            <a:srgbClr val="0066FF"/>
+          </a:solidFill>
+          <a:ln w="12700">
+            <a:solidFill>
+              <a:srgbClr val="333333"/>
+            </a:solidFill>
+            <a:prstDash val="solid"/>
+          </a:ln>
+        </p:spPr>
+      </p:sp>
+      <p:sp>
+        <p:nvSpPr>
+          <p:cNvPr id="44" name="Text 40"/>
+          <p:cNvSpPr txBox="1"/>
+          <p:nvPr/>
+        </p:nvSpPr>
+        <p:spPr>
+          <a:xfrm>
+            <a:off x="4213525" y="2542409"/>
+            <a:ext cx="3198728" cy="133452"/>
+          </a:xfrm>
+          <a:prstGeom prst="rect">
+            <a:avLst/>
+          </a:prstGeom>
+          <a:noFill/>
+          <a:ln/>
+        </p:spPr>
+        <p:txBody>
+          <a:bodyPr wrap="square" lIns="0" tIns="0" rIns="0" bIns="0" rtlCol="0" anchor="t"/>
+          <a:lstStyle/>
+          <a:p>
+            <a:pPr indent="0" marL="0">
+              <a:lnSpc>
+                <a:spcPts val="1051"/>
+              </a:lnSpc>
+              <a:buNone/>
+            </a:pPr>
+            <a:r>
+              <a:rPr lang="en-US" sz="740" dirty="0">
+                <a:solidFill>
+                  <a:srgbClr val="4A5565"/>
+                </a:solidFill>
+                <a:latin typeface="Poppins" pitchFamily="34" charset="0"/>
+                <a:ea typeface="Poppins" pitchFamily="34" charset="-122"/>
+                <a:cs typeface="Poppins" pitchFamily="34" charset="-120"/>
+              </a:rPr>
+              <a:t>Wholesale outreach; next hire decided</a:t>
+            </a:r>
+            <a:endParaRPr lang="en-US" sz="740" dirty="0"/>
+          </a:p>
+        </p:txBody>
+      </p:sp>
+      <p:sp>
+        <p:nvSpPr>
+          <p:cNvPr id="45" name="Shape 41"/>
           <p:cNvSpPr/>
           <p:nvPr/>
         </p:nvSpPr>
@@ -18122,7 +19452,7 @@
       </p:sp>
       <p:sp>
         <p:nvSpPr>
-          <p:cNvPr id="38" name="Shape 34"/>
+          <p:cNvPr id="46" name="Shape 42"/>
           <p:cNvSpPr/>
           <p:nvPr/>
         </p:nvSpPr>
@@ -18147,7 +19477,7 @@
       </p:sp>
       <p:sp>
         <p:nvSpPr>
-          <p:cNvPr id="39" name="Text 35"/>
+          <p:cNvPr id="47" name="Text 43"/>
           <p:cNvSpPr txBox="1"/>
           <p:nvPr/>
         </p:nvSpPr>
@@ -18181,7 +19511,7 @@
                 <a:ea typeface="Poppins" pitchFamily="34" charset="-122"/>
                 <a:cs typeface="Poppins" pitchFamily="34" charset="-120"/>
               </a:rPr>
-              <a:t>SPRINT 2 · 20 OCT TO 14 NOV</a:t>
+              <a:t>6 MONTHS · TO MARCH 2027</a:t>
             </a:r>
             <a:endParaRPr lang="en-US" sz="650" dirty="0"/>
           </a:p>
@@ -18189,7 +19519,7 @@
       </p:sp>
       <p:sp>
         <p:nvSpPr>
-          <p:cNvPr id="40" name="Shape 36"/>
+          <p:cNvPr id="48" name="Shape 44"/>
           <p:cNvSpPr/>
           <p:nvPr/>
         </p:nvSpPr>
@@ -18214,7 +19544,7 @@
       </p:sp>
       <p:sp>
         <p:nvSpPr>
-          <p:cNvPr id="41" name="Text 37"/>
+          <p:cNvPr id="49" name="Text 45"/>
           <p:cNvSpPr txBox="1"/>
           <p:nvPr/>
         </p:nvSpPr>
@@ -18248,7 +19578,7 @@
                 <a:ea typeface="Poppins" pitchFamily="34" charset="-122"/>
                 <a:cs typeface="Poppins" pitchFamily="34" charset="-120"/>
               </a:rPr>
-              <a:t>Wholesale role starts, with targets</a:t>
+              <a:t>250 active keg refillers reached</a:t>
             </a:r>
             <a:endParaRPr lang="en-US" sz="740" dirty="0"/>
           </a:p>
@@ -18256,7 +19586,7 @@
       </p:sp>
       <p:sp>
         <p:nvSpPr>
-          <p:cNvPr id="42" name="Shape 38"/>
+          <p:cNvPr id="50" name="Shape 46"/>
           <p:cNvSpPr/>
           <p:nvPr/>
         </p:nvSpPr>
@@ -18281,7 +19611,7 @@
       </p:sp>
       <p:sp>
         <p:nvSpPr>
-          <p:cNvPr id="43" name="Text 39"/>
+          <p:cNvPr id="51" name="Text 47"/>
           <p:cNvSpPr txBox="1"/>
           <p:nvPr/>
         </p:nvSpPr>
@@ -18315,7 +19645,7 @@
                 <a:ea typeface="Poppins" pitchFamily="34" charset="-122"/>
                 <a:cs typeface="Poppins" pitchFamily="34" charset="-120"/>
               </a:rPr>
-              <a:t>Membership attached to every system sale</a:t>
+              <a:t>Career pathways defined for Chris and Harry</a:t>
             </a:r>
             <a:endParaRPr lang="en-US" sz="740" dirty="0"/>
           </a:p>
@@ -18323,14 +19653,39 @@
       </p:sp>
       <p:sp>
         <p:nvSpPr>
-          <p:cNvPr id="44" name="Shape 40"/>
+          <p:cNvPr id="52" name="Shape 48"/>
           <p:cNvSpPr/>
           <p:nvPr/>
         </p:nvSpPr>
         <p:spPr>
           <a:xfrm>
-            <a:off x="7707352" y="2050322"/>
-            <a:ext cx="50400" cy="50400"/>
+            <a:off x="11201179" y="1400636"/>
+            <a:ext cx="3479528" cy="2444386"/>
+          </a:xfrm>
+          <a:prstGeom prst="rect">
+            <a:avLst/>
+          </a:prstGeom>
+          <a:solidFill>
+            <a:srgbClr val="F5F7FA"/>
+          </a:solidFill>
+          <a:ln w="7620">
+            <a:solidFill>
+              <a:srgbClr val="E3E7EC"/>
+            </a:solidFill>
+            <a:prstDash val="solid"/>
+          </a:ln>
+        </p:spPr>
+      </p:sp>
+      <p:sp>
+        <p:nvSpPr>
+          <p:cNvPr id="53" name="Shape 49"/>
+          <p:cNvSpPr/>
+          <p:nvPr/>
+        </p:nvSpPr>
+        <p:spPr>
+          <a:xfrm>
+            <a:off x="11201179" y="1400636"/>
+            <a:ext cx="3479528" cy="28800"/>
           </a:xfrm>
           <a:prstGeom prst="rect">
             <a:avLst/>
@@ -18348,14 +19703,14 @@
       </p:sp>
       <p:sp>
         <p:nvSpPr>
-          <p:cNvPr id="45" name="Text 41"/>
+          <p:cNvPr id="54" name="Text 50"/>
           <p:cNvSpPr txBox="1"/>
           <p:nvPr/>
         </p:nvSpPr>
         <p:spPr>
           <a:xfrm>
-            <a:off x="7800952" y="2012454"/>
-            <a:ext cx="3198728" cy="133452"/>
+            <a:off x="11294779" y="1494236"/>
+            <a:ext cx="3292328" cy="107315"/>
           </a:xfrm>
           <a:prstGeom prst="rect">
             <a:avLst/>
@@ -18369,34 +19724,34 @@
           <a:p>
             <a:pPr indent="0" marL="0">
               <a:lnSpc>
-                <a:spcPts val="1051"/>
-              </a:lnSpc>
-              <a:buNone/>
-            </a:pPr>
-            <a:r>
-              <a:rPr lang="en-US" sz="740" dirty="0">
-                <a:solidFill>
-                  <a:srgbClr val="4A5565"/>
-                </a:solidFill>
-                <a:latin typeface="Poppins" pitchFamily="34" charset="0"/>
-                <a:ea typeface="Poppins" pitchFamily="34" charset="-122"/>
-                <a:cs typeface="Poppins" pitchFamily="34" charset="-120"/>
-              </a:rPr>
-              <a:t>Award and proof assets across site and venue</a:t>
-            </a:r>
-            <a:endParaRPr lang="en-US" sz="740" dirty="0"/>
-          </a:p>
-        </p:txBody>
-      </p:sp>
-      <p:sp>
-        <p:nvSpPr>
-          <p:cNvPr id="46" name="Shape 42"/>
+                <a:spcPts val="845"/>
+              </a:lnSpc>
+              <a:buNone/>
+            </a:pPr>
+            <a:r>
+              <a:rPr lang="en-US" sz="650" b="1" spc="65" kern="0" dirty="0">
+                <a:solidFill>
+                  <a:srgbClr val="0066FF"/>
+                </a:solidFill>
+                <a:latin typeface="Poppins" pitchFamily="34" charset="0"/>
+                <a:ea typeface="Poppins" pitchFamily="34" charset="-122"/>
+                <a:cs typeface="Poppins" pitchFamily="34" charset="-120"/>
+              </a:rPr>
+              <a:t>1 YEAR · TO SEPTEMBER 2027</a:t>
+            </a:r>
+            <a:endParaRPr lang="en-US" sz="650" dirty="0"/>
+          </a:p>
+        </p:txBody>
+      </p:sp>
+      <p:sp>
+        <p:nvSpPr>
+          <p:cNvPr id="55" name="Shape 51"/>
           <p:cNvSpPr/>
           <p:nvPr/>
         </p:nvSpPr>
         <p:spPr>
           <a:xfrm>
-            <a:off x="7707352" y="2226974"/>
+            <a:off x="11294779" y="1697019"/>
             <a:ext cx="50400" cy="50400"/>
           </a:xfrm>
           <a:prstGeom prst="rect">
@@ -18415,13 +19770,13 @@
       </p:sp>
       <p:sp>
         <p:nvSpPr>
-          <p:cNvPr id="47" name="Text 43"/>
+          <p:cNvPr id="56" name="Text 52"/>
           <p:cNvSpPr txBox="1"/>
           <p:nvPr/>
         </p:nvSpPr>
         <p:spPr>
           <a:xfrm>
-            <a:off x="7800952" y="2189106"/>
+            <a:off x="11388379" y="1659151"/>
             <a:ext cx="3198728" cy="133452"/>
           </a:xfrm>
           <a:prstGeom prst="rect">
@@ -18449,7 +19804,7 @@
                 <a:ea typeface="Poppins" pitchFamily="34" charset="-122"/>
                 <a:cs typeface="Poppins" pitchFamily="34" charset="-120"/>
               </a:rPr>
-              <a:t>Lapsed split into forgot and cutting back</a:t>
+              <a:t>Referrals, JVPs and online driving most system sales</a:t>
             </a:r>
             <a:endParaRPr lang="en-US" sz="740" dirty="0"/>
           </a:p>
@@ -18457,39 +19812,14 @@
       </p:sp>
       <p:sp>
         <p:nvSpPr>
-          <p:cNvPr id="48" name="Shape 44"/>
+          <p:cNvPr id="57" name="Shape 53"/>
           <p:cNvSpPr/>
           <p:nvPr/>
         </p:nvSpPr>
         <p:spPr>
           <a:xfrm>
-            <a:off x="11201179" y="1400636"/>
-            <a:ext cx="3479528" cy="2444386"/>
-          </a:xfrm>
-          <a:prstGeom prst="rect">
-            <a:avLst/>
-          </a:prstGeom>
-          <a:solidFill>
-            <a:srgbClr val="F5F7FA"/>
-          </a:solidFill>
-          <a:ln w="7620">
-            <a:solidFill>
-              <a:srgbClr val="E3E7EC"/>
-            </a:solidFill>
-            <a:prstDash val="solid"/>
-          </a:ln>
-        </p:spPr>
-      </p:sp>
-      <p:sp>
-        <p:nvSpPr>
-          <p:cNvPr id="49" name="Shape 45"/>
-          <p:cNvSpPr/>
-          <p:nvPr/>
-        </p:nvSpPr>
-        <p:spPr>
-          <a:xfrm>
-            <a:off x="11201179" y="1400636"/>
-            <a:ext cx="3479528" cy="28800"/>
+            <a:off x="11294779" y="1873671"/>
+            <a:ext cx="50400" cy="50400"/>
           </a:xfrm>
           <a:prstGeom prst="rect">
             <a:avLst/>
@@ -18507,14 +19837,14 @@
       </p:sp>
       <p:sp>
         <p:nvSpPr>
-          <p:cNvPr id="50" name="Text 46"/>
+          <p:cNvPr id="58" name="Text 54"/>
           <p:cNvSpPr txBox="1"/>
           <p:nvPr/>
         </p:nvSpPr>
         <p:spPr>
           <a:xfrm>
-            <a:off x="11294779" y="1494236"/>
-            <a:ext cx="3292328" cy="107315"/>
+            <a:off x="11388379" y="1835803"/>
+            <a:ext cx="3198728" cy="133452"/>
           </a:xfrm>
           <a:prstGeom prst="rect">
             <a:avLst/>
@@ -18528,34 +19858,34 @@
           <a:p>
             <a:pPr indent="0" marL="0">
               <a:lnSpc>
-                <a:spcPts val="845"/>
-              </a:lnSpc>
-              <a:buNone/>
-            </a:pPr>
-            <a:r>
-              <a:rPr lang="en-US" sz="650" b="1" spc="65" kern="0" dirty="0">
-                <a:solidFill>
-                  <a:srgbClr val="0066FF"/>
-                </a:solidFill>
-                <a:latin typeface="Poppins" pitchFamily="34" charset="0"/>
-                <a:ea typeface="Poppins" pitchFamily="34" charset="-122"/>
-                <a:cs typeface="Poppins" pitchFamily="34" charset="-120"/>
-              </a:rPr>
-              <a:t>SPRINT 3 · 17 NOV TO 12 DEC</a:t>
-            </a:r>
-            <a:endParaRPr lang="en-US" sz="650" dirty="0"/>
-          </a:p>
-        </p:txBody>
-      </p:sp>
-      <p:sp>
-        <p:nvSpPr>
-          <p:cNvPr id="51" name="Shape 47"/>
+                <a:spcPts val="1051"/>
+              </a:lnSpc>
+              <a:buNone/>
+            </a:pPr>
+            <a:r>
+              <a:rPr lang="en-US" sz="740" dirty="0">
+                <a:solidFill>
+                  <a:srgbClr val="4A5565"/>
+                </a:solidFill>
+                <a:latin typeface="Poppins" pitchFamily="34" charset="0"/>
+                <a:ea typeface="Poppins" pitchFamily="34" charset="-122"/>
+                <a:cs typeface="Poppins" pitchFamily="34" charset="-120"/>
+              </a:rPr>
+              <a:t>Replicable events and promotions calendar in place</a:t>
+            </a:r>
+            <a:endParaRPr lang="en-US" sz="740" dirty="0"/>
+          </a:p>
+        </p:txBody>
+      </p:sp>
+      <p:sp>
+        <p:nvSpPr>
+          <p:cNvPr id="59" name="Shape 55"/>
           <p:cNvSpPr/>
           <p:nvPr/>
         </p:nvSpPr>
         <p:spPr>
           <a:xfrm>
-            <a:off x="11294779" y="1697019"/>
+            <a:off x="11294779" y="2050322"/>
             <a:ext cx="50400" cy="50400"/>
           </a:xfrm>
           <a:prstGeom prst="rect">
@@ -18574,141 +19904,7 @@
       </p:sp>
       <p:sp>
         <p:nvSpPr>
-          <p:cNvPr id="52" name="Text 48"/>
-          <p:cNvSpPr txBox="1"/>
-          <p:nvPr/>
-        </p:nvSpPr>
-        <p:spPr>
-          <a:xfrm>
-            <a:off x="11388379" y="1659151"/>
-            <a:ext cx="3198728" cy="133452"/>
-          </a:xfrm>
-          <a:prstGeom prst="rect">
-            <a:avLst/>
-          </a:prstGeom>
-          <a:noFill/>
-          <a:ln/>
-        </p:spPr>
-        <p:txBody>
-          <a:bodyPr wrap="square" lIns="0" tIns="0" rIns="0" bIns="0" rtlCol="0" anchor="t"/>
-          <a:lstStyle/>
-          <a:p>
-            <a:pPr indent="0" marL="0">
-              <a:lnSpc>
-                <a:spcPts val="1051"/>
-              </a:lnSpc>
-              <a:buNone/>
-            </a:pPr>
-            <a:r>
-              <a:rPr lang="en-US" sz="740" dirty="0">
-                <a:solidFill>
-                  <a:srgbClr val="4A5565"/>
-                </a:solidFill>
-                <a:latin typeface="Poppins" pitchFamily="34" charset="0"/>
-                <a:ea typeface="Poppins" pitchFamily="34" charset="-122"/>
-                <a:cs typeface="Poppins" pitchFamily="34" charset="-120"/>
-              </a:rPr>
-              <a:t>Range cut to heroes, with the marketing behind them</a:t>
-            </a:r>
-            <a:endParaRPr lang="en-US" sz="740" dirty="0"/>
-          </a:p>
-        </p:txBody>
-      </p:sp>
-      <p:sp>
-        <p:nvSpPr>
-          <p:cNvPr id="53" name="Shape 49"/>
-          <p:cNvSpPr/>
-          <p:nvPr/>
-        </p:nvSpPr>
-        <p:spPr>
-          <a:xfrm>
-            <a:off x="11294779" y="1873671"/>
-            <a:ext cx="50400" cy="50400"/>
-          </a:xfrm>
-          <a:prstGeom prst="rect">
-            <a:avLst/>
-          </a:prstGeom>
-          <a:solidFill>
-            <a:srgbClr val="0066FF"/>
-          </a:solidFill>
-          <a:ln w="12700">
-            <a:solidFill>
-              <a:srgbClr val="333333"/>
-            </a:solidFill>
-            <a:prstDash val="solid"/>
-          </a:ln>
-        </p:spPr>
-      </p:sp>
-      <p:sp>
-        <p:nvSpPr>
-          <p:cNvPr id="54" name="Text 50"/>
-          <p:cNvSpPr txBox="1"/>
-          <p:nvPr/>
-        </p:nvSpPr>
-        <p:spPr>
-          <a:xfrm>
-            <a:off x="11388379" y="1835803"/>
-            <a:ext cx="3198728" cy="133452"/>
-          </a:xfrm>
-          <a:prstGeom prst="rect">
-            <a:avLst/>
-          </a:prstGeom>
-          <a:noFill/>
-          <a:ln/>
-        </p:spPr>
-        <p:txBody>
-          <a:bodyPr wrap="square" lIns="0" tIns="0" rIns="0" bIns="0" rtlCol="0" anchor="t"/>
-          <a:lstStyle/>
-          <a:p>
-            <a:pPr indent="0" marL="0">
-              <a:lnSpc>
-                <a:spcPts val="1051"/>
-              </a:lnSpc>
-              <a:buNone/>
-            </a:pPr>
-            <a:r>
-              <a:rPr lang="en-US" sz="740" dirty="0">
-                <a:solidFill>
-                  <a:srgbClr val="4A5565"/>
-                </a:solidFill>
-                <a:latin typeface="Poppins" pitchFamily="34" charset="0"/>
-                <a:ea typeface="Poppins" pitchFamily="34" charset="-122"/>
-                <a:cs typeface="Poppins" pitchFamily="34" charset="-120"/>
-              </a:rPr>
-              <a:t>Wellness and light range briefed</a:t>
-            </a:r>
-            <a:endParaRPr lang="en-US" sz="740" dirty="0"/>
-          </a:p>
-        </p:txBody>
-      </p:sp>
-      <p:sp>
-        <p:nvSpPr>
-          <p:cNvPr id="55" name="Shape 51"/>
-          <p:cNvSpPr/>
-          <p:nvPr/>
-        </p:nvSpPr>
-        <p:spPr>
-          <a:xfrm>
-            <a:off x="11294779" y="2050322"/>
-            <a:ext cx="50400" cy="50400"/>
-          </a:xfrm>
-          <a:prstGeom prst="rect">
-            <a:avLst/>
-          </a:prstGeom>
-          <a:solidFill>
-            <a:srgbClr val="0066FF"/>
-          </a:solidFill>
-          <a:ln w="12700">
-            <a:solidFill>
-              <a:srgbClr val="333333"/>
-            </a:solidFill>
-            <a:prstDash val="solid"/>
-          </a:ln>
-        </p:spPr>
-      </p:sp>
-      <p:sp>
-        <p:nvSpPr>
-          <p:cNvPr id="56" name="Text 52"/>
+          <p:cNvPr id="60" name="Text 56"/>
           <p:cNvSpPr txBox="1"/>
           <p:nvPr/>
         </p:nvSpPr>
@@ -18742,7 +19938,7 @@
                 <a:ea typeface="Poppins" pitchFamily="34" charset="-122"/>
                 <a:cs typeface="Poppins" pitchFamily="34" charset="-120"/>
               </a:rPr>
-              <a:t>Designing for her, as a product brief</a:t>
+              <a:t>Cashflow positive, JM on a wage</a:t>
             </a:r>
             <a:endParaRPr lang="en-US" sz="740" dirty="0"/>
           </a:p>
@@ -18750,74 +19946,7 @@
       </p:sp>
       <p:sp>
         <p:nvSpPr>
-          <p:cNvPr id="57" name="Shape 53"/>
-          <p:cNvSpPr/>
-          <p:nvPr/>
-        </p:nvSpPr>
-        <p:spPr>
-          <a:xfrm>
-            <a:off x="11294779" y="2226974"/>
-            <a:ext cx="50400" cy="50400"/>
-          </a:xfrm>
-          <a:prstGeom prst="rect">
-            <a:avLst/>
-          </a:prstGeom>
-          <a:solidFill>
-            <a:srgbClr val="0066FF"/>
-          </a:solidFill>
-          <a:ln w="12700">
-            <a:solidFill>
-              <a:srgbClr val="333333"/>
-            </a:solidFill>
-            <a:prstDash val="solid"/>
-          </a:ln>
-        </p:spPr>
-      </p:sp>
-      <p:sp>
-        <p:nvSpPr>
-          <p:cNvPr id="58" name="Text 54"/>
-          <p:cNvSpPr txBox="1"/>
-          <p:nvPr/>
-        </p:nvSpPr>
-        <p:spPr>
-          <a:xfrm>
-            <a:off x="11388379" y="2189106"/>
-            <a:ext cx="3198728" cy="133452"/>
-          </a:xfrm>
-          <a:prstGeom prst="rect">
-            <a:avLst/>
-          </a:prstGeom>
-          <a:noFill/>
-          <a:ln/>
-        </p:spPr>
-        <p:txBody>
-          <a:bodyPr wrap="square" lIns="0" tIns="0" rIns="0" bIns="0" rtlCol="0" anchor="t"/>
-          <a:lstStyle/>
-          <a:p>
-            <a:pPr indent="0" marL="0">
-              <a:lnSpc>
-                <a:spcPts val="1051"/>
-              </a:lnSpc>
-              <a:buNone/>
-            </a:pPr>
-            <a:r>
-              <a:rPr lang="en-US" sz="740" dirty="0">
-                <a:solidFill>
-                  <a:srgbClr val="4A5565"/>
-                </a:solidFill>
-                <a:latin typeface="Poppins" pitchFamily="34" charset="0"/>
-                <a:ea typeface="Poppins" pitchFamily="34" charset="-122"/>
-                <a:cs typeface="Poppins" pitchFamily="34" charset="-120"/>
-              </a:rPr>
-              <a:t>Canning decision taken on costed numbers</a:t>
-            </a:r>
-            <a:endParaRPr lang="en-US" sz="740" dirty="0"/>
-          </a:p>
-        </p:txBody>
-      </p:sp>
-      <p:sp>
-        <p:nvSpPr>
-          <p:cNvPr id="59" name="Shape 55"/>
+          <p:cNvPr id="61" name="Shape 57"/>
           <p:cNvSpPr/>
           <p:nvPr/>
         </p:nvSpPr>
@@ -18840,7 +19969,7 @@
       </p:sp>
       <p:sp>
         <p:nvSpPr>
-          <p:cNvPr id="60" name="Text 56"/>
+          <p:cNvPr id="62" name="Text 58"/>
           <p:cNvSpPr txBox="1"/>
           <p:nvPr/>
         </p:nvSpPr>
@@ -18874,7 +20003,7 @@
                 <a:ea typeface="Poppins" pitchFamily="34" charset="-122"/>
                 <a:cs typeface="Poppins" pitchFamily="34" charset="-120"/>
               </a:rPr>
-              <a:t>Clent is overseas from the end of September. Sprint 1 ownership needs to survive that.</a:t>
+              <a:t>Longer horizons, 1,000 refillers and proprietary system supply at three years, expansion, franchising and a production facility at five years, exit at ten to twelve, sit on the summary sheet. Clent is overseas from the end of September.</a:t>
             </a:r>
             <a:endParaRPr lang="en-US" sz="700" dirty="0"/>
           </a:p>
@@ -18882,7 +20011,7 @@
       </p:sp>
       <p:sp>
         <p:nvSpPr>
-          <p:cNvPr id="61" name="Shape 57"/>
+          <p:cNvPr id="63" name="Shape 59"/>
           <p:cNvSpPr/>
           <p:nvPr/>
         </p:nvSpPr>
@@ -18907,7 +20036,7 @@
       </p:sp>
       <p:sp>
         <p:nvSpPr>
-          <p:cNvPr id="62" name="Text 58"/>
+          <p:cNvPr id="64" name="Text 60"/>
           <p:cNvSpPr txBox="1"/>
           <p:nvPr/>
         </p:nvSpPr>
@@ -18949,7 +20078,7 @@
       </p:sp>
       <p:sp>
         <p:nvSpPr>
-          <p:cNvPr id="63" name="Text 59"/>
+          <p:cNvPr id="65" name="Text 61"/>
           <p:cNvSpPr txBox="1"/>
           <p:nvPr/>
         </p:nvSpPr>
@@ -18991,132 +20120,14 @@
       </p:sp>
       <p:sp>
         <p:nvSpPr>
-          <p:cNvPr id="64" name="Text 60"/>
-          <p:cNvSpPr txBox="1"/>
-          <p:nvPr/>
-        </p:nvSpPr>
-        <p:spPr>
-          <a:xfrm>
-            <a:off x="438898" y="5036101"/>
-            <a:ext cx="4521737" cy="308610"/>
-          </a:xfrm>
-          <a:prstGeom prst="rect">
-            <a:avLst/>
-          </a:prstGeom>
-          <a:noFill/>
-          <a:ln/>
-        </p:spPr>
-        <p:txBody>
-          <a:bodyPr wrap="square" lIns="0" tIns="0" rIns="0" bIns="0" rtlCol="0" anchor="t"/>
-          <a:lstStyle/>
-          <a:p>
-            <a:pPr indent="0" marL="0">
-              <a:lnSpc>
-                <a:spcPts val="1215"/>
-              </a:lnSpc>
-              <a:buNone/>
-            </a:pPr>
-            <a:r>
-              <a:rPr lang="en-US" sz="810" b="1" dirty="0">
-                <a:solidFill>
-                  <a:srgbClr val="0E171F"/>
-                </a:solidFill>
-                <a:latin typeface="Poppins" pitchFamily="34" charset="0"/>
-                <a:ea typeface="Poppins" pitchFamily="34" charset="-122"/>
-                <a:cs typeface="Poppins" pitchFamily="34" charset="-120"/>
-              </a:rPr>
-              <a:t>Tours. </a:t>
-            </a:r>
-            <a:pPr indent="0" marL="0">
-              <a:lnSpc>
-                <a:spcPts val="1215"/>
-              </a:lnSpc>
-              <a:buNone/>
-            </a:pPr>
-            <a:r>
-              <a:rPr lang="en-US" sz="810" dirty="0">
-                <a:solidFill>
-                  <a:srgbClr val="4A5565"/>
-                </a:solidFill>
-                <a:latin typeface="Poppins" pitchFamily="34" charset="0"/>
-                <a:ea typeface="Poppins" pitchFamily="34" charset="-122"/>
-                <a:cs typeface="Poppins" pitchFamily="34" charset="-120"/>
-              </a:rPr>
-              <a:t>Get onto the circuit. The bus parking is an asset, not a liability. Build the Urban Legends booking widget so operators stop coordinating venue by venue.</a:t>
-            </a:r>
-            <a:endParaRPr lang="en-US" sz="810" dirty="0"/>
-          </a:p>
-        </p:txBody>
-      </p:sp>
-      <p:sp>
-        <p:nvSpPr>
-          <p:cNvPr id="65" name="Text 61"/>
-          <p:cNvSpPr txBox="1"/>
-          <p:nvPr/>
-        </p:nvSpPr>
-        <p:spPr>
-          <a:xfrm>
-            <a:off x="438898" y="5462729"/>
-            <a:ext cx="4521737" cy="462915"/>
-          </a:xfrm>
-          <a:prstGeom prst="rect">
-            <a:avLst/>
-          </a:prstGeom>
-          <a:noFill/>
-          <a:ln/>
-        </p:spPr>
-        <p:txBody>
-          <a:bodyPr wrap="square" lIns="0" tIns="0" rIns="0" bIns="0" rtlCol="0" anchor="t"/>
-          <a:lstStyle/>
-          <a:p>
-            <a:pPr indent="0" marL="0">
-              <a:lnSpc>
-                <a:spcPts val="1215"/>
-              </a:lnSpc>
-              <a:buNone/>
-            </a:pPr>
-            <a:r>
-              <a:rPr lang="en-US" sz="810" b="1" dirty="0">
-                <a:solidFill>
-                  <a:srgbClr val="0E171F"/>
-                </a:solidFill>
-                <a:latin typeface="Poppins" pitchFamily="34" charset="0"/>
-                <a:ea typeface="Poppins" pitchFamily="34" charset="-122"/>
-                <a:cs typeface="Poppins" pitchFamily="34" charset="-120"/>
-              </a:rPr>
-              <a:t>Weddings and functions. </a:t>
-            </a:r>
-            <a:pPr indent="0" marL="0">
-              <a:lnSpc>
-                <a:spcPts val="1215"/>
-              </a:lnSpc>
-              <a:buNone/>
-            </a:pPr>
-            <a:r>
-              <a:rPr lang="en-US" sz="810" dirty="0">
-                <a:solidFill>
-                  <a:srgbClr val="4A5565"/>
-                </a:solidFill>
-                <a:latin typeface="Poppins" pitchFamily="34" charset="0"/>
-                <a:ea typeface="Poppins" pitchFamily="34" charset="-122"/>
-                <a:cs typeface="Poppins" pitchFamily="34" charset="-120"/>
-              </a:rPr>
-              <a:t>PR to tourism operators, event and wedding planners. The signature wedding brew turns one booking into reception volume and a take-home sample for every guest.</a:t>
-            </a:r>
-            <a:endParaRPr lang="en-US" sz="810" dirty="0"/>
-          </a:p>
-        </p:txBody>
-      </p:sp>
-      <p:sp>
-        <p:nvSpPr>
           <p:cNvPr id="66" name="Text 62"/>
           <p:cNvSpPr txBox="1"/>
           <p:nvPr/>
         </p:nvSpPr>
         <p:spPr>
           <a:xfrm>
-            <a:off x="438898" y="6043662"/>
-            <a:ext cx="4521737" cy="154305"/>
+            <a:off x="438898" y="5018741"/>
+            <a:ext cx="4521737" cy="308610"/>
           </a:xfrm>
           <a:prstGeom prst="rect">
             <a:avLst/>
@@ -19143,7 +20154,7 @@
                 <a:ea typeface="Poppins" pitchFamily="34" charset="-122"/>
                 <a:cs typeface="Poppins" pitchFamily="34" charset="-120"/>
               </a:rPr>
-              <a:t>Ticketed events and collabs. </a:t>
+              <a:t>Tours. </a:t>
             </a:r>
             <a:pPr indent="0" marL="0">
               <a:lnSpc>
@@ -19160,7 +20171,7 @@
                 <a:ea typeface="Poppins" pitchFamily="34" charset="-122"/>
                 <a:cs typeface="Poppins" pitchFamily="34" charset="-120"/>
               </a:rPr>
-              <a:t>Own the calendar rather than waiting for walk-ins.</a:t>
+              <a:t>Get onto the circuit. The bus parking is an asset, not a liability. Build the Urban Legends booking widget so operators stop coordinating venue by venue.</a:t>
             </a:r>
             <a:endParaRPr lang="en-US" sz="810" dirty="0"/>
           </a:p>
@@ -19174,7 +20185,66 @@
         </p:nvSpPr>
         <p:spPr>
           <a:xfrm>
-            <a:off x="438898" y="6315986"/>
+            <a:off x="438898" y="5428010"/>
+            <a:ext cx="4521737" cy="462915"/>
+          </a:xfrm>
+          <a:prstGeom prst="rect">
+            <a:avLst/>
+          </a:prstGeom>
+          <a:noFill/>
+          <a:ln/>
+        </p:spPr>
+        <p:txBody>
+          <a:bodyPr wrap="square" lIns="0" tIns="0" rIns="0" bIns="0" rtlCol="0" anchor="t"/>
+          <a:lstStyle/>
+          <a:p>
+            <a:pPr indent="0" marL="0">
+              <a:lnSpc>
+                <a:spcPts val="1215"/>
+              </a:lnSpc>
+              <a:buNone/>
+            </a:pPr>
+            <a:r>
+              <a:rPr lang="en-US" sz="810" b="1" dirty="0">
+                <a:solidFill>
+                  <a:srgbClr val="0E171F"/>
+                </a:solidFill>
+                <a:latin typeface="Poppins" pitchFamily="34" charset="0"/>
+                <a:ea typeface="Poppins" pitchFamily="34" charset="-122"/>
+                <a:cs typeface="Poppins" pitchFamily="34" charset="-120"/>
+              </a:rPr>
+              <a:t>Weddings and functions. </a:t>
+            </a:r>
+            <a:pPr indent="0" marL="0">
+              <a:lnSpc>
+                <a:spcPts val="1215"/>
+              </a:lnSpc>
+              <a:buNone/>
+            </a:pPr>
+            <a:r>
+              <a:rPr lang="en-US" sz="810" dirty="0">
+                <a:solidFill>
+                  <a:srgbClr val="4A5565"/>
+                </a:solidFill>
+                <a:latin typeface="Poppins" pitchFamily="34" charset="0"/>
+                <a:ea typeface="Poppins" pitchFamily="34" charset="-122"/>
+                <a:cs typeface="Poppins" pitchFamily="34" charset="-120"/>
+              </a:rPr>
+              <a:t>PR to tourism operators, event and wedding planners. The signature wedding brew turns one booking into reception volume and a take-home sample.</a:t>
+            </a:r>
+            <a:endParaRPr lang="en-US" sz="810" dirty="0"/>
+          </a:p>
+        </p:txBody>
+      </p:sp>
+      <p:sp>
+        <p:nvSpPr>
+          <p:cNvPr id="68" name="Text 64"/>
+          <p:cNvSpPr txBox="1"/>
+          <p:nvPr/>
+        </p:nvSpPr>
+        <p:spPr>
+          <a:xfrm>
+            <a:off x="438898" y="5991584"/>
             <a:ext cx="4521737" cy="308610"/>
           </a:xfrm>
           <a:prstGeom prst="rect">
@@ -19202,6 +20272,65 @@
                 <a:ea typeface="Poppins" pitchFamily="34" charset="-122"/>
                 <a:cs typeface="Poppins" pitchFamily="34" charset="-120"/>
               </a:rPr>
+              <a:t>Local business and ticketed music. </a:t>
+            </a:r>
+            <a:pPr indent="0" marL="0">
+              <a:lnSpc>
+                <a:spcPts val="1215"/>
+              </a:lnSpc>
+              <a:buNone/>
+            </a:pPr>
+            <a:r>
+              <a:rPr lang="en-US" sz="810" dirty="0">
+                <a:solidFill>
+                  <a:srgbClr val="4A5565"/>
+                </a:solidFill>
+                <a:latin typeface="Poppins" pitchFamily="34" charset="0"/>
+                <a:ea typeface="Poppins" pitchFamily="34" charset="-122"/>
+                <a:cs typeface="Poppins" pitchFamily="34" charset="-120"/>
+              </a:rPr>
+              <a:t>Justin's own taproom priorities: lunch and after-work trade from local business, and ticketed music events, not pausing walk-ins.</a:t>
+            </a:r>
+            <a:endParaRPr lang="en-US" sz="810" dirty="0"/>
+          </a:p>
+        </p:txBody>
+      </p:sp>
+      <p:sp>
+        <p:nvSpPr>
+          <p:cNvPr id="69" name="Text 65"/>
+          <p:cNvSpPr txBox="1"/>
+          <p:nvPr/>
+        </p:nvSpPr>
+        <p:spPr>
+          <a:xfrm>
+            <a:off x="438898" y="6400854"/>
+            <a:ext cx="4521737" cy="308610"/>
+          </a:xfrm>
+          <a:prstGeom prst="rect">
+            <a:avLst/>
+          </a:prstGeom>
+          <a:noFill/>
+          <a:ln/>
+        </p:spPr>
+        <p:txBody>
+          <a:bodyPr wrap="square" lIns="0" tIns="0" rIns="0" bIns="0" rtlCol="0" anchor="t"/>
+          <a:lstStyle/>
+          <a:p>
+            <a:pPr indent="0" marL="0">
+              <a:lnSpc>
+                <a:spcPts val="1215"/>
+              </a:lnSpc>
+              <a:buNone/>
+            </a:pPr>
+            <a:r>
+              <a:rPr lang="en-US" sz="810" b="1" dirty="0">
+                <a:solidFill>
+                  <a:srgbClr val="0E171F"/>
+                </a:solidFill>
+                <a:latin typeface="Poppins" pitchFamily="34" charset="0"/>
+                <a:ea typeface="Poppins" pitchFamily="34" charset="-122"/>
+                <a:cs typeface="Poppins" pitchFamily="34" charset="-120"/>
+              </a:rPr>
               <a:t>Party rental is the quiet one. </a:t>
             </a:r>
             <a:pPr indent="0" marL="0">
@@ -19219,7 +20348,7 @@
                 <a:ea typeface="Poppins" pitchFamily="34" charset="-122"/>
                 <a:cs typeface="Poppins" pitchFamily="34" charset="-120"/>
               </a:rPr>
-              <a:t>A system in a house for a weekend is a demo that the host runs for you, in front of exactly the people who might buy one.</a:t>
+              <a:t>A system in a house for a weekend is a demo the host runs for you, in front of the people who might buy one.</a:t>
             </a:r>
             <a:endParaRPr lang="en-US" sz="810" dirty="0"/>
           </a:p>
@@ -19227,7 +20356,7 @@
       </p:sp>
       <p:sp>
         <p:nvSpPr>
-          <p:cNvPr id="68" name="Shape 64"/>
+          <p:cNvPr id="70" name="Shape 66"/>
           <p:cNvSpPr/>
           <p:nvPr/>
         </p:nvSpPr>
@@ -19250,7 +20379,7 @@
       </p:sp>
       <p:sp>
         <p:nvSpPr>
-          <p:cNvPr id="69" name="Text 65"/>
+          <p:cNvPr id="71" name="Text 67"/>
           <p:cNvSpPr txBox="1"/>
           <p:nvPr/>
         </p:nvSpPr>
@@ -19284,7 +20413,7 @@
                 <a:ea typeface="Poppins" pitchFamily="34" charset="-122"/>
                 <a:cs typeface="Poppins" pitchFamily="34" charset="-120"/>
               </a:rPr>
-              <a:t>Romance the Crafted Brewers' Choice award everywhere in this. It is the reason a tour operator picks this stop.</a:t>
+              <a:t>First dated event: Oktoberfest plus the keg system giveaway. Taproom membership sits on Justin's three-month list; the business sheet flags two membership programmes as a cost to resolve.</a:t>
             </a:r>
             <a:endParaRPr lang="en-US" sz="700" dirty="0"/>
           </a:p>
@@ -19292,7 +20421,7 @@
       </p:sp>
       <p:sp>
         <p:nvSpPr>
-          <p:cNvPr id="70" name="Shape 66"/>
+          <p:cNvPr id="72" name="Shape 68"/>
           <p:cNvSpPr/>
           <p:nvPr/>
         </p:nvSpPr>
@@ -19317,7 +20446,7 @@
       </p:sp>
       <p:sp>
         <p:nvSpPr>
-          <p:cNvPr id="71" name="Text 67"/>
+          <p:cNvPr id="73" name="Text 69"/>
           <p:cNvSpPr txBox="1"/>
           <p:nvPr/>
         </p:nvSpPr>
@@ -19380,11 +20509,11 @@
             <a:tbl>
               <a:tblPr/>
               <a:tblGrid>
-                <a:gridCol w="1227824"/>
-                <a:gridCol w="2702456"/>
-                <a:gridCol w="591456"/>
+                <a:gridCol w="1459421"/>
+                <a:gridCol w="2512445"/>
+                <a:gridCol w="549871"/>
               </a:tblGrid>
-              <a:tr h="303282">
+              <a:tr h="232426">
                 <a:tc>
                   <a:txBody>
                     <a:bodyPr/>
@@ -19545,7 +20674,7 @@
                   </a:tcPr>
                 </a:tc>
               </a:tr>
-              <a:tr h="432847">
+              <a:tr h="361991">
                 <a:tc>
                   <a:txBody>
                     <a:bodyPr/>
@@ -19706,7 +20835,7 @@
                   </a:tcPr>
                 </a:tc>
               </a:tr>
-              <a:tr h="318852">
+              <a:tr h="247996">
                 <a:tc>
                   <a:txBody>
                     <a:bodyPr/>
@@ -19867,7 +20996,7 @@
                   </a:tcPr>
                 </a:tc>
               </a:tr>
-              <a:tr h="318852">
+              <a:tr h="247996">
                 <a:tc>
                   <a:txBody>
                     <a:bodyPr/>
@@ -20028,7 +21157,7 @@
                   </a:tcPr>
                 </a:tc>
               </a:tr>
-              <a:tr h="318852">
+              <a:tr h="247996">
                 <a:tc>
                   <a:txBody>
                     <a:bodyPr/>
@@ -20189,7 +21318,7 @@
                   </a:tcPr>
                 </a:tc>
               </a:tr>
-              <a:tr h="318852">
+              <a:tr h="247996">
                 <a:tc>
                   <a:txBody>
                     <a:bodyPr/>
@@ -20350,7 +21479,7 @@
                   </a:tcPr>
                 </a:tc>
               </a:tr>
-              <a:tr h="432847">
+              <a:tr h="247996">
                 <a:tc>
                   <a:txBody>
                     <a:bodyPr/>
@@ -20424,7 +21553,7 @@
                           <a:ea typeface="Poppins" pitchFamily="34" charset="-122"/>
                           <a:cs typeface="Poppins" pitchFamily="34" charset="-120"/>
                         </a:rPr>
-                        <a:t>Clent's neighbour, former head of the country's largest cannery. Costed feasibility</a:t>
+                        <a:t>Parked. Canning is not in Justin's plan</a:t>
                       </a:r>
                       <a:endParaRPr lang="en-US" sz="660" dirty="0">
                         <a:latin typeface="Poppins" charset="0"/>
@@ -20511,13 +21640,335 @@
                   </a:tcPr>
                 </a:tc>
               </a:tr>
+              <a:tr h="247996">
+                <a:tc>
+                  <a:txBody>
+                    <a:bodyPr/>
+                    <a:lstStyle/>
+                    <a:p>
+                      <a:pPr algn="l" indent="0" marL="0">
+                        <a:lnSpc>
+                          <a:spcPts val="898"/>
+                        </a:lnSpc>
+                        <a:buNone/>
+                      </a:pPr>
+                      <a:r>
+                        <a:rPr lang="en-US" sz="660" b="1" dirty="0">
+                          <a:solidFill>
+                            <a:srgbClr val="0E171F"/>
+                          </a:solidFill>
+                          <a:latin typeface="Poppins" pitchFamily="34" charset="0"/>
+                          <a:ea typeface="Poppins" pitchFamily="34" charset="-122"/>
+                          <a:cs typeface="Poppins" pitchFamily="34" charset="-120"/>
+                        </a:rPr>
+                        <a:t>JVPs and referral partners</a:t>
+                      </a:r>
+                      <a:endParaRPr lang="en-US" sz="660" dirty="0">
+                        <a:latin typeface="Poppins" charset="0"/>
+                        <a:ea typeface="Poppins" charset="0"/>
+                        <a:cs typeface="Poppins" charset="0"/>
+                      </a:endParaRPr>
+                    </a:p>
+                  </a:txBody>
+                  <a:tcPr marL="46800" marR="46800" marT="46800" marB="46800" anchor="t">
+                    <a:lnL w="0" cap="flat" cmpd="sng" algn="ctr">
+                      <a:noFill/>
+                    </a:lnL>
+                    <a:lnR w="0" cap="flat" cmpd="sng" algn="ctr">
+                      <a:noFill/>
+                    </a:lnR>
+                    <a:lnT w="0" cap="flat" cmpd="sng" algn="ctr">
+                      <a:noFill/>
+                    </a:lnT>
+                    <a:lnB w="7620" cap="flat" cmpd="sng" algn="ctr">
+                      <a:solidFill>
+                        <a:srgbClr val="E3E7EC"/>
+                      </a:solidFill>
+                      <a:prstDash val="solid"/>
+                      <a:round/>
+                      <a:headEnd type="none" w="med" len="med"/>
+                      <a:tailEnd type="none" w="med" len="med"/>
+                    </a:lnB>
+                    <a:solidFill>
+                      <a:srgbClr val="F5F7FA"/>
+                    </a:solidFill>
+                  </a:tcPr>
+                </a:tc>
+                <a:tc>
+                  <a:txBody>
+                    <a:bodyPr/>
+                    <a:lstStyle/>
+                    <a:p>
+                      <a:pPr algn="l" indent="0" marL="0">
+                        <a:lnSpc>
+                          <a:spcPts val="898"/>
+                        </a:lnSpc>
+                        <a:buNone/>
+                      </a:pPr>
+                      <a:r>
+                        <a:rPr lang="en-US" sz="660" dirty="0">
+                          <a:solidFill>
+                            <a:srgbClr val="4A5565"/>
+                          </a:solidFill>
+                          <a:latin typeface="Poppins" pitchFamily="34" charset="0"/>
+                          <a:ea typeface="Poppins" pitchFamily="34" charset="-122"/>
+                          <a:cs typeface="Poppins" pitchFamily="34" charset="-120"/>
+                        </a:rPr>
+                        <a:t>List built, outreach started within three months</a:t>
+                      </a:r>
+                      <a:endParaRPr lang="en-US" sz="660" dirty="0">
+                        <a:latin typeface="Poppins" charset="0"/>
+                        <a:ea typeface="Poppins" charset="0"/>
+                        <a:cs typeface="Poppins" charset="0"/>
+                      </a:endParaRPr>
+                    </a:p>
+                  </a:txBody>
+                  <a:tcPr marL="46800" marR="46800" marT="46800" marB="46800" anchor="t">
+                    <a:lnL w="0" cap="flat" cmpd="sng" algn="ctr">
+                      <a:noFill/>
+                    </a:lnL>
+                    <a:lnR w="0" cap="flat" cmpd="sng" algn="ctr">
+                      <a:noFill/>
+                    </a:lnR>
+                    <a:lnT w="0" cap="flat" cmpd="sng" algn="ctr">
+                      <a:noFill/>
+                    </a:lnT>
+                    <a:lnB w="7620" cap="flat" cmpd="sng" algn="ctr">
+                      <a:solidFill>
+                        <a:srgbClr val="E3E7EC"/>
+                      </a:solidFill>
+                      <a:prstDash val="solid"/>
+                      <a:round/>
+                      <a:headEnd type="none" w="med" len="med"/>
+                      <a:tailEnd type="none" w="med" len="med"/>
+                    </a:lnB>
+                    <a:solidFill>
+                      <a:srgbClr val="F5F7FA"/>
+                    </a:solidFill>
+                  </a:tcPr>
+                </a:tc>
+                <a:tc>
+                  <a:txBody>
+                    <a:bodyPr/>
+                    <a:lstStyle/>
+                    <a:p>
+                      <a:pPr algn="l" indent="0" marL="0">
+                        <a:lnSpc>
+                          <a:spcPts val="898"/>
+                        </a:lnSpc>
+                        <a:buNone/>
+                      </a:pPr>
+                      <a:r>
+                        <a:rPr lang="en-US" sz="660" dirty="0">
+                          <a:solidFill>
+                            <a:srgbClr val="4A5565"/>
+                          </a:solidFill>
+                          <a:latin typeface="Poppins" pitchFamily="34" charset="0"/>
+                          <a:ea typeface="Poppins" pitchFamily="34" charset="-122"/>
+                          <a:cs typeface="Poppins" pitchFamily="34" charset="-120"/>
+                        </a:rPr>
+                        <a:t>Harry</a:t>
+                      </a:r>
+                      <a:endParaRPr lang="en-US" sz="660" dirty="0">
+                        <a:latin typeface="Poppins" charset="0"/>
+                        <a:ea typeface="Poppins" charset="0"/>
+                        <a:cs typeface="Poppins" charset="0"/>
+                      </a:endParaRPr>
+                    </a:p>
+                  </a:txBody>
+                  <a:tcPr marL="46800" marR="46800" marT="46800" marB="46800" anchor="t">
+                    <a:lnL w="0" cap="flat" cmpd="sng" algn="ctr">
+                      <a:noFill/>
+                    </a:lnL>
+                    <a:lnR w="0" cap="flat" cmpd="sng" algn="ctr">
+                      <a:noFill/>
+                    </a:lnR>
+                    <a:lnT w="0" cap="flat" cmpd="sng" algn="ctr">
+                      <a:noFill/>
+                    </a:lnT>
+                    <a:lnB w="7620" cap="flat" cmpd="sng" algn="ctr">
+                      <a:solidFill>
+                        <a:srgbClr val="E3E7EC"/>
+                      </a:solidFill>
+                      <a:prstDash val="solid"/>
+                      <a:round/>
+                      <a:headEnd type="none" w="med" len="med"/>
+                      <a:tailEnd type="none" w="med" len="med"/>
+                    </a:lnB>
+                    <a:solidFill>
+                      <a:srgbClr val="F5F7FA"/>
+                    </a:solidFill>
+                  </a:tcPr>
+                </a:tc>
+              </a:tr>
+              <a:tr h="361991">
+                <a:tc>
+                  <a:txBody>
+                    <a:bodyPr/>
+                    <a:lstStyle/>
+                    <a:p>
+                      <a:pPr algn="l" indent="0" marL="0">
+                        <a:lnSpc>
+                          <a:spcPts val="898"/>
+                        </a:lnSpc>
+                        <a:buNone/>
+                      </a:pPr>
+                      <a:r>
+                        <a:rPr lang="en-US" sz="660" b="1" dirty="0">
+                          <a:solidFill>
+                            <a:srgbClr val="0E171F"/>
+                          </a:solidFill>
+                          <a:latin typeface="Poppins" pitchFamily="34" charset="0"/>
+                          <a:ea typeface="Poppins" pitchFamily="34" charset="-122"/>
+                          <a:cs typeface="Poppins" pitchFamily="34" charset="-120"/>
+                        </a:rPr>
+                        <a:t>Brand ambassadors</a:t>
+                      </a:r>
+                      <a:endParaRPr lang="en-US" sz="660" dirty="0">
+                        <a:latin typeface="Poppins" charset="0"/>
+                        <a:ea typeface="Poppins" charset="0"/>
+                        <a:cs typeface="Poppins" charset="0"/>
+                      </a:endParaRPr>
+                    </a:p>
+                  </a:txBody>
+                  <a:tcPr marL="46800" marR="46800" marT="46800" marB="46800" anchor="t">
+                    <a:lnL w="0" cap="flat" cmpd="sng" algn="ctr">
+                      <a:noFill/>
+                    </a:lnL>
+                    <a:lnR w="0" cap="flat" cmpd="sng" algn="ctr">
+                      <a:noFill/>
+                    </a:lnR>
+                    <a:lnT w="0" cap="flat" cmpd="sng" algn="ctr">
+                      <a:noFill/>
+                    </a:lnT>
+                    <a:lnB w="7620" cap="flat" cmpd="sng" algn="ctr">
+                      <a:solidFill>
+                        <a:srgbClr val="E3E7EC"/>
+                      </a:solidFill>
+                      <a:prstDash val="solid"/>
+                      <a:round/>
+                      <a:headEnd type="none" w="med" len="med"/>
+                      <a:tailEnd type="none" w="med" len="med"/>
+                    </a:lnB>
+                    <a:solidFill>
+                      <a:srgbClr val="FFFFFF"/>
+                    </a:solidFill>
+                  </a:tcPr>
+                </a:tc>
+                <a:tc>
+                  <a:txBody>
+                    <a:bodyPr/>
+                    <a:lstStyle/>
+                    <a:p>
+                      <a:pPr algn="l" indent="0" marL="0">
+                        <a:lnSpc>
+                          <a:spcPts val="898"/>
+                        </a:lnSpc>
+                        <a:buNone/>
+                      </a:pPr>
+                      <a:r>
+                        <a:rPr lang="en-US" sz="660" dirty="0">
+                          <a:solidFill>
+                            <a:srgbClr val="4A5565"/>
+                          </a:solidFill>
+                          <a:latin typeface="Poppins" pitchFamily="34" charset="0"/>
+                          <a:ea typeface="Poppins" pitchFamily="34" charset="-122"/>
+                          <a:cs typeface="Poppins" pitchFamily="34" charset="-120"/>
+                        </a:rPr>
+                        <a:t>Kurt, Troy, Mitch, Aden, Ash. UGC content ready to deploy</a:t>
+                      </a:r>
+                      <a:endParaRPr lang="en-US" sz="660" dirty="0">
+                        <a:latin typeface="Poppins" charset="0"/>
+                        <a:ea typeface="Poppins" charset="0"/>
+                        <a:cs typeface="Poppins" charset="0"/>
+                      </a:endParaRPr>
+                    </a:p>
+                  </a:txBody>
+                  <a:tcPr marL="46800" marR="46800" marT="46800" marB="46800" anchor="t">
+                    <a:lnL w="0" cap="flat" cmpd="sng" algn="ctr">
+                      <a:noFill/>
+                    </a:lnL>
+                    <a:lnR w="0" cap="flat" cmpd="sng" algn="ctr">
+                      <a:noFill/>
+                    </a:lnR>
+                    <a:lnT w="0" cap="flat" cmpd="sng" algn="ctr">
+                      <a:noFill/>
+                    </a:lnT>
+                    <a:lnB w="7620" cap="flat" cmpd="sng" algn="ctr">
+                      <a:solidFill>
+                        <a:srgbClr val="E3E7EC"/>
+                      </a:solidFill>
+                      <a:prstDash val="solid"/>
+                      <a:round/>
+                      <a:headEnd type="none" w="med" len="med"/>
+                      <a:tailEnd type="none" w="med" len="med"/>
+                    </a:lnB>
+                    <a:solidFill>
+                      <a:srgbClr val="FFFFFF"/>
+                    </a:solidFill>
+                  </a:tcPr>
+                </a:tc>
+                <a:tc>
+                  <a:txBody>
+                    <a:bodyPr/>
+                    <a:lstStyle/>
+                    <a:p>
+                      <a:pPr algn="l" indent="0" marL="0">
+                        <a:lnSpc>
+                          <a:spcPts val="898"/>
+                        </a:lnSpc>
+                        <a:buNone/>
+                      </a:pPr>
+                      <a:r>
+                        <a:rPr lang="en-US" sz="660" dirty="0">
+                          <a:solidFill>
+                            <a:srgbClr val="4A5565"/>
+                          </a:solidFill>
+                          <a:latin typeface="Poppins" pitchFamily="34" charset="0"/>
+                          <a:ea typeface="Poppins" pitchFamily="34" charset="-122"/>
+                          <a:cs typeface="Poppins" pitchFamily="34" charset="-120"/>
+                        </a:rPr>
+                        <a:t>Harry</a:t>
+                      </a:r>
+                      <a:endParaRPr lang="en-US" sz="660" dirty="0">
+                        <a:latin typeface="Poppins" charset="0"/>
+                        <a:ea typeface="Poppins" charset="0"/>
+                        <a:cs typeface="Poppins" charset="0"/>
+                      </a:endParaRPr>
+                    </a:p>
+                  </a:txBody>
+                  <a:tcPr marL="46800" marR="46800" marT="46800" marB="46800" anchor="t">
+                    <a:lnL w="0" cap="flat" cmpd="sng" algn="ctr">
+                      <a:noFill/>
+                    </a:lnL>
+                    <a:lnR w="0" cap="flat" cmpd="sng" algn="ctr">
+                      <a:noFill/>
+                    </a:lnR>
+                    <a:lnT w="0" cap="flat" cmpd="sng" algn="ctr">
+                      <a:noFill/>
+                    </a:lnT>
+                    <a:lnB w="7620" cap="flat" cmpd="sng" algn="ctr">
+                      <a:solidFill>
+                        <a:srgbClr val="E3E7EC"/>
+                      </a:solidFill>
+                      <a:prstDash val="solid"/>
+                      <a:round/>
+                      <a:headEnd type="none" w="med" len="med"/>
+                      <a:tailEnd type="none" w="med" len="med"/>
+                    </a:lnB>
+                    <a:solidFill>
+                      <a:srgbClr val="FFFFFF"/>
+                    </a:solidFill>
+                  </a:tcPr>
+                </a:tc>
+              </a:tr>
             </a:tbl>
           </a:graphicData>
         </a:graphic>
       </p:graphicFrame>
       <p:sp>
         <p:nvSpPr>
-          <p:cNvPr id="73" name="Shape 68"/>
+          <p:cNvPr id="75" name="Shape 70"/>
           <p:cNvSpPr/>
           <p:nvPr/>
         </p:nvSpPr>
@@ -20540,7 +21991,7 @@
       </p:sp>
       <p:sp>
         <p:nvSpPr>
-          <p:cNvPr id="74" name="Text 69"/>
+          <p:cNvPr id="76" name="Text 71"/>
           <p:cNvSpPr txBox="1"/>
           <p:nvPr/>
         </p:nvSpPr>
@@ -20574,7 +22025,7 @@
                 <a:ea typeface="Poppins" pitchFamily="34" charset="-122"/>
                 <a:cs typeface="Poppins" pitchFamily="34" charset="-120"/>
               </a:rPr>
-              <a:t>Named in the catch-up. None has been approached yet.</a:t>
+              <a:t>Named in the catch-up and in Justin's plan. The ambassadors are Justin's list.</a:t>
             </a:r>
             <a:endParaRPr lang="en-US" sz="700" dirty="0"/>
           </a:p>
@@ -20582,7 +22033,7 @@
       </p:sp>
       <p:sp>
         <p:nvSpPr>
-          <p:cNvPr id="75" name="Shape 70"/>
+          <p:cNvPr id="77" name="Shape 72"/>
           <p:cNvSpPr/>
           <p:nvPr/>
         </p:nvSpPr>
@@ -20607,7 +22058,7 @@
       </p:sp>
       <p:sp>
         <p:nvSpPr>
-          <p:cNvPr id="76" name="Text 71"/>
+          <p:cNvPr id="78" name="Text 73"/>
           <p:cNvSpPr txBox="1"/>
           <p:nvPr/>
         </p:nvSpPr>
@@ -20649,7 +22100,7 @@
       </p:sp>
       <p:sp>
         <p:nvSpPr>
-          <p:cNvPr id="77" name="Text 72"/>
+          <p:cNvPr id="79" name="Text 74"/>
           <p:cNvSpPr txBox="1"/>
           <p:nvPr/>
         </p:nvSpPr>
@@ -20691,7 +22142,7 @@
       </p:sp>
       <p:sp>
         <p:nvSpPr>
-          <p:cNvPr id="78" name="Text 73"/>
+          <p:cNvPr id="80" name="Text 75"/>
           <p:cNvSpPr txBox="1"/>
           <p:nvPr/>
         </p:nvSpPr>
@@ -20750,14 +22201,14 @@
       </p:sp>
       <p:sp>
         <p:nvSpPr>
-          <p:cNvPr id="79" name="Text 74"/>
+          <p:cNvPr id="81" name="Text 76"/>
           <p:cNvSpPr txBox="1"/>
           <p:nvPr/>
         </p:nvSpPr>
         <p:spPr>
           <a:xfrm>
             <a:off x="10158970" y="5852634"/>
-            <a:ext cx="4521737" cy="308610"/>
+            <a:ext cx="4521737" cy="462915"/>
           </a:xfrm>
           <a:prstGeom prst="rect">
             <a:avLst/>
@@ -20801,7 +22252,7 @@
                 <a:ea typeface="Poppins" pitchFamily="34" charset="-122"/>
                 <a:cs typeface="Poppins" pitchFamily="34" charset="-120"/>
               </a:rPr>
-              <a:t>a wording pass from Christy, the per-schooner figure settled before any price goes on a flyer, and a decision on whether these print or stay digital.</a:t>
+              <a:t>a wording pass from Christy, the per-schooner figure settled before any price goes on a flyer, and a decision on whether these print or stay digital. Next pieces: UGC and brand ambassador content, and Oktoberfest artwork.</a:t>
             </a:r>
             <a:endParaRPr lang="en-US" sz="810" dirty="0"/>
           </a:p>
@@ -20809,7 +22260,7 @@
       </p:sp>
       <p:sp>
         <p:nvSpPr>
-          <p:cNvPr id="80" name="Shape 75"/>
+          <p:cNvPr id="82" name="Shape 77"/>
           <p:cNvSpPr/>
           <p:nvPr/>
         </p:nvSpPr>
@@ -20832,7 +22283,7 @@
       </p:sp>
       <p:sp>
         <p:nvSpPr>
-          <p:cNvPr id="81" name="Text 76"/>
+          <p:cNvPr id="83" name="Text 78"/>
           <p:cNvSpPr txBox="1"/>
           <p:nvPr/>
         </p:nvSpPr>
@@ -20874,7 +22325,7 @@
       </p:sp>
       <p:sp>
         <p:nvSpPr>
-          <p:cNvPr id="82" name="Shape 77"/>
+          <p:cNvPr id="84" name="Shape 79"/>
           <p:cNvSpPr/>
           <p:nvPr/>
         </p:nvSpPr>
@@ -20899,7 +22350,7 @@
       </p:sp>
       <p:sp>
         <p:nvSpPr>
-          <p:cNvPr id="83" name="Text 78"/>
+          <p:cNvPr id="85" name="Text 80"/>
           <p:cNvSpPr txBox="1"/>
           <p:nvPr/>
         </p:nvSpPr>
@@ -20979,13 +22430,13 @@
             <a:tbl>
               <a:tblPr/>
               <a:tblGrid>
-                <a:gridCol w="3112742"/>
-                <a:gridCol w="1036641"/>
-                <a:gridCol w="1215982"/>
-                <a:gridCol w="993326"/>
-                <a:gridCol w="951910"/>
-                <a:gridCol w="1206863"/>
-                <a:gridCol w="864307"/>
+                <a:gridCol w="3563845"/>
+                <a:gridCol w="1006200"/>
+                <a:gridCol w="913262"/>
+                <a:gridCol w="964157"/>
+                <a:gridCol w="923958"/>
+                <a:gridCol w="1171424"/>
+                <a:gridCol w="838926"/>
               </a:tblGrid>
               <a:tr h="275851">
                 <a:tc>
@@ -21114,7 +22565,7 @@
                           <a:ea typeface="Poppins" pitchFamily="34" charset="-122"/>
                           <a:cs typeface="Poppins" pitchFamily="34" charset="-120"/>
                         </a:rPr>
-                        <a:t>Chrissy</a:t>
+                        <a:t>Chris</a:t>
                       </a:r>
                       <a:endParaRPr lang="en-US" sz="620" dirty="0">
                         <a:latin typeface="Poppins" charset="0"/>
@@ -21479,15 +22930,15 @@
                         <a:buNone/>
                       </a:pPr>
                       <a:r>
-                        <a:rPr lang="en-US" sz="670" b="1" dirty="0">
+                        <a:rPr lang="en-US" sz="670" dirty="0">
                           <a:solidFill>
-                            <a:srgbClr val="0E171F"/>
+                            <a:srgbClr val="4A5565"/>
                           </a:solidFill>
                           <a:latin typeface="Poppins" pitchFamily="34" charset="0"/>
                           <a:ea typeface="Poppins" pitchFamily="34" charset="-122"/>
                           <a:cs typeface="Poppins" pitchFamily="34" charset="-120"/>
                         </a:rPr>
-                        <a:t>A</a:t>
+                        <a:t>C</a:t>
                       </a:r>
                       <a:endParaRPr lang="en-US" sz="670" dirty="0">
                         <a:latin typeface="Poppins" charset="0"/>
@@ -21754,7 +23205,60 @@
                           <a:ea typeface="Poppins" pitchFamily="34" charset="-122"/>
                           <a:cs typeface="Poppins" pitchFamily="34" charset="-120"/>
                         </a:rPr>
-                        <a:t>Connected data, CRM, site</a:t>
+                        <a:t>Website, GoTab + Fishbowl, SEM</a:t>
+                      </a:r>
+                      <a:endParaRPr lang="en-US" sz="670" dirty="0">
+                        <a:latin typeface="Poppins" charset="0"/>
+                        <a:ea typeface="Poppins" charset="0"/>
+                        <a:cs typeface="Poppins" charset="0"/>
+                      </a:endParaRPr>
+                    </a:p>
+                  </a:txBody>
+                  <a:tcPr marL="50400" marR="50400" marT="50400" marB="50400" anchor="t">
+                    <a:lnL w="0" cap="flat" cmpd="sng" algn="ctr">
+                      <a:noFill/>
+                    </a:lnL>
+                    <a:lnR w="0" cap="flat" cmpd="sng" algn="ctr">
+                      <a:noFill/>
+                    </a:lnR>
+                    <a:lnT w="0" cap="flat" cmpd="sng" algn="ctr">
+                      <a:noFill/>
+                    </a:lnT>
+                    <a:lnB w="7620" cap="flat" cmpd="sng" algn="ctr">
+                      <a:solidFill>
+                        <a:srgbClr val="E3E7EC"/>
+                      </a:solidFill>
+                      <a:prstDash val="solid"/>
+                      <a:round/>
+                      <a:headEnd type="none" w="med" len="med"/>
+                      <a:tailEnd type="none" w="med" len="med"/>
+                    </a:lnB>
+                    <a:solidFill>
+                      <a:srgbClr val="FFFFFF"/>
+                    </a:solidFill>
+                  </a:tcPr>
+                </a:tc>
+                <a:tc>
+                  <a:txBody>
+                    <a:bodyPr/>
+                    <a:lstStyle/>
+                    <a:p>
+                      <a:pPr algn="ctr" indent="0" marL="0">
+                        <a:lnSpc>
+                          <a:spcPts val="911"/>
+                        </a:lnSpc>
+                        <a:buNone/>
+                      </a:pPr>
+                      <a:r>
+                        <a:rPr lang="en-US" sz="670" b="1" dirty="0">
+                          <a:solidFill>
+                            <a:srgbClr val="0E171F"/>
+                          </a:solidFill>
+                          <a:latin typeface="Poppins" pitchFamily="34" charset="0"/>
+                          <a:ea typeface="Poppins" pitchFamily="34" charset="-122"/>
+                          <a:cs typeface="Poppins" pitchFamily="34" charset="-120"/>
+                        </a:rPr>
+                        <a:t>A</a:t>
                       </a:r>
                       <a:endParaRPr lang="en-US" sz="670" dirty="0">
                         <a:latin typeface="Poppins" charset="0"/>
@@ -21807,7 +23311,7 @@
                           <a:ea typeface="Poppins" pitchFamily="34" charset="-122"/>
                           <a:cs typeface="Poppins" pitchFamily="34" charset="-120"/>
                         </a:rPr>
-                        <a:t>A</a:t>
+                        <a:t>–</a:t>
                       </a:r>
                       <a:endParaRPr lang="en-US" sz="670" dirty="0">
                         <a:latin typeface="Poppins" charset="0"/>
@@ -21966,6 +23470,646 @@
                           <a:ea typeface="Poppins" pitchFamily="34" charset="-122"/>
                           <a:cs typeface="Poppins" pitchFamily="34" charset="-120"/>
                         </a:rPr>
+                        <a:t>–</a:t>
+                      </a:r>
+                      <a:endParaRPr lang="en-US" sz="670" dirty="0">
+                        <a:latin typeface="Poppins" charset="0"/>
+                        <a:ea typeface="Poppins" charset="0"/>
+                        <a:cs typeface="Poppins" charset="0"/>
+                      </a:endParaRPr>
+                    </a:p>
+                  </a:txBody>
+                  <a:tcPr marL="50400" marR="50400" marT="50400" marB="50400" anchor="t">
+                    <a:lnL w="0" cap="flat" cmpd="sng" algn="ctr">
+                      <a:noFill/>
+                    </a:lnL>
+                    <a:lnR w="0" cap="flat" cmpd="sng" algn="ctr">
+                      <a:noFill/>
+                    </a:lnR>
+                    <a:lnT w="0" cap="flat" cmpd="sng" algn="ctr">
+                      <a:noFill/>
+                    </a:lnT>
+                    <a:lnB w="7620" cap="flat" cmpd="sng" algn="ctr">
+                      <a:solidFill>
+                        <a:srgbClr val="E3E7EC"/>
+                      </a:solidFill>
+                      <a:prstDash val="solid"/>
+                      <a:round/>
+                      <a:headEnd type="none" w="med" len="med"/>
+                      <a:tailEnd type="none" w="med" len="med"/>
+                    </a:lnB>
+                    <a:solidFill>
+                      <a:srgbClr val="FFFFFF"/>
+                    </a:solidFill>
+                  </a:tcPr>
+                </a:tc>
+                <a:tc>
+                  <a:txBody>
+                    <a:bodyPr/>
+                    <a:lstStyle/>
+                    <a:p>
+                      <a:pPr algn="ctr" indent="0" marL="0">
+                        <a:lnSpc>
+                          <a:spcPts val="911"/>
+                        </a:lnSpc>
+                        <a:buNone/>
+                      </a:pPr>
+                      <a:r>
+                        <a:rPr lang="en-US" sz="670" b="1" dirty="0">
+                          <a:solidFill>
+                            <a:srgbClr val="0E171F"/>
+                          </a:solidFill>
+                          <a:latin typeface="Poppins" pitchFamily="34" charset="0"/>
+                          <a:ea typeface="Poppins" pitchFamily="34" charset="-122"/>
+                          <a:cs typeface="Poppins" pitchFamily="34" charset="-120"/>
+                        </a:rPr>
+                        <a:t>R</a:t>
+                      </a:r>
+                      <a:endParaRPr lang="en-US" sz="670" dirty="0">
+                        <a:latin typeface="Poppins" charset="0"/>
+                        <a:ea typeface="Poppins" charset="0"/>
+                        <a:cs typeface="Poppins" charset="0"/>
+                      </a:endParaRPr>
+                    </a:p>
+                  </a:txBody>
+                  <a:tcPr marL="50400" marR="50400" marT="50400" marB="50400" anchor="t">
+                    <a:lnL w="0" cap="flat" cmpd="sng" algn="ctr">
+                      <a:noFill/>
+                    </a:lnL>
+                    <a:lnR w="0" cap="flat" cmpd="sng" algn="ctr">
+                      <a:noFill/>
+                    </a:lnR>
+                    <a:lnT w="0" cap="flat" cmpd="sng" algn="ctr">
+                      <a:noFill/>
+                    </a:lnT>
+                    <a:lnB w="7620" cap="flat" cmpd="sng" algn="ctr">
+                      <a:solidFill>
+                        <a:srgbClr val="E3E7EC"/>
+                      </a:solidFill>
+                      <a:prstDash val="solid"/>
+                      <a:round/>
+                      <a:headEnd type="none" w="med" len="med"/>
+                      <a:tailEnd type="none" w="med" len="med"/>
+                    </a:lnB>
+                    <a:solidFill>
+                      <a:srgbClr val="FFFFFF"/>
+                    </a:solidFill>
+                  </a:tcPr>
+                </a:tc>
+              </a:tr>
+              <a:tr h="293149">
+                <a:tc>
+                  <a:txBody>
+                    <a:bodyPr/>
+                    <a:lstStyle/>
+                    <a:p>
+                      <a:pPr algn="l" indent="0" marL="0">
+                        <a:lnSpc>
+                          <a:spcPts val="911"/>
+                        </a:lnSpc>
+                        <a:buNone/>
+                      </a:pPr>
+                      <a:r>
+                        <a:rPr lang="en-US" sz="670" dirty="0">
+                          <a:solidFill>
+                            <a:srgbClr val="4A5565"/>
+                          </a:solidFill>
+                          <a:latin typeface="Poppins" pitchFamily="34" charset="0"/>
+                          <a:ea typeface="Poppins" pitchFamily="34" charset="-122"/>
+                          <a:cs typeface="Poppins" pitchFamily="34" charset="-120"/>
+                        </a:rPr>
+                        <a:t>Existing owners, referrals, JVPs</a:t>
+                      </a:r>
+                      <a:endParaRPr lang="en-US" sz="670" dirty="0">
+                        <a:latin typeface="Poppins" charset="0"/>
+                        <a:ea typeface="Poppins" charset="0"/>
+                        <a:cs typeface="Poppins" charset="0"/>
+                      </a:endParaRPr>
+                    </a:p>
+                  </a:txBody>
+                  <a:tcPr marL="50400" marR="50400" marT="50400" marB="50400" anchor="t">
+                    <a:lnL w="0" cap="flat" cmpd="sng" algn="ctr">
+                      <a:noFill/>
+                    </a:lnL>
+                    <a:lnR w="0" cap="flat" cmpd="sng" algn="ctr">
+                      <a:noFill/>
+                    </a:lnR>
+                    <a:lnT w="0" cap="flat" cmpd="sng" algn="ctr">
+                      <a:noFill/>
+                    </a:lnT>
+                    <a:lnB w="7620" cap="flat" cmpd="sng" algn="ctr">
+                      <a:solidFill>
+                        <a:srgbClr val="E3E7EC"/>
+                      </a:solidFill>
+                      <a:prstDash val="solid"/>
+                      <a:round/>
+                      <a:headEnd type="none" w="med" len="med"/>
+                      <a:tailEnd type="none" w="med" len="med"/>
+                    </a:lnB>
+                    <a:solidFill>
+                      <a:srgbClr val="F5F7FA"/>
+                    </a:solidFill>
+                  </a:tcPr>
+                </a:tc>
+                <a:tc>
+                  <a:txBody>
+                    <a:bodyPr/>
+                    <a:lstStyle/>
+                    <a:p>
+                      <a:pPr algn="ctr" indent="0" marL="0">
+                        <a:lnSpc>
+                          <a:spcPts val="911"/>
+                        </a:lnSpc>
+                        <a:buNone/>
+                      </a:pPr>
+                      <a:r>
+                        <a:rPr lang="en-US" sz="670" b="1" dirty="0">
+                          <a:solidFill>
+                            <a:srgbClr val="0E171F"/>
+                          </a:solidFill>
+                          <a:latin typeface="Poppins" pitchFamily="34" charset="0"/>
+                          <a:ea typeface="Poppins" pitchFamily="34" charset="-122"/>
+                          <a:cs typeface="Poppins" pitchFamily="34" charset="-120"/>
+                        </a:rPr>
+                        <a:t>A</a:t>
+                      </a:r>
+                      <a:endParaRPr lang="en-US" sz="670" dirty="0">
+                        <a:latin typeface="Poppins" charset="0"/>
+                        <a:ea typeface="Poppins" charset="0"/>
+                        <a:cs typeface="Poppins" charset="0"/>
+                      </a:endParaRPr>
+                    </a:p>
+                  </a:txBody>
+                  <a:tcPr marL="50400" marR="50400" marT="50400" marB="50400" anchor="t">
+                    <a:lnL w="0" cap="flat" cmpd="sng" algn="ctr">
+                      <a:noFill/>
+                    </a:lnL>
+                    <a:lnR w="0" cap="flat" cmpd="sng" algn="ctr">
+                      <a:noFill/>
+                    </a:lnR>
+                    <a:lnT w="0" cap="flat" cmpd="sng" algn="ctr">
+                      <a:noFill/>
+                    </a:lnT>
+                    <a:lnB w="7620" cap="flat" cmpd="sng" algn="ctr">
+                      <a:solidFill>
+                        <a:srgbClr val="E3E7EC"/>
+                      </a:solidFill>
+                      <a:prstDash val="solid"/>
+                      <a:round/>
+                      <a:headEnd type="none" w="med" len="med"/>
+                      <a:tailEnd type="none" w="med" len="med"/>
+                    </a:lnB>
+                    <a:solidFill>
+                      <a:srgbClr val="F5F7FA"/>
+                    </a:solidFill>
+                  </a:tcPr>
+                </a:tc>
+                <a:tc>
+                  <a:txBody>
+                    <a:bodyPr/>
+                    <a:lstStyle/>
+                    <a:p>
+                      <a:pPr algn="ctr" indent="0" marL="0">
+                        <a:lnSpc>
+                          <a:spcPts val="911"/>
+                        </a:lnSpc>
+                        <a:buNone/>
+                      </a:pPr>
+                      <a:r>
+                        <a:rPr lang="en-US" sz="670" dirty="0">
+                          <a:solidFill>
+                            <a:srgbClr val="4A5565"/>
+                          </a:solidFill>
+                          <a:latin typeface="Poppins" pitchFamily="34" charset="0"/>
+                          <a:ea typeface="Poppins" pitchFamily="34" charset="-122"/>
+                          <a:cs typeface="Poppins" pitchFamily="34" charset="-120"/>
+                        </a:rPr>
+                        <a:t>–</a:t>
+                      </a:r>
+                      <a:endParaRPr lang="en-US" sz="670" dirty="0">
+                        <a:latin typeface="Poppins" charset="0"/>
+                        <a:ea typeface="Poppins" charset="0"/>
+                        <a:cs typeface="Poppins" charset="0"/>
+                      </a:endParaRPr>
+                    </a:p>
+                  </a:txBody>
+                  <a:tcPr marL="50400" marR="50400" marT="50400" marB="50400" anchor="t">
+                    <a:lnL w="0" cap="flat" cmpd="sng" algn="ctr">
+                      <a:noFill/>
+                    </a:lnL>
+                    <a:lnR w="0" cap="flat" cmpd="sng" algn="ctr">
+                      <a:noFill/>
+                    </a:lnR>
+                    <a:lnT w="0" cap="flat" cmpd="sng" algn="ctr">
+                      <a:noFill/>
+                    </a:lnT>
+                    <a:lnB w="7620" cap="flat" cmpd="sng" algn="ctr">
+                      <a:solidFill>
+                        <a:srgbClr val="E3E7EC"/>
+                      </a:solidFill>
+                      <a:prstDash val="solid"/>
+                      <a:round/>
+                      <a:headEnd type="none" w="med" len="med"/>
+                      <a:tailEnd type="none" w="med" len="med"/>
+                    </a:lnB>
+                    <a:solidFill>
+                      <a:srgbClr val="F5F7FA"/>
+                    </a:solidFill>
+                  </a:tcPr>
+                </a:tc>
+                <a:tc>
+                  <a:txBody>
+                    <a:bodyPr/>
+                    <a:lstStyle/>
+                    <a:p>
+                      <a:pPr algn="ctr" indent="0" marL="0">
+                        <a:lnSpc>
+                          <a:spcPts val="911"/>
+                        </a:lnSpc>
+                        <a:buNone/>
+                      </a:pPr>
+                      <a:r>
+                        <a:rPr lang="en-US" sz="670" b="1" dirty="0">
+                          <a:solidFill>
+                            <a:srgbClr val="0E171F"/>
+                          </a:solidFill>
+                          <a:latin typeface="Poppins" pitchFamily="34" charset="0"/>
+                          <a:ea typeface="Poppins" pitchFamily="34" charset="-122"/>
+                          <a:cs typeface="Poppins" pitchFamily="34" charset="-120"/>
+                        </a:rPr>
+                        <a:t>R</a:t>
+                      </a:r>
+                      <a:endParaRPr lang="en-US" sz="670" dirty="0">
+                        <a:latin typeface="Poppins" charset="0"/>
+                        <a:ea typeface="Poppins" charset="0"/>
+                        <a:cs typeface="Poppins" charset="0"/>
+                      </a:endParaRPr>
+                    </a:p>
+                  </a:txBody>
+                  <a:tcPr marL="50400" marR="50400" marT="50400" marB="50400" anchor="t">
+                    <a:lnL w="0" cap="flat" cmpd="sng" algn="ctr">
+                      <a:noFill/>
+                    </a:lnL>
+                    <a:lnR w="0" cap="flat" cmpd="sng" algn="ctr">
+                      <a:noFill/>
+                    </a:lnR>
+                    <a:lnT w="0" cap="flat" cmpd="sng" algn="ctr">
+                      <a:noFill/>
+                    </a:lnT>
+                    <a:lnB w="7620" cap="flat" cmpd="sng" algn="ctr">
+                      <a:solidFill>
+                        <a:srgbClr val="E3E7EC"/>
+                      </a:solidFill>
+                      <a:prstDash val="solid"/>
+                      <a:round/>
+                      <a:headEnd type="none" w="med" len="med"/>
+                      <a:tailEnd type="none" w="med" len="med"/>
+                    </a:lnB>
+                    <a:solidFill>
+                      <a:srgbClr val="F5F7FA"/>
+                    </a:solidFill>
+                  </a:tcPr>
+                </a:tc>
+                <a:tc>
+                  <a:txBody>
+                    <a:bodyPr/>
+                    <a:lstStyle/>
+                    <a:p>
+                      <a:pPr algn="ctr" indent="0" marL="0">
+                        <a:lnSpc>
+                          <a:spcPts val="911"/>
+                        </a:lnSpc>
+                        <a:buNone/>
+                      </a:pPr>
+                      <a:r>
+                        <a:rPr lang="en-US" sz="670" b="1" dirty="0">
+                          <a:solidFill>
+                            <a:srgbClr val="0E171F"/>
+                          </a:solidFill>
+                          <a:latin typeface="Poppins" pitchFamily="34" charset="0"/>
+                          <a:ea typeface="Poppins" pitchFamily="34" charset="-122"/>
+                          <a:cs typeface="Poppins" pitchFamily="34" charset="-120"/>
+                        </a:rPr>
+                        <a:t>R</a:t>
+                      </a:r>
+                      <a:endParaRPr lang="en-US" sz="670" dirty="0">
+                        <a:latin typeface="Poppins" charset="0"/>
+                        <a:ea typeface="Poppins" charset="0"/>
+                        <a:cs typeface="Poppins" charset="0"/>
+                      </a:endParaRPr>
+                    </a:p>
+                  </a:txBody>
+                  <a:tcPr marL="50400" marR="50400" marT="50400" marB="50400" anchor="t">
+                    <a:lnL w="0" cap="flat" cmpd="sng" algn="ctr">
+                      <a:noFill/>
+                    </a:lnL>
+                    <a:lnR w="0" cap="flat" cmpd="sng" algn="ctr">
+                      <a:noFill/>
+                    </a:lnR>
+                    <a:lnT w="0" cap="flat" cmpd="sng" algn="ctr">
+                      <a:noFill/>
+                    </a:lnT>
+                    <a:lnB w="7620" cap="flat" cmpd="sng" algn="ctr">
+                      <a:solidFill>
+                        <a:srgbClr val="E3E7EC"/>
+                      </a:solidFill>
+                      <a:prstDash val="solid"/>
+                      <a:round/>
+                      <a:headEnd type="none" w="med" len="med"/>
+                      <a:tailEnd type="none" w="med" len="med"/>
+                    </a:lnB>
+                    <a:solidFill>
+                      <a:srgbClr val="F5F7FA"/>
+                    </a:solidFill>
+                  </a:tcPr>
+                </a:tc>
+                <a:tc>
+                  <a:txBody>
+                    <a:bodyPr/>
+                    <a:lstStyle/>
+                    <a:p>
+                      <a:pPr algn="ctr" indent="0" marL="0">
+                        <a:lnSpc>
+                          <a:spcPts val="911"/>
+                        </a:lnSpc>
+                        <a:buNone/>
+                      </a:pPr>
+                      <a:r>
+                        <a:rPr lang="en-US" sz="670" dirty="0">
+                          <a:solidFill>
+                            <a:srgbClr val="4A5565"/>
+                          </a:solidFill>
+                          <a:latin typeface="Poppins" pitchFamily="34" charset="0"/>
+                          <a:ea typeface="Poppins" pitchFamily="34" charset="-122"/>
+                          <a:cs typeface="Poppins" pitchFamily="34" charset="-120"/>
+                        </a:rPr>
+                        <a:t>–</a:t>
+                      </a:r>
+                      <a:endParaRPr lang="en-US" sz="670" dirty="0">
+                        <a:latin typeface="Poppins" charset="0"/>
+                        <a:ea typeface="Poppins" charset="0"/>
+                        <a:cs typeface="Poppins" charset="0"/>
+                      </a:endParaRPr>
+                    </a:p>
+                  </a:txBody>
+                  <a:tcPr marL="50400" marR="50400" marT="50400" marB="50400" anchor="t">
+                    <a:lnL w="0" cap="flat" cmpd="sng" algn="ctr">
+                      <a:noFill/>
+                    </a:lnL>
+                    <a:lnR w="0" cap="flat" cmpd="sng" algn="ctr">
+                      <a:noFill/>
+                    </a:lnR>
+                    <a:lnT w="0" cap="flat" cmpd="sng" algn="ctr">
+                      <a:noFill/>
+                    </a:lnT>
+                    <a:lnB w="7620" cap="flat" cmpd="sng" algn="ctr">
+                      <a:solidFill>
+                        <a:srgbClr val="E3E7EC"/>
+                      </a:solidFill>
+                      <a:prstDash val="solid"/>
+                      <a:round/>
+                      <a:headEnd type="none" w="med" len="med"/>
+                      <a:tailEnd type="none" w="med" len="med"/>
+                    </a:lnB>
+                    <a:solidFill>
+                      <a:srgbClr val="F5F7FA"/>
+                    </a:solidFill>
+                  </a:tcPr>
+                </a:tc>
+                <a:tc>
+                  <a:txBody>
+                    <a:bodyPr/>
+                    <a:lstStyle/>
+                    <a:p>
+                      <a:pPr algn="ctr" indent="0" marL="0">
+                        <a:lnSpc>
+                          <a:spcPts val="911"/>
+                        </a:lnSpc>
+                        <a:buNone/>
+                      </a:pPr>
+                      <a:r>
+                        <a:rPr lang="en-US" sz="670" dirty="0">
+                          <a:solidFill>
+                            <a:srgbClr val="4A5565"/>
+                          </a:solidFill>
+                          <a:latin typeface="Poppins" pitchFamily="34" charset="0"/>
+                          <a:ea typeface="Poppins" pitchFamily="34" charset="-122"/>
+                          <a:cs typeface="Poppins" pitchFamily="34" charset="-120"/>
+                        </a:rPr>
+                        <a:t>C</a:t>
+                      </a:r>
+                      <a:endParaRPr lang="en-US" sz="670" dirty="0">
+                        <a:latin typeface="Poppins" charset="0"/>
+                        <a:ea typeface="Poppins" charset="0"/>
+                        <a:cs typeface="Poppins" charset="0"/>
+                      </a:endParaRPr>
+                    </a:p>
+                  </a:txBody>
+                  <a:tcPr marL="50400" marR="50400" marT="50400" marB="50400" anchor="t">
+                    <a:lnL w="0" cap="flat" cmpd="sng" algn="ctr">
+                      <a:noFill/>
+                    </a:lnL>
+                    <a:lnR w="0" cap="flat" cmpd="sng" algn="ctr">
+                      <a:noFill/>
+                    </a:lnR>
+                    <a:lnT w="0" cap="flat" cmpd="sng" algn="ctr">
+                      <a:noFill/>
+                    </a:lnT>
+                    <a:lnB w="7620" cap="flat" cmpd="sng" algn="ctr">
+                      <a:solidFill>
+                        <a:srgbClr val="E3E7EC"/>
+                      </a:solidFill>
+                      <a:prstDash val="solid"/>
+                      <a:round/>
+                      <a:headEnd type="none" w="med" len="med"/>
+                      <a:tailEnd type="none" w="med" len="med"/>
+                    </a:lnB>
+                    <a:solidFill>
+                      <a:srgbClr val="F5F7FA"/>
+                    </a:solidFill>
+                  </a:tcPr>
+                </a:tc>
+              </a:tr>
+              <a:tr h="293149">
+                <a:tc>
+                  <a:txBody>
+                    <a:bodyPr/>
+                    <a:lstStyle/>
+                    <a:p>
+                      <a:pPr algn="l" indent="0" marL="0">
+                        <a:lnSpc>
+                          <a:spcPts val="911"/>
+                        </a:lnSpc>
+                        <a:buNone/>
+                      </a:pPr>
+                      <a:r>
+                        <a:rPr lang="en-US" sz="670" dirty="0">
+                          <a:solidFill>
+                            <a:srgbClr val="4A5565"/>
+                          </a:solidFill>
+                          <a:latin typeface="Poppins" pitchFamily="34" charset="0"/>
+                          <a:ea typeface="Poppins" pitchFamily="34" charset="-122"/>
+                          <a:cs typeface="Poppins" pitchFamily="34" charset="-120"/>
+                        </a:rPr>
+                        <a:t>Taproom, events, Oktoberfest</a:t>
+                      </a:r>
+                      <a:endParaRPr lang="en-US" sz="670" dirty="0">
+                        <a:latin typeface="Poppins" charset="0"/>
+                        <a:ea typeface="Poppins" charset="0"/>
+                        <a:cs typeface="Poppins" charset="0"/>
+                      </a:endParaRPr>
+                    </a:p>
+                  </a:txBody>
+                  <a:tcPr marL="50400" marR="50400" marT="50400" marB="50400" anchor="t">
+                    <a:lnL w="0" cap="flat" cmpd="sng" algn="ctr">
+                      <a:noFill/>
+                    </a:lnL>
+                    <a:lnR w="0" cap="flat" cmpd="sng" algn="ctr">
+                      <a:noFill/>
+                    </a:lnR>
+                    <a:lnT w="0" cap="flat" cmpd="sng" algn="ctr">
+                      <a:noFill/>
+                    </a:lnT>
+                    <a:lnB w="7620" cap="flat" cmpd="sng" algn="ctr">
+                      <a:solidFill>
+                        <a:srgbClr val="E3E7EC"/>
+                      </a:solidFill>
+                      <a:prstDash val="solid"/>
+                      <a:round/>
+                      <a:headEnd type="none" w="med" len="med"/>
+                      <a:tailEnd type="none" w="med" len="med"/>
+                    </a:lnB>
+                    <a:solidFill>
+                      <a:srgbClr val="FFFFFF"/>
+                    </a:solidFill>
+                  </a:tcPr>
+                </a:tc>
+                <a:tc>
+                  <a:txBody>
+                    <a:bodyPr/>
+                    <a:lstStyle/>
+                    <a:p>
+                      <a:pPr algn="ctr" indent="0" marL="0">
+                        <a:lnSpc>
+                          <a:spcPts val="911"/>
+                        </a:lnSpc>
+                        <a:buNone/>
+                      </a:pPr>
+                      <a:r>
+                        <a:rPr lang="en-US" sz="670" b="1" dirty="0">
+                          <a:solidFill>
+                            <a:srgbClr val="0E171F"/>
+                          </a:solidFill>
+                          <a:latin typeface="Poppins" pitchFamily="34" charset="0"/>
+                          <a:ea typeface="Poppins" pitchFamily="34" charset="-122"/>
+                          <a:cs typeface="Poppins" pitchFamily="34" charset="-120"/>
+                        </a:rPr>
+                        <a:t>A</a:t>
+                      </a:r>
+                      <a:endParaRPr lang="en-US" sz="670" dirty="0">
+                        <a:latin typeface="Poppins" charset="0"/>
+                        <a:ea typeface="Poppins" charset="0"/>
+                        <a:cs typeface="Poppins" charset="0"/>
+                      </a:endParaRPr>
+                    </a:p>
+                  </a:txBody>
+                  <a:tcPr marL="50400" marR="50400" marT="50400" marB="50400" anchor="t">
+                    <a:lnL w="0" cap="flat" cmpd="sng" algn="ctr">
+                      <a:noFill/>
+                    </a:lnL>
+                    <a:lnR w="0" cap="flat" cmpd="sng" algn="ctr">
+                      <a:noFill/>
+                    </a:lnR>
+                    <a:lnT w="0" cap="flat" cmpd="sng" algn="ctr">
+                      <a:noFill/>
+                    </a:lnT>
+                    <a:lnB w="7620" cap="flat" cmpd="sng" algn="ctr">
+                      <a:solidFill>
+                        <a:srgbClr val="E3E7EC"/>
+                      </a:solidFill>
+                      <a:prstDash val="solid"/>
+                      <a:round/>
+                      <a:headEnd type="none" w="med" len="med"/>
+                      <a:tailEnd type="none" w="med" len="med"/>
+                    </a:lnB>
+                    <a:solidFill>
+                      <a:srgbClr val="FFFFFF"/>
+                    </a:solidFill>
+                  </a:tcPr>
+                </a:tc>
+                <a:tc>
+                  <a:txBody>
+                    <a:bodyPr/>
+                    <a:lstStyle/>
+                    <a:p>
+                      <a:pPr algn="ctr" indent="0" marL="0">
+                        <a:lnSpc>
+                          <a:spcPts val="911"/>
+                        </a:lnSpc>
+                        <a:buNone/>
+                      </a:pPr>
+                      <a:r>
+                        <a:rPr lang="en-US" sz="670" b="1" dirty="0">
+                          <a:solidFill>
+                            <a:srgbClr val="0E171F"/>
+                          </a:solidFill>
+                          <a:latin typeface="Poppins" pitchFamily="34" charset="0"/>
+                          <a:ea typeface="Poppins" pitchFamily="34" charset="-122"/>
+                          <a:cs typeface="Poppins" pitchFamily="34" charset="-120"/>
+                        </a:rPr>
+                        <a:t>R</a:t>
+                      </a:r>
+                      <a:endParaRPr lang="en-US" sz="670" dirty="0">
+                        <a:latin typeface="Poppins" charset="0"/>
+                        <a:ea typeface="Poppins" charset="0"/>
+                        <a:cs typeface="Poppins" charset="0"/>
+                      </a:endParaRPr>
+                    </a:p>
+                  </a:txBody>
+                  <a:tcPr marL="50400" marR="50400" marT="50400" marB="50400" anchor="t">
+                    <a:lnL w="0" cap="flat" cmpd="sng" algn="ctr">
+                      <a:noFill/>
+                    </a:lnL>
+                    <a:lnR w="0" cap="flat" cmpd="sng" algn="ctr">
+                      <a:noFill/>
+                    </a:lnR>
+                    <a:lnT w="0" cap="flat" cmpd="sng" algn="ctr">
+                      <a:noFill/>
+                    </a:lnT>
+                    <a:lnB w="7620" cap="flat" cmpd="sng" algn="ctr">
+                      <a:solidFill>
+                        <a:srgbClr val="E3E7EC"/>
+                      </a:solidFill>
+                      <a:prstDash val="solid"/>
+                      <a:round/>
+                      <a:headEnd type="none" w="med" len="med"/>
+                      <a:tailEnd type="none" w="med" len="med"/>
+                    </a:lnB>
+                    <a:solidFill>
+                      <a:srgbClr val="FFFFFF"/>
+                    </a:solidFill>
+                  </a:tcPr>
+                </a:tc>
+                <a:tc>
+                  <a:txBody>
+                    <a:bodyPr/>
+                    <a:lstStyle/>
+                    <a:p>
+                      <a:pPr algn="ctr" indent="0" marL="0">
+                        <a:lnSpc>
+                          <a:spcPts val="911"/>
+                        </a:lnSpc>
+                        <a:buNone/>
+                      </a:pPr>
+                      <a:r>
+                        <a:rPr lang="en-US" sz="670" dirty="0">
+                          <a:solidFill>
+                            <a:srgbClr val="4A5565"/>
+                          </a:solidFill>
+                          <a:latin typeface="Poppins" pitchFamily="34" charset="0"/>
+                          <a:ea typeface="Poppins" pitchFamily="34" charset="-122"/>
+                          <a:cs typeface="Poppins" pitchFamily="34" charset="-120"/>
+                        </a:rPr>
                         <a:t>C</a:t>
                       </a:r>
                       <a:endParaRPr lang="en-US" sz="670" dirty="0">
@@ -22064,15 +24208,68 @@
                         <a:buNone/>
                       </a:pPr>
                       <a:r>
-                        <a:rPr lang="en-US" sz="670" b="1" dirty="0">
+                        <a:rPr lang="en-US" sz="670" dirty="0">
                           <a:solidFill>
-                            <a:srgbClr val="0E171F"/>
+                            <a:srgbClr val="4A5565"/>
                           </a:solidFill>
                           <a:latin typeface="Poppins" pitchFamily="34" charset="0"/>
                           <a:ea typeface="Poppins" pitchFamily="34" charset="-122"/>
                           <a:cs typeface="Poppins" pitchFamily="34" charset="-120"/>
                         </a:rPr>
-                        <a:t>R</a:t>
+                        <a:t>C</a:t>
+                      </a:r>
+                      <a:endParaRPr lang="en-US" sz="670" dirty="0">
+                        <a:latin typeface="Poppins" charset="0"/>
+                        <a:ea typeface="Poppins" charset="0"/>
+                        <a:cs typeface="Poppins" charset="0"/>
+                      </a:endParaRPr>
+                    </a:p>
+                  </a:txBody>
+                  <a:tcPr marL="50400" marR="50400" marT="50400" marB="50400" anchor="t">
+                    <a:lnL w="0" cap="flat" cmpd="sng" algn="ctr">
+                      <a:noFill/>
+                    </a:lnL>
+                    <a:lnR w="0" cap="flat" cmpd="sng" algn="ctr">
+                      <a:noFill/>
+                    </a:lnR>
+                    <a:lnT w="0" cap="flat" cmpd="sng" algn="ctr">
+                      <a:noFill/>
+                    </a:lnT>
+                    <a:lnB w="7620" cap="flat" cmpd="sng" algn="ctr">
+                      <a:solidFill>
+                        <a:srgbClr val="E3E7EC"/>
+                      </a:solidFill>
+                      <a:prstDash val="solid"/>
+                      <a:round/>
+                      <a:headEnd type="none" w="med" len="med"/>
+                      <a:tailEnd type="none" w="med" len="med"/>
+                    </a:lnB>
+                    <a:solidFill>
+                      <a:srgbClr val="FFFFFF"/>
+                    </a:solidFill>
+                  </a:tcPr>
+                </a:tc>
+                <a:tc>
+                  <a:txBody>
+                    <a:bodyPr/>
+                    <a:lstStyle/>
+                    <a:p>
+                      <a:pPr algn="ctr" indent="0" marL="0">
+                        <a:lnSpc>
+                          <a:spcPts val="911"/>
+                        </a:lnSpc>
+                        <a:buNone/>
+                      </a:pPr>
+                      <a:r>
+                        <a:rPr lang="en-US" sz="670" dirty="0">
+                          <a:solidFill>
+                            <a:srgbClr val="4A5565"/>
+                          </a:solidFill>
+                          <a:latin typeface="Poppins" pitchFamily="34" charset="0"/>
+                          <a:ea typeface="Poppins" pitchFamily="34" charset="-122"/>
+                          <a:cs typeface="Poppins" pitchFamily="34" charset="-120"/>
+                        </a:rPr>
+                        <a:t>C</a:t>
                       </a:r>
                       <a:endParaRPr lang="en-US" sz="670" dirty="0">
                         <a:latin typeface="Poppins" charset="0"/>
@@ -22127,7 +24324,7 @@
                           <a:ea typeface="Poppins" pitchFamily="34" charset="-122"/>
                           <a:cs typeface="Poppins" pitchFamily="34" charset="-120"/>
                         </a:rPr>
-                        <a:t>Wholesale build</a:t>
+                        <a:t>Wholesale and next hire</a:t>
                       </a:r>
                       <a:endParaRPr lang="en-US" sz="670" dirty="0">
                         <a:latin typeface="Poppins" charset="0"/>
@@ -22392,7 +24589,7 @@
                           <a:ea typeface="Poppins" pitchFamily="34" charset="-122"/>
                           <a:cs typeface="Poppins" pitchFamily="34" charset="-120"/>
                         </a:rPr>
-                        <a:t>C</a:t>
+                        <a:t>–</a:t>
                       </a:r>
                       <a:endParaRPr lang="en-US" sz="670" dirty="0">
                         <a:latin typeface="Poppins" charset="0"/>
@@ -22445,7 +24642,7 @@
                           <a:ea typeface="Poppins" pitchFamily="34" charset="-122"/>
                           <a:cs typeface="Poppins" pitchFamily="34" charset="-120"/>
                         </a:rPr>
-                        <a:t>C</a:t>
+                        <a:t>–</a:t>
                       </a:r>
                       <a:endParaRPr lang="en-US" sz="670" dirty="0">
                         <a:latin typeface="Poppins" charset="0"/>
@@ -22500,7 +24697,7 @@
                           <a:ea typeface="Poppins" pitchFamily="34" charset="-122"/>
                           <a:cs typeface="Poppins" pitchFamily="34" charset="-120"/>
                         </a:rPr>
-                        <a:t>Destination programme</a:t>
+                        <a:t>Brand, messaging, proof</a:t>
                       </a:r>
                       <a:endParaRPr lang="en-US" sz="670" dirty="0">
                         <a:latin typeface="Poppins" charset="0"/>
@@ -22545,9 +24742,9 @@
                         <a:buNone/>
                       </a:pPr>
                       <a:r>
-                        <a:rPr lang="en-US" sz="670" dirty="0">
+                        <a:rPr lang="en-US" sz="670" b="1" dirty="0">
                           <a:solidFill>
-                            <a:srgbClr val="4A5565"/>
+                            <a:srgbClr val="0E171F"/>
                           </a:solidFill>
                           <a:latin typeface="Poppins" pitchFamily="34" charset="0"/>
                           <a:ea typeface="Poppins" pitchFamily="34" charset="-122"/>
@@ -22651,59 +24848,6 @@
                         <a:buNone/>
                       </a:pPr>
                       <a:r>
-                        <a:rPr lang="en-US" sz="670" b="1" dirty="0">
-                          <a:solidFill>
-                            <a:srgbClr val="0E171F"/>
-                          </a:solidFill>
-                          <a:latin typeface="Poppins" pitchFamily="34" charset="0"/>
-                          <a:ea typeface="Poppins" pitchFamily="34" charset="-122"/>
-                          <a:cs typeface="Poppins" pitchFamily="34" charset="-120"/>
-                        </a:rPr>
-                        <a:t>R</a:t>
-                      </a:r>
-                      <a:endParaRPr lang="en-US" sz="670" dirty="0">
-                        <a:latin typeface="Poppins" charset="0"/>
-                        <a:ea typeface="Poppins" charset="0"/>
-                        <a:cs typeface="Poppins" charset="0"/>
-                      </a:endParaRPr>
-                    </a:p>
-                  </a:txBody>
-                  <a:tcPr marL="50400" marR="50400" marT="50400" marB="50400" anchor="t">
-                    <a:lnL w="0" cap="flat" cmpd="sng" algn="ctr">
-                      <a:noFill/>
-                    </a:lnL>
-                    <a:lnR w="0" cap="flat" cmpd="sng" algn="ctr">
-                      <a:noFill/>
-                    </a:lnR>
-                    <a:lnT w="0" cap="flat" cmpd="sng" algn="ctr">
-                      <a:noFill/>
-                    </a:lnT>
-                    <a:lnB w="7620" cap="flat" cmpd="sng" algn="ctr">
-                      <a:solidFill>
-                        <a:srgbClr val="E3E7EC"/>
-                      </a:solidFill>
-                      <a:prstDash val="solid"/>
-                      <a:round/>
-                      <a:headEnd type="none" w="med" len="med"/>
-                      <a:tailEnd type="none" w="med" len="med"/>
-                    </a:lnB>
-                    <a:solidFill>
-                      <a:srgbClr val="FFFFFF"/>
-                    </a:solidFill>
-                  </a:tcPr>
-                </a:tc>
-                <a:tc>
-                  <a:txBody>
-                    <a:bodyPr/>
-                    <a:lstStyle/>
-                    <a:p>
-                      <a:pPr algn="ctr" indent="0" marL="0">
-                        <a:lnSpc>
-                          <a:spcPts val="911"/>
-                        </a:lnSpc>
-                        <a:buNone/>
-                      </a:pPr>
-                      <a:r>
                         <a:rPr lang="en-US" sz="670" dirty="0">
                           <a:solidFill>
                             <a:srgbClr val="4A5565"/>
@@ -22713,699 +24857,6 @@
                           <a:cs typeface="Poppins" pitchFamily="34" charset="-120"/>
                         </a:rPr>
                         <a:t>C</a:t>
-                      </a:r>
-                      <a:endParaRPr lang="en-US" sz="670" dirty="0">
-                        <a:latin typeface="Poppins" charset="0"/>
-                        <a:ea typeface="Poppins" charset="0"/>
-                        <a:cs typeface="Poppins" charset="0"/>
-                      </a:endParaRPr>
-                    </a:p>
-                  </a:txBody>
-                  <a:tcPr marL="50400" marR="50400" marT="50400" marB="50400" anchor="t">
-                    <a:lnL w="0" cap="flat" cmpd="sng" algn="ctr">
-                      <a:noFill/>
-                    </a:lnL>
-                    <a:lnR w="0" cap="flat" cmpd="sng" algn="ctr">
-                      <a:noFill/>
-                    </a:lnR>
-                    <a:lnT w="0" cap="flat" cmpd="sng" algn="ctr">
-                      <a:noFill/>
-                    </a:lnT>
-                    <a:lnB w="7620" cap="flat" cmpd="sng" algn="ctr">
-                      <a:solidFill>
-                        <a:srgbClr val="E3E7EC"/>
-                      </a:solidFill>
-                      <a:prstDash val="solid"/>
-                      <a:round/>
-                      <a:headEnd type="none" w="med" len="med"/>
-                      <a:tailEnd type="none" w="med" len="med"/>
-                    </a:lnB>
-                    <a:solidFill>
-                      <a:srgbClr val="FFFFFF"/>
-                    </a:solidFill>
-                  </a:tcPr>
-                </a:tc>
-                <a:tc>
-                  <a:txBody>
-                    <a:bodyPr/>
-                    <a:lstStyle/>
-                    <a:p>
-                      <a:pPr algn="ctr" indent="0" marL="0">
-                        <a:lnSpc>
-                          <a:spcPts val="911"/>
-                        </a:lnSpc>
-                        <a:buNone/>
-                      </a:pPr>
-                      <a:r>
-                        <a:rPr lang="en-US" sz="670" dirty="0">
-                          <a:solidFill>
-                            <a:srgbClr val="4A5565"/>
-                          </a:solidFill>
-                          <a:latin typeface="Poppins" pitchFamily="34" charset="0"/>
-                          <a:ea typeface="Poppins" pitchFamily="34" charset="-122"/>
-                          <a:cs typeface="Poppins" pitchFamily="34" charset="-120"/>
-                        </a:rPr>
-                        <a:t>C</a:t>
-                      </a:r>
-                      <a:endParaRPr lang="en-US" sz="670" dirty="0">
-                        <a:latin typeface="Poppins" charset="0"/>
-                        <a:ea typeface="Poppins" charset="0"/>
-                        <a:cs typeface="Poppins" charset="0"/>
-                      </a:endParaRPr>
-                    </a:p>
-                  </a:txBody>
-                  <a:tcPr marL="50400" marR="50400" marT="50400" marB="50400" anchor="t">
-                    <a:lnL w="0" cap="flat" cmpd="sng" algn="ctr">
-                      <a:noFill/>
-                    </a:lnL>
-                    <a:lnR w="0" cap="flat" cmpd="sng" algn="ctr">
-                      <a:noFill/>
-                    </a:lnR>
-                    <a:lnT w="0" cap="flat" cmpd="sng" algn="ctr">
-                      <a:noFill/>
-                    </a:lnT>
-                    <a:lnB w="7620" cap="flat" cmpd="sng" algn="ctr">
-                      <a:solidFill>
-                        <a:srgbClr val="E3E7EC"/>
-                      </a:solidFill>
-                      <a:prstDash val="solid"/>
-                      <a:round/>
-                      <a:headEnd type="none" w="med" len="med"/>
-                      <a:tailEnd type="none" w="med" len="med"/>
-                    </a:lnB>
-                    <a:solidFill>
-                      <a:srgbClr val="FFFFFF"/>
-                    </a:solidFill>
-                  </a:tcPr>
-                </a:tc>
-                <a:tc>
-                  <a:txBody>
-                    <a:bodyPr/>
-                    <a:lstStyle/>
-                    <a:p>
-                      <a:pPr algn="ctr" indent="0" marL="0">
-                        <a:lnSpc>
-                          <a:spcPts val="911"/>
-                        </a:lnSpc>
-                        <a:buNone/>
-                      </a:pPr>
-                      <a:r>
-                        <a:rPr lang="en-US" sz="670" dirty="0">
-                          <a:solidFill>
-                            <a:srgbClr val="4A5565"/>
-                          </a:solidFill>
-                          <a:latin typeface="Poppins" pitchFamily="34" charset="0"/>
-                          <a:ea typeface="Poppins" pitchFamily="34" charset="-122"/>
-                          <a:cs typeface="Poppins" pitchFamily="34" charset="-120"/>
-                        </a:rPr>
-                        <a:t>R</a:t>
-                      </a:r>
-                      <a:endParaRPr lang="en-US" sz="670" dirty="0">
-                        <a:latin typeface="Poppins" charset="0"/>
-                        <a:ea typeface="Poppins" charset="0"/>
-                        <a:cs typeface="Poppins" charset="0"/>
-                      </a:endParaRPr>
-                    </a:p>
-                  </a:txBody>
-                  <a:tcPr marL="50400" marR="50400" marT="50400" marB="50400" anchor="t">
-                    <a:lnL w="0" cap="flat" cmpd="sng" algn="ctr">
-                      <a:noFill/>
-                    </a:lnL>
-                    <a:lnR w="0" cap="flat" cmpd="sng" algn="ctr">
-                      <a:noFill/>
-                    </a:lnR>
-                    <a:lnT w="0" cap="flat" cmpd="sng" algn="ctr">
-                      <a:noFill/>
-                    </a:lnT>
-                    <a:lnB w="7620" cap="flat" cmpd="sng" algn="ctr">
-                      <a:solidFill>
-                        <a:srgbClr val="E3E7EC"/>
-                      </a:solidFill>
-                      <a:prstDash val="solid"/>
-                      <a:round/>
-                      <a:headEnd type="none" w="med" len="med"/>
-                      <a:tailEnd type="none" w="med" len="med"/>
-                    </a:lnB>
-                    <a:solidFill>
-                      <a:srgbClr val="FFFFFF"/>
-                    </a:solidFill>
-                  </a:tcPr>
-                </a:tc>
-              </a:tr>
-              <a:tr h="293149">
-                <a:tc>
-                  <a:txBody>
-                    <a:bodyPr/>
-                    <a:lstStyle/>
-                    <a:p>
-                      <a:pPr algn="l" indent="0" marL="0">
-                        <a:lnSpc>
-                          <a:spcPts val="911"/>
-                        </a:lnSpc>
-                        <a:buNone/>
-                      </a:pPr>
-                      <a:r>
-                        <a:rPr lang="en-US" sz="670" dirty="0">
-                          <a:solidFill>
-                            <a:srgbClr val="4A5565"/>
-                          </a:solidFill>
-                          <a:latin typeface="Poppins" pitchFamily="34" charset="0"/>
-                          <a:ea typeface="Poppins" pitchFamily="34" charset="-122"/>
-                          <a:cs typeface="Poppins" pitchFamily="34" charset="-120"/>
-                        </a:rPr>
-                        <a:t>Partnerships</a:t>
-                      </a:r>
-                      <a:endParaRPr lang="en-US" sz="670" dirty="0">
-                        <a:latin typeface="Poppins" charset="0"/>
-                        <a:ea typeface="Poppins" charset="0"/>
-                        <a:cs typeface="Poppins" charset="0"/>
-                      </a:endParaRPr>
-                    </a:p>
-                  </a:txBody>
-                  <a:tcPr marL="50400" marR="50400" marT="50400" marB="50400" anchor="t">
-                    <a:lnL w="0" cap="flat" cmpd="sng" algn="ctr">
-                      <a:noFill/>
-                    </a:lnL>
-                    <a:lnR w="0" cap="flat" cmpd="sng" algn="ctr">
-                      <a:noFill/>
-                    </a:lnR>
-                    <a:lnT w="0" cap="flat" cmpd="sng" algn="ctr">
-                      <a:noFill/>
-                    </a:lnT>
-                    <a:lnB w="7620" cap="flat" cmpd="sng" algn="ctr">
-                      <a:solidFill>
-                        <a:srgbClr val="E3E7EC"/>
-                      </a:solidFill>
-                      <a:prstDash val="solid"/>
-                      <a:round/>
-                      <a:headEnd type="none" w="med" len="med"/>
-                      <a:tailEnd type="none" w="med" len="med"/>
-                    </a:lnB>
-                    <a:solidFill>
-                      <a:srgbClr val="F5F7FA"/>
-                    </a:solidFill>
-                  </a:tcPr>
-                </a:tc>
-                <a:tc>
-                  <a:txBody>
-                    <a:bodyPr/>
-                    <a:lstStyle/>
-                    <a:p>
-                      <a:pPr algn="ctr" indent="0" marL="0">
-                        <a:lnSpc>
-                          <a:spcPts val="911"/>
-                        </a:lnSpc>
-                        <a:buNone/>
-                      </a:pPr>
-                      <a:r>
-                        <a:rPr lang="en-US" sz="670" dirty="0">
-                          <a:solidFill>
-                            <a:srgbClr val="4A5565"/>
-                          </a:solidFill>
-                          <a:latin typeface="Poppins" pitchFamily="34" charset="0"/>
-                          <a:ea typeface="Poppins" pitchFamily="34" charset="-122"/>
-                          <a:cs typeface="Poppins" pitchFamily="34" charset="-120"/>
-                        </a:rPr>
-                        <a:t>C</a:t>
-                      </a:r>
-                      <a:endParaRPr lang="en-US" sz="670" dirty="0">
-                        <a:latin typeface="Poppins" charset="0"/>
-                        <a:ea typeface="Poppins" charset="0"/>
-                        <a:cs typeface="Poppins" charset="0"/>
-                      </a:endParaRPr>
-                    </a:p>
-                  </a:txBody>
-                  <a:tcPr marL="50400" marR="50400" marT="50400" marB="50400" anchor="t">
-                    <a:lnL w="0" cap="flat" cmpd="sng" algn="ctr">
-                      <a:noFill/>
-                    </a:lnL>
-                    <a:lnR w="0" cap="flat" cmpd="sng" algn="ctr">
-                      <a:noFill/>
-                    </a:lnR>
-                    <a:lnT w="0" cap="flat" cmpd="sng" algn="ctr">
-                      <a:noFill/>
-                    </a:lnT>
-                    <a:lnB w="7620" cap="flat" cmpd="sng" algn="ctr">
-                      <a:solidFill>
-                        <a:srgbClr val="E3E7EC"/>
-                      </a:solidFill>
-                      <a:prstDash val="solid"/>
-                      <a:round/>
-                      <a:headEnd type="none" w="med" len="med"/>
-                      <a:tailEnd type="none" w="med" len="med"/>
-                    </a:lnB>
-                    <a:solidFill>
-                      <a:srgbClr val="F5F7FA"/>
-                    </a:solidFill>
-                  </a:tcPr>
-                </a:tc>
-                <a:tc>
-                  <a:txBody>
-                    <a:bodyPr/>
-                    <a:lstStyle/>
-                    <a:p>
-                      <a:pPr algn="ctr" indent="0" marL="0">
-                        <a:lnSpc>
-                          <a:spcPts val="911"/>
-                        </a:lnSpc>
-                        <a:buNone/>
-                      </a:pPr>
-                      <a:r>
-                        <a:rPr lang="en-US" sz="670" dirty="0">
-                          <a:solidFill>
-                            <a:srgbClr val="4A5565"/>
-                          </a:solidFill>
-                          <a:latin typeface="Poppins" pitchFamily="34" charset="0"/>
-                          <a:ea typeface="Poppins" pitchFamily="34" charset="-122"/>
-                          <a:cs typeface="Poppins" pitchFamily="34" charset="-120"/>
-                        </a:rPr>
-                        <a:t>–</a:t>
-                      </a:r>
-                      <a:endParaRPr lang="en-US" sz="670" dirty="0">
-                        <a:latin typeface="Poppins" charset="0"/>
-                        <a:ea typeface="Poppins" charset="0"/>
-                        <a:cs typeface="Poppins" charset="0"/>
-                      </a:endParaRPr>
-                    </a:p>
-                  </a:txBody>
-                  <a:tcPr marL="50400" marR="50400" marT="50400" marB="50400" anchor="t">
-                    <a:lnL w="0" cap="flat" cmpd="sng" algn="ctr">
-                      <a:noFill/>
-                    </a:lnL>
-                    <a:lnR w="0" cap="flat" cmpd="sng" algn="ctr">
-                      <a:noFill/>
-                    </a:lnR>
-                    <a:lnT w="0" cap="flat" cmpd="sng" algn="ctr">
-                      <a:noFill/>
-                    </a:lnT>
-                    <a:lnB w="7620" cap="flat" cmpd="sng" algn="ctr">
-                      <a:solidFill>
-                        <a:srgbClr val="E3E7EC"/>
-                      </a:solidFill>
-                      <a:prstDash val="solid"/>
-                      <a:round/>
-                      <a:headEnd type="none" w="med" len="med"/>
-                      <a:tailEnd type="none" w="med" len="med"/>
-                    </a:lnB>
-                    <a:solidFill>
-                      <a:srgbClr val="F5F7FA"/>
-                    </a:solidFill>
-                  </a:tcPr>
-                </a:tc>
-                <a:tc>
-                  <a:txBody>
-                    <a:bodyPr/>
-                    <a:lstStyle/>
-                    <a:p>
-                      <a:pPr algn="ctr" indent="0" marL="0">
-                        <a:lnSpc>
-                          <a:spcPts val="911"/>
-                        </a:lnSpc>
-                        <a:buNone/>
-                      </a:pPr>
-                      <a:r>
-                        <a:rPr lang="en-US" sz="670" dirty="0">
-                          <a:solidFill>
-                            <a:srgbClr val="4A5565"/>
-                          </a:solidFill>
-                          <a:latin typeface="Poppins" pitchFamily="34" charset="0"/>
-                          <a:ea typeface="Poppins" pitchFamily="34" charset="-122"/>
-                          <a:cs typeface="Poppins" pitchFamily="34" charset="-120"/>
-                        </a:rPr>
-                        <a:t>–</a:t>
-                      </a:r>
-                      <a:endParaRPr lang="en-US" sz="670" dirty="0">
-                        <a:latin typeface="Poppins" charset="0"/>
-                        <a:ea typeface="Poppins" charset="0"/>
-                        <a:cs typeface="Poppins" charset="0"/>
-                      </a:endParaRPr>
-                    </a:p>
-                  </a:txBody>
-                  <a:tcPr marL="50400" marR="50400" marT="50400" marB="50400" anchor="t">
-                    <a:lnL w="0" cap="flat" cmpd="sng" algn="ctr">
-                      <a:noFill/>
-                    </a:lnL>
-                    <a:lnR w="0" cap="flat" cmpd="sng" algn="ctr">
-                      <a:noFill/>
-                    </a:lnR>
-                    <a:lnT w="0" cap="flat" cmpd="sng" algn="ctr">
-                      <a:noFill/>
-                    </a:lnT>
-                    <a:lnB w="7620" cap="flat" cmpd="sng" algn="ctr">
-                      <a:solidFill>
-                        <a:srgbClr val="E3E7EC"/>
-                      </a:solidFill>
-                      <a:prstDash val="solid"/>
-                      <a:round/>
-                      <a:headEnd type="none" w="med" len="med"/>
-                      <a:tailEnd type="none" w="med" len="med"/>
-                    </a:lnB>
-                    <a:solidFill>
-                      <a:srgbClr val="F5F7FA"/>
-                    </a:solidFill>
-                  </a:tcPr>
-                </a:tc>
-                <a:tc>
-                  <a:txBody>
-                    <a:bodyPr/>
-                    <a:lstStyle/>
-                    <a:p>
-                      <a:pPr algn="ctr" indent="0" marL="0">
-                        <a:lnSpc>
-                          <a:spcPts val="911"/>
-                        </a:lnSpc>
-                        <a:buNone/>
-                      </a:pPr>
-                      <a:r>
-                        <a:rPr lang="en-US" sz="670" b="1" dirty="0">
-                          <a:solidFill>
-                            <a:srgbClr val="0E171F"/>
-                          </a:solidFill>
-                          <a:latin typeface="Poppins" pitchFamily="34" charset="0"/>
-                          <a:ea typeface="Poppins" pitchFamily="34" charset="-122"/>
-                          <a:cs typeface="Poppins" pitchFamily="34" charset="-120"/>
-                        </a:rPr>
-                        <a:t>R</a:t>
-                      </a:r>
-                      <a:endParaRPr lang="en-US" sz="670" dirty="0">
-                        <a:latin typeface="Poppins" charset="0"/>
-                        <a:ea typeface="Poppins" charset="0"/>
-                        <a:cs typeface="Poppins" charset="0"/>
-                      </a:endParaRPr>
-                    </a:p>
-                  </a:txBody>
-                  <a:tcPr marL="50400" marR="50400" marT="50400" marB="50400" anchor="t">
-                    <a:lnL w="0" cap="flat" cmpd="sng" algn="ctr">
-                      <a:noFill/>
-                    </a:lnL>
-                    <a:lnR w="0" cap="flat" cmpd="sng" algn="ctr">
-                      <a:noFill/>
-                    </a:lnR>
-                    <a:lnT w="0" cap="flat" cmpd="sng" algn="ctr">
-                      <a:noFill/>
-                    </a:lnT>
-                    <a:lnB w="7620" cap="flat" cmpd="sng" algn="ctr">
-                      <a:solidFill>
-                        <a:srgbClr val="E3E7EC"/>
-                      </a:solidFill>
-                      <a:prstDash val="solid"/>
-                      <a:round/>
-                      <a:headEnd type="none" w="med" len="med"/>
-                      <a:tailEnd type="none" w="med" len="med"/>
-                    </a:lnB>
-                    <a:solidFill>
-                      <a:srgbClr val="F5F7FA"/>
-                    </a:solidFill>
-                  </a:tcPr>
-                </a:tc>
-                <a:tc>
-                  <a:txBody>
-                    <a:bodyPr/>
-                    <a:lstStyle/>
-                    <a:p>
-                      <a:pPr algn="ctr" indent="0" marL="0">
-                        <a:lnSpc>
-                          <a:spcPts val="911"/>
-                        </a:lnSpc>
-                        <a:buNone/>
-                      </a:pPr>
-                      <a:r>
-                        <a:rPr lang="en-US" sz="670" dirty="0">
-                          <a:solidFill>
-                            <a:srgbClr val="4A5565"/>
-                          </a:solidFill>
-                          <a:latin typeface="Poppins" pitchFamily="34" charset="0"/>
-                          <a:ea typeface="Poppins" pitchFamily="34" charset="-122"/>
-                          <a:cs typeface="Poppins" pitchFamily="34" charset="-120"/>
-                        </a:rPr>
-                        <a:t>–</a:t>
-                      </a:r>
-                      <a:endParaRPr lang="en-US" sz="670" dirty="0">
-                        <a:latin typeface="Poppins" charset="0"/>
-                        <a:ea typeface="Poppins" charset="0"/>
-                        <a:cs typeface="Poppins" charset="0"/>
-                      </a:endParaRPr>
-                    </a:p>
-                  </a:txBody>
-                  <a:tcPr marL="50400" marR="50400" marT="50400" marB="50400" anchor="t">
-                    <a:lnL w="0" cap="flat" cmpd="sng" algn="ctr">
-                      <a:noFill/>
-                    </a:lnL>
-                    <a:lnR w="0" cap="flat" cmpd="sng" algn="ctr">
-                      <a:noFill/>
-                    </a:lnR>
-                    <a:lnT w="0" cap="flat" cmpd="sng" algn="ctr">
-                      <a:noFill/>
-                    </a:lnT>
-                    <a:lnB w="7620" cap="flat" cmpd="sng" algn="ctr">
-                      <a:solidFill>
-                        <a:srgbClr val="E3E7EC"/>
-                      </a:solidFill>
-                      <a:prstDash val="solid"/>
-                      <a:round/>
-                      <a:headEnd type="none" w="med" len="med"/>
-                      <a:tailEnd type="none" w="med" len="med"/>
-                    </a:lnB>
-                    <a:solidFill>
-                      <a:srgbClr val="F5F7FA"/>
-                    </a:solidFill>
-                  </a:tcPr>
-                </a:tc>
-                <a:tc>
-                  <a:txBody>
-                    <a:bodyPr/>
-                    <a:lstStyle/>
-                    <a:p>
-                      <a:pPr algn="ctr" indent="0" marL="0">
-                        <a:lnSpc>
-                          <a:spcPts val="911"/>
-                        </a:lnSpc>
-                        <a:buNone/>
-                      </a:pPr>
-                      <a:r>
-                        <a:rPr lang="en-US" sz="670" dirty="0">
-                          <a:solidFill>
-                            <a:srgbClr val="4A5565"/>
-                          </a:solidFill>
-                          <a:latin typeface="Poppins" pitchFamily="34" charset="0"/>
-                          <a:ea typeface="Poppins" pitchFamily="34" charset="-122"/>
-                          <a:cs typeface="Poppins" pitchFamily="34" charset="-120"/>
-                        </a:rPr>
-                        <a:t>C</a:t>
-                      </a:r>
-                      <a:endParaRPr lang="en-US" sz="670" dirty="0">
-                        <a:latin typeface="Poppins" charset="0"/>
-                        <a:ea typeface="Poppins" charset="0"/>
-                        <a:cs typeface="Poppins" charset="0"/>
-                      </a:endParaRPr>
-                    </a:p>
-                  </a:txBody>
-                  <a:tcPr marL="50400" marR="50400" marT="50400" marB="50400" anchor="t">
-                    <a:lnL w="0" cap="flat" cmpd="sng" algn="ctr">
-                      <a:noFill/>
-                    </a:lnL>
-                    <a:lnR w="0" cap="flat" cmpd="sng" algn="ctr">
-                      <a:noFill/>
-                    </a:lnR>
-                    <a:lnT w="0" cap="flat" cmpd="sng" algn="ctr">
-                      <a:noFill/>
-                    </a:lnT>
-                    <a:lnB w="7620" cap="flat" cmpd="sng" algn="ctr">
-                      <a:solidFill>
-                        <a:srgbClr val="E3E7EC"/>
-                      </a:solidFill>
-                      <a:prstDash val="solid"/>
-                      <a:round/>
-                      <a:headEnd type="none" w="med" len="med"/>
-                      <a:tailEnd type="none" w="med" len="med"/>
-                    </a:lnB>
-                    <a:solidFill>
-                      <a:srgbClr val="F5F7FA"/>
-                    </a:solidFill>
-                  </a:tcPr>
-                </a:tc>
-              </a:tr>
-              <a:tr h="293149">
-                <a:tc>
-                  <a:txBody>
-                    <a:bodyPr/>
-                    <a:lstStyle/>
-                    <a:p>
-                      <a:pPr algn="l" indent="0" marL="0">
-                        <a:lnSpc>
-                          <a:spcPts val="911"/>
-                        </a:lnSpc>
-                        <a:buNone/>
-                      </a:pPr>
-                      <a:r>
-                        <a:rPr lang="en-US" sz="670" dirty="0">
-                          <a:solidFill>
-                            <a:srgbClr val="4A5565"/>
-                          </a:solidFill>
-                          <a:latin typeface="Poppins" pitchFamily="34" charset="0"/>
-                          <a:ea typeface="Poppins" pitchFamily="34" charset="-122"/>
-                          <a:cs typeface="Poppins" pitchFamily="34" charset="-120"/>
-                        </a:rPr>
-                        <a:t>Brand, range, proof</a:t>
-                      </a:r>
-                      <a:endParaRPr lang="en-US" sz="670" dirty="0">
-                        <a:latin typeface="Poppins" charset="0"/>
-                        <a:ea typeface="Poppins" charset="0"/>
-                        <a:cs typeface="Poppins" charset="0"/>
-                      </a:endParaRPr>
-                    </a:p>
-                  </a:txBody>
-                  <a:tcPr marL="50400" marR="50400" marT="50400" marB="50400" anchor="t">
-                    <a:lnL w="0" cap="flat" cmpd="sng" algn="ctr">
-                      <a:noFill/>
-                    </a:lnL>
-                    <a:lnR w="0" cap="flat" cmpd="sng" algn="ctr">
-                      <a:noFill/>
-                    </a:lnR>
-                    <a:lnT w="0" cap="flat" cmpd="sng" algn="ctr">
-                      <a:noFill/>
-                    </a:lnT>
-                    <a:lnB w="7620" cap="flat" cmpd="sng" algn="ctr">
-                      <a:solidFill>
-                        <a:srgbClr val="E3E7EC"/>
-                      </a:solidFill>
-                      <a:prstDash val="solid"/>
-                      <a:round/>
-                      <a:headEnd type="none" w="med" len="med"/>
-                      <a:tailEnd type="none" w="med" len="med"/>
-                    </a:lnB>
-                    <a:solidFill>
-                      <a:srgbClr val="FFFFFF"/>
-                    </a:solidFill>
-                  </a:tcPr>
-                </a:tc>
-                <a:tc>
-                  <a:txBody>
-                    <a:bodyPr/>
-                    <a:lstStyle/>
-                    <a:p>
-                      <a:pPr algn="ctr" indent="0" marL="0">
-                        <a:lnSpc>
-                          <a:spcPts val="911"/>
-                        </a:lnSpc>
-                        <a:buNone/>
-                      </a:pPr>
-                      <a:r>
-                        <a:rPr lang="en-US" sz="670" b="1" dirty="0">
-                          <a:solidFill>
-                            <a:srgbClr val="0E171F"/>
-                          </a:solidFill>
-                          <a:latin typeface="Poppins" pitchFamily="34" charset="0"/>
-                          <a:ea typeface="Poppins" pitchFamily="34" charset="-122"/>
-                          <a:cs typeface="Poppins" pitchFamily="34" charset="-120"/>
-                        </a:rPr>
-                        <a:t>A</a:t>
-                      </a:r>
-                      <a:endParaRPr lang="en-US" sz="670" dirty="0">
-                        <a:latin typeface="Poppins" charset="0"/>
-                        <a:ea typeface="Poppins" charset="0"/>
-                        <a:cs typeface="Poppins" charset="0"/>
-                      </a:endParaRPr>
-                    </a:p>
-                  </a:txBody>
-                  <a:tcPr marL="50400" marR="50400" marT="50400" marB="50400" anchor="t">
-                    <a:lnL w="0" cap="flat" cmpd="sng" algn="ctr">
-                      <a:noFill/>
-                    </a:lnL>
-                    <a:lnR w="0" cap="flat" cmpd="sng" algn="ctr">
-                      <a:noFill/>
-                    </a:lnR>
-                    <a:lnT w="0" cap="flat" cmpd="sng" algn="ctr">
-                      <a:noFill/>
-                    </a:lnT>
-                    <a:lnB w="7620" cap="flat" cmpd="sng" algn="ctr">
-                      <a:solidFill>
-                        <a:srgbClr val="E3E7EC"/>
-                      </a:solidFill>
-                      <a:prstDash val="solid"/>
-                      <a:round/>
-                      <a:headEnd type="none" w="med" len="med"/>
-                      <a:tailEnd type="none" w="med" len="med"/>
-                    </a:lnB>
-                    <a:solidFill>
-                      <a:srgbClr val="FFFFFF"/>
-                    </a:solidFill>
-                  </a:tcPr>
-                </a:tc>
-                <a:tc>
-                  <a:txBody>
-                    <a:bodyPr/>
-                    <a:lstStyle/>
-                    <a:p>
-                      <a:pPr algn="ctr" indent="0" marL="0">
-                        <a:lnSpc>
-                          <a:spcPts val="911"/>
-                        </a:lnSpc>
-                        <a:buNone/>
-                      </a:pPr>
-                      <a:r>
-                        <a:rPr lang="en-US" sz="670" dirty="0">
-                          <a:solidFill>
-                            <a:srgbClr val="4A5565"/>
-                          </a:solidFill>
-                          <a:latin typeface="Poppins" pitchFamily="34" charset="0"/>
-                          <a:ea typeface="Poppins" pitchFamily="34" charset="-122"/>
-                          <a:cs typeface="Poppins" pitchFamily="34" charset="-120"/>
-                        </a:rPr>
-                        <a:t>R</a:t>
-                      </a:r>
-                      <a:endParaRPr lang="en-US" sz="670" dirty="0">
-                        <a:latin typeface="Poppins" charset="0"/>
-                        <a:ea typeface="Poppins" charset="0"/>
-                        <a:cs typeface="Poppins" charset="0"/>
-                      </a:endParaRPr>
-                    </a:p>
-                  </a:txBody>
-                  <a:tcPr marL="50400" marR="50400" marT="50400" marB="50400" anchor="t">
-                    <a:lnL w="0" cap="flat" cmpd="sng" algn="ctr">
-                      <a:noFill/>
-                    </a:lnL>
-                    <a:lnR w="0" cap="flat" cmpd="sng" algn="ctr">
-                      <a:noFill/>
-                    </a:lnR>
-                    <a:lnT w="0" cap="flat" cmpd="sng" algn="ctr">
-                      <a:noFill/>
-                    </a:lnT>
-                    <a:lnB w="7620" cap="flat" cmpd="sng" algn="ctr">
-                      <a:solidFill>
-                        <a:srgbClr val="E3E7EC"/>
-                      </a:solidFill>
-                      <a:prstDash val="solid"/>
-                      <a:round/>
-                      <a:headEnd type="none" w="med" len="med"/>
-                      <a:tailEnd type="none" w="med" len="med"/>
-                    </a:lnB>
-                    <a:solidFill>
-                      <a:srgbClr val="FFFFFF"/>
-                    </a:solidFill>
-                  </a:tcPr>
-                </a:tc>
-                <a:tc>
-                  <a:txBody>
-                    <a:bodyPr/>
-                    <a:lstStyle/>
-                    <a:p>
-                      <a:pPr algn="ctr" indent="0" marL="0">
-                        <a:lnSpc>
-                          <a:spcPts val="911"/>
-                        </a:lnSpc>
-                        <a:buNone/>
-                      </a:pPr>
-                      <a:r>
-                        <a:rPr lang="en-US" sz="670" dirty="0">
-                          <a:solidFill>
-                            <a:srgbClr val="4A5565"/>
-                          </a:solidFill>
-                          <a:latin typeface="Poppins" pitchFamily="34" charset="0"/>
-                          <a:ea typeface="Poppins" pitchFamily="34" charset="-122"/>
-                          <a:cs typeface="Poppins" pitchFamily="34" charset="-120"/>
-                        </a:rPr>
-                        <a:t>R</a:t>
                       </a:r>
                       <a:endParaRPr lang="en-US" sz="670" dirty="0">
                         <a:latin typeface="Poppins" charset="0"/>
@@ -23664,9 +25115,9 @@
                         <a:buNone/>
                       </a:pPr>
                       <a:r>
-                        <a:rPr lang="en-US" sz="670" dirty="0">
+                        <a:rPr lang="en-US" sz="670" b="1" dirty="0">
                           <a:solidFill>
-                            <a:srgbClr val="4A5565"/>
+                            <a:srgbClr val="0E171F"/>
                           </a:solidFill>
                           <a:latin typeface="Poppins" pitchFamily="34" charset="0"/>
                           <a:ea typeface="Poppins" pitchFamily="34" charset="-122"/>
@@ -23770,15 +25221,15 @@
                         <a:buNone/>
                       </a:pPr>
                       <a:r>
-                        <a:rPr lang="en-US" sz="670" dirty="0">
+                        <a:rPr lang="en-US" sz="670" b="1" dirty="0">
                           <a:solidFill>
-                            <a:srgbClr val="4A5565"/>
+                            <a:srgbClr val="0E171F"/>
                           </a:solidFill>
                           <a:latin typeface="Poppins" pitchFamily="34" charset="0"/>
                           <a:ea typeface="Poppins" pitchFamily="34" charset="-122"/>
                           <a:cs typeface="Poppins" pitchFamily="34" charset="-120"/>
                         </a:rPr>
-                        <a:t>C</a:t>
+                        <a:t>R</a:t>
                       </a:r>
                       <a:endParaRPr lang="en-US" sz="670" dirty="0">
                         <a:latin typeface="Poppins" charset="0"/>
@@ -23977,7 +25428,7 @@
       </p:graphicFrame>
       <p:sp>
         <p:nvSpPr>
-          <p:cNvPr id="85" name="Shape 79"/>
+          <p:cNvPr id="87" name="Shape 81"/>
           <p:cNvSpPr/>
           <p:nvPr/>
         </p:nvSpPr>
@@ -24000,7 +25451,7 @@
       </p:sp>
       <p:sp>
         <p:nvSpPr>
-          <p:cNvPr id="86" name="Text 80"/>
+          <p:cNvPr id="88" name="Text 82"/>
           <p:cNvSpPr txBox="1"/>
           <p:nvPr/>
         </p:nvSpPr>
@@ -24034,7 +25485,7 @@
                 <a:ea typeface="Poppins" pitchFamily="34" charset="-122"/>
                 <a:cs typeface="Poppins" pitchFamily="34" charset="-120"/>
               </a:rPr>
-              <a:t>Draft for the next conversation. Wholesale has no R on purpose: that is the hire. Harry carries activation, as agreed in the catch-up.</a:t>
+              <a:t>Draft for the next conversation. Wholesale has no R on purpose, that is the hire; brewer vs wholesale plus bar is Justin's call. Chris is trapped in production, and this matrix has to free him, not load him.</a:t>
             </a:r>
             <a:endParaRPr lang="en-US" sz="700" dirty="0"/>
           </a:p>
@@ -24042,7 +25493,7 @@
       </p:sp>
       <p:sp>
         <p:nvSpPr>
-          <p:cNvPr id="87" name="Shape 81"/>
+          <p:cNvPr id="89" name="Shape 83"/>
           <p:cNvSpPr/>
           <p:nvPr/>
         </p:nvSpPr>
@@ -24067,7 +25518,7 @@
       </p:sp>
       <p:sp>
         <p:nvSpPr>
-          <p:cNvPr id="88" name="Text 82"/>
+          <p:cNvPr id="90" name="Text 84"/>
           <p:cNvSpPr txBox="1"/>
           <p:nvPr/>
         </p:nvSpPr>
@@ -24109,7 +25560,7 @@
       </p:sp>
       <p:sp>
         <p:nvSpPr>
-          <p:cNvPr id="89" name="Shape 83"/>
+          <p:cNvPr id="91" name="Shape 85"/>
           <p:cNvSpPr/>
           <p:nvPr/>
         </p:nvSpPr>
@@ -24134,7 +25585,7 @@
       </p:sp>
       <p:sp>
         <p:nvSpPr>
-          <p:cNvPr id="90" name="Text 84"/>
+          <p:cNvPr id="92" name="Text 86"/>
           <p:cNvSpPr txBox="1"/>
           <p:nvPr/>
         </p:nvSpPr>
@@ -24185,7 +25636,7 @@
                 <a:ea typeface="Poppins" pitchFamily="34" charset="-122"/>
                 <a:cs typeface="Poppins" pitchFamily="34" charset="-120"/>
               </a:rPr>
-              <a:t>Justin's commitments back.</a:t>
+              <a:t>Justin's commitments back. Still stands.</a:t>
             </a:r>
             <a:endParaRPr lang="en-US" sz="730" dirty="0"/>
           </a:p>
@@ -24193,13 +25644,13 @@
       </p:sp>
       <p:sp>
         <p:nvSpPr>
-          <p:cNvPr id="91" name="Shape 85"/>
+          <p:cNvPr id="93" name="Shape 87"/>
           <p:cNvSpPr/>
           <p:nvPr/>
         </p:nvSpPr>
         <p:spPr>
           <a:xfrm>
-            <a:off x="10158970" y="8376136"/>
+            <a:off x="10158970" y="8266231"/>
             <a:ext cx="50400" cy="50400"/>
           </a:xfrm>
           <a:prstGeom prst="rect">
@@ -24218,13 +25669,13 @@
       </p:sp>
       <p:sp>
         <p:nvSpPr>
-          <p:cNvPr id="92" name="Text 86"/>
+          <p:cNvPr id="94" name="Text 88"/>
           <p:cNvSpPr txBox="1"/>
           <p:nvPr/>
         </p:nvSpPr>
         <p:spPr>
           <a:xfrm>
-            <a:off x="10266970" y="8340096"/>
+            <a:off x="10266970" y="8230191"/>
             <a:ext cx="4413737" cy="129794"/>
           </a:xfrm>
           <a:prstGeom prst="rect">
@@ -24269,7 +25720,7 @@
                 <a:ea typeface="Poppins" pitchFamily="34" charset="-122"/>
                 <a:cs typeface="Poppins" pitchFamily="34" charset="-120"/>
               </a:rPr>
-              <a:t>Clent and Christy regroup, plan confirmed, owners named.</a:t>
+              <a:t>Clent and Christy regroup, plan confirmed, owners named. Still stands.</a:t>
             </a:r>
             <a:endParaRPr lang="en-US" sz="730" dirty="0"/>
           </a:p>
@@ -24277,13 +25728,13 @@
       </p:sp>
       <p:sp>
         <p:nvSpPr>
-          <p:cNvPr id="93" name="Shape 87"/>
+          <p:cNvPr id="95" name="Shape 89"/>
           <p:cNvSpPr/>
           <p:nvPr/>
         </p:nvSpPr>
         <p:spPr>
           <a:xfrm>
-            <a:off x="10158970" y="8925660"/>
+            <a:off x="10158970" y="8705851"/>
             <a:ext cx="50400" cy="50400"/>
           </a:xfrm>
           <a:prstGeom prst="rect">
@@ -24302,13 +25753,13 @@
       </p:sp>
       <p:sp>
         <p:nvSpPr>
-          <p:cNvPr id="94" name="Text 88"/>
+          <p:cNvPr id="96" name="Text 90"/>
           <p:cNvSpPr txBox="1"/>
           <p:nvPr/>
         </p:nvSpPr>
         <p:spPr>
           <a:xfrm>
-            <a:off x="10266970" y="8889621"/>
+            <a:off x="10266970" y="8669811"/>
             <a:ext cx="4413737" cy="129794"/>
           </a:xfrm>
           <a:prstGeom prst="rect">
@@ -24336,7 +25787,7 @@
                 <a:ea typeface="Poppins" pitchFamily="34" charset="-122"/>
                 <a:cs typeface="Poppins" pitchFamily="34" charset="-120"/>
               </a:rPr>
-              <a:t>Fri 17 Oct. </a:t>
+              <a:t>Mid-October. </a:t>
             </a:r>
             <a:pPr indent="0" marL="0">
               <a:lnSpc>
@@ -24353,7 +25804,7 @@
                 <a:ea typeface="Poppins" pitchFamily="34" charset="-122"/>
                 <a:cs typeface="Poppins" pitchFamily="34" charset="-120"/>
               </a:rPr>
-              <a:t>Sprint 1 review. Is the data connected and are reminders live?</a:t>
+              <a:t>30-day list closed, including meeting rhythm and agenda. Oktoberfest run.</a:t>
             </a:r>
             <a:endParaRPr lang="en-US" sz="730" dirty="0"/>
           </a:p>
@@ -24361,13 +25812,13 @@
       </p:sp>
       <p:sp>
         <p:nvSpPr>
-          <p:cNvPr id="95" name="Shape 89"/>
+          <p:cNvPr id="97" name="Shape 91"/>
           <p:cNvSpPr/>
           <p:nvPr/>
         </p:nvSpPr>
         <p:spPr>
           <a:xfrm>
-            <a:off x="10158970" y="9475185"/>
+            <a:off x="10158970" y="9145470"/>
             <a:ext cx="50400" cy="50400"/>
           </a:xfrm>
           <a:prstGeom prst="rect">
@@ -24386,13 +25837,13 @@
       </p:sp>
       <p:sp>
         <p:nvSpPr>
-          <p:cNvPr id="96" name="Text 90"/>
+          <p:cNvPr id="98" name="Text 92"/>
           <p:cNvSpPr txBox="1"/>
           <p:nvPr/>
         </p:nvSpPr>
         <p:spPr>
           <a:xfrm>
-            <a:off x="10266970" y="9439146"/>
+            <a:off x="10266970" y="9109431"/>
             <a:ext cx="4413737" cy="129794"/>
           </a:xfrm>
           <a:prstGeom prst="rect">
@@ -24420,7 +25871,7 @@
                 <a:ea typeface="Poppins" pitchFamily="34" charset="-122"/>
                 <a:cs typeface="Poppins" pitchFamily="34" charset="-120"/>
               </a:rPr>
-              <a:t>Fri 14 Nov. </a:t>
+              <a:t>Mid-December. </a:t>
             </a:r>
             <a:pPr indent="0" marL="0">
               <a:lnSpc>
@@ -24437,7 +25888,7 @@
                 <a:ea typeface="Poppins" pitchFamily="34" charset="-122"/>
                 <a:cs typeface="Poppins" pitchFamily="34" charset="-120"/>
               </a:rPr>
-              <a:t>Sprint 2 review. Wholesale pipeline and membership attach rate.</a:t>
+              <a:t>Three-month list closed. Tech live, lease-to-buy launched.</a:t>
             </a:r>
             <a:endParaRPr lang="en-US" sz="730" dirty="0"/>
           </a:p>
@@ -24445,13 +25896,13 @@
       </p:sp>
       <p:sp>
         <p:nvSpPr>
-          <p:cNvPr id="97" name="Shape 91"/>
+          <p:cNvPr id="99" name="Shape 93"/>
           <p:cNvSpPr/>
           <p:nvPr/>
         </p:nvSpPr>
         <p:spPr>
           <a:xfrm>
-            <a:off x="10158970" y="10024710"/>
+            <a:off x="10158970" y="9585090"/>
             <a:ext cx="50400" cy="50400"/>
           </a:xfrm>
           <a:prstGeom prst="rect">
@@ -24470,7 +25921,91 @@
       </p:sp>
       <p:sp>
         <p:nvSpPr>
-          <p:cNvPr id="98" name="Text 92"/>
+          <p:cNvPr id="100" name="Text 94"/>
+          <p:cNvSpPr txBox="1"/>
+          <p:nvPr/>
+        </p:nvSpPr>
+        <p:spPr>
+          <a:xfrm>
+            <a:off x="10266970" y="9549051"/>
+            <a:ext cx="4413737" cy="129794"/>
+          </a:xfrm>
+          <a:prstGeom prst="rect">
+            <a:avLst/>
+          </a:prstGeom>
+          <a:noFill/>
+          <a:ln/>
+        </p:spPr>
+        <p:txBody>
+          <a:bodyPr wrap="square" lIns="0" tIns="0" rIns="0" bIns="0" rtlCol="0" anchor="t"/>
+          <a:lstStyle/>
+          <a:p>
+            <a:pPr indent="0" marL="0">
+              <a:lnSpc>
+                <a:spcPts val="1022"/>
+              </a:lnSpc>
+              <a:buNone/>
+            </a:pPr>
+            <a:r>
+              <a:rPr lang="en-US" sz="730" b="1" dirty="0">
+                <a:solidFill>
+                  <a:srgbClr val="0E171F"/>
+                </a:solidFill>
+                <a:latin typeface="Poppins" pitchFamily="34" charset="0"/>
+                <a:ea typeface="Poppins" pitchFamily="34" charset="-122"/>
+                <a:cs typeface="Poppins" pitchFamily="34" charset="-120"/>
+              </a:rPr>
+              <a:t>March 2027. </a:t>
+            </a:r>
+            <a:pPr indent="0" marL="0">
+              <a:lnSpc>
+                <a:spcPts val="1022"/>
+              </a:lnSpc>
+              <a:buNone/>
+            </a:pPr>
+            <a:r>
+              <a:rPr lang="en-US" sz="730" dirty="0">
+                <a:solidFill>
+                  <a:srgbClr val="4A5565"/>
+                </a:solidFill>
+                <a:latin typeface="Poppins" pitchFamily="34" charset="0"/>
+                <a:ea typeface="Poppins" pitchFamily="34" charset="-122"/>
+                <a:cs typeface="Poppins" pitchFamily="34" charset="-120"/>
+              </a:rPr>
+              <a:t>250 active refillers.</a:t>
+            </a:r>
+            <a:endParaRPr lang="en-US" sz="730" dirty="0"/>
+          </a:p>
+        </p:txBody>
+      </p:sp>
+      <p:sp>
+        <p:nvSpPr>
+          <p:cNvPr id="101" name="Shape 95"/>
+          <p:cNvSpPr/>
+          <p:nvPr/>
+        </p:nvSpPr>
+        <p:spPr>
+          <a:xfrm>
+            <a:off x="10158970" y="10024710"/>
+            <a:ext cx="50400" cy="50400"/>
+          </a:xfrm>
+          <a:prstGeom prst="rect">
+            <a:avLst/>
+          </a:prstGeom>
+          <a:solidFill>
+            <a:srgbClr val="0066FF"/>
+          </a:solidFill>
+          <a:ln w="12700">
+            <a:solidFill>
+              <a:srgbClr val="333333"/>
+            </a:solidFill>
+            <a:prstDash val="solid"/>
+          </a:ln>
+        </p:spPr>
+      </p:sp>
+      <p:sp>
+        <p:nvSpPr>
+          <p:cNvPr id="102" name="Text 96"/>
           <p:cNvSpPr txBox="1"/>
           <p:nvPr/>
         </p:nvSpPr>
@@ -24504,7 +26039,7 @@
                 <a:ea typeface="Poppins" pitchFamily="34" charset="-122"/>
                 <a:cs typeface="Poppins" pitchFamily="34" charset="-120"/>
               </a:rPr>
-              <a:t>Fri 12 Dec. </a:t>
+              <a:t>September 2027. </a:t>
             </a:r>
             <a:pPr indent="0" marL="0">
               <a:lnSpc>
@@ -24521,7 +26056,7 @@
                 <a:ea typeface="Poppins" pitchFamily="34" charset="-122"/>
                 <a:cs typeface="Poppins" pitchFamily="34" charset="-120"/>
               </a:rPr>
-              <a:t>Ninety-day review against the 1,000 systems north star.</a:t>
+              <a:t>Cashflow positive, JM on a wage.</a:t>
             </a:r>
             <a:endParaRPr lang="en-US" sz="730" dirty="0"/>
           </a:p>
@@ -24529,7 +26064,7 @@
       </p:sp>
       <p:sp>
         <p:nvSpPr>
-          <p:cNvPr id="99" name="Shape 93"/>
+          <p:cNvPr id="103" name="Shape 97"/>
           <p:cNvSpPr/>
           <p:nvPr/>
         </p:nvSpPr>
@@ -24552,7 +26087,7 @@
       </p:sp>
       <p:sp>
         <p:nvSpPr>
-          <p:cNvPr id="100" name="Text 94"/>
+          <p:cNvPr id="104" name="Text 98"/>
           <p:cNvSpPr txBox="1"/>
           <p:nvPr/>
         </p:nvSpPr>
@@ -24586,7 +26121,7 @@
                 <a:ea typeface="Poppins" pitchFamily="34" charset="-122"/>
                 <a:cs typeface="Poppins" pitchFamily="34" charset="-120"/>
               </a:rPr>
-              <a:t>Every review asks one question first: did the number of systems in market move?</a:t>
+              <a:t>Every review asks first whether active refillers moved.</a:t>
             </a:r>
             <a:endParaRPr lang="en-US" sz="700" dirty="0"/>
           </a:p>

--- a/00 Admin/11 Final Outputs/plan-on-a-page/TapThat_Plan-on-a-Page_A3.pptx
+++ b/00 Admin/11 Final Outputs/plan-on-a-page/TapThat_Plan-on-a-Page_A3.pptx
@@ -4477,7 +4477,7 @@
                 <a:ea typeface="Poppins" pitchFamily="34" charset="-122"/>
                 <a:cs typeface="Poppins" pitchFamily="34" charset="-120"/>
               </a:rPr>
-              <a:t>Exit: sell the business, in Justin's own words, "the sucker".</a:t>
+              <a:t>Exit. Justin's own words: "sell the sucker".</a:t>
             </a:r>
             <a:endParaRPr lang="en-US" sz="810" dirty="0"/>
           </a:p>
@@ -6008,7 +6008,7 @@
                 <a:ea typeface="Poppins" pitchFamily="34" charset="-122"/>
                 <a:cs typeface="Poppins" pitchFamily="34" charset="-120"/>
               </a:rPr>
-              <a:t>JP's recommendation is to pause walk-in trade; Justin has not accepted that.</a:t>
+              <a:t>JP recommended pausing walk-in trade; Justin's own priorities keep the room trading.</a:t>
             </a:r>
             <a:endParaRPr lang="en-US" sz="730" dirty="0"/>
           </a:p>
@@ -7093,7 +7093,7 @@
                 <a:ea typeface="Poppins" pitchFamily="34" charset="-122"/>
                 <a:cs typeface="Poppins" pitchFamily="34" charset="-120"/>
               </a:rPr>
-              <a:t>a Taproom selling kegs, a Showroom selling beers, or an Event space doing both. JP's recommendation is the first or the third, with walk-in paused. Justin's own priority list keeps taproom trade alive, growing it from local business, functions and ticketed music.</a:t>
+              <a:t>a Taproom selling kegs, a Showroom selling beers, or an Event space doing both. JP's recommendation is the second or the third, with walk-in paused. Justin's own priority list keeps taproom trade alive, growing it from local business, functions and ticketed music.</a:t>
             </a:r>
             <a:endParaRPr lang="en-US" sz="810" dirty="0"/>
           </a:p>
@@ -8764,7 +8764,7 @@
         <p:spPr>
           <a:xfrm>
             <a:off x="438898" y="5293895"/>
-            <a:ext cx="4521737" cy="308610"/>
+            <a:ext cx="4521737" cy="462915"/>
           </a:xfrm>
           <a:prstGeom prst="rect">
             <a:avLst/>
@@ -8791,7 +8791,7 @@
                 <a:ea typeface="Poppins" pitchFamily="34" charset="-122"/>
                 <a:cs typeface="Poppins" pitchFamily="34" charset="-120"/>
               </a:rPr>
-              <a:t>The cheapest growth is still the 116 who already own a system and already refill here. Their objections are overcome. Nobody has to be sold on the idea of beer at home.</a:t>
+              <a:t>The cheapest growth is still the 116 in the database who bought their system elsewhere. Their objections are overcome. Nobody has to be sold on the idea of beer at home.</a:t>
             </a:r>
             <a:endParaRPr lang="en-US" sz="810" dirty="0"/>
           </a:p>
@@ -8805,7 +8805,7 @@
         </p:nvSpPr>
         <p:spPr>
           <a:xfrm>
-            <a:off x="438898" y="5768105"/>
+            <a:off x="438898" y="5922410"/>
             <a:ext cx="4521737" cy="462915"/>
           </a:xfrm>
           <a:prstGeom prst="rect">
@@ -15213,7 +15213,7 @@
                 <a:ea typeface="Poppins" pitchFamily="34" charset="-122"/>
                 <a:cs typeface="Poppins" pitchFamily="34" charset="-120"/>
               </a:rPr>
-              <a:t>This is the first unlock. Spending more on ads before it is fixed buys traffic the business cannot catch.</a:t>
+              <a:t>This is the first fix. Spending more on ads before it is fixed buys traffic the business cannot catch.</a:t>
             </a:r>
             <a:endParaRPr lang="en-US" sz="700" dirty="0"/>
           </a:p>
@@ -17075,7 +17075,7 @@
                 <a:ea typeface="Poppins" pitchFamily="34" charset="-122"/>
                 <a:cs typeface="Poppins" pitchFamily="34" charset="-120"/>
               </a:rPr>
-              <a:t>One account is worth about ten households. This is where the leverage is.</a:t>
+              <a:t>One account is worth about ten households. This is where the return is.</a:t>
             </a:r>
             <a:endParaRPr lang="en-US" sz="700" dirty="0"/>
           </a:p>
@@ -17879,7 +17879,7 @@
         <p:spPr>
           <a:xfrm>
             <a:off x="10158970" y="9118960"/>
-            <a:ext cx="4521737" cy="154305"/>
+            <a:ext cx="4521737" cy="308610"/>
           </a:xfrm>
           <a:prstGeom prst="rect">
             <a:avLst/>
@@ -17923,7 +17923,7 @@
                 <a:ea typeface="Poppins" pitchFamily="34" charset="-122"/>
                 <a:cs typeface="Poppins" pitchFamily="34" charset="-120"/>
               </a:rPr>
-              <a:t>Not a dashboard nobody opens.</a:t>
+              <a:t>Justin's three, plus the lapse rate, which is JP's addition. Not a dashboard nobody opens.</a:t>
             </a:r>
             <a:endParaRPr lang="en-US" sz="810" dirty="0"/>
           </a:p>
@@ -17937,7 +17937,7 @@
         </p:nvSpPr>
         <p:spPr>
           <a:xfrm>
-            <a:off x="10158970" y="9438865"/>
+            <a:off x="10158970" y="9593170"/>
             <a:ext cx="4521737" cy="308610"/>
           </a:xfrm>
           <a:prstGeom prst="rect">
@@ -17965,7 +17965,7 @@
                 <a:ea typeface="Poppins" pitchFamily="34" charset="-122"/>
                 <a:cs typeface="Poppins" pitchFamily="34" charset="-120"/>
               </a:rPr>
-              <a:t>Justin's KPI is active keg refillers, defined three ways today. </a:t>
+              <a:t>Active keg refillers needs one agreed definition. </a:t>
             </a:r>
             <a:pPr indent="0" marL="0">
               <a:lnSpc>
@@ -17982,7 +17982,7 @@
                 <a:ea typeface="Poppins" pitchFamily="34" charset="-122"/>
                 <a:cs typeface="Poppins" pitchFamily="34" charset="-120"/>
               </a:rPr>
-              <a:t>Define it once before the first report, or the number will be argued about instead of acted on.</a:t>
+              <a:t>Settle it before the first report, or the number will be argued about instead of acted on.</a:t>
             </a:r>
             <a:endParaRPr lang="en-US" sz="810" dirty="0"/>
           </a:p>

--- a/00 Admin/11 Final Outputs/plan-on-a-page/TapThat_Plan-on-a-Page_A3.pptx
+++ b/00 Admin/11 Final Outputs/plan-on-a-page/TapThat_Plan-on-a-Page_A3.pptx
@@ -11087,7 +11087,7 @@
         <p:spPr>
           <a:xfrm>
             <a:off x="323698" y="1115568"/>
-            <a:ext cx="5967146" cy="2637898"/>
+            <a:ext cx="7182155" cy="2813758"/>
           </a:xfrm>
           <a:prstGeom prst="rect">
             <a:avLst/>
@@ -11112,7 +11112,7 @@
         <p:spPr>
           <a:xfrm>
             <a:off x="323698" y="1115568"/>
-            <a:ext cx="5967146" cy="36000"/>
+            <a:ext cx="7182155" cy="36000"/>
           </a:xfrm>
           <a:prstGeom prst="rect">
             <a:avLst/>
@@ -11137,7 +11137,7 @@
         <p:spPr>
           <a:xfrm>
             <a:off x="438898" y="1230768"/>
-            <a:ext cx="5736746" cy="112268"/>
+            <a:ext cx="6951755" cy="112268"/>
           </a:xfrm>
           <a:prstGeom prst="rect">
             <a:avLst/>
@@ -11179,7 +11179,7 @@
         <p:spPr>
           <a:xfrm>
             <a:off x="438898" y="1400636"/>
-            <a:ext cx="5736746" cy="422046"/>
+            <a:ext cx="6951755" cy="211023"/>
           </a:xfrm>
           <a:prstGeom prst="rect">
             <a:avLst/>
@@ -11220,8 +11220,8 @@
         </p:nvSpPr>
         <p:spPr>
           <a:xfrm>
-            <a:off x="438898" y="1928317"/>
-            <a:ext cx="5736746" cy="462915"/>
+            <a:off x="438898" y="1707611"/>
+            <a:ext cx="6951755" cy="462915"/>
           </a:xfrm>
           <a:prstGeom prst="rect">
             <a:avLst/>
@@ -11279,8 +11279,8 @@
         </p:nvSpPr>
         <p:spPr>
           <a:xfrm>
-            <a:off x="438898" y="2496867"/>
-            <a:ext cx="5736746" cy="308610"/>
+            <a:off x="438898" y="2266478"/>
+            <a:ext cx="6951755" cy="308610"/>
           </a:xfrm>
           <a:prstGeom prst="rect">
             <a:avLst/>
@@ -11321,8 +11321,8 @@
         </p:nvSpPr>
         <p:spPr>
           <a:xfrm>
-            <a:off x="438898" y="2911112"/>
-            <a:ext cx="5736746" cy="308610"/>
+            <a:off x="438898" y="2671040"/>
+            <a:ext cx="6951755" cy="154305"/>
           </a:xfrm>
           <a:prstGeom prst="rect">
             <a:avLst/>
@@ -11374,14 +11374,73 @@
       </p:sp>
       <p:sp>
         <p:nvSpPr>
-          <p:cNvPr id="19" name="Shape 15"/>
+          <p:cNvPr id="19" name="Text 15"/>
+          <p:cNvSpPr txBox="1"/>
+          <p:nvPr/>
+        </p:nvSpPr>
+        <p:spPr>
+          <a:xfrm>
+            <a:off x="438898" y="2921297"/>
+            <a:ext cx="6951755" cy="462915"/>
+          </a:xfrm>
+          <a:prstGeom prst="rect">
+            <a:avLst/>
+          </a:prstGeom>
+          <a:noFill/>
+          <a:ln/>
+        </p:spPr>
+        <p:txBody>
+          <a:bodyPr wrap="square" lIns="0" tIns="0" rIns="0" bIns="0" rtlCol="0" anchor="t"/>
+          <a:lstStyle/>
+          <a:p>
+            <a:pPr indent="0" marL="0">
+              <a:lnSpc>
+                <a:spcPts val="1215"/>
+              </a:lnSpc>
+              <a:buNone/>
+            </a:pPr>
+            <a:r>
+              <a:rPr lang="en-US" sz="810" b="1" dirty="0">
+                <a:solidFill>
+                  <a:srgbClr val="0E171F"/>
+                </a:solidFill>
+                <a:latin typeface="Poppins" pitchFamily="34" charset="0"/>
+                <a:ea typeface="Poppins" pitchFamily="34" charset="-122"/>
+                <a:cs typeface="Poppins" pitchFamily="34" charset="-120"/>
+              </a:rPr>
+              <a:t>Our recommendation: the category is home entertainment, not beer. </a:t>
+            </a:r>
+            <a:pPr indent="0" marL="0">
+              <a:lnSpc>
+                <a:spcPts val="1215"/>
+              </a:lnSpc>
+              <a:buNone/>
+            </a:pPr>
+            <a:r>
+              <a:rPr lang="en-US" sz="810" dirty="0">
+                <a:solidFill>
+                  <a:srgbClr val="4A5565"/>
+                </a:solidFill>
+                <a:latin typeface="Poppins" pitchFamily="34" charset="0"/>
+                <a:ea typeface="Poppins" pitchFamily="34" charset="-122"/>
+                <a:cs typeface="Poppins" pitchFamily="34" charset="-120"/>
+              </a:rPr>
+              <a:t>The line above is the ambition; the idea underneath it is that Tap That makes an ordinary catch-up the one people remember. That puts the comparison set with coffee machines and outdoor kitchens, upgrades people choose to display. It widens who will partner with you.</a:t>
+            </a:r>
+            <a:endParaRPr lang="en-US" sz="810" dirty="0"/>
+          </a:p>
+        </p:txBody>
+      </p:sp>
+      <p:sp>
+        <p:nvSpPr>
+          <p:cNvPr id="20" name="Shape 16"/>
           <p:cNvSpPr/>
           <p:nvPr/>
         </p:nvSpPr>
         <p:spPr>
           <a:xfrm>
-            <a:off x="438898" y="3460651"/>
-            <a:ext cx="5736746" cy="0"/>
+            <a:off x="438898" y="3636511"/>
+            <a:ext cx="6951755" cy="0"/>
           </a:xfrm>
           <a:prstGeom prst="line">
             <a:avLst/>
@@ -11397,14 +11456,14 @@
       </p:sp>
       <p:sp>
         <p:nvSpPr>
-          <p:cNvPr id="20" name="Text 16"/>
+          <p:cNvPr id="21" name="Text 17"/>
           <p:cNvSpPr txBox="1"/>
           <p:nvPr/>
         </p:nvSpPr>
         <p:spPr>
           <a:xfrm>
-            <a:off x="438898" y="3518251"/>
-            <a:ext cx="5736746" cy="120015"/>
+            <a:off x="438898" y="3694111"/>
+            <a:ext cx="6951755" cy="120015"/>
           </a:xfrm>
           <a:prstGeom prst="rect">
             <a:avLst/>
@@ -11439,14 +11498,14 @@
       </p:sp>
       <p:sp>
         <p:nvSpPr>
-          <p:cNvPr id="21" name="Shape 17"/>
+          <p:cNvPr id="22" name="Shape 18"/>
           <p:cNvSpPr/>
           <p:nvPr/>
         </p:nvSpPr>
         <p:spPr>
           <a:xfrm>
-            <a:off x="6398743" y="1115568"/>
-            <a:ext cx="8397164" cy="2637898"/>
+            <a:off x="7613752" y="1115568"/>
+            <a:ext cx="7182155" cy="2813758"/>
           </a:xfrm>
           <a:prstGeom prst="rect">
             <a:avLst/>
@@ -11464,56 +11523,14 @@
       </p:sp>
       <p:sp>
         <p:nvSpPr>
-          <p:cNvPr id="22" name="Text 18"/>
-          <p:cNvSpPr txBox="1"/>
-          <p:nvPr/>
-        </p:nvSpPr>
-        <p:spPr>
-          <a:xfrm>
-            <a:off x="6513943" y="1230768"/>
-            <a:ext cx="8166764" cy="112268"/>
-          </a:xfrm>
-          <a:prstGeom prst="rect">
-            <a:avLst/>
-          </a:prstGeom>
-          <a:noFill/>
-          <a:ln/>
-        </p:spPr>
-        <p:txBody>
-          <a:bodyPr wrap="square" lIns="0" tIns="0" rIns="0" bIns="0" rtlCol="0" anchor="t"/>
-          <a:lstStyle/>
-          <a:p>
-            <a:pPr indent="0" marL="0">
-              <a:lnSpc>
-                <a:spcPts val="884"/>
-              </a:lnSpc>
-              <a:buNone/>
-            </a:pPr>
-            <a:r>
-              <a:rPr lang="en-US" sz="680" b="1" spc="95" kern="0" dirty="0">
-                <a:solidFill>
-                  <a:srgbClr val="0066FF"/>
-                </a:solidFill>
-                <a:latin typeface="Poppins" pitchFamily="34" charset="0"/>
-                <a:ea typeface="Poppins" pitchFamily="34" charset="-122"/>
-                <a:cs typeface="Poppins" pitchFamily="34" charset="-120"/>
-              </a:rPr>
-              <a:t>WHO THE ENEMY IS</a:t>
-            </a:r>
-            <a:endParaRPr lang="en-US" sz="680" dirty="0"/>
-          </a:p>
-        </p:txBody>
-      </p:sp>
-      <p:sp>
-        <p:nvSpPr>
           <p:cNvPr id="23" name="Text 19"/>
           <p:cNvSpPr txBox="1"/>
           <p:nvPr/>
         </p:nvSpPr>
         <p:spPr>
           <a:xfrm>
-            <a:off x="6513943" y="1400636"/>
-            <a:ext cx="8166764" cy="322478"/>
+            <a:off x="7728952" y="1230768"/>
+            <a:ext cx="6951755" cy="112268"/>
           </a:xfrm>
           <a:prstGeom prst="rect">
             <a:avLst/>
@@ -11527,22 +11544,22 @@
           <a:p>
             <a:pPr indent="0" marL="0">
               <a:lnSpc>
-                <a:spcPts val="1270"/>
-              </a:lnSpc>
-              <a:buNone/>
-            </a:pPr>
-            <a:r>
-              <a:rPr lang="en-US" sz="920" b="1" dirty="0">
-                <a:solidFill>
-                  <a:srgbClr val="0E171F"/>
-                </a:solidFill>
-                <a:latin typeface="Poppins" pitchFamily="34" charset="0"/>
-                <a:ea typeface="Poppins" pitchFamily="34" charset="-122"/>
-                <a:cs typeface="Poppins" pitchFamily="34" charset="-120"/>
-              </a:rPr>
-              <a:t>Pubs at $12+ a schooner, bottleshops at $80+ a case, and home brew supply stores. Not the duopoly, not A&amp;A, not the keg delivery operators.</a:t>
-            </a:r>
-            <a:endParaRPr lang="en-US" sz="920" dirty="0"/>
+                <a:spcPts val="884"/>
+              </a:lnSpc>
+              <a:buNone/>
+            </a:pPr>
+            <a:r>
+              <a:rPr lang="en-US" sz="680" b="1" spc="95" kern="0" dirty="0">
+                <a:solidFill>
+                  <a:srgbClr val="0066FF"/>
+                </a:solidFill>
+                <a:latin typeface="Poppins" pitchFamily="34" charset="0"/>
+                <a:ea typeface="Poppins" pitchFamily="34" charset="-122"/>
+                <a:cs typeface="Poppins" pitchFamily="34" charset="-120"/>
+              </a:rPr>
+              <a:t>WHO THE ENEMY IS</a:t>
+            </a:r>
+            <a:endParaRPr lang="en-US" sz="680" dirty="0"/>
           </a:p>
         </p:txBody>
       </p:sp>
@@ -11554,8 +11571,8 @@
         </p:nvSpPr>
         <p:spPr>
           <a:xfrm>
-            <a:off x="6513943" y="1888714"/>
-            <a:ext cx="8166764" cy="308610"/>
+            <a:off x="7728952" y="1400636"/>
+            <a:ext cx="6951755" cy="322478"/>
           </a:xfrm>
           <a:prstGeom prst="rect">
             <a:avLst/>
@@ -11569,29 +11586,12 @@
           <a:p>
             <a:pPr indent="0" marL="0">
               <a:lnSpc>
-                <a:spcPts val="1215"/>
-              </a:lnSpc>
-              <a:buNone/>
-            </a:pPr>
-            <a:r>
-              <a:rPr lang="en-US" sz="810" dirty="0">
-                <a:solidFill>
-                  <a:srgbClr val="4A5565"/>
-                </a:solidFill>
-                <a:latin typeface="Poppins" pitchFamily="34" charset="0"/>
-                <a:ea typeface="Poppins" pitchFamily="34" charset="-122"/>
-                <a:cs typeface="Poppins" pitchFamily="34" charset="-120"/>
-              </a:rPr>
-              <a:t>Justin's own words: </a:t>
-            </a:r>
-            <a:pPr indent="0" marL="0">
-              <a:lnSpc>
-                <a:spcPts val="1215"/>
-              </a:lnSpc>
-              <a:buNone/>
-            </a:pPr>
-            <a:r>
-              <a:rPr lang="en-US" sz="810" b="1" dirty="0">
+                <a:spcPts val="1270"/>
+              </a:lnSpc>
+              <a:buNone/>
+            </a:pPr>
+            <a:r>
+              <a:rPr lang="en-US" sz="920" b="1" dirty="0">
                 <a:solidFill>
                   <a:srgbClr val="0E171F"/>
                 </a:solidFill>
@@ -11599,60 +11599,9 @@
                 <a:ea typeface="Poppins" pitchFamily="34" charset="-122"/>
                 <a:cs typeface="Poppins" pitchFamily="34" charset="-120"/>
               </a:rPr>
-              <a:t>the more people drinking craft beer and not XXXX, the better. </a:t>
-            </a:r>
-            <a:pPr indent="0" marL="0">
-              <a:lnSpc>
-                <a:spcPts val="1215"/>
-              </a:lnSpc>
-              <a:buNone/>
-            </a:pPr>
-            <a:r>
-              <a:rPr lang="en-US" sz="810" dirty="0">
-                <a:solidFill>
-                  <a:srgbClr val="4A5565"/>
-                </a:solidFill>
-                <a:latin typeface="Poppins" pitchFamily="34" charset="0"/>
-                <a:ea typeface="Poppins" pitchFamily="34" charset="-122"/>
-                <a:cs typeface="Poppins" pitchFamily="34" charset="-120"/>
-              </a:rPr>
-              <a:t>Other breweries are not the enemy. Every price conversation should be unit economics: </a:t>
-            </a:r>
-            <a:pPr indent="0" marL="0">
-              <a:lnSpc>
-                <a:spcPts val="1215"/>
-              </a:lnSpc>
-              <a:buNone/>
-            </a:pPr>
-            <a:r>
-              <a:rPr lang="en-US" sz="810" b="1" dirty="0">
-                <a:solidFill>
-                  <a:srgbClr val="0E171F"/>
-                </a:solidFill>
-                <a:latin typeface="Poppins" pitchFamily="34" charset="0"/>
-                <a:ea typeface="Poppins" pitchFamily="34" charset="-122"/>
-                <a:cs typeface="Poppins" pitchFamily="34" charset="-120"/>
-              </a:rPr>
-              <a:t>$2.55 a schooner at home against $12+ at the pub</a:t>
-            </a:r>
-            <a:pPr indent="0" marL="0">
-              <a:lnSpc>
-                <a:spcPts val="1215"/>
-              </a:lnSpc>
-              <a:buNone/>
-            </a:pPr>
-            <a:r>
-              <a:rPr lang="en-US" sz="810" dirty="0">
-                <a:solidFill>
-                  <a:srgbClr val="4A5565"/>
-                </a:solidFill>
-                <a:latin typeface="Poppins" pitchFamily="34" charset="0"/>
-                <a:ea typeface="Poppins" pitchFamily="34" charset="-122"/>
-                <a:cs typeface="Poppins" pitchFamily="34" charset="-120"/>
-              </a:rPr>
-              <a:t>, 2.5 cases for the price of one.</a:t>
-            </a:r>
-            <a:endParaRPr lang="en-US" sz="810" dirty="0"/>
+              <a:t>Pubs at $12+ a schooner, bottleshops at $80+ a case, and home brew supply stores. Not the duopoly, not A&amp;A, not the keg delivery operators.</a:t>
+            </a:r>
+            <a:endParaRPr lang="en-US" sz="920" dirty="0"/>
           </a:p>
         </p:txBody>
       </p:sp>
@@ -11664,8 +11613,8 @@
         </p:nvSpPr>
         <p:spPr>
           <a:xfrm>
-            <a:off x="6513943" y="2362924"/>
-            <a:ext cx="8166764" cy="154305"/>
+            <a:off x="7728952" y="1888714"/>
+            <a:ext cx="6951755" cy="308610"/>
           </a:xfrm>
           <a:prstGeom prst="rect">
             <a:avLst/>
@@ -11684,6 +11633,23 @@
               <a:buNone/>
             </a:pPr>
             <a:r>
+              <a:rPr lang="en-US" sz="810" dirty="0">
+                <a:solidFill>
+                  <a:srgbClr val="4A5565"/>
+                </a:solidFill>
+                <a:latin typeface="Poppins" pitchFamily="34" charset="0"/>
+                <a:ea typeface="Poppins" pitchFamily="34" charset="-122"/>
+                <a:cs typeface="Poppins" pitchFamily="34" charset="-120"/>
+              </a:rPr>
+              <a:t>Justin's own words: </a:t>
+            </a:r>
+            <a:pPr indent="0" marL="0">
+              <a:lnSpc>
+                <a:spcPts val="1215"/>
+              </a:lnSpc>
+              <a:buNone/>
+            </a:pPr>
+            <a:r>
               <a:rPr lang="en-US" sz="810" b="1" dirty="0">
                 <a:solidFill>
                   <a:srgbClr val="0E171F"/>
@@ -11692,7 +11658,7 @@
                 <a:ea typeface="Poppins" pitchFamily="34" charset="-122"/>
                 <a:cs typeface="Poppins" pitchFamily="34" charset="-120"/>
               </a:rPr>
-              <a:t>Do not get pulled into a keg price war. </a:t>
+              <a:t>the more people drinking craft beer and not XXXX, the better. </a:t>
             </a:r>
             <a:pPr indent="0" marL="0">
               <a:lnSpc>
@@ -11709,7 +11675,41 @@
                 <a:ea typeface="Poppins" pitchFamily="34" charset="-122"/>
                 <a:cs typeface="Poppins" pitchFamily="34" charset="-120"/>
               </a:rPr>
-              <a:t>It is the one fight where winning costs more than losing.</a:t>
+              <a:t>Other breweries are not the enemy. Every price conversation should be unit economics: </a:t>
+            </a:r>
+            <a:pPr indent="0" marL="0">
+              <a:lnSpc>
+                <a:spcPts val="1215"/>
+              </a:lnSpc>
+              <a:buNone/>
+            </a:pPr>
+            <a:r>
+              <a:rPr lang="en-US" sz="810" b="1" dirty="0">
+                <a:solidFill>
+                  <a:srgbClr val="0E171F"/>
+                </a:solidFill>
+                <a:latin typeface="Poppins" pitchFamily="34" charset="0"/>
+                <a:ea typeface="Poppins" pitchFamily="34" charset="-122"/>
+                <a:cs typeface="Poppins" pitchFamily="34" charset="-120"/>
+              </a:rPr>
+              <a:t>$2.55 a schooner at home against $12+ at the pub</a:t>
+            </a:r>
+            <a:pPr indent="0" marL="0">
+              <a:lnSpc>
+                <a:spcPts val="1215"/>
+              </a:lnSpc>
+              <a:buNone/>
+            </a:pPr>
+            <a:r>
+              <a:rPr lang="en-US" sz="810" dirty="0">
+                <a:solidFill>
+                  <a:srgbClr val="4A5565"/>
+                </a:solidFill>
+                <a:latin typeface="Poppins" pitchFamily="34" charset="0"/>
+                <a:ea typeface="Poppins" pitchFamily="34" charset="-122"/>
+                <a:cs typeface="Poppins" pitchFamily="34" charset="-120"/>
+              </a:rPr>
+              <a:t>, 2.5 cases for the price of one.</a:t>
             </a:r>
             <a:endParaRPr lang="en-US" sz="810" dirty="0"/>
           </a:p>
@@ -11723,8 +11723,8 @@
         </p:nvSpPr>
         <p:spPr>
           <a:xfrm>
-            <a:off x="6513943" y="2682829"/>
-            <a:ext cx="8166764" cy="154305"/>
+            <a:off x="7728952" y="2362924"/>
+            <a:ext cx="6951755" cy="154305"/>
           </a:xfrm>
           <a:prstGeom prst="rect">
             <a:avLst/>
@@ -11751,6 +11751,65 @@
                 <a:ea typeface="Poppins" pitchFamily="34" charset="-122"/>
                 <a:cs typeface="Poppins" pitchFamily="34" charset="-120"/>
               </a:rPr>
+              <a:t>Do not get pulled into a keg price war. </a:t>
+            </a:r>
+            <a:pPr indent="0" marL="0">
+              <a:lnSpc>
+                <a:spcPts val="1215"/>
+              </a:lnSpc>
+              <a:buNone/>
+            </a:pPr>
+            <a:r>
+              <a:rPr lang="en-US" sz="810" dirty="0">
+                <a:solidFill>
+                  <a:srgbClr val="4A5565"/>
+                </a:solidFill>
+                <a:latin typeface="Poppins" pitchFamily="34" charset="0"/>
+                <a:ea typeface="Poppins" pitchFamily="34" charset="-122"/>
+                <a:cs typeface="Poppins" pitchFamily="34" charset="-120"/>
+              </a:rPr>
+              <a:t>It is the one fight where winning costs more than losing.</a:t>
+            </a:r>
+            <a:endParaRPr lang="en-US" sz="810" dirty="0"/>
+          </a:p>
+        </p:txBody>
+      </p:sp>
+      <p:sp>
+        <p:nvSpPr>
+          <p:cNvPr id="27" name="Text 23"/>
+          <p:cNvSpPr txBox="1"/>
+          <p:nvPr/>
+        </p:nvSpPr>
+        <p:spPr>
+          <a:xfrm>
+            <a:off x="7728952" y="2682829"/>
+            <a:ext cx="6951755" cy="308610"/>
+          </a:xfrm>
+          <a:prstGeom prst="rect">
+            <a:avLst/>
+          </a:prstGeom>
+          <a:noFill/>
+          <a:ln/>
+        </p:spPr>
+        <p:txBody>
+          <a:bodyPr wrap="square" lIns="0" tIns="0" rIns="0" bIns="0" rtlCol="0" anchor="t"/>
+          <a:lstStyle/>
+          <a:p>
+            <a:pPr indent="0" marL="0">
+              <a:lnSpc>
+                <a:spcPts val="1215"/>
+              </a:lnSpc>
+              <a:buNone/>
+            </a:pPr>
+            <a:r>
+              <a:rPr lang="en-US" sz="810" b="1" dirty="0">
+                <a:solidFill>
+                  <a:srgbClr val="0E171F"/>
+                </a:solidFill>
+                <a:latin typeface="Poppins" pitchFamily="34" charset="0"/>
+                <a:ea typeface="Poppins" pitchFamily="34" charset="-122"/>
+                <a:cs typeface="Poppins" pitchFamily="34" charset="-120"/>
+              </a:rPr>
               <a:t>A&amp;A's domain is suspended </a:t>
             </a:r>
             <a:pPr indent="0" marL="0">
@@ -11776,14 +11835,14 @@
       </p:sp>
       <p:sp>
         <p:nvSpPr>
-          <p:cNvPr id="27" name="Shape 23"/>
+          <p:cNvPr id="28" name="Shape 24"/>
           <p:cNvSpPr/>
           <p:nvPr/>
         </p:nvSpPr>
         <p:spPr>
           <a:xfrm>
-            <a:off x="6513943" y="3460651"/>
-            <a:ext cx="8166764" cy="0"/>
+            <a:off x="7728952" y="3636511"/>
+            <a:ext cx="6951755" cy="0"/>
           </a:xfrm>
           <a:prstGeom prst="line">
             <a:avLst/>
@@ -11799,14 +11858,14 @@
       </p:sp>
       <p:sp>
         <p:nvSpPr>
-          <p:cNvPr id="28" name="Text 24"/>
+          <p:cNvPr id="29" name="Text 25"/>
           <p:cNvSpPr txBox="1"/>
           <p:nvPr/>
         </p:nvSpPr>
         <p:spPr>
           <a:xfrm>
-            <a:off x="6513943" y="3518251"/>
-            <a:ext cx="8166764" cy="120015"/>
+            <a:off x="7728952" y="3694111"/>
+            <a:ext cx="6951755" cy="120015"/>
           </a:xfrm>
           <a:prstGeom prst="rect">
             <a:avLst/>
@@ -11841,14 +11900,14 @@
       </p:sp>
       <p:sp>
         <p:nvSpPr>
-          <p:cNvPr id="29" name="Shape 25"/>
+          <p:cNvPr id="30" name="Shape 26"/>
           <p:cNvSpPr/>
           <p:nvPr/>
         </p:nvSpPr>
         <p:spPr>
           <a:xfrm>
-            <a:off x="323698" y="3861365"/>
-            <a:ext cx="4752137" cy="3341337"/>
+            <a:off x="323698" y="4037225"/>
+            <a:ext cx="4752137" cy="3370647"/>
           </a:xfrm>
           <a:prstGeom prst="rect">
             <a:avLst/>
@@ -11866,56 +11925,14 @@
       </p:sp>
       <p:sp>
         <p:nvSpPr>
-          <p:cNvPr id="30" name="Text 26"/>
-          <p:cNvSpPr txBox="1"/>
-          <p:nvPr/>
-        </p:nvSpPr>
-        <p:spPr>
-          <a:xfrm>
-            <a:off x="438898" y="3976565"/>
-            <a:ext cx="4521737" cy="112268"/>
-          </a:xfrm>
-          <a:prstGeom prst="rect">
-            <a:avLst/>
-          </a:prstGeom>
-          <a:noFill/>
-          <a:ln/>
-        </p:spPr>
-        <p:txBody>
-          <a:bodyPr wrap="square" lIns="0" tIns="0" rIns="0" bIns="0" rtlCol="0" anchor="t"/>
-          <a:lstStyle/>
-          <a:p>
-            <a:pPr indent="0" marL="0">
-              <a:lnSpc>
-                <a:spcPts val="884"/>
-              </a:lnSpc>
-              <a:buNone/>
-            </a:pPr>
-            <a:r>
-              <a:rPr lang="en-US" sz="680" b="1" spc="95" kern="0" dirty="0">
-                <a:solidFill>
-                  <a:srgbClr val="0066FF"/>
-                </a:solidFill>
-                <a:latin typeface="Poppins" pitchFamily="34" charset="0"/>
-                <a:ea typeface="Poppins" pitchFamily="34" charset="-122"/>
-                <a:cs typeface="Poppins" pitchFamily="34" charset="-120"/>
-              </a:rPr>
-              <a:t>HEROES, NOT A TAIL</a:t>
-            </a:r>
-            <a:endParaRPr lang="en-US" sz="680" dirty="0"/>
-          </a:p>
-        </p:txBody>
-      </p:sp>
-      <p:sp>
-        <p:nvSpPr>
           <p:cNvPr id="31" name="Text 27"/>
           <p:cNvSpPr txBox="1"/>
           <p:nvPr/>
         </p:nvSpPr>
         <p:spPr>
           <a:xfrm>
-            <a:off x="438898" y="4146433"/>
-            <a:ext cx="4521737" cy="462915"/>
+            <a:off x="438898" y="4152425"/>
+            <a:ext cx="4521737" cy="112268"/>
           </a:xfrm>
           <a:prstGeom prst="rect">
             <a:avLst/>
@@ -11929,39 +11946,22 @@
           <a:p>
             <a:pPr indent="0" marL="0">
               <a:lnSpc>
-                <a:spcPts val="1215"/>
-              </a:lnSpc>
-              <a:buNone/>
-            </a:pPr>
-            <a:r>
-              <a:rPr lang="en-US" sz="810" b="1" dirty="0">
-                <a:solidFill>
-                  <a:srgbClr val="0E171F"/>
-                </a:solidFill>
-                <a:latin typeface="Poppins" pitchFamily="34" charset="0"/>
-                <a:ea typeface="Poppins" pitchFamily="34" charset="-122"/>
-                <a:cs typeface="Poppins" pitchFamily="34" charset="-120"/>
-              </a:rPr>
-              <a:t>About 19 brew choices </a:t>
-            </a:r>
-            <a:pPr indent="0" marL="0">
-              <a:lnSpc>
-                <a:spcPts val="1215"/>
-              </a:lnSpc>
-              <a:buNone/>
-            </a:pPr>
-            <a:r>
-              <a:rPr lang="en-US" sz="810" dirty="0">
-                <a:solidFill>
-                  <a:srgbClr val="4A5565"/>
-                </a:solidFill>
-                <a:latin typeface="Poppins" pitchFamily="34" charset="0"/>
-                <a:ea typeface="Poppins" pitchFamily="34" charset="-122"/>
-                <a:cs typeface="Poppins" pitchFamily="34" charset="-120"/>
-              </a:rPr>
-              <a:t>is costing twice: cost of goods on the tail, and choice paralysis at the point of sale. It also means no single beer gets enough marketing to become known.</a:t>
-            </a:r>
-            <a:endParaRPr lang="en-US" sz="810" dirty="0"/>
+                <a:spcPts val="884"/>
+              </a:lnSpc>
+              <a:buNone/>
+            </a:pPr>
+            <a:r>
+              <a:rPr lang="en-US" sz="680" b="1" spc="95" kern="0" dirty="0">
+                <a:solidFill>
+                  <a:srgbClr val="0066FF"/>
+                </a:solidFill>
+                <a:latin typeface="Poppins" pitchFamily="34" charset="0"/>
+                <a:ea typeface="Poppins" pitchFamily="34" charset="-122"/>
+                <a:cs typeface="Poppins" pitchFamily="34" charset="-120"/>
+              </a:rPr>
+              <a:t>HEROES, NOT A TAIL</a:t>
+            </a:r>
+            <a:endParaRPr lang="en-US" sz="680" dirty="0"/>
           </a:p>
         </p:txBody>
       </p:sp>
@@ -11973,8 +11973,8 @@
         </p:nvSpPr>
         <p:spPr>
           <a:xfrm>
-            <a:off x="438898" y="4774948"/>
-            <a:ext cx="4521737" cy="308610"/>
+            <a:off x="438898" y="4322293"/>
+            <a:ext cx="4521737" cy="462915"/>
           </a:xfrm>
           <a:prstGeom prst="rect">
             <a:avLst/>
@@ -12001,7 +12001,7 @@
                 <a:ea typeface="Poppins" pitchFamily="34" charset="-122"/>
                 <a:cs typeface="Poppins" pitchFamily="34" charset="-120"/>
               </a:rPr>
-              <a:t>Cutting the tail is not the point. </a:t>
+              <a:t>About 19 brew choices </a:t>
             </a:r>
             <a:pPr indent="0" marL="0">
               <a:lnSpc>
@@ -12018,7 +12018,7 @@
                 <a:ea typeface="Poppins" pitchFamily="34" charset="-122"/>
                 <a:cs typeface="Poppins" pitchFamily="34" charset="-120"/>
               </a:rPr>
-              <a:t>The point is putting the freed marketing energy behind the heroes that remain. Romance the beer, not the venue.</a:t>
+              <a:t>is costing twice: cost of goods on the tail, and choice paralysis at the point of sale. It also means no single beer gets enough marketing to become known.</a:t>
             </a:r>
             <a:endParaRPr lang="en-US" sz="810" dirty="0"/>
           </a:p>
@@ -12032,7 +12032,7 @@
         </p:nvSpPr>
         <p:spPr>
           <a:xfrm>
-            <a:off x="438898" y="5249158"/>
+            <a:off x="438898" y="4950808"/>
             <a:ext cx="4521737" cy="308610"/>
           </a:xfrm>
           <a:prstGeom prst="rect">
@@ -12060,6 +12060,65 @@
                 <a:ea typeface="Poppins" pitchFamily="34" charset="-122"/>
                 <a:cs typeface="Poppins" pitchFamily="34" charset="-120"/>
               </a:rPr>
+              <a:t>Cutting the tail is not the point. </a:t>
+            </a:r>
+            <a:pPr indent="0" marL="0">
+              <a:lnSpc>
+                <a:spcPts val="1215"/>
+              </a:lnSpc>
+              <a:buNone/>
+            </a:pPr>
+            <a:r>
+              <a:rPr lang="en-US" sz="810" dirty="0">
+                <a:solidFill>
+                  <a:srgbClr val="4A5565"/>
+                </a:solidFill>
+                <a:latin typeface="Poppins" pitchFamily="34" charset="0"/>
+                <a:ea typeface="Poppins" pitchFamily="34" charset="-122"/>
+                <a:cs typeface="Poppins" pitchFamily="34" charset="-120"/>
+              </a:rPr>
+              <a:t>The point is putting the freed marketing energy behind the heroes that remain. Romance the beer, not the venue.</a:t>
+            </a:r>
+            <a:endParaRPr lang="en-US" sz="810" dirty="0"/>
+          </a:p>
+        </p:txBody>
+      </p:sp>
+      <p:sp>
+        <p:nvSpPr>
+          <p:cNvPr id="34" name="Text 30"/>
+          <p:cNvSpPr txBox="1"/>
+          <p:nvPr/>
+        </p:nvSpPr>
+        <p:spPr>
+          <a:xfrm>
+            <a:off x="438898" y="5425018"/>
+            <a:ext cx="4521737" cy="308610"/>
+          </a:xfrm>
+          <a:prstGeom prst="rect">
+            <a:avLst/>
+          </a:prstGeom>
+          <a:noFill/>
+          <a:ln/>
+        </p:spPr>
+        <p:txBody>
+          <a:bodyPr wrap="square" lIns="0" tIns="0" rIns="0" bIns="0" rtlCol="0" anchor="t"/>
+          <a:lstStyle/>
+          <a:p>
+            <a:pPr indent="0" marL="0">
+              <a:lnSpc>
+                <a:spcPts val="1215"/>
+              </a:lnSpc>
+              <a:buNone/>
+            </a:pPr>
+            <a:r>
+              <a:rPr lang="en-US" sz="810" b="1" dirty="0">
+                <a:solidFill>
+                  <a:srgbClr val="0E171F"/>
+                </a:solidFill>
+                <a:latin typeface="Poppins" pitchFamily="34" charset="0"/>
+                <a:ea typeface="Poppins" pitchFamily="34" charset="-122"/>
+                <a:cs typeface="Poppins" pitchFamily="34" charset="-120"/>
+              </a:rPr>
               <a:t>Add social proof at the point of sale: </a:t>
             </a:r>
             <a:pPr indent="0" marL="0">
@@ -12085,13 +12144,13 @@
       </p:sp>
       <p:sp>
         <p:nvSpPr>
-          <p:cNvPr id="34" name="Shape 30"/>
+          <p:cNvPr id="35" name="Shape 31"/>
           <p:cNvSpPr/>
           <p:nvPr/>
         </p:nvSpPr>
         <p:spPr>
           <a:xfrm>
-            <a:off x="438898" y="6789872"/>
+            <a:off x="438898" y="6995042"/>
             <a:ext cx="4521737" cy="0"/>
           </a:xfrm>
           <a:prstGeom prst="line">
@@ -12108,13 +12167,13 @@
       </p:sp>
       <p:sp>
         <p:nvSpPr>
-          <p:cNvPr id="35" name="Text 31"/>
+          <p:cNvPr id="36" name="Text 32"/>
           <p:cNvSpPr txBox="1"/>
           <p:nvPr/>
         </p:nvSpPr>
         <p:spPr>
           <a:xfrm>
-            <a:off x="438898" y="6847472"/>
+            <a:off x="438898" y="7052642"/>
             <a:ext cx="4521737" cy="240030"/>
           </a:xfrm>
           <a:prstGeom prst="rect">
@@ -12150,14 +12209,14 @@
       </p:sp>
       <p:sp>
         <p:nvSpPr>
-          <p:cNvPr id="36" name="Shape 32"/>
+          <p:cNvPr id="37" name="Shape 33"/>
           <p:cNvSpPr/>
           <p:nvPr/>
         </p:nvSpPr>
         <p:spPr>
           <a:xfrm>
-            <a:off x="5183734" y="3861365"/>
-            <a:ext cx="4752137" cy="3341337"/>
+            <a:off x="5183734" y="4037225"/>
+            <a:ext cx="4752137" cy="3370647"/>
           </a:xfrm>
           <a:prstGeom prst="rect">
             <a:avLst/>
@@ -12175,56 +12234,14 @@
       </p:sp>
       <p:sp>
         <p:nvSpPr>
-          <p:cNvPr id="37" name="Text 33"/>
-          <p:cNvSpPr txBox="1"/>
-          <p:nvPr/>
-        </p:nvSpPr>
-        <p:spPr>
-          <a:xfrm>
-            <a:off x="5298934" y="3976565"/>
-            <a:ext cx="4521737" cy="112268"/>
-          </a:xfrm>
-          <a:prstGeom prst="rect">
-            <a:avLst/>
-          </a:prstGeom>
-          <a:noFill/>
-          <a:ln/>
-        </p:spPr>
-        <p:txBody>
-          <a:bodyPr wrap="square" lIns="0" tIns="0" rIns="0" bIns="0" rtlCol="0" anchor="t"/>
-          <a:lstStyle/>
-          <a:p>
-            <a:pPr indent="0" marL="0">
-              <a:lnSpc>
-                <a:spcPts val="884"/>
-              </a:lnSpc>
-              <a:buNone/>
-            </a:pPr>
-            <a:r>
-              <a:rPr lang="en-US" sz="680" b="1" spc="95" kern="0" dirty="0">
-                <a:solidFill>
-                  <a:srgbClr val="0066FF"/>
-                </a:solidFill>
-                <a:latin typeface="Poppins" pitchFamily="34" charset="0"/>
-                <a:ea typeface="Poppins" pitchFamily="34" charset="-122"/>
-                <a:cs typeface="Poppins" pitchFamily="34" charset="-120"/>
-              </a:rPr>
-              <a:t>DESIGN FOR HER</a:t>
-            </a:r>
-            <a:endParaRPr lang="en-US" sz="680" dirty="0"/>
-          </a:p>
-        </p:txBody>
-      </p:sp>
-      <p:sp>
-        <p:nvSpPr>
           <p:cNvPr id="38" name="Text 34"/>
           <p:cNvSpPr txBox="1"/>
           <p:nvPr/>
         </p:nvSpPr>
         <p:spPr>
           <a:xfrm>
-            <a:off x="5298934" y="4146433"/>
-            <a:ext cx="4521737" cy="161239"/>
+            <a:off x="5298934" y="4152425"/>
+            <a:ext cx="4521737" cy="112268"/>
           </a:xfrm>
           <a:prstGeom prst="rect">
             <a:avLst/>
@@ -12238,22 +12255,22 @@
           <a:p>
             <a:pPr indent="0" marL="0">
               <a:lnSpc>
-                <a:spcPts val="1270"/>
-              </a:lnSpc>
-              <a:buNone/>
-            </a:pPr>
-            <a:r>
-              <a:rPr lang="en-US" sz="920" b="1" dirty="0">
-                <a:solidFill>
-                  <a:srgbClr val="0E171F"/>
-                </a:solidFill>
-                <a:latin typeface="Poppins" pitchFamily="34" charset="0"/>
-                <a:ea typeface="Poppins" pitchFamily="34" charset="-122"/>
-                <a:cs typeface="Poppins" pitchFamily="34" charset="-120"/>
-              </a:rPr>
-              <a:t>The single largest unaddressed opportunity in the brand.</a:t>
-            </a:r>
-            <a:endParaRPr lang="en-US" sz="920" dirty="0"/>
+                <a:spcPts val="884"/>
+              </a:lnSpc>
+              <a:buNone/>
+            </a:pPr>
+            <a:r>
+              <a:rPr lang="en-US" sz="680" b="1" spc="95" kern="0" dirty="0">
+                <a:solidFill>
+                  <a:srgbClr val="0066FF"/>
+                </a:solidFill>
+                <a:latin typeface="Poppins" pitchFamily="34" charset="0"/>
+                <a:ea typeface="Poppins" pitchFamily="34" charset="-122"/>
+                <a:cs typeface="Poppins" pitchFamily="34" charset="-120"/>
+              </a:rPr>
+              <a:t>DESIGN FOR HER</a:t>
+            </a:r>
+            <a:endParaRPr lang="en-US" sz="680" dirty="0"/>
           </a:p>
         </p:txBody>
       </p:sp>
@@ -12265,8 +12282,8 @@
         </p:nvSpPr>
         <p:spPr>
           <a:xfrm>
-            <a:off x="5298934" y="4465361"/>
-            <a:ext cx="4521737" cy="771525"/>
+            <a:off x="5298934" y="4322293"/>
+            <a:ext cx="4521737" cy="161239"/>
           </a:xfrm>
           <a:prstGeom prst="rect">
             <a:avLst/>
@@ -12280,29 +12297,12 @@
           <a:p>
             <a:pPr indent="0" marL="0">
               <a:lnSpc>
-                <a:spcPts val="1215"/>
-              </a:lnSpc>
-              <a:buNone/>
-            </a:pPr>
-            <a:r>
-              <a:rPr lang="en-US" sz="810" dirty="0">
-                <a:solidFill>
-                  <a:srgbClr val="4A5565"/>
-                </a:solidFill>
-                <a:latin typeface="Poppins" pitchFamily="34" charset="0"/>
-                <a:ea typeface="Poppins" pitchFamily="34" charset="-122"/>
-                <a:cs typeface="Poppins" pitchFamily="34" charset="-120"/>
-              </a:rPr>
-              <a:t>The range, the marketing and the hardware all read masculine. Covered is not the same as catered for. Christy's argument is the blunt one: </a:t>
-            </a:r>
-            <a:pPr indent="0" marL="0">
-              <a:lnSpc>
-                <a:spcPts val="1215"/>
-              </a:lnSpc>
-              <a:buNone/>
-            </a:pPr>
-            <a:r>
-              <a:rPr lang="en-US" sz="810" b="1" dirty="0">
+                <a:spcPts val="1270"/>
+              </a:lnSpc>
+              <a:buNone/>
+            </a:pPr>
+            <a:r>
+              <a:rPr lang="en-US" sz="920" b="1" dirty="0">
                 <a:solidFill>
                   <a:srgbClr val="0E171F"/>
                 </a:solidFill>
@@ -12310,26 +12310,9 @@
                 <a:ea typeface="Poppins" pitchFamily="34" charset="-122"/>
                 <a:cs typeface="Poppins" pitchFamily="34" charset="-120"/>
               </a:rPr>
-              <a:t>if women are not coming, men will not follow. </a:t>
-            </a:r>
-            <a:pPr indent="0" marL="0">
-              <a:lnSpc>
-                <a:spcPts val="1215"/>
-              </a:lnSpc>
-              <a:buNone/>
-            </a:pPr>
-            <a:r>
-              <a:rPr lang="en-US" sz="810" dirty="0">
-                <a:solidFill>
-                  <a:srgbClr val="4A5565"/>
-                </a:solidFill>
-                <a:latin typeface="Poppins" pitchFamily="34" charset="0"/>
-                <a:ea typeface="Poppins" pitchFamily="34" charset="-122"/>
-                <a:cs typeface="Poppins" pitchFamily="34" charset="-120"/>
-              </a:rPr>
-              <a:t>Justin's target segments, sharehouses, DINKs, young families, baby boomers, high-volume drinkers, cashed-up tradies, are households, and designing for her is how those households say yes.</a:t>
-            </a:r>
-            <a:endParaRPr lang="en-US" sz="810" dirty="0"/>
+              <a:t>The single largest unaddressed opportunity in the brand.</a:t>
+            </a:r>
+            <a:endParaRPr lang="en-US" sz="920" dirty="0"/>
           </a:p>
         </p:txBody>
       </p:sp>
@@ -12341,8 +12324,8 @@
         </p:nvSpPr>
         <p:spPr>
           <a:xfrm>
-            <a:off x="5298934" y="5394575"/>
-            <a:ext cx="4521737" cy="462915"/>
+            <a:off x="5298934" y="4560938"/>
+            <a:ext cx="4521737" cy="771525"/>
           </a:xfrm>
           <a:prstGeom prst="rect">
             <a:avLst/>
@@ -12361,6 +12344,23 @@
               <a:buNone/>
             </a:pPr>
             <a:r>
+              <a:rPr lang="en-US" sz="810" dirty="0">
+                <a:solidFill>
+                  <a:srgbClr val="4A5565"/>
+                </a:solidFill>
+                <a:latin typeface="Poppins" pitchFamily="34" charset="0"/>
+                <a:ea typeface="Poppins" pitchFamily="34" charset="-122"/>
+                <a:cs typeface="Poppins" pitchFamily="34" charset="-120"/>
+              </a:rPr>
+              <a:t>The range, the marketing and the hardware all read masculine. Covered is not the same as catered for. Christy's argument is the blunt one: </a:t>
+            </a:r>
+            <a:pPr indent="0" marL="0">
+              <a:lnSpc>
+                <a:spcPts val="1215"/>
+              </a:lnSpc>
+              <a:buNone/>
+            </a:pPr>
+            <a:r>
               <a:rPr lang="en-US" sz="810" b="1" dirty="0">
                 <a:solidFill>
                   <a:srgbClr val="0E171F"/>
@@ -12369,7 +12369,7 @@
                 <a:ea typeface="Poppins" pitchFamily="34" charset="-122"/>
                 <a:cs typeface="Poppins" pitchFamily="34" charset="-120"/>
               </a:rPr>
-              <a:t>What it means in practice: </a:t>
+              <a:t>if women are not coming, men will not follow. </a:t>
             </a:r>
             <a:pPr indent="0" marL="0">
               <a:lnSpc>
@@ -12386,7 +12386,7 @@
                 <a:ea typeface="Poppins" pitchFamily="34" charset="-122"/>
                 <a:cs typeface="Poppins" pitchFamily="34" charset="-120"/>
               </a:rPr>
-              <a:t>romance the RTD properly, build the hydration and light range as a real story, make products she is proud to serve, and design a system she is willing to have in eyesight at home.</a:t>
+              <a:t>Justin's target segments, sharehouses, DINKs, young families, baby boomers, high-volume drinkers, cashed-up tradies, are households, and designing for her is how those households say yes.</a:t>
             </a:r>
             <a:endParaRPr lang="en-US" sz="810" dirty="0"/>
           </a:p>
@@ -12400,7 +12400,7 @@
         </p:nvSpPr>
         <p:spPr>
           <a:xfrm>
-            <a:off x="5298934" y="6015179"/>
+            <a:off x="5298934" y="5409870"/>
             <a:ext cx="4521737" cy="462915"/>
           </a:xfrm>
           <a:prstGeom prst="rect">
@@ -12428,6 +12428,124 @@
                 <a:ea typeface="Poppins" pitchFamily="34" charset="-122"/>
                 <a:cs typeface="Poppins" pitchFamily="34" charset="-120"/>
               </a:rPr>
+              <a:t>What it means in practice: </a:t>
+            </a:r>
+            <a:pPr indent="0" marL="0">
+              <a:lnSpc>
+                <a:spcPts val="1215"/>
+              </a:lnSpc>
+              <a:buNone/>
+            </a:pPr>
+            <a:r>
+              <a:rPr lang="en-US" sz="810" dirty="0">
+                <a:solidFill>
+                  <a:srgbClr val="4A5565"/>
+                </a:solidFill>
+                <a:latin typeface="Poppins" pitchFamily="34" charset="0"/>
+                <a:ea typeface="Poppins" pitchFamily="34" charset="-122"/>
+                <a:cs typeface="Poppins" pitchFamily="34" charset="-120"/>
+              </a:rPr>
+              <a:t>romance the RTD properly, build the hydration and light range as a real story, make products she is proud to serve, and design a system she is willing to have in eyesight at home.</a:t>
+            </a:r>
+            <a:endParaRPr lang="en-US" sz="810" dirty="0"/>
+          </a:p>
+        </p:txBody>
+      </p:sp>
+      <p:sp>
+        <p:nvSpPr>
+          <p:cNvPr id="42" name="Text 38"/>
+          <p:cNvSpPr txBox="1"/>
+          <p:nvPr/>
+        </p:nvSpPr>
+        <p:spPr>
+          <a:xfrm>
+            <a:off x="5298934" y="5950191"/>
+            <a:ext cx="4521737" cy="462915"/>
+          </a:xfrm>
+          <a:prstGeom prst="rect">
+            <a:avLst/>
+          </a:prstGeom>
+          <a:noFill/>
+          <a:ln/>
+        </p:spPr>
+        <p:txBody>
+          <a:bodyPr wrap="square" lIns="0" tIns="0" rIns="0" bIns="0" rtlCol="0" anchor="t"/>
+          <a:lstStyle/>
+          <a:p>
+            <a:pPr indent="0" marL="0">
+              <a:lnSpc>
+                <a:spcPts val="1215"/>
+              </a:lnSpc>
+              <a:buNone/>
+            </a:pPr>
+            <a:r>
+              <a:rPr lang="en-US" sz="810" b="1" dirty="0">
+                <a:solidFill>
+                  <a:srgbClr val="0E171F"/>
+                </a:solidFill>
+                <a:latin typeface="Poppins" pitchFamily="34" charset="0"/>
+                <a:ea typeface="Poppins" pitchFamily="34" charset="-122"/>
+                <a:cs typeface="Poppins" pitchFamily="34" charset="-120"/>
+              </a:rPr>
+              <a:t>And the hardware itself. </a:t>
+            </a:r>
+            <a:pPr indent="0" marL="0">
+              <a:lnSpc>
+                <a:spcPts val="1215"/>
+              </a:lnSpc>
+              <a:buNone/>
+            </a:pPr>
+            <a:r>
+              <a:rPr lang="en-US" sz="810" dirty="0">
+                <a:solidFill>
+                  <a:srgbClr val="4A5565"/>
+                </a:solidFill>
+                <a:latin typeface="Poppins" pitchFamily="34" charset="0"/>
+                <a:ea typeface="Poppins" pitchFamily="34" charset="-122"/>
+                <a:cs typeface="Poppins" pitchFamily="34" charset="-120"/>
+              </a:rPr>
+              <a:t>Keg systems are absent from Harvey Norman’s outdoor living aisle; they sit in appliances. A Zip HydroTap sells at around $10,000 largely because it looks right on a bench. That is the standard.</a:t>
+            </a:r>
+            <a:endParaRPr lang="en-US" sz="810" dirty="0"/>
+          </a:p>
+        </p:txBody>
+      </p:sp>
+      <p:sp>
+        <p:nvSpPr>
+          <p:cNvPr id="43" name="Text 39"/>
+          <p:cNvSpPr txBox="1"/>
+          <p:nvPr/>
+        </p:nvSpPr>
+        <p:spPr>
+          <a:xfrm>
+            <a:off x="5298934" y="6490512"/>
+            <a:ext cx="4521737" cy="462915"/>
+          </a:xfrm>
+          <a:prstGeom prst="rect">
+            <a:avLst/>
+          </a:prstGeom>
+          <a:noFill/>
+          <a:ln/>
+        </p:spPr>
+        <p:txBody>
+          <a:bodyPr wrap="square" lIns="0" tIns="0" rIns="0" bIns="0" rtlCol="0" anchor="t"/>
+          <a:lstStyle/>
+          <a:p>
+            <a:pPr indent="0" marL="0">
+              <a:lnSpc>
+                <a:spcPts val="1215"/>
+              </a:lnSpc>
+              <a:buNone/>
+            </a:pPr>
+            <a:r>
+              <a:rPr lang="en-US" sz="810" b="1" dirty="0">
+                <a:solidFill>
+                  <a:srgbClr val="0E171F"/>
+                </a:solidFill>
+                <a:latin typeface="Poppins" pitchFamily="34" charset="0"/>
+                <a:ea typeface="Poppins" pitchFamily="34" charset="-122"/>
+                <a:cs typeface="Poppins" pitchFamily="34" charset="-120"/>
+              </a:rPr>
               <a:t>Where to start: </a:t>
             </a:r>
             <a:pPr indent="0" marL="0">
@@ -12453,13 +12571,13 @@
       </p:sp>
       <p:sp>
         <p:nvSpPr>
-          <p:cNvPr id="42" name="Shape 38"/>
+          <p:cNvPr id="44" name="Shape 40"/>
           <p:cNvSpPr/>
           <p:nvPr/>
         </p:nvSpPr>
         <p:spPr>
           <a:xfrm>
-            <a:off x="5298934" y="6909887"/>
+            <a:off x="5298934" y="7115057"/>
             <a:ext cx="4521737" cy="0"/>
           </a:xfrm>
           <a:prstGeom prst="line">
@@ -12476,13 +12594,13 @@
       </p:sp>
       <p:sp>
         <p:nvSpPr>
-          <p:cNvPr id="43" name="Text 39"/>
+          <p:cNvPr id="45" name="Text 41"/>
           <p:cNvSpPr txBox="1"/>
           <p:nvPr/>
         </p:nvSpPr>
         <p:spPr>
           <a:xfrm>
-            <a:off x="5298934" y="6967487"/>
+            <a:off x="5298934" y="7172657"/>
             <a:ext cx="4521737" cy="120015"/>
           </a:xfrm>
           <a:prstGeom prst="rect">
@@ -12518,14 +12636,14 @@
       </p:sp>
       <p:sp>
         <p:nvSpPr>
-          <p:cNvPr id="44" name="Shape 40"/>
+          <p:cNvPr id="46" name="Shape 42"/>
           <p:cNvSpPr/>
           <p:nvPr/>
         </p:nvSpPr>
         <p:spPr>
           <a:xfrm>
-            <a:off x="10043770" y="3861365"/>
-            <a:ext cx="4752137" cy="3341337"/>
+            <a:off x="10043770" y="4037225"/>
+            <a:ext cx="4752137" cy="3370647"/>
           </a:xfrm>
           <a:prstGeom prst="rect">
             <a:avLst/>
@@ -12543,13 +12661,13 @@
       </p:sp>
       <p:sp>
         <p:nvSpPr>
-          <p:cNvPr id="45" name="Text 41"/>
+          <p:cNvPr id="47" name="Text 43"/>
           <p:cNvSpPr txBox="1"/>
           <p:nvPr/>
         </p:nvSpPr>
         <p:spPr>
           <a:xfrm>
-            <a:off x="10158970" y="3976565"/>
+            <a:off x="10158970" y="4152425"/>
             <a:ext cx="4521737" cy="112268"/>
           </a:xfrm>
           <a:prstGeom prst="rect">
@@ -12585,13 +12703,13 @@
       </p:sp>
       <p:sp>
         <p:nvSpPr>
-          <p:cNvPr id="46" name="Shape 42"/>
+          <p:cNvPr id="48" name="Shape 44"/>
           <p:cNvSpPr/>
           <p:nvPr/>
         </p:nvSpPr>
         <p:spPr>
           <a:xfrm>
-            <a:off x="10158970" y="4181584"/>
+            <a:off x="10158970" y="4357443"/>
             <a:ext cx="50400" cy="50400"/>
           </a:xfrm>
           <a:prstGeom prst="rect">
@@ -12610,13 +12728,13 @@
       </p:sp>
       <p:sp>
         <p:nvSpPr>
-          <p:cNvPr id="47" name="Text 43"/>
+          <p:cNvPr id="49" name="Text 45"/>
           <p:cNvSpPr txBox="1"/>
           <p:nvPr/>
         </p:nvSpPr>
         <p:spPr>
           <a:xfrm>
-            <a:off x="10266970" y="4146433"/>
+            <a:off x="10266970" y="4322293"/>
             <a:ext cx="4413737" cy="256032"/>
           </a:xfrm>
           <a:prstGeom prst="rect">
@@ -12669,13 +12787,13 @@
       </p:sp>
       <p:sp>
         <p:nvSpPr>
-          <p:cNvPr id="48" name="Shape 44"/>
+          <p:cNvPr id="50" name="Shape 46"/>
           <p:cNvSpPr/>
           <p:nvPr/>
         </p:nvSpPr>
         <p:spPr>
           <a:xfrm>
-            <a:off x="10158970" y="4884847"/>
+            <a:off x="10158970" y="5068034"/>
             <a:ext cx="50400" cy="50400"/>
           </a:xfrm>
           <a:prstGeom prst="rect">
@@ -12694,13 +12812,13 @@
       </p:sp>
       <p:sp>
         <p:nvSpPr>
-          <p:cNvPr id="49" name="Text 45"/>
+          <p:cNvPr id="51" name="Text 47"/>
           <p:cNvSpPr txBox="1"/>
           <p:nvPr/>
         </p:nvSpPr>
         <p:spPr>
           <a:xfrm>
-            <a:off x="10266970" y="4849696"/>
+            <a:off x="10266970" y="5032884"/>
             <a:ext cx="4413737" cy="256032"/>
           </a:xfrm>
           <a:prstGeom prst="rect">
@@ -12753,13 +12871,13 @@
       </p:sp>
       <p:sp>
         <p:nvSpPr>
-          <p:cNvPr id="50" name="Shape 46"/>
+          <p:cNvPr id="52" name="Shape 48"/>
           <p:cNvSpPr/>
           <p:nvPr/>
         </p:nvSpPr>
         <p:spPr>
           <a:xfrm>
-            <a:off x="10158970" y="5588110"/>
+            <a:off x="10158970" y="5778625"/>
             <a:ext cx="50400" cy="50400"/>
           </a:xfrm>
           <a:prstGeom prst="rect">
@@ -12778,13 +12896,13 @@
       </p:sp>
       <p:sp>
         <p:nvSpPr>
-          <p:cNvPr id="51" name="Text 47"/>
+          <p:cNvPr id="53" name="Text 49"/>
           <p:cNvSpPr txBox="1"/>
           <p:nvPr/>
         </p:nvSpPr>
         <p:spPr>
           <a:xfrm>
-            <a:off x="10266970" y="5552960"/>
+            <a:off x="10266970" y="5743475"/>
             <a:ext cx="4413737" cy="256032"/>
           </a:xfrm>
           <a:prstGeom prst="rect">
@@ -12837,13 +12955,13 @@
       </p:sp>
       <p:sp>
         <p:nvSpPr>
-          <p:cNvPr id="52" name="Shape 48"/>
+          <p:cNvPr id="54" name="Shape 50"/>
           <p:cNvSpPr/>
           <p:nvPr/>
         </p:nvSpPr>
         <p:spPr>
           <a:xfrm>
-            <a:off x="10158970" y="6291374"/>
+            <a:off x="10158970" y="6489216"/>
             <a:ext cx="50400" cy="50400"/>
           </a:xfrm>
           <a:prstGeom prst="rect">
@@ -12862,13 +12980,13 @@
       </p:sp>
       <p:sp>
         <p:nvSpPr>
-          <p:cNvPr id="53" name="Text 49"/>
+          <p:cNvPr id="55" name="Text 51"/>
           <p:cNvSpPr txBox="1"/>
           <p:nvPr/>
         </p:nvSpPr>
         <p:spPr>
           <a:xfrm>
-            <a:off x="10266970" y="6256223"/>
+            <a:off x="10266970" y="6454065"/>
             <a:ext cx="4413737" cy="256032"/>
           </a:xfrm>
           <a:prstGeom prst="rect">
@@ -12921,13 +13039,13 @@
       </p:sp>
       <p:sp>
         <p:nvSpPr>
-          <p:cNvPr id="54" name="Shape 50"/>
+          <p:cNvPr id="56" name="Shape 52"/>
           <p:cNvSpPr/>
           <p:nvPr/>
         </p:nvSpPr>
         <p:spPr>
           <a:xfrm>
-            <a:off x="10158970" y="6994637"/>
+            <a:off x="10158970" y="7199807"/>
             <a:ext cx="50400" cy="50400"/>
           </a:xfrm>
           <a:prstGeom prst="rect">
@@ -12946,13 +13064,13 @@
       </p:sp>
       <p:sp>
         <p:nvSpPr>
-          <p:cNvPr id="55" name="Text 51"/>
+          <p:cNvPr id="57" name="Text 53"/>
           <p:cNvSpPr txBox="1"/>
           <p:nvPr/>
         </p:nvSpPr>
         <p:spPr>
           <a:xfrm>
-            <a:off x="10266970" y="6959486"/>
+            <a:off x="10266970" y="7164656"/>
             <a:ext cx="4413737" cy="128016"/>
           </a:xfrm>
           <a:prstGeom prst="rect">
@@ -13005,14 +13123,14 @@
       </p:sp>
       <p:sp>
         <p:nvSpPr>
-          <p:cNvPr id="56" name="Shape 52"/>
+          <p:cNvPr id="58" name="Shape 54"/>
           <p:cNvSpPr/>
           <p:nvPr/>
         </p:nvSpPr>
         <p:spPr>
           <a:xfrm>
-            <a:off x="323698" y="7310602"/>
-            <a:ext cx="7182155" cy="3165478"/>
+            <a:off x="323698" y="7515772"/>
+            <a:ext cx="7182155" cy="2960308"/>
           </a:xfrm>
           <a:prstGeom prst="rect">
             <a:avLst/>
@@ -13030,13 +13148,13 @@
       </p:sp>
       <p:sp>
         <p:nvSpPr>
-          <p:cNvPr id="57" name="Text 53"/>
+          <p:cNvPr id="59" name="Text 55"/>
           <p:cNvSpPr txBox="1"/>
           <p:nvPr/>
         </p:nvSpPr>
         <p:spPr>
           <a:xfrm>
-            <a:off x="438898" y="7425802"/>
+            <a:off x="438898" y="7630972"/>
             <a:ext cx="6951755" cy="112268"/>
           </a:xfrm>
           <a:prstGeom prst="rect">
@@ -13072,13 +13190,13 @@
       </p:sp>
       <p:sp>
         <p:nvSpPr>
-          <p:cNvPr id="58" name="Shape 54"/>
+          <p:cNvPr id="60" name="Shape 56"/>
           <p:cNvSpPr/>
           <p:nvPr/>
         </p:nvSpPr>
         <p:spPr>
           <a:xfrm>
-            <a:off x="438898" y="7632636"/>
+            <a:off x="438898" y="7837806"/>
             <a:ext cx="50400" cy="50400"/>
           </a:xfrm>
           <a:prstGeom prst="rect">
@@ -13097,13 +13215,13 @@
       </p:sp>
       <p:sp>
         <p:nvSpPr>
-          <p:cNvPr id="59" name="Text 55"/>
+          <p:cNvPr id="61" name="Text 57"/>
           <p:cNvSpPr txBox="1"/>
           <p:nvPr/>
         </p:nvSpPr>
         <p:spPr>
           <a:xfrm>
-            <a:off x="546898" y="7595670"/>
+            <a:off x="546898" y="7800840"/>
             <a:ext cx="6843755" cy="263296"/>
           </a:xfrm>
           <a:prstGeom prst="rect">
@@ -13156,13 +13274,13 @@
       </p:sp>
       <p:sp>
         <p:nvSpPr>
-          <p:cNvPr id="60" name="Shape 56"/>
+          <p:cNvPr id="62" name="Shape 58"/>
           <p:cNvSpPr/>
           <p:nvPr/>
         </p:nvSpPr>
         <p:spPr>
           <a:xfrm>
-            <a:off x="438898" y="8598255"/>
+            <a:off x="438898" y="8735035"/>
             <a:ext cx="50400" cy="50400"/>
           </a:xfrm>
           <a:prstGeom prst="rect">
@@ -13181,13 +13299,13 @@
       </p:sp>
       <p:sp>
         <p:nvSpPr>
-          <p:cNvPr id="61" name="Text 57"/>
+          <p:cNvPr id="63" name="Text 59"/>
           <p:cNvSpPr txBox="1"/>
           <p:nvPr/>
         </p:nvSpPr>
         <p:spPr>
           <a:xfrm>
-            <a:off x="546898" y="8561289"/>
+            <a:off x="546898" y="8698069"/>
             <a:ext cx="6843755" cy="131648"/>
           </a:xfrm>
           <a:prstGeom prst="rect">
@@ -13240,13 +13358,13 @@
       </p:sp>
       <p:sp>
         <p:nvSpPr>
-          <p:cNvPr id="62" name="Shape 58"/>
+          <p:cNvPr id="64" name="Shape 60"/>
           <p:cNvSpPr/>
           <p:nvPr/>
         </p:nvSpPr>
         <p:spPr>
           <a:xfrm>
-            <a:off x="438898" y="9432226"/>
+            <a:off x="438898" y="9500616"/>
             <a:ext cx="50400" cy="50400"/>
           </a:xfrm>
           <a:prstGeom prst="rect">
@@ -13265,13 +13383,13 @@
       </p:sp>
       <p:sp>
         <p:nvSpPr>
-          <p:cNvPr id="63" name="Text 59"/>
+          <p:cNvPr id="65" name="Text 61"/>
           <p:cNvSpPr txBox="1"/>
           <p:nvPr/>
         </p:nvSpPr>
         <p:spPr>
           <a:xfrm>
-            <a:off x="546898" y="9395260"/>
+            <a:off x="546898" y="9463650"/>
             <a:ext cx="6843755" cy="131648"/>
           </a:xfrm>
           <a:prstGeom prst="rect">
@@ -13324,13 +13442,13 @@
       </p:sp>
       <p:sp>
         <p:nvSpPr>
-          <p:cNvPr id="64" name="Shape 60"/>
+          <p:cNvPr id="66" name="Shape 62"/>
           <p:cNvSpPr/>
           <p:nvPr/>
         </p:nvSpPr>
         <p:spPr>
           <a:xfrm>
-            <a:off x="438898" y="10266198"/>
+            <a:off x="438898" y="10266197"/>
             <a:ext cx="50400" cy="50400"/>
           </a:xfrm>
           <a:prstGeom prst="rect">
@@ -13349,7 +13467,7 @@
       </p:sp>
       <p:sp>
         <p:nvSpPr>
-          <p:cNvPr id="65" name="Text 61"/>
+          <p:cNvPr id="67" name="Text 63"/>
           <p:cNvSpPr txBox="1"/>
           <p:nvPr/>
         </p:nvSpPr>
@@ -13408,14 +13526,14 @@
       </p:sp>
       <p:sp>
         <p:nvSpPr>
-          <p:cNvPr id="66" name="Shape 62"/>
+          <p:cNvPr id="68" name="Shape 64"/>
           <p:cNvSpPr/>
           <p:nvPr/>
         </p:nvSpPr>
         <p:spPr>
           <a:xfrm>
-            <a:off x="7613752" y="7310602"/>
-            <a:ext cx="7182155" cy="3165478"/>
+            <a:off x="7613752" y="7515772"/>
+            <a:ext cx="7182155" cy="2960308"/>
           </a:xfrm>
           <a:prstGeom prst="rect">
             <a:avLst/>
@@ -13433,115 +13551,14 @@
       </p:sp>
       <p:sp>
         <p:nvSpPr>
-          <p:cNvPr id="67" name="Text 63"/>
-          <p:cNvSpPr txBox="1"/>
-          <p:nvPr/>
-        </p:nvSpPr>
-        <p:spPr>
-          <a:xfrm>
-            <a:off x="7728952" y="7425802"/>
-            <a:ext cx="6951755" cy="112268"/>
-          </a:xfrm>
-          <a:prstGeom prst="rect">
-            <a:avLst/>
-          </a:prstGeom>
-          <a:noFill/>
-          <a:ln/>
-        </p:spPr>
-        <p:txBody>
-          <a:bodyPr wrap="square" lIns="0" tIns="0" rIns="0" bIns="0" rtlCol="0" anchor="t"/>
-          <a:lstStyle/>
-          <a:p>
-            <a:pPr indent="0" marL="0">
-              <a:lnSpc>
-                <a:spcPts val="884"/>
-              </a:lnSpc>
-              <a:buNone/>
-            </a:pPr>
-            <a:r>
-              <a:rPr lang="en-US" sz="680" b="1" spc="95" kern="0" dirty="0">
-                <a:solidFill>
-                  <a:srgbClr val="0066FF"/>
-                </a:solidFill>
-                <a:latin typeface="Poppins" pitchFamily="34" charset="0"/>
-                <a:ea typeface="Poppins" pitchFamily="34" charset="-122"/>
-                <a:cs typeface="Poppins" pitchFamily="34" charset="-120"/>
-              </a:rPr>
-              <a:t>VOICE, AND THE RULE THAT GOVERNS IT</a:t>
-            </a:r>
-            <a:endParaRPr lang="en-US" sz="680" dirty="0"/>
-          </a:p>
-        </p:txBody>
-      </p:sp>
-      <p:sp>
-        <p:nvSpPr>
-          <p:cNvPr id="68" name="Text 64"/>
-          <p:cNvSpPr txBox="1"/>
-          <p:nvPr/>
-        </p:nvSpPr>
-        <p:spPr>
-          <a:xfrm>
-            <a:off x="7728952" y="7595670"/>
-            <a:ext cx="6951755" cy="308610"/>
-          </a:xfrm>
-          <a:prstGeom prst="rect">
-            <a:avLst/>
-          </a:prstGeom>
-          <a:noFill/>
-          <a:ln/>
-        </p:spPr>
-        <p:txBody>
-          <a:bodyPr wrap="square" lIns="0" tIns="0" rIns="0" bIns="0" rtlCol="0" anchor="t"/>
-          <a:lstStyle/>
-          <a:p>
-            <a:pPr indent="0" marL="0">
-              <a:lnSpc>
-                <a:spcPts val="1215"/>
-              </a:lnSpc>
-              <a:buNone/>
-            </a:pPr>
-            <a:r>
-              <a:rPr lang="en-US" sz="810" b="1" dirty="0">
-                <a:solidFill>
-                  <a:srgbClr val="0E171F"/>
-                </a:solidFill>
-                <a:latin typeface="Poppins" pitchFamily="34" charset="0"/>
-                <a:ea typeface="Poppins" pitchFamily="34" charset="-122"/>
-                <a:cs typeface="Poppins" pitchFamily="34" charset="-120"/>
-              </a:rPr>
-              <a:t>Green leads, gold accents, never the reverse. </a:t>
-            </a:r>
-            <a:pPr indent="0" marL="0">
-              <a:lnSpc>
-                <a:spcPts val="1215"/>
-              </a:lnSpc>
-              <a:buNone/>
-            </a:pPr>
-            <a:r>
-              <a:rPr lang="en-US" sz="810" dirty="0">
-                <a:solidFill>
-                  <a:srgbClr val="4A5565"/>
-                </a:solidFill>
-                <a:latin typeface="Poppins" pitchFamily="34" charset="0"/>
-                <a:ea typeface="Poppins" pitchFamily="34" charset="-122"/>
-                <a:cs typeface="Poppins" pitchFamily="34" charset="-120"/>
-              </a:rPr>
-              <a:t>Bold condensed caps for headlines, a plain workhorse sans for reading. No scripts, no serifs.</a:t>
-            </a:r>
-            <a:endParaRPr lang="en-US" sz="810" dirty="0"/>
-          </a:p>
-        </p:txBody>
-      </p:sp>
-      <p:sp>
-        <p:nvSpPr>
           <p:cNvPr id="69" name="Text 65"/>
           <p:cNvSpPr txBox="1"/>
           <p:nvPr/>
         </p:nvSpPr>
         <p:spPr>
           <a:xfrm>
-            <a:off x="7728952" y="8069880"/>
-            <a:ext cx="6951755" cy="462915"/>
+            <a:off x="7728952" y="7630972"/>
+            <a:ext cx="6951755" cy="112268"/>
           </a:xfrm>
           <a:prstGeom prst="rect">
             <a:avLst/>
@@ -13555,39 +13572,22 @@
           <a:p>
             <a:pPr indent="0" marL="0">
               <a:lnSpc>
-                <a:spcPts val="1215"/>
-              </a:lnSpc>
-              <a:buNone/>
-            </a:pPr>
-            <a:r>
-              <a:rPr lang="en-US" sz="810" b="1" dirty="0">
-                <a:solidFill>
-                  <a:srgbClr val="0E171F"/>
-                </a:solidFill>
-                <a:latin typeface="Poppins" pitchFamily="34" charset="0"/>
-                <a:ea typeface="Poppins" pitchFamily="34" charset="-122"/>
-                <a:cs typeface="Poppins" pitchFamily="34" charset="-120"/>
-              </a:rPr>
-              <a:t>Two registers. </a:t>
-            </a:r>
-            <a:pPr indent="0" marL="0">
-              <a:lnSpc>
-                <a:spcPts val="1215"/>
-              </a:lnSpc>
-              <a:buNone/>
-            </a:pPr>
-            <a:r>
-              <a:rPr lang="en-US" sz="810" dirty="0">
-                <a:solidFill>
-                  <a:srgbClr val="4A5565"/>
-                </a:solidFill>
-                <a:latin typeface="Poppins" pitchFamily="34" charset="0"/>
-                <a:ea typeface="Poppins" pitchFamily="34" charset="-122"/>
-                <a:cs typeface="Poppins" pitchFamily="34" charset="-120"/>
-              </a:rPr>
-              <a:t>Cheeky for names and moments, at exactly the level the trading name sets. Plain and generous for money, service and responsibility. Never crude beyond the name's own wink, never beer-snob, never discount-shouty. Justin's own register, be the envy of your friends, cashed-up tradies, sets the ceiling for how far the cheek goes.</a:t>
-            </a:r>
-            <a:endParaRPr lang="en-US" sz="810" dirty="0"/>
+                <a:spcPts val="884"/>
+              </a:lnSpc>
+              <a:buNone/>
+            </a:pPr>
+            <a:r>
+              <a:rPr lang="en-US" sz="680" b="1" spc="95" kern="0" dirty="0">
+                <a:solidFill>
+                  <a:srgbClr val="0066FF"/>
+                </a:solidFill>
+                <a:latin typeface="Poppins" pitchFamily="34" charset="0"/>
+                <a:ea typeface="Poppins" pitchFamily="34" charset="-122"/>
+                <a:cs typeface="Poppins" pitchFamily="34" charset="-120"/>
+              </a:rPr>
+              <a:t>VOICE, AND THE RULE THAT GOVERNS IT</a:t>
+            </a:r>
+            <a:endParaRPr lang="en-US" sz="680" dirty="0"/>
           </a:p>
         </p:txBody>
       </p:sp>
@@ -13599,7 +13599,7 @@
         </p:nvSpPr>
         <p:spPr>
           <a:xfrm>
-            <a:off x="7728952" y="8698395"/>
+            <a:off x="7728952" y="7800840"/>
             <a:ext cx="6951755" cy="308610"/>
           </a:xfrm>
           <a:prstGeom prst="rect">
@@ -13627,6 +13627,124 @@
                 <a:ea typeface="Poppins" pitchFamily="34" charset="-122"/>
                 <a:cs typeface="Poppins" pitchFamily="34" charset="-120"/>
               </a:rPr>
+              <a:t>Green leads, gold accents, never the reverse. </a:t>
+            </a:r>
+            <a:pPr indent="0" marL="0">
+              <a:lnSpc>
+                <a:spcPts val="1215"/>
+              </a:lnSpc>
+              <a:buNone/>
+            </a:pPr>
+            <a:r>
+              <a:rPr lang="en-US" sz="810" dirty="0">
+                <a:solidFill>
+                  <a:srgbClr val="4A5565"/>
+                </a:solidFill>
+                <a:latin typeface="Poppins" pitchFamily="34" charset="0"/>
+                <a:ea typeface="Poppins" pitchFamily="34" charset="-122"/>
+                <a:cs typeface="Poppins" pitchFamily="34" charset="-120"/>
+              </a:rPr>
+              <a:t>Bold condensed caps for headlines, a plain workhorse sans for reading. No scripts, no serifs.</a:t>
+            </a:r>
+            <a:endParaRPr lang="en-US" sz="810" dirty="0"/>
+          </a:p>
+        </p:txBody>
+      </p:sp>
+      <p:sp>
+        <p:nvSpPr>
+          <p:cNvPr id="71" name="Text 67"/>
+          <p:cNvSpPr txBox="1"/>
+          <p:nvPr/>
+        </p:nvSpPr>
+        <p:spPr>
+          <a:xfrm>
+            <a:off x="7728952" y="8275050"/>
+            <a:ext cx="6951755" cy="462915"/>
+          </a:xfrm>
+          <a:prstGeom prst="rect">
+            <a:avLst/>
+          </a:prstGeom>
+          <a:noFill/>
+          <a:ln/>
+        </p:spPr>
+        <p:txBody>
+          <a:bodyPr wrap="square" lIns="0" tIns="0" rIns="0" bIns="0" rtlCol="0" anchor="t"/>
+          <a:lstStyle/>
+          <a:p>
+            <a:pPr indent="0" marL="0">
+              <a:lnSpc>
+                <a:spcPts val="1215"/>
+              </a:lnSpc>
+              <a:buNone/>
+            </a:pPr>
+            <a:r>
+              <a:rPr lang="en-US" sz="810" b="1" dirty="0">
+                <a:solidFill>
+                  <a:srgbClr val="0E171F"/>
+                </a:solidFill>
+                <a:latin typeface="Poppins" pitchFamily="34" charset="0"/>
+                <a:ea typeface="Poppins" pitchFamily="34" charset="-122"/>
+                <a:cs typeface="Poppins" pitchFamily="34" charset="-120"/>
+              </a:rPr>
+              <a:t>Two registers. </a:t>
+            </a:r>
+            <a:pPr indent="0" marL="0">
+              <a:lnSpc>
+                <a:spcPts val="1215"/>
+              </a:lnSpc>
+              <a:buNone/>
+            </a:pPr>
+            <a:r>
+              <a:rPr lang="en-US" sz="810" dirty="0">
+                <a:solidFill>
+                  <a:srgbClr val="4A5565"/>
+                </a:solidFill>
+                <a:latin typeface="Poppins" pitchFamily="34" charset="0"/>
+                <a:ea typeface="Poppins" pitchFamily="34" charset="-122"/>
+                <a:cs typeface="Poppins" pitchFamily="34" charset="-120"/>
+              </a:rPr>
+              <a:t>Cheeky for names and moments, at exactly the level the trading name sets. Plain and generous for money, service and responsibility. Never crude beyond the name's own wink, never beer-snob, never discount-shouty. Justin's own register, be the envy of your friends, cashed-up tradies, sets the ceiling for how far the cheek goes.</a:t>
+            </a:r>
+            <a:endParaRPr lang="en-US" sz="810" dirty="0"/>
+          </a:p>
+        </p:txBody>
+      </p:sp>
+      <p:sp>
+        <p:nvSpPr>
+          <p:cNvPr id="72" name="Text 68"/>
+          <p:cNvSpPr txBox="1"/>
+          <p:nvPr/>
+        </p:nvSpPr>
+        <p:spPr>
+          <a:xfrm>
+            <a:off x="7728952" y="8903565"/>
+            <a:ext cx="6951755" cy="308610"/>
+          </a:xfrm>
+          <a:prstGeom prst="rect">
+            <a:avLst/>
+          </a:prstGeom>
+          <a:noFill/>
+          <a:ln/>
+        </p:spPr>
+        <p:txBody>
+          <a:bodyPr wrap="square" lIns="0" tIns="0" rIns="0" bIns="0" rtlCol="0" anchor="t"/>
+          <a:lstStyle/>
+          <a:p>
+            <a:pPr indent="0" marL="0">
+              <a:lnSpc>
+                <a:spcPts val="1215"/>
+              </a:lnSpc>
+              <a:buNone/>
+            </a:pPr>
+            <a:r>
+              <a:rPr lang="en-US" sz="810" b="1" dirty="0">
+                <a:solidFill>
+                  <a:srgbClr val="0E171F"/>
+                </a:solidFill>
+                <a:latin typeface="Poppins" pitchFamily="34" charset="0"/>
+                <a:ea typeface="Poppins" pitchFamily="34" charset="-122"/>
+                <a:cs typeface="Poppins" pitchFamily="34" charset="-120"/>
+              </a:rPr>
               <a:t>Photography: </a:t>
             </a:r>
             <a:pPr indent="0" marL="0">
@@ -13652,7 +13770,7 @@
       </p:sp>
       <p:sp>
         <p:nvSpPr>
-          <p:cNvPr id="71" name="Shape 67"/>
+          <p:cNvPr id="73" name="Shape 69"/>
           <p:cNvSpPr/>
           <p:nvPr/>
         </p:nvSpPr>
@@ -13675,7 +13793,7 @@
       </p:sp>
       <p:sp>
         <p:nvSpPr>
-          <p:cNvPr id="72" name="Text 68"/>
+          <p:cNvPr id="74" name="Text 70"/>
           <p:cNvSpPr txBox="1"/>
           <p:nvPr/>
         </p:nvSpPr>
@@ -14064,7 +14182,7 @@
         <p:spPr>
           <a:xfrm>
             <a:off x="323698" y="1115568"/>
-            <a:ext cx="14472209" cy="2743414"/>
+            <a:ext cx="14472209" cy="2400487"/>
           </a:xfrm>
           <a:prstGeom prst="rect">
             <a:avLst/>
@@ -14198,7 +14316,7 @@
         <p:spPr>
           <a:xfrm>
             <a:off x="438898" y="1761511"/>
-            <a:ext cx="2762042" cy="1739856"/>
+            <a:ext cx="2762042" cy="1396929"/>
           </a:xfrm>
           <a:prstGeom prst="rect">
             <a:avLst/>
@@ -14391,7 +14509,7 @@
         <p:spPr>
           <a:xfrm>
             <a:off x="3308839" y="1761511"/>
-            <a:ext cx="2762042" cy="1739856"/>
+            <a:ext cx="2762042" cy="1396929"/>
           </a:xfrm>
           <a:prstGeom prst="rect">
             <a:avLst/>
@@ -14584,7 +14702,7 @@
         <p:spPr>
           <a:xfrm>
             <a:off x="6178781" y="1761511"/>
-            <a:ext cx="2762042" cy="1739856"/>
+            <a:ext cx="2762042" cy="1396929"/>
           </a:xfrm>
           <a:prstGeom prst="rect">
             <a:avLst/>
@@ -14777,7 +14895,7 @@
         <p:spPr>
           <a:xfrm>
             <a:off x="9048722" y="1761511"/>
-            <a:ext cx="2762042" cy="1739856"/>
+            <a:ext cx="2762042" cy="1396929"/>
           </a:xfrm>
           <a:prstGeom prst="rect">
             <a:avLst/>
@@ -14970,7 +15088,7 @@
         <p:spPr>
           <a:xfrm>
             <a:off x="11918664" y="1761511"/>
-            <a:ext cx="2762042" cy="1739856"/>
+            <a:ext cx="2762042" cy="1396929"/>
           </a:xfrm>
           <a:prstGeom prst="rect">
             <a:avLst/>
@@ -15162,7 +15280,7 @@
         </p:nvSpPr>
         <p:spPr>
           <a:xfrm>
-            <a:off x="438898" y="3566167"/>
+            <a:off x="438898" y="3223240"/>
             <a:ext cx="14241809" cy="0"/>
           </a:xfrm>
           <a:prstGeom prst="line">
@@ -15185,7 +15303,7 @@
         </p:nvSpPr>
         <p:spPr>
           <a:xfrm>
-            <a:off x="438898" y="3623767"/>
+            <a:off x="438898" y="3280840"/>
             <a:ext cx="14241809" cy="120015"/>
           </a:xfrm>
           <a:prstGeom prst="rect">
@@ -15227,8 +15345,8 @@
         </p:nvSpPr>
         <p:spPr>
           <a:xfrm>
-            <a:off x="323698" y="3966881"/>
-            <a:ext cx="7182155" cy="3429267"/>
+            <a:off x="323698" y="3623954"/>
+            <a:ext cx="5967146" cy="3800771"/>
           </a:xfrm>
           <a:prstGeom prst="rect">
             <a:avLst/>
@@ -15252,8 +15370,8 @@
         </p:nvSpPr>
         <p:spPr>
           <a:xfrm>
-            <a:off x="438898" y="4082081"/>
-            <a:ext cx="6951755" cy="112268"/>
+            <a:off x="438898" y="3739154"/>
+            <a:ext cx="5736746" cy="112268"/>
           </a:xfrm>
           <a:prstGeom prst="rect">
             <a:avLst/>
@@ -15301,7 +15419,7 @@
           </p:nvPr>
         </p:nvGraphicFramePr>
         <p:xfrm>
-          <a:off x="438898" y="4251949"/>
+          <a:off x="438898" y="3909022"/>
           <a:ext cx="11339703" cy="914400"/>
         </p:xfrm>
         <a:graphic>
@@ -15309,10 +15427,10 @@
             <a:tbl>
               <a:tblPr/>
               <a:tblGrid>
-                <a:gridCol w="3475877"/>
-                <a:gridCol w="3475877"/>
+                <a:gridCol w="2868373"/>
+                <a:gridCol w="2868373"/>
               </a:tblGrid>
-              <a:tr h="332616">
+              <a:tr h="335010">
                 <a:tc>
                   <a:txBody>
                     <a:bodyPr/>
@@ -15420,7 +15538,7 @@
                   </a:tcPr>
                 </a:tc>
               </a:tr>
-              <a:tr h="351641">
+              <a:tr h="354035">
                 <a:tc>
                   <a:txBody>
                     <a:bodyPr/>
@@ -15528,7 +15646,7 @@
                   </a:tcPr>
                 </a:tc>
               </a:tr>
-              <a:tr h="469090">
+              <a:tr h="588934">
                 <a:tc>
                   <a:txBody>
                     <a:bodyPr/>
@@ -15660,7 +15778,7 @@
                   </a:tcPr>
                 </a:tc>
               </a:tr>
-              <a:tr h="469090">
+              <a:tr h="471485">
                 <a:tc>
                   <a:txBody>
                     <a:bodyPr/>
@@ -15792,7 +15910,7 @@
                   </a:tcPr>
                 </a:tc>
               </a:tr>
-              <a:tr h="351641">
+              <a:tr h="471485">
                 <a:tc>
                   <a:txBody>
                     <a:bodyPr/>
@@ -15900,7 +16018,7 @@
                   </a:tcPr>
                 </a:tc>
               </a:tr>
-              <a:tr h="351641">
+              <a:tr h="354035">
                 <a:tc>
                   <a:txBody>
                     <a:bodyPr/>
@@ -16008,7 +16126,7 @@
                   </a:tcPr>
                 </a:tc>
               </a:tr>
-              <a:tr h="351641">
+              <a:tr h="471485">
                 <a:tc>
                   <a:txBody>
                     <a:bodyPr/>
@@ -16116,7 +16234,7 @@
                   </a:tcPr>
                 </a:tc>
               </a:tr>
-              <a:tr h="351641">
+              <a:tr h="354035">
                 <a:tc>
                   <a:txBody>
                     <a:bodyPr/>
@@ -16236,8 +16354,8 @@
         </p:nvSpPr>
         <p:spPr>
           <a:xfrm>
-            <a:off x="7613752" y="3966881"/>
-            <a:ext cx="7182155" cy="3429267"/>
+            <a:off x="6398743" y="3623954"/>
+            <a:ext cx="8397164" cy="3800771"/>
           </a:xfrm>
           <a:prstGeom prst="rect">
             <a:avLst/>
@@ -16261,8 +16379,8 @@
         </p:nvSpPr>
         <p:spPr>
           <a:xfrm>
-            <a:off x="7728952" y="4082081"/>
-            <a:ext cx="6951755" cy="112268"/>
+            <a:off x="6513943" y="3739154"/>
+            <a:ext cx="8166764" cy="112268"/>
           </a:xfrm>
           <a:prstGeom prst="rect">
             <a:avLst/>
@@ -16303,8 +16421,8 @@
         </p:nvSpPr>
         <p:spPr>
           <a:xfrm>
-            <a:off x="7728952" y="4251949"/>
-            <a:ext cx="6951755" cy="150724"/>
+            <a:off x="6513943" y="3909022"/>
+            <a:ext cx="8166764" cy="150724"/>
           </a:xfrm>
           <a:prstGeom prst="rect">
             <a:avLst/>
@@ -16345,8 +16463,8 @@
         </p:nvSpPr>
         <p:spPr>
           <a:xfrm>
-            <a:off x="7728952" y="4485456"/>
-            <a:ext cx="6951755" cy="462915"/>
+            <a:off x="6513943" y="4142212"/>
+            <a:ext cx="8166764" cy="308610"/>
           </a:xfrm>
           <a:prstGeom prst="rect">
             <a:avLst/>
@@ -16387,8 +16505,8 @@
         </p:nvSpPr>
         <p:spPr>
           <a:xfrm>
-            <a:off x="7728952" y="5031155"/>
-            <a:ext cx="6951755" cy="150724"/>
+            <a:off x="6513943" y="4533288"/>
+            <a:ext cx="8166764" cy="150724"/>
           </a:xfrm>
           <a:prstGeom prst="rect">
             <a:avLst/>
@@ -16429,8 +16547,8 @@
         </p:nvSpPr>
         <p:spPr>
           <a:xfrm>
-            <a:off x="7728952" y="5264662"/>
-            <a:ext cx="6951755" cy="308610"/>
+            <a:off x="6513943" y="4766478"/>
+            <a:ext cx="8166764" cy="154305"/>
           </a:xfrm>
           <a:prstGeom prst="rect">
             <a:avLst/>
@@ -16471,8 +16589,8 @@
         </p:nvSpPr>
         <p:spPr>
           <a:xfrm>
-            <a:off x="7728952" y="5656056"/>
-            <a:ext cx="6951755" cy="150724"/>
+            <a:off x="6513943" y="5003250"/>
+            <a:ext cx="8166764" cy="150724"/>
           </a:xfrm>
           <a:prstGeom prst="rect">
             <a:avLst/>
@@ -16513,8 +16631,8 @@
         </p:nvSpPr>
         <p:spPr>
           <a:xfrm>
-            <a:off x="7728952" y="5889563"/>
-            <a:ext cx="6951755" cy="308610"/>
+            <a:off x="6513943" y="5236439"/>
+            <a:ext cx="8166764" cy="308610"/>
           </a:xfrm>
           <a:prstGeom prst="rect">
             <a:avLst/>
@@ -16589,8 +16707,8 @@
         </p:nvSpPr>
         <p:spPr>
           <a:xfrm>
-            <a:off x="7728952" y="6280956"/>
-            <a:ext cx="6951755" cy="150724"/>
+            <a:off x="6513943" y="5627516"/>
+            <a:ext cx="8166764" cy="150724"/>
           </a:xfrm>
           <a:prstGeom prst="rect">
             <a:avLst/>
@@ -16631,8 +16749,8 @@
         </p:nvSpPr>
         <p:spPr>
           <a:xfrm>
-            <a:off x="7728952" y="6514464"/>
-            <a:ext cx="6951755" cy="308610"/>
+            <a:off x="6513943" y="5860706"/>
+            <a:ext cx="8166764" cy="308610"/>
           </a:xfrm>
           <a:prstGeom prst="rect">
             <a:avLst/>
@@ -16667,14 +16785,115 @@
       </p:sp>
       <p:sp>
         <p:nvSpPr>
-          <p:cNvPr id="56" name="Shape 51"/>
+          <p:cNvPr id="56" name="Text 51"/>
+          <p:cNvSpPr txBox="1"/>
+          <p:nvPr/>
+        </p:nvSpPr>
+        <p:spPr>
+          <a:xfrm>
+            <a:off x="6513943" y="6251782"/>
+            <a:ext cx="8166764" cy="150724"/>
+          </a:xfrm>
+          <a:prstGeom prst="rect">
+            <a:avLst/>
+          </a:prstGeom>
+          <a:noFill/>
+          <a:ln/>
+        </p:spPr>
+        <p:txBody>
+          <a:bodyPr wrap="square" lIns="0" tIns="0" rIns="0" bIns="0" rtlCol="0" anchor="t"/>
+          <a:lstStyle/>
+          <a:p>
+            <a:pPr indent="0" marL="0">
+              <a:lnSpc>
+                <a:spcPts val="1187"/>
+              </a:lnSpc>
+              <a:buNone/>
+            </a:pPr>
+            <a:r>
+              <a:rPr lang="en-US" sz="860" b="1" dirty="0">
+                <a:solidFill>
+                  <a:srgbClr val="0E171F"/>
+                </a:solidFill>
+                <a:latin typeface="Poppins" pitchFamily="34" charset="0"/>
+                <a:ea typeface="Poppins" pitchFamily="34" charset="-122"/>
+                <a:cs typeface="Poppins" pitchFamily="34" charset="-120"/>
+              </a:rPr>
+              <a:t>05 · Put the referral where the decision happens.</a:t>
+            </a:r>
+            <a:endParaRPr lang="en-US" sz="860" dirty="0"/>
+          </a:p>
+        </p:txBody>
+      </p:sp>
+      <p:sp>
+        <p:nvSpPr>
+          <p:cNvPr id="57" name="Text 52"/>
+          <p:cNvSpPr txBox="1"/>
+          <p:nvPr/>
+        </p:nvSpPr>
+        <p:spPr>
+          <a:xfrm>
+            <a:off x="6513943" y="6484972"/>
+            <a:ext cx="8166764" cy="308610"/>
+          </a:xfrm>
+          <a:prstGeom prst="rect">
+            <a:avLst/>
+          </a:prstGeom>
+          <a:noFill/>
+          <a:ln/>
+        </p:spPr>
+        <p:txBody>
+          <a:bodyPr wrap="square" lIns="0" tIns="0" rIns="0" bIns="0" rtlCol="0" anchor="t"/>
+          <a:lstStyle/>
+          <a:p>
+            <a:pPr indent="0" marL="0">
+              <a:lnSpc>
+                <a:spcPts val="1215"/>
+              </a:lnSpc>
+              <a:buNone/>
+            </a:pPr>
+            <a:r>
+              <a:rPr lang="en-US" sz="810" dirty="0">
+                <a:solidFill>
+                  <a:srgbClr val="4A5565"/>
+                </a:solidFill>
+                <a:latin typeface="Poppins" pitchFamily="34" charset="0"/>
+                <a:ea typeface="Poppins" pitchFamily="34" charset="-122"/>
+                <a:cs typeface="Poppins" pitchFamily="34" charset="-120"/>
+              </a:rPr>
+              <a:t>Plumbers and kitchen installers are in the room when a system gets specified: a card or QR each, and a kickback on every referral that converts. Alongside it, host a tasting, an owner pours for about twenty friends and earns on anything sold. </a:t>
+            </a:r>
+            <a:pPr indent="0" marL="0">
+              <a:lnSpc>
+                <a:spcPts val="1215"/>
+              </a:lnSpc>
+              <a:buNone/>
+            </a:pPr>
+            <a:r>
+              <a:rPr lang="en-US" sz="810" b="1" dirty="0">
+                <a:solidFill>
+                  <a:srgbClr val="0E171F"/>
+                </a:solidFill>
+                <a:latin typeface="Poppins" pitchFamily="34" charset="0"/>
+                <a:ea typeface="Poppins" pitchFamily="34" charset="-122"/>
+                <a:cs typeface="Poppins" pitchFamily="34" charset="-120"/>
+              </a:rPr>
+              <a:t>Recommendations, not yet in Justin’s plan.</a:t>
+            </a:r>
+            <a:endParaRPr lang="en-US" sz="810" dirty="0"/>
+          </a:p>
+        </p:txBody>
+      </p:sp>
+      <p:sp>
+        <p:nvSpPr>
+          <p:cNvPr id="58" name="Shape 53"/>
           <p:cNvSpPr/>
           <p:nvPr/>
         </p:nvSpPr>
         <p:spPr>
           <a:xfrm>
-            <a:off x="7728952" y="7103333"/>
-            <a:ext cx="6951755" cy="0"/>
+            <a:off x="6513943" y="7131911"/>
+            <a:ext cx="8166764" cy="0"/>
           </a:xfrm>
           <a:prstGeom prst="line">
             <a:avLst/>
@@ -16690,14 +16909,14 @@
       </p:sp>
       <p:sp>
         <p:nvSpPr>
-          <p:cNvPr id="57" name="Text 52"/>
+          <p:cNvPr id="59" name="Text 54"/>
           <p:cNvSpPr txBox="1"/>
           <p:nvPr/>
         </p:nvSpPr>
         <p:spPr>
           <a:xfrm>
-            <a:off x="7728952" y="7160933"/>
-            <a:ext cx="6951755" cy="120015"/>
+            <a:off x="6513943" y="7189511"/>
+            <a:ext cx="8166764" cy="120015"/>
           </a:xfrm>
           <a:prstGeom prst="rect">
             <a:avLst/>
@@ -16732,14 +16951,14 @@
       </p:sp>
       <p:sp>
         <p:nvSpPr>
-          <p:cNvPr id="58" name="Shape 53"/>
+          <p:cNvPr id="60" name="Shape 55"/>
           <p:cNvSpPr/>
           <p:nvPr/>
         </p:nvSpPr>
         <p:spPr>
           <a:xfrm>
-            <a:off x="323698" y="7504048"/>
-            <a:ext cx="4752137" cy="2972032"/>
+            <a:off x="323698" y="7532625"/>
+            <a:ext cx="4752137" cy="2943454"/>
           </a:xfrm>
           <a:prstGeom prst="rect">
             <a:avLst/>
@@ -16757,98 +16976,14 @@
       </p:sp>
       <p:sp>
         <p:nvSpPr>
-          <p:cNvPr id="59" name="Text 54"/>
-          <p:cNvSpPr txBox="1"/>
-          <p:nvPr/>
-        </p:nvSpPr>
-        <p:spPr>
-          <a:xfrm>
-            <a:off x="438898" y="7619248"/>
-            <a:ext cx="4521737" cy="112268"/>
-          </a:xfrm>
-          <a:prstGeom prst="rect">
-            <a:avLst/>
-          </a:prstGeom>
-          <a:noFill/>
-          <a:ln/>
-        </p:spPr>
-        <p:txBody>
-          <a:bodyPr wrap="square" lIns="0" tIns="0" rIns="0" bIns="0" rtlCol="0" anchor="t"/>
-          <a:lstStyle/>
-          <a:p>
-            <a:pPr indent="0" marL="0">
-              <a:lnSpc>
-                <a:spcPts val="884"/>
-              </a:lnSpc>
-              <a:buNone/>
-            </a:pPr>
-            <a:r>
-              <a:rPr lang="en-US" sz="680" b="1" spc="95" kern="0" dirty="0">
-                <a:solidFill>
-                  <a:srgbClr val="0066FF"/>
-                </a:solidFill>
-                <a:latin typeface="Poppins" pitchFamily="34" charset="0"/>
-                <a:ea typeface="Poppins" pitchFamily="34" charset="-122"/>
-                <a:cs typeface="Poppins" pitchFamily="34" charset="-120"/>
-              </a:rPr>
-              <a:t>WHOLESALE AS A FUNCTION</a:t>
-            </a:r>
-            <a:endParaRPr lang="en-US" sz="680" dirty="0"/>
-          </a:p>
-        </p:txBody>
-      </p:sp>
-      <p:sp>
-        <p:nvSpPr>
-          <p:cNvPr id="60" name="Text 55"/>
-          <p:cNvSpPr txBox="1"/>
-          <p:nvPr/>
-        </p:nvSpPr>
-        <p:spPr>
-          <a:xfrm>
-            <a:off x="438898" y="7789116"/>
-            <a:ext cx="4521737" cy="462915"/>
-          </a:xfrm>
-          <a:prstGeom prst="rect">
-            <a:avLst/>
-          </a:prstGeom>
-          <a:noFill/>
-          <a:ln/>
-        </p:spPr>
-        <p:txBody>
-          <a:bodyPr wrap="square" lIns="0" tIns="0" rIns="0" bIns="0" rtlCol="0" anchor="t"/>
-          <a:lstStyle/>
-          <a:p>
-            <a:pPr indent="0" marL="0">
-              <a:lnSpc>
-                <a:spcPts val="1215"/>
-              </a:lnSpc>
-              <a:buNone/>
-            </a:pPr>
-            <a:r>
-              <a:rPr lang="en-US" sz="810" dirty="0">
-                <a:solidFill>
-                  <a:srgbClr val="4A5565"/>
-                </a:solidFill>
-                <a:latin typeface="Poppins" pitchFamily="34" charset="0"/>
-                <a:ea typeface="Poppins" pitchFamily="34" charset="-122"/>
-                <a:cs typeface="Poppins" pitchFamily="34" charset="-120"/>
-              </a:rPr>
-              <a:t>Bars have approached Tap That and it still has not converted. That is not a demand problem, it is the absence of follow-up and sales experience. Justin's priority five, with a 3-month item: outreach to event venues and niched venues.</a:t>
-            </a:r>
-            <a:endParaRPr lang="en-US" sz="810" dirty="0"/>
-          </a:p>
-        </p:txBody>
-      </p:sp>
-      <p:sp>
-        <p:nvSpPr>
           <p:cNvPr id="61" name="Text 56"/>
           <p:cNvSpPr txBox="1"/>
           <p:nvPr/>
         </p:nvSpPr>
         <p:spPr>
           <a:xfrm>
-            <a:off x="438898" y="8332218"/>
-            <a:ext cx="4521737" cy="771525"/>
+            <a:off x="438898" y="7647825"/>
+            <a:ext cx="4521737" cy="112268"/>
           </a:xfrm>
           <a:prstGeom prst="rect">
             <a:avLst/>
@@ -16862,39 +16997,22 @@
           <a:p>
             <a:pPr indent="0" marL="0">
               <a:lnSpc>
-                <a:spcPts val="1215"/>
-              </a:lnSpc>
-              <a:buNone/>
-            </a:pPr>
-            <a:r>
-              <a:rPr lang="en-US" sz="810" b="1" dirty="0">
-                <a:solidFill>
-                  <a:srgbClr val="0E171F"/>
-                </a:solidFill>
-                <a:latin typeface="Poppins" pitchFamily="34" charset="0"/>
-                <a:ea typeface="Poppins" pitchFamily="34" charset="-122"/>
-                <a:cs typeface="Poppins" pitchFamily="34" charset="-120"/>
-              </a:rPr>
-              <a:t>Stand it up properly: </a:t>
-            </a:r>
-            <a:pPr indent="0" marL="0">
-              <a:lnSpc>
-                <a:spcPts val="1215"/>
-              </a:lnSpc>
-              <a:buNone/>
-            </a:pPr>
-            <a:r>
-              <a:rPr lang="en-US" sz="810" dirty="0">
-                <a:solidFill>
-                  <a:srgbClr val="4A5565"/>
-                </a:solidFill>
-                <a:latin typeface="Poppins" pitchFamily="34" charset="0"/>
-                <a:ea typeface="Poppins" pitchFamily="34" charset="-122"/>
-                <a:cs typeface="Poppins" pitchFamily="34" charset="-120"/>
-              </a:rPr>
-              <a:t>a full-timer or a commissioned agent, targets and KPIs, a pipeline in the CRM rather than in someone's head. The room put it at about twelve touch points before a venue buys beer, and Tap That has the first one and almost none of the eleven after it. The next hire is undecided between a brewer and wholesale plus bar coverage, hybrid either way.</a:t>
-            </a:r>
-            <a:endParaRPr lang="en-US" sz="810" dirty="0"/>
+                <a:spcPts val="884"/>
+              </a:lnSpc>
+              <a:buNone/>
+            </a:pPr>
+            <a:r>
+              <a:rPr lang="en-US" sz="680" b="1" spc="95" kern="0" dirty="0">
+                <a:solidFill>
+                  <a:srgbClr val="0066FF"/>
+                </a:solidFill>
+                <a:latin typeface="Poppins" pitchFamily="34" charset="0"/>
+                <a:ea typeface="Poppins" pitchFamily="34" charset="-122"/>
+                <a:cs typeface="Poppins" pitchFamily="34" charset="-120"/>
+              </a:rPr>
+              <a:t>WHOLESALE AS A FUNCTION</a:t>
+            </a:r>
+            <a:endParaRPr lang="en-US" sz="680" dirty="0"/>
           </a:p>
         </p:txBody>
       </p:sp>
@@ -16906,7 +17024,7 @@
         </p:nvSpPr>
         <p:spPr>
           <a:xfrm>
-            <a:off x="438898" y="9183931"/>
+            <a:off x="438898" y="7817693"/>
             <a:ext cx="4521737" cy="462915"/>
           </a:xfrm>
           <a:prstGeom prst="rect">
@@ -16926,23 +17044,6 @@
               <a:buNone/>
             </a:pPr>
             <a:r>
-              <a:rPr lang="en-US" sz="810" b="1" dirty="0">
-                <a:solidFill>
-                  <a:srgbClr val="0E171F"/>
-                </a:solidFill>
-                <a:latin typeface="Poppins" pitchFamily="34" charset="0"/>
-                <a:ea typeface="Poppins" pitchFamily="34" charset="-122"/>
-                <a:cs typeface="Poppins" pitchFamily="34" charset="-120"/>
-              </a:rPr>
-              <a:t>Then go after the shape of it: </a:t>
-            </a:r>
-            <a:pPr indent="0" marL="0">
-              <a:lnSpc>
-                <a:spcPts val="1215"/>
-              </a:lnSpc>
-              <a:buNone/>
-            </a:pPr>
-            <a:r>
               <a:rPr lang="en-US" sz="810" dirty="0">
                 <a:solidFill>
                   <a:srgbClr val="4A5565"/>
@@ -16951,7 +17052,7 @@
                 <a:ea typeface="Poppins" pitchFamily="34" charset="-122"/>
                 <a:cs typeface="Poppins" pitchFamily="34" charset="-120"/>
               </a:rPr>
-              <a:t>custom systems for sporting clubs, club-branded kegs, minimum guarantees per season, and moving rigs from footy to cricket so they earn year-round.</a:t>
+              <a:t>Bars have approached Tap That and it still has not converted. That is not a demand problem, it is the absence of follow-up and sales experience. Justin's priority five, with a 3-month item: outreach to event venues and niched venues.</a:t>
             </a:r>
             <a:endParaRPr lang="en-US" sz="810" dirty="0"/>
           </a:p>
@@ -16965,7 +17066,125 @@
         </p:nvSpPr>
         <p:spPr>
           <a:xfrm>
-            <a:off x="438898" y="9727033"/>
+            <a:off x="438898" y="8356509"/>
+            <a:ext cx="4521737" cy="771525"/>
+          </a:xfrm>
+          <a:prstGeom prst="rect">
+            <a:avLst/>
+          </a:prstGeom>
+          <a:noFill/>
+          <a:ln/>
+        </p:spPr>
+        <p:txBody>
+          <a:bodyPr wrap="square" lIns="0" tIns="0" rIns="0" bIns="0" rtlCol="0" anchor="t"/>
+          <a:lstStyle/>
+          <a:p>
+            <a:pPr indent="0" marL="0">
+              <a:lnSpc>
+                <a:spcPts val="1215"/>
+              </a:lnSpc>
+              <a:buNone/>
+            </a:pPr>
+            <a:r>
+              <a:rPr lang="en-US" sz="810" b="1" dirty="0">
+                <a:solidFill>
+                  <a:srgbClr val="0E171F"/>
+                </a:solidFill>
+                <a:latin typeface="Poppins" pitchFamily="34" charset="0"/>
+                <a:ea typeface="Poppins" pitchFamily="34" charset="-122"/>
+                <a:cs typeface="Poppins" pitchFamily="34" charset="-120"/>
+              </a:rPr>
+              <a:t>Stand it up properly: </a:t>
+            </a:r>
+            <a:pPr indent="0" marL="0">
+              <a:lnSpc>
+                <a:spcPts val="1215"/>
+              </a:lnSpc>
+              <a:buNone/>
+            </a:pPr>
+            <a:r>
+              <a:rPr lang="en-US" sz="810" dirty="0">
+                <a:solidFill>
+                  <a:srgbClr val="4A5565"/>
+                </a:solidFill>
+                <a:latin typeface="Poppins" pitchFamily="34" charset="0"/>
+                <a:ea typeface="Poppins" pitchFamily="34" charset="-122"/>
+                <a:cs typeface="Poppins" pitchFamily="34" charset="-120"/>
+              </a:rPr>
+              <a:t>a full-timer or a commissioned agent, targets and KPIs, a pipeline in the CRM rather than in someone's head. The room put it at about twelve touch points before a venue buys beer, and Tap That has the first one and almost none of the eleven after it. The next hire is undecided between a brewer and wholesale plus bar coverage, hybrid either way.</a:t>
+            </a:r>
+            <a:endParaRPr lang="en-US" sz="810" dirty="0"/>
+          </a:p>
+        </p:txBody>
+      </p:sp>
+      <p:sp>
+        <p:nvSpPr>
+          <p:cNvPr id="64" name="Text 59"/>
+          <p:cNvSpPr txBox="1"/>
+          <p:nvPr/>
+        </p:nvSpPr>
+        <p:spPr>
+          <a:xfrm>
+            <a:off x="438898" y="9203935"/>
+            <a:ext cx="4521737" cy="462915"/>
+          </a:xfrm>
+          <a:prstGeom prst="rect">
+            <a:avLst/>
+          </a:prstGeom>
+          <a:noFill/>
+          <a:ln/>
+        </p:spPr>
+        <p:txBody>
+          <a:bodyPr wrap="square" lIns="0" tIns="0" rIns="0" bIns="0" rtlCol="0" anchor="t"/>
+          <a:lstStyle/>
+          <a:p>
+            <a:pPr indent="0" marL="0">
+              <a:lnSpc>
+                <a:spcPts val="1215"/>
+              </a:lnSpc>
+              <a:buNone/>
+            </a:pPr>
+            <a:r>
+              <a:rPr lang="en-US" sz="810" b="1" dirty="0">
+                <a:solidFill>
+                  <a:srgbClr val="0E171F"/>
+                </a:solidFill>
+                <a:latin typeface="Poppins" pitchFamily="34" charset="0"/>
+                <a:ea typeface="Poppins" pitchFamily="34" charset="-122"/>
+                <a:cs typeface="Poppins" pitchFamily="34" charset="-120"/>
+              </a:rPr>
+              <a:t>Then go after the shape of it: </a:t>
+            </a:r>
+            <a:pPr indent="0" marL="0">
+              <a:lnSpc>
+                <a:spcPts val="1215"/>
+              </a:lnSpc>
+              <a:buNone/>
+            </a:pPr>
+            <a:r>
+              <a:rPr lang="en-US" sz="810" dirty="0">
+                <a:solidFill>
+                  <a:srgbClr val="4A5565"/>
+                </a:solidFill>
+                <a:latin typeface="Poppins" pitchFamily="34" charset="0"/>
+                <a:ea typeface="Poppins" pitchFamily="34" charset="-122"/>
+                <a:cs typeface="Poppins" pitchFamily="34" charset="-120"/>
+              </a:rPr>
+              <a:t>custom systems for sporting clubs, club-branded kegs, minimum guarantees per season, and moving rigs from footy to cricket so they earn year-round.</a:t>
+            </a:r>
+            <a:endParaRPr lang="en-US" sz="810" dirty="0"/>
+          </a:p>
+        </p:txBody>
+      </p:sp>
+      <p:sp>
+        <p:nvSpPr>
+          <p:cNvPr id="65" name="Text 60"/>
+          <p:cNvSpPr txBox="1"/>
+          <p:nvPr/>
+        </p:nvSpPr>
+        <p:spPr>
+          <a:xfrm>
+            <a:off x="438898" y="9742751"/>
             <a:ext cx="4521737" cy="308610"/>
           </a:xfrm>
           <a:prstGeom prst="rect">
@@ -17018,7 +17237,7 @@
       </p:sp>
       <p:sp>
         <p:nvSpPr>
-          <p:cNvPr id="64" name="Shape 59"/>
+          <p:cNvPr id="66" name="Shape 61"/>
           <p:cNvSpPr/>
           <p:nvPr/>
         </p:nvSpPr>
@@ -17041,7 +17260,7 @@
       </p:sp>
       <p:sp>
         <p:nvSpPr>
-          <p:cNvPr id="65" name="Text 60"/>
+          <p:cNvPr id="67" name="Text 62"/>
           <p:cNvSpPr txBox="1"/>
           <p:nvPr/>
         </p:nvSpPr>
@@ -17083,14 +17302,14 @@
       </p:sp>
       <p:sp>
         <p:nvSpPr>
-          <p:cNvPr id="66" name="Shape 61"/>
+          <p:cNvPr id="68" name="Shape 63"/>
           <p:cNvSpPr/>
           <p:nvPr/>
         </p:nvSpPr>
         <p:spPr>
           <a:xfrm>
-            <a:off x="5183734" y="7504048"/>
-            <a:ext cx="4752137" cy="2972032"/>
+            <a:off x="5183734" y="7532625"/>
+            <a:ext cx="4752137" cy="2943454"/>
           </a:xfrm>
           <a:prstGeom prst="rect">
             <a:avLst/>
@@ -17108,98 +17327,14 @@
       </p:sp>
       <p:sp>
         <p:nvSpPr>
-          <p:cNvPr id="67" name="Text 62"/>
-          <p:cNvSpPr txBox="1"/>
-          <p:nvPr/>
-        </p:nvSpPr>
-        <p:spPr>
-          <a:xfrm>
-            <a:off x="5298934" y="7619248"/>
-            <a:ext cx="4521737" cy="112268"/>
-          </a:xfrm>
-          <a:prstGeom prst="rect">
-            <a:avLst/>
-          </a:prstGeom>
-          <a:noFill/>
-          <a:ln/>
-        </p:spPr>
-        <p:txBody>
-          <a:bodyPr wrap="square" lIns="0" tIns="0" rIns="0" bIns="0" rtlCol="0" anchor="t"/>
-          <a:lstStyle/>
-          <a:p>
-            <a:pPr indent="0" marL="0">
-              <a:lnSpc>
-                <a:spcPts val="884"/>
-              </a:lnSpc>
-              <a:buNone/>
-            </a:pPr>
-            <a:r>
-              <a:rPr lang="en-US" sz="680" b="1" spc="95" kern="0" dirty="0">
-                <a:solidFill>
-                  <a:srgbClr val="0066FF"/>
-                </a:solidFill>
-                <a:latin typeface="Poppins" pitchFamily="34" charset="0"/>
-                <a:ea typeface="Poppins" pitchFamily="34" charset="-122"/>
-                <a:cs typeface="Poppins" pitchFamily="34" charset="-120"/>
-              </a:rPr>
-              <a:t>FOUND BY PEOPLE, AND BY MACHINES</a:t>
-            </a:r>
-            <a:endParaRPr lang="en-US" sz="680" dirty="0"/>
-          </a:p>
-        </p:txBody>
-      </p:sp>
-      <p:sp>
-        <p:nvSpPr>
-          <p:cNvPr id="68" name="Text 63"/>
-          <p:cNvSpPr txBox="1"/>
-          <p:nvPr/>
-        </p:nvSpPr>
-        <p:spPr>
-          <a:xfrm>
-            <a:off x="5298934" y="7789116"/>
-            <a:ext cx="4521737" cy="308610"/>
-          </a:xfrm>
-          <a:prstGeom prst="rect">
-            <a:avLst/>
-          </a:prstGeom>
-          <a:noFill/>
-          <a:ln/>
-        </p:spPr>
-        <p:txBody>
-          <a:bodyPr wrap="square" lIns="0" tIns="0" rIns="0" bIns="0" rtlCol="0" anchor="t"/>
-          <a:lstStyle/>
-          <a:p>
-            <a:pPr indent="0" marL="0">
-              <a:lnSpc>
-                <a:spcPts val="1215"/>
-              </a:lnSpc>
-              <a:buNone/>
-            </a:pPr>
-            <a:r>
-              <a:rPr lang="en-US" sz="810" dirty="0">
-                <a:solidFill>
-                  <a:srgbClr val="4A5565"/>
-                </a:solidFill>
-                <a:latin typeface="Poppins" pitchFamily="34" charset="0"/>
-                <a:ea typeface="Poppins" pitchFamily="34" charset="-122"/>
-                <a:cs typeface="Poppins" pitchFamily="34" charset="-120"/>
-              </a:rPr>
-              <a:t>Within six to twelve months a large share of web traffic will expect an answer from AI search rather than a list of links. The site has to be readable by both.</a:t>
-            </a:r>
-            <a:endParaRPr lang="en-US" sz="810" dirty="0"/>
-          </a:p>
-        </p:txBody>
-      </p:sp>
-      <p:sp>
-        <p:nvSpPr>
           <p:cNvPr id="69" name="Text 64"/>
           <p:cNvSpPr txBox="1"/>
           <p:nvPr/>
         </p:nvSpPr>
         <p:spPr>
           <a:xfrm>
-            <a:off x="5298934" y="8263326"/>
-            <a:ext cx="4521737" cy="462915"/>
+            <a:off x="5298934" y="7647825"/>
+            <a:ext cx="4521737" cy="112268"/>
           </a:xfrm>
           <a:prstGeom prst="rect">
             <a:avLst/>
@@ -17213,39 +17348,22 @@
           <a:p>
             <a:pPr indent="0" marL="0">
               <a:lnSpc>
-                <a:spcPts val="1215"/>
-              </a:lnSpc>
-              <a:buNone/>
-            </a:pPr>
-            <a:r>
-              <a:rPr lang="en-US" sz="810" b="1" dirty="0">
-                <a:solidFill>
-                  <a:srgbClr val="0E171F"/>
-                </a:solidFill>
-                <a:latin typeface="Poppins" pitchFamily="34" charset="0"/>
-                <a:ea typeface="Poppins" pitchFamily="34" charset="-122"/>
-                <a:cs typeface="Poppins" pitchFamily="34" charset="-120"/>
-              </a:rPr>
-              <a:t>The basics that are missing: </a:t>
-            </a:r>
-            <a:pPr indent="0" marL="0">
-              <a:lnSpc>
-                <a:spcPts val="1215"/>
-              </a:lnSpc>
-              <a:buNone/>
-            </a:pPr>
-            <a:r>
-              <a:rPr lang="en-US" sz="810" dirty="0">
-                <a:solidFill>
-                  <a:srgbClr val="4A5565"/>
-                </a:solidFill>
-                <a:latin typeface="Poppins" pitchFamily="34" charset="0"/>
-                <a:ea typeface="Poppins" pitchFamily="34" charset="-122"/>
-                <a:cs typeface="Poppins" pitchFamily="34" charset="-120"/>
-              </a:rPr>
-              <a:t>a real About page, an FAQ that answers the buying objections, reviews on the site, and the awards page the Crafted win deserves. Justin's tech item, SEM, runs alongside these GEO basics, not instead of them.</a:t>
-            </a:r>
-            <a:endParaRPr lang="en-US" sz="810" dirty="0"/>
+                <a:spcPts val="884"/>
+              </a:lnSpc>
+              <a:buNone/>
+            </a:pPr>
+            <a:r>
+              <a:rPr lang="en-US" sz="680" b="1" spc="95" kern="0" dirty="0">
+                <a:solidFill>
+                  <a:srgbClr val="0066FF"/>
+                </a:solidFill>
+                <a:latin typeface="Poppins" pitchFamily="34" charset="0"/>
+                <a:ea typeface="Poppins" pitchFamily="34" charset="-122"/>
+                <a:cs typeface="Poppins" pitchFamily="34" charset="-120"/>
+              </a:rPr>
+              <a:t>FOUND BY PEOPLE, AND BY MACHINES</a:t>
+            </a:r>
+            <a:endParaRPr lang="en-US" sz="680" dirty="0"/>
           </a:p>
         </p:txBody>
       </p:sp>
@@ -17257,7 +17375,7 @@
         </p:nvSpPr>
         <p:spPr>
           <a:xfrm>
-            <a:off x="5298934" y="8891841"/>
+            <a:off x="5298934" y="7817693"/>
             <a:ext cx="4521737" cy="308610"/>
           </a:xfrm>
           <a:prstGeom prst="rect">
@@ -17277,23 +17395,6 @@
               <a:buNone/>
             </a:pPr>
             <a:r>
-              <a:rPr lang="en-US" sz="810" b="1" dirty="0">
-                <a:solidFill>
-                  <a:srgbClr val="0E171F"/>
-                </a:solidFill>
-                <a:latin typeface="Poppins" pitchFamily="34" charset="0"/>
-                <a:ea typeface="Poppins" pitchFamily="34" charset="-122"/>
-                <a:cs typeface="Poppins" pitchFamily="34" charset="-120"/>
-              </a:rPr>
-              <a:t>Reviews are the cheapest asset here. </a:t>
-            </a:r>
-            <a:pPr indent="0" marL="0">
-              <a:lnSpc>
-                <a:spcPts val="1215"/>
-              </a:lnSpc>
-              <a:buNone/>
-            </a:pPr>
-            <a:r>
               <a:rPr lang="en-US" sz="810" dirty="0">
                 <a:solidFill>
                   <a:srgbClr val="4A5565"/>
@@ -17302,7 +17403,7 @@
                 <a:ea typeface="Poppins" pitchFamily="34" charset="-122"/>
                 <a:cs typeface="Poppins" pitchFamily="34" charset="-120"/>
               </a:rPr>
-              <a:t>They exist, they are strong, and they sit on platforms rather than on the site where a model can read them.</a:t>
+              <a:t>Within six to twelve months a large share of web traffic will expect an answer from AI search rather than a list of links. The site has to be readable by both.</a:t>
             </a:r>
             <a:endParaRPr lang="en-US" sz="810" dirty="0"/>
           </a:p>
@@ -17316,7 +17417,66 @@
         </p:nvSpPr>
         <p:spPr>
           <a:xfrm>
-            <a:off x="5298934" y="9366051"/>
+            <a:off x="5298934" y="8291903"/>
+            <a:ext cx="4521737" cy="462915"/>
+          </a:xfrm>
+          <a:prstGeom prst="rect">
+            <a:avLst/>
+          </a:prstGeom>
+          <a:noFill/>
+          <a:ln/>
+        </p:spPr>
+        <p:txBody>
+          <a:bodyPr wrap="square" lIns="0" tIns="0" rIns="0" bIns="0" rtlCol="0" anchor="t"/>
+          <a:lstStyle/>
+          <a:p>
+            <a:pPr indent="0" marL="0">
+              <a:lnSpc>
+                <a:spcPts val="1215"/>
+              </a:lnSpc>
+              <a:buNone/>
+            </a:pPr>
+            <a:r>
+              <a:rPr lang="en-US" sz="810" b="1" dirty="0">
+                <a:solidFill>
+                  <a:srgbClr val="0E171F"/>
+                </a:solidFill>
+                <a:latin typeface="Poppins" pitchFamily="34" charset="0"/>
+                <a:ea typeface="Poppins" pitchFamily="34" charset="-122"/>
+                <a:cs typeface="Poppins" pitchFamily="34" charset="-120"/>
+              </a:rPr>
+              <a:t>The basics that are missing: </a:t>
+            </a:r>
+            <a:pPr indent="0" marL="0">
+              <a:lnSpc>
+                <a:spcPts val="1215"/>
+              </a:lnSpc>
+              <a:buNone/>
+            </a:pPr>
+            <a:r>
+              <a:rPr lang="en-US" sz="810" dirty="0">
+                <a:solidFill>
+                  <a:srgbClr val="4A5565"/>
+                </a:solidFill>
+                <a:latin typeface="Poppins" pitchFamily="34" charset="0"/>
+                <a:ea typeface="Poppins" pitchFamily="34" charset="-122"/>
+                <a:cs typeface="Poppins" pitchFamily="34" charset="-120"/>
+              </a:rPr>
+              <a:t>a real About page, an FAQ that answers the buying objections, reviews on the site, and the awards page the Crafted win deserves. Justin's tech item, SEM, runs alongside these GEO basics, not instead of them.</a:t>
+            </a:r>
+            <a:endParaRPr lang="en-US" sz="810" dirty="0"/>
+          </a:p>
+        </p:txBody>
+      </p:sp>
+      <p:sp>
+        <p:nvSpPr>
+          <p:cNvPr id="72" name="Text 67"/>
+          <p:cNvSpPr txBox="1"/>
+          <p:nvPr/>
+        </p:nvSpPr>
+        <p:spPr>
+          <a:xfrm>
+            <a:off x="5298934" y="8920418"/>
             <a:ext cx="4521737" cy="308610"/>
           </a:xfrm>
           <a:prstGeom prst="rect">
@@ -17344,6 +17504,65 @@
                 <a:ea typeface="Poppins" pitchFamily="34" charset="-122"/>
                 <a:cs typeface="Poppins" pitchFamily="34" charset="-120"/>
               </a:rPr>
+              <a:t>Reviews are the cheapest asset here. </a:t>
+            </a:r>
+            <a:pPr indent="0" marL="0">
+              <a:lnSpc>
+                <a:spcPts val="1215"/>
+              </a:lnSpc>
+              <a:buNone/>
+            </a:pPr>
+            <a:r>
+              <a:rPr lang="en-US" sz="810" dirty="0">
+                <a:solidFill>
+                  <a:srgbClr val="4A5565"/>
+                </a:solidFill>
+                <a:latin typeface="Poppins" pitchFamily="34" charset="0"/>
+                <a:ea typeface="Poppins" pitchFamily="34" charset="-122"/>
+                <a:cs typeface="Poppins" pitchFamily="34" charset="-120"/>
+              </a:rPr>
+              <a:t>They exist, they are strong, and they sit on platforms rather than on the site where a model can read them.</a:t>
+            </a:r>
+            <a:endParaRPr lang="en-US" sz="810" dirty="0"/>
+          </a:p>
+        </p:txBody>
+      </p:sp>
+      <p:sp>
+        <p:nvSpPr>
+          <p:cNvPr id="73" name="Text 68"/>
+          <p:cNvSpPr txBox="1"/>
+          <p:nvPr/>
+        </p:nvSpPr>
+        <p:spPr>
+          <a:xfrm>
+            <a:off x="5298934" y="9394628"/>
+            <a:ext cx="4521737" cy="308610"/>
+          </a:xfrm>
+          <a:prstGeom prst="rect">
+            <a:avLst/>
+          </a:prstGeom>
+          <a:noFill/>
+          <a:ln/>
+        </p:spPr>
+        <p:txBody>
+          <a:bodyPr wrap="square" lIns="0" tIns="0" rIns="0" bIns="0" rtlCol="0" anchor="t"/>
+          <a:lstStyle/>
+          <a:p>
+            <a:pPr indent="0" marL="0">
+              <a:lnSpc>
+                <a:spcPts val="1215"/>
+              </a:lnSpc>
+              <a:buNone/>
+            </a:pPr>
+            <a:r>
+              <a:rPr lang="en-US" sz="810" b="1" dirty="0">
+                <a:solidFill>
+                  <a:srgbClr val="0E171F"/>
+                </a:solidFill>
+                <a:latin typeface="Poppins" pitchFamily="34" charset="0"/>
+                <a:ea typeface="Poppins" pitchFamily="34" charset="-122"/>
+                <a:cs typeface="Poppins" pitchFamily="34" charset="-120"/>
+              </a:rPr>
               <a:t>Then the category play: </a:t>
             </a:r>
             <a:pPr indent="0" marL="0">
@@ -17369,14 +17588,14 @@
       </p:sp>
       <p:sp>
         <p:nvSpPr>
-          <p:cNvPr id="72" name="Shape 67"/>
+          <p:cNvPr id="74" name="Shape 69"/>
           <p:cNvSpPr/>
           <p:nvPr/>
         </p:nvSpPr>
         <p:spPr>
           <a:xfrm>
-            <a:off x="10043770" y="7504048"/>
-            <a:ext cx="4752137" cy="2972032"/>
+            <a:off x="10043770" y="7532625"/>
+            <a:ext cx="4752137" cy="2943454"/>
           </a:xfrm>
           <a:prstGeom prst="rect">
             <a:avLst/>
@@ -17394,13 +17613,13 @@
       </p:sp>
       <p:sp>
         <p:nvSpPr>
-          <p:cNvPr id="73" name="Text 68"/>
+          <p:cNvPr id="75" name="Text 70"/>
           <p:cNvSpPr txBox="1"/>
           <p:nvPr/>
         </p:nvSpPr>
         <p:spPr>
           <a:xfrm>
-            <a:off x="10158970" y="7619248"/>
+            <a:off x="10158970" y="7647825"/>
             <a:ext cx="4521737" cy="112268"/>
           </a:xfrm>
           <a:prstGeom prst="rect">
@@ -17436,13 +17655,13 @@
       </p:sp>
       <p:sp>
         <p:nvSpPr>
-          <p:cNvPr id="74" name="Shape 69"/>
+          <p:cNvPr id="76" name="Shape 71"/>
           <p:cNvSpPr/>
           <p:nvPr/>
         </p:nvSpPr>
         <p:spPr>
           <a:xfrm>
-            <a:off x="10158970" y="7789116"/>
+            <a:off x="10158970" y="7817693"/>
             <a:ext cx="2224868" cy="546122"/>
           </a:xfrm>
           <a:prstGeom prst="rect">
@@ -17461,13 +17680,13 @@
       </p:sp>
       <p:sp>
         <p:nvSpPr>
-          <p:cNvPr id="75" name="Text 70"/>
+          <p:cNvPr id="77" name="Text 72"/>
           <p:cNvSpPr txBox="1"/>
           <p:nvPr/>
         </p:nvSpPr>
         <p:spPr>
           <a:xfrm>
-            <a:off x="10266970" y="7875516"/>
+            <a:off x="10266970" y="7904093"/>
             <a:ext cx="2008868" cy="185420"/>
           </a:xfrm>
           <a:prstGeom prst="rect">
@@ -17503,13 +17722,13 @@
       </p:sp>
       <p:sp>
         <p:nvSpPr>
-          <p:cNvPr id="76" name="Text 71"/>
+          <p:cNvPr id="78" name="Text 73"/>
           <p:cNvSpPr txBox="1"/>
           <p:nvPr/>
         </p:nvSpPr>
         <p:spPr>
           <a:xfrm>
-            <a:off x="10266970" y="8118536"/>
+            <a:off x="10266970" y="8147113"/>
             <a:ext cx="2008868" cy="176022"/>
           </a:xfrm>
           <a:prstGeom prst="rect">
@@ -17545,13 +17764,13 @@
       </p:sp>
       <p:sp>
         <p:nvSpPr>
-          <p:cNvPr id="77" name="Shape 72"/>
+          <p:cNvPr id="79" name="Shape 74"/>
           <p:cNvSpPr/>
           <p:nvPr/>
         </p:nvSpPr>
         <p:spPr>
           <a:xfrm>
-            <a:off x="12455838" y="7789116"/>
+            <a:off x="12455838" y="7817693"/>
             <a:ext cx="2224868" cy="546122"/>
           </a:xfrm>
           <a:prstGeom prst="rect">
@@ -17570,13 +17789,13 @@
       </p:sp>
       <p:sp>
         <p:nvSpPr>
-          <p:cNvPr id="78" name="Text 73"/>
+          <p:cNvPr id="80" name="Text 75"/>
           <p:cNvSpPr txBox="1"/>
           <p:nvPr/>
         </p:nvSpPr>
         <p:spPr>
           <a:xfrm>
-            <a:off x="12563838" y="7875516"/>
+            <a:off x="12563838" y="7904093"/>
             <a:ext cx="2008868" cy="185420"/>
           </a:xfrm>
           <a:prstGeom prst="rect">
@@ -17612,13 +17831,13 @@
       </p:sp>
       <p:sp>
         <p:nvSpPr>
-          <p:cNvPr id="79" name="Text 74"/>
+          <p:cNvPr id="81" name="Text 76"/>
           <p:cNvSpPr txBox="1"/>
           <p:nvPr/>
         </p:nvSpPr>
         <p:spPr>
           <a:xfrm>
-            <a:off x="12563838" y="8118536"/>
+            <a:off x="12563838" y="8147113"/>
             <a:ext cx="2008868" cy="176022"/>
           </a:xfrm>
           <a:prstGeom prst="rect">
@@ -17654,13 +17873,13 @@
       </p:sp>
       <p:sp>
         <p:nvSpPr>
-          <p:cNvPr id="80" name="Shape 75"/>
+          <p:cNvPr id="82" name="Shape 77"/>
           <p:cNvSpPr/>
           <p:nvPr/>
         </p:nvSpPr>
         <p:spPr>
           <a:xfrm>
-            <a:off x="10158970" y="8407238"/>
+            <a:off x="10158970" y="8435815"/>
             <a:ext cx="2224868" cy="546122"/>
           </a:xfrm>
           <a:prstGeom prst="rect">
@@ -17679,13 +17898,13 @@
       </p:sp>
       <p:sp>
         <p:nvSpPr>
-          <p:cNvPr id="81" name="Text 76"/>
+          <p:cNvPr id="83" name="Text 78"/>
           <p:cNvSpPr txBox="1"/>
           <p:nvPr/>
         </p:nvSpPr>
         <p:spPr>
           <a:xfrm>
-            <a:off x="10266970" y="8493638"/>
+            <a:off x="10266970" y="8522215"/>
             <a:ext cx="2008868" cy="185420"/>
           </a:xfrm>
           <a:prstGeom prst="rect">
@@ -17721,13 +17940,13 @@
       </p:sp>
       <p:sp>
         <p:nvSpPr>
-          <p:cNvPr id="82" name="Text 77"/>
+          <p:cNvPr id="84" name="Text 79"/>
           <p:cNvSpPr txBox="1"/>
           <p:nvPr/>
         </p:nvSpPr>
         <p:spPr>
           <a:xfrm>
-            <a:off x="10266970" y="8736658"/>
+            <a:off x="10266970" y="8765235"/>
             <a:ext cx="2008868" cy="176022"/>
           </a:xfrm>
           <a:prstGeom prst="rect">
@@ -17763,13 +17982,13 @@
       </p:sp>
       <p:sp>
         <p:nvSpPr>
-          <p:cNvPr id="83" name="Shape 78"/>
+          <p:cNvPr id="85" name="Shape 80"/>
           <p:cNvSpPr/>
           <p:nvPr/>
         </p:nvSpPr>
         <p:spPr>
           <a:xfrm>
-            <a:off x="12455838" y="8407238"/>
+            <a:off x="12455838" y="8435815"/>
             <a:ext cx="2224868" cy="546122"/>
           </a:xfrm>
           <a:prstGeom prst="rect">
@@ -17788,98 +18007,14 @@
       </p:sp>
       <p:sp>
         <p:nvSpPr>
-          <p:cNvPr id="84" name="Text 79"/>
-          <p:cNvSpPr txBox="1"/>
-          <p:nvPr/>
-        </p:nvSpPr>
-        <p:spPr>
-          <a:xfrm>
-            <a:off x="12563838" y="8493638"/>
-            <a:ext cx="2008868" cy="185420"/>
-          </a:xfrm>
-          <a:prstGeom prst="rect">
-            <a:avLst/>
-          </a:prstGeom>
-          <a:noFill/>
-          <a:ln/>
-        </p:spPr>
-        <p:txBody>
-          <a:bodyPr wrap="square" lIns="0" tIns="0" rIns="0" bIns="0" rtlCol="0" anchor="t"/>
-          <a:lstStyle/>
-          <a:p>
-            <a:pPr indent="0" marL="0">
-              <a:lnSpc>
-                <a:spcPts val="1100"/>
-              </a:lnSpc>
-              <a:buNone/>
-            </a:pPr>
-            <a:r>
-              <a:rPr lang="en-US" sz="1100" b="1" dirty="0">
-                <a:solidFill>
-                  <a:srgbClr val="0066FF"/>
-                </a:solidFill>
-                <a:latin typeface="Poppins" pitchFamily="34" charset="0"/>
-                <a:ea typeface="Poppins" pitchFamily="34" charset="-122"/>
-                <a:cs typeface="Poppins" pitchFamily="34" charset="-120"/>
-              </a:rPr>
-              <a:t>Leak</a:t>
-            </a:r>
-            <a:endParaRPr lang="en-US" sz="1100" dirty="0"/>
-          </a:p>
-        </p:txBody>
-      </p:sp>
-      <p:sp>
-        <p:nvSpPr>
-          <p:cNvPr id="85" name="Text 80"/>
-          <p:cNvSpPr txBox="1"/>
-          <p:nvPr/>
-        </p:nvSpPr>
-        <p:spPr>
-          <a:xfrm>
-            <a:off x="12563838" y="8736658"/>
-            <a:ext cx="2008868" cy="176022"/>
-          </a:xfrm>
-          <a:prstGeom prst="rect">
-            <a:avLst/>
-          </a:prstGeom>
-          <a:noFill/>
-          <a:ln/>
-        </p:spPr>
-        <p:txBody>
-          <a:bodyPr wrap="square" lIns="0" tIns="0" rIns="0" bIns="0" rtlCol="0" anchor="t"/>
-          <a:lstStyle/>
-          <a:p>
-            <a:pPr indent="0" marL="0">
-              <a:lnSpc>
-                <a:spcPts val="693"/>
-              </a:lnSpc>
-              <a:buNone/>
-            </a:pPr>
-            <a:r>
-              <a:rPr lang="en-US" sz="550" b="1" spc="55" kern="0" dirty="0">
-                <a:solidFill>
-                  <a:srgbClr val="4A5565"/>
-                </a:solidFill>
-                <a:latin typeface="Poppins" pitchFamily="34" charset="0"/>
-                <a:ea typeface="Poppins" pitchFamily="34" charset="-122"/>
-                <a:cs typeface="Poppins" pitchFamily="34" charset="-120"/>
-              </a:rPr>
-              <a:t>LAPSE RATE, MEMBER VS NON-MEMBER</a:t>
-            </a:r>
-            <a:endParaRPr lang="en-US" sz="550" dirty="0"/>
-          </a:p>
-        </p:txBody>
-      </p:sp>
-      <p:sp>
-        <p:nvSpPr>
           <p:cNvPr id="86" name="Text 81"/>
           <p:cNvSpPr txBox="1"/>
           <p:nvPr/>
         </p:nvSpPr>
         <p:spPr>
           <a:xfrm>
-            <a:off x="10158970" y="9118960"/>
-            <a:ext cx="4521737" cy="308610"/>
+            <a:off x="12563838" y="8522215"/>
+            <a:ext cx="2008868" cy="185420"/>
           </a:xfrm>
           <a:prstGeom prst="rect">
             <a:avLst/>
@@ -17893,39 +18028,22 @@
           <a:p>
             <a:pPr indent="0" marL="0">
               <a:lnSpc>
-                <a:spcPts val="1215"/>
-              </a:lnSpc>
-              <a:buNone/>
-            </a:pPr>
-            <a:r>
-              <a:rPr lang="en-US" sz="810" b="1" dirty="0">
-                <a:solidFill>
-                  <a:srgbClr val="0E171F"/>
-                </a:solidFill>
-                <a:latin typeface="Poppins" pitchFamily="34" charset="0"/>
-                <a:ea typeface="Poppins" pitchFamily="34" charset="-122"/>
-                <a:cs typeface="Poppins" pitchFamily="34" charset="-120"/>
-              </a:rPr>
-              <a:t>One report, monthly, four numbers. </a:t>
-            </a:r>
-            <a:pPr indent="0" marL="0">
-              <a:lnSpc>
-                <a:spcPts val="1215"/>
-              </a:lnSpc>
-              <a:buNone/>
-            </a:pPr>
-            <a:r>
-              <a:rPr lang="en-US" sz="810" dirty="0">
-                <a:solidFill>
-                  <a:srgbClr val="4A5565"/>
-                </a:solidFill>
-                <a:latin typeface="Poppins" pitchFamily="34" charset="0"/>
-                <a:ea typeface="Poppins" pitchFamily="34" charset="-122"/>
-                <a:cs typeface="Poppins" pitchFamily="34" charset="-120"/>
-              </a:rPr>
-              <a:t>Justin's three, plus the lapse rate, which is JP's addition. Not a dashboard nobody opens.</a:t>
-            </a:r>
-            <a:endParaRPr lang="en-US" sz="810" dirty="0"/>
+                <a:spcPts val="1100"/>
+              </a:lnSpc>
+              <a:buNone/>
+            </a:pPr>
+            <a:r>
+              <a:rPr lang="en-US" sz="1100" b="1" dirty="0">
+                <a:solidFill>
+                  <a:srgbClr val="0066FF"/>
+                </a:solidFill>
+                <a:latin typeface="Poppins" pitchFamily="34" charset="0"/>
+                <a:ea typeface="Poppins" pitchFamily="34" charset="-122"/>
+                <a:cs typeface="Poppins" pitchFamily="34" charset="-120"/>
+              </a:rPr>
+              <a:t>Leak</a:t>
+            </a:r>
+            <a:endParaRPr lang="en-US" sz="1100" dirty="0"/>
           </a:p>
         </p:txBody>
       </p:sp>
@@ -17937,7 +18055,108 @@
         </p:nvSpPr>
         <p:spPr>
           <a:xfrm>
-            <a:off x="10158970" y="9593170"/>
+            <a:off x="12563838" y="8765235"/>
+            <a:ext cx="2008868" cy="176022"/>
+          </a:xfrm>
+          <a:prstGeom prst="rect">
+            <a:avLst/>
+          </a:prstGeom>
+          <a:noFill/>
+          <a:ln/>
+        </p:spPr>
+        <p:txBody>
+          <a:bodyPr wrap="square" lIns="0" tIns="0" rIns="0" bIns="0" rtlCol="0" anchor="t"/>
+          <a:lstStyle/>
+          <a:p>
+            <a:pPr indent="0" marL="0">
+              <a:lnSpc>
+                <a:spcPts val="693"/>
+              </a:lnSpc>
+              <a:buNone/>
+            </a:pPr>
+            <a:r>
+              <a:rPr lang="en-US" sz="550" b="1" spc="55" kern="0" dirty="0">
+                <a:solidFill>
+                  <a:srgbClr val="4A5565"/>
+                </a:solidFill>
+                <a:latin typeface="Poppins" pitchFamily="34" charset="0"/>
+                <a:ea typeface="Poppins" pitchFamily="34" charset="-122"/>
+                <a:cs typeface="Poppins" pitchFamily="34" charset="-120"/>
+              </a:rPr>
+              <a:t>LAPSE RATE, MEMBER VS NON-MEMBER</a:t>
+            </a:r>
+            <a:endParaRPr lang="en-US" sz="550" dirty="0"/>
+          </a:p>
+        </p:txBody>
+      </p:sp>
+      <p:sp>
+        <p:nvSpPr>
+          <p:cNvPr id="88" name="Text 83"/>
+          <p:cNvSpPr txBox="1"/>
+          <p:nvPr/>
+        </p:nvSpPr>
+        <p:spPr>
+          <a:xfrm>
+            <a:off x="10158970" y="9147537"/>
+            <a:ext cx="4521737" cy="308610"/>
+          </a:xfrm>
+          <a:prstGeom prst="rect">
+            <a:avLst/>
+          </a:prstGeom>
+          <a:noFill/>
+          <a:ln/>
+        </p:spPr>
+        <p:txBody>
+          <a:bodyPr wrap="square" lIns="0" tIns="0" rIns="0" bIns="0" rtlCol="0" anchor="t"/>
+          <a:lstStyle/>
+          <a:p>
+            <a:pPr indent="0" marL="0">
+              <a:lnSpc>
+                <a:spcPts val="1215"/>
+              </a:lnSpc>
+              <a:buNone/>
+            </a:pPr>
+            <a:r>
+              <a:rPr lang="en-US" sz="810" b="1" dirty="0">
+                <a:solidFill>
+                  <a:srgbClr val="0E171F"/>
+                </a:solidFill>
+                <a:latin typeface="Poppins" pitchFamily="34" charset="0"/>
+                <a:ea typeface="Poppins" pitchFamily="34" charset="-122"/>
+                <a:cs typeface="Poppins" pitchFamily="34" charset="-120"/>
+              </a:rPr>
+              <a:t>One report, monthly, four numbers. </a:t>
+            </a:r>
+            <a:pPr indent="0" marL="0">
+              <a:lnSpc>
+                <a:spcPts val="1215"/>
+              </a:lnSpc>
+              <a:buNone/>
+            </a:pPr>
+            <a:r>
+              <a:rPr lang="en-US" sz="810" dirty="0">
+                <a:solidFill>
+                  <a:srgbClr val="4A5565"/>
+                </a:solidFill>
+                <a:latin typeface="Poppins" pitchFamily="34" charset="0"/>
+                <a:ea typeface="Poppins" pitchFamily="34" charset="-122"/>
+                <a:cs typeface="Poppins" pitchFamily="34" charset="-120"/>
+              </a:rPr>
+              <a:t>Justin's three, plus the lapse rate, which is JP's addition. Not a dashboard nobody opens.</a:t>
+            </a:r>
+            <a:endParaRPr lang="en-US" sz="810" dirty="0"/>
+          </a:p>
+        </p:txBody>
+      </p:sp>
+      <p:sp>
+        <p:nvSpPr>
+          <p:cNvPr id="89" name="Text 84"/>
+          <p:cNvSpPr txBox="1"/>
+          <p:nvPr/>
+        </p:nvSpPr>
+        <p:spPr>
+          <a:xfrm>
+            <a:off x="10158970" y="9621747"/>
             <a:ext cx="4521737" cy="308610"/>
           </a:xfrm>
           <a:prstGeom prst="rect">
@@ -18337,7 +18556,7 @@
         <p:spPr>
           <a:xfrm>
             <a:off x="323698" y="1115568"/>
-            <a:ext cx="14472209" cy="3087069"/>
+            <a:ext cx="14472209" cy="2795836"/>
           </a:xfrm>
           <a:prstGeom prst="rect">
             <a:avLst/>
@@ -18446,7 +18665,7 @@
         <p:spPr>
           <a:xfrm>
             <a:off x="438898" y="1400636"/>
-            <a:ext cx="3479528" cy="2444386"/>
+            <a:ext cx="3479528" cy="2153153"/>
           </a:xfrm>
           <a:prstGeom prst="rect">
             <a:avLst/>
@@ -18940,7 +19159,7 @@
         <p:spPr>
           <a:xfrm>
             <a:off x="4026325" y="1400636"/>
-            <a:ext cx="3479528" cy="2444386"/>
+            <a:ext cx="3479528" cy="2153153"/>
           </a:xfrm>
           <a:prstGeom prst="rect">
             <a:avLst/>
@@ -19434,7 +19653,7 @@
         <p:spPr>
           <a:xfrm>
             <a:off x="7613752" y="1400636"/>
-            <a:ext cx="3479528" cy="2444386"/>
+            <a:ext cx="3479528" cy="2153153"/>
           </a:xfrm>
           <a:prstGeom prst="rect">
             <a:avLst/>
@@ -19660,7 +19879,7 @@
         <p:spPr>
           <a:xfrm>
             <a:off x="11201179" y="1400636"/>
-            <a:ext cx="3479528" cy="2444386"/>
+            <a:ext cx="3479528" cy="2153153"/>
           </a:xfrm>
           <a:prstGeom prst="rect">
             <a:avLst/>
@@ -19952,7 +20171,7 @@
         </p:nvSpPr>
         <p:spPr>
           <a:xfrm>
-            <a:off x="438898" y="3909822"/>
+            <a:off x="438898" y="3618589"/>
             <a:ext cx="14241809" cy="0"/>
           </a:xfrm>
           <a:prstGeom prst="line">
@@ -19975,7 +20194,7 @@
         </p:nvSpPr>
         <p:spPr>
           <a:xfrm>
-            <a:off x="438898" y="3967422"/>
+            <a:off x="438898" y="3676189"/>
             <a:ext cx="14241809" cy="120015"/>
           </a:xfrm>
           <a:prstGeom prst="rect">
@@ -20017,8 +20236,8 @@
         </p:nvSpPr>
         <p:spPr>
           <a:xfrm>
-            <a:off x="323698" y="4310536"/>
-            <a:ext cx="4752137" cy="3087069"/>
+            <a:off x="323698" y="4019303"/>
+            <a:ext cx="3537128" cy="3611288"/>
           </a:xfrm>
           <a:prstGeom prst="rect">
             <a:avLst/>
@@ -20042,8 +20261,8 @@
         </p:nvSpPr>
         <p:spPr>
           <a:xfrm>
-            <a:off x="438898" y="4425736"/>
-            <a:ext cx="4521737" cy="112268"/>
+            <a:off x="438898" y="4134503"/>
+            <a:ext cx="3306728" cy="112268"/>
           </a:xfrm>
           <a:prstGeom prst="rect">
             <a:avLst/>
@@ -20084,8 +20303,8 @@
         </p:nvSpPr>
         <p:spPr>
           <a:xfrm>
-            <a:off x="438898" y="4595604"/>
-            <a:ext cx="4521737" cy="322478"/>
+            <a:off x="438898" y="4304371"/>
+            <a:ext cx="3306728" cy="322478"/>
           </a:xfrm>
           <a:prstGeom prst="rect">
             <a:avLst/>
@@ -20126,8 +20345,8 @@
         </p:nvSpPr>
         <p:spPr>
           <a:xfrm>
-            <a:off x="438898" y="5018741"/>
-            <a:ext cx="4521737" cy="308610"/>
+            <a:off x="438898" y="4720903"/>
+            <a:ext cx="3306728" cy="462915"/>
           </a:xfrm>
           <a:prstGeom prst="rect">
             <a:avLst/>
@@ -20185,8 +20404,8 @@
         </p:nvSpPr>
         <p:spPr>
           <a:xfrm>
-            <a:off x="438898" y="5428010"/>
-            <a:ext cx="4521737" cy="462915"/>
+            <a:off x="438898" y="5277873"/>
+            <a:ext cx="3306728" cy="462915"/>
           </a:xfrm>
           <a:prstGeom prst="rect">
             <a:avLst/>
@@ -20244,8 +20463,8 @@
         </p:nvSpPr>
         <p:spPr>
           <a:xfrm>
-            <a:off x="438898" y="5991584"/>
-            <a:ext cx="4521737" cy="308610"/>
+            <a:off x="438898" y="5834842"/>
+            <a:ext cx="3306728" cy="462915"/>
           </a:xfrm>
           <a:prstGeom prst="rect">
             <a:avLst/>
@@ -20303,8 +20522,8 @@
         </p:nvSpPr>
         <p:spPr>
           <a:xfrm>
-            <a:off x="438898" y="6400854"/>
-            <a:ext cx="4521737" cy="308610"/>
+            <a:off x="438898" y="6391811"/>
+            <a:ext cx="3306728" cy="462915"/>
           </a:xfrm>
           <a:prstGeom prst="rect">
             <a:avLst/>
@@ -20362,8 +20581,8 @@
         </p:nvSpPr>
         <p:spPr>
           <a:xfrm>
-            <a:off x="438898" y="6984775"/>
-            <a:ext cx="4521737" cy="0"/>
+            <a:off x="438898" y="7097746"/>
+            <a:ext cx="3306728" cy="0"/>
           </a:xfrm>
           <a:prstGeom prst="line">
             <a:avLst/>
@@ -20385,8 +20604,8 @@
         </p:nvSpPr>
         <p:spPr>
           <a:xfrm>
-            <a:off x="438898" y="7042375"/>
-            <a:ext cx="4521737" cy="240030"/>
+            <a:off x="438898" y="7155346"/>
+            <a:ext cx="3306728" cy="360045"/>
           </a:xfrm>
           <a:prstGeom prst="rect">
             <a:avLst/>
@@ -20427,8 +20646,8 @@
         </p:nvSpPr>
         <p:spPr>
           <a:xfrm>
-            <a:off x="5183734" y="4310536"/>
-            <a:ext cx="4752137" cy="3087069"/>
+            <a:off x="3968725" y="4019303"/>
+            <a:ext cx="5967146" cy="3611288"/>
           </a:xfrm>
           <a:prstGeom prst="rect">
             <a:avLst/>
@@ -20452,8 +20671,8 @@
         </p:nvSpPr>
         <p:spPr>
           <a:xfrm>
-            <a:off x="5298934" y="4425736"/>
-            <a:ext cx="4521737" cy="112268"/>
+            <a:off x="4083925" y="4134503"/>
+            <a:ext cx="5736746" cy="112268"/>
           </a:xfrm>
           <a:prstGeom prst="rect">
             <a:avLst/>
@@ -20501,7 +20720,7 @@
           </p:nvPr>
         </p:nvGraphicFramePr>
         <p:xfrm>
-          <a:off x="5298934" y="4595604"/>
+          <a:off x="4083925" y="4304371"/>
           <a:ext cx="11339703" cy="914400"/>
         </p:xfrm>
         <a:graphic>
@@ -20509,11 +20728,11 @@
             <a:tbl>
               <a:tblPr/>
               <a:tblGrid>
-                <a:gridCol w="1459421"/>
-                <a:gridCol w="2512445"/>
-                <a:gridCol w="549871"/>
+                <a:gridCol w="1851573"/>
+                <a:gridCol w="3187550"/>
+                <a:gridCol w="697623"/>
               </a:tblGrid>
-              <a:tr h="232426">
+              <a:tr h="214112">
                 <a:tc>
                   <a:txBody>
                     <a:bodyPr/>
@@ -20674,7 +20893,7 @@
                   </a:tcPr>
                 </a:tc>
               </a:tr>
-              <a:tr h="361991">
+              <a:tr h="229682">
                 <a:tc>
                   <a:txBody>
                     <a:bodyPr/>
@@ -20835,7 +21054,7 @@
                   </a:tcPr>
                 </a:tc>
               </a:tr>
-              <a:tr h="247996">
+              <a:tr h="229682">
                 <a:tc>
                   <a:txBody>
                     <a:bodyPr/>
@@ -20996,7 +21215,7 @@
                   </a:tcPr>
                 </a:tc>
               </a:tr>
-              <a:tr h="247996">
+              <a:tr h="229682">
                 <a:tc>
                   <a:txBody>
                     <a:bodyPr/>
@@ -21157,7 +21376,7 @@
                   </a:tcPr>
                 </a:tc>
               </a:tr>
-              <a:tr h="247996">
+              <a:tr h="229682">
                 <a:tc>
                   <a:txBody>
                     <a:bodyPr/>
@@ -21318,7 +21537,7 @@
                   </a:tcPr>
                 </a:tc>
               </a:tr>
-              <a:tr h="247996">
+              <a:tr h="229682">
                 <a:tc>
                   <a:txBody>
                     <a:bodyPr/>
@@ -21479,7 +21698,7 @@
                   </a:tcPr>
                 </a:tc>
               </a:tr>
-              <a:tr h="247996">
+              <a:tr h="229682">
                 <a:tc>
                   <a:txBody>
                     <a:bodyPr/>
@@ -21500,7 +21719,7 @@
                           <a:ea typeface="Poppins" pitchFamily="34" charset="-122"/>
                           <a:cs typeface="Poppins" pitchFamily="34" charset="-120"/>
                         </a:rPr>
-                        <a:t>Cannery contact</a:t>
+                        <a:t>Value H2O</a:t>
                       </a:r>
                       <a:endParaRPr lang="en-US" sz="660" dirty="0">
                         <a:latin typeface="Poppins" charset="0"/>
@@ -21553,7 +21772,7 @@
                           <a:ea typeface="Poppins" pitchFamily="34" charset="-122"/>
                           <a:cs typeface="Poppins" pitchFamily="34" charset="-120"/>
                         </a:rPr>
-                        <a:t>Parked. Canning is not in Justin's plan</a:t>
+                        <a:t>About 10,000 distribution points east coast, 10 technicians in the field</a:t>
                       </a:r>
                       <a:endParaRPr lang="en-US" sz="660" dirty="0">
                         <a:latin typeface="Poppins" charset="0"/>
@@ -21640,7 +21859,7 @@
                   </a:tcPr>
                 </a:tc>
               </a:tr>
-              <a:tr h="247996">
+              <a:tr h="343677">
                 <a:tc>
                   <a:txBody>
                     <a:bodyPr/>
@@ -21661,7 +21880,7 @@
                           <a:ea typeface="Poppins" pitchFamily="34" charset="-122"/>
                           <a:cs typeface="Poppins" pitchFamily="34" charset="-120"/>
                         </a:rPr>
-                        <a:t>JVPs and referral partners</a:t>
+                        <a:t>Outdoor kitchen makers</a:t>
                       </a:r>
                       <a:endParaRPr lang="en-US" sz="660" dirty="0">
                         <a:latin typeface="Poppins" charset="0"/>
@@ -21714,7 +21933,651 @@
                           <a:ea typeface="Poppins" pitchFamily="34" charset="-122"/>
                           <a:cs typeface="Poppins" pitchFamily="34" charset="-120"/>
                         </a:rPr>
+                        <a:t>A keg-and-tap unit specified as a standard inclusion. Visuals and demand test first</a:t>
+                      </a:r>
+                      <a:endParaRPr lang="en-US" sz="660" dirty="0">
+                        <a:latin typeface="Poppins" charset="0"/>
+                        <a:ea typeface="Poppins" charset="0"/>
+                        <a:cs typeface="Poppins" charset="0"/>
+                      </a:endParaRPr>
+                    </a:p>
+                  </a:txBody>
+                  <a:tcPr marL="46800" marR="46800" marT="46800" marB="46800" anchor="t">
+                    <a:lnL w="0" cap="flat" cmpd="sng" algn="ctr">
+                      <a:noFill/>
+                    </a:lnL>
+                    <a:lnR w="0" cap="flat" cmpd="sng" algn="ctr">
+                      <a:noFill/>
+                    </a:lnR>
+                    <a:lnT w="0" cap="flat" cmpd="sng" algn="ctr">
+                      <a:noFill/>
+                    </a:lnT>
+                    <a:lnB w="7620" cap="flat" cmpd="sng" algn="ctr">
+                      <a:solidFill>
+                        <a:srgbClr val="E3E7EC"/>
+                      </a:solidFill>
+                      <a:prstDash val="solid"/>
+                      <a:round/>
+                      <a:headEnd type="none" w="med" len="med"/>
+                      <a:tailEnd type="none" w="med" len="med"/>
+                    </a:lnB>
+                    <a:solidFill>
+                      <a:srgbClr val="F5F7FA"/>
+                    </a:solidFill>
+                  </a:tcPr>
+                </a:tc>
+                <a:tc>
+                  <a:txBody>
+                    <a:bodyPr/>
+                    <a:lstStyle/>
+                    <a:p>
+                      <a:pPr algn="l" indent="0" marL="0">
+                        <a:lnSpc>
+                          <a:spcPts val="898"/>
+                        </a:lnSpc>
+                        <a:buNone/>
+                      </a:pPr>
+                      <a:r>
+                        <a:rPr lang="en-US" sz="660" dirty="0">
+                          <a:solidFill>
+                            <a:srgbClr val="4A5565"/>
+                          </a:solidFill>
+                          <a:latin typeface="Poppins" pitchFamily="34" charset="0"/>
+                          <a:ea typeface="Poppins" pitchFamily="34" charset="-122"/>
+                          <a:cs typeface="Poppins" pitchFamily="34" charset="-120"/>
+                        </a:rPr>
+                        <a:t>Clent</a:t>
+                      </a:r>
+                      <a:endParaRPr lang="en-US" sz="660" dirty="0">
+                        <a:latin typeface="Poppins" charset="0"/>
+                        <a:ea typeface="Poppins" charset="0"/>
+                        <a:cs typeface="Poppins" charset="0"/>
+                      </a:endParaRPr>
+                    </a:p>
+                  </a:txBody>
+                  <a:tcPr marL="46800" marR="46800" marT="46800" marB="46800" anchor="t">
+                    <a:lnL w="0" cap="flat" cmpd="sng" algn="ctr">
+                      <a:noFill/>
+                    </a:lnL>
+                    <a:lnR w="0" cap="flat" cmpd="sng" algn="ctr">
+                      <a:noFill/>
+                    </a:lnR>
+                    <a:lnT w="0" cap="flat" cmpd="sng" algn="ctr">
+                      <a:noFill/>
+                    </a:lnT>
+                    <a:lnB w="7620" cap="flat" cmpd="sng" algn="ctr">
+                      <a:solidFill>
+                        <a:srgbClr val="E3E7EC"/>
+                      </a:solidFill>
+                      <a:prstDash val="solid"/>
+                      <a:round/>
+                      <a:headEnd type="none" w="med" len="med"/>
+                      <a:tailEnd type="none" w="med" len="med"/>
+                    </a:lnB>
+                    <a:solidFill>
+                      <a:srgbClr val="F5F7FA"/>
+                    </a:solidFill>
+                  </a:tcPr>
+                </a:tc>
+              </a:tr>
+              <a:tr h="343677">
+                <a:tc>
+                  <a:txBody>
+                    <a:bodyPr/>
+                    <a:lstStyle/>
+                    <a:p>
+                      <a:pPr algn="l" indent="0" marL="0">
+                        <a:lnSpc>
+                          <a:spcPts val="898"/>
+                        </a:lnSpc>
+                        <a:buNone/>
+                      </a:pPr>
+                      <a:r>
+                        <a:rPr lang="en-US" sz="660" b="1" dirty="0">
+                          <a:solidFill>
+                            <a:srgbClr val="0E171F"/>
+                          </a:solidFill>
+                          <a:latin typeface="Poppins" pitchFamily="34" charset="0"/>
+                          <a:ea typeface="Poppins" pitchFamily="34" charset="-122"/>
+                          <a:cs typeface="Poppins" pitchFamily="34" charset="-120"/>
+                        </a:rPr>
+                        <a:t>Trades and installers</a:t>
+                      </a:r>
+                      <a:endParaRPr lang="en-US" sz="660" dirty="0">
+                        <a:latin typeface="Poppins" charset="0"/>
+                        <a:ea typeface="Poppins" charset="0"/>
+                        <a:cs typeface="Poppins" charset="0"/>
+                      </a:endParaRPr>
+                    </a:p>
+                  </a:txBody>
+                  <a:tcPr marL="46800" marR="46800" marT="46800" marB="46800" anchor="t">
+                    <a:lnL w="0" cap="flat" cmpd="sng" algn="ctr">
+                      <a:noFill/>
+                    </a:lnL>
+                    <a:lnR w="0" cap="flat" cmpd="sng" algn="ctr">
+                      <a:noFill/>
+                    </a:lnR>
+                    <a:lnT w="0" cap="flat" cmpd="sng" algn="ctr">
+                      <a:noFill/>
+                    </a:lnT>
+                    <a:lnB w="7620" cap="flat" cmpd="sng" algn="ctr">
+                      <a:solidFill>
+                        <a:srgbClr val="E3E7EC"/>
+                      </a:solidFill>
+                      <a:prstDash val="solid"/>
+                      <a:round/>
+                      <a:headEnd type="none" w="med" len="med"/>
+                      <a:tailEnd type="none" w="med" len="med"/>
+                    </a:lnB>
+                    <a:solidFill>
+                      <a:srgbClr val="FFFFFF"/>
+                    </a:solidFill>
+                  </a:tcPr>
+                </a:tc>
+                <a:tc>
+                  <a:txBody>
+                    <a:bodyPr/>
+                    <a:lstStyle/>
+                    <a:p>
+                      <a:pPr algn="l" indent="0" marL="0">
+                        <a:lnSpc>
+                          <a:spcPts val="898"/>
+                        </a:lnSpc>
+                        <a:buNone/>
+                      </a:pPr>
+                      <a:r>
+                        <a:rPr lang="en-US" sz="660" dirty="0">
+                          <a:solidFill>
+                            <a:srgbClr val="4A5565"/>
+                          </a:solidFill>
+                          <a:latin typeface="Poppins" pitchFamily="34" charset="0"/>
+                          <a:ea typeface="Poppins" pitchFamily="34" charset="-122"/>
+                          <a:cs typeface="Poppins" pitchFamily="34" charset="-120"/>
+                        </a:rPr>
+                        <a:t>Plumbers and kitchen fitters as a referral force: card or QR, plus a kickback</a:t>
+                      </a:r>
+                      <a:endParaRPr lang="en-US" sz="660" dirty="0">
+                        <a:latin typeface="Poppins" charset="0"/>
+                        <a:ea typeface="Poppins" charset="0"/>
+                        <a:cs typeface="Poppins" charset="0"/>
+                      </a:endParaRPr>
+                    </a:p>
+                  </a:txBody>
+                  <a:tcPr marL="46800" marR="46800" marT="46800" marB="46800" anchor="t">
+                    <a:lnL w="0" cap="flat" cmpd="sng" algn="ctr">
+                      <a:noFill/>
+                    </a:lnL>
+                    <a:lnR w="0" cap="flat" cmpd="sng" algn="ctr">
+                      <a:noFill/>
+                    </a:lnR>
+                    <a:lnT w="0" cap="flat" cmpd="sng" algn="ctr">
+                      <a:noFill/>
+                    </a:lnT>
+                    <a:lnB w="7620" cap="flat" cmpd="sng" algn="ctr">
+                      <a:solidFill>
+                        <a:srgbClr val="E3E7EC"/>
+                      </a:solidFill>
+                      <a:prstDash val="solid"/>
+                      <a:round/>
+                      <a:headEnd type="none" w="med" len="med"/>
+                      <a:tailEnd type="none" w="med" len="med"/>
+                    </a:lnB>
+                    <a:solidFill>
+                      <a:srgbClr val="FFFFFF"/>
+                    </a:solidFill>
+                  </a:tcPr>
+                </a:tc>
+                <a:tc>
+                  <a:txBody>
+                    <a:bodyPr/>
+                    <a:lstStyle/>
+                    <a:p>
+                      <a:pPr algn="l" indent="0" marL="0">
+                        <a:lnSpc>
+                          <a:spcPts val="898"/>
+                        </a:lnSpc>
+                        <a:buNone/>
+                      </a:pPr>
+                      <a:r>
+                        <a:rPr lang="en-US" sz="660" dirty="0">
+                          <a:solidFill>
+                            <a:srgbClr val="4A5565"/>
+                          </a:solidFill>
+                          <a:latin typeface="Poppins" pitchFamily="34" charset="0"/>
+                          <a:ea typeface="Poppins" pitchFamily="34" charset="-122"/>
+                          <a:cs typeface="Poppins" pitchFamily="34" charset="-120"/>
+                        </a:rPr>
+                        <a:t>Harry</a:t>
+                      </a:r>
+                      <a:endParaRPr lang="en-US" sz="660" dirty="0">
+                        <a:latin typeface="Poppins" charset="0"/>
+                        <a:ea typeface="Poppins" charset="0"/>
+                        <a:cs typeface="Poppins" charset="0"/>
+                      </a:endParaRPr>
+                    </a:p>
+                  </a:txBody>
+                  <a:tcPr marL="46800" marR="46800" marT="46800" marB="46800" anchor="t">
+                    <a:lnL w="0" cap="flat" cmpd="sng" algn="ctr">
+                      <a:noFill/>
+                    </a:lnL>
+                    <a:lnR w="0" cap="flat" cmpd="sng" algn="ctr">
+                      <a:noFill/>
+                    </a:lnR>
+                    <a:lnT w="0" cap="flat" cmpd="sng" algn="ctr">
+                      <a:noFill/>
+                    </a:lnT>
+                    <a:lnB w="7620" cap="flat" cmpd="sng" algn="ctr">
+                      <a:solidFill>
+                        <a:srgbClr val="E3E7EC"/>
+                      </a:solidFill>
+                      <a:prstDash val="solid"/>
+                      <a:round/>
+                      <a:headEnd type="none" w="med" len="med"/>
+                      <a:tailEnd type="none" w="med" len="med"/>
+                    </a:lnB>
+                    <a:solidFill>
+                      <a:srgbClr val="FFFFFF"/>
+                    </a:solidFill>
+                  </a:tcPr>
+                </a:tc>
+              </a:tr>
+              <a:tr h="229682">
+                <a:tc>
+                  <a:txBody>
+                    <a:bodyPr/>
+                    <a:lstStyle/>
+                    <a:p>
+                      <a:pPr algn="l" indent="0" marL="0">
+                        <a:lnSpc>
+                          <a:spcPts val="898"/>
+                        </a:lnSpc>
+                        <a:buNone/>
+                      </a:pPr>
+                      <a:r>
+                        <a:rPr lang="en-US" sz="660" b="1" dirty="0">
+                          <a:solidFill>
+                            <a:srgbClr val="0E171F"/>
+                          </a:solidFill>
+                          <a:latin typeface="Poppins" pitchFamily="34" charset="0"/>
+                          <a:ea typeface="Poppins" pitchFamily="34" charset="-122"/>
+                          <a:cs typeface="Poppins" pitchFamily="34" charset="-120"/>
+                        </a:rPr>
+                        <a:t>Cannery contact</a:t>
+                      </a:r>
+                      <a:endParaRPr lang="en-US" sz="660" dirty="0">
+                        <a:latin typeface="Poppins" charset="0"/>
+                        <a:ea typeface="Poppins" charset="0"/>
+                        <a:cs typeface="Poppins" charset="0"/>
+                      </a:endParaRPr>
+                    </a:p>
+                  </a:txBody>
+                  <a:tcPr marL="46800" marR="46800" marT="46800" marB="46800" anchor="t">
+                    <a:lnL w="0" cap="flat" cmpd="sng" algn="ctr">
+                      <a:noFill/>
+                    </a:lnL>
+                    <a:lnR w="0" cap="flat" cmpd="sng" algn="ctr">
+                      <a:noFill/>
+                    </a:lnR>
+                    <a:lnT w="0" cap="flat" cmpd="sng" algn="ctr">
+                      <a:noFill/>
+                    </a:lnT>
+                    <a:lnB w="7620" cap="flat" cmpd="sng" algn="ctr">
+                      <a:solidFill>
+                        <a:srgbClr val="E3E7EC"/>
+                      </a:solidFill>
+                      <a:prstDash val="solid"/>
+                      <a:round/>
+                      <a:headEnd type="none" w="med" len="med"/>
+                      <a:tailEnd type="none" w="med" len="med"/>
+                    </a:lnB>
+                    <a:solidFill>
+                      <a:srgbClr val="F5F7FA"/>
+                    </a:solidFill>
+                  </a:tcPr>
+                </a:tc>
+                <a:tc>
+                  <a:txBody>
+                    <a:bodyPr/>
+                    <a:lstStyle/>
+                    <a:p>
+                      <a:pPr algn="l" indent="0" marL="0">
+                        <a:lnSpc>
+                          <a:spcPts val="898"/>
+                        </a:lnSpc>
+                        <a:buNone/>
+                      </a:pPr>
+                      <a:r>
+                        <a:rPr lang="en-US" sz="660" dirty="0">
+                          <a:solidFill>
+                            <a:srgbClr val="4A5565"/>
+                          </a:solidFill>
+                          <a:latin typeface="Poppins" pitchFamily="34" charset="0"/>
+                          <a:ea typeface="Poppins" pitchFamily="34" charset="-122"/>
+                          <a:cs typeface="Poppins" pitchFamily="34" charset="-120"/>
+                        </a:rPr>
+                        <a:t>Parked. Canning is not in Justin's plan</a:t>
+                      </a:r>
+                      <a:endParaRPr lang="en-US" sz="660" dirty="0">
+                        <a:latin typeface="Poppins" charset="0"/>
+                        <a:ea typeface="Poppins" charset="0"/>
+                        <a:cs typeface="Poppins" charset="0"/>
+                      </a:endParaRPr>
+                    </a:p>
+                  </a:txBody>
+                  <a:tcPr marL="46800" marR="46800" marT="46800" marB="46800" anchor="t">
+                    <a:lnL w="0" cap="flat" cmpd="sng" algn="ctr">
+                      <a:noFill/>
+                    </a:lnL>
+                    <a:lnR w="0" cap="flat" cmpd="sng" algn="ctr">
+                      <a:noFill/>
+                    </a:lnR>
+                    <a:lnT w="0" cap="flat" cmpd="sng" algn="ctr">
+                      <a:noFill/>
+                    </a:lnT>
+                    <a:lnB w="7620" cap="flat" cmpd="sng" algn="ctr">
+                      <a:solidFill>
+                        <a:srgbClr val="E3E7EC"/>
+                      </a:solidFill>
+                      <a:prstDash val="solid"/>
+                      <a:round/>
+                      <a:headEnd type="none" w="med" len="med"/>
+                      <a:tailEnd type="none" w="med" len="med"/>
+                    </a:lnB>
+                    <a:solidFill>
+                      <a:srgbClr val="F5F7FA"/>
+                    </a:solidFill>
+                  </a:tcPr>
+                </a:tc>
+                <a:tc>
+                  <a:txBody>
+                    <a:bodyPr/>
+                    <a:lstStyle/>
+                    <a:p>
+                      <a:pPr algn="l" indent="0" marL="0">
+                        <a:lnSpc>
+                          <a:spcPts val="898"/>
+                        </a:lnSpc>
+                        <a:buNone/>
+                      </a:pPr>
+                      <a:r>
+                        <a:rPr lang="en-US" sz="660" dirty="0">
+                          <a:solidFill>
+                            <a:srgbClr val="4A5565"/>
+                          </a:solidFill>
+                          <a:latin typeface="Poppins" pitchFamily="34" charset="0"/>
+                          <a:ea typeface="Poppins" pitchFamily="34" charset="-122"/>
+                          <a:cs typeface="Poppins" pitchFamily="34" charset="-120"/>
+                        </a:rPr>
+                        <a:t>Clent</a:t>
+                      </a:r>
+                      <a:endParaRPr lang="en-US" sz="660" dirty="0">
+                        <a:latin typeface="Poppins" charset="0"/>
+                        <a:ea typeface="Poppins" charset="0"/>
+                        <a:cs typeface="Poppins" charset="0"/>
+                      </a:endParaRPr>
+                    </a:p>
+                  </a:txBody>
+                  <a:tcPr marL="46800" marR="46800" marT="46800" marB="46800" anchor="t">
+                    <a:lnL w="0" cap="flat" cmpd="sng" algn="ctr">
+                      <a:noFill/>
+                    </a:lnL>
+                    <a:lnR w="0" cap="flat" cmpd="sng" algn="ctr">
+                      <a:noFill/>
+                    </a:lnR>
+                    <a:lnT w="0" cap="flat" cmpd="sng" algn="ctr">
+                      <a:noFill/>
+                    </a:lnT>
+                    <a:lnB w="7620" cap="flat" cmpd="sng" algn="ctr">
+                      <a:solidFill>
+                        <a:srgbClr val="E3E7EC"/>
+                      </a:solidFill>
+                      <a:prstDash val="solid"/>
+                      <a:round/>
+                      <a:headEnd type="none" w="med" len="med"/>
+                      <a:tailEnd type="none" w="med" len="med"/>
+                    </a:lnB>
+                    <a:solidFill>
+                      <a:srgbClr val="F5F7FA"/>
+                    </a:solidFill>
+                  </a:tcPr>
+                </a:tc>
+              </a:tr>
+              <a:tr h="229682">
+                <a:tc>
+                  <a:txBody>
+                    <a:bodyPr/>
+                    <a:lstStyle/>
+                    <a:p>
+                      <a:pPr algn="l" indent="0" marL="0">
+                        <a:lnSpc>
+                          <a:spcPts val="898"/>
+                        </a:lnSpc>
+                        <a:buNone/>
+                      </a:pPr>
+                      <a:r>
+                        <a:rPr lang="en-US" sz="660" b="1" dirty="0">
+                          <a:solidFill>
+                            <a:srgbClr val="0E171F"/>
+                          </a:solidFill>
+                          <a:latin typeface="Poppins" pitchFamily="34" charset="0"/>
+                          <a:ea typeface="Poppins" pitchFamily="34" charset="-122"/>
+                          <a:cs typeface="Poppins" pitchFamily="34" charset="-120"/>
+                        </a:rPr>
+                        <a:t>JVPs and referral partners</a:t>
+                      </a:r>
+                      <a:endParaRPr lang="en-US" sz="660" dirty="0">
+                        <a:latin typeface="Poppins" charset="0"/>
+                        <a:ea typeface="Poppins" charset="0"/>
+                        <a:cs typeface="Poppins" charset="0"/>
+                      </a:endParaRPr>
+                    </a:p>
+                  </a:txBody>
+                  <a:tcPr marL="46800" marR="46800" marT="46800" marB="46800" anchor="t">
+                    <a:lnL w="0" cap="flat" cmpd="sng" algn="ctr">
+                      <a:noFill/>
+                    </a:lnL>
+                    <a:lnR w="0" cap="flat" cmpd="sng" algn="ctr">
+                      <a:noFill/>
+                    </a:lnR>
+                    <a:lnT w="0" cap="flat" cmpd="sng" algn="ctr">
+                      <a:noFill/>
+                    </a:lnT>
+                    <a:lnB w="7620" cap="flat" cmpd="sng" algn="ctr">
+                      <a:solidFill>
+                        <a:srgbClr val="E3E7EC"/>
+                      </a:solidFill>
+                      <a:prstDash val="solid"/>
+                      <a:round/>
+                      <a:headEnd type="none" w="med" len="med"/>
+                      <a:tailEnd type="none" w="med" len="med"/>
+                    </a:lnB>
+                    <a:solidFill>
+                      <a:srgbClr val="FFFFFF"/>
+                    </a:solidFill>
+                  </a:tcPr>
+                </a:tc>
+                <a:tc>
+                  <a:txBody>
+                    <a:bodyPr/>
+                    <a:lstStyle/>
+                    <a:p>
+                      <a:pPr algn="l" indent="0" marL="0">
+                        <a:lnSpc>
+                          <a:spcPts val="898"/>
+                        </a:lnSpc>
+                        <a:buNone/>
+                      </a:pPr>
+                      <a:r>
+                        <a:rPr lang="en-US" sz="660" dirty="0">
+                          <a:solidFill>
+                            <a:srgbClr val="4A5565"/>
+                          </a:solidFill>
+                          <a:latin typeface="Poppins" pitchFamily="34" charset="0"/>
+                          <a:ea typeface="Poppins" pitchFamily="34" charset="-122"/>
+                          <a:cs typeface="Poppins" pitchFamily="34" charset="-120"/>
+                        </a:rPr>
                         <a:t>List built, outreach started within three months</a:t>
+                      </a:r>
+                      <a:endParaRPr lang="en-US" sz="660" dirty="0">
+                        <a:latin typeface="Poppins" charset="0"/>
+                        <a:ea typeface="Poppins" charset="0"/>
+                        <a:cs typeface="Poppins" charset="0"/>
+                      </a:endParaRPr>
+                    </a:p>
+                  </a:txBody>
+                  <a:tcPr marL="46800" marR="46800" marT="46800" marB="46800" anchor="t">
+                    <a:lnL w="0" cap="flat" cmpd="sng" algn="ctr">
+                      <a:noFill/>
+                    </a:lnL>
+                    <a:lnR w="0" cap="flat" cmpd="sng" algn="ctr">
+                      <a:noFill/>
+                    </a:lnR>
+                    <a:lnT w="0" cap="flat" cmpd="sng" algn="ctr">
+                      <a:noFill/>
+                    </a:lnT>
+                    <a:lnB w="7620" cap="flat" cmpd="sng" algn="ctr">
+                      <a:solidFill>
+                        <a:srgbClr val="E3E7EC"/>
+                      </a:solidFill>
+                      <a:prstDash val="solid"/>
+                      <a:round/>
+                      <a:headEnd type="none" w="med" len="med"/>
+                      <a:tailEnd type="none" w="med" len="med"/>
+                    </a:lnB>
+                    <a:solidFill>
+                      <a:srgbClr val="FFFFFF"/>
+                    </a:solidFill>
+                  </a:tcPr>
+                </a:tc>
+                <a:tc>
+                  <a:txBody>
+                    <a:bodyPr/>
+                    <a:lstStyle/>
+                    <a:p>
+                      <a:pPr algn="l" indent="0" marL="0">
+                        <a:lnSpc>
+                          <a:spcPts val="898"/>
+                        </a:lnSpc>
+                        <a:buNone/>
+                      </a:pPr>
+                      <a:r>
+                        <a:rPr lang="en-US" sz="660" dirty="0">
+                          <a:solidFill>
+                            <a:srgbClr val="4A5565"/>
+                          </a:solidFill>
+                          <a:latin typeface="Poppins" pitchFamily="34" charset="0"/>
+                          <a:ea typeface="Poppins" pitchFamily="34" charset="-122"/>
+                          <a:cs typeface="Poppins" pitchFamily="34" charset="-120"/>
+                        </a:rPr>
+                        <a:t>Harry</a:t>
+                      </a:r>
+                      <a:endParaRPr lang="en-US" sz="660" dirty="0">
+                        <a:latin typeface="Poppins" charset="0"/>
+                        <a:ea typeface="Poppins" charset="0"/>
+                        <a:cs typeface="Poppins" charset="0"/>
+                      </a:endParaRPr>
+                    </a:p>
+                  </a:txBody>
+                  <a:tcPr marL="46800" marR="46800" marT="46800" marB="46800" anchor="t">
+                    <a:lnL w="0" cap="flat" cmpd="sng" algn="ctr">
+                      <a:noFill/>
+                    </a:lnL>
+                    <a:lnR w="0" cap="flat" cmpd="sng" algn="ctr">
+                      <a:noFill/>
+                    </a:lnR>
+                    <a:lnT w="0" cap="flat" cmpd="sng" algn="ctr">
+                      <a:noFill/>
+                    </a:lnT>
+                    <a:lnB w="7620" cap="flat" cmpd="sng" algn="ctr">
+                      <a:solidFill>
+                        <a:srgbClr val="E3E7EC"/>
+                      </a:solidFill>
+                      <a:prstDash val="solid"/>
+                      <a:round/>
+                      <a:headEnd type="none" w="med" len="med"/>
+                      <a:tailEnd type="none" w="med" len="med"/>
+                    </a:lnB>
+                    <a:solidFill>
+                      <a:srgbClr val="FFFFFF"/>
+                    </a:solidFill>
+                  </a:tcPr>
+                </a:tc>
+              </a:tr>
+              <a:tr h="229682">
+                <a:tc>
+                  <a:txBody>
+                    <a:bodyPr/>
+                    <a:lstStyle/>
+                    <a:p>
+                      <a:pPr algn="l" indent="0" marL="0">
+                        <a:lnSpc>
+                          <a:spcPts val="898"/>
+                        </a:lnSpc>
+                        <a:buNone/>
+                      </a:pPr>
+                      <a:r>
+                        <a:rPr lang="en-US" sz="660" b="1" dirty="0">
+                          <a:solidFill>
+                            <a:srgbClr val="0E171F"/>
+                          </a:solidFill>
+                          <a:latin typeface="Poppins" pitchFamily="34" charset="0"/>
+                          <a:ea typeface="Poppins" pitchFamily="34" charset="-122"/>
+                          <a:cs typeface="Poppins" pitchFamily="34" charset="-120"/>
+                        </a:rPr>
+                        <a:t>Brand ambassadors</a:t>
+                      </a:r>
+                      <a:endParaRPr lang="en-US" sz="660" dirty="0">
+                        <a:latin typeface="Poppins" charset="0"/>
+                        <a:ea typeface="Poppins" charset="0"/>
+                        <a:cs typeface="Poppins" charset="0"/>
+                      </a:endParaRPr>
+                    </a:p>
+                  </a:txBody>
+                  <a:tcPr marL="46800" marR="46800" marT="46800" marB="46800" anchor="t">
+                    <a:lnL w="0" cap="flat" cmpd="sng" algn="ctr">
+                      <a:noFill/>
+                    </a:lnL>
+                    <a:lnR w="0" cap="flat" cmpd="sng" algn="ctr">
+                      <a:noFill/>
+                    </a:lnR>
+                    <a:lnT w="0" cap="flat" cmpd="sng" algn="ctr">
+                      <a:noFill/>
+                    </a:lnT>
+                    <a:lnB w="7620" cap="flat" cmpd="sng" algn="ctr">
+                      <a:solidFill>
+                        <a:srgbClr val="E3E7EC"/>
+                      </a:solidFill>
+                      <a:prstDash val="solid"/>
+                      <a:round/>
+                      <a:headEnd type="none" w="med" len="med"/>
+                      <a:tailEnd type="none" w="med" len="med"/>
+                    </a:lnB>
+                    <a:solidFill>
+                      <a:srgbClr val="F5F7FA"/>
+                    </a:solidFill>
+                  </a:tcPr>
+                </a:tc>
+                <a:tc>
+                  <a:txBody>
+                    <a:bodyPr/>
+                    <a:lstStyle/>
+                    <a:p>
+                      <a:pPr algn="l" indent="0" marL="0">
+                        <a:lnSpc>
+                          <a:spcPts val="898"/>
+                        </a:lnSpc>
+                        <a:buNone/>
+                      </a:pPr>
+                      <a:r>
+                        <a:rPr lang="en-US" sz="660" dirty="0">
+                          <a:solidFill>
+                            <a:srgbClr val="4A5565"/>
+                          </a:solidFill>
+                          <a:latin typeface="Poppins" pitchFamily="34" charset="0"/>
+                          <a:ea typeface="Poppins" pitchFamily="34" charset="-122"/>
+                          <a:cs typeface="Poppins" pitchFamily="34" charset="-120"/>
+                        </a:rPr>
+                        <a:t>Kurt, Troy, Mitch, Aden, Ash. UGC content ready to deploy</a:t>
                       </a:r>
                       <a:endParaRPr lang="en-US" sz="660" dirty="0">
                         <a:latin typeface="Poppins" charset="0"/>
@@ -21801,167 +22664,6 @@
                   </a:tcPr>
                 </a:tc>
               </a:tr>
-              <a:tr h="361991">
-                <a:tc>
-                  <a:txBody>
-                    <a:bodyPr/>
-                    <a:lstStyle/>
-                    <a:p>
-                      <a:pPr algn="l" indent="0" marL="0">
-                        <a:lnSpc>
-                          <a:spcPts val="898"/>
-                        </a:lnSpc>
-                        <a:buNone/>
-                      </a:pPr>
-                      <a:r>
-                        <a:rPr lang="en-US" sz="660" b="1" dirty="0">
-                          <a:solidFill>
-                            <a:srgbClr val="0E171F"/>
-                          </a:solidFill>
-                          <a:latin typeface="Poppins" pitchFamily="34" charset="0"/>
-                          <a:ea typeface="Poppins" pitchFamily="34" charset="-122"/>
-                          <a:cs typeface="Poppins" pitchFamily="34" charset="-120"/>
-                        </a:rPr>
-                        <a:t>Brand ambassadors</a:t>
-                      </a:r>
-                      <a:endParaRPr lang="en-US" sz="660" dirty="0">
-                        <a:latin typeface="Poppins" charset="0"/>
-                        <a:ea typeface="Poppins" charset="0"/>
-                        <a:cs typeface="Poppins" charset="0"/>
-                      </a:endParaRPr>
-                    </a:p>
-                  </a:txBody>
-                  <a:tcPr marL="46800" marR="46800" marT="46800" marB="46800" anchor="t">
-                    <a:lnL w="0" cap="flat" cmpd="sng" algn="ctr">
-                      <a:noFill/>
-                    </a:lnL>
-                    <a:lnR w="0" cap="flat" cmpd="sng" algn="ctr">
-                      <a:noFill/>
-                    </a:lnR>
-                    <a:lnT w="0" cap="flat" cmpd="sng" algn="ctr">
-                      <a:noFill/>
-                    </a:lnT>
-                    <a:lnB w="7620" cap="flat" cmpd="sng" algn="ctr">
-                      <a:solidFill>
-                        <a:srgbClr val="E3E7EC"/>
-                      </a:solidFill>
-                      <a:prstDash val="solid"/>
-                      <a:round/>
-                      <a:headEnd type="none" w="med" len="med"/>
-                      <a:tailEnd type="none" w="med" len="med"/>
-                    </a:lnB>
-                    <a:solidFill>
-                      <a:srgbClr val="FFFFFF"/>
-                    </a:solidFill>
-                  </a:tcPr>
-                </a:tc>
-                <a:tc>
-                  <a:txBody>
-                    <a:bodyPr/>
-                    <a:lstStyle/>
-                    <a:p>
-                      <a:pPr algn="l" indent="0" marL="0">
-                        <a:lnSpc>
-                          <a:spcPts val="898"/>
-                        </a:lnSpc>
-                        <a:buNone/>
-                      </a:pPr>
-                      <a:r>
-                        <a:rPr lang="en-US" sz="660" dirty="0">
-                          <a:solidFill>
-                            <a:srgbClr val="4A5565"/>
-                          </a:solidFill>
-                          <a:latin typeface="Poppins" pitchFamily="34" charset="0"/>
-                          <a:ea typeface="Poppins" pitchFamily="34" charset="-122"/>
-                          <a:cs typeface="Poppins" pitchFamily="34" charset="-120"/>
-                        </a:rPr>
-                        <a:t>Kurt, Troy, Mitch, Aden, Ash. UGC content ready to deploy</a:t>
-                      </a:r>
-                      <a:endParaRPr lang="en-US" sz="660" dirty="0">
-                        <a:latin typeface="Poppins" charset="0"/>
-                        <a:ea typeface="Poppins" charset="0"/>
-                        <a:cs typeface="Poppins" charset="0"/>
-                      </a:endParaRPr>
-                    </a:p>
-                  </a:txBody>
-                  <a:tcPr marL="46800" marR="46800" marT="46800" marB="46800" anchor="t">
-                    <a:lnL w="0" cap="flat" cmpd="sng" algn="ctr">
-                      <a:noFill/>
-                    </a:lnL>
-                    <a:lnR w="0" cap="flat" cmpd="sng" algn="ctr">
-                      <a:noFill/>
-                    </a:lnR>
-                    <a:lnT w="0" cap="flat" cmpd="sng" algn="ctr">
-                      <a:noFill/>
-                    </a:lnT>
-                    <a:lnB w="7620" cap="flat" cmpd="sng" algn="ctr">
-                      <a:solidFill>
-                        <a:srgbClr val="E3E7EC"/>
-                      </a:solidFill>
-                      <a:prstDash val="solid"/>
-                      <a:round/>
-                      <a:headEnd type="none" w="med" len="med"/>
-                      <a:tailEnd type="none" w="med" len="med"/>
-                    </a:lnB>
-                    <a:solidFill>
-                      <a:srgbClr val="FFFFFF"/>
-                    </a:solidFill>
-                  </a:tcPr>
-                </a:tc>
-                <a:tc>
-                  <a:txBody>
-                    <a:bodyPr/>
-                    <a:lstStyle/>
-                    <a:p>
-                      <a:pPr algn="l" indent="0" marL="0">
-                        <a:lnSpc>
-                          <a:spcPts val="898"/>
-                        </a:lnSpc>
-                        <a:buNone/>
-                      </a:pPr>
-                      <a:r>
-                        <a:rPr lang="en-US" sz="660" dirty="0">
-                          <a:solidFill>
-                            <a:srgbClr val="4A5565"/>
-                          </a:solidFill>
-                          <a:latin typeface="Poppins" pitchFamily="34" charset="0"/>
-                          <a:ea typeface="Poppins" pitchFamily="34" charset="-122"/>
-                          <a:cs typeface="Poppins" pitchFamily="34" charset="-120"/>
-                        </a:rPr>
-                        <a:t>Harry</a:t>
-                      </a:r>
-                      <a:endParaRPr lang="en-US" sz="660" dirty="0">
-                        <a:latin typeface="Poppins" charset="0"/>
-                        <a:ea typeface="Poppins" charset="0"/>
-                        <a:cs typeface="Poppins" charset="0"/>
-                      </a:endParaRPr>
-                    </a:p>
-                  </a:txBody>
-                  <a:tcPr marL="46800" marR="46800" marT="46800" marB="46800" anchor="t">
-                    <a:lnL w="0" cap="flat" cmpd="sng" algn="ctr">
-                      <a:noFill/>
-                    </a:lnL>
-                    <a:lnR w="0" cap="flat" cmpd="sng" algn="ctr">
-                      <a:noFill/>
-                    </a:lnR>
-                    <a:lnT w="0" cap="flat" cmpd="sng" algn="ctr">
-                      <a:noFill/>
-                    </a:lnT>
-                    <a:lnB w="7620" cap="flat" cmpd="sng" algn="ctr">
-                      <a:solidFill>
-                        <a:srgbClr val="E3E7EC"/>
-                      </a:solidFill>
-                      <a:prstDash val="solid"/>
-                      <a:round/>
-                      <a:headEnd type="none" w="med" len="med"/>
-                      <a:tailEnd type="none" w="med" len="med"/>
-                    </a:lnB>
-                    <a:solidFill>
-                      <a:srgbClr val="FFFFFF"/>
-                    </a:solidFill>
-                  </a:tcPr>
-                </a:tc>
-              </a:tr>
             </a:tbl>
           </a:graphicData>
         </a:graphic>
@@ -21974,8 +22676,8 @@
         </p:nvSpPr>
         <p:spPr>
           <a:xfrm>
-            <a:off x="5298934" y="7104790"/>
-            <a:ext cx="4521737" cy="0"/>
+            <a:off x="4083925" y="7337776"/>
+            <a:ext cx="5736746" cy="0"/>
           </a:xfrm>
           <a:prstGeom prst="line">
             <a:avLst/>
@@ -21997,8 +22699,8 @@
         </p:nvSpPr>
         <p:spPr>
           <a:xfrm>
-            <a:off x="5298934" y="7162390"/>
-            <a:ext cx="4521737" cy="120015"/>
+            <a:off x="4083925" y="7395376"/>
+            <a:ext cx="5736746" cy="120015"/>
           </a:xfrm>
           <a:prstGeom prst="rect">
             <a:avLst/>
@@ -22025,7 +22727,7 @@
                 <a:ea typeface="Poppins" pitchFamily="34" charset="-122"/>
                 <a:cs typeface="Poppins" pitchFamily="34" charset="-120"/>
               </a:rPr>
-              <a:t>Named in the catch-up and in Justin's plan. The ambassadors are Justin's list.</a:t>
+              <a:t>Zip water and Value H2O are carried separately until the distribution figures are confirmed as one contact or two.</a:t>
             </a:r>
             <a:endParaRPr lang="en-US" sz="700" dirty="0"/>
           </a:p>
@@ -22039,8 +22741,8 @@
         </p:nvSpPr>
         <p:spPr>
           <a:xfrm>
-            <a:off x="10043770" y="4310536"/>
-            <a:ext cx="4752137" cy="3087069"/>
+            <a:off x="10043770" y="4019303"/>
+            <a:ext cx="4752137" cy="3611288"/>
           </a:xfrm>
           <a:prstGeom prst="rect">
             <a:avLst/>
@@ -22064,7 +22766,7 @@
         </p:nvSpPr>
         <p:spPr>
           <a:xfrm>
-            <a:off x="10158970" y="4425736"/>
+            <a:off x="10158970" y="4134503"/>
             <a:ext cx="4521737" cy="112268"/>
           </a:xfrm>
           <a:prstGeom prst="rect">
@@ -22106,7 +22808,7 @@
         </p:nvSpPr>
         <p:spPr>
           <a:xfrm>
-            <a:off x="10158970" y="4595604"/>
+            <a:off x="10158970" y="4304371"/>
             <a:ext cx="4521737" cy="308610"/>
           </a:xfrm>
           <a:prstGeom prst="rect">
@@ -22148,7 +22850,7 @@
         </p:nvSpPr>
         <p:spPr>
           <a:xfrm>
-            <a:off x="10158970" y="5069814"/>
+            <a:off x="10158970" y="4778581"/>
             <a:ext cx="4521737" cy="617220"/>
           </a:xfrm>
           <a:prstGeom prst="rect">
@@ -22207,7 +22909,7 @@
         </p:nvSpPr>
         <p:spPr>
           <a:xfrm>
-            <a:off x="10158970" y="5852634"/>
+            <a:off x="10158970" y="5561401"/>
             <a:ext cx="4521737" cy="462915"/>
           </a:xfrm>
           <a:prstGeom prst="rect">
@@ -22266,7 +22968,7 @@
         </p:nvSpPr>
         <p:spPr>
           <a:xfrm>
-            <a:off x="10158970" y="6984775"/>
+            <a:off x="10158970" y="7217761"/>
             <a:ext cx="4521737" cy="0"/>
           </a:xfrm>
           <a:prstGeom prst="line">
@@ -22289,7 +22991,7 @@
         </p:nvSpPr>
         <p:spPr>
           <a:xfrm>
-            <a:off x="10158970" y="7042375"/>
+            <a:off x="10158970" y="7275361"/>
             <a:ext cx="4521737" cy="240030"/>
           </a:xfrm>
           <a:prstGeom prst="rect">
@@ -22331,8 +23033,8 @@
         </p:nvSpPr>
         <p:spPr>
           <a:xfrm>
-            <a:off x="323698" y="7505504"/>
-            <a:ext cx="9612173" cy="2970575"/>
+            <a:off x="323698" y="7738490"/>
+            <a:ext cx="9612173" cy="2737589"/>
           </a:xfrm>
           <a:prstGeom prst="rect">
             <a:avLst/>
@@ -22356,7 +23058,7 @@
         </p:nvSpPr>
         <p:spPr>
           <a:xfrm>
-            <a:off x="438898" y="7620704"/>
+            <a:off x="438898" y="7853690"/>
             <a:ext cx="9381773" cy="112268"/>
           </a:xfrm>
           <a:prstGeom prst="rect">
@@ -22422,7 +23124,7 @@
           </p:nvPr>
         </p:nvGraphicFramePr>
         <p:xfrm>
-          <a:off x="438898" y="7790572"/>
+          <a:off x="438898" y="8023558"/>
           <a:ext cx="11339703" cy="914400"/>
         </p:xfrm>
         <a:graphic>
@@ -22438,7 +23140,7 @@
                 <a:gridCol w="1171424"/>
                 <a:gridCol w="838926"/>
               </a:tblGrid>
-              <a:tr h="275851">
+              <a:tr h="246728">
                 <a:tc>
                   <a:txBody>
                     <a:bodyPr/>
@@ -22811,7 +23513,7 @@
                   </a:tcPr>
                 </a:tc>
               </a:tr>
-              <a:tr h="293149">
+              <a:tr h="264025">
                 <a:tc>
                   <a:txBody>
                     <a:bodyPr/>
@@ -23184,7 +23886,7 @@
                   </a:tcPr>
                 </a:tc>
               </a:tr>
-              <a:tr h="293149">
+              <a:tr h="264025">
                 <a:tc>
                   <a:txBody>
                     <a:bodyPr/>
@@ -23557,7 +24259,7 @@
                   </a:tcPr>
                 </a:tc>
               </a:tr>
-              <a:tr h="293149">
+              <a:tr h="264025">
                 <a:tc>
                   <a:txBody>
                     <a:bodyPr/>
@@ -23930,7 +24632,7 @@
                   </a:tcPr>
                 </a:tc>
               </a:tr>
-              <a:tr h="293149">
+              <a:tr h="264025">
                 <a:tc>
                   <a:txBody>
                     <a:bodyPr/>
@@ -24303,7 +25005,7 @@
                   </a:tcPr>
                 </a:tc>
               </a:tr>
-              <a:tr h="293149">
+              <a:tr h="264025">
                 <a:tc>
                   <a:txBody>
                     <a:bodyPr/>
@@ -24676,7 +25378,7 @@
                   </a:tcPr>
                 </a:tc>
               </a:tr>
-              <a:tr h="293149">
+              <a:tr h="264025">
                 <a:tc>
                   <a:txBody>
                     <a:bodyPr/>
@@ -25049,7 +25751,7 @@
                   </a:tcPr>
                 </a:tc>
               </a:tr>
-              <a:tr h="293149">
+              <a:tr h="264025">
                 <a:tc>
                   <a:txBody>
                     <a:bodyPr/>
@@ -25499,8 +26201,8 @@
         </p:nvSpPr>
         <p:spPr>
           <a:xfrm>
-            <a:off x="10043770" y="7505504"/>
-            <a:ext cx="4752137" cy="2970575"/>
+            <a:off x="10043770" y="7738490"/>
+            <a:ext cx="4752137" cy="2737589"/>
           </a:xfrm>
           <a:prstGeom prst="rect">
             <a:avLst/>
@@ -25524,7 +26226,7 @@
         </p:nvSpPr>
         <p:spPr>
           <a:xfrm>
-            <a:off x="10158970" y="7620704"/>
+            <a:off x="10158970" y="7853690"/>
             <a:ext cx="4521737" cy="112268"/>
           </a:xfrm>
           <a:prstGeom prst="rect">
@@ -25566,7 +26268,7 @@
         </p:nvSpPr>
         <p:spPr>
           <a:xfrm>
-            <a:off x="10158970" y="7826611"/>
+            <a:off x="10158970" y="8059597"/>
             <a:ext cx="50400" cy="50400"/>
           </a:xfrm>
           <a:prstGeom prst="rect">
@@ -25591,7 +26293,7 @@
         </p:nvSpPr>
         <p:spPr>
           <a:xfrm>
-            <a:off x="10266970" y="7790572"/>
+            <a:off x="10266970" y="8023558"/>
             <a:ext cx="4413737" cy="129794"/>
           </a:xfrm>
           <a:prstGeom prst="rect">
@@ -25650,7 +26352,7 @@
         </p:nvSpPr>
         <p:spPr>
           <a:xfrm>
-            <a:off x="10158970" y="8266231"/>
+            <a:off x="10158970" y="8452620"/>
             <a:ext cx="50400" cy="50400"/>
           </a:xfrm>
           <a:prstGeom prst="rect">
@@ -25675,7 +26377,7 @@
         </p:nvSpPr>
         <p:spPr>
           <a:xfrm>
-            <a:off x="10266970" y="8230191"/>
+            <a:off x="10266970" y="8416580"/>
             <a:ext cx="4413737" cy="129794"/>
           </a:xfrm>
           <a:prstGeom prst="rect">
@@ -25734,7 +26436,7 @@
         </p:nvSpPr>
         <p:spPr>
           <a:xfrm>
-            <a:off x="10158970" y="8705851"/>
+            <a:off x="10158970" y="8845642"/>
             <a:ext cx="50400" cy="50400"/>
           </a:xfrm>
           <a:prstGeom prst="rect">
@@ -25759,7 +26461,7 @@
         </p:nvSpPr>
         <p:spPr>
           <a:xfrm>
-            <a:off x="10266970" y="8669811"/>
+            <a:off x="10266970" y="8809603"/>
             <a:ext cx="4413737" cy="129794"/>
           </a:xfrm>
           <a:prstGeom prst="rect">
@@ -25818,7 +26520,7 @@
         </p:nvSpPr>
         <p:spPr>
           <a:xfrm>
-            <a:off x="10158970" y="9145470"/>
+            <a:off x="10158970" y="9238665"/>
             <a:ext cx="50400" cy="50400"/>
           </a:xfrm>
           <a:prstGeom prst="rect">
@@ -25843,7 +26545,7 @@
         </p:nvSpPr>
         <p:spPr>
           <a:xfrm>
-            <a:off x="10266970" y="9109431"/>
+            <a:off x="10266970" y="9202625"/>
             <a:ext cx="4413737" cy="129794"/>
           </a:xfrm>
           <a:prstGeom prst="rect">
@@ -25902,7 +26604,7 @@
         </p:nvSpPr>
         <p:spPr>
           <a:xfrm>
-            <a:off x="10158970" y="9585090"/>
+            <a:off x="10158970" y="9631687"/>
             <a:ext cx="50400" cy="50400"/>
           </a:xfrm>
           <a:prstGeom prst="rect">
@@ -25927,7 +26629,7 @@
         </p:nvSpPr>
         <p:spPr>
           <a:xfrm>
-            <a:off x="10266970" y="9549051"/>
+            <a:off x="10266970" y="9595648"/>
             <a:ext cx="4413737" cy="129794"/>
           </a:xfrm>
           <a:prstGeom prst="rect">

--- a/00 Admin/11 Final Outputs/plan-on-a-page/TapThat_Plan-on-a-Page_A3.pptx
+++ b/00 Admin/11 Final Outputs/plan-on-a-page/TapThat_Plan-on-a-Page_A3.pptx
@@ -1326,8 +1326,8 @@
         </p:nvSpPr>
         <p:spPr>
           <a:xfrm>
-            <a:off x="12678246" y="365760"/>
-            <a:ext cx="1165358" cy="251460"/>
+            <a:off x="12656964" y="365760"/>
+            <a:ext cx="1186641" cy="251460"/>
           </a:xfrm>
           <a:prstGeom prst="roundRect">
             <a:avLst>
@@ -1353,8 +1353,8 @@
         </p:nvSpPr>
         <p:spPr>
           <a:xfrm>
-            <a:off x="12678246" y="365760"/>
-            <a:ext cx="1165358" cy="251460"/>
+            <a:off x="12656964" y="365760"/>
+            <a:ext cx="1186641" cy="251460"/>
           </a:xfrm>
           <a:prstGeom prst="rect">
             <a:avLst/>
@@ -1378,7 +1378,7 @@
                 <a:ea typeface="Poppins" pitchFamily="34" charset="-122"/>
                 <a:cs typeface="Poppins" pitchFamily="34" charset="-120"/>
               </a:rPr>
-              <a:t>V02 · 16 SEPT 2026</a:t>
+              <a:t>V03 · 23 SEPT 2026</a:t>
             </a:r>
             <a:endParaRPr lang="en-US" sz="650" dirty="0"/>
           </a:p>
@@ -1392,8 +1392,8 @@
         </p:nvSpPr>
         <p:spPr>
           <a:xfrm>
-            <a:off x="11370203" y="365760"/>
-            <a:ext cx="1218043" cy="251460"/>
+            <a:off x="11321238" y="365760"/>
+            <a:ext cx="1245725" cy="251460"/>
           </a:xfrm>
           <a:prstGeom prst="roundRect">
             <a:avLst>
@@ -1419,8 +1419,8 @@
         </p:nvSpPr>
         <p:spPr>
           <a:xfrm>
-            <a:off x="11370203" y="365760"/>
-            <a:ext cx="1218043" cy="251460"/>
+            <a:off x="11321238" y="365760"/>
+            <a:ext cx="1245725" cy="251460"/>
           </a:xfrm>
           <a:prstGeom prst="rect">
             <a:avLst/>
@@ -1458,8 +1458,8 @@
         </p:nvSpPr>
         <p:spPr>
           <a:xfrm>
-            <a:off x="10528736" y="365760"/>
-            <a:ext cx="751467" cy="251460"/>
+            <a:off x="10486915" y="365760"/>
+            <a:ext cx="744323" cy="251460"/>
           </a:xfrm>
           <a:prstGeom prst="roundRect">
             <a:avLst>
@@ -1485,8 +1485,8 @@
         </p:nvSpPr>
         <p:spPr>
           <a:xfrm>
-            <a:off x="10528736" y="365760"/>
-            <a:ext cx="751467" cy="251460"/>
+            <a:off x="10486915" y="365760"/>
+            <a:ext cx="744323" cy="251460"/>
           </a:xfrm>
           <a:prstGeom prst="rect">
             <a:avLst/>
@@ -1726,7 +1726,7 @@
                 <a:ea typeface="Poppins" pitchFamily="34" charset="-122"/>
                 <a:cs typeface="Poppins" pitchFamily="34" charset="-120"/>
               </a:rPr>
-              <a:t>Justin's own three-way, not yet settled: a Taproom selling kegs, a Showroom selling beers, or an Event space doing both. JP recommended pausing walk-in trade to protect the refill business; Justin's own priority is to grow taproom traffic from local business, functions and ticketed music.</a:t>
+              <a:t>settled in principle on 18 September. The taproom is an events and local business venue, not a walk-in bar. Justin's own words: Oktoberfest is a sugar hit, and he would take week-on-week revenue over it. What is still open is whether the room reads as a showroom or an event space, and that is Justin's call inside 30 days.</a:t>
             </a:r>
             <a:endParaRPr lang="en-US" sz="810" dirty="0"/>
           </a:p>
@@ -2015,7 +2015,7 @@
         </p:nvSpPr>
         <p:spPr>
           <a:xfrm>
-            <a:off x="9051961" y="1768057"/>
+            <a:off x="9051961" y="1677023"/>
             <a:ext cx="1648249" cy="223520"/>
           </a:xfrm>
           <a:prstGeom prst="rect">
@@ -2057,8 +2057,8 @@
         </p:nvSpPr>
         <p:spPr>
           <a:xfrm>
-            <a:off x="9051961" y="2049177"/>
-            <a:ext cx="1648249" cy="91034"/>
+            <a:off x="9051961" y="1958143"/>
+            <a:ext cx="1648249" cy="273101"/>
           </a:xfrm>
           <a:prstGeom prst="rect">
             <a:avLst/>
@@ -2124,7 +2124,7 @@
         </p:nvSpPr>
         <p:spPr>
           <a:xfrm>
-            <a:off x="10988209" y="1768057"/>
+            <a:off x="10988209" y="1677023"/>
             <a:ext cx="1648249" cy="223520"/>
           </a:xfrm>
           <a:prstGeom prst="rect">
@@ -2166,8 +2166,8 @@
         </p:nvSpPr>
         <p:spPr>
           <a:xfrm>
-            <a:off x="10988209" y="2049177"/>
-            <a:ext cx="1648249" cy="91034"/>
+            <a:off x="10988209" y="1958143"/>
+            <a:ext cx="1648249" cy="273101"/>
           </a:xfrm>
           <a:prstGeom prst="rect">
             <a:avLst/>
@@ -2194,7 +2194,7 @@
                 <a:ea typeface="Poppins" pitchFamily="34" charset="-122"/>
                 <a:cs typeface="Poppins" pitchFamily="34" charset="-120"/>
               </a:rPr>
-              <a:t>ACTIVE REFILLERS AT SIX MONTHS</a:t>
+              <a:t>ACTIVE REFILLERS AT SIX MONTHS. MARCH 2027, OR CHRISTMAS IF JUSTIN TAKES CHRISTY'S DATE</a:t>
             </a:r>
             <a:endParaRPr lang="en-US" sz="560" dirty="0"/>
           </a:p>
@@ -2233,7 +2233,7 @@
         </p:nvSpPr>
         <p:spPr>
           <a:xfrm>
-            <a:off x="12924458" y="1768057"/>
+            <a:off x="12924458" y="1677023"/>
             <a:ext cx="1648249" cy="223520"/>
           </a:xfrm>
           <a:prstGeom prst="rect">
@@ -2275,8 +2275,8 @@
         </p:nvSpPr>
         <p:spPr>
           <a:xfrm>
-            <a:off x="12924458" y="2049177"/>
-            <a:ext cx="1648249" cy="91034"/>
+            <a:off x="12924458" y="1958143"/>
+            <a:ext cx="1648249" cy="273101"/>
           </a:xfrm>
           <a:prstGeom prst="rect">
             <a:avLst/>
@@ -2342,7 +2342,7 @@
         </p:nvSpPr>
         <p:spPr>
           <a:xfrm>
-            <a:off x="9051961" y="2947053"/>
+            <a:off x="9051961" y="2856019"/>
             <a:ext cx="1648249" cy="223520"/>
           </a:xfrm>
           <a:prstGeom prst="rect">
@@ -2384,8 +2384,8 @@
         </p:nvSpPr>
         <p:spPr>
           <a:xfrm>
-            <a:off x="9051961" y="3228173"/>
-            <a:ext cx="1648249" cy="91034"/>
+            <a:off x="9051961" y="3137139"/>
+            <a:ext cx="1648249" cy="273101"/>
           </a:xfrm>
           <a:prstGeom prst="rect">
             <a:avLst/>
@@ -2451,7 +2451,7 @@
         </p:nvSpPr>
         <p:spPr>
           <a:xfrm>
-            <a:off x="10988209" y="2947053"/>
+            <a:off x="10988209" y="2856019"/>
             <a:ext cx="1648249" cy="223520"/>
           </a:xfrm>
           <a:prstGeom prst="rect">
@@ -2493,8 +2493,8 @@
         </p:nvSpPr>
         <p:spPr>
           <a:xfrm>
-            <a:off x="10988209" y="3228173"/>
-            <a:ext cx="1648249" cy="91034"/>
+            <a:off x="10988209" y="3137139"/>
+            <a:ext cx="1648249" cy="273101"/>
           </a:xfrm>
           <a:prstGeom prst="rect">
             <a:avLst/>
@@ -2560,7 +2560,7 @@
         </p:nvSpPr>
         <p:spPr>
           <a:xfrm>
-            <a:off x="12924458" y="2947053"/>
+            <a:off x="12924458" y="2856019"/>
             <a:ext cx="1648249" cy="223520"/>
           </a:xfrm>
           <a:prstGeom prst="rect">
@@ -2602,8 +2602,8 @@
         </p:nvSpPr>
         <p:spPr>
           <a:xfrm>
-            <a:off x="12924458" y="3228173"/>
-            <a:ext cx="1648249" cy="91034"/>
+            <a:off x="12924458" y="3137139"/>
+            <a:ext cx="1648249" cy="273101"/>
           </a:xfrm>
           <a:prstGeom prst="rect">
             <a:avLst/>
@@ -2863,7 +2863,7 @@
         <p:spPr>
           <a:xfrm>
             <a:off x="532498" y="4679120"/>
-            <a:ext cx="3292328" cy="593954"/>
+            <a:ext cx="3292328" cy="445465"/>
           </a:xfrm>
           <a:prstGeom prst="rect">
             <a:avLst/>
@@ -2904,7 +2904,7 @@
         </p:nvSpPr>
         <p:spPr>
           <a:xfrm>
-            <a:off x="532498" y="5337874"/>
+            <a:off x="532498" y="5189385"/>
             <a:ext cx="3292328" cy="296977"/>
           </a:xfrm>
           <a:prstGeom prst="rect">
@@ -3083,7 +3083,7 @@
                 <a:ea typeface="Poppins" pitchFamily="34" charset="-122"/>
                 <a:cs typeface="Poppins" pitchFamily="34" charset="-120"/>
               </a:rPr>
-              <a:t>Every household deserves beer on tap.</a:t>
+              <a:t>Home entertainment, not beer.</a:t>
             </a:r>
             <a:endParaRPr lang="en-US" sz="960" dirty="0"/>
           </a:p>
@@ -3098,7 +3098,7 @@
         <p:spPr>
           <a:xfrm>
             <a:off x="4119925" y="4679120"/>
-            <a:ext cx="3292328" cy="445465"/>
+            <a:ext cx="3292328" cy="593954"/>
           </a:xfrm>
           <a:prstGeom prst="rect">
             <a:avLst/>
@@ -3125,7 +3125,7 @@
                 <a:ea typeface="Poppins" pitchFamily="34" charset="-122"/>
                 <a:cs typeface="Poppins" pitchFamily="34" charset="-120"/>
               </a:rPr>
-              <a:t>Justin's own line for the business, aimed at homeowners who entertain, venues, sports clubs and restaurants. Confirming key messaging for each target market is a 30-day item.</a:t>
+              <a:t>Justin's line, every household deserves beer on tap, is the ambition, not the brand idea. The brand idea is that Tap That turns an ordinary catch-up into the best one on the street. The kegerator belongs beside the outdoor kitchen and the high-end barbecue, not beside the bar fridge.</a:t>
             </a:r>
             <a:endParaRPr lang="en-US" sz="790" dirty="0"/>
           </a:p>
@@ -3139,7 +3139,7 @@
         </p:nvSpPr>
         <p:spPr>
           <a:xfrm>
-            <a:off x="4119925" y="5189385"/>
+            <a:off x="4119925" y="5337874"/>
             <a:ext cx="3292328" cy="296977"/>
           </a:xfrm>
           <a:prstGeom prst="rect">
@@ -3184,7 +3184,7 @@
                 <a:ea typeface="Poppins" pitchFamily="34" charset="-122"/>
                 <a:cs typeface="Poppins" pitchFamily="34" charset="-120"/>
               </a:rPr>
-              <a:t>confirm key messaging by target market, inside 30 days.</a:t>
+              <a:t>rewrite key messaging for each target market on that basis, inside 30 days, Christy to lead.</a:t>
             </a:r>
             <a:endParaRPr lang="en-US" sz="790" dirty="0"/>
           </a:p>
@@ -3553,7 +3553,7 @@
                 <a:ea typeface="Poppins" pitchFamily="34" charset="-122"/>
                 <a:cs typeface="Poppins" pitchFamily="34" charset="-120"/>
               </a:rPr>
-              <a:t>Oktoberfest, then grow the room.</a:t>
+              <a:t>Oktoberfest, then the room as a destination.</a:t>
             </a:r>
             <a:endParaRPr lang="en-US" sz="960" dirty="0"/>
           </a:p>
@@ -3595,7 +3595,7 @@
                 <a:ea typeface="Poppins" pitchFamily="34" charset="-122"/>
                 <a:cs typeface="Poppins" pitchFamily="34" charset="-120"/>
               </a:rPr>
-              <a:t>A successful Oktoberfest and keg system giveaway first. Then taproom traffic from local business, functions and ticketed music events, Justin's own priority for the room.</a:t>
+              <a:t>A successful Oktoberfest and keg system giveaway first. Then taproom traffic from local business, functions and ticketed music events, the agreed priority for the room, not walk-ins.</a:t>
             </a:r>
             <a:endParaRPr lang="en-US" sz="790" dirty="0"/>
           </a:p>
@@ -3736,7 +3736,7 @@
         <p:spPr>
           <a:xfrm>
             <a:off x="438898" y="7617652"/>
-            <a:ext cx="677440" cy="205740"/>
+            <a:ext cx="671338" cy="205740"/>
           </a:xfrm>
           <a:prstGeom prst="roundRect">
             <a:avLst>
@@ -3763,7 +3763,7 @@
         <p:spPr>
           <a:xfrm>
             <a:off x="438898" y="7617652"/>
-            <a:ext cx="677440" cy="205740"/>
+            <a:ext cx="671338" cy="205740"/>
           </a:xfrm>
           <a:prstGeom prst="rect">
             <a:avLst/>
@@ -3801,8 +3801,8 @@
         </p:nvSpPr>
         <p:spPr>
           <a:xfrm>
-            <a:off x="1280929" y="7604851"/>
-            <a:ext cx="3679705" cy="237744"/>
+            <a:off x="1274827" y="7604851"/>
+            <a:ext cx="3685807" cy="237744"/>
           </a:xfrm>
           <a:prstGeom prst="rect">
             <a:avLst/>
@@ -3843,8 +3843,8 @@
         </p:nvSpPr>
         <p:spPr>
           <a:xfrm>
-            <a:off x="438898" y="7927584"/>
-            <a:ext cx="677440" cy="205740"/>
+            <a:off x="438898" y="7983019"/>
+            <a:ext cx="671338" cy="205740"/>
           </a:xfrm>
           <a:prstGeom prst="roundRect">
             <a:avLst>
@@ -3870,8 +3870,8 @@
         </p:nvSpPr>
         <p:spPr>
           <a:xfrm>
-            <a:off x="438898" y="7927584"/>
-            <a:ext cx="677440" cy="205740"/>
+            <a:off x="438898" y="7983019"/>
+            <a:ext cx="671338" cy="205740"/>
           </a:xfrm>
           <a:prstGeom prst="rect">
             <a:avLst/>
@@ -3909,8 +3909,8 @@
         </p:nvSpPr>
         <p:spPr>
           <a:xfrm>
-            <a:off x="1280929" y="7914782"/>
-            <a:ext cx="3679705" cy="308610"/>
+            <a:off x="1274827" y="7970218"/>
+            <a:ext cx="3685807" cy="237744"/>
           </a:xfrm>
           <a:prstGeom prst="rect">
             <a:avLst/>
@@ -3951,8 +3951,8 @@
         </p:nvSpPr>
         <p:spPr>
           <a:xfrm>
-            <a:off x="438898" y="8308381"/>
-            <a:ext cx="677440" cy="205740"/>
+            <a:off x="438898" y="8348386"/>
+            <a:ext cx="671338" cy="205740"/>
           </a:xfrm>
           <a:prstGeom prst="roundRect">
             <a:avLst>
@@ -3978,8 +3978,8 @@
         </p:nvSpPr>
         <p:spPr>
           <a:xfrm>
-            <a:off x="438898" y="8308381"/>
-            <a:ext cx="677440" cy="205740"/>
+            <a:off x="438898" y="8348386"/>
+            <a:ext cx="671338" cy="205740"/>
           </a:xfrm>
           <a:prstGeom prst="rect">
             <a:avLst/>
@@ -4017,8 +4017,8 @@
         </p:nvSpPr>
         <p:spPr>
           <a:xfrm>
-            <a:off x="1280929" y="8295580"/>
-            <a:ext cx="3679705" cy="237744"/>
+            <a:off x="1274827" y="8335585"/>
+            <a:ext cx="3685807" cy="237744"/>
           </a:xfrm>
           <a:prstGeom prst="rect">
             <a:avLst/>
@@ -4059,8 +4059,8 @@
         </p:nvSpPr>
         <p:spPr>
           <a:xfrm>
-            <a:off x="438898" y="8618313"/>
-            <a:ext cx="677440" cy="205740"/>
+            <a:off x="438898" y="8713753"/>
+            <a:ext cx="671338" cy="205740"/>
           </a:xfrm>
           <a:prstGeom prst="roundRect">
             <a:avLst>
@@ -4086,8 +4086,8 @@
         </p:nvSpPr>
         <p:spPr>
           <a:xfrm>
-            <a:off x="438898" y="8618313"/>
-            <a:ext cx="677440" cy="205740"/>
+            <a:off x="438898" y="8713753"/>
+            <a:ext cx="671338" cy="205740"/>
           </a:xfrm>
           <a:prstGeom prst="rect">
             <a:avLst/>
@@ -4125,8 +4125,8 @@
         </p:nvSpPr>
         <p:spPr>
           <a:xfrm>
-            <a:off x="1280929" y="8605511"/>
-            <a:ext cx="3679705" cy="308610"/>
+            <a:off x="1274827" y="8700952"/>
+            <a:ext cx="3685807" cy="237744"/>
           </a:xfrm>
           <a:prstGeom prst="rect">
             <a:avLst/>
@@ -4167,8 +4167,8 @@
         </p:nvSpPr>
         <p:spPr>
           <a:xfrm>
-            <a:off x="438898" y="8999110"/>
-            <a:ext cx="677440" cy="205740"/>
+            <a:off x="438898" y="9079120"/>
+            <a:ext cx="671338" cy="205740"/>
           </a:xfrm>
           <a:prstGeom prst="roundRect">
             <a:avLst>
@@ -4194,8 +4194,8 @@
         </p:nvSpPr>
         <p:spPr>
           <a:xfrm>
-            <a:off x="438898" y="8999110"/>
-            <a:ext cx="677440" cy="205740"/>
+            <a:off x="438898" y="9079120"/>
+            <a:ext cx="671338" cy="205740"/>
           </a:xfrm>
           <a:prstGeom prst="rect">
             <a:avLst/>
@@ -4233,8 +4233,8 @@
         </p:nvSpPr>
         <p:spPr>
           <a:xfrm>
-            <a:off x="1280929" y="8986309"/>
-            <a:ext cx="3679705" cy="308610"/>
+            <a:off x="1274827" y="9066319"/>
+            <a:ext cx="3685807" cy="308610"/>
           </a:xfrm>
           <a:prstGeom prst="rect">
             <a:avLst/>
@@ -4275,8 +4275,8 @@
         </p:nvSpPr>
         <p:spPr>
           <a:xfrm>
-            <a:off x="438898" y="9379908"/>
-            <a:ext cx="677440" cy="205740"/>
+            <a:off x="438898" y="9515353"/>
+            <a:ext cx="671338" cy="205740"/>
           </a:xfrm>
           <a:prstGeom prst="roundRect">
             <a:avLst>
@@ -4302,8 +4302,8 @@
         </p:nvSpPr>
         <p:spPr>
           <a:xfrm>
-            <a:off x="438898" y="9379908"/>
-            <a:ext cx="677440" cy="205740"/>
+            <a:off x="438898" y="9515353"/>
+            <a:ext cx="671338" cy="205740"/>
           </a:xfrm>
           <a:prstGeom prst="rect">
             <a:avLst/>
@@ -4341,8 +4341,8 @@
         </p:nvSpPr>
         <p:spPr>
           <a:xfrm>
-            <a:off x="1280929" y="9367106"/>
-            <a:ext cx="3679705" cy="308610"/>
+            <a:off x="1274827" y="9502552"/>
+            <a:ext cx="3685807" cy="237744"/>
           </a:xfrm>
           <a:prstGeom prst="rect">
             <a:avLst/>
@@ -4383,8 +4383,8 @@
         </p:nvSpPr>
         <p:spPr>
           <a:xfrm>
-            <a:off x="438898" y="9760705"/>
-            <a:ext cx="677440" cy="205740"/>
+            <a:off x="438898" y="9880720"/>
+            <a:ext cx="671338" cy="205740"/>
           </a:xfrm>
           <a:prstGeom prst="roundRect">
             <a:avLst>
@@ -4410,8 +4410,8 @@
         </p:nvSpPr>
         <p:spPr>
           <a:xfrm>
-            <a:off x="438898" y="9760705"/>
-            <a:ext cx="677440" cy="205740"/>
+            <a:off x="438898" y="9880720"/>
+            <a:ext cx="671338" cy="205740"/>
           </a:xfrm>
           <a:prstGeom prst="rect">
             <a:avLst/>
@@ -4449,8 +4449,8 @@
         </p:nvSpPr>
         <p:spPr>
           <a:xfrm>
-            <a:off x="1280929" y="9747904"/>
-            <a:ext cx="3679705" cy="237744"/>
+            <a:off x="1274827" y="9867919"/>
+            <a:ext cx="3685807" cy="237744"/>
           </a:xfrm>
           <a:prstGeom prst="rect">
             <a:avLst/>
@@ -4491,7 +4491,7 @@
         </p:nvSpPr>
         <p:spPr>
           <a:xfrm>
-            <a:off x="438898" y="10063249"/>
+            <a:off x="438898" y="10183264"/>
             <a:ext cx="4521737" cy="0"/>
           </a:xfrm>
           <a:prstGeom prst="line">
@@ -4514,8 +4514,8 @@
         </p:nvSpPr>
         <p:spPr>
           <a:xfrm>
-            <a:off x="438898" y="10120849"/>
-            <a:ext cx="4521737" cy="240030"/>
+            <a:off x="438898" y="10240864"/>
+            <a:ext cx="4521737" cy="120015"/>
           </a:xfrm>
           <a:prstGeom prst="rect">
             <a:avLst/>
@@ -4638,11 +4638,11 @@
             <a:tbl>
               <a:tblPr/>
               <a:tblGrid>
-                <a:gridCol w="2354867"/>
-                <a:gridCol w="625530"/>
-                <a:gridCol w="1541340"/>
+                <a:gridCol w="2271871"/>
+                <a:gridCol w="695445"/>
+                <a:gridCol w="1554421"/>
               </a:tblGrid>
-              <a:tr h="343913">
+              <a:tr h="283976">
                 <a:tc>
                   <a:txBody>
                     <a:bodyPr/>
@@ -4803,7 +4803,7 @@
                   </a:tcPr>
                 </a:tc>
               </a:tr>
-              <a:tr h="359483">
+              <a:tr h="299546">
                 <a:tc>
                   <a:txBody>
                     <a:bodyPr/>
@@ -4964,7 +4964,7 @@
                   </a:tcPr>
                 </a:tc>
               </a:tr>
-              <a:tr h="359483">
+              <a:tr h="299546">
                 <a:tc>
                   <a:txBody>
                     <a:bodyPr/>
@@ -5125,7 +5125,7 @@
                   </a:tcPr>
                 </a:tc>
               </a:tr>
-              <a:tr h="359483">
+              <a:tr h="299546">
                 <a:tc>
                   <a:txBody>
                     <a:bodyPr/>
@@ -5286,7 +5286,7 @@
                   </a:tcPr>
                 </a:tc>
               </a:tr>
-              <a:tr h="359483">
+              <a:tr h="299546">
                 <a:tc>
                   <a:txBody>
                     <a:bodyPr/>
@@ -5447,7 +5447,7 @@
                   </a:tcPr>
                 </a:tc>
               </a:tr>
-              <a:tr h="359483">
+              <a:tr h="299546">
                 <a:tc>
                   <a:txBody>
                     <a:bodyPr/>
@@ -5608,7 +5608,7 @@
                   </a:tcPr>
                 </a:tc>
               </a:tr>
-              <a:tr h="359483">
+              <a:tr h="299546">
                 <a:tc>
                   <a:txBody>
                     <a:bodyPr/>
@@ -5769,6 +5769,167 @@
                   </a:tcPr>
                 </a:tc>
               </a:tr>
+              <a:tr h="299546">
+                <a:tc>
+                  <a:txBody>
+                    <a:bodyPr/>
+                    <a:lstStyle/>
+                    <a:p>
+                      <a:pPr algn="l" indent="0" marL="0">
+                        <a:lnSpc>
+                          <a:spcPts val="898"/>
+                        </a:lnSpc>
+                        <a:buNone/>
+                      </a:pPr>
+                      <a:r>
+                        <a:rPr lang="en-US" sz="660" dirty="0">
+                          <a:solidFill>
+                            <a:srgbClr val="4A5565"/>
+                          </a:solidFill>
+                          <a:latin typeface="Poppins" pitchFamily="34" charset="0"/>
+                          <a:ea typeface="Poppins" pitchFamily="34" charset="-122"/>
+                          <a:cs typeface="Poppins" pitchFamily="34" charset="-120"/>
+                        </a:rPr>
+                        <a:t>Engagement lead and weekly check-in</a:t>
+                      </a:r>
+                      <a:endParaRPr lang="en-US" sz="660" dirty="0">
+                        <a:latin typeface="Poppins" charset="0"/>
+                        <a:ea typeface="Poppins" charset="0"/>
+                        <a:cs typeface="Poppins" charset="0"/>
+                      </a:endParaRPr>
+                    </a:p>
+                  </a:txBody>
+                  <a:tcPr marL="46800" marR="46800" marT="46800" marB="46800" anchor="t">
+                    <a:lnL w="0" cap="flat" cmpd="sng" algn="ctr">
+                      <a:noFill/>
+                    </a:lnL>
+                    <a:lnR w="0" cap="flat" cmpd="sng" algn="ctr">
+                      <a:noFill/>
+                    </a:lnR>
+                    <a:lnT w="0" cap="flat" cmpd="sng" algn="ctr">
+                      <a:noFill/>
+                    </a:lnT>
+                    <a:lnB w="7620" cap="flat" cmpd="sng" algn="ctr">
+                      <a:solidFill>
+                        <a:srgbClr val="E3E7EC"/>
+                      </a:solidFill>
+                      <a:prstDash val="solid"/>
+                      <a:round/>
+                      <a:headEnd type="none" w="med" len="med"/>
+                      <a:tailEnd type="none" w="med" len="med"/>
+                    </a:lnB>
+                    <a:solidFill>
+                      <a:srgbClr val="F5F7FA"/>
+                    </a:solidFill>
+                  </a:tcPr>
+                </a:tc>
+                <a:tc>
+                  <a:txBody>
+                    <a:bodyPr/>
+                    <a:lstStyle/>
+                    <a:p>
+                      <a:pPr algn="l" indent="0" marL="0">
+                        <a:lnSpc>
+                          <a:spcPts val="898"/>
+                        </a:lnSpc>
+                        <a:buNone/>
+                      </a:pPr>
+                      <a:r>
+                        <a:rPr lang="en-US" sz="660" dirty="0">
+                          <a:solidFill>
+                            <a:srgbClr val="4A5565"/>
+                          </a:solidFill>
+                          <a:latin typeface="Poppins" pitchFamily="34" charset="0"/>
+                          <a:ea typeface="Poppins" pitchFamily="34" charset="-122"/>
+                          <a:cs typeface="Poppins" pitchFamily="34" charset="-120"/>
+                        </a:rPr>
+                        <a:t>Christy</a:t>
+                      </a:r>
+                      <a:endParaRPr lang="en-US" sz="660" dirty="0">
+                        <a:latin typeface="Poppins" charset="0"/>
+                        <a:ea typeface="Poppins" charset="0"/>
+                        <a:cs typeface="Poppins" charset="0"/>
+                      </a:endParaRPr>
+                    </a:p>
+                  </a:txBody>
+                  <a:tcPr marL="46800" marR="46800" marT="46800" marB="46800" anchor="t">
+                    <a:lnL w="0" cap="flat" cmpd="sng" algn="ctr">
+                      <a:noFill/>
+                    </a:lnL>
+                    <a:lnR w="0" cap="flat" cmpd="sng" algn="ctr">
+                      <a:noFill/>
+                    </a:lnR>
+                    <a:lnT w="0" cap="flat" cmpd="sng" algn="ctr">
+                      <a:noFill/>
+                    </a:lnT>
+                    <a:lnB w="7620" cap="flat" cmpd="sng" algn="ctr">
+                      <a:solidFill>
+                        <a:srgbClr val="E3E7EC"/>
+                      </a:solidFill>
+                      <a:prstDash val="solid"/>
+                      <a:round/>
+                      <a:headEnd type="none" w="med" len="med"/>
+                      <a:tailEnd type="none" w="med" len="med"/>
+                    </a:lnB>
+                    <a:solidFill>
+                      <a:srgbClr val="F5F7FA"/>
+                    </a:solidFill>
+                  </a:tcPr>
+                </a:tc>
+                <a:tc>
+                  <a:txBody>
+                    <a:bodyPr/>
+                    <a:lstStyle/>
+                    <a:p>
+                      <a:pPr algn="l" indent="0" marL="0">
+                        <a:lnSpc>
+                          <a:spcPts val="898"/>
+                        </a:lnSpc>
+                        <a:buNone/>
+                      </a:pPr>
+                      <a:r>
+                        <a:rPr lang="en-US" sz="660" dirty="0">
+                          <a:solidFill>
+                            <a:srgbClr val="4A5565"/>
+                          </a:solidFill>
+                          <a:latin typeface="Poppins" pitchFamily="34" charset="0"/>
+                          <a:ea typeface="Poppins" pitchFamily="34" charset="-122"/>
+                          <a:cs typeface="Poppins" pitchFamily="34" charset="-120"/>
+                        </a:rPr>
+                        <a:t>Clent, Ronnie</a:t>
+                      </a:r>
+                      <a:endParaRPr lang="en-US" sz="660" dirty="0">
+                        <a:latin typeface="Poppins" charset="0"/>
+                        <a:ea typeface="Poppins" charset="0"/>
+                        <a:cs typeface="Poppins" charset="0"/>
+                      </a:endParaRPr>
+                    </a:p>
+                  </a:txBody>
+                  <a:tcPr marL="46800" marR="46800" marT="46800" marB="46800" anchor="t">
+                    <a:lnL w="0" cap="flat" cmpd="sng" algn="ctr">
+                      <a:noFill/>
+                    </a:lnL>
+                    <a:lnR w="0" cap="flat" cmpd="sng" algn="ctr">
+                      <a:noFill/>
+                    </a:lnR>
+                    <a:lnT w="0" cap="flat" cmpd="sng" algn="ctr">
+                      <a:noFill/>
+                    </a:lnT>
+                    <a:lnB w="7620" cap="flat" cmpd="sng" algn="ctr">
+                      <a:solidFill>
+                        <a:srgbClr val="E3E7EC"/>
+                      </a:solidFill>
+                      <a:prstDash val="solid"/>
+                      <a:round/>
+                      <a:headEnd type="none" w="med" len="med"/>
+                      <a:tailEnd type="none" w="med" len="med"/>
+                    </a:lnB>
+                    <a:solidFill>
+                      <a:srgbClr val="F5F7FA"/>
+                    </a:solidFill>
+                  </a:tcPr>
+                </a:tc>
+              </a:tr>
             </a:tbl>
           </a:graphicData>
         </a:graphic>
@@ -5781,7 +5942,7 @@
         </p:nvSpPr>
         <p:spPr>
           <a:xfrm>
-            <a:off x="5298934" y="10183264"/>
+            <a:off x="5298934" y="10063249"/>
             <a:ext cx="4521737" cy="0"/>
           </a:xfrm>
           <a:prstGeom prst="line">
@@ -5804,8 +5965,8 @@
         </p:nvSpPr>
         <p:spPr>
           <a:xfrm>
-            <a:off x="5298934" y="10240864"/>
-            <a:ext cx="4521737" cy="120015"/>
+            <a:off x="5298934" y="10120849"/>
+            <a:ext cx="4521737" cy="240030"/>
           </a:xfrm>
           <a:prstGeom prst="rect">
             <a:avLst/>
@@ -5832,7 +5993,7 @@
                 <a:ea typeface="Poppins" pitchFamily="34" charset="-122"/>
                 <a:cs typeface="Poppins" pitchFamily="34" charset="-120"/>
               </a:rPr>
-              <a:t>A full responsibility matrix sits on the Activation sheet. This is the summary of it.</a:t>
+              <a:t>A full responsibility matrix sits on the Activation sheet. Justin and Chris return their split of what Jewell owns and what Harry and Justin keep, and it is finalised at the first weekly check-in.</a:t>
             </a:r>
             <a:endParaRPr lang="en-US" sz="700" dirty="0"/>
           </a:p>
@@ -6022,7 +6183,7 @@
         </p:nvSpPr>
         <p:spPr>
           <a:xfrm>
-            <a:off x="10158970" y="8207727"/>
+            <a:off x="10158970" y="8205772"/>
             <a:ext cx="50400" cy="50400"/>
           </a:xfrm>
           <a:prstGeom prst="rect">
@@ -6047,7 +6208,7 @@
         </p:nvSpPr>
         <p:spPr>
           <a:xfrm>
-            <a:off x="10266970" y="8171688"/>
+            <a:off x="10266970" y="8169732"/>
             <a:ext cx="4413737" cy="129794"/>
           </a:xfrm>
           <a:prstGeom prst="rect">
@@ -6089,7 +6250,7 @@
         </p:nvSpPr>
         <p:spPr>
           <a:xfrm>
-            <a:off x="10158970" y="8631969"/>
+            <a:off x="10158970" y="8628058"/>
             <a:ext cx="50400" cy="50400"/>
           </a:xfrm>
           <a:prstGeom prst="rect">
@@ -6114,7 +6275,7 @@
         </p:nvSpPr>
         <p:spPr>
           <a:xfrm>
-            <a:off x="10266970" y="8595930"/>
+            <a:off x="10266970" y="8592018"/>
             <a:ext cx="4413737" cy="129794"/>
           </a:xfrm>
           <a:prstGeom prst="rect">
@@ -6142,7 +6303,24 @@
                 <a:ea typeface="Poppins" pitchFamily="34" charset="-122"/>
                 <a:cs typeface="Poppins" pitchFamily="34" charset="-120"/>
               </a:rPr>
-              <a:t>External support, or do we try to do everything ourselves?</a:t>
+              <a:t>What Jewell owns and what Harry and Justin keep, </a:t>
+            </a:r>
+            <a:pPr indent="0" marL="0">
+              <a:lnSpc>
+                <a:spcPts val="1022"/>
+              </a:lnSpc>
+              <a:buNone/>
+            </a:pPr>
+            <a:r>
+              <a:rPr lang="en-US" sz="730" dirty="0">
+                <a:solidFill>
+                  <a:srgbClr val="4A5565"/>
+                </a:solidFill>
+                <a:latin typeface="Poppins" pitchFamily="34" charset="0"/>
+                <a:ea typeface="Poppins" pitchFamily="34" charset="-122"/>
+                <a:cs typeface="Poppins" pitchFamily="34" charset="-120"/>
+              </a:rPr>
+              <a:t>against the scoped costs in the proposal.</a:t>
             </a:r>
             <a:endParaRPr lang="en-US" sz="730" dirty="0"/>
           </a:p>
@@ -6156,7 +6334,7 @@
         </p:nvSpPr>
         <p:spPr>
           <a:xfrm>
-            <a:off x="10158970" y="9056211"/>
+            <a:off x="10158970" y="9050344"/>
             <a:ext cx="50400" cy="50400"/>
           </a:xfrm>
           <a:prstGeom prst="rect">
@@ -6181,7 +6359,7 @@
         </p:nvSpPr>
         <p:spPr>
           <a:xfrm>
-            <a:off x="10266970" y="9020172"/>
+            <a:off x="10266970" y="9014304"/>
             <a:ext cx="4413737" cy="129794"/>
           </a:xfrm>
           <a:prstGeom prst="rect">
@@ -6223,7 +6401,7 @@
         </p:nvSpPr>
         <p:spPr>
           <a:xfrm>
-            <a:off x="10158970" y="9480453"/>
+            <a:off x="10158970" y="9472630"/>
             <a:ext cx="50400" cy="50400"/>
           </a:xfrm>
           <a:prstGeom prst="rect">
@@ -6248,7 +6426,7 @@
         </p:nvSpPr>
         <p:spPr>
           <a:xfrm>
-            <a:off x="10266970" y="9444413"/>
+            <a:off x="10266970" y="9436590"/>
             <a:ext cx="4413737" cy="129794"/>
           </a:xfrm>
           <a:prstGeom prst="rect">
@@ -6307,7 +6485,7 @@
         </p:nvSpPr>
         <p:spPr>
           <a:xfrm>
-            <a:off x="10158970" y="9904695"/>
+            <a:off x="10158970" y="9894916"/>
             <a:ext cx="50400" cy="50400"/>
           </a:xfrm>
           <a:prstGeom prst="rect">
@@ -6332,8 +6510,8 @@
         </p:nvSpPr>
         <p:spPr>
           <a:xfrm>
-            <a:off x="10266970" y="9868655"/>
-            <a:ext cx="4413737" cy="129794"/>
+            <a:off x="10266970" y="9858876"/>
+            <a:ext cx="4413737" cy="259588"/>
           </a:xfrm>
           <a:prstGeom prst="rect">
             <a:avLst/>
@@ -6360,7 +6538,24 @@
                 <a:ea typeface="Poppins" pitchFamily="34" charset="-122"/>
                 <a:cs typeface="Poppins" pitchFamily="34" charset="-120"/>
               </a:rPr>
-              <a:t>Meeting rhythm and agenda.</a:t>
+              <a:t>Weekly check-in, 45 minutes, Christy leading. </a:t>
+            </a:r>
+            <a:pPr indent="0" marL="0">
+              <a:lnSpc>
+                <a:spcPts val="1022"/>
+              </a:lnSpc>
+              <a:buNone/>
+            </a:pPr>
+            <a:r>
+              <a:rPr lang="en-US" sz="730" dirty="0">
+                <a:solidFill>
+                  <a:srgbClr val="4A5565"/>
+                </a:solidFill>
+                <a:latin typeface="Poppins" pitchFamily="34" charset="0"/>
+                <a:ea typeface="Poppins" pitchFamily="34" charset="-122"/>
+                <a:cs typeface="Poppins" pitchFamily="34" charset="-120"/>
+              </a:rPr>
+              <a:t>Ronnie to lock the day; Justin can do Thursday or Friday, earlier in the week preferred.</a:t>
             </a:r>
             <a:endParaRPr lang="en-US" sz="730" dirty="0"/>
           </a:p>
@@ -6374,7 +6569,7 @@
         </p:nvSpPr>
         <p:spPr>
           <a:xfrm>
-            <a:off x="10158970" y="10063249"/>
+            <a:off x="10158970" y="10183264"/>
             <a:ext cx="4521737" cy="0"/>
           </a:xfrm>
           <a:prstGeom prst="line">
@@ -6397,8 +6592,8 @@
         </p:nvSpPr>
         <p:spPr>
           <a:xfrm>
-            <a:off x="10158970" y="10120849"/>
-            <a:ext cx="4521737" cy="240030"/>
+            <a:off x="10158970" y="10240864"/>
+            <a:ext cx="4521737" cy="120015"/>
           </a:xfrm>
           <a:prstGeom prst="rect">
             <a:avLst/>
@@ -6425,7 +6620,7 @@
                 <a:ea typeface="Poppins" pitchFamily="34" charset="-122"/>
                 <a:cs typeface="Poppins" pitchFamily="34" charset="-120"/>
               </a:rPr>
-              <a:t>Justin's own 30-day list, returned 16 September. The team's review of the JP deck was the agreed next step from the catch-up.</a:t>
+              <a:t>Justin's own 30-day list, returned 16 September, updated after the 18 September catch-up.</a:t>
             </a:r>
             <a:endParaRPr lang="en-US" sz="700" dirty="0"/>
           </a:p>
@@ -6558,8 +6753,8 @@
         </p:nvSpPr>
         <p:spPr>
           <a:xfrm>
-            <a:off x="12678246" y="365760"/>
-            <a:ext cx="1165358" cy="251460"/>
+            <a:off x="12656964" y="365760"/>
+            <a:ext cx="1186641" cy="251460"/>
           </a:xfrm>
           <a:prstGeom prst="roundRect">
             <a:avLst>
@@ -6585,8 +6780,8 @@
         </p:nvSpPr>
         <p:spPr>
           <a:xfrm>
-            <a:off x="12678246" y="365760"/>
-            <a:ext cx="1165358" cy="251460"/>
+            <a:off x="12656964" y="365760"/>
+            <a:ext cx="1186641" cy="251460"/>
           </a:xfrm>
           <a:prstGeom prst="rect">
             <a:avLst/>
@@ -6610,7 +6805,7 @@
                 <a:ea typeface="Poppins" pitchFamily="34" charset="-122"/>
                 <a:cs typeface="Poppins" pitchFamily="34" charset="-120"/>
               </a:rPr>
-              <a:t>V02 · 16 SEPT 2026</a:t>
+              <a:t>V03 · 23 SEPT 2026</a:t>
             </a:r>
             <a:endParaRPr lang="en-US" sz="650" dirty="0"/>
           </a:p>
@@ -6624,8 +6819,8 @@
         </p:nvSpPr>
         <p:spPr>
           <a:xfrm>
-            <a:off x="11370203" y="365760"/>
-            <a:ext cx="1218043" cy="251460"/>
+            <a:off x="11321238" y="365760"/>
+            <a:ext cx="1245725" cy="251460"/>
           </a:xfrm>
           <a:prstGeom prst="roundRect">
             <a:avLst>
@@ -6651,8 +6846,8 @@
         </p:nvSpPr>
         <p:spPr>
           <a:xfrm>
-            <a:off x="11370203" y="365760"/>
-            <a:ext cx="1218043" cy="251460"/>
+            <a:off x="11321238" y="365760"/>
+            <a:ext cx="1245725" cy="251460"/>
           </a:xfrm>
           <a:prstGeom prst="rect">
             <a:avLst/>
@@ -6690,8 +6885,8 @@
         </p:nvSpPr>
         <p:spPr>
           <a:xfrm>
-            <a:off x="10329157" y="365760"/>
-            <a:ext cx="951046" cy="251460"/>
+            <a:off x="10259357" y="365760"/>
+            <a:ext cx="971882" cy="251460"/>
           </a:xfrm>
           <a:prstGeom prst="roundRect">
             <a:avLst>
@@ -6717,8 +6912,8 @@
         </p:nvSpPr>
         <p:spPr>
           <a:xfrm>
-            <a:off x="10329157" y="365760"/>
-            <a:ext cx="951046" cy="251460"/>
+            <a:off x="10259357" y="365760"/>
+            <a:ext cx="971882" cy="251460"/>
           </a:xfrm>
           <a:prstGeom prst="rect">
             <a:avLst/>
@@ -6872,7 +7067,7 @@
         <p:spPr>
           <a:xfrm>
             <a:off x="438898" y="1400636"/>
-            <a:ext cx="6951755" cy="409448"/>
+            <a:ext cx="6951755" cy="204724"/>
           </a:xfrm>
           <a:prstGeom prst="rect">
             <a:avLst/>
@@ -6913,7 +7108,7 @@
         </p:nvSpPr>
         <p:spPr>
           <a:xfrm>
-            <a:off x="438898" y="1956014"/>
+            <a:off x="438898" y="1745994"/>
             <a:ext cx="6951755" cy="462915"/>
           </a:xfrm>
           <a:prstGeom prst="rect">
@@ -6989,7 +7184,7 @@
         </p:nvSpPr>
         <p:spPr>
           <a:xfrm>
-            <a:off x="438898" y="2564859"/>
+            <a:off x="438898" y="2349543"/>
             <a:ext cx="6951755" cy="308610"/>
           </a:xfrm>
           <a:prstGeom prst="rect">
@@ -7048,7 +7243,7 @@
         </p:nvSpPr>
         <p:spPr>
           <a:xfrm>
-            <a:off x="438898" y="3019399"/>
+            <a:off x="438898" y="2798787"/>
             <a:ext cx="6951755" cy="462915"/>
           </a:xfrm>
           <a:prstGeom prst="rect">
@@ -7076,7 +7271,7 @@
                 <a:ea typeface="Poppins" pitchFamily="34" charset="-122"/>
                 <a:cs typeface="Poppins" pitchFamily="34" charset="-120"/>
               </a:rPr>
-              <a:t>Justin frames the direction question as three-way: </a:t>
+              <a:t>The direction question moved on 18 September. </a:t>
             </a:r>
             <a:pPr indent="0" marL="0">
               <a:lnSpc>
@@ -7093,7 +7288,7 @@
                 <a:ea typeface="Poppins" pitchFamily="34" charset="-122"/>
                 <a:cs typeface="Poppins" pitchFamily="34" charset="-120"/>
               </a:rPr>
-              <a:t>a Taproom selling kegs, a Showroom selling beers, or an Event space doing both. JP's recommendation is the second or the third, with walk-in paused. Justin's own priority list keeps taproom trade alive, growing it from local business, functions and ticketed music.</a:t>
+              <a:t>The taproom is a destination for events and local business, and walk-in trade is not where the energy goes. Justin has been funding the business himself to stay open and wants to be drawing a wage inside 12 months. That is the deadline behind everything on this page.</a:t>
             </a:r>
             <a:endParaRPr lang="en-US" sz="810" dirty="0"/>
           </a:p>
@@ -7107,7 +7302,7 @@
         </p:nvSpPr>
         <p:spPr>
           <a:xfrm>
-            <a:off x="438898" y="3870991"/>
+            <a:off x="438898" y="3630961"/>
             <a:ext cx="6951755" cy="0"/>
           </a:xfrm>
           <a:prstGeom prst="line">
@@ -7130,8 +7325,8 @@
         </p:nvSpPr>
         <p:spPr>
           <a:xfrm>
-            <a:off x="438898" y="3928591"/>
-            <a:ext cx="6951755" cy="120015"/>
+            <a:off x="438898" y="3688561"/>
+            <a:ext cx="6951755" cy="360045"/>
           </a:xfrm>
           <a:prstGeom prst="rect">
             <a:avLst/>
@@ -7158,7 +7353,7 @@
                 <a:ea typeface="Poppins" pitchFamily="34" charset="-122"/>
                 <a:cs typeface="Poppins" pitchFamily="34" charset="-120"/>
               </a:rPr>
-              <a:t>Per-keg margin and system economics from the Discovery pack. Test them against the current P&amp;L before the plan is signed.</a:t>
+              <a:t>Per-keg margin and system economics from the Discovery pack. Break-even confirmed by Justin on 18 September. Franchise shape discussed 18 September: Tap That brews centrally, franchisees run a showroom and bar from pallet-delivered kegs. Satellite tasting rooms with a cool room are the low-capital step before that. Chris's caution stands: systemising brewing is harder than a recipe.</a:t>
             </a:r>
             <a:endParaRPr lang="en-US" sz="700" dirty="0"/>
           </a:p>
@@ -7254,11 +7449,11 @@
             <a:tbl>
               <a:tblPr/>
               <a:tblGrid>
-                <a:gridCol w="982902"/>
-                <a:gridCol w="2984426"/>
-                <a:gridCol w="2984426"/>
+                <a:gridCol w="926127"/>
+                <a:gridCol w="2995924"/>
+                <a:gridCol w="3029704"/>
               </a:tblGrid>
-              <a:tr h="343907">
+              <a:tr h="363770">
                 <a:tc>
                   <a:txBody>
                     <a:bodyPr/>
@@ -7419,7 +7614,7 @@
                   </a:tcPr>
                 </a:tc>
               </a:tr>
-              <a:tr h="483836">
+              <a:tr h="384522">
                 <a:tc>
                   <a:txBody>
                     <a:bodyPr/>
@@ -7597,7 +7792,7 @@
                   </a:tcPr>
                 </a:tc>
               </a:tr>
-              <a:tr h="483836">
+              <a:tr h="384522">
                 <a:tc>
                   <a:txBody>
                     <a:bodyPr/>
@@ -7775,7 +7970,7 @@
                   </a:tcPr>
                 </a:tc>
               </a:tr>
-              <a:tr h="364659">
+              <a:tr h="503698">
                 <a:tc>
                   <a:txBody>
                     <a:bodyPr/>
@@ -7902,7 +8097,7 @@
                           <a:ea typeface="Poppins" pitchFamily="34" charset="-122"/>
                           <a:cs typeface="Poppins" pitchFamily="34" charset="-120"/>
                         </a:rPr>
-                        <a:t>Decide. </a:t>
+                        <a:t>Destination. </a:t>
                       </a:r>
                       <a:pPr algn="l" indent="0" marL="0">
                         <a:lnSpc>
@@ -7919,7 +8114,7 @@
                           <a:ea typeface="Poppins" pitchFamily="34" charset="-122"/>
                           <a:cs typeface="Poppins" pitchFamily="34" charset="-120"/>
                         </a:rPr>
-                        <a:t>Justin's three-way, decided in 30 days</a:t>
+                        <a:t>Events, functions, ticketed music and local business. Not walk-ins. Showroom or event space is Justin's 30-day call</a:t>
                       </a:r>
                       <a:endParaRPr lang="en-US" sz="690" dirty="0">
                         <a:latin typeface="Poppins" charset="0"/>
@@ -7953,7 +8148,7 @@
                   </a:tcPr>
                 </a:tc>
               </a:tr>
-              <a:tr h="364659">
+              <a:tr h="384522">
                 <a:tc>
                   <a:txBody>
                     <a:bodyPr/>
@@ -8131,7 +8326,7 @@
                   </a:tcPr>
                 </a:tc>
               </a:tr>
-              <a:tr h="364659">
+              <a:tr h="384522">
                 <a:tc>
                   <a:txBody>
                     <a:bodyPr/>
@@ -8437,7 +8632,7 @@
         <p:spPr>
           <a:xfrm>
             <a:off x="438898" y="4556773"/>
-            <a:ext cx="1459246" cy="571522"/>
+            <a:ext cx="1459246" cy="659533"/>
           </a:xfrm>
           <a:prstGeom prst="rect">
             <a:avLst/>
@@ -8504,7 +8699,7 @@
         <p:spPr>
           <a:xfrm>
             <a:off x="546898" y="4911593"/>
-            <a:ext cx="1243246" cy="176022"/>
+            <a:ext cx="1243246" cy="264033"/>
           </a:xfrm>
           <a:prstGeom prst="rect">
             <a:avLst/>
@@ -8546,7 +8741,7 @@
         <p:spPr>
           <a:xfrm>
             <a:off x="1970143" y="4556773"/>
-            <a:ext cx="1459246" cy="571522"/>
+            <a:ext cx="1459246" cy="659533"/>
           </a:xfrm>
           <a:prstGeom prst="rect">
             <a:avLst/>
@@ -8613,7 +8808,7 @@
         <p:spPr>
           <a:xfrm>
             <a:off x="2078143" y="4911593"/>
-            <a:ext cx="1243246" cy="176022"/>
+            <a:ext cx="1243246" cy="264033"/>
           </a:xfrm>
           <a:prstGeom prst="rect">
             <a:avLst/>
@@ -8655,7 +8850,7 @@
         <p:spPr>
           <a:xfrm>
             <a:off x="3501389" y="4556773"/>
-            <a:ext cx="1459246" cy="571522"/>
+            <a:ext cx="1459246" cy="659533"/>
           </a:xfrm>
           <a:prstGeom prst="rect">
             <a:avLst/>
@@ -8722,7 +8917,7 @@
         <p:spPr>
           <a:xfrm>
             <a:off x="3609389" y="4911593"/>
-            <a:ext cx="1243246" cy="176022"/>
+            <a:ext cx="1243246" cy="264033"/>
           </a:xfrm>
           <a:prstGeom prst="rect">
             <a:avLst/>
@@ -8749,7 +8944,7 @@
                 <a:ea typeface="Poppins" pitchFamily="34" charset="-122"/>
                 <a:cs typeface="Poppins" pitchFamily="34" charset="-120"/>
               </a:rPr>
-              <a:t>BREAKEVEN, JUSTIN'S FIGURE, PERIOD NOT STATED</a:t>
+              <a:t>BREAK-EVEN PER MONTH. CURRENT RUN RATE $35K TO $45K. BEST MONTH HIT IT</a:t>
             </a:r>
             <a:endParaRPr lang="en-US" sz="550" dirty="0"/>
           </a:p>
@@ -8763,8 +8958,8 @@
         </p:nvSpPr>
         <p:spPr>
           <a:xfrm>
-            <a:off x="438898" y="5293895"/>
-            <a:ext cx="4521737" cy="462915"/>
+            <a:off x="438898" y="5356662"/>
+            <a:ext cx="4521737" cy="308610"/>
           </a:xfrm>
           <a:prstGeom prst="rect">
             <a:avLst/>
@@ -8805,7 +9000,7 @@
         </p:nvSpPr>
         <p:spPr>
           <a:xfrm>
-            <a:off x="438898" y="5922410"/>
+            <a:off x="438898" y="5805628"/>
             <a:ext cx="4521737" cy="462915"/>
           </a:xfrm>
           <a:prstGeom prst="rect">
@@ -8858,7 +9053,49 @@
       </p:sp>
       <p:sp>
         <p:nvSpPr>
-          <p:cNvPr id="39" name="Shape 34"/>
+          <p:cNvPr id="39" name="Text 34"/>
+          <p:cNvSpPr txBox="1"/>
+          <p:nvPr/>
+        </p:nvSpPr>
+        <p:spPr>
+          <a:xfrm>
+            <a:off x="438898" y="6408899"/>
+            <a:ext cx="4521737" cy="308610"/>
+          </a:xfrm>
+          <a:prstGeom prst="rect">
+            <a:avLst/>
+          </a:prstGeom>
+          <a:noFill/>
+          <a:ln/>
+        </p:spPr>
+        <p:txBody>
+          <a:bodyPr wrap="square" lIns="0" tIns="0" rIns="0" bIns="0" rtlCol="0" anchor="t"/>
+          <a:lstStyle/>
+          <a:p>
+            <a:pPr indent="0" marL="0">
+              <a:lnSpc>
+                <a:spcPts val="1215"/>
+              </a:lnSpc>
+              <a:buNone/>
+            </a:pPr>
+            <a:r>
+              <a:rPr lang="en-US" sz="810" dirty="0">
+                <a:solidFill>
+                  <a:srgbClr val="4A5565"/>
+                </a:solidFill>
+                <a:latin typeface="Poppins" pitchFamily="34" charset="0"/>
+                <a:ea typeface="Poppins" pitchFamily="34" charset="-122"/>
+                <a:cs typeface="Poppins" pitchFamily="34" charset="-120"/>
+              </a:rPr>
+              <a:t>Justin confirmed on 18 September that 250 active refillers gets the business past break-even, so the six-month number and the money number are the same number.</a:t>
+            </a:r>
+            <a:endParaRPr lang="en-US" sz="810" dirty="0"/>
+          </a:p>
+        </p:txBody>
+      </p:sp>
+      <p:sp>
+        <p:nvSpPr>
+          <p:cNvPr id="40" name="Shape 35"/>
           <p:cNvSpPr/>
           <p:nvPr/>
         </p:nvSpPr>
@@ -8881,7 +9118,7 @@
       </p:sp>
       <p:sp>
         <p:nvSpPr>
-          <p:cNvPr id="40" name="Text 35"/>
+          <p:cNvPr id="41" name="Text 36"/>
           <p:cNvSpPr txBox="1"/>
           <p:nvPr/>
         </p:nvSpPr>
@@ -8923,7 +9160,7 @@
       </p:sp>
       <p:sp>
         <p:nvSpPr>
-          <p:cNvPr id="41" name="Shape 36"/>
+          <p:cNvPr id="42" name="Shape 37"/>
           <p:cNvSpPr/>
           <p:nvPr/>
         </p:nvSpPr>
@@ -8948,7 +9185,7 @@
       </p:sp>
       <p:sp>
         <p:nvSpPr>
-          <p:cNvPr id="42" name="Text 37"/>
+          <p:cNvPr id="43" name="Text 38"/>
           <p:cNvSpPr txBox="1"/>
           <p:nvPr/>
         </p:nvSpPr>
@@ -8990,7 +9227,7 @@
       </p:sp>
       <p:sp>
         <p:nvSpPr>
-          <p:cNvPr id="43" name="Text 38"/>
+          <p:cNvPr id="44" name="Text 39"/>
           <p:cNvSpPr txBox="1"/>
           <p:nvPr/>
         </p:nvSpPr>
@@ -9049,72 +9286,13 @@
       </p:sp>
       <p:sp>
         <p:nvSpPr>
-          <p:cNvPr id="44" name="Text 39"/>
-          <p:cNvSpPr txBox="1"/>
-          <p:nvPr/>
-        </p:nvSpPr>
-        <p:spPr>
-          <a:xfrm>
-            <a:off x="5298934" y="4952469"/>
-            <a:ext cx="4521737" cy="308610"/>
-          </a:xfrm>
-          <a:prstGeom prst="rect">
-            <a:avLst/>
-          </a:prstGeom>
-          <a:noFill/>
-          <a:ln/>
-        </p:spPr>
-        <p:txBody>
-          <a:bodyPr wrap="square" lIns="0" tIns="0" rIns="0" bIns="0" rtlCol="0" anchor="t"/>
-          <a:lstStyle/>
-          <a:p>
-            <a:pPr indent="0" marL="0">
-              <a:lnSpc>
-                <a:spcPts val="1215"/>
-              </a:lnSpc>
-              <a:buNone/>
-            </a:pPr>
-            <a:r>
-              <a:rPr lang="en-US" sz="810" b="1" dirty="0">
-                <a:solidFill>
-                  <a:srgbClr val="0E171F"/>
-                </a:solidFill>
-                <a:latin typeface="Poppins" pitchFamily="34" charset="0"/>
-                <a:ea typeface="Poppins" pitchFamily="34" charset="-122"/>
-                <a:cs typeface="Poppins" pitchFamily="34" charset="-120"/>
-              </a:rPr>
-              <a:t>Members leak at 18%, non-members at 44%. </a:t>
-            </a:r>
-            <a:pPr indent="0" marL="0">
-              <a:lnSpc>
-                <a:spcPts val="1215"/>
-              </a:lnSpc>
-              <a:buNone/>
-            </a:pPr>
-            <a:r>
-              <a:rPr lang="en-US" sz="810" dirty="0">
-                <a:solidFill>
-                  <a:srgbClr val="4A5565"/>
-                </a:solidFill>
-                <a:latin typeface="Poppins" pitchFamily="34" charset="0"/>
-                <a:ea typeface="Poppins" pitchFamily="34" charset="-122"/>
-                <a:cs typeface="Poppins" pitchFamily="34" charset="-120"/>
-              </a:rPr>
-              <a:t>Attaching membership to a system sale is the single highest-return retention move available.</a:t>
-            </a:r>
-            <a:endParaRPr lang="en-US" sz="810" dirty="0"/>
-          </a:p>
-        </p:txBody>
-      </p:sp>
-      <p:sp>
-        <p:nvSpPr>
           <p:cNvPr id="45" name="Text 40"/>
           <p:cNvSpPr txBox="1"/>
           <p:nvPr/>
         </p:nvSpPr>
         <p:spPr>
           <a:xfrm>
-            <a:off x="5298934" y="5348165"/>
+            <a:off x="5298934" y="4965971"/>
             <a:ext cx="4521737" cy="308610"/>
           </a:xfrm>
           <a:prstGeom prst="rect">
@@ -9142,7 +9320,7 @@
                 <a:ea typeface="Poppins" pitchFamily="34" charset="-122"/>
                 <a:cs typeface="Poppins" pitchFamily="34" charset="-120"/>
               </a:rPr>
-              <a:t>$2.55 a schooner at home, 2.5 cases for the price of one. </a:t>
+              <a:t>Members leak at 18%, non-members at 44%. </a:t>
             </a:r>
             <a:pPr indent="0" marL="0">
               <a:lnSpc>
@@ -9159,7 +9337,7 @@
                 <a:ea typeface="Poppins" pitchFamily="34" charset="-122"/>
                 <a:cs typeface="Poppins" pitchFamily="34" charset="-120"/>
               </a:rPr>
-              <a:t>Against $12+ at the pub and $80+ for a case at the bottleshop.</a:t>
+              <a:t>Attaching membership to a system sale is the single highest-return retention move available.</a:t>
             </a:r>
             <a:endParaRPr lang="en-US" sz="810" dirty="0"/>
           </a:p>
@@ -9173,7 +9351,7 @@
         </p:nvSpPr>
         <p:spPr>
           <a:xfrm>
-            <a:off x="5298934" y="5743861"/>
+            <a:off x="5298934" y="5375169"/>
             <a:ext cx="4521737" cy="308610"/>
           </a:xfrm>
           <a:prstGeom prst="rect">
@@ -9201,7 +9379,7 @@
                 <a:ea typeface="Poppins" pitchFamily="34" charset="-122"/>
                 <a:cs typeface="Poppins" pitchFamily="34" charset="-120"/>
               </a:rPr>
-              <a:t>63% of customers said they would host a demo at their own place. </a:t>
+              <a:t>$2.55 a schooner at home, 2.5 cases for the price of one. </a:t>
             </a:r>
             <a:pPr indent="0" marL="0">
               <a:lnSpc>
@@ -9218,7 +9396,7 @@
                 <a:ea typeface="Poppins" pitchFamily="34" charset="-122"/>
                 <a:cs typeface="Poppins" pitchFamily="34" charset="-120"/>
               </a:rPr>
-              <a:t>That is a distribution channel sitting unused, and it costs nothing but coordination.</a:t>
+              <a:t>Against $12+ at the pub and $80+ for a case at the bottleshop.</a:t>
             </a:r>
             <a:endParaRPr lang="en-US" sz="810" dirty="0"/>
           </a:p>
@@ -9232,7 +9410,66 @@
         </p:nvSpPr>
         <p:spPr>
           <a:xfrm>
-            <a:off x="5298934" y="6139558"/>
+            <a:off x="5298934" y="5784366"/>
+            <a:ext cx="4521737" cy="308610"/>
+          </a:xfrm>
+          <a:prstGeom prst="rect">
+            <a:avLst/>
+          </a:prstGeom>
+          <a:noFill/>
+          <a:ln/>
+        </p:spPr>
+        <p:txBody>
+          <a:bodyPr wrap="square" lIns="0" tIns="0" rIns="0" bIns="0" rtlCol="0" anchor="t"/>
+          <a:lstStyle/>
+          <a:p>
+            <a:pPr indent="0" marL="0">
+              <a:lnSpc>
+                <a:spcPts val="1215"/>
+              </a:lnSpc>
+              <a:buNone/>
+            </a:pPr>
+            <a:r>
+              <a:rPr lang="en-US" sz="810" b="1" dirty="0">
+                <a:solidFill>
+                  <a:srgbClr val="0E171F"/>
+                </a:solidFill>
+                <a:latin typeface="Poppins" pitchFamily="34" charset="0"/>
+                <a:ea typeface="Poppins" pitchFamily="34" charset="-122"/>
+                <a:cs typeface="Poppins" pitchFamily="34" charset="-120"/>
+              </a:rPr>
+              <a:t>63% of customers said they would host a demo at their own place. </a:t>
+            </a:r>
+            <a:pPr indent="0" marL="0">
+              <a:lnSpc>
+                <a:spcPts val="1215"/>
+              </a:lnSpc>
+              <a:buNone/>
+            </a:pPr>
+            <a:r>
+              <a:rPr lang="en-US" sz="810" dirty="0">
+                <a:solidFill>
+                  <a:srgbClr val="4A5565"/>
+                </a:solidFill>
+                <a:latin typeface="Poppins" pitchFamily="34" charset="0"/>
+                <a:ea typeface="Poppins" pitchFamily="34" charset="-122"/>
+                <a:cs typeface="Poppins" pitchFamily="34" charset="-120"/>
+              </a:rPr>
+              <a:t>That is a distribution channel sitting unused, and it costs nothing but coordination.</a:t>
+            </a:r>
+            <a:endParaRPr lang="en-US" sz="810" dirty="0"/>
+          </a:p>
+        </p:txBody>
+      </p:sp>
+      <p:sp>
+        <p:nvSpPr>
+          <p:cNvPr id="48" name="Text 43"/>
+          <p:cNvSpPr txBox="1"/>
+          <p:nvPr/>
+        </p:nvSpPr>
+        <p:spPr>
+          <a:xfrm>
+            <a:off x="5298934" y="6193564"/>
             <a:ext cx="4521737" cy="617220"/>
           </a:xfrm>
           <a:prstGeom prst="rect">
@@ -9285,13 +9522,13 @@
       </p:sp>
       <p:sp>
         <p:nvSpPr>
-          <p:cNvPr id="48" name="Shape 43"/>
+          <p:cNvPr id="49" name="Shape 44"/>
           <p:cNvSpPr/>
           <p:nvPr/>
         </p:nvSpPr>
         <p:spPr>
           <a:xfrm>
-            <a:off x="5298934" y="6965732"/>
+            <a:off x="5298934" y="7085747"/>
             <a:ext cx="4521737" cy="0"/>
           </a:xfrm>
           <a:prstGeom prst="line">
@@ -9308,14 +9545,14 @@
       </p:sp>
       <p:sp>
         <p:nvSpPr>
-          <p:cNvPr id="49" name="Text 44"/>
+          <p:cNvPr id="50" name="Text 45"/>
           <p:cNvSpPr txBox="1"/>
           <p:nvPr/>
         </p:nvSpPr>
         <p:spPr>
           <a:xfrm>
-            <a:off x="5298934" y="7023332"/>
-            <a:ext cx="4521737" cy="240030"/>
+            <a:off x="5298934" y="7143347"/>
+            <a:ext cx="4521737" cy="120015"/>
           </a:xfrm>
           <a:prstGeom prst="rect">
             <a:avLst/>
@@ -9350,7 +9587,7 @@
       </p:sp>
       <p:sp>
         <p:nvSpPr>
-          <p:cNvPr id="50" name="Shape 45"/>
+          <p:cNvPr id="51" name="Shape 46"/>
           <p:cNvSpPr/>
           <p:nvPr/>
         </p:nvSpPr>
@@ -9375,7 +9612,7 @@
       </p:sp>
       <p:sp>
         <p:nvSpPr>
-          <p:cNvPr id="51" name="Text 46"/>
+          <p:cNvPr id="52" name="Text 47"/>
           <p:cNvSpPr txBox="1"/>
           <p:nvPr/>
         </p:nvSpPr>
@@ -9417,7 +9654,7 @@
       </p:sp>
       <p:sp>
         <p:nvSpPr>
-          <p:cNvPr id="52" name="Text 47"/>
+          <p:cNvPr id="53" name="Text 48"/>
           <p:cNvSpPr txBox="1"/>
           <p:nvPr/>
         </p:nvSpPr>
@@ -9459,7 +9696,7 @@
       </p:sp>
       <p:sp>
         <p:nvSpPr>
-          <p:cNvPr id="53" name="Text 48"/>
+          <p:cNvPr id="54" name="Text 49"/>
           <p:cNvSpPr txBox="1"/>
           <p:nvPr/>
         </p:nvSpPr>
@@ -9518,7 +9755,7 @@
       </p:sp>
       <p:sp>
         <p:nvSpPr>
-          <p:cNvPr id="54" name="Text 49"/>
+          <p:cNvPr id="55" name="Text 50"/>
           <p:cNvSpPr txBox="1"/>
           <p:nvPr/>
         </p:nvSpPr>
@@ -9577,7 +9814,7 @@
       </p:sp>
       <p:sp>
         <p:nvSpPr>
-          <p:cNvPr id="55" name="Text 50"/>
+          <p:cNvPr id="56" name="Text 51"/>
           <p:cNvSpPr txBox="1"/>
           <p:nvPr/>
         </p:nvSpPr>
@@ -9636,7 +9873,7 @@
       </p:sp>
       <p:sp>
         <p:nvSpPr>
-          <p:cNvPr id="56" name="Shape 51"/>
+          <p:cNvPr id="57" name="Shape 52"/>
           <p:cNvSpPr/>
           <p:nvPr/>
         </p:nvSpPr>
@@ -9659,7 +9896,7 @@
       </p:sp>
       <p:sp>
         <p:nvSpPr>
-          <p:cNvPr id="57" name="Text 52"/>
+          <p:cNvPr id="58" name="Text 53"/>
           <p:cNvSpPr txBox="1"/>
           <p:nvPr/>
         </p:nvSpPr>
@@ -9701,7 +9938,7 @@
       </p:sp>
       <p:sp>
         <p:nvSpPr>
-          <p:cNvPr id="58" name="Shape 53"/>
+          <p:cNvPr id="59" name="Shape 54"/>
           <p:cNvSpPr/>
           <p:nvPr/>
         </p:nvSpPr>
@@ -9726,7 +9963,7 @@
       </p:sp>
       <p:sp>
         <p:nvSpPr>
-          <p:cNvPr id="59" name="Text 54"/>
+          <p:cNvPr id="60" name="Text 55"/>
           <p:cNvSpPr txBox="1"/>
           <p:nvPr/>
         </p:nvSpPr>
@@ -9768,7 +10005,7 @@
       </p:sp>
       <p:sp>
         <p:nvSpPr>
-          <p:cNvPr id="60" name="Shape 55"/>
+          <p:cNvPr id="61" name="Shape 56"/>
           <p:cNvSpPr/>
           <p:nvPr/>
         </p:nvSpPr>
@@ -9793,7 +10030,7 @@
       </p:sp>
       <p:sp>
         <p:nvSpPr>
-          <p:cNvPr id="61" name="Text 56"/>
+          <p:cNvPr id="62" name="Text 57"/>
           <p:cNvSpPr txBox="1"/>
           <p:nvPr/>
         </p:nvSpPr>
@@ -9852,13 +10089,13 @@
       </p:sp>
       <p:sp>
         <p:nvSpPr>
-          <p:cNvPr id="62" name="Shape 57"/>
+          <p:cNvPr id="63" name="Shape 58"/>
           <p:cNvSpPr/>
           <p:nvPr/>
         </p:nvSpPr>
         <p:spPr>
           <a:xfrm>
-            <a:off x="438898" y="8305043"/>
+            <a:off x="438898" y="8223676"/>
             <a:ext cx="50400" cy="50400"/>
           </a:xfrm>
           <a:prstGeom prst="rect">
@@ -9877,13 +10114,13 @@
       </p:sp>
       <p:sp>
         <p:nvSpPr>
-          <p:cNvPr id="63" name="Text 58"/>
+          <p:cNvPr id="64" name="Text 59"/>
           <p:cNvSpPr txBox="1"/>
           <p:nvPr/>
         </p:nvSpPr>
         <p:spPr>
           <a:xfrm>
-            <a:off x="546898" y="8259732"/>
+            <a:off x="546898" y="8178365"/>
             <a:ext cx="6843755" cy="148336"/>
           </a:xfrm>
           <a:prstGeom prst="rect">
@@ -9936,13 +10173,13 @@
       </p:sp>
       <p:sp>
         <p:nvSpPr>
-          <p:cNvPr id="64" name="Shape 59"/>
+          <p:cNvPr id="65" name="Shape 60"/>
           <p:cNvSpPr/>
           <p:nvPr/>
         </p:nvSpPr>
         <p:spPr>
           <a:xfrm>
-            <a:off x="438898" y="8793245"/>
+            <a:off x="438898" y="8630511"/>
             <a:ext cx="50400" cy="50400"/>
           </a:xfrm>
           <a:prstGeom prst="rect">
@@ -9961,13 +10198,13 @@
       </p:sp>
       <p:sp>
         <p:nvSpPr>
-          <p:cNvPr id="65" name="Text 60"/>
+          <p:cNvPr id="66" name="Text 61"/>
           <p:cNvSpPr txBox="1"/>
           <p:nvPr/>
         </p:nvSpPr>
         <p:spPr>
           <a:xfrm>
-            <a:off x="546898" y="8747935"/>
+            <a:off x="546898" y="8585201"/>
             <a:ext cx="6843755" cy="148336"/>
           </a:xfrm>
           <a:prstGeom prst="rect">
@@ -9995,7 +10232,7 @@
                 <a:ea typeface="Poppins" pitchFamily="34" charset="-122"/>
                 <a:cs typeface="Poppins" pitchFamily="34" charset="-120"/>
               </a:rPr>
-              <a:t>External support vs in-house. </a:t>
+              <a:t>The Jewell split. </a:t>
             </a:r>
             <a:pPr indent="0" marL="0">
               <a:lnSpc>
@@ -10012,7 +10249,7 @@
                 <a:ea typeface="Poppins" pitchFamily="34" charset="-122"/>
                 <a:cs typeface="Poppins" pitchFamily="34" charset="-120"/>
               </a:rPr>
-              <a:t>Do it ourselves or bring it in.</a:t>
+              <a:t>What Jewell owns, what Harry and Justin keep, against the proposal.</a:t>
             </a:r>
             <a:endParaRPr lang="en-US" sz="800" dirty="0"/>
           </a:p>
@@ -10020,13 +10257,13 @@
       </p:sp>
       <p:sp>
         <p:nvSpPr>
-          <p:cNvPr id="66" name="Shape 61"/>
+          <p:cNvPr id="67" name="Shape 62"/>
           <p:cNvSpPr/>
           <p:nvPr/>
         </p:nvSpPr>
         <p:spPr>
           <a:xfrm>
-            <a:off x="438898" y="9281448"/>
+            <a:off x="438898" y="9037347"/>
             <a:ext cx="50400" cy="50400"/>
           </a:xfrm>
           <a:prstGeom prst="rect">
@@ -10045,13 +10282,13 @@
       </p:sp>
       <p:sp>
         <p:nvSpPr>
-          <p:cNvPr id="67" name="Text 62"/>
+          <p:cNvPr id="68" name="Text 63"/>
           <p:cNvSpPr txBox="1"/>
           <p:nvPr/>
         </p:nvSpPr>
         <p:spPr>
           <a:xfrm>
-            <a:off x="546898" y="9236138"/>
+            <a:off x="546898" y="8992036"/>
             <a:ext cx="6843755" cy="148336"/>
           </a:xfrm>
           <a:prstGeom prst="rect">
@@ -10104,13 +10341,13 @@
       </p:sp>
       <p:sp>
         <p:nvSpPr>
-          <p:cNvPr id="68" name="Shape 63"/>
+          <p:cNvPr id="69" name="Shape 64"/>
           <p:cNvSpPr/>
           <p:nvPr/>
         </p:nvSpPr>
         <p:spPr>
           <a:xfrm>
-            <a:off x="438898" y="9769651"/>
+            <a:off x="438898" y="9444182"/>
             <a:ext cx="50400" cy="50400"/>
           </a:xfrm>
           <a:prstGeom prst="rect">
@@ -10129,13 +10366,13 @@
       </p:sp>
       <p:sp>
         <p:nvSpPr>
-          <p:cNvPr id="69" name="Text 64"/>
+          <p:cNvPr id="70" name="Text 65"/>
           <p:cNvSpPr txBox="1"/>
           <p:nvPr/>
         </p:nvSpPr>
         <p:spPr>
           <a:xfrm>
-            <a:off x="546898" y="9724340"/>
+            <a:off x="546898" y="9398872"/>
             <a:ext cx="6843755" cy="148336"/>
           </a:xfrm>
           <a:prstGeom prst="rect">
@@ -10188,13 +10425,13 @@
       </p:sp>
       <p:sp>
         <p:nvSpPr>
-          <p:cNvPr id="70" name="Shape 65"/>
+          <p:cNvPr id="71" name="Shape 66"/>
           <p:cNvSpPr/>
           <p:nvPr/>
         </p:nvSpPr>
         <p:spPr>
           <a:xfrm>
-            <a:off x="438898" y="10257854"/>
+            <a:off x="438898" y="9851018"/>
             <a:ext cx="50400" cy="50400"/>
           </a:xfrm>
           <a:prstGeom prst="rect">
@@ -10213,7 +10450,91 @@
       </p:sp>
       <p:sp>
         <p:nvSpPr>
-          <p:cNvPr id="71" name="Text 66"/>
+          <p:cNvPr id="72" name="Text 67"/>
+          <p:cNvSpPr txBox="1"/>
+          <p:nvPr/>
+        </p:nvSpPr>
+        <p:spPr>
+          <a:xfrm>
+            <a:off x="546898" y="9805708"/>
+            <a:ext cx="6843755" cy="148336"/>
+          </a:xfrm>
+          <a:prstGeom prst="rect">
+            <a:avLst/>
+          </a:prstGeom>
+          <a:noFill/>
+          <a:ln/>
+        </p:spPr>
+        <p:txBody>
+          <a:bodyPr wrap="square" lIns="0" tIns="0" rIns="0" bIns="0" rtlCol="0" anchor="t"/>
+          <a:lstStyle/>
+          <a:p>
+            <a:pPr indent="0" marL="0">
+              <a:lnSpc>
+                <a:spcPts val="1168"/>
+              </a:lnSpc>
+              <a:buNone/>
+            </a:pPr>
+            <a:r>
+              <a:rPr lang="en-US" sz="800" b="1" dirty="0">
+                <a:solidFill>
+                  <a:srgbClr val="0E171F"/>
+                </a:solidFill>
+                <a:latin typeface="Poppins" pitchFamily="34" charset="0"/>
+                <a:ea typeface="Poppins" pitchFamily="34" charset="-122"/>
+                <a:cs typeface="Poppins" pitchFamily="34" charset="-120"/>
+              </a:rPr>
+              <a:t>Settle $2.55. </a:t>
+            </a:r>
+            <a:pPr indent="0" marL="0">
+              <a:lnSpc>
+                <a:spcPts val="1168"/>
+              </a:lnSpc>
+              <a:buNone/>
+            </a:pPr>
+            <a:r>
+              <a:rPr lang="en-US" sz="800" dirty="0">
+                <a:solidFill>
+                  <a:srgbClr val="4A5565"/>
+                </a:solidFill>
+                <a:latin typeface="Poppins" pitchFamily="34" charset="0"/>
+                <a:ea typeface="Poppins" pitchFamily="34" charset="-122"/>
+                <a:cs typeface="Poppins" pitchFamily="34" charset="-120"/>
+              </a:rPr>
+              <a:t>The number on the live ad.</a:t>
+            </a:r>
+            <a:endParaRPr lang="en-US" sz="800" dirty="0"/>
+          </a:p>
+        </p:txBody>
+      </p:sp>
+      <p:sp>
+        <p:nvSpPr>
+          <p:cNvPr id="73" name="Shape 68"/>
+          <p:cNvSpPr/>
+          <p:nvPr/>
+        </p:nvSpPr>
+        <p:spPr>
+          <a:xfrm>
+            <a:off x="438898" y="10257854"/>
+            <a:ext cx="50400" cy="50400"/>
+          </a:xfrm>
+          <a:prstGeom prst="rect">
+            <a:avLst/>
+          </a:prstGeom>
+          <a:solidFill>
+            <a:srgbClr val="0066FF"/>
+          </a:solidFill>
+          <a:ln w="12700">
+            <a:solidFill>
+              <a:srgbClr val="333333"/>
+            </a:solidFill>
+            <a:prstDash val="solid"/>
+          </a:ln>
+        </p:spPr>
+      </p:sp>
+      <p:sp>
+        <p:nvSpPr>
+          <p:cNvPr id="74" name="Text 69"/>
           <p:cNvSpPr txBox="1"/>
           <p:nvPr/>
         </p:nvSpPr>
@@ -10247,7 +10568,7 @@
                 <a:ea typeface="Poppins" pitchFamily="34" charset="-122"/>
                 <a:cs typeface="Poppins" pitchFamily="34" charset="-120"/>
               </a:rPr>
-              <a:t>Settle $2.55. </a:t>
+              <a:t>The 250 date. </a:t>
             </a:r>
             <a:pPr indent="0" marL="0">
               <a:lnSpc>
@@ -10264,7 +10585,7 @@
                 <a:ea typeface="Poppins" pitchFamily="34" charset="-122"/>
                 <a:cs typeface="Poppins" pitchFamily="34" charset="-120"/>
               </a:rPr>
-              <a:t>The number on the live ad.</a:t>
+              <a:t>March 2027 or Christmas 2026.</a:t>
             </a:r>
             <a:endParaRPr lang="en-US" sz="800" dirty="0"/>
           </a:p>
@@ -10272,7 +10593,7 @@
       </p:sp>
       <p:sp>
         <p:nvSpPr>
-          <p:cNvPr id="72" name="Shape 67"/>
+          <p:cNvPr id="75" name="Shape 70"/>
           <p:cNvSpPr/>
           <p:nvPr/>
         </p:nvSpPr>
@@ -10297,7 +10618,7 @@
       </p:sp>
       <p:sp>
         <p:nvSpPr>
-          <p:cNvPr id="73" name="Text 68"/>
+          <p:cNvPr id="76" name="Text 71"/>
           <p:cNvSpPr txBox="1"/>
           <p:nvPr/>
         </p:nvSpPr>
@@ -10339,7 +10660,7 @@
       </p:sp>
       <p:sp>
         <p:nvSpPr>
-          <p:cNvPr id="74" name="Shape 69"/>
+          <p:cNvPr id="77" name="Shape 72"/>
           <p:cNvSpPr/>
           <p:nvPr/>
         </p:nvSpPr>
@@ -10364,7 +10685,7 @@
       </p:sp>
       <p:sp>
         <p:nvSpPr>
-          <p:cNvPr id="75" name="Text 70"/>
+          <p:cNvPr id="78" name="Text 73"/>
           <p:cNvSpPr txBox="1"/>
           <p:nvPr/>
         </p:nvSpPr>
@@ -10423,13 +10744,13 @@
       </p:sp>
       <p:sp>
         <p:nvSpPr>
-          <p:cNvPr id="76" name="Shape 71"/>
+          <p:cNvPr id="79" name="Shape 74"/>
           <p:cNvSpPr/>
           <p:nvPr/>
         </p:nvSpPr>
         <p:spPr>
           <a:xfrm>
-            <a:off x="7728952" y="8500261"/>
+            <a:off x="7728952" y="8509701"/>
             <a:ext cx="50400" cy="50400"/>
           </a:xfrm>
           <a:prstGeom prst="rect">
@@ -10448,13 +10769,13 @@
       </p:sp>
       <p:sp>
         <p:nvSpPr>
-          <p:cNvPr id="77" name="Text 72"/>
+          <p:cNvPr id="80" name="Text 75"/>
           <p:cNvSpPr txBox="1"/>
           <p:nvPr/>
         </p:nvSpPr>
         <p:spPr>
           <a:xfrm>
-            <a:off x="7836952" y="8454950"/>
+            <a:off x="7836952" y="8464391"/>
             <a:ext cx="6843755" cy="148336"/>
           </a:xfrm>
           <a:prstGeom prst="rect">
@@ -10507,13 +10828,13 @@
       </p:sp>
       <p:sp>
         <p:nvSpPr>
-          <p:cNvPr id="78" name="Shape 73"/>
+          <p:cNvPr id="81" name="Shape 76"/>
           <p:cNvSpPr/>
           <p:nvPr/>
         </p:nvSpPr>
         <p:spPr>
           <a:xfrm>
-            <a:off x="7728952" y="9183682"/>
+            <a:off x="7728952" y="9202562"/>
             <a:ext cx="50400" cy="50400"/>
           </a:xfrm>
           <a:prstGeom prst="rect">
@@ -10532,14 +10853,14 @@
       </p:sp>
       <p:sp>
         <p:nvSpPr>
-          <p:cNvPr id="79" name="Text 74"/>
+          <p:cNvPr id="82" name="Text 77"/>
           <p:cNvSpPr txBox="1"/>
           <p:nvPr/>
         </p:nvSpPr>
         <p:spPr>
           <a:xfrm>
-            <a:off x="7836952" y="9138371"/>
-            <a:ext cx="6843755" cy="296672"/>
+            <a:off x="7836952" y="9157252"/>
+            <a:ext cx="6843755" cy="148336"/>
           </a:xfrm>
           <a:prstGeom prst="rect">
             <a:avLst/>
@@ -10591,13 +10912,13 @@
       </p:sp>
       <p:sp>
         <p:nvSpPr>
-          <p:cNvPr id="80" name="Shape 75"/>
+          <p:cNvPr id="83" name="Shape 78"/>
           <p:cNvSpPr/>
           <p:nvPr/>
         </p:nvSpPr>
         <p:spPr>
           <a:xfrm>
-            <a:off x="7728952" y="10015439"/>
+            <a:off x="7728952" y="9895424"/>
             <a:ext cx="50400" cy="50400"/>
           </a:xfrm>
           <a:prstGeom prst="rect">
@@ -10616,13 +10937,13 @@
       </p:sp>
       <p:sp>
         <p:nvSpPr>
-          <p:cNvPr id="81" name="Text 76"/>
+          <p:cNvPr id="84" name="Text 79"/>
           <p:cNvSpPr txBox="1"/>
           <p:nvPr/>
         </p:nvSpPr>
         <p:spPr>
           <a:xfrm>
-            <a:off x="7836952" y="9970128"/>
+            <a:off x="7836952" y="9850113"/>
             <a:ext cx="6843755" cy="148336"/>
           </a:xfrm>
           <a:prstGeom prst="rect">
@@ -10675,13 +10996,13 @@
       </p:sp>
       <p:sp>
         <p:nvSpPr>
-          <p:cNvPr id="82" name="Shape 77"/>
+          <p:cNvPr id="85" name="Shape 80"/>
           <p:cNvSpPr/>
           <p:nvPr/>
         </p:nvSpPr>
         <p:spPr>
           <a:xfrm>
-            <a:off x="7728952" y="10183264"/>
+            <a:off x="7728952" y="10063249"/>
             <a:ext cx="6951755" cy="0"/>
           </a:xfrm>
           <a:prstGeom prst="line">
@@ -10698,14 +11019,14 @@
       </p:sp>
       <p:sp>
         <p:nvSpPr>
-          <p:cNvPr id="83" name="Text 78"/>
+          <p:cNvPr id="86" name="Text 81"/>
           <p:cNvSpPr txBox="1"/>
           <p:nvPr/>
         </p:nvSpPr>
         <p:spPr>
           <a:xfrm>
-            <a:off x="7728952" y="10240864"/>
-            <a:ext cx="6951755" cy="120015"/>
+            <a:off x="7728952" y="10120849"/>
+            <a:ext cx="6951755" cy="240030"/>
           </a:xfrm>
           <a:prstGeom prst="rect">
             <a:avLst/>
@@ -10732,7 +11053,7 @@
                 <a:ea typeface="Poppins" pitchFamily="34" charset="-122"/>
                 <a:cs typeface="Poppins" pitchFamily="34" charset="-120"/>
               </a:rPr>
-              <a:t>Justin's own point in the catch-up: as this scales, the personal connection cannot hold. It has to be replicated in systems.</a:t>
+              <a:t>Justin's own point in both catch-ups: as this scales, the personal connection cannot hold. It has to be replicated in systems. The franchise model on the summary sheet only works if it does.</a:t>
             </a:r>
             <a:endParaRPr lang="en-US" sz="700" dirty="0"/>
           </a:p>
@@ -10865,8 +11186,8 @@
         </p:nvSpPr>
         <p:spPr>
           <a:xfrm>
-            <a:off x="12678246" y="365760"/>
-            <a:ext cx="1165358" cy="251460"/>
+            <a:off x="12656964" y="365760"/>
+            <a:ext cx="1186641" cy="251460"/>
           </a:xfrm>
           <a:prstGeom prst="roundRect">
             <a:avLst>
@@ -10892,8 +11213,8 @@
         </p:nvSpPr>
         <p:spPr>
           <a:xfrm>
-            <a:off x="12678246" y="365760"/>
-            <a:ext cx="1165358" cy="251460"/>
+            <a:off x="12656964" y="365760"/>
+            <a:ext cx="1186641" cy="251460"/>
           </a:xfrm>
           <a:prstGeom prst="rect">
             <a:avLst/>
@@ -10917,7 +11238,7 @@
                 <a:ea typeface="Poppins" pitchFamily="34" charset="-122"/>
                 <a:cs typeface="Poppins" pitchFamily="34" charset="-120"/>
               </a:rPr>
-              <a:t>V02 · 16 SEPT 2026</a:t>
+              <a:t>V03 · 23 SEPT 2026</a:t>
             </a:r>
             <a:endParaRPr lang="en-US" sz="650" dirty="0"/>
           </a:p>
@@ -10931,8 +11252,8 @@
         </p:nvSpPr>
         <p:spPr>
           <a:xfrm>
-            <a:off x="11370203" y="365760"/>
-            <a:ext cx="1218043" cy="251460"/>
+            <a:off x="11321238" y="365760"/>
+            <a:ext cx="1245725" cy="251460"/>
           </a:xfrm>
           <a:prstGeom prst="roundRect">
             <a:avLst>
@@ -10958,8 +11279,8 @@
         </p:nvSpPr>
         <p:spPr>
           <a:xfrm>
-            <a:off x="11370203" y="365760"/>
-            <a:ext cx="1218043" cy="251460"/>
+            <a:off x="11321238" y="365760"/>
+            <a:ext cx="1245725" cy="251460"/>
           </a:xfrm>
           <a:prstGeom prst="rect">
             <a:avLst/>
@@ -10997,8 +11318,8 @@
         </p:nvSpPr>
         <p:spPr>
           <a:xfrm>
-            <a:off x="10313084" y="365760"/>
-            <a:ext cx="967119" cy="251460"/>
+            <a:off x="10259357" y="365760"/>
+            <a:ext cx="971882" cy="251460"/>
           </a:xfrm>
           <a:prstGeom prst="roundRect">
             <a:avLst>
@@ -11024,8 +11345,8 @@
         </p:nvSpPr>
         <p:spPr>
           <a:xfrm>
-            <a:off x="10313084" y="365760"/>
-            <a:ext cx="967119" cy="251460"/>
+            <a:off x="10259357" y="365760"/>
+            <a:ext cx="971882" cy="251460"/>
           </a:xfrm>
           <a:prstGeom prst="rect">
             <a:avLst/>
@@ -11206,7 +11527,7 @@
                 <a:ea typeface="Poppins" pitchFamily="34" charset="-122"/>
                 <a:cs typeface="Poppins" pitchFamily="34" charset="-120"/>
               </a:rPr>
-              <a:t>The pub at your place. Fresher, cheaper by the schooner, and yours.</a:t>
+              <a:t>Your place, the best catch-up on the street. Home entertainment, not beer.</a:t>
             </a:r>
             <a:endParaRPr lang="en-US" sz="1340" dirty="0"/>
           </a:p>
@@ -11220,8 +11541,8 @@
         </p:nvSpPr>
         <p:spPr>
           <a:xfrm>
-            <a:off x="438898" y="1707611"/>
-            <a:ext cx="6951755" cy="462915"/>
+            <a:off x="438898" y="1752181"/>
+            <a:ext cx="6951755" cy="617220"/>
           </a:xfrm>
           <a:prstGeom prst="rect">
             <a:avLst/>
@@ -11248,7 +11569,7 @@
                 <a:ea typeface="Poppins" pitchFamily="34" charset="-122"/>
                 <a:cs typeface="Poppins" pitchFamily="34" charset="-120"/>
               </a:rPr>
-              <a:t>"Every household in Australia deserves beer on tap." </a:t>
+              <a:t>Every household deserves beer on tap is Justin's line </a:t>
             </a:r>
             <a:pPr indent="0" marL="0">
               <a:lnSpc>
@@ -11265,7 +11586,7 @@
                 <a:ea typeface="Poppins" pitchFamily="34" charset="-122"/>
                 <a:cs typeface="Poppins" pitchFamily="34" charset="-120"/>
               </a:rPr>
-              <a:t>Justin's own line, and the goal is bringing people together. Catching up with friends at a venue is stressful, rushed and expensive. Catching up at home is made easy: pub-quality beer and non-beer on tap, and a set-up that is the envy of your friends.</a:t>
+              <a:t>and it stays as the ambition. It is not the brand idea. The brand idea is what the product does to an ordinary Saturday: it turns a catch-up into the one people talk about. That puts Tap That in the home entertainment business, beside the outdoor kitchen, the high-end barbecue and the coffee machine, not beside the bar fridge. Same move BMW made from cars to mobility, and it opens the same doors: partners, product and price.</a:t>
             </a:r>
             <a:endParaRPr lang="en-US" sz="810" dirty="0"/>
           </a:p>
@@ -11279,7 +11600,7 @@
         </p:nvSpPr>
         <p:spPr>
           <a:xfrm>
-            <a:off x="438898" y="2266478"/>
+            <a:off x="438898" y="2509923"/>
             <a:ext cx="6951755" cy="308610"/>
           </a:xfrm>
           <a:prstGeom prst="rect">
@@ -11321,8 +11642,8 @@
         </p:nvSpPr>
         <p:spPr>
           <a:xfrm>
-            <a:off x="438898" y="2671040"/>
-            <a:ext cx="6951755" cy="154305"/>
+            <a:off x="438898" y="2959054"/>
+            <a:ext cx="6951755" cy="308610"/>
           </a:xfrm>
           <a:prstGeom prst="rect">
             <a:avLst/>
@@ -11366,7 +11687,7 @@
                 <a:ea typeface="Poppins" pitchFamily="34" charset="-122"/>
                 <a:cs typeface="Poppins" pitchFamily="34" charset="-120"/>
               </a:rPr>
-              <a:t>The pub does beer at home badly. That is the gap.</a:t>
+              <a:t>Harvey Norman's outdoor living page leads with kitchens and appliances, and the kegerator is not in the grouping. That is the gap.</a:t>
             </a:r>
             <a:endParaRPr lang="en-US" sz="810" dirty="0"/>
           </a:p>
@@ -11374,66 +11695,7 @@
       </p:sp>
       <p:sp>
         <p:nvSpPr>
-          <p:cNvPr id="19" name="Text 15"/>
-          <p:cNvSpPr txBox="1"/>
-          <p:nvPr/>
-        </p:nvSpPr>
-        <p:spPr>
-          <a:xfrm>
-            <a:off x="438898" y="2921297"/>
-            <a:ext cx="6951755" cy="462915"/>
-          </a:xfrm>
-          <a:prstGeom prst="rect">
-            <a:avLst/>
-          </a:prstGeom>
-          <a:noFill/>
-          <a:ln/>
-        </p:spPr>
-        <p:txBody>
-          <a:bodyPr wrap="square" lIns="0" tIns="0" rIns="0" bIns="0" rtlCol="0" anchor="t"/>
-          <a:lstStyle/>
-          <a:p>
-            <a:pPr indent="0" marL="0">
-              <a:lnSpc>
-                <a:spcPts val="1215"/>
-              </a:lnSpc>
-              <a:buNone/>
-            </a:pPr>
-            <a:r>
-              <a:rPr lang="en-US" sz="810" b="1" dirty="0">
-                <a:solidFill>
-                  <a:srgbClr val="0E171F"/>
-                </a:solidFill>
-                <a:latin typeface="Poppins" pitchFamily="34" charset="0"/>
-                <a:ea typeface="Poppins" pitchFamily="34" charset="-122"/>
-                <a:cs typeface="Poppins" pitchFamily="34" charset="-120"/>
-              </a:rPr>
-              <a:t>Our recommendation: the category is home entertainment, not beer. </a:t>
-            </a:r>
-            <a:pPr indent="0" marL="0">
-              <a:lnSpc>
-                <a:spcPts val="1215"/>
-              </a:lnSpc>
-              <a:buNone/>
-            </a:pPr>
-            <a:r>
-              <a:rPr lang="en-US" sz="810" dirty="0">
-                <a:solidFill>
-                  <a:srgbClr val="4A5565"/>
-                </a:solidFill>
-                <a:latin typeface="Poppins" pitchFamily="34" charset="0"/>
-                <a:ea typeface="Poppins" pitchFamily="34" charset="-122"/>
-                <a:cs typeface="Poppins" pitchFamily="34" charset="-120"/>
-              </a:rPr>
-              <a:t>The line above is the ambition; the idea underneath it is that Tap That makes an ordinary catch-up the one people remember. That puts the comparison set with coffee machines and outdoor kitchens, upgrades people choose to display. It widens who will partner with you.</a:t>
-            </a:r>
-            <a:endParaRPr lang="en-US" sz="810" dirty="0"/>
-          </a:p>
-        </p:txBody>
-      </p:sp>
-      <p:sp>
-        <p:nvSpPr>
-          <p:cNvPr id="20" name="Shape 16"/>
+          <p:cNvPr id="19" name="Shape 15"/>
           <p:cNvSpPr/>
           <p:nvPr/>
         </p:nvSpPr>
@@ -11456,7 +11718,7 @@
       </p:sp>
       <p:sp>
         <p:nvSpPr>
-          <p:cNvPr id="21" name="Text 17"/>
+          <p:cNvPr id="20" name="Text 16"/>
           <p:cNvSpPr txBox="1"/>
           <p:nvPr/>
         </p:nvSpPr>
@@ -11490,7 +11752,7 @@
                 <a:ea typeface="Poppins" pitchFamily="34" charset="-122"/>
                 <a:cs typeface="Poppins" pitchFamily="34" charset="-120"/>
               </a:rPr>
-              <a:t>Nobody on the Gold Coast owns this category, in market or in search. That is the opening.</a:t>
+              <a:t>Nobody on the Gold Coast owns this category, in market or in search. Christy owns the wording; this is her draft to sign off.</a:t>
             </a:r>
             <a:endParaRPr lang="en-US" sz="700" dirty="0"/>
           </a:p>
@@ -11498,7 +11760,7 @@
       </p:sp>
       <p:sp>
         <p:nvSpPr>
-          <p:cNvPr id="22" name="Shape 18"/>
+          <p:cNvPr id="21" name="Shape 17"/>
           <p:cNvSpPr/>
           <p:nvPr/>
         </p:nvSpPr>
@@ -11523,14 +11785,56 @@
       </p:sp>
       <p:sp>
         <p:nvSpPr>
+          <p:cNvPr id="22" name="Text 18"/>
+          <p:cNvSpPr txBox="1"/>
+          <p:nvPr/>
+        </p:nvSpPr>
+        <p:spPr>
+          <a:xfrm>
+            <a:off x="7728952" y="1230768"/>
+            <a:ext cx="6951755" cy="112268"/>
+          </a:xfrm>
+          <a:prstGeom prst="rect">
+            <a:avLst/>
+          </a:prstGeom>
+          <a:noFill/>
+          <a:ln/>
+        </p:spPr>
+        <p:txBody>
+          <a:bodyPr wrap="square" lIns="0" tIns="0" rIns="0" bIns="0" rtlCol="0" anchor="t"/>
+          <a:lstStyle/>
+          <a:p>
+            <a:pPr indent="0" marL="0">
+              <a:lnSpc>
+                <a:spcPts val="884"/>
+              </a:lnSpc>
+              <a:buNone/>
+            </a:pPr>
+            <a:r>
+              <a:rPr lang="en-US" sz="680" b="1" spc="95" kern="0" dirty="0">
+                <a:solidFill>
+                  <a:srgbClr val="0066FF"/>
+                </a:solidFill>
+                <a:latin typeface="Poppins" pitchFamily="34" charset="0"/>
+                <a:ea typeface="Poppins" pitchFamily="34" charset="-122"/>
+                <a:cs typeface="Poppins" pitchFamily="34" charset="-120"/>
+              </a:rPr>
+              <a:t>WHO THE ENEMY IS</a:t>
+            </a:r>
+            <a:endParaRPr lang="en-US" sz="680" dirty="0"/>
+          </a:p>
+        </p:txBody>
+      </p:sp>
+      <p:sp>
+        <p:nvSpPr>
           <p:cNvPr id="23" name="Text 19"/>
           <p:cNvSpPr txBox="1"/>
           <p:nvPr/>
         </p:nvSpPr>
         <p:spPr>
           <a:xfrm>
-            <a:off x="7728952" y="1230768"/>
-            <a:ext cx="6951755" cy="112268"/>
+            <a:off x="7728952" y="1400636"/>
+            <a:ext cx="6951755" cy="322478"/>
           </a:xfrm>
           <a:prstGeom prst="rect">
             <a:avLst/>
@@ -11544,22 +11848,22 @@
           <a:p>
             <a:pPr indent="0" marL="0">
               <a:lnSpc>
-                <a:spcPts val="884"/>
-              </a:lnSpc>
-              <a:buNone/>
-            </a:pPr>
-            <a:r>
-              <a:rPr lang="en-US" sz="680" b="1" spc="95" kern="0" dirty="0">
-                <a:solidFill>
-                  <a:srgbClr val="0066FF"/>
-                </a:solidFill>
-                <a:latin typeface="Poppins" pitchFamily="34" charset="0"/>
-                <a:ea typeface="Poppins" pitchFamily="34" charset="-122"/>
-                <a:cs typeface="Poppins" pitchFamily="34" charset="-120"/>
-              </a:rPr>
-              <a:t>WHO THE ENEMY IS</a:t>
-            </a:r>
-            <a:endParaRPr lang="en-US" sz="680" dirty="0"/>
+                <a:spcPts val="1270"/>
+              </a:lnSpc>
+              <a:buNone/>
+            </a:pPr>
+            <a:r>
+              <a:rPr lang="en-US" sz="920" b="1" dirty="0">
+                <a:solidFill>
+                  <a:srgbClr val="0E171F"/>
+                </a:solidFill>
+                <a:latin typeface="Poppins" pitchFamily="34" charset="0"/>
+                <a:ea typeface="Poppins" pitchFamily="34" charset="-122"/>
+                <a:cs typeface="Poppins" pitchFamily="34" charset="-120"/>
+              </a:rPr>
+              <a:t>Pubs at $12+ a schooner, bottleshops at $80+ a case, and home brew supply stores. Not the duopoly, not A&amp;A, not the keg delivery operators.</a:t>
+            </a:r>
+            <a:endParaRPr lang="en-US" sz="920" dirty="0"/>
           </a:p>
         </p:txBody>
       </p:sp>
@@ -11571,8 +11875,8 @@
         </p:nvSpPr>
         <p:spPr>
           <a:xfrm>
-            <a:off x="7728952" y="1400636"/>
-            <a:ext cx="6951755" cy="322478"/>
+            <a:off x="7728952" y="1888714"/>
+            <a:ext cx="6951755" cy="308610"/>
           </a:xfrm>
           <a:prstGeom prst="rect">
             <a:avLst/>
@@ -11586,12 +11890,29 @@
           <a:p>
             <a:pPr indent="0" marL="0">
               <a:lnSpc>
-                <a:spcPts val="1270"/>
-              </a:lnSpc>
-              <a:buNone/>
-            </a:pPr>
-            <a:r>
-              <a:rPr lang="en-US" sz="920" b="1" dirty="0">
+                <a:spcPts val="1215"/>
+              </a:lnSpc>
+              <a:buNone/>
+            </a:pPr>
+            <a:r>
+              <a:rPr lang="en-US" sz="810" dirty="0">
+                <a:solidFill>
+                  <a:srgbClr val="4A5565"/>
+                </a:solidFill>
+                <a:latin typeface="Poppins" pitchFamily="34" charset="0"/>
+                <a:ea typeface="Poppins" pitchFamily="34" charset="-122"/>
+                <a:cs typeface="Poppins" pitchFamily="34" charset="-120"/>
+              </a:rPr>
+              <a:t>Justin's own words: </a:t>
+            </a:r>
+            <a:pPr indent="0" marL="0">
+              <a:lnSpc>
+                <a:spcPts val="1215"/>
+              </a:lnSpc>
+              <a:buNone/>
+            </a:pPr>
+            <a:r>
+              <a:rPr lang="en-US" sz="810" b="1" dirty="0">
                 <a:solidFill>
                   <a:srgbClr val="0E171F"/>
                 </a:solidFill>
@@ -11599,9 +11920,60 @@
                 <a:ea typeface="Poppins" pitchFamily="34" charset="-122"/>
                 <a:cs typeface="Poppins" pitchFamily="34" charset="-120"/>
               </a:rPr>
-              <a:t>Pubs at $12+ a schooner, bottleshops at $80+ a case, and home brew supply stores. Not the duopoly, not A&amp;A, not the keg delivery operators.</a:t>
-            </a:r>
-            <a:endParaRPr lang="en-US" sz="920" dirty="0"/>
+              <a:t>the more people drinking craft beer and not XXXX, the better. </a:t>
+            </a:r>
+            <a:pPr indent="0" marL="0">
+              <a:lnSpc>
+                <a:spcPts val="1215"/>
+              </a:lnSpc>
+              <a:buNone/>
+            </a:pPr>
+            <a:r>
+              <a:rPr lang="en-US" sz="810" dirty="0">
+                <a:solidFill>
+                  <a:srgbClr val="4A5565"/>
+                </a:solidFill>
+                <a:latin typeface="Poppins" pitchFamily="34" charset="0"/>
+                <a:ea typeface="Poppins" pitchFamily="34" charset="-122"/>
+                <a:cs typeface="Poppins" pitchFamily="34" charset="-120"/>
+              </a:rPr>
+              <a:t>Other breweries are not the enemy. Every price conversation should be unit economics: </a:t>
+            </a:r>
+            <a:pPr indent="0" marL="0">
+              <a:lnSpc>
+                <a:spcPts val="1215"/>
+              </a:lnSpc>
+              <a:buNone/>
+            </a:pPr>
+            <a:r>
+              <a:rPr lang="en-US" sz="810" b="1" dirty="0">
+                <a:solidFill>
+                  <a:srgbClr val="0E171F"/>
+                </a:solidFill>
+                <a:latin typeface="Poppins" pitchFamily="34" charset="0"/>
+                <a:ea typeface="Poppins" pitchFamily="34" charset="-122"/>
+                <a:cs typeface="Poppins" pitchFamily="34" charset="-120"/>
+              </a:rPr>
+              <a:t>$2.55 a schooner at home against $12+ at the pub</a:t>
+            </a:r>
+            <a:pPr indent="0" marL="0">
+              <a:lnSpc>
+                <a:spcPts val="1215"/>
+              </a:lnSpc>
+              <a:buNone/>
+            </a:pPr>
+            <a:r>
+              <a:rPr lang="en-US" sz="810" dirty="0">
+                <a:solidFill>
+                  <a:srgbClr val="4A5565"/>
+                </a:solidFill>
+                <a:latin typeface="Poppins" pitchFamily="34" charset="0"/>
+                <a:ea typeface="Poppins" pitchFamily="34" charset="-122"/>
+                <a:cs typeface="Poppins" pitchFamily="34" charset="-120"/>
+              </a:rPr>
+              <a:t>, 2.5 cases for the price of one.</a:t>
+            </a:r>
+            <a:endParaRPr lang="en-US" sz="810" dirty="0"/>
           </a:p>
         </p:txBody>
       </p:sp>
@@ -11613,8 +11985,8 @@
         </p:nvSpPr>
         <p:spPr>
           <a:xfrm>
-            <a:off x="7728952" y="1888714"/>
-            <a:ext cx="6951755" cy="308610"/>
+            <a:off x="7728952" y="2362924"/>
+            <a:ext cx="6951755" cy="154305"/>
           </a:xfrm>
           <a:prstGeom prst="rect">
             <a:avLst/>
@@ -11633,6 +12005,23 @@
               <a:buNone/>
             </a:pPr>
             <a:r>
+              <a:rPr lang="en-US" sz="810" b="1" dirty="0">
+                <a:solidFill>
+                  <a:srgbClr val="0E171F"/>
+                </a:solidFill>
+                <a:latin typeface="Poppins" pitchFamily="34" charset="0"/>
+                <a:ea typeface="Poppins" pitchFamily="34" charset="-122"/>
+                <a:cs typeface="Poppins" pitchFamily="34" charset="-120"/>
+              </a:rPr>
+              <a:t>Do not get pulled into a keg price war. </a:t>
+            </a:r>
+            <a:pPr indent="0" marL="0">
+              <a:lnSpc>
+                <a:spcPts val="1215"/>
+              </a:lnSpc>
+              <a:buNone/>
+            </a:pPr>
+            <a:r>
               <a:rPr lang="en-US" sz="810" dirty="0">
                 <a:solidFill>
                   <a:srgbClr val="4A5565"/>
@@ -11641,75 +12030,7 @@
                 <a:ea typeface="Poppins" pitchFamily="34" charset="-122"/>
                 <a:cs typeface="Poppins" pitchFamily="34" charset="-120"/>
               </a:rPr>
-              <a:t>Justin's own words: </a:t>
-            </a:r>
-            <a:pPr indent="0" marL="0">
-              <a:lnSpc>
-                <a:spcPts val="1215"/>
-              </a:lnSpc>
-              <a:buNone/>
-            </a:pPr>
-            <a:r>
-              <a:rPr lang="en-US" sz="810" b="1" dirty="0">
-                <a:solidFill>
-                  <a:srgbClr val="0E171F"/>
-                </a:solidFill>
-                <a:latin typeface="Poppins" pitchFamily="34" charset="0"/>
-                <a:ea typeface="Poppins" pitchFamily="34" charset="-122"/>
-                <a:cs typeface="Poppins" pitchFamily="34" charset="-120"/>
-              </a:rPr>
-              <a:t>the more people drinking craft beer and not XXXX, the better. </a:t>
-            </a:r>
-            <a:pPr indent="0" marL="0">
-              <a:lnSpc>
-                <a:spcPts val="1215"/>
-              </a:lnSpc>
-              <a:buNone/>
-            </a:pPr>
-            <a:r>
-              <a:rPr lang="en-US" sz="810" dirty="0">
-                <a:solidFill>
-                  <a:srgbClr val="4A5565"/>
-                </a:solidFill>
-                <a:latin typeface="Poppins" pitchFamily="34" charset="0"/>
-                <a:ea typeface="Poppins" pitchFamily="34" charset="-122"/>
-                <a:cs typeface="Poppins" pitchFamily="34" charset="-120"/>
-              </a:rPr>
-              <a:t>Other breweries are not the enemy. Every price conversation should be unit economics: </a:t>
-            </a:r>
-            <a:pPr indent="0" marL="0">
-              <a:lnSpc>
-                <a:spcPts val="1215"/>
-              </a:lnSpc>
-              <a:buNone/>
-            </a:pPr>
-            <a:r>
-              <a:rPr lang="en-US" sz="810" b="1" dirty="0">
-                <a:solidFill>
-                  <a:srgbClr val="0E171F"/>
-                </a:solidFill>
-                <a:latin typeface="Poppins" pitchFamily="34" charset="0"/>
-                <a:ea typeface="Poppins" pitchFamily="34" charset="-122"/>
-                <a:cs typeface="Poppins" pitchFamily="34" charset="-120"/>
-              </a:rPr>
-              <a:t>$2.55 a schooner at home against $12+ at the pub</a:t>
-            </a:r>
-            <a:pPr indent="0" marL="0">
-              <a:lnSpc>
-                <a:spcPts val="1215"/>
-              </a:lnSpc>
-              <a:buNone/>
-            </a:pPr>
-            <a:r>
-              <a:rPr lang="en-US" sz="810" dirty="0">
-                <a:solidFill>
-                  <a:srgbClr val="4A5565"/>
-                </a:solidFill>
-                <a:latin typeface="Poppins" pitchFamily="34" charset="0"/>
-                <a:ea typeface="Poppins" pitchFamily="34" charset="-122"/>
-                <a:cs typeface="Poppins" pitchFamily="34" charset="-120"/>
-              </a:rPr>
-              <a:t>, 2.5 cases for the price of one.</a:t>
+              <a:t>It is the one fight where winning costs more than losing.</a:t>
             </a:r>
             <a:endParaRPr lang="en-US" sz="810" dirty="0"/>
           </a:p>
@@ -11723,65 +12044,6 @@
         </p:nvSpPr>
         <p:spPr>
           <a:xfrm>
-            <a:off x="7728952" y="2362924"/>
-            <a:ext cx="6951755" cy="154305"/>
-          </a:xfrm>
-          <a:prstGeom prst="rect">
-            <a:avLst/>
-          </a:prstGeom>
-          <a:noFill/>
-          <a:ln/>
-        </p:spPr>
-        <p:txBody>
-          <a:bodyPr wrap="square" lIns="0" tIns="0" rIns="0" bIns="0" rtlCol="0" anchor="t"/>
-          <a:lstStyle/>
-          <a:p>
-            <a:pPr indent="0" marL="0">
-              <a:lnSpc>
-                <a:spcPts val="1215"/>
-              </a:lnSpc>
-              <a:buNone/>
-            </a:pPr>
-            <a:r>
-              <a:rPr lang="en-US" sz="810" b="1" dirty="0">
-                <a:solidFill>
-                  <a:srgbClr val="0E171F"/>
-                </a:solidFill>
-                <a:latin typeface="Poppins" pitchFamily="34" charset="0"/>
-                <a:ea typeface="Poppins" pitchFamily="34" charset="-122"/>
-                <a:cs typeface="Poppins" pitchFamily="34" charset="-120"/>
-              </a:rPr>
-              <a:t>Do not get pulled into a keg price war. </a:t>
-            </a:r>
-            <a:pPr indent="0" marL="0">
-              <a:lnSpc>
-                <a:spcPts val="1215"/>
-              </a:lnSpc>
-              <a:buNone/>
-            </a:pPr>
-            <a:r>
-              <a:rPr lang="en-US" sz="810" dirty="0">
-                <a:solidFill>
-                  <a:srgbClr val="4A5565"/>
-                </a:solidFill>
-                <a:latin typeface="Poppins" pitchFamily="34" charset="0"/>
-                <a:ea typeface="Poppins" pitchFamily="34" charset="-122"/>
-                <a:cs typeface="Poppins" pitchFamily="34" charset="-120"/>
-              </a:rPr>
-              <a:t>It is the one fight where winning costs more than losing.</a:t>
-            </a:r>
-            <a:endParaRPr lang="en-US" sz="810" dirty="0"/>
-          </a:p>
-        </p:txBody>
-      </p:sp>
-      <p:sp>
-        <p:nvSpPr>
-          <p:cNvPr id="27" name="Text 23"/>
-          <p:cNvSpPr txBox="1"/>
-          <p:nvPr/>
-        </p:nvSpPr>
-        <p:spPr>
-          <a:xfrm>
             <a:off x="7728952" y="2682829"/>
             <a:ext cx="6951755" cy="308610"/>
           </a:xfrm>
@@ -11835,7 +12097,7 @@
       </p:sp>
       <p:sp>
         <p:nvSpPr>
-          <p:cNvPr id="28" name="Shape 24"/>
+          <p:cNvPr id="27" name="Shape 23"/>
           <p:cNvSpPr/>
           <p:nvPr/>
         </p:nvSpPr>
@@ -11858,7 +12120,7 @@
       </p:sp>
       <p:sp>
         <p:nvSpPr>
-          <p:cNvPr id="29" name="Text 25"/>
+          <p:cNvPr id="28" name="Text 24"/>
           <p:cNvSpPr txBox="1"/>
           <p:nvPr/>
         </p:nvSpPr>
@@ -11900,7 +12162,7 @@
       </p:sp>
       <p:sp>
         <p:nvSpPr>
-          <p:cNvPr id="30" name="Shape 26"/>
+          <p:cNvPr id="29" name="Shape 25"/>
           <p:cNvSpPr/>
           <p:nvPr/>
         </p:nvSpPr>
@@ -11925,14 +12187,56 @@
       </p:sp>
       <p:sp>
         <p:nvSpPr>
+          <p:cNvPr id="30" name="Text 26"/>
+          <p:cNvSpPr txBox="1"/>
+          <p:nvPr/>
+        </p:nvSpPr>
+        <p:spPr>
+          <a:xfrm>
+            <a:off x="438898" y="4152425"/>
+            <a:ext cx="4521737" cy="112268"/>
+          </a:xfrm>
+          <a:prstGeom prst="rect">
+            <a:avLst/>
+          </a:prstGeom>
+          <a:noFill/>
+          <a:ln/>
+        </p:spPr>
+        <p:txBody>
+          <a:bodyPr wrap="square" lIns="0" tIns="0" rIns="0" bIns="0" rtlCol="0" anchor="t"/>
+          <a:lstStyle/>
+          <a:p>
+            <a:pPr indent="0" marL="0">
+              <a:lnSpc>
+                <a:spcPts val="884"/>
+              </a:lnSpc>
+              <a:buNone/>
+            </a:pPr>
+            <a:r>
+              <a:rPr lang="en-US" sz="680" b="1" spc="95" kern="0" dirty="0">
+                <a:solidFill>
+                  <a:srgbClr val="0066FF"/>
+                </a:solidFill>
+                <a:latin typeface="Poppins" pitchFamily="34" charset="0"/>
+                <a:ea typeface="Poppins" pitchFamily="34" charset="-122"/>
+                <a:cs typeface="Poppins" pitchFamily="34" charset="-120"/>
+              </a:rPr>
+              <a:t>HEROES, NOT A TAIL</a:t>
+            </a:r>
+            <a:endParaRPr lang="en-US" sz="680" dirty="0"/>
+          </a:p>
+        </p:txBody>
+      </p:sp>
+      <p:sp>
+        <p:nvSpPr>
           <p:cNvPr id="31" name="Text 27"/>
           <p:cNvSpPr txBox="1"/>
           <p:nvPr/>
         </p:nvSpPr>
         <p:spPr>
           <a:xfrm>
-            <a:off x="438898" y="4152425"/>
-            <a:ext cx="4521737" cy="112268"/>
+            <a:off x="438898" y="4322293"/>
+            <a:ext cx="4521737" cy="308610"/>
           </a:xfrm>
           <a:prstGeom prst="rect">
             <a:avLst/>
@@ -11946,22 +12250,39 @@
           <a:p>
             <a:pPr indent="0" marL="0">
               <a:lnSpc>
-                <a:spcPts val="884"/>
-              </a:lnSpc>
-              <a:buNone/>
-            </a:pPr>
-            <a:r>
-              <a:rPr lang="en-US" sz="680" b="1" spc="95" kern="0" dirty="0">
-                <a:solidFill>
-                  <a:srgbClr val="0066FF"/>
-                </a:solidFill>
-                <a:latin typeface="Poppins" pitchFamily="34" charset="0"/>
-                <a:ea typeface="Poppins" pitchFamily="34" charset="-122"/>
-                <a:cs typeface="Poppins" pitchFamily="34" charset="-120"/>
-              </a:rPr>
-              <a:t>HEROES, NOT A TAIL</a:t>
-            </a:r>
-            <a:endParaRPr lang="en-US" sz="680" dirty="0"/>
+                <a:spcPts val="1215"/>
+              </a:lnSpc>
+              <a:buNone/>
+            </a:pPr>
+            <a:r>
+              <a:rPr lang="en-US" sz="810" b="1" dirty="0">
+                <a:solidFill>
+                  <a:srgbClr val="0E171F"/>
+                </a:solidFill>
+                <a:latin typeface="Poppins" pitchFamily="34" charset="0"/>
+                <a:ea typeface="Poppins" pitchFamily="34" charset="-122"/>
+                <a:cs typeface="Poppins" pitchFamily="34" charset="-120"/>
+              </a:rPr>
+              <a:t>About 19 brew choices </a:t>
+            </a:r>
+            <a:pPr indent="0" marL="0">
+              <a:lnSpc>
+                <a:spcPts val="1215"/>
+              </a:lnSpc>
+              <a:buNone/>
+            </a:pPr>
+            <a:r>
+              <a:rPr lang="en-US" sz="810" dirty="0">
+                <a:solidFill>
+                  <a:srgbClr val="4A5565"/>
+                </a:solidFill>
+                <a:latin typeface="Poppins" pitchFamily="34" charset="0"/>
+                <a:ea typeface="Poppins" pitchFamily="34" charset="-122"/>
+                <a:cs typeface="Poppins" pitchFamily="34" charset="-120"/>
+              </a:rPr>
+              <a:t>is costing twice: cost of goods on the tail, and choice paralysis at the point of sale. It also means no single beer gets enough marketing to become known.</a:t>
+            </a:r>
+            <a:endParaRPr lang="en-US" sz="810" dirty="0"/>
           </a:p>
         </p:txBody>
       </p:sp>
@@ -11973,8 +12294,8 @@
         </p:nvSpPr>
         <p:spPr>
           <a:xfrm>
-            <a:off x="438898" y="4322293"/>
-            <a:ext cx="4521737" cy="462915"/>
+            <a:off x="438898" y="4796503"/>
+            <a:ext cx="4521737" cy="308610"/>
           </a:xfrm>
           <a:prstGeom prst="rect">
             <a:avLst/>
@@ -12001,7 +12322,7 @@
                 <a:ea typeface="Poppins" pitchFamily="34" charset="-122"/>
                 <a:cs typeface="Poppins" pitchFamily="34" charset="-120"/>
               </a:rPr>
-              <a:t>About 19 brew choices </a:t>
+              <a:t>Cutting the tail is not the point. </a:t>
             </a:r>
             <a:pPr indent="0" marL="0">
               <a:lnSpc>
@@ -12018,7 +12339,7 @@
                 <a:ea typeface="Poppins" pitchFamily="34" charset="-122"/>
                 <a:cs typeface="Poppins" pitchFamily="34" charset="-120"/>
               </a:rPr>
-              <a:t>is costing twice: cost of goods on the tail, and choice paralysis at the point of sale. It also means no single beer gets enough marketing to become known.</a:t>
+              <a:t>The point is putting the freed marketing energy behind the heroes that remain. Romance the beer, not the venue.</a:t>
             </a:r>
             <a:endParaRPr lang="en-US" sz="810" dirty="0"/>
           </a:p>
@@ -12032,7 +12353,7 @@
         </p:nvSpPr>
         <p:spPr>
           <a:xfrm>
-            <a:off x="438898" y="4950808"/>
+            <a:off x="438898" y="5270713"/>
             <a:ext cx="4521737" cy="308610"/>
           </a:xfrm>
           <a:prstGeom prst="rect">
@@ -12060,7 +12381,7 @@
                 <a:ea typeface="Poppins" pitchFamily="34" charset="-122"/>
                 <a:cs typeface="Poppins" pitchFamily="34" charset="-120"/>
               </a:rPr>
-              <a:t>Cutting the tail is not the point. </a:t>
+              <a:t>Add social proof at the point of sale: </a:t>
             </a:r>
             <a:pPr indent="0" marL="0">
               <a:lnSpc>
@@ -12077,7 +12398,7 @@
                 <a:ea typeface="Poppins" pitchFamily="34" charset="-122"/>
                 <a:cs typeface="Poppins" pitchFamily="34" charset="-120"/>
               </a:rPr>
-              <a:t>The point is putting the freed marketing energy behind the heroes that remain. Romance the beer, not the venue.</a:t>
+              <a:t>most popular, award winning, what to eat with it. Missing in the room and missing on the site.</a:t>
             </a:r>
             <a:endParaRPr lang="en-US" sz="810" dirty="0"/>
           </a:p>
@@ -12085,72 +12406,13 @@
       </p:sp>
       <p:sp>
         <p:nvSpPr>
-          <p:cNvPr id="34" name="Text 30"/>
-          <p:cNvSpPr txBox="1"/>
-          <p:nvPr/>
-        </p:nvSpPr>
-        <p:spPr>
-          <a:xfrm>
-            <a:off x="438898" y="5425018"/>
-            <a:ext cx="4521737" cy="308610"/>
-          </a:xfrm>
-          <a:prstGeom prst="rect">
-            <a:avLst/>
-          </a:prstGeom>
-          <a:noFill/>
-          <a:ln/>
-        </p:spPr>
-        <p:txBody>
-          <a:bodyPr wrap="square" lIns="0" tIns="0" rIns="0" bIns="0" rtlCol="0" anchor="t"/>
-          <a:lstStyle/>
-          <a:p>
-            <a:pPr indent="0" marL="0">
-              <a:lnSpc>
-                <a:spcPts val="1215"/>
-              </a:lnSpc>
-              <a:buNone/>
-            </a:pPr>
-            <a:r>
-              <a:rPr lang="en-US" sz="810" b="1" dirty="0">
-                <a:solidFill>
-                  <a:srgbClr val="0E171F"/>
-                </a:solidFill>
-                <a:latin typeface="Poppins" pitchFamily="34" charset="0"/>
-                <a:ea typeface="Poppins" pitchFamily="34" charset="-122"/>
-                <a:cs typeface="Poppins" pitchFamily="34" charset="-120"/>
-              </a:rPr>
-              <a:t>Add social proof at the point of sale: </a:t>
-            </a:r>
-            <a:pPr indent="0" marL="0">
-              <a:lnSpc>
-                <a:spcPts val="1215"/>
-              </a:lnSpc>
-              <a:buNone/>
-            </a:pPr>
-            <a:r>
-              <a:rPr lang="en-US" sz="810" dirty="0">
-                <a:solidFill>
-                  <a:srgbClr val="4A5565"/>
-                </a:solidFill>
-                <a:latin typeface="Poppins" pitchFamily="34" charset="0"/>
-                <a:ea typeface="Poppins" pitchFamily="34" charset="-122"/>
-                <a:cs typeface="Poppins" pitchFamily="34" charset="-120"/>
-              </a:rPr>
-              <a:t>most popular, award winning, what to eat with it. Missing in the room and missing on the site.</a:t>
-            </a:r>
-            <a:endParaRPr lang="en-US" sz="810" dirty="0"/>
-          </a:p>
-        </p:txBody>
-      </p:sp>
-      <p:sp>
-        <p:nvSpPr>
-          <p:cNvPr id="35" name="Shape 31"/>
+          <p:cNvPr id="34" name="Shape 30"/>
           <p:cNvSpPr/>
           <p:nvPr/>
         </p:nvSpPr>
         <p:spPr>
           <a:xfrm>
-            <a:off x="438898" y="6995042"/>
+            <a:off x="438898" y="7115057"/>
             <a:ext cx="4521737" cy="0"/>
           </a:xfrm>
           <a:prstGeom prst="line">
@@ -12167,14 +12429,14 @@
       </p:sp>
       <p:sp>
         <p:nvSpPr>
-          <p:cNvPr id="36" name="Text 32"/>
+          <p:cNvPr id="35" name="Text 31"/>
           <p:cNvSpPr txBox="1"/>
           <p:nvPr/>
         </p:nvSpPr>
         <p:spPr>
           <a:xfrm>
-            <a:off x="438898" y="7052642"/>
-            <a:ext cx="4521737" cy="240030"/>
+            <a:off x="438898" y="7172657"/>
+            <a:ext cx="4521737" cy="120015"/>
           </a:xfrm>
           <a:prstGeom prst="rect">
             <a:avLst/>
@@ -12209,7 +12471,7 @@
       </p:sp>
       <p:sp>
         <p:nvSpPr>
-          <p:cNvPr id="37" name="Shape 33"/>
+          <p:cNvPr id="36" name="Shape 32"/>
           <p:cNvSpPr/>
           <p:nvPr/>
         </p:nvSpPr>
@@ -12234,14 +12496,56 @@
       </p:sp>
       <p:sp>
         <p:nvSpPr>
+          <p:cNvPr id="37" name="Text 33"/>
+          <p:cNvSpPr txBox="1"/>
+          <p:nvPr/>
+        </p:nvSpPr>
+        <p:spPr>
+          <a:xfrm>
+            <a:off x="5298934" y="4152425"/>
+            <a:ext cx="4521737" cy="112268"/>
+          </a:xfrm>
+          <a:prstGeom prst="rect">
+            <a:avLst/>
+          </a:prstGeom>
+          <a:noFill/>
+          <a:ln/>
+        </p:spPr>
+        <p:txBody>
+          <a:bodyPr wrap="square" lIns="0" tIns="0" rIns="0" bIns="0" rtlCol="0" anchor="t"/>
+          <a:lstStyle/>
+          <a:p>
+            <a:pPr indent="0" marL="0">
+              <a:lnSpc>
+                <a:spcPts val="884"/>
+              </a:lnSpc>
+              <a:buNone/>
+            </a:pPr>
+            <a:r>
+              <a:rPr lang="en-US" sz="680" b="1" spc="95" kern="0" dirty="0">
+                <a:solidFill>
+                  <a:srgbClr val="0066FF"/>
+                </a:solidFill>
+                <a:latin typeface="Poppins" pitchFamily="34" charset="0"/>
+                <a:ea typeface="Poppins" pitchFamily="34" charset="-122"/>
+                <a:cs typeface="Poppins" pitchFamily="34" charset="-120"/>
+              </a:rPr>
+              <a:t>DESIGN FOR HER</a:t>
+            </a:r>
+            <a:endParaRPr lang="en-US" sz="680" dirty="0"/>
+          </a:p>
+        </p:txBody>
+      </p:sp>
+      <p:sp>
+        <p:nvSpPr>
           <p:cNvPr id="38" name="Text 34"/>
           <p:cNvSpPr txBox="1"/>
           <p:nvPr/>
         </p:nvSpPr>
         <p:spPr>
           <a:xfrm>
-            <a:off x="5298934" y="4152425"/>
-            <a:ext cx="4521737" cy="112268"/>
+            <a:off x="5298934" y="4322293"/>
+            <a:ext cx="4521737" cy="161239"/>
           </a:xfrm>
           <a:prstGeom prst="rect">
             <a:avLst/>
@@ -12255,22 +12559,22 @@
           <a:p>
             <a:pPr indent="0" marL="0">
               <a:lnSpc>
-                <a:spcPts val="884"/>
-              </a:lnSpc>
-              <a:buNone/>
-            </a:pPr>
-            <a:r>
-              <a:rPr lang="en-US" sz="680" b="1" spc="95" kern="0" dirty="0">
-                <a:solidFill>
-                  <a:srgbClr val="0066FF"/>
-                </a:solidFill>
-                <a:latin typeface="Poppins" pitchFamily="34" charset="0"/>
-                <a:ea typeface="Poppins" pitchFamily="34" charset="-122"/>
-                <a:cs typeface="Poppins" pitchFamily="34" charset="-120"/>
-              </a:rPr>
-              <a:t>DESIGN FOR HER</a:t>
-            </a:r>
-            <a:endParaRPr lang="en-US" sz="680" dirty="0"/>
+                <a:spcPts val="1270"/>
+              </a:lnSpc>
+              <a:buNone/>
+            </a:pPr>
+            <a:r>
+              <a:rPr lang="en-US" sz="920" b="1" dirty="0">
+                <a:solidFill>
+                  <a:srgbClr val="0E171F"/>
+                </a:solidFill>
+                <a:latin typeface="Poppins" pitchFamily="34" charset="0"/>
+                <a:ea typeface="Poppins" pitchFamily="34" charset="-122"/>
+                <a:cs typeface="Poppins" pitchFamily="34" charset="-120"/>
+              </a:rPr>
+              <a:t>The single largest unaddressed opportunity in the brand.</a:t>
+            </a:r>
+            <a:endParaRPr lang="en-US" sz="920" dirty="0"/>
           </a:p>
         </p:txBody>
       </p:sp>
@@ -12282,8 +12586,8 @@
         </p:nvSpPr>
         <p:spPr>
           <a:xfrm>
-            <a:off x="5298934" y="4322293"/>
-            <a:ext cx="4521737" cy="161239"/>
+            <a:off x="5298934" y="4578298"/>
+            <a:ext cx="4521737" cy="771525"/>
           </a:xfrm>
           <a:prstGeom prst="rect">
             <a:avLst/>
@@ -12297,12 +12601,29 @@
           <a:p>
             <a:pPr indent="0" marL="0">
               <a:lnSpc>
-                <a:spcPts val="1270"/>
-              </a:lnSpc>
-              <a:buNone/>
-            </a:pPr>
-            <a:r>
-              <a:rPr lang="en-US" sz="920" b="1" dirty="0">
+                <a:spcPts val="1215"/>
+              </a:lnSpc>
+              <a:buNone/>
+            </a:pPr>
+            <a:r>
+              <a:rPr lang="en-US" sz="810" dirty="0">
+                <a:solidFill>
+                  <a:srgbClr val="4A5565"/>
+                </a:solidFill>
+                <a:latin typeface="Poppins" pitchFamily="34" charset="0"/>
+                <a:ea typeface="Poppins" pitchFamily="34" charset="-122"/>
+                <a:cs typeface="Poppins" pitchFamily="34" charset="-120"/>
+              </a:rPr>
+              <a:t>The range, the marketing and the hardware all read masculine. Covered is not the same as catered for. Christy's argument is the blunt one: </a:t>
+            </a:r>
+            <a:pPr indent="0" marL="0">
+              <a:lnSpc>
+                <a:spcPts val="1215"/>
+              </a:lnSpc>
+              <a:buNone/>
+            </a:pPr>
+            <a:r>
+              <a:rPr lang="en-US" sz="810" b="1" dirty="0">
                 <a:solidFill>
                   <a:srgbClr val="0E171F"/>
                 </a:solidFill>
@@ -12310,9 +12631,26 @@
                 <a:ea typeface="Poppins" pitchFamily="34" charset="-122"/>
                 <a:cs typeface="Poppins" pitchFamily="34" charset="-120"/>
               </a:rPr>
-              <a:t>The single largest unaddressed opportunity in the brand.</a:t>
-            </a:r>
-            <a:endParaRPr lang="en-US" sz="920" dirty="0"/>
+              <a:t>if women are not coming, men will not follow. </a:t>
+            </a:r>
+            <a:pPr indent="0" marL="0">
+              <a:lnSpc>
+                <a:spcPts val="1215"/>
+              </a:lnSpc>
+              <a:buNone/>
+            </a:pPr>
+            <a:r>
+              <a:rPr lang="en-US" sz="810" dirty="0">
+                <a:solidFill>
+                  <a:srgbClr val="4A5565"/>
+                </a:solidFill>
+                <a:latin typeface="Poppins" pitchFamily="34" charset="0"/>
+                <a:ea typeface="Poppins" pitchFamily="34" charset="-122"/>
+                <a:cs typeface="Poppins" pitchFamily="34" charset="-120"/>
+              </a:rPr>
+              <a:t>Justin's target segments, sharehouses, DINKs, young families, baby boomers, high-volume drinkers, cashed-up tradies, are households, and designing for her is how those households say yes.</a:t>
+            </a:r>
+            <a:endParaRPr lang="en-US" sz="810" dirty="0"/>
           </a:p>
         </p:txBody>
       </p:sp>
@@ -12324,8 +12662,8 @@
         </p:nvSpPr>
         <p:spPr>
           <a:xfrm>
-            <a:off x="5298934" y="4560938"/>
-            <a:ext cx="4521737" cy="771525"/>
+            <a:off x="5298934" y="5444588"/>
+            <a:ext cx="4521737" cy="462915"/>
           </a:xfrm>
           <a:prstGeom prst="rect">
             <a:avLst/>
@@ -12344,6 +12682,23 @@
               <a:buNone/>
             </a:pPr>
             <a:r>
+              <a:rPr lang="en-US" sz="810" b="1" dirty="0">
+                <a:solidFill>
+                  <a:srgbClr val="0E171F"/>
+                </a:solidFill>
+                <a:latin typeface="Poppins" pitchFamily="34" charset="0"/>
+                <a:ea typeface="Poppins" pitchFamily="34" charset="-122"/>
+                <a:cs typeface="Poppins" pitchFamily="34" charset="-120"/>
+              </a:rPr>
+              <a:t>What it means in practice: </a:t>
+            </a:r>
+            <a:pPr indent="0" marL="0">
+              <a:lnSpc>
+                <a:spcPts val="1215"/>
+              </a:lnSpc>
+              <a:buNone/>
+            </a:pPr>
+            <a:r>
               <a:rPr lang="en-US" sz="810" dirty="0">
                 <a:solidFill>
                   <a:srgbClr val="4A5565"/>
@@ -12352,41 +12707,7 @@
                 <a:ea typeface="Poppins" pitchFamily="34" charset="-122"/>
                 <a:cs typeface="Poppins" pitchFamily="34" charset="-120"/>
               </a:rPr>
-              <a:t>The range, the marketing and the hardware all read masculine. Covered is not the same as catered for. Christy's argument is the blunt one: </a:t>
-            </a:r>
-            <a:pPr indent="0" marL="0">
-              <a:lnSpc>
-                <a:spcPts val="1215"/>
-              </a:lnSpc>
-              <a:buNone/>
-            </a:pPr>
-            <a:r>
-              <a:rPr lang="en-US" sz="810" b="1" dirty="0">
-                <a:solidFill>
-                  <a:srgbClr val="0E171F"/>
-                </a:solidFill>
-                <a:latin typeface="Poppins" pitchFamily="34" charset="0"/>
-                <a:ea typeface="Poppins" pitchFamily="34" charset="-122"/>
-                <a:cs typeface="Poppins" pitchFamily="34" charset="-120"/>
-              </a:rPr>
-              <a:t>if women are not coming, men will not follow. </a:t>
-            </a:r>
-            <a:pPr indent="0" marL="0">
-              <a:lnSpc>
-                <a:spcPts val="1215"/>
-              </a:lnSpc>
-              <a:buNone/>
-            </a:pPr>
-            <a:r>
-              <a:rPr lang="en-US" sz="810" dirty="0">
-                <a:solidFill>
-                  <a:srgbClr val="4A5565"/>
-                </a:solidFill>
-                <a:latin typeface="Poppins" pitchFamily="34" charset="0"/>
-                <a:ea typeface="Poppins" pitchFamily="34" charset="-122"/>
-                <a:cs typeface="Poppins" pitchFamily="34" charset="-120"/>
-              </a:rPr>
-              <a:t>Justin's target segments, sharehouses, DINKs, young families, baby boomers, high-volume drinkers, cashed-up tradies, are households, and designing for her is how those households say yes.</a:t>
+              <a:t>romance the RTD properly, build the hydration and light range as a real story, make products she is proud to serve, and design a system she is willing to have in eyesight at home.</a:t>
             </a:r>
             <a:endParaRPr lang="en-US" sz="810" dirty="0"/>
           </a:p>
@@ -12400,8 +12721,8 @@
         </p:nvSpPr>
         <p:spPr>
           <a:xfrm>
-            <a:off x="5298934" y="5409870"/>
-            <a:ext cx="4521737" cy="462915"/>
+            <a:off x="5298934" y="6002269"/>
+            <a:ext cx="4521737" cy="308610"/>
           </a:xfrm>
           <a:prstGeom prst="rect">
             <a:avLst/>
@@ -12428,7 +12749,7 @@
                 <a:ea typeface="Poppins" pitchFamily="34" charset="-122"/>
                 <a:cs typeface="Poppins" pitchFamily="34" charset="-120"/>
               </a:rPr>
-              <a:t>What it means in practice: </a:t>
+              <a:t>And the hardware itself. </a:t>
             </a:r>
             <a:pPr indent="0" marL="0">
               <a:lnSpc>
@@ -12445,7 +12766,7 @@
                 <a:ea typeface="Poppins" pitchFamily="34" charset="-122"/>
                 <a:cs typeface="Poppins" pitchFamily="34" charset="-120"/>
               </a:rPr>
-              <a:t>romance the RTD properly, build the hydration and light range as a real story, make products she is proud to serve, and design a system she is willing to have in eyesight at home.</a:t>
+              <a:t>A Zip HydroTap sells at around $10,000 largely because it looks right on a bench. That is the standard.</a:t>
             </a:r>
             <a:endParaRPr lang="en-US" sz="810" dirty="0"/>
           </a:p>
@@ -12459,7 +12780,7 @@
         </p:nvSpPr>
         <p:spPr>
           <a:xfrm>
-            <a:off x="5298934" y="5950191"/>
+            <a:off x="5298934" y="6405644"/>
             <a:ext cx="4521737" cy="462915"/>
           </a:xfrm>
           <a:prstGeom prst="rect">
@@ -12487,7 +12808,7 @@
                 <a:ea typeface="Poppins" pitchFamily="34" charset="-122"/>
                 <a:cs typeface="Poppins" pitchFamily="34" charset="-120"/>
               </a:rPr>
-              <a:t>And the hardware itself. </a:t>
+              <a:t>Where to start: </a:t>
             </a:r>
             <a:pPr indent="0" marL="0">
               <a:lnSpc>
@@ -12504,7 +12825,7 @@
                 <a:ea typeface="Poppins" pitchFamily="34" charset="-122"/>
                 <a:cs typeface="Poppins" pitchFamily="34" charset="-120"/>
               </a:rPr>
-              <a:t>Keg systems are absent from Harvey Norman’s outdoor living aisle; they sit in appliances. A Zip HydroTap sells at around $10,000 largely because it looks right on a bench. That is the standard.</a:t>
+              <a:t>wellness influencer collaborations, and co-developing something with a local fitness brand. Christy's example was a protein beer. The point is a product she would choose, not a product she tolerates.</a:t>
             </a:r>
             <a:endParaRPr lang="en-US" sz="810" dirty="0"/>
           </a:p>
@@ -12512,66 +12833,7 @@
       </p:sp>
       <p:sp>
         <p:nvSpPr>
-          <p:cNvPr id="43" name="Text 39"/>
-          <p:cNvSpPr txBox="1"/>
-          <p:nvPr/>
-        </p:nvSpPr>
-        <p:spPr>
-          <a:xfrm>
-            <a:off x="5298934" y="6490512"/>
-            <a:ext cx="4521737" cy="462915"/>
-          </a:xfrm>
-          <a:prstGeom prst="rect">
-            <a:avLst/>
-          </a:prstGeom>
-          <a:noFill/>
-          <a:ln/>
-        </p:spPr>
-        <p:txBody>
-          <a:bodyPr wrap="square" lIns="0" tIns="0" rIns="0" bIns="0" rtlCol="0" anchor="t"/>
-          <a:lstStyle/>
-          <a:p>
-            <a:pPr indent="0" marL="0">
-              <a:lnSpc>
-                <a:spcPts val="1215"/>
-              </a:lnSpc>
-              <a:buNone/>
-            </a:pPr>
-            <a:r>
-              <a:rPr lang="en-US" sz="810" b="1" dirty="0">
-                <a:solidFill>
-                  <a:srgbClr val="0E171F"/>
-                </a:solidFill>
-                <a:latin typeface="Poppins" pitchFamily="34" charset="0"/>
-                <a:ea typeface="Poppins" pitchFamily="34" charset="-122"/>
-                <a:cs typeface="Poppins" pitchFamily="34" charset="-120"/>
-              </a:rPr>
-              <a:t>Where to start: </a:t>
-            </a:r>
-            <a:pPr indent="0" marL="0">
-              <a:lnSpc>
-                <a:spcPts val="1215"/>
-              </a:lnSpc>
-              <a:buNone/>
-            </a:pPr>
-            <a:r>
-              <a:rPr lang="en-US" sz="810" dirty="0">
-                <a:solidFill>
-                  <a:srgbClr val="4A5565"/>
-                </a:solidFill>
-                <a:latin typeface="Poppins" pitchFamily="34" charset="0"/>
-                <a:ea typeface="Poppins" pitchFamily="34" charset="-122"/>
-                <a:cs typeface="Poppins" pitchFamily="34" charset="-120"/>
-              </a:rPr>
-              <a:t>wellness influencer collaborations, and co-developing something with a local fitness brand. Christy's example was a protein beer. The point is a product she would choose, not a product she tolerates.</a:t>
-            </a:r>
-            <a:endParaRPr lang="en-US" sz="810" dirty="0"/>
-          </a:p>
-        </p:txBody>
-      </p:sp>
-      <p:sp>
-        <p:nvSpPr>
-          <p:cNvPr id="44" name="Shape 40"/>
+          <p:cNvPr id="43" name="Shape 39"/>
           <p:cNvSpPr/>
           <p:nvPr/>
         </p:nvSpPr>
@@ -12594,7 +12856,7 @@
       </p:sp>
       <p:sp>
         <p:nvSpPr>
-          <p:cNvPr id="45" name="Text 41"/>
+          <p:cNvPr id="44" name="Text 40"/>
           <p:cNvSpPr txBox="1"/>
           <p:nvPr/>
         </p:nvSpPr>
@@ -12636,7 +12898,7 @@
       </p:sp>
       <p:sp>
         <p:nvSpPr>
-          <p:cNvPr id="46" name="Shape 42"/>
+          <p:cNvPr id="45" name="Shape 41"/>
           <p:cNvSpPr/>
           <p:nvPr/>
         </p:nvSpPr>
@@ -12661,7 +12923,7 @@
       </p:sp>
       <p:sp>
         <p:nvSpPr>
-          <p:cNvPr id="47" name="Text 43"/>
+          <p:cNvPr id="46" name="Text 42"/>
           <p:cNvSpPr txBox="1"/>
           <p:nvPr/>
         </p:nvSpPr>
@@ -12703,7 +12965,7 @@
       </p:sp>
       <p:sp>
         <p:nvSpPr>
-          <p:cNvPr id="48" name="Shape 44"/>
+          <p:cNvPr id="47" name="Shape 43"/>
           <p:cNvSpPr/>
           <p:nvPr/>
         </p:nvSpPr>
@@ -12728,14 +12990,14 @@
       </p:sp>
       <p:sp>
         <p:nvSpPr>
-          <p:cNvPr id="49" name="Text 45"/>
+          <p:cNvPr id="48" name="Text 44"/>
           <p:cNvSpPr txBox="1"/>
           <p:nvPr/>
         </p:nvSpPr>
         <p:spPr>
           <a:xfrm>
             <a:off x="10266970" y="4322293"/>
-            <a:ext cx="4413737" cy="256032"/>
+            <a:ext cx="4413737" cy="384048"/>
           </a:xfrm>
           <a:prstGeom prst="rect">
             <a:avLst/>
@@ -12762,7 +13024,7 @@
                 <a:ea typeface="Poppins" pitchFamily="34" charset="-122"/>
                 <a:cs typeface="Poppins" pitchFamily="34" charset="-120"/>
               </a:rPr>
-              <a:t>Crafted Brewers' Choice award. </a:t>
+              <a:t>Integrated units, already selling. </a:t>
             </a:r>
             <a:pPr indent="0" marL="0">
               <a:lnSpc>
@@ -12779,7 +13041,7 @@
                 <a:ea typeface="Poppins" pitchFamily="34" charset="-122"/>
                 <a:cs typeface="Poppins" pitchFamily="34" charset="-120"/>
               </a:rPr>
-              <a:t>Won, and almost invisible. It belongs on the site, in the room, on the tap decals and in social.</a:t>
+              <a:t>Three to four plumbed-in systems with only the font showing, installed in the last couple of months. Not on the website. This is the product that belongs in the outdoor living grouping.</a:t>
             </a:r>
             <a:endParaRPr lang="en-US" sz="720" dirty="0"/>
           </a:p>
@@ -12787,13 +13049,13 @@
       </p:sp>
       <p:sp>
         <p:nvSpPr>
-          <p:cNvPr id="50" name="Shape 46"/>
+          <p:cNvPr id="49" name="Shape 45"/>
           <p:cNvSpPr/>
           <p:nvPr/>
         </p:nvSpPr>
         <p:spPr>
           <a:xfrm>
-            <a:off x="10158970" y="5068034"/>
+            <a:off x="10158970" y="4937851"/>
             <a:ext cx="50400" cy="50400"/>
           </a:xfrm>
           <a:prstGeom prst="rect">
@@ -12812,13 +13074,13 @@
       </p:sp>
       <p:sp>
         <p:nvSpPr>
-          <p:cNvPr id="51" name="Text 47"/>
+          <p:cNvPr id="50" name="Text 46"/>
           <p:cNvSpPr txBox="1"/>
           <p:nvPr/>
         </p:nvSpPr>
         <p:spPr>
           <a:xfrm>
-            <a:off x="10266970" y="5032884"/>
+            <a:off x="10266970" y="4902700"/>
             <a:ext cx="4413737" cy="256032"/>
           </a:xfrm>
           <a:prstGeom prst="rect">
@@ -12846,7 +13108,7 @@
                 <a:ea typeface="Poppins" pitchFamily="34" charset="-122"/>
                 <a:cs typeface="Poppins" pitchFamily="34" charset="-120"/>
               </a:rPr>
-              <a:t>Fits any system, no CO2 with Talos kegs. </a:t>
+              <a:t>Referrals at 18% of sales without a programme worth the name. </a:t>
             </a:r>
             <a:pPr indent="0" marL="0">
               <a:lnSpc>
@@ -12863,7 +13125,7 @@
                 <a:ea typeface="Poppins" pitchFamily="34" charset="-122"/>
                 <a:cs typeface="Poppins" pitchFamily="34" charset="-120"/>
               </a:rPr>
-              <a:t>Two buying objections answered, both currently below the fold.</a:t>
+              <a:t>The proof that the social mechanic works is already in the numbers.</a:t>
             </a:r>
             <a:endParaRPr lang="en-US" sz="720" dirty="0"/>
           </a:p>
@@ -12871,13 +13133,13 @@
       </p:sp>
       <p:sp>
         <p:nvSpPr>
-          <p:cNvPr id="52" name="Shape 48"/>
+          <p:cNvPr id="51" name="Shape 47"/>
           <p:cNvSpPr/>
           <p:nvPr/>
         </p:nvSpPr>
         <p:spPr>
           <a:xfrm>
-            <a:off x="10158970" y="5778625"/>
+            <a:off x="10158970" y="5390242"/>
             <a:ext cx="50400" cy="50400"/>
           </a:xfrm>
           <a:prstGeom prst="rect">
@@ -12896,13 +13158,13 @@
       </p:sp>
       <p:sp>
         <p:nvSpPr>
-          <p:cNvPr id="53" name="Text 49"/>
+          <p:cNvPr id="52" name="Text 48"/>
           <p:cNvSpPr txBox="1"/>
           <p:nvPr/>
         </p:nvSpPr>
         <p:spPr>
           <a:xfrm>
-            <a:off x="10266970" y="5743475"/>
+            <a:off x="10266970" y="5355091"/>
             <a:ext cx="4413737" cy="256032"/>
           </a:xfrm>
           <a:prstGeom prst="rect">
@@ -12930,7 +13192,7 @@
                 <a:ea typeface="Poppins" pitchFamily="34" charset="-122"/>
                 <a:cs typeface="Poppins" pitchFamily="34" charset="-120"/>
               </a:rPr>
-              <a:t>1,000 giveaway entries and strong reviews. </a:t>
+              <a:t>Crafted Brewers' Choice award. </a:t>
             </a:r>
             <a:pPr indent="0" marL="0">
               <a:lnSpc>
@@ -12947,7 +13209,7 @@
                 <a:ea typeface="Poppins" pitchFamily="34" charset="-122"/>
                 <a:cs typeface="Poppins" pitchFamily="34" charset="-120"/>
               </a:rPr>
-              <a:t>Demand for the hardware is demonstrated, and the reviews are present but unpromoted and invisible to AI search.</a:t>
+              <a:t>Won, and almost invisible. It belongs on the site, in the room, on the tap decals and in social.</a:t>
             </a:r>
             <a:endParaRPr lang="en-US" sz="720" dirty="0"/>
           </a:p>
@@ -12955,13 +13217,13 @@
       </p:sp>
       <p:sp>
         <p:nvSpPr>
-          <p:cNvPr id="54" name="Shape 50"/>
+          <p:cNvPr id="53" name="Shape 49"/>
           <p:cNvSpPr/>
           <p:nvPr/>
         </p:nvSpPr>
         <p:spPr>
           <a:xfrm>
-            <a:off x="10158970" y="6489216"/>
+            <a:off x="10158970" y="5842633"/>
             <a:ext cx="50400" cy="50400"/>
           </a:xfrm>
           <a:prstGeom prst="rect">
@@ -12980,13 +13242,13 @@
       </p:sp>
       <p:sp>
         <p:nvSpPr>
-          <p:cNvPr id="55" name="Text 51"/>
+          <p:cNvPr id="54" name="Text 50"/>
           <p:cNvSpPr txBox="1"/>
           <p:nvPr/>
         </p:nvSpPr>
         <p:spPr>
           <a:xfrm>
-            <a:off x="10266970" y="6454065"/>
+            <a:off x="10266970" y="5807483"/>
             <a:ext cx="4413737" cy="256032"/>
           </a:xfrm>
           <a:prstGeom prst="rect">
@@ -13014,7 +13276,7 @@
                 <a:ea typeface="Poppins" pitchFamily="34" charset="-122"/>
                 <a:cs typeface="Poppins" pitchFamily="34" charset="-120"/>
               </a:rPr>
-              <a:t>Named brand ambassadors and UGC providers. </a:t>
+              <a:t>Fits any system, no CO2 with Talos kegs. </a:t>
             </a:r>
             <a:pPr indent="0" marL="0">
               <a:lnSpc>
@@ -13031,7 +13293,7 @@
                 <a:ea typeface="Poppins" pitchFamily="34" charset="-122"/>
                 <a:cs typeface="Poppins" pitchFamily="34" charset="-120"/>
               </a:rPr>
-              <a:t>Kurt, Troy, Mitch, Aden and Ash, Justin's own list, ready to deploy within three months.</a:t>
+              <a:t>Two buying objections answered, both currently below the fold.</a:t>
             </a:r>
             <a:endParaRPr lang="en-US" sz="720" dirty="0"/>
           </a:p>
@@ -13039,13 +13301,13 @@
       </p:sp>
       <p:sp>
         <p:nvSpPr>
-          <p:cNvPr id="56" name="Shape 52"/>
+          <p:cNvPr id="55" name="Shape 51"/>
           <p:cNvSpPr/>
           <p:nvPr/>
         </p:nvSpPr>
         <p:spPr>
           <a:xfrm>
-            <a:off x="10158970" y="7199807"/>
+            <a:off x="10158970" y="6295024"/>
             <a:ext cx="50400" cy="50400"/>
           </a:xfrm>
           <a:prstGeom prst="rect">
@@ -13064,7 +13326,175 @@
       </p:sp>
       <p:sp>
         <p:nvSpPr>
-          <p:cNvPr id="57" name="Text 53"/>
+          <p:cNvPr id="56" name="Text 52"/>
+          <p:cNvSpPr txBox="1"/>
+          <p:nvPr/>
+        </p:nvSpPr>
+        <p:spPr>
+          <a:xfrm>
+            <a:off x="10266970" y="6259874"/>
+            <a:ext cx="4413737" cy="256032"/>
+          </a:xfrm>
+          <a:prstGeom prst="rect">
+            <a:avLst/>
+          </a:prstGeom>
+          <a:noFill/>
+          <a:ln/>
+        </p:spPr>
+        <p:txBody>
+          <a:bodyPr wrap="square" lIns="0" tIns="0" rIns="0" bIns="0" rtlCol="0" anchor="t"/>
+          <a:lstStyle/>
+          <a:p>
+            <a:pPr indent="0" marL="0">
+              <a:lnSpc>
+                <a:spcPts val="1008"/>
+              </a:lnSpc>
+              <a:buNone/>
+            </a:pPr>
+            <a:r>
+              <a:rPr lang="en-US" sz="720" b="1" dirty="0">
+                <a:solidFill>
+                  <a:srgbClr val="0E171F"/>
+                </a:solidFill>
+                <a:latin typeface="Poppins" pitchFamily="34" charset="0"/>
+                <a:ea typeface="Poppins" pitchFamily="34" charset="-122"/>
+                <a:cs typeface="Poppins" pitchFamily="34" charset="-120"/>
+              </a:rPr>
+              <a:t>1,000 giveaway entries and strong reviews. </a:t>
+            </a:r>
+            <a:pPr indent="0" marL="0">
+              <a:lnSpc>
+                <a:spcPts val="1008"/>
+              </a:lnSpc>
+              <a:buNone/>
+            </a:pPr>
+            <a:r>
+              <a:rPr lang="en-US" sz="720" dirty="0">
+                <a:solidFill>
+                  <a:srgbClr val="4A5565"/>
+                </a:solidFill>
+                <a:latin typeface="Poppins" pitchFamily="34" charset="0"/>
+                <a:ea typeface="Poppins" pitchFamily="34" charset="-122"/>
+                <a:cs typeface="Poppins" pitchFamily="34" charset="-120"/>
+              </a:rPr>
+              <a:t>Demand for the hardware is demonstrated, and the reviews are present but unpromoted and invisible to AI search.</a:t>
+            </a:r>
+            <a:endParaRPr lang="en-US" sz="720" dirty="0"/>
+          </a:p>
+        </p:txBody>
+      </p:sp>
+      <p:sp>
+        <p:nvSpPr>
+          <p:cNvPr id="57" name="Shape 53"/>
+          <p:cNvSpPr/>
+          <p:nvPr/>
+        </p:nvSpPr>
+        <p:spPr>
+          <a:xfrm>
+            <a:off x="10158970" y="6747416"/>
+            <a:ext cx="50400" cy="50400"/>
+          </a:xfrm>
+          <a:prstGeom prst="rect">
+            <a:avLst/>
+          </a:prstGeom>
+          <a:solidFill>
+            <a:srgbClr val="0066FF"/>
+          </a:solidFill>
+          <a:ln w="12700">
+            <a:solidFill>
+              <a:srgbClr val="333333"/>
+            </a:solidFill>
+            <a:prstDash val="solid"/>
+          </a:ln>
+        </p:spPr>
+      </p:sp>
+      <p:sp>
+        <p:nvSpPr>
+          <p:cNvPr id="58" name="Text 54"/>
+          <p:cNvSpPr txBox="1"/>
+          <p:nvPr/>
+        </p:nvSpPr>
+        <p:spPr>
+          <a:xfrm>
+            <a:off x="10266970" y="6712265"/>
+            <a:ext cx="4413737" cy="256032"/>
+          </a:xfrm>
+          <a:prstGeom prst="rect">
+            <a:avLst/>
+          </a:prstGeom>
+          <a:noFill/>
+          <a:ln/>
+        </p:spPr>
+        <p:txBody>
+          <a:bodyPr wrap="square" lIns="0" tIns="0" rIns="0" bIns="0" rtlCol="0" anchor="t"/>
+          <a:lstStyle/>
+          <a:p>
+            <a:pPr indent="0" marL="0">
+              <a:lnSpc>
+                <a:spcPts val="1008"/>
+              </a:lnSpc>
+              <a:buNone/>
+            </a:pPr>
+            <a:r>
+              <a:rPr lang="en-US" sz="720" b="1" dirty="0">
+                <a:solidFill>
+                  <a:srgbClr val="0E171F"/>
+                </a:solidFill>
+                <a:latin typeface="Poppins" pitchFamily="34" charset="0"/>
+                <a:ea typeface="Poppins" pitchFamily="34" charset="-122"/>
+                <a:cs typeface="Poppins" pitchFamily="34" charset="-120"/>
+              </a:rPr>
+              <a:t>Named brand ambassadors and UGC providers. </a:t>
+            </a:r>
+            <a:pPr indent="0" marL="0">
+              <a:lnSpc>
+                <a:spcPts val="1008"/>
+              </a:lnSpc>
+              <a:buNone/>
+            </a:pPr>
+            <a:r>
+              <a:rPr lang="en-US" sz="720" dirty="0">
+                <a:solidFill>
+                  <a:srgbClr val="4A5565"/>
+                </a:solidFill>
+                <a:latin typeface="Poppins" pitchFamily="34" charset="0"/>
+                <a:ea typeface="Poppins" pitchFamily="34" charset="-122"/>
+                <a:cs typeface="Poppins" pitchFamily="34" charset="-120"/>
+              </a:rPr>
+              <a:t>Kurt, Troy, Mitch, Aden and Ash, Justin's own list, ready to deploy within three months.</a:t>
+            </a:r>
+            <a:endParaRPr lang="en-US" sz="720" dirty="0"/>
+          </a:p>
+        </p:txBody>
+      </p:sp>
+      <p:sp>
+        <p:nvSpPr>
+          <p:cNvPr id="59" name="Shape 55"/>
+          <p:cNvSpPr/>
+          <p:nvPr/>
+        </p:nvSpPr>
+        <p:spPr>
+          <a:xfrm>
+            <a:off x="10158970" y="7199807"/>
+            <a:ext cx="50400" cy="50400"/>
+          </a:xfrm>
+          <a:prstGeom prst="rect">
+            <a:avLst/>
+          </a:prstGeom>
+          <a:solidFill>
+            <a:srgbClr val="0066FF"/>
+          </a:solidFill>
+          <a:ln w="12700">
+            <a:solidFill>
+              <a:srgbClr val="333333"/>
+            </a:solidFill>
+            <a:prstDash val="solid"/>
+          </a:ln>
+        </p:spPr>
+      </p:sp>
+      <p:sp>
+        <p:nvSpPr>
+          <p:cNvPr id="60" name="Text 56"/>
           <p:cNvSpPr txBox="1"/>
           <p:nvPr/>
         </p:nvSpPr>
@@ -13123,7 +13553,7 @@
       </p:sp>
       <p:sp>
         <p:nvSpPr>
-          <p:cNvPr id="58" name="Shape 54"/>
+          <p:cNvPr id="61" name="Shape 57"/>
           <p:cNvSpPr/>
           <p:nvPr/>
         </p:nvSpPr>
@@ -13148,7 +13578,7 @@
       </p:sp>
       <p:sp>
         <p:nvSpPr>
-          <p:cNvPr id="59" name="Text 55"/>
+          <p:cNvPr id="62" name="Text 58"/>
           <p:cNvSpPr txBox="1"/>
           <p:nvPr/>
         </p:nvSpPr>
@@ -13190,7 +13620,7 @@
       </p:sp>
       <p:sp>
         <p:nvSpPr>
-          <p:cNvPr id="60" name="Shape 56"/>
+          <p:cNvPr id="63" name="Shape 59"/>
           <p:cNvSpPr/>
           <p:nvPr/>
         </p:nvSpPr>
@@ -13215,14 +13645,14 @@
       </p:sp>
       <p:sp>
         <p:nvSpPr>
-          <p:cNvPr id="61" name="Text 57"/>
+          <p:cNvPr id="64" name="Text 60"/>
           <p:cNvSpPr txBox="1"/>
           <p:nvPr/>
         </p:nvSpPr>
         <p:spPr>
           <a:xfrm>
             <a:off x="546898" y="7800840"/>
-            <a:ext cx="6843755" cy="263296"/>
+            <a:ext cx="6843755" cy="131648"/>
           </a:xfrm>
           <a:prstGeom prst="rect">
             <a:avLst/>
@@ -13274,13 +13704,13 @@
       </p:sp>
       <p:sp>
         <p:nvSpPr>
-          <p:cNvPr id="62" name="Shape 58"/>
+          <p:cNvPr id="65" name="Shape 61"/>
           <p:cNvSpPr/>
           <p:nvPr/>
         </p:nvSpPr>
         <p:spPr>
           <a:xfrm>
-            <a:off x="438898" y="8735035"/>
+            <a:off x="438898" y="8647270"/>
             <a:ext cx="50400" cy="50400"/>
           </a:xfrm>
           <a:prstGeom prst="rect">
@@ -13299,13 +13729,13 @@
       </p:sp>
       <p:sp>
         <p:nvSpPr>
-          <p:cNvPr id="63" name="Text 59"/>
+          <p:cNvPr id="66" name="Text 62"/>
           <p:cNvSpPr txBox="1"/>
           <p:nvPr/>
         </p:nvSpPr>
         <p:spPr>
           <a:xfrm>
-            <a:off x="546898" y="8698069"/>
+            <a:off x="546898" y="8610303"/>
             <a:ext cx="6843755" cy="131648"/>
           </a:xfrm>
           <a:prstGeom prst="rect">
@@ -13358,13 +13788,13 @@
       </p:sp>
       <p:sp>
         <p:nvSpPr>
-          <p:cNvPr id="64" name="Shape 60"/>
+          <p:cNvPr id="67" name="Shape 63"/>
           <p:cNvSpPr/>
           <p:nvPr/>
         </p:nvSpPr>
         <p:spPr>
           <a:xfrm>
-            <a:off x="438898" y="9500616"/>
+            <a:off x="438898" y="9456734"/>
             <a:ext cx="50400" cy="50400"/>
           </a:xfrm>
           <a:prstGeom prst="rect">
@@ -13383,13 +13813,13 @@
       </p:sp>
       <p:sp>
         <p:nvSpPr>
-          <p:cNvPr id="65" name="Text 61"/>
+          <p:cNvPr id="68" name="Text 64"/>
           <p:cNvSpPr txBox="1"/>
           <p:nvPr/>
         </p:nvSpPr>
         <p:spPr>
           <a:xfrm>
-            <a:off x="546898" y="9463650"/>
+            <a:off x="546898" y="9419767"/>
             <a:ext cx="6843755" cy="131648"/>
           </a:xfrm>
           <a:prstGeom prst="rect">
@@ -13442,7 +13872,7 @@
       </p:sp>
       <p:sp>
         <p:nvSpPr>
-          <p:cNvPr id="66" name="Shape 62"/>
+          <p:cNvPr id="69" name="Shape 65"/>
           <p:cNvSpPr/>
           <p:nvPr/>
         </p:nvSpPr>
@@ -13467,7 +13897,7 @@
       </p:sp>
       <p:sp>
         <p:nvSpPr>
-          <p:cNvPr id="67" name="Text 63"/>
+          <p:cNvPr id="70" name="Text 66"/>
           <p:cNvSpPr txBox="1"/>
           <p:nvPr/>
         </p:nvSpPr>
@@ -13501,7 +13931,7 @@
                 <a:ea typeface="Poppins" pitchFamily="34" charset="-122"/>
                 <a:cs typeface="Poppins" pitchFamily="34" charset="-120"/>
               </a:rPr>
-              <a:t>30 days, per Justin. </a:t>
+              <a:t>30 days, per Justin, now Christy's. </a:t>
             </a:r>
             <a:pPr indent="0" marL="0">
               <a:lnSpc>
@@ -13518,7 +13948,7 @@
                 <a:ea typeface="Poppins" pitchFamily="34" charset="-122"/>
                 <a:cs typeface="Poppins" pitchFamily="34" charset="-120"/>
               </a:rPr>
-              <a:t>Confirm key messaging for each target market, and get the customer journey mapped.</a:t>
+              <a:t>Rewrite key messaging for each target market on the home entertainment position, and get the customer journey mapped.</a:t>
             </a:r>
             <a:endParaRPr lang="en-US" sz="730" dirty="0"/>
           </a:p>
@@ -13526,7 +13956,7 @@
       </p:sp>
       <p:sp>
         <p:nvSpPr>
-          <p:cNvPr id="68" name="Shape 64"/>
+          <p:cNvPr id="71" name="Shape 67"/>
           <p:cNvSpPr/>
           <p:nvPr/>
         </p:nvSpPr>
@@ -13551,7 +13981,7 @@
       </p:sp>
       <p:sp>
         <p:nvSpPr>
-          <p:cNvPr id="69" name="Text 65"/>
+          <p:cNvPr id="72" name="Text 68"/>
           <p:cNvSpPr txBox="1"/>
           <p:nvPr/>
         </p:nvSpPr>
@@ -13593,14 +14023,14 @@
       </p:sp>
       <p:sp>
         <p:nvSpPr>
-          <p:cNvPr id="70" name="Text 66"/>
+          <p:cNvPr id="73" name="Text 69"/>
           <p:cNvSpPr txBox="1"/>
           <p:nvPr/>
         </p:nvSpPr>
         <p:spPr>
           <a:xfrm>
             <a:off x="7728952" y="7800840"/>
-            <a:ext cx="6951755" cy="308610"/>
+            <a:ext cx="6951755" cy="154305"/>
           </a:xfrm>
           <a:prstGeom prst="rect">
             <a:avLst/>
@@ -13652,13 +14082,13 @@
       </p:sp>
       <p:sp>
         <p:nvSpPr>
-          <p:cNvPr id="71" name="Text 67"/>
+          <p:cNvPr id="74" name="Text 70"/>
           <p:cNvSpPr txBox="1"/>
           <p:nvPr/>
         </p:nvSpPr>
         <p:spPr>
           <a:xfrm>
-            <a:off x="7728952" y="8275050"/>
+            <a:off x="7728952" y="8120745"/>
             <a:ext cx="6951755" cy="462915"/>
           </a:xfrm>
           <a:prstGeom prst="rect">
@@ -13711,14 +14141,14 @@
       </p:sp>
       <p:sp>
         <p:nvSpPr>
-          <p:cNvPr id="72" name="Text 68"/>
+          <p:cNvPr id="75" name="Text 71"/>
           <p:cNvSpPr txBox="1"/>
           <p:nvPr/>
         </p:nvSpPr>
         <p:spPr>
           <a:xfrm>
-            <a:off x="7728952" y="8903565"/>
-            <a:ext cx="6951755" cy="308610"/>
+            <a:off x="7728952" y="8749260"/>
+            <a:ext cx="6951755" cy="154305"/>
           </a:xfrm>
           <a:prstGeom prst="rect">
             <a:avLst/>
@@ -13770,7 +14200,7 @@
       </p:sp>
       <p:sp>
         <p:nvSpPr>
-          <p:cNvPr id="73" name="Shape 69"/>
+          <p:cNvPr id="76" name="Shape 72"/>
           <p:cNvSpPr/>
           <p:nvPr/>
         </p:nvSpPr>
@@ -13793,7 +14223,7 @@
       </p:sp>
       <p:sp>
         <p:nvSpPr>
-          <p:cNvPr id="74" name="Text 70"/>
+          <p:cNvPr id="77" name="Text 73"/>
           <p:cNvSpPr txBox="1"/>
           <p:nvPr/>
         </p:nvSpPr>
@@ -13960,8 +14390,8 @@
         </p:nvSpPr>
         <p:spPr>
           <a:xfrm>
-            <a:off x="12678246" y="365760"/>
-            <a:ext cx="1165358" cy="251460"/>
+            <a:off x="12656964" y="365760"/>
+            <a:ext cx="1186641" cy="251460"/>
           </a:xfrm>
           <a:prstGeom prst="roundRect">
             <a:avLst>
@@ -13987,8 +14417,8 @@
         </p:nvSpPr>
         <p:spPr>
           <a:xfrm>
-            <a:off x="12678246" y="365760"/>
-            <a:ext cx="1165358" cy="251460"/>
+            <a:off x="12656964" y="365760"/>
+            <a:ext cx="1186641" cy="251460"/>
           </a:xfrm>
           <a:prstGeom prst="rect">
             <a:avLst/>
@@ -14012,7 +14442,7 @@
                 <a:ea typeface="Poppins" pitchFamily="34" charset="-122"/>
                 <a:cs typeface="Poppins" pitchFamily="34" charset="-120"/>
               </a:rPr>
-              <a:t>V02 · 16 SEPT 2026</a:t>
+              <a:t>V03 · 23 SEPT 2026</a:t>
             </a:r>
             <a:endParaRPr lang="en-US" sz="650" dirty="0"/>
           </a:p>
@@ -14026,8 +14456,8 @@
         </p:nvSpPr>
         <p:spPr>
           <a:xfrm>
-            <a:off x="11370203" y="365760"/>
-            <a:ext cx="1218043" cy="251460"/>
+            <a:off x="11321238" y="365760"/>
+            <a:ext cx="1245725" cy="251460"/>
           </a:xfrm>
           <a:prstGeom prst="roundRect">
             <a:avLst>
@@ -14053,8 +14483,8 @@
         </p:nvSpPr>
         <p:spPr>
           <a:xfrm>
-            <a:off x="11370203" y="365760"/>
-            <a:ext cx="1218043" cy="251460"/>
+            <a:off x="11321238" y="365760"/>
+            <a:ext cx="1245725" cy="251460"/>
           </a:xfrm>
           <a:prstGeom prst="rect">
             <a:avLst/>
@@ -14092,8 +14522,8 @@
         </p:nvSpPr>
         <p:spPr>
           <a:xfrm>
-            <a:off x="10310256" y="365760"/>
-            <a:ext cx="969947" cy="251460"/>
+            <a:off x="10259357" y="365760"/>
+            <a:ext cx="971882" cy="251460"/>
           </a:xfrm>
           <a:prstGeom prst="roundRect">
             <a:avLst>
@@ -14119,8 +14549,8 @@
         </p:nvSpPr>
         <p:spPr>
           <a:xfrm>
-            <a:off x="10310256" y="365760"/>
-            <a:ext cx="969947" cy="251460"/>
+            <a:off x="10259357" y="365760"/>
+            <a:ext cx="971882" cy="251460"/>
           </a:xfrm>
           <a:prstGeom prst="rect">
             <a:avLst/>
@@ -14182,7 +14612,7 @@
         <p:spPr>
           <a:xfrm>
             <a:off x="323698" y="1115568"/>
-            <a:ext cx="14472209" cy="2400487"/>
+            <a:ext cx="14472209" cy="2629105"/>
           </a:xfrm>
           <a:prstGeom prst="rect">
             <a:avLst/>
@@ -14315,8 +14745,8 @@
         </p:nvSpPr>
         <p:spPr>
           <a:xfrm>
-            <a:off x="438898" y="1761511"/>
-            <a:ext cx="2762042" cy="1396929"/>
+            <a:off x="438898" y="1728900"/>
+            <a:ext cx="2762042" cy="1658158"/>
           </a:xfrm>
           <a:prstGeom prst="rect">
             <a:avLst/>
@@ -14340,7 +14770,7 @@
         </p:nvSpPr>
         <p:spPr>
           <a:xfrm>
-            <a:off x="438898" y="1761511"/>
+            <a:off x="438898" y="1728900"/>
             <a:ext cx="2762042" cy="28800"/>
           </a:xfrm>
           <a:prstGeom prst="rect">
@@ -14365,7 +14795,7 @@
         </p:nvSpPr>
         <p:spPr>
           <a:xfrm>
-            <a:off x="532498" y="1855111"/>
+            <a:off x="532498" y="1822500"/>
             <a:ext cx="2574842" cy="108966"/>
           </a:xfrm>
           <a:prstGeom prst="rect">
@@ -14407,7 +14837,7 @@
         </p:nvSpPr>
         <p:spPr>
           <a:xfrm>
-            <a:off x="532498" y="2021677"/>
+            <a:off x="532498" y="1989066"/>
             <a:ext cx="2574842" cy="135331"/>
           </a:xfrm>
           <a:prstGeom prst="rect">
@@ -14449,7 +14879,7 @@
         </p:nvSpPr>
         <p:spPr>
           <a:xfrm>
-            <a:off x="532498" y="2221808"/>
+            <a:off x="532498" y="2189197"/>
             <a:ext cx="2574842" cy="270662"/>
           </a:xfrm>
           <a:prstGeom prst="rect">
@@ -14508,8 +14938,8 @@
         </p:nvSpPr>
         <p:spPr>
           <a:xfrm>
-            <a:off x="3308839" y="1761511"/>
-            <a:ext cx="2762042" cy="1396929"/>
+            <a:off x="3308839" y="1728900"/>
+            <a:ext cx="2762042" cy="1658158"/>
           </a:xfrm>
           <a:prstGeom prst="rect">
             <a:avLst/>
@@ -14533,7 +14963,7 @@
         </p:nvSpPr>
         <p:spPr>
           <a:xfrm>
-            <a:off x="3308839" y="1761511"/>
+            <a:off x="3308839" y="1728900"/>
             <a:ext cx="2762042" cy="28800"/>
           </a:xfrm>
           <a:prstGeom prst="rect">
@@ -14558,7 +14988,7 @@
         </p:nvSpPr>
         <p:spPr>
           <a:xfrm>
-            <a:off x="3402439" y="1855111"/>
+            <a:off x="3402439" y="1822500"/>
             <a:ext cx="2574842" cy="108966"/>
           </a:xfrm>
           <a:prstGeom prst="rect">
@@ -14600,8 +15030,8 @@
         </p:nvSpPr>
         <p:spPr>
           <a:xfrm>
-            <a:off x="3402439" y="2021677"/>
-            <a:ext cx="2574842" cy="270662"/>
+            <a:off x="3402439" y="1989066"/>
+            <a:ext cx="2574842" cy="405994"/>
           </a:xfrm>
           <a:prstGeom prst="rect">
             <a:avLst/>
@@ -14628,7 +15058,7 @@
                 <a:ea typeface="Poppins" pitchFamily="34" charset="-122"/>
                 <a:cs typeface="Poppins" pitchFamily="34" charset="-120"/>
               </a:rPr>
-              <a:t>A brochure, not a conversion tool. No path to a system or a refill.</a:t>
+              <a:t>A brochure, not a conversion tool. Justin cannot update the shop page; Chris has pushed for a fix for six months and the last rebuild missed its Easter launch on broken integrations.</a:t>
             </a:r>
             <a:endParaRPr lang="en-US" sz="740" dirty="0"/>
           </a:p>
@@ -14642,8 +15072,8 @@
         </p:nvSpPr>
         <p:spPr>
           <a:xfrm>
-            <a:off x="3402439" y="2357140"/>
-            <a:ext cx="2574842" cy="270662"/>
+            <a:off x="3402439" y="2459860"/>
+            <a:ext cx="2574842" cy="676656"/>
           </a:xfrm>
           <a:prstGeom prst="rect">
             <a:avLst/>
@@ -14670,7 +15100,7 @@
                 <a:ea typeface="Poppins" pitchFamily="34" charset="-122"/>
                 <a:cs typeface="Poppins" pitchFamily="34" charset="-120"/>
               </a:rPr>
-              <a:t>Justin's priority two, 3-month item: </a:t>
+              <a:t>Jewell's scope: </a:t>
             </a:r>
             <a:pPr indent="0" marL="0">
               <a:lnSpc>
@@ -14687,7 +15117,7 @@
                 <a:ea typeface="Poppins" pitchFamily="34" charset="-122"/>
                 <a:cs typeface="Poppins" pitchFamily="34" charset="-120"/>
               </a:rPr>
-              <a:t>website upgrade plus SEM, with a buy path, proof and an FAQ.</a:t>
+              <a:t>a CMS Justin runs himself, wired to GoTab, Fishbowl, Meta Pixel and the CRM, built to be read by people and by AI search. Platform-agnostic; Shopify if it fits, custom if it integrates better. Acceptance test: integrations proven before launch, not promised.</a:t>
             </a:r>
             <a:endParaRPr lang="en-US" sz="740" dirty="0"/>
           </a:p>
@@ -14701,8 +15131,8 @@
         </p:nvSpPr>
         <p:spPr>
           <a:xfrm>
-            <a:off x="6178781" y="1761511"/>
-            <a:ext cx="2762042" cy="1396929"/>
+            <a:off x="6178781" y="1728900"/>
+            <a:ext cx="2762042" cy="1658158"/>
           </a:xfrm>
           <a:prstGeom prst="rect">
             <a:avLst/>
@@ -14726,7 +15156,7 @@
         </p:nvSpPr>
         <p:spPr>
           <a:xfrm>
-            <a:off x="6178781" y="1761511"/>
+            <a:off x="6178781" y="1728900"/>
             <a:ext cx="2762042" cy="28800"/>
           </a:xfrm>
           <a:prstGeom prst="rect">
@@ -14751,7 +15181,7 @@
         </p:nvSpPr>
         <p:spPr>
           <a:xfrm>
-            <a:off x="6272381" y="1855111"/>
+            <a:off x="6272381" y="1822500"/>
             <a:ext cx="2574842" cy="108966"/>
           </a:xfrm>
           <a:prstGeom prst="rect">
@@ -14793,8 +15223,8 @@
         </p:nvSpPr>
         <p:spPr>
           <a:xfrm>
-            <a:off x="6272381" y="2021677"/>
-            <a:ext cx="2574842" cy="270662"/>
+            <a:off x="6272381" y="1989066"/>
+            <a:ext cx="2574842" cy="135331"/>
           </a:xfrm>
           <a:prstGeom prst="rect">
             <a:avLst/>
@@ -14835,7 +15265,7 @@
         </p:nvSpPr>
         <p:spPr>
           <a:xfrm>
-            <a:off x="6272381" y="2357140"/>
+            <a:off x="6272381" y="2189197"/>
             <a:ext cx="2574842" cy="270662"/>
           </a:xfrm>
           <a:prstGeom prst="rect">
@@ -14894,8 +15324,8 @@
         </p:nvSpPr>
         <p:spPr>
           <a:xfrm>
-            <a:off x="9048722" y="1761511"/>
-            <a:ext cx="2762042" cy="1396929"/>
+            <a:off x="9048722" y="1728900"/>
+            <a:ext cx="2762042" cy="1658158"/>
           </a:xfrm>
           <a:prstGeom prst="rect">
             <a:avLst/>
@@ -14919,7 +15349,7 @@
         </p:nvSpPr>
         <p:spPr>
           <a:xfrm>
-            <a:off x="9048722" y="1761511"/>
+            <a:off x="9048722" y="1728900"/>
             <a:ext cx="2762042" cy="28800"/>
           </a:xfrm>
           <a:prstGeom prst="rect">
@@ -14944,7 +15374,7 @@
         </p:nvSpPr>
         <p:spPr>
           <a:xfrm>
-            <a:off x="9142322" y="1855111"/>
+            <a:off x="9142322" y="1822500"/>
             <a:ext cx="2574842" cy="108966"/>
           </a:xfrm>
           <a:prstGeom prst="rect">
@@ -14986,7 +15416,7 @@
         </p:nvSpPr>
         <p:spPr>
           <a:xfrm>
-            <a:off x="9142322" y="2021677"/>
+            <a:off x="9142322" y="1989066"/>
             <a:ext cx="2574842" cy="270662"/>
           </a:xfrm>
           <a:prstGeom prst="rect">
@@ -15028,7 +15458,7 @@
         </p:nvSpPr>
         <p:spPr>
           <a:xfrm>
-            <a:off x="9142322" y="2357140"/>
+            <a:off x="9142322" y="2324529"/>
             <a:ext cx="2574842" cy="405994"/>
           </a:xfrm>
           <a:prstGeom prst="rect">
@@ -15087,8 +15517,8 @@
         </p:nvSpPr>
         <p:spPr>
           <a:xfrm>
-            <a:off x="11918664" y="1761511"/>
-            <a:ext cx="2762042" cy="1396929"/>
+            <a:off x="11918664" y="1728900"/>
+            <a:ext cx="2762042" cy="1658158"/>
           </a:xfrm>
           <a:prstGeom prst="rect">
             <a:avLst/>
@@ -15112,7 +15542,7 @@
         </p:nvSpPr>
         <p:spPr>
           <a:xfrm>
-            <a:off x="11918664" y="1761511"/>
+            <a:off x="11918664" y="1728900"/>
             <a:ext cx="2762042" cy="28800"/>
           </a:xfrm>
           <a:prstGeom prst="rect">
@@ -15137,7 +15567,7 @@
         </p:nvSpPr>
         <p:spPr>
           <a:xfrm>
-            <a:off x="12012264" y="1855111"/>
+            <a:off x="12012264" y="1822500"/>
             <a:ext cx="2574842" cy="108966"/>
           </a:xfrm>
           <a:prstGeom prst="rect">
@@ -15179,7 +15609,7 @@
         </p:nvSpPr>
         <p:spPr>
           <a:xfrm>
-            <a:off x="12012264" y="2021677"/>
+            <a:off x="12012264" y="1989066"/>
             <a:ext cx="2574842" cy="270662"/>
           </a:xfrm>
           <a:prstGeom prst="rect">
@@ -15221,8 +15651,8 @@
         </p:nvSpPr>
         <p:spPr>
           <a:xfrm>
-            <a:off x="12012264" y="2357140"/>
-            <a:ext cx="2574842" cy="405994"/>
+            <a:off x="12012264" y="2324529"/>
+            <a:ext cx="2574842" cy="270662"/>
           </a:xfrm>
           <a:prstGeom prst="rect">
             <a:avLst/>
@@ -15280,7 +15710,7 @@
         </p:nvSpPr>
         <p:spPr>
           <a:xfrm>
-            <a:off x="438898" y="3223240"/>
+            <a:off x="438898" y="3451858"/>
             <a:ext cx="14241809" cy="0"/>
           </a:xfrm>
           <a:prstGeom prst="line">
@@ -15303,7 +15733,7 @@
         </p:nvSpPr>
         <p:spPr>
           <a:xfrm>
-            <a:off x="438898" y="3280840"/>
+            <a:off x="438898" y="3509458"/>
             <a:ext cx="14241809" cy="120015"/>
           </a:xfrm>
           <a:prstGeom prst="rect">
@@ -15345,8 +15775,8 @@
         </p:nvSpPr>
         <p:spPr>
           <a:xfrm>
-            <a:off x="323698" y="3623954"/>
-            <a:ext cx="5967146" cy="3800771"/>
+            <a:off x="323698" y="3852572"/>
+            <a:ext cx="5967146" cy="3572153"/>
           </a:xfrm>
           <a:prstGeom prst="rect">
             <a:avLst/>
@@ -15370,7 +15800,7 @@
         </p:nvSpPr>
         <p:spPr>
           <a:xfrm>
-            <a:off x="438898" y="3739154"/>
+            <a:off x="438898" y="3967772"/>
             <a:ext cx="5736746" cy="112268"/>
           </a:xfrm>
           <a:prstGeom prst="rect">
@@ -15419,7 +15849,7 @@
           </p:nvPr>
         </p:nvGraphicFramePr>
         <p:xfrm>
-          <a:off x="438898" y="3909022"/>
+          <a:off x="438898" y="4137640"/>
           <a:ext cx="11339703" cy="914400"/>
         </p:xfrm>
         <a:graphic>
@@ -15430,7 +15860,7 @@
                 <a:gridCol w="2868373"/>
                 <a:gridCol w="2868373"/>
               </a:tblGrid>
-              <a:tr h="335010">
+              <a:tr h="335796">
                 <a:tc>
                   <a:txBody>
                     <a:bodyPr/>
@@ -15538,7 +15968,7 @@
                   </a:tcPr>
                 </a:tc>
               </a:tr>
-              <a:tr h="354035">
+              <a:tr h="354820">
                 <a:tc>
                   <a:txBody>
                     <a:bodyPr/>
@@ -15646,7 +16076,7 @@
                   </a:tcPr>
                 </a:tc>
               </a:tr>
-              <a:tr h="588934">
+              <a:tr h="589719">
                 <a:tc>
                   <a:txBody>
                     <a:bodyPr/>
@@ -15778,7 +16208,7 @@
                   </a:tcPr>
                 </a:tc>
               </a:tr>
-              <a:tr h="471485">
+              <a:tr h="472270">
                 <a:tc>
                   <a:txBody>
                     <a:bodyPr/>
@@ -15910,7 +16340,7 @@
                   </a:tcPr>
                 </a:tc>
               </a:tr>
-              <a:tr h="471485">
+              <a:tr h="354820">
                 <a:tc>
                   <a:txBody>
                     <a:bodyPr/>
@@ -16018,7 +16448,7 @@
                   </a:tcPr>
                 </a:tc>
               </a:tr>
-              <a:tr h="354035">
+              <a:tr h="354820">
                 <a:tc>
                   <a:txBody>
                     <a:bodyPr/>
@@ -16126,7 +16556,7 @@
                   </a:tcPr>
                 </a:tc>
               </a:tr>
-              <a:tr h="471485">
+              <a:tr h="354820">
                 <a:tc>
                   <a:txBody>
                     <a:bodyPr/>
@@ -16234,7 +16664,7 @@
                   </a:tcPr>
                 </a:tc>
               </a:tr>
-              <a:tr h="354035">
+              <a:tr h="354820">
                 <a:tc>
                   <a:txBody>
                     <a:bodyPr/>
@@ -16354,8 +16784,8 @@
         </p:nvSpPr>
         <p:spPr>
           <a:xfrm>
-            <a:off x="6398743" y="3623954"/>
-            <a:ext cx="8397164" cy="3800771"/>
+            <a:off x="6398743" y="3852572"/>
+            <a:ext cx="8397164" cy="3572153"/>
           </a:xfrm>
           <a:prstGeom prst="rect">
             <a:avLst/>
@@ -16379,7 +16809,7 @@
         </p:nvSpPr>
         <p:spPr>
           <a:xfrm>
-            <a:off x="6513943" y="3739154"/>
+            <a:off x="6513943" y="3967772"/>
             <a:ext cx="8166764" cy="112268"/>
           </a:xfrm>
           <a:prstGeom prst="rect">
@@ -16421,7 +16851,7 @@
         </p:nvSpPr>
         <p:spPr>
           <a:xfrm>
-            <a:off x="6513943" y="3909022"/>
+            <a:off x="6513943" y="4137640"/>
             <a:ext cx="8166764" cy="150724"/>
           </a:xfrm>
           <a:prstGeom prst="rect">
@@ -16463,7 +16893,7 @@
         </p:nvSpPr>
         <p:spPr>
           <a:xfrm>
-            <a:off x="6513943" y="4142212"/>
+            <a:off x="6513943" y="4380333"/>
             <a:ext cx="8166764" cy="308610"/>
           </a:xfrm>
           <a:prstGeom prst="rect">
@@ -16505,7 +16935,7 @@
         </p:nvSpPr>
         <p:spPr>
           <a:xfrm>
-            <a:off x="6513943" y="4533288"/>
+            <a:off x="6513943" y="4780912"/>
             <a:ext cx="8166764" cy="150724"/>
           </a:xfrm>
           <a:prstGeom prst="rect">
@@ -16547,7 +16977,7 @@
         </p:nvSpPr>
         <p:spPr>
           <a:xfrm>
-            <a:off x="6513943" y="4766478"/>
+            <a:off x="6513943" y="5023605"/>
             <a:ext cx="8166764" cy="154305"/>
           </a:xfrm>
           <a:prstGeom prst="rect">
@@ -16589,7 +17019,7 @@
         </p:nvSpPr>
         <p:spPr>
           <a:xfrm>
-            <a:off x="6513943" y="5003250"/>
+            <a:off x="6513943" y="5269879"/>
             <a:ext cx="8166764" cy="150724"/>
           </a:xfrm>
           <a:prstGeom prst="rect">
@@ -16631,7 +17061,7 @@
         </p:nvSpPr>
         <p:spPr>
           <a:xfrm>
-            <a:off x="6513943" y="5236439"/>
+            <a:off x="6513943" y="5512572"/>
             <a:ext cx="8166764" cy="308610"/>
           </a:xfrm>
           <a:prstGeom prst="rect">
@@ -16707,7 +17137,7 @@
         </p:nvSpPr>
         <p:spPr>
           <a:xfrm>
-            <a:off x="6513943" y="5627516"/>
+            <a:off x="6513943" y="5913151"/>
             <a:ext cx="8166764" cy="150724"/>
           </a:xfrm>
           <a:prstGeom prst="rect">
@@ -16749,8 +17179,8 @@
         </p:nvSpPr>
         <p:spPr>
           <a:xfrm>
-            <a:off x="6513943" y="5860706"/>
-            <a:ext cx="8166764" cy="308610"/>
+            <a:off x="6513943" y="6155843"/>
+            <a:ext cx="8166764" cy="617220"/>
           </a:xfrm>
           <a:prstGeom prst="rect">
             <a:avLst/>
@@ -16777,7 +17207,41 @@
                 <a:ea typeface="Poppins" pitchFamily="34" charset="-122"/>
                 <a:cs typeface="Poppins" pitchFamily="34" charset="-120"/>
               </a:rPr>
-              <a:t>Justin's priority three and one-year marker for most keg sales. 3-month items: referral programme and Bring a Mate live; JVP/referral list built, outreach started; UGC/ambassador content (Kurt, Troy, Mitch, Aden, Ash) ready.</a:t>
+              <a:t>Referrals are already 18% of sales on a programme nobody can hold in their hand. Today: 1,000 tap tokens (about $50, half a keg) for referring a system or wholesale buyer, 500 for a refill customer. </a:t>
+            </a:r>
+            <a:pPr indent="0" marL="0">
+              <a:lnSpc>
+                <a:spcPts val="1215"/>
+              </a:lnSpc>
+              <a:buNone/>
+            </a:pPr>
+            <a:r>
+              <a:rPr lang="en-US" sz="810" b="1" dirty="0">
+                <a:solidFill>
+                  <a:srgbClr val="0E171F"/>
+                </a:solidFill>
+                <a:latin typeface="Poppins" pitchFamily="34" charset="0"/>
+                <a:ea typeface="Poppins" pitchFamily="34" charset="-122"/>
+                <a:cs typeface="Poppins" pitchFamily="34" charset="-120"/>
+              </a:rPr>
+              <a:t>Christy's call: tokens do not travel; a free keg does. </a:t>
+            </a:r>
+            <a:pPr indent="0" marL="0">
+              <a:lnSpc>
+                <a:spcPts val="1215"/>
+              </a:lnSpc>
+              <a:buNone/>
+            </a:pPr>
+            <a:r>
+              <a:rPr lang="en-US" sz="810" dirty="0">
+                <a:solidFill>
+                  <a:srgbClr val="4A5565"/>
+                </a:solidFill>
+                <a:latin typeface="Poppins" pitchFamily="34" charset="0"/>
+                <a:ea typeface="Poppins" pitchFamily="34" charset="-122"/>
+                <a:cs typeface="Poppins" pitchFamily="34" charset="-120"/>
+              </a:rPr>
+              <a:t>Rebuild it as a free keg, a card with a QR code the owner can hand to a mate, and a home tasting where an owner hosts and earns on what sells. Tradies who install kitchens and plumb systems get the same card. Justin's three-month items stay: referral programme and Bring a Mate live, JVP list built, ambassador content ready.</a:t>
             </a:r>
             <a:endParaRPr lang="en-US" sz="810" dirty="0"/>
           </a:p>
@@ -16785,108 +17249,7 @@
       </p:sp>
       <p:sp>
         <p:nvSpPr>
-          <p:cNvPr id="56" name="Text 51"/>
-          <p:cNvSpPr txBox="1"/>
-          <p:nvPr/>
-        </p:nvSpPr>
-        <p:spPr>
-          <a:xfrm>
-            <a:off x="6513943" y="6251782"/>
-            <a:ext cx="8166764" cy="150724"/>
-          </a:xfrm>
-          <a:prstGeom prst="rect">
-            <a:avLst/>
-          </a:prstGeom>
-          <a:noFill/>
-          <a:ln/>
-        </p:spPr>
-        <p:txBody>
-          <a:bodyPr wrap="square" lIns="0" tIns="0" rIns="0" bIns="0" rtlCol="0" anchor="t"/>
-          <a:lstStyle/>
-          <a:p>
-            <a:pPr indent="0" marL="0">
-              <a:lnSpc>
-                <a:spcPts val="1187"/>
-              </a:lnSpc>
-              <a:buNone/>
-            </a:pPr>
-            <a:r>
-              <a:rPr lang="en-US" sz="860" b="1" dirty="0">
-                <a:solidFill>
-                  <a:srgbClr val="0E171F"/>
-                </a:solidFill>
-                <a:latin typeface="Poppins" pitchFamily="34" charset="0"/>
-                <a:ea typeface="Poppins" pitchFamily="34" charset="-122"/>
-                <a:cs typeface="Poppins" pitchFamily="34" charset="-120"/>
-              </a:rPr>
-              <a:t>05 · Put the referral where the decision happens.</a:t>
-            </a:r>
-            <a:endParaRPr lang="en-US" sz="860" dirty="0"/>
-          </a:p>
-        </p:txBody>
-      </p:sp>
-      <p:sp>
-        <p:nvSpPr>
-          <p:cNvPr id="57" name="Text 52"/>
-          <p:cNvSpPr txBox="1"/>
-          <p:nvPr/>
-        </p:nvSpPr>
-        <p:spPr>
-          <a:xfrm>
-            <a:off x="6513943" y="6484972"/>
-            <a:ext cx="8166764" cy="308610"/>
-          </a:xfrm>
-          <a:prstGeom prst="rect">
-            <a:avLst/>
-          </a:prstGeom>
-          <a:noFill/>
-          <a:ln/>
-        </p:spPr>
-        <p:txBody>
-          <a:bodyPr wrap="square" lIns="0" tIns="0" rIns="0" bIns="0" rtlCol="0" anchor="t"/>
-          <a:lstStyle/>
-          <a:p>
-            <a:pPr indent="0" marL="0">
-              <a:lnSpc>
-                <a:spcPts val="1215"/>
-              </a:lnSpc>
-              <a:buNone/>
-            </a:pPr>
-            <a:r>
-              <a:rPr lang="en-US" sz="810" dirty="0">
-                <a:solidFill>
-                  <a:srgbClr val="4A5565"/>
-                </a:solidFill>
-                <a:latin typeface="Poppins" pitchFamily="34" charset="0"/>
-                <a:ea typeface="Poppins" pitchFamily="34" charset="-122"/>
-                <a:cs typeface="Poppins" pitchFamily="34" charset="-120"/>
-              </a:rPr>
-              <a:t>Plumbers and kitchen installers are in the room when a system gets specified: a card or QR each, and a kickback on every referral that converts. Alongside it, host a tasting, an owner pours for about twenty friends and earns on anything sold. </a:t>
-            </a:r>
-            <a:pPr indent="0" marL="0">
-              <a:lnSpc>
-                <a:spcPts val="1215"/>
-              </a:lnSpc>
-              <a:buNone/>
-            </a:pPr>
-            <a:r>
-              <a:rPr lang="en-US" sz="810" b="1" dirty="0">
-                <a:solidFill>
-                  <a:srgbClr val="0E171F"/>
-                </a:solidFill>
-                <a:latin typeface="Poppins" pitchFamily="34" charset="0"/>
-                <a:ea typeface="Poppins" pitchFamily="34" charset="-122"/>
-                <a:cs typeface="Poppins" pitchFamily="34" charset="-120"/>
-              </a:rPr>
-              <a:t>Recommendations, not yet in Justin’s plan.</a:t>
-            </a:r>
-            <a:endParaRPr lang="en-US" sz="810" dirty="0"/>
-          </a:p>
-        </p:txBody>
-      </p:sp>
-      <p:sp>
-        <p:nvSpPr>
-          <p:cNvPr id="58" name="Shape 53"/>
+          <p:cNvPr id="56" name="Shape 51"/>
           <p:cNvSpPr/>
           <p:nvPr/>
         </p:nvSpPr>
@@ -16909,7 +17272,7 @@
       </p:sp>
       <p:sp>
         <p:nvSpPr>
-          <p:cNvPr id="59" name="Text 54"/>
+          <p:cNvPr id="57" name="Text 52"/>
           <p:cNvSpPr txBox="1"/>
           <p:nvPr/>
         </p:nvSpPr>
@@ -16951,7 +17314,7 @@
       </p:sp>
       <p:sp>
         <p:nvSpPr>
-          <p:cNvPr id="60" name="Shape 55"/>
+          <p:cNvPr id="58" name="Shape 53"/>
           <p:cNvSpPr/>
           <p:nvPr/>
         </p:nvSpPr>
@@ -16976,14 +17339,98 @@
       </p:sp>
       <p:sp>
         <p:nvSpPr>
+          <p:cNvPr id="59" name="Text 54"/>
+          <p:cNvSpPr txBox="1"/>
+          <p:nvPr/>
+        </p:nvSpPr>
+        <p:spPr>
+          <a:xfrm>
+            <a:off x="438898" y="7647825"/>
+            <a:ext cx="4521737" cy="112268"/>
+          </a:xfrm>
+          <a:prstGeom prst="rect">
+            <a:avLst/>
+          </a:prstGeom>
+          <a:noFill/>
+          <a:ln/>
+        </p:spPr>
+        <p:txBody>
+          <a:bodyPr wrap="square" lIns="0" tIns="0" rIns="0" bIns="0" rtlCol="0" anchor="t"/>
+          <a:lstStyle/>
+          <a:p>
+            <a:pPr indent="0" marL="0">
+              <a:lnSpc>
+                <a:spcPts val="884"/>
+              </a:lnSpc>
+              <a:buNone/>
+            </a:pPr>
+            <a:r>
+              <a:rPr lang="en-US" sz="680" b="1" spc="95" kern="0" dirty="0">
+                <a:solidFill>
+                  <a:srgbClr val="0066FF"/>
+                </a:solidFill>
+                <a:latin typeface="Poppins" pitchFamily="34" charset="0"/>
+                <a:ea typeface="Poppins" pitchFamily="34" charset="-122"/>
+                <a:cs typeface="Poppins" pitchFamily="34" charset="-120"/>
+              </a:rPr>
+              <a:t>WHOLESALE AS A FUNCTION</a:t>
+            </a:r>
+            <a:endParaRPr lang="en-US" sz="680" dirty="0"/>
+          </a:p>
+        </p:txBody>
+      </p:sp>
+      <p:sp>
+        <p:nvSpPr>
+          <p:cNvPr id="60" name="Text 55"/>
+          <p:cNvSpPr txBox="1"/>
+          <p:nvPr/>
+        </p:nvSpPr>
+        <p:spPr>
+          <a:xfrm>
+            <a:off x="438898" y="7817693"/>
+            <a:ext cx="4521737" cy="462915"/>
+          </a:xfrm>
+          <a:prstGeom prst="rect">
+            <a:avLst/>
+          </a:prstGeom>
+          <a:noFill/>
+          <a:ln/>
+        </p:spPr>
+        <p:txBody>
+          <a:bodyPr wrap="square" lIns="0" tIns="0" rIns="0" bIns="0" rtlCol="0" anchor="t"/>
+          <a:lstStyle/>
+          <a:p>
+            <a:pPr indent="0" marL="0">
+              <a:lnSpc>
+                <a:spcPts val="1215"/>
+              </a:lnSpc>
+              <a:buNone/>
+            </a:pPr>
+            <a:r>
+              <a:rPr lang="en-US" sz="810" dirty="0">
+                <a:solidFill>
+                  <a:srgbClr val="4A5565"/>
+                </a:solidFill>
+                <a:latin typeface="Poppins" pitchFamily="34" charset="0"/>
+                <a:ea typeface="Poppins" pitchFamily="34" charset="-122"/>
+                <a:cs typeface="Poppins" pitchFamily="34" charset="-120"/>
+              </a:rPr>
+              <a:t>Bars have approached Tap That and it still has not converted. That is not a demand problem, it is the absence of follow-up and sales experience. Justin's priority five, with a 3-month item: outreach to event venues and niched venues.</a:t>
+            </a:r>
+            <a:endParaRPr lang="en-US" sz="810" dirty="0"/>
+          </a:p>
+        </p:txBody>
+      </p:sp>
+      <p:sp>
+        <p:nvSpPr>
           <p:cNvPr id="61" name="Text 56"/>
           <p:cNvSpPr txBox="1"/>
           <p:nvPr/>
         </p:nvSpPr>
         <p:spPr>
           <a:xfrm>
-            <a:off x="438898" y="7647825"/>
-            <a:ext cx="4521737" cy="112268"/>
+            <a:off x="438898" y="8402800"/>
+            <a:ext cx="4521737" cy="617220"/>
           </a:xfrm>
           <a:prstGeom prst="rect">
             <a:avLst/>
@@ -16997,22 +17444,39 @@
           <a:p>
             <a:pPr indent="0" marL="0">
               <a:lnSpc>
-                <a:spcPts val="884"/>
-              </a:lnSpc>
-              <a:buNone/>
-            </a:pPr>
-            <a:r>
-              <a:rPr lang="en-US" sz="680" b="1" spc="95" kern="0" dirty="0">
-                <a:solidFill>
-                  <a:srgbClr val="0066FF"/>
-                </a:solidFill>
-                <a:latin typeface="Poppins" pitchFamily="34" charset="0"/>
-                <a:ea typeface="Poppins" pitchFamily="34" charset="-122"/>
-                <a:cs typeface="Poppins" pitchFamily="34" charset="-120"/>
-              </a:rPr>
-              <a:t>WHOLESALE AS A FUNCTION</a:t>
-            </a:r>
-            <a:endParaRPr lang="en-US" sz="680" dirty="0"/>
+                <a:spcPts val="1215"/>
+              </a:lnSpc>
+              <a:buNone/>
+            </a:pPr>
+            <a:r>
+              <a:rPr lang="en-US" sz="810" b="1" dirty="0">
+                <a:solidFill>
+                  <a:srgbClr val="0E171F"/>
+                </a:solidFill>
+                <a:latin typeface="Poppins" pitchFamily="34" charset="0"/>
+                <a:ea typeface="Poppins" pitchFamily="34" charset="-122"/>
+                <a:cs typeface="Poppins" pitchFamily="34" charset="-120"/>
+              </a:rPr>
+              <a:t>Stand it up properly: </a:t>
+            </a:r>
+            <a:pPr indent="0" marL="0">
+              <a:lnSpc>
+                <a:spcPts val="1215"/>
+              </a:lnSpc>
+              <a:buNone/>
+            </a:pPr>
+            <a:r>
+              <a:rPr lang="en-US" sz="810" dirty="0">
+                <a:solidFill>
+                  <a:srgbClr val="4A5565"/>
+                </a:solidFill>
+                <a:latin typeface="Poppins" pitchFamily="34" charset="0"/>
+                <a:ea typeface="Poppins" pitchFamily="34" charset="-122"/>
+                <a:cs typeface="Poppins" pitchFamily="34" charset="-120"/>
+              </a:rPr>
+              <a:t>a full-timer or a commissioned agent, targets and KPIs, a pipeline in the CRM rather than in someone's head. The room put it at about twelve touch points before a venue buys beer, and Tap That has the first one and almost none of the eleven after it. The next hire is undecided between a brewer and wholesale plus bar coverage, hybrid either way.</a:t>
+            </a:r>
+            <a:endParaRPr lang="en-US" sz="810" dirty="0"/>
           </a:p>
         </p:txBody>
       </p:sp>
@@ -17024,8 +17488,8 @@
         </p:nvSpPr>
         <p:spPr>
           <a:xfrm>
-            <a:off x="438898" y="7817693"/>
-            <a:ext cx="4521737" cy="462915"/>
+            <a:off x="438898" y="9142213"/>
+            <a:ext cx="4521737" cy="308610"/>
           </a:xfrm>
           <a:prstGeom prst="rect">
             <a:avLst/>
@@ -17044,6 +17508,23 @@
               <a:buNone/>
             </a:pPr>
             <a:r>
+              <a:rPr lang="en-US" sz="810" b="1" dirty="0">
+                <a:solidFill>
+                  <a:srgbClr val="0E171F"/>
+                </a:solidFill>
+                <a:latin typeface="Poppins" pitchFamily="34" charset="0"/>
+                <a:ea typeface="Poppins" pitchFamily="34" charset="-122"/>
+                <a:cs typeface="Poppins" pitchFamily="34" charset="-120"/>
+              </a:rPr>
+              <a:t>Then go after the shape of it: </a:t>
+            </a:r>
+            <a:pPr indent="0" marL="0">
+              <a:lnSpc>
+                <a:spcPts val="1215"/>
+              </a:lnSpc>
+              <a:buNone/>
+            </a:pPr>
+            <a:r>
               <a:rPr lang="en-US" sz="810" dirty="0">
                 <a:solidFill>
                   <a:srgbClr val="4A5565"/>
@@ -17052,7 +17533,7 @@
                 <a:ea typeface="Poppins" pitchFamily="34" charset="-122"/>
                 <a:cs typeface="Poppins" pitchFamily="34" charset="-120"/>
               </a:rPr>
-              <a:t>Bars have approached Tap That and it still has not converted. That is not a demand problem, it is the absence of follow-up and sales experience. Justin's priority five, with a 3-month item: outreach to event venues and niched venues.</a:t>
+              <a:t>custom systems for sporting clubs, club-branded kegs, minimum guarantees per season, and moving rigs from footy to cricket so they earn year-round.</a:t>
             </a:r>
             <a:endParaRPr lang="en-US" sz="810" dirty="0"/>
           </a:p>
@@ -17066,8 +17547,8 @@
         </p:nvSpPr>
         <p:spPr>
           <a:xfrm>
-            <a:off x="438898" y="8356509"/>
-            <a:ext cx="4521737" cy="771525"/>
+            <a:off x="438898" y="9573015"/>
+            <a:ext cx="4521737" cy="308610"/>
           </a:xfrm>
           <a:prstGeom prst="rect">
             <a:avLst/>
@@ -17094,7 +17575,7 @@
                 <a:ea typeface="Poppins" pitchFamily="34" charset="-122"/>
                 <a:cs typeface="Poppins" pitchFamily="34" charset="-120"/>
               </a:rPr>
-              <a:t>Stand it up properly: </a:t>
+              <a:t>And work around the duopoly. </a:t>
             </a:r>
             <a:pPr indent="0" marL="0">
               <a:lnSpc>
@@ -17111,7 +17592,7 @@
                 <a:ea typeface="Poppins" pitchFamily="34" charset="-122"/>
                 <a:cs typeface="Poppins" pitchFamily="34" charset="-120"/>
               </a:rPr>
-              <a:t>a full-timer or a commissioned agent, targets and KPIs, a pipeline in the CRM rather than in someone's head. The room put it at about twelve touch points before a venue buys beer, and Tap That has the first one and almost none of the eleven after it. The next hire is undecided between a brewer and wholesale plus bar coverage, hybrid either way.</a:t>
+              <a:t>Lock-in is not satisfaction, and venues are already forming buying groups to get around it.</a:t>
             </a:r>
             <a:endParaRPr lang="en-US" sz="810" dirty="0"/>
           </a:p>
@@ -17119,125 +17600,7 @@
       </p:sp>
       <p:sp>
         <p:nvSpPr>
-          <p:cNvPr id="64" name="Text 59"/>
-          <p:cNvSpPr txBox="1"/>
-          <p:nvPr/>
-        </p:nvSpPr>
-        <p:spPr>
-          <a:xfrm>
-            <a:off x="438898" y="9203935"/>
-            <a:ext cx="4521737" cy="462915"/>
-          </a:xfrm>
-          <a:prstGeom prst="rect">
-            <a:avLst/>
-          </a:prstGeom>
-          <a:noFill/>
-          <a:ln/>
-        </p:spPr>
-        <p:txBody>
-          <a:bodyPr wrap="square" lIns="0" tIns="0" rIns="0" bIns="0" rtlCol="0" anchor="t"/>
-          <a:lstStyle/>
-          <a:p>
-            <a:pPr indent="0" marL="0">
-              <a:lnSpc>
-                <a:spcPts val="1215"/>
-              </a:lnSpc>
-              <a:buNone/>
-            </a:pPr>
-            <a:r>
-              <a:rPr lang="en-US" sz="810" b="1" dirty="0">
-                <a:solidFill>
-                  <a:srgbClr val="0E171F"/>
-                </a:solidFill>
-                <a:latin typeface="Poppins" pitchFamily="34" charset="0"/>
-                <a:ea typeface="Poppins" pitchFamily="34" charset="-122"/>
-                <a:cs typeface="Poppins" pitchFamily="34" charset="-120"/>
-              </a:rPr>
-              <a:t>Then go after the shape of it: </a:t>
-            </a:r>
-            <a:pPr indent="0" marL="0">
-              <a:lnSpc>
-                <a:spcPts val="1215"/>
-              </a:lnSpc>
-              <a:buNone/>
-            </a:pPr>
-            <a:r>
-              <a:rPr lang="en-US" sz="810" dirty="0">
-                <a:solidFill>
-                  <a:srgbClr val="4A5565"/>
-                </a:solidFill>
-                <a:latin typeface="Poppins" pitchFamily="34" charset="0"/>
-                <a:ea typeface="Poppins" pitchFamily="34" charset="-122"/>
-                <a:cs typeface="Poppins" pitchFamily="34" charset="-120"/>
-              </a:rPr>
-              <a:t>custom systems for sporting clubs, club-branded kegs, minimum guarantees per season, and moving rigs from footy to cricket so they earn year-round.</a:t>
-            </a:r>
-            <a:endParaRPr lang="en-US" sz="810" dirty="0"/>
-          </a:p>
-        </p:txBody>
-      </p:sp>
-      <p:sp>
-        <p:nvSpPr>
-          <p:cNvPr id="65" name="Text 60"/>
-          <p:cNvSpPr txBox="1"/>
-          <p:nvPr/>
-        </p:nvSpPr>
-        <p:spPr>
-          <a:xfrm>
-            <a:off x="438898" y="9742751"/>
-            <a:ext cx="4521737" cy="308610"/>
-          </a:xfrm>
-          <a:prstGeom prst="rect">
-            <a:avLst/>
-          </a:prstGeom>
-          <a:noFill/>
-          <a:ln/>
-        </p:spPr>
-        <p:txBody>
-          <a:bodyPr wrap="square" lIns="0" tIns="0" rIns="0" bIns="0" rtlCol="0" anchor="t"/>
-          <a:lstStyle/>
-          <a:p>
-            <a:pPr indent="0" marL="0">
-              <a:lnSpc>
-                <a:spcPts val="1215"/>
-              </a:lnSpc>
-              <a:buNone/>
-            </a:pPr>
-            <a:r>
-              <a:rPr lang="en-US" sz="810" b="1" dirty="0">
-                <a:solidFill>
-                  <a:srgbClr val="0E171F"/>
-                </a:solidFill>
-                <a:latin typeface="Poppins" pitchFamily="34" charset="0"/>
-                <a:ea typeface="Poppins" pitchFamily="34" charset="-122"/>
-                <a:cs typeface="Poppins" pitchFamily="34" charset="-120"/>
-              </a:rPr>
-              <a:t>And work around the duopoly. </a:t>
-            </a:r>
-            <a:pPr indent="0" marL="0">
-              <a:lnSpc>
-                <a:spcPts val="1215"/>
-              </a:lnSpc>
-              <a:buNone/>
-            </a:pPr>
-            <a:r>
-              <a:rPr lang="en-US" sz="810" dirty="0">
-                <a:solidFill>
-                  <a:srgbClr val="4A5565"/>
-                </a:solidFill>
-                <a:latin typeface="Poppins" pitchFamily="34" charset="0"/>
-                <a:ea typeface="Poppins" pitchFamily="34" charset="-122"/>
-                <a:cs typeface="Poppins" pitchFamily="34" charset="-120"/>
-              </a:rPr>
-              <a:t>Lock-in is not satisfaction, and venues are already forming buying groups to get around it.</a:t>
-            </a:r>
-            <a:endParaRPr lang="en-US" sz="810" dirty="0"/>
-          </a:p>
-        </p:txBody>
-      </p:sp>
-      <p:sp>
-        <p:nvSpPr>
-          <p:cNvPr id="66" name="Shape 61"/>
+          <p:cNvPr id="64" name="Shape 59"/>
           <p:cNvSpPr/>
           <p:nvPr/>
         </p:nvSpPr>
@@ -17260,7 +17623,7 @@
       </p:sp>
       <p:sp>
         <p:nvSpPr>
-          <p:cNvPr id="67" name="Text 62"/>
+          <p:cNvPr id="65" name="Text 60"/>
           <p:cNvSpPr txBox="1"/>
           <p:nvPr/>
         </p:nvSpPr>
@@ -17302,7 +17665,7 @@
       </p:sp>
       <p:sp>
         <p:nvSpPr>
-          <p:cNvPr id="68" name="Shape 63"/>
+          <p:cNvPr id="66" name="Shape 61"/>
           <p:cNvSpPr/>
           <p:nvPr/>
         </p:nvSpPr>
@@ -17327,14 +17690,98 @@
       </p:sp>
       <p:sp>
         <p:nvSpPr>
+          <p:cNvPr id="67" name="Text 62"/>
+          <p:cNvSpPr txBox="1"/>
+          <p:nvPr/>
+        </p:nvSpPr>
+        <p:spPr>
+          <a:xfrm>
+            <a:off x="5298934" y="7647825"/>
+            <a:ext cx="4521737" cy="112268"/>
+          </a:xfrm>
+          <a:prstGeom prst="rect">
+            <a:avLst/>
+          </a:prstGeom>
+          <a:noFill/>
+          <a:ln/>
+        </p:spPr>
+        <p:txBody>
+          <a:bodyPr wrap="square" lIns="0" tIns="0" rIns="0" bIns="0" rtlCol="0" anchor="t"/>
+          <a:lstStyle/>
+          <a:p>
+            <a:pPr indent="0" marL="0">
+              <a:lnSpc>
+                <a:spcPts val="884"/>
+              </a:lnSpc>
+              <a:buNone/>
+            </a:pPr>
+            <a:r>
+              <a:rPr lang="en-US" sz="680" b="1" spc="95" kern="0" dirty="0">
+                <a:solidFill>
+                  <a:srgbClr val="0066FF"/>
+                </a:solidFill>
+                <a:latin typeface="Poppins" pitchFamily="34" charset="0"/>
+                <a:ea typeface="Poppins" pitchFamily="34" charset="-122"/>
+                <a:cs typeface="Poppins" pitchFamily="34" charset="-120"/>
+              </a:rPr>
+              <a:t>FOUND BY PEOPLE, AND BY MACHINES</a:t>
+            </a:r>
+            <a:endParaRPr lang="en-US" sz="680" dirty="0"/>
+          </a:p>
+        </p:txBody>
+      </p:sp>
+      <p:sp>
+        <p:nvSpPr>
+          <p:cNvPr id="68" name="Text 63"/>
+          <p:cNvSpPr txBox="1"/>
+          <p:nvPr/>
+        </p:nvSpPr>
+        <p:spPr>
+          <a:xfrm>
+            <a:off x="5298934" y="7817693"/>
+            <a:ext cx="4521737" cy="308610"/>
+          </a:xfrm>
+          <a:prstGeom prst="rect">
+            <a:avLst/>
+          </a:prstGeom>
+          <a:noFill/>
+          <a:ln/>
+        </p:spPr>
+        <p:txBody>
+          <a:bodyPr wrap="square" lIns="0" tIns="0" rIns="0" bIns="0" rtlCol="0" anchor="t"/>
+          <a:lstStyle/>
+          <a:p>
+            <a:pPr indent="0" marL="0">
+              <a:lnSpc>
+                <a:spcPts val="1215"/>
+              </a:lnSpc>
+              <a:buNone/>
+            </a:pPr>
+            <a:r>
+              <a:rPr lang="en-US" sz="810" dirty="0">
+                <a:solidFill>
+                  <a:srgbClr val="4A5565"/>
+                </a:solidFill>
+                <a:latin typeface="Poppins" pitchFamily="34" charset="0"/>
+                <a:ea typeface="Poppins" pitchFamily="34" charset="-122"/>
+                <a:cs typeface="Poppins" pitchFamily="34" charset="-120"/>
+              </a:rPr>
+              <a:t>Within six to twelve months a large share of web traffic will expect an answer from AI search rather than a list of links. The site has to be readable by both.</a:t>
+            </a:r>
+            <a:endParaRPr lang="en-US" sz="810" dirty="0"/>
+          </a:p>
+        </p:txBody>
+      </p:sp>
+      <p:sp>
+        <p:nvSpPr>
           <p:cNvPr id="69" name="Text 64"/>
           <p:cNvSpPr txBox="1"/>
           <p:nvPr/>
         </p:nvSpPr>
         <p:spPr>
           <a:xfrm>
-            <a:off x="5298934" y="7647825"/>
-            <a:ext cx="4521737" cy="112268"/>
+            <a:off x="5298934" y="8291903"/>
+            <a:ext cx="4521737" cy="462915"/>
           </a:xfrm>
           <a:prstGeom prst="rect">
             <a:avLst/>
@@ -17348,22 +17795,39 @@
           <a:p>
             <a:pPr indent="0" marL="0">
               <a:lnSpc>
-                <a:spcPts val="884"/>
-              </a:lnSpc>
-              <a:buNone/>
-            </a:pPr>
-            <a:r>
-              <a:rPr lang="en-US" sz="680" b="1" spc="95" kern="0" dirty="0">
-                <a:solidFill>
-                  <a:srgbClr val="0066FF"/>
-                </a:solidFill>
-                <a:latin typeface="Poppins" pitchFamily="34" charset="0"/>
-                <a:ea typeface="Poppins" pitchFamily="34" charset="-122"/>
-                <a:cs typeface="Poppins" pitchFamily="34" charset="-120"/>
-              </a:rPr>
-              <a:t>FOUND BY PEOPLE, AND BY MACHINES</a:t>
-            </a:r>
-            <a:endParaRPr lang="en-US" sz="680" dirty="0"/>
+                <a:spcPts val="1215"/>
+              </a:lnSpc>
+              <a:buNone/>
+            </a:pPr>
+            <a:r>
+              <a:rPr lang="en-US" sz="810" b="1" dirty="0">
+                <a:solidFill>
+                  <a:srgbClr val="0E171F"/>
+                </a:solidFill>
+                <a:latin typeface="Poppins" pitchFamily="34" charset="0"/>
+                <a:ea typeface="Poppins" pitchFamily="34" charset="-122"/>
+                <a:cs typeface="Poppins" pitchFamily="34" charset="-120"/>
+              </a:rPr>
+              <a:t>The basics that are missing: </a:t>
+            </a:r>
+            <a:pPr indent="0" marL="0">
+              <a:lnSpc>
+                <a:spcPts val="1215"/>
+              </a:lnSpc>
+              <a:buNone/>
+            </a:pPr>
+            <a:r>
+              <a:rPr lang="en-US" sz="810" dirty="0">
+                <a:solidFill>
+                  <a:srgbClr val="4A5565"/>
+                </a:solidFill>
+                <a:latin typeface="Poppins" pitchFamily="34" charset="0"/>
+                <a:ea typeface="Poppins" pitchFamily="34" charset="-122"/>
+                <a:cs typeface="Poppins" pitchFamily="34" charset="-120"/>
+              </a:rPr>
+              <a:t>a real About page, an FAQ that answers the buying objections, reviews on the site, and the awards page the Crafted win deserves. Justin's tech item, SEM, runs alongside these GEO basics, not instead of them.</a:t>
+            </a:r>
+            <a:endParaRPr lang="en-US" sz="810" dirty="0"/>
           </a:p>
         </p:txBody>
       </p:sp>
@@ -17375,7 +17839,7 @@
         </p:nvSpPr>
         <p:spPr>
           <a:xfrm>
-            <a:off x="5298934" y="7817693"/>
+            <a:off x="5298934" y="8920418"/>
             <a:ext cx="4521737" cy="308610"/>
           </a:xfrm>
           <a:prstGeom prst="rect">
@@ -17395,6 +17859,23 @@
               <a:buNone/>
             </a:pPr>
             <a:r>
+              <a:rPr lang="en-US" sz="810" b="1" dirty="0">
+                <a:solidFill>
+                  <a:srgbClr val="0E171F"/>
+                </a:solidFill>
+                <a:latin typeface="Poppins" pitchFamily="34" charset="0"/>
+                <a:ea typeface="Poppins" pitchFamily="34" charset="-122"/>
+                <a:cs typeface="Poppins" pitchFamily="34" charset="-120"/>
+              </a:rPr>
+              <a:t>Reviews are the cheapest asset here. </a:t>
+            </a:r>
+            <a:pPr indent="0" marL="0">
+              <a:lnSpc>
+                <a:spcPts val="1215"/>
+              </a:lnSpc>
+              <a:buNone/>
+            </a:pPr>
+            <a:r>
               <a:rPr lang="en-US" sz="810" dirty="0">
                 <a:solidFill>
                   <a:srgbClr val="4A5565"/>
@@ -17403,7 +17884,7 @@
                 <a:ea typeface="Poppins" pitchFamily="34" charset="-122"/>
                 <a:cs typeface="Poppins" pitchFamily="34" charset="-120"/>
               </a:rPr>
-              <a:t>Within six to twelve months a large share of web traffic will expect an answer from AI search rather than a list of links. The site has to be readable by both.</a:t>
+              <a:t>They exist, they are strong, and they sit on platforms rather than on the site where a model can read them.</a:t>
             </a:r>
             <a:endParaRPr lang="en-US" sz="810" dirty="0"/>
           </a:p>
@@ -17417,124 +17898,6 @@
         </p:nvSpPr>
         <p:spPr>
           <a:xfrm>
-            <a:off x="5298934" y="8291903"/>
-            <a:ext cx="4521737" cy="462915"/>
-          </a:xfrm>
-          <a:prstGeom prst="rect">
-            <a:avLst/>
-          </a:prstGeom>
-          <a:noFill/>
-          <a:ln/>
-        </p:spPr>
-        <p:txBody>
-          <a:bodyPr wrap="square" lIns="0" tIns="0" rIns="0" bIns="0" rtlCol="0" anchor="t"/>
-          <a:lstStyle/>
-          <a:p>
-            <a:pPr indent="0" marL="0">
-              <a:lnSpc>
-                <a:spcPts val="1215"/>
-              </a:lnSpc>
-              <a:buNone/>
-            </a:pPr>
-            <a:r>
-              <a:rPr lang="en-US" sz="810" b="1" dirty="0">
-                <a:solidFill>
-                  <a:srgbClr val="0E171F"/>
-                </a:solidFill>
-                <a:latin typeface="Poppins" pitchFamily="34" charset="0"/>
-                <a:ea typeface="Poppins" pitchFamily="34" charset="-122"/>
-                <a:cs typeface="Poppins" pitchFamily="34" charset="-120"/>
-              </a:rPr>
-              <a:t>The basics that are missing: </a:t>
-            </a:r>
-            <a:pPr indent="0" marL="0">
-              <a:lnSpc>
-                <a:spcPts val="1215"/>
-              </a:lnSpc>
-              <a:buNone/>
-            </a:pPr>
-            <a:r>
-              <a:rPr lang="en-US" sz="810" dirty="0">
-                <a:solidFill>
-                  <a:srgbClr val="4A5565"/>
-                </a:solidFill>
-                <a:latin typeface="Poppins" pitchFamily="34" charset="0"/>
-                <a:ea typeface="Poppins" pitchFamily="34" charset="-122"/>
-                <a:cs typeface="Poppins" pitchFamily="34" charset="-120"/>
-              </a:rPr>
-              <a:t>a real About page, an FAQ that answers the buying objections, reviews on the site, and the awards page the Crafted win deserves. Justin's tech item, SEM, runs alongside these GEO basics, not instead of them.</a:t>
-            </a:r>
-            <a:endParaRPr lang="en-US" sz="810" dirty="0"/>
-          </a:p>
-        </p:txBody>
-      </p:sp>
-      <p:sp>
-        <p:nvSpPr>
-          <p:cNvPr id="72" name="Text 67"/>
-          <p:cNvSpPr txBox="1"/>
-          <p:nvPr/>
-        </p:nvSpPr>
-        <p:spPr>
-          <a:xfrm>
-            <a:off x="5298934" y="8920418"/>
-            <a:ext cx="4521737" cy="308610"/>
-          </a:xfrm>
-          <a:prstGeom prst="rect">
-            <a:avLst/>
-          </a:prstGeom>
-          <a:noFill/>
-          <a:ln/>
-        </p:spPr>
-        <p:txBody>
-          <a:bodyPr wrap="square" lIns="0" tIns="0" rIns="0" bIns="0" rtlCol="0" anchor="t"/>
-          <a:lstStyle/>
-          <a:p>
-            <a:pPr indent="0" marL="0">
-              <a:lnSpc>
-                <a:spcPts val="1215"/>
-              </a:lnSpc>
-              <a:buNone/>
-            </a:pPr>
-            <a:r>
-              <a:rPr lang="en-US" sz="810" b="1" dirty="0">
-                <a:solidFill>
-                  <a:srgbClr val="0E171F"/>
-                </a:solidFill>
-                <a:latin typeface="Poppins" pitchFamily="34" charset="0"/>
-                <a:ea typeface="Poppins" pitchFamily="34" charset="-122"/>
-                <a:cs typeface="Poppins" pitchFamily="34" charset="-120"/>
-              </a:rPr>
-              <a:t>Reviews are the cheapest asset here. </a:t>
-            </a:r>
-            <a:pPr indent="0" marL="0">
-              <a:lnSpc>
-                <a:spcPts val="1215"/>
-              </a:lnSpc>
-              <a:buNone/>
-            </a:pPr>
-            <a:r>
-              <a:rPr lang="en-US" sz="810" dirty="0">
-                <a:solidFill>
-                  <a:srgbClr val="4A5565"/>
-                </a:solidFill>
-                <a:latin typeface="Poppins" pitchFamily="34" charset="0"/>
-                <a:ea typeface="Poppins" pitchFamily="34" charset="-122"/>
-                <a:cs typeface="Poppins" pitchFamily="34" charset="-120"/>
-              </a:rPr>
-              <a:t>They exist, they are strong, and they sit on platforms rather than on the site where a model can read them.</a:t>
-            </a:r>
-            <a:endParaRPr lang="en-US" sz="810" dirty="0"/>
-          </a:p>
-        </p:txBody>
-      </p:sp>
-      <p:sp>
-        <p:nvSpPr>
-          <p:cNvPr id="73" name="Text 68"/>
-          <p:cNvSpPr txBox="1"/>
-          <p:nvPr/>
-        </p:nvSpPr>
-        <p:spPr>
-          <a:xfrm>
             <a:off x="5298934" y="9394628"/>
             <a:ext cx="4521737" cy="308610"/>
           </a:xfrm>
@@ -17588,7 +17951,7 @@
       </p:sp>
       <p:sp>
         <p:nvSpPr>
-          <p:cNvPr id="74" name="Shape 69"/>
+          <p:cNvPr id="72" name="Shape 67"/>
           <p:cNvSpPr/>
           <p:nvPr/>
         </p:nvSpPr>
@@ -17613,7 +17976,7 @@
       </p:sp>
       <p:sp>
         <p:nvSpPr>
-          <p:cNvPr id="75" name="Text 70"/>
+          <p:cNvPr id="73" name="Text 68"/>
           <p:cNvSpPr txBox="1"/>
           <p:nvPr/>
         </p:nvSpPr>
@@ -17655,7 +18018,7 @@
       </p:sp>
       <p:sp>
         <p:nvSpPr>
-          <p:cNvPr id="76" name="Shape 71"/>
+          <p:cNvPr id="74" name="Shape 69"/>
           <p:cNvSpPr/>
           <p:nvPr/>
         </p:nvSpPr>
@@ -17680,7 +18043,7 @@
       </p:sp>
       <p:sp>
         <p:nvSpPr>
-          <p:cNvPr id="77" name="Text 72"/>
+          <p:cNvPr id="75" name="Text 70"/>
           <p:cNvSpPr txBox="1"/>
           <p:nvPr/>
         </p:nvSpPr>
@@ -17722,7 +18085,7 @@
       </p:sp>
       <p:sp>
         <p:nvSpPr>
-          <p:cNvPr id="78" name="Text 73"/>
+          <p:cNvPr id="76" name="Text 71"/>
           <p:cNvSpPr txBox="1"/>
           <p:nvPr/>
         </p:nvSpPr>
@@ -17764,7 +18127,7 @@
       </p:sp>
       <p:sp>
         <p:nvSpPr>
-          <p:cNvPr id="79" name="Shape 74"/>
+          <p:cNvPr id="77" name="Shape 72"/>
           <p:cNvSpPr/>
           <p:nvPr/>
         </p:nvSpPr>
@@ -17789,7 +18152,7 @@
       </p:sp>
       <p:sp>
         <p:nvSpPr>
-          <p:cNvPr id="80" name="Text 75"/>
+          <p:cNvPr id="78" name="Text 73"/>
           <p:cNvSpPr txBox="1"/>
           <p:nvPr/>
         </p:nvSpPr>
@@ -17831,7 +18194,7 @@
       </p:sp>
       <p:sp>
         <p:nvSpPr>
-          <p:cNvPr id="81" name="Text 76"/>
+          <p:cNvPr id="79" name="Text 74"/>
           <p:cNvSpPr txBox="1"/>
           <p:nvPr/>
         </p:nvSpPr>
@@ -17873,7 +18236,7 @@
       </p:sp>
       <p:sp>
         <p:nvSpPr>
-          <p:cNvPr id="82" name="Shape 77"/>
+          <p:cNvPr id="80" name="Shape 75"/>
           <p:cNvSpPr/>
           <p:nvPr/>
         </p:nvSpPr>
@@ -17898,7 +18261,7 @@
       </p:sp>
       <p:sp>
         <p:nvSpPr>
-          <p:cNvPr id="83" name="Text 78"/>
+          <p:cNvPr id="81" name="Text 76"/>
           <p:cNvSpPr txBox="1"/>
           <p:nvPr/>
         </p:nvSpPr>
@@ -17940,7 +18303,7 @@
       </p:sp>
       <p:sp>
         <p:nvSpPr>
-          <p:cNvPr id="84" name="Text 79"/>
+          <p:cNvPr id="82" name="Text 77"/>
           <p:cNvSpPr txBox="1"/>
           <p:nvPr/>
         </p:nvSpPr>
@@ -17982,7 +18345,7 @@
       </p:sp>
       <p:sp>
         <p:nvSpPr>
-          <p:cNvPr id="85" name="Shape 80"/>
+          <p:cNvPr id="83" name="Shape 78"/>
           <p:cNvSpPr/>
           <p:nvPr/>
         </p:nvSpPr>
@@ -18007,96 +18370,96 @@
       </p:sp>
       <p:sp>
         <p:nvSpPr>
+          <p:cNvPr id="84" name="Text 79"/>
+          <p:cNvSpPr txBox="1"/>
+          <p:nvPr/>
+        </p:nvSpPr>
+        <p:spPr>
+          <a:xfrm>
+            <a:off x="12563838" y="8522215"/>
+            <a:ext cx="2008868" cy="185420"/>
+          </a:xfrm>
+          <a:prstGeom prst="rect">
+            <a:avLst/>
+          </a:prstGeom>
+          <a:noFill/>
+          <a:ln/>
+        </p:spPr>
+        <p:txBody>
+          <a:bodyPr wrap="square" lIns="0" tIns="0" rIns="0" bIns="0" rtlCol="0" anchor="t"/>
+          <a:lstStyle/>
+          <a:p>
+            <a:pPr indent="0" marL="0">
+              <a:lnSpc>
+                <a:spcPts val="1100"/>
+              </a:lnSpc>
+              <a:buNone/>
+            </a:pPr>
+            <a:r>
+              <a:rPr lang="en-US" sz="1100" b="1" dirty="0">
+                <a:solidFill>
+                  <a:srgbClr val="0066FF"/>
+                </a:solidFill>
+                <a:latin typeface="Poppins" pitchFamily="34" charset="0"/>
+                <a:ea typeface="Poppins" pitchFamily="34" charset="-122"/>
+                <a:cs typeface="Poppins" pitchFamily="34" charset="-120"/>
+              </a:rPr>
+              <a:t>Leak</a:t>
+            </a:r>
+            <a:endParaRPr lang="en-US" sz="1100" dirty="0"/>
+          </a:p>
+        </p:txBody>
+      </p:sp>
+      <p:sp>
+        <p:nvSpPr>
+          <p:cNvPr id="85" name="Text 80"/>
+          <p:cNvSpPr txBox="1"/>
+          <p:nvPr/>
+        </p:nvSpPr>
+        <p:spPr>
+          <a:xfrm>
+            <a:off x="12563838" y="8765235"/>
+            <a:ext cx="2008868" cy="176022"/>
+          </a:xfrm>
+          <a:prstGeom prst="rect">
+            <a:avLst/>
+          </a:prstGeom>
+          <a:noFill/>
+          <a:ln/>
+        </p:spPr>
+        <p:txBody>
+          <a:bodyPr wrap="square" lIns="0" tIns="0" rIns="0" bIns="0" rtlCol="0" anchor="t"/>
+          <a:lstStyle/>
+          <a:p>
+            <a:pPr indent="0" marL="0">
+              <a:lnSpc>
+                <a:spcPts val="693"/>
+              </a:lnSpc>
+              <a:buNone/>
+            </a:pPr>
+            <a:r>
+              <a:rPr lang="en-US" sz="550" b="1" spc="55" kern="0" dirty="0">
+                <a:solidFill>
+                  <a:srgbClr val="4A5565"/>
+                </a:solidFill>
+                <a:latin typeface="Poppins" pitchFamily="34" charset="0"/>
+                <a:ea typeface="Poppins" pitchFamily="34" charset="-122"/>
+                <a:cs typeface="Poppins" pitchFamily="34" charset="-120"/>
+              </a:rPr>
+              <a:t>LAPSE RATE, MEMBER VS NON-MEMBER</a:t>
+            </a:r>
+            <a:endParaRPr lang="en-US" sz="550" dirty="0"/>
+          </a:p>
+        </p:txBody>
+      </p:sp>
+      <p:sp>
+        <p:nvSpPr>
           <p:cNvPr id="86" name="Text 81"/>
           <p:cNvSpPr txBox="1"/>
           <p:nvPr/>
         </p:nvSpPr>
         <p:spPr>
           <a:xfrm>
-            <a:off x="12563838" y="8522215"/>
-            <a:ext cx="2008868" cy="185420"/>
-          </a:xfrm>
-          <a:prstGeom prst="rect">
-            <a:avLst/>
-          </a:prstGeom>
-          <a:noFill/>
-          <a:ln/>
-        </p:spPr>
-        <p:txBody>
-          <a:bodyPr wrap="square" lIns="0" tIns="0" rIns="0" bIns="0" rtlCol="0" anchor="t"/>
-          <a:lstStyle/>
-          <a:p>
-            <a:pPr indent="0" marL="0">
-              <a:lnSpc>
-                <a:spcPts val="1100"/>
-              </a:lnSpc>
-              <a:buNone/>
-            </a:pPr>
-            <a:r>
-              <a:rPr lang="en-US" sz="1100" b="1" dirty="0">
-                <a:solidFill>
-                  <a:srgbClr val="0066FF"/>
-                </a:solidFill>
-                <a:latin typeface="Poppins" pitchFamily="34" charset="0"/>
-                <a:ea typeface="Poppins" pitchFamily="34" charset="-122"/>
-                <a:cs typeface="Poppins" pitchFamily="34" charset="-120"/>
-              </a:rPr>
-              <a:t>Leak</a:t>
-            </a:r>
-            <a:endParaRPr lang="en-US" sz="1100" dirty="0"/>
-          </a:p>
-        </p:txBody>
-      </p:sp>
-      <p:sp>
-        <p:nvSpPr>
-          <p:cNvPr id="87" name="Text 82"/>
-          <p:cNvSpPr txBox="1"/>
-          <p:nvPr/>
-        </p:nvSpPr>
-        <p:spPr>
-          <a:xfrm>
-            <a:off x="12563838" y="8765235"/>
-            <a:ext cx="2008868" cy="176022"/>
-          </a:xfrm>
-          <a:prstGeom prst="rect">
-            <a:avLst/>
-          </a:prstGeom>
-          <a:noFill/>
-          <a:ln/>
-        </p:spPr>
-        <p:txBody>
-          <a:bodyPr wrap="square" lIns="0" tIns="0" rIns="0" bIns="0" rtlCol="0" anchor="t"/>
-          <a:lstStyle/>
-          <a:p>
-            <a:pPr indent="0" marL="0">
-              <a:lnSpc>
-                <a:spcPts val="693"/>
-              </a:lnSpc>
-              <a:buNone/>
-            </a:pPr>
-            <a:r>
-              <a:rPr lang="en-US" sz="550" b="1" spc="55" kern="0" dirty="0">
-                <a:solidFill>
-                  <a:srgbClr val="4A5565"/>
-                </a:solidFill>
-                <a:latin typeface="Poppins" pitchFamily="34" charset="0"/>
-                <a:ea typeface="Poppins" pitchFamily="34" charset="-122"/>
-                <a:cs typeface="Poppins" pitchFamily="34" charset="-120"/>
-              </a:rPr>
-              <a:t>LAPSE RATE, MEMBER VS NON-MEMBER</a:t>
-            </a:r>
-            <a:endParaRPr lang="en-US" sz="550" dirty="0"/>
-          </a:p>
-        </p:txBody>
-      </p:sp>
-      <p:sp>
-        <p:nvSpPr>
-          <p:cNvPr id="88" name="Text 83"/>
-          <p:cNvSpPr txBox="1"/>
-          <p:nvPr/>
-        </p:nvSpPr>
-        <p:spPr>
-          <a:xfrm>
             <a:off x="10158970" y="9147537"/>
             <a:ext cx="4521737" cy="308610"/>
           </a:xfrm>
@@ -18150,7 +18513,7 @@
       </p:sp>
       <p:sp>
         <p:nvSpPr>
-          <p:cNvPr id="89" name="Text 84"/>
+          <p:cNvPr id="87" name="Text 82"/>
           <p:cNvSpPr txBox="1"/>
           <p:nvPr/>
         </p:nvSpPr>
@@ -18334,8 +18697,8 @@
         </p:nvSpPr>
         <p:spPr>
           <a:xfrm>
-            <a:off x="12678246" y="365760"/>
-            <a:ext cx="1165358" cy="251460"/>
+            <a:off x="12656964" y="365760"/>
+            <a:ext cx="1186641" cy="251460"/>
           </a:xfrm>
           <a:prstGeom prst="roundRect">
             <a:avLst>
@@ -18361,8 +18724,8 @@
         </p:nvSpPr>
         <p:spPr>
           <a:xfrm>
-            <a:off x="12678246" y="365760"/>
-            <a:ext cx="1165358" cy="251460"/>
+            <a:off x="12656964" y="365760"/>
+            <a:ext cx="1186641" cy="251460"/>
           </a:xfrm>
           <a:prstGeom prst="rect">
             <a:avLst/>
@@ -18386,7 +18749,7 @@
                 <a:ea typeface="Poppins" pitchFamily="34" charset="-122"/>
                 <a:cs typeface="Poppins" pitchFamily="34" charset="-120"/>
               </a:rPr>
-              <a:t>V02 · 16 SEPT 2026</a:t>
+              <a:t>V03 · 23 SEPT 2026</a:t>
             </a:r>
             <a:endParaRPr lang="en-US" sz="650" dirty="0"/>
           </a:p>
@@ -18400,8 +18763,8 @@
         </p:nvSpPr>
         <p:spPr>
           <a:xfrm>
-            <a:off x="11370203" y="365760"/>
-            <a:ext cx="1218043" cy="251460"/>
+            <a:off x="11321238" y="365760"/>
+            <a:ext cx="1245725" cy="251460"/>
           </a:xfrm>
           <a:prstGeom prst="roundRect">
             <a:avLst>
@@ -18427,8 +18790,8 @@
         </p:nvSpPr>
         <p:spPr>
           <a:xfrm>
-            <a:off x="11370203" y="365760"/>
-            <a:ext cx="1218043" cy="251460"/>
+            <a:off x="11321238" y="365760"/>
+            <a:ext cx="1245725" cy="251460"/>
           </a:xfrm>
           <a:prstGeom prst="rect">
             <a:avLst/>
@@ -18466,8 +18829,8 @@
         </p:nvSpPr>
         <p:spPr>
           <a:xfrm>
-            <a:off x="10304303" y="365760"/>
-            <a:ext cx="975900" cy="251460"/>
+            <a:off x="10259357" y="365760"/>
+            <a:ext cx="971882" cy="251460"/>
           </a:xfrm>
           <a:prstGeom prst="roundRect">
             <a:avLst>
@@ -18493,8 +18856,8 @@
         </p:nvSpPr>
         <p:spPr>
           <a:xfrm>
-            <a:off x="10304303" y="365760"/>
-            <a:ext cx="975900" cy="251460"/>
+            <a:off x="10259357" y="365760"/>
+            <a:ext cx="971882" cy="251460"/>
           </a:xfrm>
           <a:prstGeom prst="rect">
             <a:avLst/>
@@ -18556,7 +18919,7 @@
         <p:spPr>
           <a:xfrm>
             <a:off x="323698" y="1115568"/>
-            <a:ext cx="14472209" cy="2795836"/>
+            <a:ext cx="14472209" cy="2562849"/>
           </a:xfrm>
           <a:prstGeom prst="rect">
             <a:avLst/>
@@ -18665,7 +19028,7 @@
         <p:spPr>
           <a:xfrm>
             <a:off x="438898" y="1400636"/>
-            <a:ext cx="3479528" cy="2153153"/>
+            <a:ext cx="3479528" cy="1920166"/>
           </a:xfrm>
           <a:prstGeom prst="rect">
             <a:avLst/>
@@ -18809,7 +19172,7 @@
                 <a:ea typeface="Poppins" pitchFamily="34" charset="-122"/>
                 <a:cs typeface="Poppins" pitchFamily="34" charset="-120"/>
               </a:rPr>
-              <a:t>Three-way shape decision: taproom, showroom or event space</a:t>
+              <a:t>Shape decision: showroom or event space. Walk-ins are not the strategy</a:t>
             </a:r>
             <a:endParaRPr lang="en-US" sz="740" dirty="0"/>
           </a:p>
@@ -19158,8 +19521,75 @@
         </p:nvSpPr>
         <p:spPr>
           <a:xfrm>
+            <a:off x="532498" y="2756929"/>
+            <a:ext cx="50400" cy="50400"/>
+          </a:xfrm>
+          <a:prstGeom prst="rect">
+            <a:avLst/>
+          </a:prstGeom>
+          <a:solidFill>
+            <a:srgbClr val="0066FF"/>
+          </a:solidFill>
+          <a:ln w="12700">
+            <a:solidFill>
+              <a:srgbClr val="333333"/>
+            </a:solidFill>
+            <a:prstDash val="solid"/>
+          </a:ln>
+        </p:spPr>
+      </p:sp>
+      <p:sp>
+        <p:nvSpPr>
+          <p:cNvPr id="31" name="Text 27"/>
+          <p:cNvSpPr txBox="1"/>
+          <p:nvPr/>
+        </p:nvSpPr>
+        <p:spPr>
+          <a:xfrm>
+            <a:off x="626098" y="2719061"/>
+            <a:ext cx="3198728" cy="133452"/>
+          </a:xfrm>
+          <a:prstGeom prst="rect">
+            <a:avLst/>
+          </a:prstGeom>
+          <a:noFill/>
+          <a:ln/>
+        </p:spPr>
+        <p:txBody>
+          <a:bodyPr wrap="square" lIns="0" tIns="0" rIns="0" bIns="0" rtlCol="0" anchor="t"/>
+          <a:lstStyle/>
+          <a:p>
+            <a:pPr indent="0" marL="0">
+              <a:lnSpc>
+                <a:spcPts val="1051"/>
+              </a:lnSpc>
+              <a:buNone/>
+            </a:pPr>
+            <a:r>
+              <a:rPr lang="en-US" sz="740" dirty="0">
+                <a:solidFill>
+                  <a:srgbClr val="4A5565"/>
+                </a:solidFill>
+                <a:latin typeface="Poppins" pitchFamily="34" charset="0"/>
+                <a:ea typeface="Poppins" pitchFamily="34" charset="-122"/>
+                <a:cs typeface="Poppins" pitchFamily="34" charset="-120"/>
+              </a:rPr>
+              <a:t>Jewell proposal and scoped costs reviewed; Jewell split decided</a:t>
+            </a:r>
+            <a:endParaRPr lang="en-US" sz="740" dirty="0"/>
+          </a:p>
+        </p:txBody>
+      </p:sp>
+      <p:sp>
+        <p:nvSpPr>
+          <p:cNvPr id="32" name="Shape 28"/>
+          <p:cNvSpPr/>
+          <p:nvPr/>
+        </p:nvSpPr>
+        <p:spPr>
+          <a:xfrm>
             <a:off x="4026325" y="1400636"/>
-            <a:ext cx="3479528" cy="2153153"/>
+            <a:ext cx="3479528" cy="1920166"/>
           </a:xfrm>
           <a:prstGeom prst="rect">
             <a:avLst/>
@@ -19177,7 +19607,7 @@
       </p:sp>
       <p:sp>
         <p:nvSpPr>
-          <p:cNvPr id="31" name="Shape 27"/>
+          <p:cNvPr id="33" name="Shape 29"/>
           <p:cNvSpPr/>
           <p:nvPr/>
         </p:nvSpPr>
@@ -19202,7 +19632,7 @@
       </p:sp>
       <p:sp>
         <p:nvSpPr>
-          <p:cNvPr id="32" name="Text 28"/>
+          <p:cNvPr id="34" name="Text 30"/>
           <p:cNvSpPr txBox="1"/>
           <p:nvPr/>
         </p:nvSpPr>
@@ -19244,7 +19674,7 @@
       </p:sp>
       <p:sp>
         <p:nvSpPr>
-          <p:cNvPr id="33" name="Shape 29"/>
+          <p:cNvPr id="35" name="Shape 31"/>
           <p:cNvSpPr/>
           <p:nvPr/>
         </p:nvSpPr>
@@ -19269,7 +19699,7 @@
       </p:sp>
       <p:sp>
         <p:nvSpPr>
-          <p:cNvPr id="34" name="Text 30"/>
+          <p:cNvPr id="36" name="Text 32"/>
           <p:cNvSpPr txBox="1"/>
           <p:nvPr/>
         </p:nvSpPr>
@@ -19311,7 +19741,7 @@
       </p:sp>
       <p:sp>
         <p:nvSpPr>
-          <p:cNvPr id="35" name="Shape 31"/>
+          <p:cNvPr id="37" name="Shape 33"/>
           <p:cNvSpPr/>
           <p:nvPr/>
         </p:nvSpPr>
@@ -19336,7 +19766,7 @@
       </p:sp>
       <p:sp>
         <p:nvSpPr>
-          <p:cNvPr id="36" name="Text 32"/>
+          <p:cNvPr id="38" name="Text 34"/>
           <p:cNvSpPr txBox="1"/>
           <p:nvPr/>
         </p:nvSpPr>
@@ -19378,7 +19808,7 @@
       </p:sp>
       <p:sp>
         <p:nvSpPr>
-          <p:cNvPr id="37" name="Shape 33"/>
+          <p:cNvPr id="39" name="Shape 35"/>
           <p:cNvSpPr/>
           <p:nvPr/>
         </p:nvSpPr>
@@ -19403,7 +19833,7 @@
       </p:sp>
       <p:sp>
         <p:nvSpPr>
-          <p:cNvPr id="38" name="Text 34"/>
+          <p:cNvPr id="40" name="Text 36"/>
           <p:cNvSpPr txBox="1"/>
           <p:nvPr/>
         </p:nvSpPr>
@@ -19445,7 +19875,7 @@
       </p:sp>
       <p:sp>
         <p:nvSpPr>
-          <p:cNvPr id="39" name="Shape 35"/>
+          <p:cNvPr id="41" name="Shape 37"/>
           <p:cNvSpPr/>
           <p:nvPr/>
         </p:nvSpPr>
@@ -19470,7 +19900,7 @@
       </p:sp>
       <p:sp>
         <p:nvSpPr>
-          <p:cNvPr id="40" name="Text 36"/>
+          <p:cNvPr id="42" name="Text 38"/>
           <p:cNvSpPr txBox="1"/>
           <p:nvPr/>
         </p:nvSpPr>
@@ -19512,7 +19942,7 @@
       </p:sp>
       <p:sp>
         <p:nvSpPr>
-          <p:cNvPr id="41" name="Shape 37"/>
+          <p:cNvPr id="43" name="Shape 39"/>
           <p:cNvSpPr/>
           <p:nvPr/>
         </p:nvSpPr>
@@ -19537,7 +19967,7 @@
       </p:sp>
       <p:sp>
         <p:nvSpPr>
-          <p:cNvPr id="42" name="Text 38"/>
+          <p:cNvPr id="44" name="Text 40"/>
           <p:cNvSpPr txBox="1"/>
           <p:nvPr/>
         </p:nvSpPr>
@@ -19579,7 +20009,7 @@
       </p:sp>
       <p:sp>
         <p:nvSpPr>
-          <p:cNvPr id="43" name="Shape 39"/>
+          <p:cNvPr id="45" name="Shape 41"/>
           <p:cNvSpPr/>
           <p:nvPr/>
         </p:nvSpPr>
@@ -19604,7 +20034,7 @@
       </p:sp>
       <p:sp>
         <p:nvSpPr>
-          <p:cNvPr id="44" name="Text 40"/>
+          <p:cNvPr id="46" name="Text 42"/>
           <p:cNvSpPr txBox="1"/>
           <p:nvPr/>
         </p:nvSpPr>
@@ -19646,14 +20076,81 @@
       </p:sp>
       <p:sp>
         <p:nvSpPr>
-          <p:cNvPr id="45" name="Shape 41"/>
+          <p:cNvPr id="47" name="Shape 43"/>
           <p:cNvSpPr/>
           <p:nvPr/>
         </p:nvSpPr>
         <p:spPr>
           <a:xfrm>
+            <a:off x="4119925" y="2756929"/>
+            <a:ext cx="50400" cy="50400"/>
+          </a:xfrm>
+          <a:prstGeom prst="rect">
+            <a:avLst/>
+          </a:prstGeom>
+          <a:solidFill>
+            <a:srgbClr val="0066FF"/>
+          </a:solidFill>
+          <a:ln w="12700">
+            <a:solidFill>
+              <a:srgbClr val="333333"/>
+            </a:solidFill>
+            <a:prstDash val="solid"/>
+          </a:ln>
+        </p:spPr>
+      </p:sp>
+      <p:sp>
+        <p:nvSpPr>
+          <p:cNvPr id="48" name="Text 44"/>
+          <p:cNvSpPr txBox="1"/>
+          <p:nvPr/>
+        </p:nvSpPr>
+        <p:spPr>
+          <a:xfrm>
+            <a:off x="4213525" y="2719061"/>
+            <a:ext cx="3198728" cy="133452"/>
+          </a:xfrm>
+          <a:prstGeom prst="rect">
+            <a:avLst/>
+          </a:prstGeom>
+          <a:noFill/>
+          <a:ln/>
+        </p:spPr>
+        <p:txBody>
+          <a:bodyPr wrap="square" lIns="0" tIns="0" rIns="0" bIns="0" rtlCol="0" anchor="t"/>
+          <a:lstStyle/>
+          <a:p>
+            <a:pPr indent="0" marL="0">
+              <a:lnSpc>
+                <a:spcPts val="1051"/>
+              </a:lnSpc>
+              <a:buNone/>
+            </a:pPr>
+            <a:r>
+              <a:rPr lang="en-US" sz="740" dirty="0">
+                <a:solidFill>
+                  <a:srgbClr val="4A5565"/>
+                </a:solidFill>
+                <a:latin typeface="Poppins" pitchFamily="34" charset="0"/>
+                <a:ea typeface="Poppins" pitchFamily="34" charset="-122"/>
+                <a:cs typeface="Poppins" pitchFamily="34" charset="-120"/>
+              </a:rPr>
+              <a:t>Referral programme rebuilt: free keg, QR card, home tastings</a:t>
+            </a:r>
+            <a:endParaRPr lang="en-US" sz="740" dirty="0"/>
+          </a:p>
+        </p:txBody>
+      </p:sp>
+      <p:sp>
+        <p:nvSpPr>
+          <p:cNvPr id="49" name="Shape 45"/>
+          <p:cNvSpPr/>
+          <p:nvPr/>
+        </p:nvSpPr>
+        <p:spPr>
+          <a:xfrm>
             <a:off x="7613752" y="1400636"/>
-            <a:ext cx="3479528" cy="2153153"/>
+            <a:ext cx="3479528" cy="1920166"/>
           </a:xfrm>
           <a:prstGeom prst="rect">
             <a:avLst/>
@@ -19671,7 +20168,7 @@
       </p:sp>
       <p:sp>
         <p:nvSpPr>
-          <p:cNvPr id="46" name="Shape 42"/>
+          <p:cNvPr id="50" name="Shape 46"/>
           <p:cNvSpPr/>
           <p:nvPr/>
         </p:nvSpPr>
@@ -19696,7 +20193,7 @@
       </p:sp>
       <p:sp>
         <p:nvSpPr>
-          <p:cNvPr id="47" name="Text 43"/>
+          <p:cNvPr id="51" name="Text 47"/>
           <p:cNvSpPr txBox="1"/>
           <p:nvPr/>
         </p:nvSpPr>
@@ -19738,7 +20235,7 @@
       </p:sp>
       <p:sp>
         <p:nvSpPr>
-          <p:cNvPr id="48" name="Shape 44"/>
+          <p:cNvPr id="52" name="Shape 48"/>
           <p:cNvSpPr/>
           <p:nvPr/>
         </p:nvSpPr>
@@ -19763,7 +20260,7 @@
       </p:sp>
       <p:sp>
         <p:nvSpPr>
-          <p:cNvPr id="49" name="Text 45"/>
+          <p:cNvPr id="53" name="Text 49"/>
           <p:cNvSpPr txBox="1"/>
           <p:nvPr/>
         </p:nvSpPr>
@@ -19805,7 +20302,7 @@
       </p:sp>
       <p:sp>
         <p:nvSpPr>
-          <p:cNvPr id="50" name="Shape 46"/>
+          <p:cNvPr id="54" name="Shape 50"/>
           <p:cNvSpPr/>
           <p:nvPr/>
         </p:nvSpPr>
@@ -19830,7 +20327,7 @@
       </p:sp>
       <p:sp>
         <p:nvSpPr>
-          <p:cNvPr id="51" name="Text 47"/>
+          <p:cNvPr id="55" name="Text 51"/>
           <p:cNvSpPr txBox="1"/>
           <p:nvPr/>
         </p:nvSpPr>
@@ -19872,14 +20369,81 @@
       </p:sp>
       <p:sp>
         <p:nvSpPr>
-          <p:cNvPr id="52" name="Shape 48"/>
+          <p:cNvPr id="56" name="Shape 52"/>
           <p:cNvSpPr/>
           <p:nvPr/>
         </p:nvSpPr>
         <p:spPr>
           <a:xfrm>
+            <a:off x="7707352" y="2050322"/>
+            <a:ext cx="50400" cy="50400"/>
+          </a:xfrm>
+          <a:prstGeom prst="rect">
+            <a:avLst/>
+          </a:prstGeom>
+          <a:solidFill>
+            <a:srgbClr val="0066FF"/>
+          </a:solidFill>
+          <a:ln w="12700">
+            <a:solidFill>
+              <a:srgbClr val="333333"/>
+            </a:solidFill>
+            <a:prstDash val="solid"/>
+          </a:ln>
+        </p:spPr>
+      </p:sp>
+      <p:sp>
+        <p:nvSpPr>
+          <p:cNvPr id="57" name="Text 53"/>
+          <p:cNvSpPr txBox="1"/>
+          <p:nvPr/>
+        </p:nvSpPr>
+        <p:spPr>
+          <a:xfrm>
+            <a:off x="7800952" y="2012454"/>
+            <a:ext cx="3198728" cy="133452"/>
+          </a:xfrm>
+          <a:prstGeom prst="rect">
+            <a:avLst/>
+          </a:prstGeom>
+          <a:noFill/>
+          <a:ln/>
+        </p:spPr>
+        <p:txBody>
+          <a:bodyPr wrap="square" lIns="0" tIns="0" rIns="0" bIns="0" rtlCol="0" anchor="t"/>
+          <a:lstStyle/>
+          <a:p>
+            <a:pPr indent="0" marL="0">
+              <a:lnSpc>
+                <a:spcPts val="1051"/>
+              </a:lnSpc>
+              <a:buNone/>
+            </a:pPr>
+            <a:r>
+              <a:rPr lang="en-US" sz="740" dirty="0">
+                <a:solidFill>
+                  <a:srgbClr val="4A5565"/>
+                </a:solidFill>
+                <a:latin typeface="Poppins" pitchFamily="34" charset="0"/>
+                <a:ea typeface="Poppins" pitchFamily="34" charset="-122"/>
+                <a:cs typeface="Poppins" pitchFamily="34" charset="-120"/>
+              </a:rPr>
+              <a:t>Or 250 by Christmas, if that date is chosen</a:t>
+            </a:r>
+            <a:endParaRPr lang="en-US" sz="740" dirty="0"/>
+          </a:p>
+        </p:txBody>
+      </p:sp>
+      <p:sp>
+        <p:nvSpPr>
+          <p:cNvPr id="58" name="Shape 54"/>
+          <p:cNvSpPr/>
+          <p:nvPr/>
+        </p:nvSpPr>
+        <p:spPr>
+          <a:xfrm>
             <a:off x="11201179" y="1400636"/>
-            <a:ext cx="3479528" cy="2153153"/>
+            <a:ext cx="3479528" cy="1920166"/>
           </a:xfrm>
           <a:prstGeom prst="rect">
             <a:avLst/>
@@ -19897,7 +20461,7 @@
       </p:sp>
       <p:sp>
         <p:nvSpPr>
-          <p:cNvPr id="53" name="Shape 49"/>
+          <p:cNvPr id="59" name="Shape 55"/>
           <p:cNvSpPr/>
           <p:nvPr/>
         </p:nvSpPr>
@@ -19922,7 +20486,7 @@
       </p:sp>
       <p:sp>
         <p:nvSpPr>
-          <p:cNvPr id="54" name="Text 50"/>
+          <p:cNvPr id="60" name="Text 56"/>
           <p:cNvSpPr txBox="1"/>
           <p:nvPr/>
         </p:nvSpPr>
@@ -19964,7 +20528,7 @@
       </p:sp>
       <p:sp>
         <p:nvSpPr>
-          <p:cNvPr id="55" name="Shape 51"/>
+          <p:cNvPr id="61" name="Shape 57"/>
           <p:cNvSpPr/>
           <p:nvPr/>
         </p:nvSpPr>
@@ -19989,7 +20553,7 @@
       </p:sp>
       <p:sp>
         <p:nvSpPr>
-          <p:cNvPr id="56" name="Text 52"/>
+          <p:cNvPr id="62" name="Text 58"/>
           <p:cNvSpPr txBox="1"/>
           <p:nvPr/>
         </p:nvSpPr>
@@ -20031,7 +20595,7 @@
       </p:sp>
       <p:sp>
         <p:nvSpPr>
-          <p:cNvPr id="57" name="Shape 53"/>
+          <p:cNvPr id="63" name="Shape 59"/>
           <p:cNvSpPr/>
           <p:nvPr/>
         </p:nvSpPr>
@@ -20056,7 +20620,7 @@
       </p:sp>
       <p:sp>
         <p:nvSpPr>
-          <p:cNvPr id="58" name="Text 54"/>
+          <p:cNvPr id="64" name="Text 60"/>
           <p:cNvSpPr txBox="1"/>
           <p:nvPr/>
         </p:nvSpPr>
@@ -20098,7 +20662,7 @@
       </p:sp>
       <p:sp>
         <p:nvSpPr>
-          <p:cNvPr id="59" name="Shape 55"/>
+          <p:cNvPr id="65" name="Shape 61"/>
           <p:cNvSpPr/>
           <p:nvPr/>
         </p:nvSpPr>
@@ -20123,7 +20687,7 @@
       </p:sp>
       <p:sp>
         <p:nvSpPr>
-          <p:cNvPr id="60" name="Text 56"/>
+          <p:cNvPr id="66" name="Text 62"/>
           <p:cNvSpPr txBox="1"/>
           <p:nvPr/>
         </p:nvSpPr>
@@ -20165,13 +20729,13 @@
       </p:sp>
       <p:sp>
         <p:nvSpPr>
-          <p:cNvPr id="61" name="Shape 57"/>
+          <p:cNvPr id="67" name="Shape 63"/>
           <p:cNvSpPr/>
           <p:nvPr/>
         </p:nvSpPr>
         <p:spPr>
           <a:xfrm>
-            <a:off x="438898" y="3618589"/>
+            <a:off x="438898" y="3385602"/>
             <a:ext cx="14241809" cy="0"/>
           </a:xfrm>
           <a:prstGeom prst="line">
@@ -20188,13 +20752,13 @@
       </p:sp>
       <p:sp>
         <p:nvSpPr>
-          <p:cNvPr id="62" name="Text 58"/>
+          <p:cNvPr id="68" name="Text 64"/>
           <p:cNvSpPr txBox="1"/>
           <p:nvPr/>
         </p:nvSpPr>
         <p:spPr>
           <a:xfrm>
-            <a:off x="438898" y="3676189"/>
+            <a:off x="438898" y="3443202"/>
             <a:ext cx="14241809" cy="120015"/>
           </a:xfrm>
           <a:prstGeom prst="rect">
@@ -20222,7 +20786,7 @@
                 <a:ea typeface="Poppins" pitchFamily="34" charset="-122"/>
                 <a:cs typeface="Poppins" pitchFamily="34" charset="-120"/>
               </a:rPr>
-              <a:t>Longer horizons, 1,000 refillers and proprietary system supply at three years, expansion, franchising and a production facility at five years, exit at ten to twelve, sit on the summary sheet. Clent is overseas from the end of September.</a:t>
+              <a:t>Longer horizons, 1,000 refillers and proprietary system supply at three years, expansion, franchising and a production facility at five years, exit at ten to twelve, sit on the summary sheet. Clent is overseas from 30 September; Christy carries the weekly check-in.</a:t>
             </a:r>
             <a:endParaRPr lang="en-US" sz="700" dirty="0"/>
           </a:p>
@@ -20230,14 +20794,14 @@
       </p:sp>
       <p:sp>
         <p:nvSpPr>
-          <p:cNvPr id="63" name="Shape 59"/>
+          <p:cNvPr id="69" name="Shape 65"/>
           <p:cNvSpPr/>
           <p:nvPr/>
         </p:nvSpPr>
         <p:spPr>
           <a:xfrm>
-            <a:off x="323698" y="4019303"/>
-            <a:ext cx="3537128" cy="3611288"/>
+            <a:off x="323698" y="3786317"/>
+            <a:ext cx="4752137" cy="3844274"/>
           </a:xfrm>
           <a:prstGeom prst="rect">
             <a:avLst/>
@@ -20255,14 +20819,14 @@
       </p:sp>
       <p:sp>
         <p:nvSpPr>
-          <p:cNvPr id="64" name="Text 60"/>
+          <p:cNvPr id="70" name="Text 66"/>
           <p:cNvSpPr txBox="1"/>
           <p:nvPr/>
         </p:nvSpPr>
         <p:spPr>
           <a:xfrm>
-            <a:off x="438898" y="4134503"/>
-            <a:ext cx="3306728" cy="112268"/>
+            <a:off x="438898" y="3901517"/>
+            <a:ext cx="4521737" cy="112268"/>
           </a:xfrm>
           <a:prstGeom prst="rect">
             <a:avLst/>
@@ -20297,14 +20861,14 @@
       </p:sp>
       <p:sp>
         <p:nvSpPr>
-          <p:cNvPr id="65" name="Text 61"/>
+          <p:cNvPr id="71" name="Text 67"/>
           <p:cNvSpPr txBox="1"/>
           <p:nvPr/>
         </p:nvSpPr>
         <p:spPr>
           <a:xfrm>
-            <a:off x="438898" y="4304371"/>
-            <a:ext cx="3306728" cy="322478"/>
+            <a:off x="438898" y="4071385"/>
+            <a:ext cx="4521737" cy="161239"/>
           </a:xfrm>
           <a:prstGeom prst="rect">
             <a:avLst/>
@@ -20339,14 +20903,14 @@
       </p:sp>
       <p:sp>
         <p:nvSpPr>
-          <p:cNvPr id="66" name="Text 62"/>
+          <p:cNvPr id="72" name="Text 68"/>
           <p:cNvSpPr txBox="1"/>
           <p:nvPr/>
         </p:nvSpPr>
         <p:spPr>
           <a:xfrm>
-            <a:off x="438898" y="4720903"/>
-            <a:ext cx="3306728" cy="462915"/>
+            <a:off x="438898" y="4374372"/>
+            <a:ext cx="4521737" cy="308610"/>
           </a:xfrm>
           <a:prstGeom prst="rect">
             <a:avLst/>
@@ -20398,14 +20962,14 @@
       </p:sp>
       <p:sp>
         <p:nvSpPr>
-          <p:cNvPr id="67" name="Text 63"/>
+          <p:cNvPr id="73" name="Text 69"/>
           <p:cNvSpPr txBox="1"/>
           <p:nvPr/>
         </p:nvSpPr>
         <p:spPr>
           <a:xfrm>
-            <a:off x="438898" y="5277873"/>
-            <a:ext cx="3306728" cy="462915"/>
+            <a:off x="438898" y="4824731"/>
+            <a:ext cx="4521737" cy="308610"/>
           </a:xfrm>
           <a:prstGeom prst="rect">
             <a:avLst/>
@@ -20457,14 +21021,14 @@
       </p:sp>
       <p:sp>
         <p:nvSpPr>
-          <p:cNvPr id="68" name="Text 64"/>
+          <p:cNvPr id="74" name="Text 70"/>
           <p:cNvSpPr txBox="1"/>
           <p:nvPr/>
         </p:nvSpPr>
         <p:spPr>
           <a:xfrm>
-            <a:off x="438898" y="5834842"/>
-            <a:ext cx="3306728" cy="462915"/>
+            <a:off x="438898" y="5275089"/>
+            <a:ext cx="4521737" cy="308610"/>
           </a:xfrm>
           <a:prstGeom prst="rect">
             <a:avLst/>
@@ -20516,14 +21080,14 @@
       </p:sp>
       <p:sp>
         <p:nvSpPr>
-          <p:cNvPr id="69" name="Text 65"/>
+          <p:cNvPr id="75" name="Text 71"/>
           <p:cNvSpPr txBox="1"/>
           <p:nvPr/>
         </p:nvSpPr>
         <p:spPr>
           <a:xfrm>
-            <a:off x="438898" y="6391811"/>
-            <a:ext cx="3306728" cy="462915"/>
+            <a:off x="438898" y="5725447"/>
+            <a:ext cx="4521737" cy="462915"/>
           </a:xfrm>
           <a:prstGeom prst="rect">
             <a:avLst/>
@@ -20550,6 +21114,65 @@
                 <a:ea typeface="Poppins" pitchFamily="34" charset="-122"/>
                 <a:cs typeface="Poppins" pitchFamily="34" charset="-120"/>
               </a:rPr>
+              <a:t>Competitions, two a year. </a:t>
+            </a:r>
+            <a:pPr indent="0" marL="0">
+              <a:lnSpc>
+                <a:spcPts val="1215"/>
+              </a:lnSpc>
+              <a:buNone/>
+            </a:pPr>
+            <a:r>
+              <a:rPr lang="en-US" sz="810" dirty="0">
+                <a:solidFill>
+                  <a:srgbClr val="4A5565"/>
+                </a:solidFill>
+                <a:latin typeface="Poppins" pitchFamily="34" charset="0"/>
+                <a:ea typeface="Poppins" pitchFamily="34" charset="-122"/>
+                <a:cs typeface="Poppins" pitchFamily="34" charset="-120"/>
+              </a:rPr>
+              <a:t>Each keg system giveaway moves about 30 systems. Justin's call is two a year, not three. The insider offer now lands the moment someone enters, and the Crafted Festival funnel (free taste and paddle, entry, automation) is the template to repeat.</a:t>
+            </a:r>
+            <a:endParaRPr lang="en-US" sz="810" dirty="0"/>
+          </a:p>
+        </p:txBody>
+      </p:sp>
+      <p:sp>
+        <p:nvSpPr>
+          <p:cNvPr id="76" name="Text 72"/>
+          <p:cNvSpPr txBox="1"/>
+          <p:nvPr/>
+        </p:nvSpPr>
+        <p:spPr>
+          <a:xfrm>
+            <a:off x="438898" y="6330111"/>
+            <a:ext cx="4521737" cy="308610"/>
+          </a:xfrm>
+          <a:prstGeom prst="rect">
+            <a:avLst/>
+          </a:prstGeom>
+          <a:noFill/>
+          <a:ln/>
+        </p:spPr>
+        <p:txBody>
+          <a:bodyPr wrap="square" lIns="0" tIns="0" rIns="0" bIns="0" rtlCol="0" anchor="t"/>
+          <a:lstStyle/>
+          <a:p>
+            <a:pPr indent="0" marL="0">
+              <a:lnSpc>
+                <a:spcPts val="1215"/>
+              </a:lnSpc>
+              <a:buNone/>
+            </a:pPr>
+            <a:r>
+              <a:rPr lang="en-US" sz="810" b="1" dirty="0">
+                <a:solidFill>
+                  <a:srgbClr val="0E171F"/>
+                </a:solidFill>
+                <a:latin typeface="Poppins" pitchFamily="34" charset="0"/>
+                <a:ea typeface="Poppins" pitchFamily="34" charset="-122"/>
+                <a:cs typeface="Poppins" pitchFamily="34" charset="-120"/>
+              </a:rPr>
               <a:t>Party rental is the quiet one. </a:t>
             </a:r>
             <a:pPr indent="0" marL="0">
@@ -20575,14 +21198,14 @@
       </p:sp>
       <p:sp>
         <p:nvSpPr>
-          <p:cNvPr id="70" name="Shape 66"/>
+          <p:cNvPr id="77" name="Shape 73"/>
           <p:cNvSpPr/>
           <p:nvPr/>
         </p:nvSpPr>
         <p:spPr>
           <a:xfrm>
-            <a:off x="438898" y="7097746"/>
-            <a:ext cx="3306728" cy="0"/>
+            <a:off x="438898" y="7217761"/>
+            <a:ext cx="4521737" cy="0"/>
           </a:xfrm>
           <a:prstGeom prst="line">
             <a:avLst/>
@@ -20598,14 +21221,14 @@
       </p:sp>
       <p:sp>
         <p:nvSpPr>
-          <p:cNvPr id="71" name="Text 67"/>
+          <p:cNvPr id="78" name="Text 74"/>
           <p:cNvSpPr txBox="1"/>
           <p:nvPr/>
         </p:nvSpPr>
         <p:spPr>
           <a:xfrm>
-            <a:off x="438898" y="7155346"/>
-            <a:ext cx="3306728" cy="360045"/>
+            <a:off x="438898" y="7275361"/>
+            <a:ext cx="4521737" cy="240030"/>
           </a:xfrm>
           <a:prstGeom prst="rect">
             <a:avLst/>
@@ -20640,14 +21263,14 @@
       </p:sp>
       <p:sp>
         <p:nvSpPr>
-          <p:cNvPr id="72" name="Shape 68"/>
+          <p:cNvPr id="79" name="Shape 75"/>
           <p:cNvSpPr/>
           <p:nvPr/>
         </p:nvSpPr>
         <p:spPr>
           <a:xfrm>
-            <a:off x="3968725" y="4019303"/>
-            <a:ext cx="5967146" cy="3611288"/>
+            <a:off x="5183734" y="3786317"/>
+            <a:ext cx="5967146" cy="3844274"/>
           </a:xfrm>
           <a:prstGeom prst="rect">
             <a:avLst/>
@@ -20665,13 +21288,13 @@
       </p:sp>
       <p:sp>
         <p:nvSpPr>
-          <p:cNvPr id="73" name="Text 69"/>
+          <p:cNvPr id="80" name="Text 76"/>
           <p:cNvSpPr txBox="1"/>
           <p:nvPr/>
         </p:nvSpPr>
         <p:spPr>
           <a:xfrm>
-            <a:off x="4083925" y="4134503"/>
+            <a:off x="5298934" y="3901517"/>
             <a:ext cx="5736746" cy="112268"/>
           </a:xfrm>
           <a:prstGeom prst="rect">
@@ -20720,7 +21343,7 @@
           </p:nvPr>
         </p:nvGraphicFramePr>
         <p:xfrm>
-          <a:off x="4083925" y="4304371"/>
+          <a:off x="5298934" y="4071385"/>
           <a:ext cx="11339703" cy="914400"/>
         </p:xfrm>
         <a:graphic>
@@ -20728,11 +21351,11 @@
             <a:tbl>
               <a:tblPr/>
               <a:tblGrid>
-                <a:gridCol w="1851573"/>
-                <a:gridCol w="3187550"/>
-                <a:gridCol w="697623"/>
+                <a:gridCol w="1769137"/>
+                <a:gridCol w="3336271"/>
+                <a:gridCol w="631337"/>
               </a:tblGrid>
-              <a:tr h="214112">
+              <a:tr h="207590">
                 <a:tc>
                   <a:txBody>
                     <a:bodyPr/>
@@ -20762,7 +21385,7 @@
                       </a:endParaRPr>
                     </a:p>
                   </a:txBody>
-                  <a:tcPr marL="46800" marR="46800" marT="46800" marB="46800" anchor="ctr">
+                  <a:tcPr marL="37800" marR="37800" marT="37800" marB="37800" anchor="ctr">
                     <a:lnL w="0" cap="flat" cmpd="sng" algn="ctr">
                       <a:noFill/>
                     </a:lnL>
@@ -20815,7 +21438,7 @@
                       </a:endParaRPr>
                     </a:p>
                   </a:txBody>
-                  <a:tcPr marL="46800" marR="46800" marT="46800" marB="46800" anchor="ctr">
+                  <a:tcPr marL="37800" marR="37800" marT="37800" marB="37800" anchor="ctr">
                     <a:lnL w="0" cap="flat" cmpd="sng" algn="ctr">
                       <a:noFill/>
                     </a:lnL>
@@ -20868,7 +21491,7 @@
                       </a:endParaRPr>
                     </a:p>
                   </a:txBody>
-                  <a:tcPr marL="46800" marR="46800" marT="46800" marB="46800" anchor="ctr">
+                  <a:tcPr marL="37800" marR="37800" marT="37800" marB="37800" anchor="ctr">
                     <a:lnL w="0" cap="flat" cmpd="sng" algn="ctr">
                       <a:noFill/>
                     </a:lnL>
@@ -20893,7 +21516,7 @@
                   </a:tcPr>
                 </a:tc>
               </a:tr>
-              <a:tr h="229682">
+              <a:tr h="333701">
                 <a:tc>
                   <a:txBody>
                     <a:bodyPr/>
@@ -20901,12 +21524,12 @@
                     <a:p>
                       <a:pPr algn="l" indent="0" marL="0">
                         <a:lnSpc>
-                          <a:spcPts val="898"/>
+                          <a:spcPts val="884"/>
                         </a:lnSpc>
                         <a:buNone/>
                       </a:pPr>
                       <a:r>
-                        <a:rPr lang="en-US" sz="660" b="1" dirty="0">
+                        <a:rPr lang="en-US" sz="650" b="1" dirty="0">
                           <a:solidFill>
                             <a:srgbClr val="0E171F"/>
                           </a:solidFill>
@@ -20916,14 +21539,14 @@
                         </a:rPr>
                         <a:t>Harvey Norman</a:t>
                       </a:r>
-                      <a:endParaRPr lang="en-US" sz="660" dirty="0">
+                      <a:endParaRPr lang="en-US" sz="650" dirty="0">
                         <a:latin typeface="Poppins" charset="0"/>
                         <a:ea typeface="Poppins" charset="0"/>
                         <a:cs typeface="Poppins" charset="0"/>
                       </a:endParaRPr>
                     </a:p>
                   </a:txBody>
-                  <a:tcPr marL="46800" marR="46800" marT="46800" marB="46800" anchor="t">
+                  <a:tcPr marL="37800" marR="37800" marT="37800" marB="37800" anchor="t">
                     <a:lnL w="0" cap="flat" cmpd="sng" algn="ctr">
                       <a:noFill/>
                     </a:lnL>
@@ -20954,12 +21577,12 @@
                     <a:p>
                       <a:pPr algn="l" indent="0" marL="0">
                         <a:lnSpc>
-                          <a:spcPts val="898"/>
+                          <a:spcPts val="884"/>
                         </a:lnSpc>
                         <a:buNone/>
                       </a:pPr>
                       <a:r>
-                        <a:rPr lang="en-US" sz="660" dirty="0">
+                        <a:rPr lang="en-US" sz="650" dirty="0">
                           <a:solidFill>
                             <a:srgbClr val="4A5565"/>
                           </a:solidFill>
@@ -20967,16 +21590,16 @@
                           <a:ea typeface="Poppins" pitchFamily="34" charset="-122"/>
                           <a:cs typeface="Poppins" pitchFamily="34" charset="-120"/>
                         </a:rPr>
-                        <a:t>GWP or first keg free at point of sale, plus the buyer database</a:t>
+                        <a:t>GWP or first keg free at point of sale, the buyer database, and the kegerator into the outdoor living grouping</a:t>
                       </a:r>
-                      <a:endParaRPr lang="en-US" sz="660" dirty="0">
+                      <a:endParaRPr lang="en-US" sz="650" dirty="0">
                         <a:latin typeface="Poppins" charset="0"/>
                         <a:ea typeface="Poppins" charset="0"/>
                         <a:cs typeface="Poppins" charset="0"/>
                       </a:endParaRPr>
                     </a:p>
                   </a:txBody>
-                  <a:tcPr marL="46800" marR="46800" marT="46800" marB="46800" anchor="t">
+                  <a:tcPr marL="37800" marR="37800" marT="37800" marB="37800" anchor="t">
                     <a:lnL w="0" cap="flat" cmpd="sng" algn="ctr">
                       <a:noFill/>
                     </a:lnL>
@@ -21007,12 +21630,12 @@
                     <a:p>
                       <a:pPr algn="l" indent="0" marL="0">
                         <a:lnSpc>
-                          <a:spcPts val="898"/>
+                          <a:spcPts val="884"/>
                         </a:lnSpc>
                         <a:buNone/>
                       </a:pPr>
                       <a:r>
-                        <a:rPr lang="en-US" sz="660" dirty="0">
+                        <a:rPr lang="en-US" sz="650" dirty="0">
                           <a:solidFill>
                             <a:srgbClr val="4A5565"/>
                           </a:solidFill>
@@ -21022,14 +21645,14 @@
                         </a:rPr>
                         <a:t>Clent</a:t>
                       </a:r>
-                      <a:endParaRPr lang="en-US" sz="660" dirty="0">
+                      <a:endParaRPr lang="en-US" sz="650" dirty="0">
                         <a:latin typeface="Poppins" charset="0"/>
                         <a:ea typeface="Poppins" charset="0"/>
                         <a:cs typeface="Poppins" charset="0"/>
                       </a:endParaRPr>
                     </a:p>
                   </a:txBody>
-                  <a:tcPr marL="46800" marR="46800" marT="46800" marB="46800" anchor="t">
+                  <a:tcPr marL="37800" marR="37800" marT="37800" marB="37800" anchor="t">
                     <a:lnL w="0" cap="flat" cmpd="sng" algn="ctr">
                       <a:noFill/>
                     </a:lnL>
@@ -21054,7 +21677,7 @@
                   </a:tcPr>
                 </a:tc>
               </a:tr>
-              <a:tr h="229682">
+              <a:tr h="221433">
                 <a:tc>
                   <a:txBody>
                     <a:bodyPr/>
@@ -21062,12 +21685,12 @@
                     <a:p>
                       <a:pPr algn="l" indent="0" marL="0">
                         <a:lnSpc>
-                          <a:spcPts val="898"/>
+                          <a:spcPts val="884"/>
                         </a:lnSpc>
                         <a:buNone/>
                       </a:pPr>
                       <a:r>
-                        <a:rPr lang="en-US" sz="660" b="1" dirty="0">
+                        <a:rPr lang="en-US" sz="650" b="1" dirty="0">
                           <a:solidFill>
                             <a:srgbClr val="0E171F"/>
                           </a:solidFill>
@@ -21077,14 +21700,14 @@
                         </a:rPr>
                         <a:t>Kegland / corny keg</a:t>
                       </a:r>
-                      <a:endParaRPr lang="en-US" sz="660" dirty="0">
+                      <a:endParaRPr lang="en-US" sz="650" dirty="0">
                         <a:latin typeface="Poppins" charset="0"/>
                         <a:ea typeface="Poppins" charset="0"/>
                         <a:cs typeface="Poppins" charset="0"/>
                       </a:endParaRPr>
                     </a:p>
                   </a:txBody>
-                  <a:tcPr marL="46800" marR="46800" marT="46800" marB="46800" anchor="t">
+                  <a:tcPr marL="37800" marR="37800" marT="37800" marB="37800" anchor="t">
                     <a:lnL w="0" cap="flat" cmpd="sng" algn="ctr">
                       <a:noFill/>
                     </a:lnL>
@@ -21115,12 +21738,12 @@
                     <a:p>
                       <a:pPr algn="l" indent="0" marL="0">
                         <a:lnSpc>
-                          <a:spcPts val="898"/>
+                          <a:spcPts val="884"/>
                         </a:lnSpc>
                         <a:buNone/>
                       </a:pPr>
                       <a:r>
-                        <a:rPr lang="en-US" sz="660" dirty="0">
+                        <a:rPr lang="en-US" sz="650" dirty="0">
                           <a:solidFill>
                             <a:srgbClr val="4A5565"/>
                           </a:solidFill>
@@ -21130,14 +21753,14 @@
                         </a:rPr>
                         <a:t>Buy the owner databases</a:t>
                       </a:r>
-                      <a:endParaRPr lang="en-US" sz="660" dirty="0">
+                      <a:endParaRPr lang="en-US" sz="650" dirty="0">
                         <a:latin typeface="Poppins" charset="0"/>
                         <a:ea typeface="Poppins" charset="0"/>
                         <a:cs typeface="Poppins" charset="0"/>
                       </a:endParaRPr>
                     </a:p>
                   </a:txBody>
-                  <a:tcPr marL="46800" marR="46800" marT="46800" marB="46800" anchor="t">
+                  <a:tcPr marL="37800" marR="37800" marT="37800" marB="37800" anchor="t">
                     <a:lnL w="0" cap="flat" cmpd="sng" algn="ctr">
                       <a:noFill/>
                     </a:lnL>
@@ -21168,12 +21791,12 @@
                     <a:p>
                       <a:pPr algn="l" indent="0" marL="0">
                         <a:lnSpc>
-                          <a:spcPts val="898"/>
+                          <a:spcPts val="884"/>
                         </a:lnSpc>
                         <a:buNone/>
                       </a:pPr>
                       <a:r>
-                        <a:rPr lang="en-US" sz="660" dirty="0">
+                        <a:rPr lang="en-US" sz="650" dirty="0">
                           <a:solidFill>
                             <a:srgbClr val="4A5565"/>
                           </a:solidFill>
@@ -21183,14 +21806,14 @@
                         </a:rPr>
                         <a:t>Tap That</a:t>
                       </a:r>
-                      <a:endParaRPr lang="en-US" sz="660" dirty="0">
+                      <a:endParaRPr lang="en-US" sz="650" dirty="0">
                         <a:latin typeface="Poppins" charset="0"/>
                         <a:ea typeface="Poppins" charset="0"/>
                         <a:cs typeface="Poppins" charset="0"/>
                       </a:endParaRPr>
                     </a:p>
                   </a:txBody>
-                  <a:tcPr marL="46800" marR="46800" marT="46800" marB="46800" anchor="t">
+                  <a:tcPr marL="37800" marR="37800" marT="37800" marB="37800" anchor="t">
                     <a:lnL w="0" cap="flat" cmpd="sng" algn="ctr">
                       <a:noFill/>
                     </a:lnL>
@@ -21215,7 +21838,7 @@
                   </a:tcPr>
                 </a:tc>
               </a:tr>
-              <a:tr h="229682">
+              <a:tr h="221433">
                 <a:tc>
                   <a:txBody>
                     <a:bodyPr/>
@@ -21223,12 +21846,12 @@
                     <a:p>
                       <a:pPr algn="l" indent="0" marL="0">
                         <a:lnSpc>
-                          <a:spcPts val="898"/>
+                          <a:spcPts val="884"/>
                         </a:lnSpc>
                         <a:buNone/>
                       </a:pPr>
                       <a:r>
-                        <a:rPr lang="en-US" sz="660" b="1" dirty="0">
+                        <a:rPr lang="en-US" sz="650" b="1" dirty="0">
                           <a:solidFill>
                             <a:srgbClr val="0E171F"/>
                           </a:solidFill>
@@ -21238,14 +21861,14 @@
                         </a:rPr>
                         <a:t>Benchy</a:t>
                       </a:r>
-                      <a:endParaRPr lang="en-US" sz="660" dirty="0">
+                      <a:endParaRPr lang="en-US" sz="650" dirty="0">
                         <a:latin typeface="Poppins" charset="0"/>
                         <a:ea typeface="Poppins" charset="0"/>
                         <a:cs typeface="Poppins" charset="0"/>
                       </a:endParaRPr>
                     </a:p>
                   </a:txBody>
-                  <a:tcPr marL="46800" marR="46800" marT="46800" marB="46800" anchor="t">
+                  <a:tcPr marL="37800" marR="37800" marT="37800" marB="37800" anchor="t">
                     <a:lnL w="0" cap="flat" cmpd="sng" algn="ctr">
                       <a:noFill/>
                     </a:lnL>
@@ -21276,12 +21899,12 @@
                     <a:p>
                       <a:pPr algn="l" indent="0" marL="0">
                         <a:lnSpc>
-                          <a:spcPts val="898"/>
+                          <a:spcPts val="884"/>
                         </a:lnSpc>
                         <a:buNone/>
                       </a:pPr>
                       <a:r>
-                        <a:rPr lang="en-US" sz="660" dirty="0">
+                        <a:rPr lang="en-US" sz="650" dirty="0">
                           <a:solidFill>
                             <a:srgbClr val="4A5565"/>
                           </a:solidFill>
@@ -21291,14 +21914,14 @@
                         </a:rPr>
                         <a:t>Official partnership and database</a:t>
                       </a:r>
-                      <a:endParaRPr lang="en-US" sz="660" dirty="0">
+                      <a:endParaRPr lang="en-US" sz="650" dirty="0">
                         <a:latin typeface="Poppins" charset="0"/>
                         <a:ea typeface="Poppins" charset="0"/>
                         <a:cs typeface="Poppins" charset="0"/>
                       </a:endParaRPr>
                     </a:p>
                   </a:txBody>
-                  <a:tcPr marL="46800" marR="46800" marT="46800" marB="46800" anchor="t">
+                  <a:tcPr marL="37800" marR="37800" marT="37800" marB="37800" anchor="t">
                     <a:lnL w="0" cap="flat" cmpd="sng" algn="ctr">
                       <a:noFill/>
                     </a:lnL>
@@ -21329,12 +21952,12 @@
                     <a:p>
                       <a:pPr algn="l" indent="0" marL="0">
                         <a:lnSpc>
-                          <a:spcPts val="898"/>
+                          <a:spcPts val="884"/>
                         </a:lnSpc>
                         <a:buNone/>
                       </a:pPr>
                       <a:r>
-                        <a:rPr lang="en-US" sz="660" dirty="0">
+                        <a:rPr lang="en-US" sz="650" dirty="0">
                           <a:solidFill>
                             <a:srgbClr val="4A5565"/>
                           </a:solidFill>
@@ -21344,14 +21967,14 @@
                         </a:rPr>
                         <a:t>Tap That</a:t>
                       </a:r>
-                      <a:endParaRPr lang="en-US" sz="660" dirty="0">
+                      <a:endParaRPr lang="en-US" sz="650" dirty="0">
                         <a:latin typeface="Poppins" charset="0"/>
                         <a:ea typeface="Poppins" charset="0"/>
                         <a:cs typeface="Poppins" charset="0"/>
                       </a:endParaRPr>
                     </a:p>
                   </a:txBody>
-                  <a:tcPr marL="46800" marR="46800" marT="46800" marB="46800" anchor="t">
+                  <a:tcPr marL="37800" marR="37800" marT="37800" marB="37800" anchor="t">
                     <a:lnL w="0" cap="flat" cmpd="sng" algn="ctr">
                       <a:noFill/>
                     </a:lnL>
@@ -21376,7 +21999,7 @@
                   </a:tcPr>
                 </a:tc>
               </a:tr>
-              <a:tr h="229682">
+              <a:tr h="221433">
                 <a:tc>
                   <a:txBody>
                     <a:bodyPr/>
@@ -21384,12 +22007,12 @@
                     <a:p>
                       <a:pPr algn="l" indent="0" marL="0">
                         <a:lnSpc>
-                          <a:spcPts val="898"/>
+                          <a:spcPts val="884"/>
                         </a:lnSpc>
                         <a:buNone/>
                       </a:pPr>
                       <a:r>
-                        <a:rPr lang="en-US" sz="660" b="1" dirty="0">
+                        <a:rPr lang="en-US" sz="650" b="1" dirty="0">
                           <a:solidFill>
                             <a:srgbClr val="0E171F"/>
                           </a:solidFill>
@@ -21399,14 +22022,14 @@
                         </a:rPr>
                         <a:t>Mark's venues</a:t>
                       </a:r>
-                      <a:endParaRPr lang="en-US" sz="660" dirty="0">
+                      <a:endParaRPr lang="en-US" sz="650" dirty="0">
                         <a:latin typeface="Poppins" charset="0"/>
                         <a:ea typeface="Poppins" charset="0"/>
                         <a:cs typeface="Poppins" charset="0"/>
                       </a:endParaRPr>
                     </a:p>
                   </a:txBody>
-                  <a:tcPr marL="46800" marR="46800" marT="46800" marB="46800" anchor="t">
+                  <a:tcPr marL="37800" marR="37800" marT="37800" marB="37800" anchor="t">
                     <a:lnL w="0" cap="flat" cmpd="sng" algn="ctr">
                       <a:noFill/>
                     </a:lnL>
@@ -21437,12 +22060,12 @@
                     <a:p>
                       <a:pPr algn="l" indent="0" marL="0">
                         <a:lnSpc>
-                          <a:spcPts val="898"/>
+                          <a:spcPts val="884"/>
                         </a:lnSpc>
                         <a:buNone/>
                       </a:pPr>
                       <a:r>
-                        <a:rPr lang="en-US" sz="660" dirty="0">
+                        <a:rPr lang="en-US" sz="650" dirty="0">
                           <a:solidFill>
                             <a:srgbClr val="4A5565"/>
                           </a:solidFill>
@@ -21452,14 +22075,14 @@
                         </a:rPr>
                         <a:t>About 300 weddings a year across two venues</a:t>
                       </a:r>
-                      <a:endParaRPr lang="en-US" sz="660" dirty="0">
+                      <a:endParaRPr lang="en-US" sz="650" dirty="0">
                         <a:latin typeface="Poppins" charset="0"/>
                         <a:ea typeface="Poppins" charset="0"/>
                         <a:cs typeface="Poppins" charset="0"/>
                       </a:endParaRPr>
                     </a:p>
                   </a:txBody>
-                  <a:tcPr marL="46800" marR="46800" marT="46800" marB="46800" anchor="t">
+                  <a:tcPr marL="37800" marR="37800" marT="37800" marB="37800" anchor="t">
                     <a:lnL w="0" cap="flat" cmpd="sng" algn="ctr">
                       <a:noFill/>
                     </a:lnL>
@@ -21490,12 +22113,12 @@
                     <a:p>
                       <a:pPr algn="l" indent="0" marL="0">
                         <a:lnSpc>
-                          <a:spcPts val="898"/>
+                          <a:spcPts val="884"/>
                         </a:lnSpc>
                         <a:buNone/>
                       </a:pPr>
                       <a:r>
-                        <a:rPr lang="en-US" sz="660" dirty="0">
+                        <a:rPr lang="en-US" sz="650" dirty="0">
                           <a:solidFill>
                             <a:srgbClr val="4A5565"/>
                           </a:solidFill>
@@ -21505,14 +22128,14 @@
                         </a:rPr>
                         <a:t>Clent</a:t>
                       </a:r>
-                      <a:endParaRPr lang="en-US" sz="660" dirty="0">
+                      <a:endParaRPr lang="en-US" sz="650" dirty="0">
                         <a:latin typeface="Poppins" charset="0"/>
                         <a:ea typeface="Poppins" charset="0"/>
                         <a:cs typeface="Poppins" charset="0"/>
                       </a:endParaRPr>
                     </a:p>
                   </a:txBody>
-                  <a:tcPr marL="46800" marR="46800" marT="46800" marB="46800" anchor="t">
+                  <a:tcPr marL="37800" marR="37800" marT="37800" marB="37800" anchor="t">
                     <a:lnL w="0" cap="flat" cmpd="sng" algn="ctr">
                       <a:noFill/>
                     </a:lnL>
@@ -21537,7 +22160,7 @@
                   </a:tcPr>
                 </a:tc>
               </a:tr>
-              <a:tr h="229682">
+              <a:tr h="221433">
                 <a:tc>
                   <a:txBody>
                     <a:bodyPr/>
@@ -21545,12 +22168,12 @@
                     <a:p>
                       <a:pPr algn="l" indent="0" marL="0">
                         <a:lnSpc>
-                          <a:spcPts val="898"/>
+                          <a:spcPts val="884"/>
                         </a:lnSpc>
                         <a:buNone/>
                       </a:pPr>
                       <a:r>
-                        <a:rPr lang="en-US" sz="660" b="1" dirty="0">
+                        <a:rPr lang="en-US" sz="650" b="1" dirty="0">
                           <a:solidFill>
                             <a:srgbClr val="0E171F"/>
                           </a:solidFill>
@@ -21560,14 +22183,14 @@
                         </a:rPr>
                         <a:t>Zip water contacts</a:t>
                       </a:r>
-                      <a:endParaRPr lang="en-US" sz="660" dirty="0">
+                      <a:endParaRPr lang="en-US" sz="650" dirty="0">
                         <a:latin typeface="Poppins" charset="0"/>
                         <a:ea typeface="Poppins" charset="0"/>
                         <a:cs typeface="Poppins" charset="0"/>
                       </a:endParaRPr>
                     </a:p>
                   </a:txBody>
-                  <a:tcPr marL="46800" marR="46800" marT="46800" marB="46800" anchor="t">
+                  <a:tcPr marL="37800" marR="37800" marT="37800" marB="37800" anchor="t">
                     <a:lnL w="0" cap="flat" cmpd="sng" algn="ctr">
                       <a:noFill/>
                     </a:lnL>
@@ -21598,12 +22221,12 @@
                     <a:p>
                       <a:pPr algn="l" indent="0" marL="0">
                         <a:lnSpc>
-                          <a:spcPts val="898"/>
+                          <a:spcPts val="884"/>
                         </a:lnSpc>
                         <a:buNone/>
                       </a:pPr>
                       <a:r>
-                        <a:rPr lang="en-US" sz="660" dirty="0">
+                        <a:rPr lang="en-US" sz="650" dirty="0">
                           <a:solidFill>
                             <a:srgbClr val="4A5565"/>
                           </a:solidFill>
@@ -21613,14 +22236,14 @@
                         </a:rPr>
                         <a:t>About 1,000 distribution points</a:t>
                       </a:r>
-                      <a:endParaRPr lang="en-US" sz="660" dirty="0">
+                      <a:endParaRPr lang="en-US" sz="650" dirty="0">
                         <a:latin typeface="Poppins" charset="0"/>
                         <a:ea typeface="Poppins" charset="0"/>
                         <a:cs typeface="Poppins" charset="0"/>
                       </a:endParaRPr>
                     </a:p>
                   </a:txBody>
-                  <a:tcPr marL="46800" marR="46800" marT="46800" marB="46800" anchor="t">
+                  <a:tcPr marL="37800" marR="37800" marT="37800" marB="37800" anchor="t">
                     <a:lnL w="0" cap="flat" cmpd="sng" algn="ctr">
                       <a:noFill/>
                     </a:lnL>
@@ -21651,12 +22274,12 @@
                     <a:p>
                       <a:pPr algn="l" indent="0" marL="0">
                         <a:lnSpc>
-                          <a:spcPts val="898"/>
+                          <a:spcPts val="884"/>
                         </a:lnSpc>
                         <a:buNone/>
                       </a:pPr>
                       <a:r>
-                        <a:rPr lang="en-US" sz="660" dirty="0">
+                        <a:rPr lang="en-US" sz="650" dirty="0">
                           <a:solidFill>
                             <a:srgbClr val="4A5565"/>
                           </a:solidFill>
@@ -21666,14 +22289,14 @@
                         </a:rPr>
                         <a:t>Clent</a:t>
                       </a:r>
-                      <a:endParaRPr lang="en-US" sz="660" dirty="0">
+                      <a:endParaRPr lang="en-US" sz="650" dirty="0">
                         <a:latin typeface="Poppins" charset="0"/>
                         <a:ea typeface="Poppins" charset="0"/>
                         <a:cs typeface="Poppins" charset="0"/>
                       </a:endParaRPr>
                     </a:p>
                   </a:txBody>
-                  <a:tcPr marL="46800" marR="46800" marT="46800" marB="46800" anchor="t">
+                  <a:tcPr marL="37800" marR="37800" marT="37800" marB="37800" anchor="t">
                     <a:lnL w="0" cap="flat" cmpd="sng" algn="ctr">
                       <a:noFill/>
                     </a:lnL>
@@ -21698,7 +22321,7 @@
                   </a:tcPr>
                 </a:tc>
               </a:tr>
-              <a:tr h="229682">
+              <a:tr h="333701">
                 <a:tc>
                   <a:txBody>
                     <a:bodyPr/>
@@ -21706,12 +22329,12 @@
                     <a:p>
                       <a:pPr algn="l" indent="0" marL="0">
                         <a:lnSpc>
-                          <a:spcPts val="898"/>
+                          <a:spcPts val="884"/>
                         </a:lnSpc>
                         <a:buNone/>
                       </a:pPr>
                       <a:r>
-                        <a:rPr lang="en-US" sz="660" b="1" dirty="0">
+                        <a:rPr lang="en-US" sz="650" b="1" dirty="0">
                           <a:solidFill>
                             <a:srgbClr val="0E171F"/>
                           </a:solidFill>
@@ -21721,14 +22344,14 @@
                         </a:rPr>
                         <a:t>Value H2O</a:t>
                       </a:r>
-                      <a:endParaRPr lang="en-US" sz="660" dirty="0">
+                      <a:endParaRPr lang="en-US" sz="650" dirty="0">
                         <a:latin typeface="Poppins" charset="0"/>
                         <a:ea typeface="Poppins" charset="0"/>
                         <a:cs typeface="Poppins" charset="0"/>
                       </a:endParaRPr>
                     </a:p>
                   </a:txBody>
-                  <a:tcPr marL="46800" marR="46800" marT="46800" marB="46800" anchor="t">
+                  <a:tcPr marL="37800" marR="37800" marT="37800" marB="37800" anchor="t">
                     <a:lnL w="0" cap="flat" cmpd="sng" algn="ctr">
                       <a:noFill/>
                     </a:lnL>
@@ -21759,12 +22382,12 @@
                     <a:p>
                       <a:pPr algn="l" indent="0" marL="0">
                         <a:lnSpc>
-                          <a:spcPts val="898"/>
+                          <a:spcPts val="884"/>
                         </a:lnSpc>
                         <a:buNone/>
                       </a:pPr>
                       <a:r>
-                        <a:rPr lang="en-US" sz="660" dirty="0">
+                        <a:rPr lang="en-US" sz="650" dirty="0">
                           <a:solidFill>
                             <a:srgbClr val="4A5565"/>
                           </a:solidFill>
@@ -21772,16 +22395,16 @@
                           <a:ea typeface="Poppins" pitchFamily="34" charset="-122"/>
                           <a:cs typeface="Poppins" pitchFamily="34" charset="-120"/>
                         </a:rPr>
-                        <a:t>About 10,000 distribution points east coast, 10 technicians in the field</a:t>
+                        <a:t>About 10,000 SME water-cooler sites on the east coast, 10 techs already in the field. Techs introduce the system on a service visit</a:t>
                       </a:r>
-                      <a:endParaRPr lang="en-US" sz="660" dirty="0">
+                      <a:endParaRPr lang="en-US" sz="650" dirty="0">
                         <a:latin typeface="Poppins" charset="0"/>
                         <a:ea typeface="Poppins" charset="0"/>
                         <a:cs typeface="Poppins" charset="0"/>
                       </a:endParaRPr>
                     </a:p>
                   </a:txBody>
-                  <a:tcPr marL="46800" marR="46800" marT="46800" marB="46800" anchor="t">
+                  <a:tcPr marL="37800" marR="37800" marT="37800" marB="37800" anchor="t">
                     <a:lnL w="0" cap="flat" cmpd="sng" algn="ctr">
                       <a:noFill/>
                     </a:lnL>
@@ -21812,12 +22435,12 @@
                     <a:p>
                       <a:pPr algn="l" indent="0" marL="0">
                         <a:lnSpc>
-                          <a:spcPts val="898"/>
+                          <a:spcPts val="884"/>
                         </a:lnSpc>
                         <a:buNone/>
                       </a:pPr>
                       <a:r>
-                        <a:rPr lang="en-US" sz="660" dirty="0">
+                        <a:rPr lang="en-US" sz="650" dirty="0">
                           <a:solidFill>
                             <a:srgbClr val="4A5565"/>
                           </a:solidFill>
@@ -21827,14 +22450,14 @@
                         </a:rPr>
                         <a:t>Clent</a:t>
                       </a:r>
-                      <a:endParaRPr lang="en-US" sz="660" dirty="0">
+                      <a:endParaRPr lang="en-US" sz="650" dirty="0">
                         <a:latin typeface="Poppins" charset="0"/>
                         <a:ea typeface="Poppins" charset="0"/>
                         <a:cs typeface="Poppins" charset="0"/>
                       </a:endParaRPr>
                     </a:p>
                   </a:txBody>
-                  <a:tcPr marL="46800" marR="46800" marT="46800" marB="46800" anchor="t">
+                  <a:tcPr marL="37800" marR="37800" marT="37800" marB="37800" anchor="t">
                     <a:lnL w="0" cap="flat" cmpd="sng" algn="ctr">
                       <a:noFill/>
                     </a:lnL>
@@ -21859,7 +22482,7 @@
                   </a:tcPr>
                 </a:tc>
               </a:tr>
-              <a:tr h="343677">
+              <a:tr h="333701">
                 <a:tc>
                   <a:txBody>
                     <a:bodyPr/>
@@ -21867,12 +22490,12 @@
                     <a:p>
                       <a:pPr algn="l" indent="0" marL="0">
                         <a:lnSpc>
-                          <a:spcPts val="898"/>
+                          <a:spcPts val="884"/>
                         </a:lnSpc>
                         <a:buNone/>
                       </a:pPr>
                       <a:r>
-                        <a:rPr lang="en-US" sz="660" b="1" dirty="0">
+                        <a:rPr lang="en-US" sz="650" b="1" dirty="0">
                           <a:solidFill>
                             <a:srgbClr val="0E171F"/>
                           </a:solidFill>
@@ -21882,14 +22505,14 @@
                         </a:rPr>
                         <a:t>Outdoor kitchen makers</a:t>
                       </a:r>
-                      <a:endParaRPr lang="en-US" sz="660" dirty="0">
+                      <a:endParaRPr lang="en-US" sz="650" dirty="0">
                         <a:latin typeface="Poppins" charset="0"/>
                         <a:ea typeface="Poppins" charset="0"/>
                         <a:cs typeface="Poppins" charset="0"/>
                       </a:endParaRPr>
                     </a:p>
                   </a:txBody>
-                  <a:tcPr marL="46800" marR="46800" marT="46800" marB="46800" anchor="t">
+                  <a:tcPr marL="37800" marR="37800" marT="37800" marB="37800" anchor="t">
                     <a:lnL w="0" cap="flat" cmpd="sng" algn="ctr">
                       <a:noFill/>
                     </a:lnL>
@@ -21920,12 +22543,12 @@
                     <a:p>
                       <a:pPr algn="l" indent="0" marL="0">
                         <a:lnSpc>
-                          <a:spcPts val="898"/>
+                          <a:spcPts val="884"/>
                         </a:lnSpc>
                         <a:buNone/>
                       </a:pPr>
                       <a:r>
-                        <a:rPr lang="en-US" sz="660" dirty="0">
+                        <a:rPr lang="en-US" sz="650" dirty="0">
                           <a:solidFill>
                             <a:srgbClr val="4A5565"/>
                           </a:solidFill>
@@ -21933,16 +22556,16 @@
                           <a:ea typeface="Poppins" pitchFamily="34" charset="-122"/>
                           <a:cs typeface="Poppins" pitchFamily="34" charset="-120"/>
                         </a:rPr>
-                        <a:t>A keg-and-tap unit specified as a standard inclusion. Visuals and demand test first</a:t>
+                        <a:t>A keg-in-fridge tap unit as a standard inclusion. Visuals first, test demand on social, then talk manufacturing</a:t>
                       </a:r>
-                      <a:endParaRPr lang="en-US" sz="660" dirty="0">
+                      <a:endParaRPr lang="en-US" sz="650" dirty="0">
                         <a:latin typeface="Poppins" charset="0"/>
                         <a:ea typeface="Poppins" charset="0"/>
                         <a:cs typeface="Poppins" charset="0"/>
                       </a:endParaRPr>
                     </a:p>
                   </a:txBody>
-                  <a:tcPr marL="46800" marR="46800" marT="46800" marB="46800" anchor="t">
+                  <a:tcPr marL="37800" marR="37800" marT="37800" marB="37800" anchor="t">
                     <a:lnL w="0" cap="flat" cmpd="sng" algn="ctr">
                       <a:noFill/>
                     </a:lnL>
@@ -21973,12 +22596,12 @@
                     <a:p>
                       <a:pPr algn="l" indent="0" marL="0">
                         <a:lnSpc>
-                          <a:spcPts val="898"/>
+                          <a:spcPts val="884"/>
                         </a:lnSpc>
                         <a:buNone/>
                       </a:pPr>
                       <a:r>
-                        <a:rPr lang="en-US" sz="660" dirty="0">
+                        <a:rPr lang="en-US" sz="650" dirty="0">
                           <a:solidFill>
                             <a:srgbClr val="4A5565"/>
                           </a:solidFill>
@@ -21986,16 +22609,16 @@
                           <a:ea typeface="Poppins" pitchFamily="34" charset="-122"/>
                           <a:cs typeface="Poppins" pitchFamily="34" charset="-120"/>
                         </a:rPr>
-                        <a:t>Clent</a:t>
+                        <a:t>Christy</a:t>
                       </a:r>
-                      <a:endParaRPr lang="en-US" sz="660" dirty="0">
+                      <a:endParaRPr lang="en-US" sz="650" dirty="0">
                         <a:latin typeface="Poppins" charset="0"/>
                         <a:ea typeface="Poppins" charset="0"/>
                         <a:cs typeface="Poppins" charset="0"/>
                       </a:endParaRPr>
                     </a:p>
                   </a:txBody>
-                  <a:tcPr marL="46800" marR="46800" marT="46800" marB="46800" anchor="t">
+                  <a:tcPr marL="37800" marR="37800" marT="37800" marB="37800" anchor="t">
                     <a:lnL w="0" cap="flat" cmpd="sng" algn="ctr">
                       <a:noFill/>
                     </a:lnL>
@@ -22020,7 +22643,7 @@
                   </a:tcPr>
                 </a:tc>
               </a:tr>
-              <a:tr h="343677">
+              <a:tr h="221433">
                 <a:tc>
                   <a:txBody>
                     <a:bodyPr/>
@@ -22028,12 +22651,12 @@
                     <a:p>
                       <a:pPr algn="l" indent="0" marL="0">
                         <a:lnSpc>
-                          <a:spcPts val="898"/>
+                          <a:spcPts val="884"/>
                         </a:lnSpc>
                         <a:buNone/>
                       </a:pPr>
                       <a:r>
-                        <a:rPr lang="en-US" sz="660" b="1" dirty="0">
+                        <a:rPr lang="en-US" sz="650" b="1" dirty="0">
                           <a:solidFill>
                             <a:srgbClr val="0E171F"/>
                           </a:solidFill>
@@ -22041,16 +22664,16 @@
                           <a:ea typeface="Poppins" pitchFamily="34" charset="-122"/>
                           <a:cs typeface="Poppins" pitchFamily="34" charset="-120"/>
                         </a:rPr>
-                        <a:t>Trades and installers</a:t>
+                        <a:t>Jim's Mowing</a:t>
                       </a:r>
-                      <a:endParaRPr lang="en-US" sz="660" dirty="0">
+                      <a:endParaRPr lang="en-US" sz="650" dirty="0">
                         <a:latin typeface="Poppins" charset="0"/>
                         <a:ea typeface="Poppins" charset="0"/>
                         <a:cs typeface="Poppins" charset="0"/>
                       </a:endParaRPr>
                     </a:p>
                   </a:txBody>
-                  <a:tcPr marL="46800" marR="46800" marT="46800" marB="46800" anchor="t">
+                  <a:tcPr marL="37800" marR="37800" marT="37800" marB="37800" anchor="t">
                     <a:lnL w="0" cap="flat" cmpd="sng" algn="ctr">
                       <a:noFill/>
                     </a:lnL>
@@ -22081,12 +22704,12 @@
                     <a:p>
                       <a:pPr algn="l" indent="0" marL="0">
                         <a:lnSpc>
-                          <a:spcPts val="898"/>
+                          <a:spcPts val="884"/>
                         </a:lnSpc>
                         <a:buNone/>
                       </a:pPr>
                       <a:r>
-                        <a:rPr lang="en-US" sz="660" dirty="0">
+                        <a:rPr lang="en-US" sz="650" dirty="0">
                           <a:solidFill>
                             <a:srgbClr val="4A5565"/>
                           </a:solidFill>
@@ -22094,16 +22717,16 @@
                           <a:ea typeface="Poppins" pitchFamily="34" charset="-122"/>
                           <a:cs typeface="Poppins" pitchFamily="34" charset="-120"/>
                         </a:rPr>
-                        <a:t>Plumbers and kitchen fitters as a referral force: card or QR, plus a kickback</a:t>
+                        <a:t>Backyard presence. Referral card in the van</a:t>
                       </a:r>
-                      <a:endParaRPr lang="en-US" sz="660" dirty="0">
+                      <a:endParaRPr lang="en-US" sz="650" dirty="0">
                         <a:latin typeface="Poppins" charset="0"/>
                         <a:ea typeface="Poppins" charset="0"/>
                         <a:cs typeface="Poppins" charset="0"/>
                       </a:endParaRPr>
                     </a:p>
                   </a:txBody>
-                  <a:tcPr marL="46800" marR="46800" marT="46800" marB="46800" anchor="t">
+                  <a:tcPr marL="37800" marR="37800" marT="37800" marB="37800" anchor="t">
                     <a:lnL w="0" cap="flat" cmpd="sng" algn="ctr">
                       <a:noFill/>
                     </a:lnL>
@@ -22134,12 +22757,12 @@
                     <a:p>
                       <a:pPr algn="l" indent="0" marL="0">
                         <a:lnSpc>
-                          <a:spcPts val="898"/>
+                          <a:spcPts val="884"/>
                         </a:lnSpc>
                         <a:buNone/>
                       </a:pPr>
                       <a:r>
-                        <a:rPr lang="en-US" sz="660" dirty="0">
+                        <a:rPr lang="en-US" sz="650" dirty="0">
                           <a:solidFill>
                             <a:srgbClr val="4A5565"/>
                           </a:solidFill>
@@ -22147,16 +22770,16 @@
                           <a:ea typeface="Poppins" pitchFamily="34" charset="-122"/>
                           <a:cs typeface="Poppins" pitchFamily="34" charset="-120"/>
                         </a:rPr>
-                        <a:t>Harry</a:t>
+                        <a:t>Clent</a:t>
                       </a:r>
-                      <a:endParaRPr lang="en-US" sz="660" dirty="0">
+                      <a:endParaRPr lang="en-US" sz="650" dirty="0">
                         <a:latin typeface="Poppins" charset="0"/>
                         <a:ea typeface="Poppins" charset="0"/>
                         <a:cs typeface="Poppins" charset="0"/>
                       </a:endParaRPr>
                     </a:p>
                   </a:txBody>
-                  <a:tcPr marL="46800" marR="46800" marT="46800" marB="46800" anchor="t">
+                  <a:tcPr marL="37800" marR="37800" marT="37800" marB="37800" anchor="t">
                     <a:lnL w="0" cap="flat" cmpd="sng" algn="ctr">
                       <a:noFill/>
                     </a:lnL>
@@ -22181,7 +22804,7 @@
                   </a:tcPr>
                 </a:tc>
               </a:tr>
-              <a:tr h="229682">
+              <a:tr h="221433">
                 <a:tc>
                   <a:txBody>
                     <a:bodyPr/>
@@ -22189,12 +22812,12 @@
                     <a:p>
                       <a:pPr algn="l" indent="0" marL="0">
                         <a:lnSpc>
-                          <a:spcPts val="898"/>
+                          <a:spcPts val="884"/>
                         </a:lnSpc>
                         <a:buNone/>
                       </a:pPr>
                       <a:r>
-                        <a:rPr lang="en-US" sz="660" b="1" dirty="0">
+                        <a:rPr lang="en-US" sz="650" b="1" dirty="0">
                           <a:solidFill>
                             <a:srgbClr val="0E171F"/>
                           </a:solidFill>
@@ -22202,16 +22825,16 @@
                           <a:ea typeface="Poppins" pitchFamily="34" charset="-122"/>
                           <a:cs typeface="Poppins" pitchFamily="34" charset="-120"/>
                         </a:rPr>
-                        <a:t>Cannery contact</a:t>
+                        <a:t>Trades and installers</a:t>
                       </a:r>
-                      <a:endParaRPr lang="en-US" sz="660" dirty="0">
+                      <a:endParaRPr lang="en-US" sz="650" dirty="0">
                         <a:latin typeface="Poppins" charset="0"/>
                         <a:ea typeface="Poppins" charset="0"/>
                         <a:cs typeface="Poppins" charset="0"/>
                       </a:endParaRPr>
                     </a:p>
                   </a:txBody>
-                  <a:tcPr marL="46800" marR="46800" marT="46800" marB="46800" anchor="t">
+                  <a:tcPr marL="37800" marR="37800" marT="37800" marB="37800" anchor="t">
                     <a:lnL w="0" cap="flat" cmpd="sng" algn="ctr">
                       <a:noFill/>
                     </a:lnL>
@@ -22242,12 +22865,12 @@
                     <a:p>
                       <a:pPr algn="l" indent="0" marL="0">
                         <a:lnSpc>
-                          <a:spcPts val="898"/>
+                          <a:spcPts val="884"/>
                         </a:lnSpc>
                         <a:buNone/>
                       </a:pPr>
                       <a:r>
-                        <a:rPr lang="en-US" sz="660" dirty="0">
+                        <a:rPr lang="en-US" sz="650" dirty="0">
                           <a:solidFill>
                             <a:srgbClr val="4A5565"/>
                           </a:solidFill>
@@ -22255,16 +22878,16 @@
                           <a:ea typeface="Poppins" pitchFamily="34" charset="-122"/>
                           <a:cs typeface="Poppins" pitchFamily="34" charset="-120"/>
                         </a:rPr>
-                        <a:t>Parked. Canning is not in Justin's plan</a:t>
+                        <a:t>Plumbers and kitchen fitters as a referral force: card or QR, plus a kickback</a:t>
                       </a:r>
-                      <a:endParaRPr lang="en-US" sz="660" dirty="0">
+                      <a:endParaRPr lang="en-US" sz="650" dirty="0">
                         <a:latin typeface="Poppins" charset="0"/>
                         <a:ea typeface="Poppins" charset="0"/>
                         <a:cs typeface="Poppins" charset="0"/>
                       </a:endParaRPr>
                     </a:p>
                   </a:txBody>
-                  <a:tcPr marL="46800" marR="46800" marT="46800" marB="46800" anchor="t">
+                  <a:tcPr marL="37800" marR="37800" marT="37800" marB="37800" anchor="t">
                     <a:lnL w="0" cap="flat" cmpd="sng" algn="ctr">
                       <a:noFill/>
                     </a:lnL>
@@ -22295,12 +22918,12 @@
                     <a:p>
                       <a:pPr algn="l" indent="0" marL="0">
                         <a:lnSpc>
-                          <a:spcPts val="898"/>
+                          <a:spcPts val="884"/>
                         </a:lnSpc>
                         <a:buNone/>
                       </a:pPr>
                       <a:r>
-                        <a:rPr lang="en-US" sz="660" dirty="0">
+                        <a:rPr lang="en-US" sz="650" dirty="0">
                           <a:solidFill>
                             <a:srgbClr val="4A5565"/>
                           </a:solidFill>
@@ -22308,16 +22931,16 @@
                           <a:ea typeface="Poppins" pitchFamily="34" charset="-122"/>
                           <a:cs typeface="Poppins" pitchFamily="34" charset="-120"/>
                         </a:rPr>
-                        <a:t>Clent</a:t>
+                        <a:t>Harry</a:t>
                       </a:r>
-                      <a:endParaRPr lang="en-US" sz="660" dirty="0">
+                      <a:endParaRPr lang="en-US" sz="650" dirty="0">
                         <a:latin typeface="Poppins" charset="0"/>
                         <a:ea typeface="Poppins" charset="0"/>
                         <a:cs typeface="Poppins" charset="0"/>
                       </a:endParaRPr>
                     </a:p>
                   </a:txBody>
-                  <a:tcPr marL="46800" marR="46800" marT="46800" marB="46800" anchor="t">
+                  <a:tcPr marL="37800" marR="37800" marT="37800" marB="37800" anchor="t">
                     <a:lnL w="0" cap="flat" cmpd="sng" algn="ctr">
                       <a:noFill/>
                     </a:lnL>
@@ -22342,7 +22965,7 @@
                   </a:tcPr>
                 </a:tc>
               </a:tr>
-              <a:tr h="229682">
+              <a:tr h="221433">
                 <a:tc>
                   <a:txBody>
                     <a:bodyPr/>
@@ -22350,12 +22973,12 @@
                     <a:p>
                       <a:pPr algn="l" indent="0" marL="0">
                         <a:lnSpc>
-                          <a:spcPts val="898"/>
+                          <a:spcPts val="884"/>
                         </a:lnSpc>
                         <a:buNone/>
                       </a:pPr>
                       <a:r>
-                        <a:rPr lang="en-US" sz="660" b="1" dirty="0">
+                        <a:rPr lang="en-US" sz="650" b="1" dirty="0">
                           <a:solidFill>
                             <a:srgbClr val="0E171F"/>
                           </a:solidFill>
@@ -22363,16 +22986,16 @@
                           <a:ea typeface="Poppins" pitchFamily="34" charset="-122"/>
                           <a:cs typeface="Poppins" pitchFamily="34" charset="-120"/>
                         </a:rPr>
-                        <a:t>JVPs and referral partners</a:t>
+                        <a:t>Cannery contact</a:t>
                       </a:r>
-                      <a:endParaRPr lang="en-US" sz="660" dirty="0">
+                      <a:endParaRPr lang="en-US" sz="650" dirty="0">
                         <a:latin typeface="Poppins" charset="0"/>
                         <a:ea typeface="Poppins" charset="0"/>
                         <a:cs typeface="Poppins" charset="0"/>
                       </a:endParaRPr>
                     </a:p>
                   </a:txBody>
-                  <a:tcPr marL="46800" marR="46800" marT="46800" marB="46800" anchor="t">
+                  <a:tcPr marL="37800" marR="37800" marT="37800" marB="37800" anchor="t">
                     <a:lnL w="0" cap="flat" cmpd="sng" algn="ctr">
                       <a:noFill/>
                     </a:lnL>
@@ -22403,12 +23026,12 @@
                     <a:p>
                       <a:pPr algn="l" indent="0" marL="0">
                         <a:lnSpc>
-                          <a:spcPts val="898"/>
+                          <a:spcPts val="884"/>
                         </a:lnSpc>
                         <a:buNone/>
                       </a:pPr>
                       <a:r>
-                        <a:rPr lang="en-US" sz="660" dirty="0">
+                        <a:rPr lang="en-US" sz="650" dirty="0">
                           <a:solidFill>
                             <a:srgbClr val="4A5565"/>
                           </a:solidFill>
@@ -22416,16 +23039,16 @@
                           <a:ea typeface="Poppins" pitchFamily="34" charset="-122"/>
                           <a:cs typeface="Poppins" pitchFamily="34" charset="-120"/>
                         </a:rPr>
-                        <a:t>List built, outreach started within three months</a:t>
+                        <a:t>Parked. Canning is not in Justin's plan</a:t>
                       </a:r>
-                      <a:endParaRPr lang="en-US" sz="660" dirty="0">
+                      <a:endParaRPr lang="en-US" sz="650" dirty="0">
                         <a:latin typeface="Poppins" charset="0"/>
                         <a:ea typeface="Poppins" charset="0"/>
                         <a:cs typeface="Poppins" charset="0"/>
                       </a:endParaRPr>
                     </a:p>
                   </a:txBody>
-                  <a:tcPr marL="46800" marR="46800" marT="46800" marB="46800" anchor="t">
+                  <a:tcPr marL="37800" marR="37800" marT="37800" marB="37800" anchor="t">
                     <a:lnL w="0" cap="flat" cmpd="sng" algn="ctr">
                       <a:noFill/>
                     </a:lnL>
@@ -22456,12 +23079,12 @@
                     <a:p>
                       <a:pPr algn="l" indent="0" marL="0">
                         <a:lnSpc>
-                          <a:spcPts val="898"/>
+                          <a:spcPts val="884"/>
                         </a:lnSpc>
                         <a:buNone/>
                       </a:pPr>
                       <a:r>
-                        <a:rPr lang="en-US" sz="660" dirty="0">
+                        <a:rPr lang="en-US" sz="650" dirty="0">
                           <a:solidFill>
                             <a:srgbClr val="4A5565"/>
                           </a:solidFill>
@@ -22469,16 +23092,16 @@
                           <a:ea typeface="Poppins" pitchFamily="34" charset="-122"/>
                           <a:cs typeface="Poppins" pitchFamily="34" charset="-120"/>
                         </a:rPr>
-                        <a:t>Harry</a:t>
+                        <a:t>Clent</a:t>
                       </a:r>
-                      <a:endParaRPr lang="en-US" sz="660" dirty="0">
+                      <a:endParaRPr lang="en-US" sz="650" dirty="0">
                         <a:latin typeface="Poppins" charset="0"/>
                         <a:ea typeface="Poppins" charset="0"/>
                         <a:cs typeface="Poppins" charset="0"/>
                       </a:endParaRPr>
                     </a:p>
                   </a:txBody>
-                  <a:tcPr marL="46800" marR="46800" marT="46800" marB="46800" anchor="t">
+                  <a:tcPr marL="37800" marR="37800" marT="37800" marB="37800" anchor="t">
                     <a:lnL w="0" cap="flat" cmpd="sng" algn="ctr">
                       <a:noFill/>
                     </a:lnL>
@@ -22503,7 +23126,7 @@
                   </a:tcPr>
                 </a:tc>
               </a:tr>
-              <a:tr h="229682">
+              <a:tr h="221433">
                 <a:tc>
                   <a:txBody>
                     <a:bodyPr/>
@@ -22511,12 +23134,12 @@
                     <a:p>
                       <a:pPr algn="l" indent="0" marL="0">
                         <a:lnSpc>
-                          <a:spcPts val="898"/>
+                          <a:spcPts val="884"/>
                         </a:lnSpc>
                         <a:buNone/>
                       </a:pPr>
                       <a:r>
-                        <a:rPr lang="en-US" sz="660" b="1" dirty="0">
+                        <a:rPr lang="en-US" sz="650" b="1" dirty="0">
                           <a:solidFill>
                             <a:srgbClr val="0E171F"/>
                           </a:solidFill>
@@ -22524,16 +23147,16 @@
                           <a:ea typeface="Poppins" pitchFamily="34" charset="-122"/>
                           <a:cs typeface="Poppins" pitchFamily="34" charset="-120"/>
                         </a:rPr>
-                        <a:t>Brand ambassadors</a:t>
+                        <a:t>JVPs and referral partners</a:t>
                       </a:r>
-                      <a:endParaRPr lang="en-US" sz="660" dirty="0">
+                      <a:endParaRPr lang="en-US" sz="650" dirty="0">
                         <a:latin typeface="Poppins" charset="0"/>
                         <a:ea typeface="Poppins" charset="0"/>
                         <a:cs typeface="Poppins" charset="0"/>
                       </a:endParaRPr>
                     </a:p>
                   </a:txBody>
-                  <a:tcPr marL="46800" marR="46800" marT="46800" marB="46800" anchor="t">
+                  <a:tcPr marL="37800" marR="37800" marT="37800" marB="37800" anchor="t">
                     <a:lnL w="0" cap="flat" cmpd="sng" algn="ctr">
                       <a:noFill/>
                     </a:lnL>
@@ -22564,12 +23187,12 @@
                     <a:p>
                       <a:pPr algn="l" indent="0" marL="0">
                         <a:lnSpc>
-                          <a:spcPts val="898"/>
+                          <a:spcPts val="884"/>
                         </a:lnSpc>
                         <a:buNone/>
                       </a:pPr>
                       <a:r>
-                        <a:rPr lang="en-US" sz="660" dirty="0">
+                        <a:rPr lang="en-US" sz="650" dirty="0">
                           <a:solidFill>
                             <a:srgbClr val="4A5565"/>
                           </a:solidFill>
@@ -22577,16 +23200,16 @@
                           <a:ea typeface="Poppins" pitchFamily="34" charset="-122"/>
                           <a:cs typeface="Poppins" pitchFamily="34" charset="-120"/>
                         </a:rPr>
-                        <a:t>Kurt, Troy, Mitch, Aden, Ash. UGC content ready to deploy</a:t>
+                        <a:t>List built, outreach started within three months</a:t>
                       </a:r>
-                      <a:endParaRPr lang="en-US" sz="660" dirty="0">
+                      <a:endParaRPr lang="en-US" sz="650" dirty="0">
                         <a:latin typeface="Poppins" charset="0"/>
                         <a:ea typeface="Poppins" charset="0"/>
                         <a:cs typeface="Poppins" charset="0"/>
                       </a:endParaRPr>
                     </a:p>
                   </a:txBody>
-                  <a:tcPr marL="46800" marR="46800" marT="46800" marB="46800" anchor="t">
+                  <a:tcPr marL="37800" marR="37800" marT="37800" marB="37800" anchor="t">
                     <a:lnL w="0" cap="flat" cmpd="sng" algn="ctr">
                       <a:noFill/>
                     </a:lnL>
@@ -22617,12 +23240,12 @@
                     <a:p>
                       <a:pPr algn="l" indent="0" marL="0">
                         <a:lnSpc>
-                          <a:spcPts val="898"/>
+                          <a:spcPts val="884"/>
                         </a:lnSpc>
                         <a:buNone/>
                       </a:pPr>
                       <a:r>
-                        <a:rPr lang="en-US" sz="660" dirty="0">
+                        <a:rPr lang="en-US" sz="650" dirty="0">
                           <a:solidFill>
                             <a:srgbClr val="4A5565"/>
                           </a:solidFill>
@@ -22632,14 +23255,14 @@
                         </a:rPr>
                         <a:t>Harry</a:t>
                       </a:r>
-                      <a:endParaRPr lang="en-US" sz="660" dirty="0">
+                      <a:endParaRPr lang="en-US" sz="650" dirty="0">
                         <a:latin typeface="Poppins" charset="0"/>
                         <a:ea typeface="Poppins" charset="0"/>
                         <a:cs typeface="Poppins" charset="0"/>
                       </a:endParaRPr>
                     </a:p>
                   </a:txBody>
-                  <a:tcPr marL="46800" marR="46800" marT="46800" marB="46800" anchor="t">
+                  <a:tcPr marL="37800" marR="37800" marT="37800" marB="37800" anchor="t">
                     <a:lnL w="0" cap="flat" cmpd="sng" algn="ctr">
                       <a:noFill/>
                     </a:lnL>
@@ -22664,19 +23287,180 @@
                   </a:tcPr>
                 </a:tc>
               </a:tr>
+              <a:tr h="221433">
+                <a:tc>
+                  <a:txBody>
+                    <a:bodyPr/>
+                    <a:lstStyle/>
+                    <a:p>
+                      <a:pPr algn="l" indent="0" marL="0">
+                        <a:lnSpc>
+                          <a:spcPts val="884"/>
+                        </a:lnSpc>
+                        <a:buNone/>
+                      </a:pPr>
+                      <a:r>
+                        <a:rPr lang="en-US" sz="650" b="1" dirty="0">
+                          <a:solidFill>
+                            <a:srgbClr val="0E171F"/>
+                          </a:solidFill>
+                          <a:latin typeface="Poppins" pitchFamily="34" charset="0"/>
+                          <a:ea typeface="Poppins" pitchFamily="34" charset="-122"/>
+                          <a:cs typeface="Poppins" pitchFamily="34" charset="-120"/>
+                        </a:rPr>
+                        <a:t>Brand ambassadors</a:t>
+                      </a:r>
+                      <a:endParaRPr lang="en-US" sz="650" dirty="0">
+                        <a:latin typeface="Poppins" charset="0"/>
+                        <a:ea typeface="Poppins" charset="0"/>
+                        <a:cs typeface="Poppins" charset="0"/>
+                      </a:endParaRPr>
+                    </a:p>
+                  </a:txBody>
+                  <a:tcPr marL="37800" marR="37800" marT="37800" marB="37800" anchor="t">
+                    <a:lnL w="0" cap="flat" cmpd="sng" algn="ctr">
+                      <a:noFill/>
+                    </a:lnL>
+                    <a:lnR w="0" cap="flat" cmpd="sng" algn="ctr">
+                      <a:noFill/>
+                    </a:lnR>
+                    <a:lnT w="0" cap="flat" cmpd="sng" algn="ctr">
+                      <a:noFill/>
+                    </a:lnT>
+                    <a:lnB w="7620" cap="flat" cmpd="sng" algn="ctr">
+                      <a:solidFill>
+                        <a:srgbClr val="E3E7EC"/>
+                      </a:solidFill>
+                      <a:prstDash val="solid"/>
+                      <a:round/>
+                      <a:headEnd type="none" w="med" len="med"/>
+                      <a:tailEnd type="none" w="med" len="med"/>
+                    </a:lnB>
+                    <a:solidFill>
+                      <a:srgbClr val="FFFFFF"/>
+                    </a:solidFill>
+                  </a:tcPr>
+                </a:tc>
+                <a:tc>
+                  <a:txBody>
+                    <a:bodyPr/>
+                    <a:lstStyle/>
+                    <a:p>
+                      <a:pPr algn="l" indent="0" marL="0">
+                        <a:lnSpc>
+                          <a:spcPts val="884"/>
+                        </a:lnSpc>
+                        <a:buNone/>
+                      </a:pPr>
+                      <a:r>
+                        <a:rPr lang="en-US" sz="650" dirty="0">
+                          <a:solidFill>
+                            <a:srgbClr val="4A5565"/>
+                          </a:solidFill>
+                          <a:latin typeface="Poppins" pitchFamily="34" charset="0"/>
+                          <a:ea typeface="Poppins" pitchFamily="34" charset="-122"/>
+                          <a:cs typeface="Poppins" pitchFamily="34" charset="-120"/>
+                        </a:rPr>
+                        <a:t>Kurt, Troy, Mitch, Aden, Ash. UGC content ready to deploy</a:t>
+                      </a:r>
+                      <a:endParaRPr lang="en-US" sz="650" dirty="0">
+                        <a:latin typeface="Poppins" charset="0"/>
+                        <a:ea typeface="Poppins" charset="0"/>
+                        <a:cs typeface="Poppins" charset="0"/>
+                      </a:endParaRPr>
+                    </a:p>
+                  </a:txBody>
+                  <a:tcPr marL="37800" marR="37800" marT="37800" marB="37800" anchor="t">
+                    <a:lnL w="0" cap="flat" cmpd="sng" algn="ctr">
+                      <a:noFill/>
+                    </a:lnL>
+                    <a:lnR w="0" cap="flat" cmpd="sng" algn="ctr">
+                      <a:noFill/>
+                    </a:lnR>
+                    <a:lnT w="0" cap="flat" cmpd="sng" algn="ctr">
+                      <a:noFill/>
+                    </a:lnT>
+                    <a:lnB w="7620" cap="flat" cmpd="sng" algn="ctr">
+                      <a:solidFill>
+                        <a:srgbClr val="E3E7EC"/>
+                      </a:solidFill>
+                      <a:prstDash val="solid"/>
+                      <a:round/>
+                      <a:headEnd type="none" w="med" len="med"/>
+                      <a:tailEnd type="none" w="med" len="med"/>
+                    </a:lnB>
+                    <a:solidFill>
+                      <a:srgbClr val="FFFFFF"/>
+                    </a:solidFill>
+                  </a:tcPr>
+                </a:tc>
+                <a:tc>
+                  <a:txBody>
+                    <a:bodyPr/>
+                    <a:lstStyle/>
+                    <a:p>
+                      <a:pPr algn="l" indent="0" marL="0">
+                        <a:lnSpc>
+                          <a:spcPts val="884"/>
+                        </a:lnSpc>
+                        <a:buNone/>
+                      </a:pPr>
+                      <a:r>
+                        <a:rPr lang="en-US" sz="650" dirty="0">
+                          <a:solidFill>
+                            <a:srgbClr val="4A5565"/>
+                          </a:solidFill>
+                          <a:latin typeface="Poppins" pitchFamily="34" charset="0"/>
+                          <a:ea typeface="Poppins" pitchFamily="34" charset="-122"/>
+                          <a:cs typeface="Poppins" pitchFamily="34" charset="-120"/>
+                        </a:rPr>
+                        <a:t>Harry</a:t>
+                      </a:r>
+                      <a:endParaRPr lang="en-US" sz="650" dirty="0">
+                        <a:latin typeface="Poppins" charset="0"/>
+                        <a:ea typeface="Poppins" charset="0"/>
+                        <a:cs typeface="Poppins" charset="0"/>
+                      </a:endParaRPr>
+                    </a:p>
+                  </a:txBody>
+                  <a:tcPr marL="37800" marR="37800" marT="37800" marB="37800" anchor="t">
+                    <a:lnL w="0" cap="flat" cmpd="sng" algn="ctr">
+                      <a:noFill/>
+                    </a:lnL>
+                    <a:lnR w="0" cap="flat" cmpd="sng" algn="ctr">
+                      <a:noFill/>
+                    </a:lnR>
+                    <a:lnT w="0" cap="flat" cmpd="sng" algn="ctr">
+                      <a:noFill/>
+                    </a:lnT>
+                    <a:lnB w="7620" cap="flat" cmpd="sng" algn="ctr">
+                      <a:solidFill>
+                        <a:srgbClr val="E3E7EC"/>
+                      </a:solidFill>
+                      <a:prstDash val="solid"/>
+                      <a:round/>
+                      <a:headEnd type="none" w="med" len="med"/>
+                      <a:tailEnd type="none" w="med" len="med"/>
+                    </a:lnB>
+                    <a:solidFill>
+                      <a:srgbClr val="FFFFFF"/>
+                    </a:solidFill>
+                  </a:tcPr>
+                </a:tc>
+              </a:tr>
             </a:tbl>
           </a:graphicData>
         </a:graphic>
       </p:graphicFrame>
       <p:sp>
         <p:nvSpPr>
-          <p:cNvPr id="75" name="Shape 70"/>
+          <p:cNvPr id="82" name="Shape 77"/>
           <p:cNvSpPr/>
           <p:nvPr/>
         </p:nvSpPr>
         <p:spPr>
           <a:xfrm>
-            <a:off x="4083925" y="7337776"/>
+            <a:off x="5298934" y="7337776"/>
             <a:ext cx="5736746" cy="0"/>
           </a:xfrm>
           <a:prstGeom prst="line">
@@ -22693,13 +23477,13 @@
       </p:sp>
       <p:sp>
         <p:nvSpPr>
-          <p:cNvPr id="76" name="Text 71"/>
+          <p:cNvPr id="83" name="Text 78"/>
           <p:cNvSpPr txBox="1"/>
           <p:nvPr/>
         </p:nvSpPr>
         <p:spPr>
           <a:xfrm>
-            <a:off x="4083925" y="7395376"/>
+            <a:off x="5298934" y="7395376"/>
             <a:ext cx="5736746" cy="120015"/>
           </a:xfrm>
           <a:prstGeom prst="rect">
@@ -22727,7 +23511,7 @@
                 <a:ea typeface="Poppins" pitchFamily="34" charset="-122"/>
                 <a:cs typeface="Poppins" pitchFamily="34" charset="-120"/>
               </a:rPr>
-              <a:t>Zip water and Value H2O are carried separately until the distribution figures are confirmed as one contact or two.</a:t>
+              <a:t>Named in the catch-ups, the 17 September prep and Justin's plan. The ambassadors are Justin's list.</a:t>
             </a:r>
             <a:endParaRPr lang="en-US" sz="700" dirty="0"/>
           </a:p>
@@ -22735,14 +23519,14 @@
       </p:sp>
       <p:sp>
         <p:nvSpPr>
-          <p:cNvPr id="77" name="Shape 72"/>
+          <p:cNvPr id="84" name="Shape 79"/>
           <p:cNvSpPr/>
           <p:nvPr/>
         </p:nvSpPr>
         <p:spPr>
           <a:xfrm>
-            <a:off x="10043770" y="4019303"/>
-            <a:ext cx="4752137" cy="3611288"/>
+            <a:off x="11258779" y="3786317"/>
+            <a:ext cx="3537128" cy="3844274"/>
           </a:xfrm>
           <a:prstGeom prst="rect">
             <a:avLst/>
@@ -22760,14 +23544,14 @@
       </p:sp>
       <p:sp>
         <p:nvSpPr>
-          <p:cNvPr id="78" name="Text 73"/>
+          <p:cNvPr id="85" name="Text 80"/>
           <p:cNvSpPr txBox="1"/>
           <p:nvPr/>
         </p:nvSpPr>
         <p:spPr>
           <a:xfrm>
-            <a:off x="10158970" y="4134503"/>
-            <a:ext cx="4521737" cy="112268"/>
+            <a:off x="11373979" y="3901517"/>
+            <a:ext cx="3306728" cy="112268"/>
           </a:xfrm>
           <a:prstGeom prst="rect">
             <a:avLst/>
@@ -22802,14 +23586,14 @@
       </p:sp>
       <p:sp>
         <p:nvSpPr>
-          <p:cNvPr id="79" name="Text 74"/>
+          <p:cNvPr id="86" name="Text 81"/>
           <p:cNvSpPr txBox="1"/>
           <p:nvPr/>
         </p:nvSpPr>
         <p:spPr>
           <a:xfrm>
-            <a:off x="10158970" y="4304371"/>
-            <a:ext cx="4521737" cy="308610"/>
+            <a:off x="11373979" y="4071385"/>
+            <a:ext cx="3306728" cy="462915"/>
           </a:xfrm>
           <a:prstGeom prst="rect">
             <a:avLst/>
@@ -22844,14 +23628,14 @@
       </p:sp>
       <p:sp>
         <p:nvSpPr>
-          <p:cNvPr id="80" name="Text 75"/>
+          <p:cNvPr id="87" name="Text 82"/>
           <p:cNvSpPr txBox="1"/>
           <p:nvPr/>
         </p:nvSpPr>
         <p:spPr>
           <a:xfrm>
-            <a:off x="10158970" y="4778581"/>
-            <a:ext cx="4521737" cy="617220"/>
+            <a:off x="11373979" y="4699900"/>
+            <a:ext cx="3306728" cy="617220"/>
           </a:xfrm>
           <a:prstGeom prst="rect">
             <a:avLst/>
@@ -22903,14 +23687,14 @@
       </p:sp>
       <p:sp>
         <p:nvSpPr>
-          <p:cNvPr id="81" name="Text 76"/>
+          <p:cNvPr id="88" name="Text 83"/>
           <p:cNvSpPr txBox="1"/>
           <p:nvPr/>
         </p:nvSpPr>
         <p:spPr>
           <a:xfrm>
-            <a:off x="10158970" y="5561401"/>
-            <a:ext cx="4521737" cy="462915"/>
+            <a:off x="11373979" y="5482720"/>
+            <a:ext cx="3306728" cy="617220"/>
           </a:xfrm>
           <a:prstGeom prst="rect">
             <a:avLst/>
@@ -22962,14 +23746,14 @@
       </p:sp>
       <p:sp>
         <p:nvSpPr>
-          <p:cNvPr id="82" name="Shape 77"/>
+          <p:cNvPr id="89" name="Shape 84"/>
           <p:cNvSpPr/>
           <p:nvPr/>
         </p:nvSpPr>
         <p:spPr>
           <a:xfrm>
-            <a:off x="10158970" y="7217761"/>
-            <a:ext cx="4521737" cy="0"/>
+            <a:off x="11373979" y="7217761"/>
+            <a:ext cx="3306728" cy="0"/>
           </a:xfrm>
           <a:prstGeom prst="line">
             <a:avLst/>
@@ -22985,14 +23769,14 @@
       </p:sp>
       <p:sp>
         <p:nvSpPr>
-          <p:cNvPr id="83" name="Text 78"/>
+          <p:cNvPr id="90" name="Text 85"/>
           <p:cNvSpPr txBox="1"/>
           <p:nvPr/>
         </p:nvSpPr>
         <p:spPr>
           <a:xfrm>
-            <a:off x="10158970" y="7275361"/>
-            <a:ext cx="4521737" cy="240030"/>
+            <a:off x="11373979" y="7275361"/>
+            <a:ext cx="3306728" cy="240030"/>
           </a:xfrm>
           <a:prstGeom prst="rect">
             <a:avLst/>
@@ -23027,7 +23811,7 @@
       </p:sp>
       <p:sp>
         <p:nvSpPr>
-          <p:cNvPr id="84" name="Shape 79"/>
+          <p:cNvPr id="91" name="Shape 86"/>
           <p:cNvSpPr/>
           <p:nvPr/>
         </p:nvSpPr>
@@ -23052,7 +23836,7 @@
       </p:sp>
       <p:sp>
         <p:nvSpPr>
-          <p:cNvPr id="85" name="Text 80"/>
+          <p:cNvPr id="92" name="Text 87"/>
           <p:cNvSpPr txBox="1"/>
           <p:nvPr/>
         </p:nvSpPr>
@@ -23132,15 +23916,15 @@
             <a:tbl>
               <a:tblPr/>
               <a:tblGrid>
-                <a:gridCol w="3563845"/>
-                <a:gridCol w="1006200"/>
-                <a:gridCol w="913262"/>
-                <a:gridCol w="964157"/>
-                <a:gridCol w="923958"/>
-                <a:gridCol w="1171424"/>
-                <a:gridCol w="838926"/>
+                <a:gridCol w="3425197"/>
+                <a:gridCol w="1025001"/>
+                <a:gridCol w="931992"/>
+                <a:gridCol w="1002650"/>
+                <a:gridCol w="963716"/>
+                <a:gridCol w="1213181"/>
+                <a:gridCol w="820036"/>
               </a:tblGrid>
-              <a:tr h="246728">
+              <a:tr h="204057">
                 <a:tc>
                   <a:txBody>
                     <a:bodyPr/>
@@ -23513,7 +24297,7 @@
                   </a:tcPr>
                 </a:tc>
               </a:tr>
-              <a:tr h="264025">
+              <a:tr h="221354">
                 <a:tc>
                   <a:txBody>
                     <a:bodyPr/>
@@ -23886,7 +24670,7 @@
                   </a:tcPr>
                 </a:tc>
               </a:tr>
-              <a:tr h="264025">
+              <a:tr h="221354">
                 <a:tc>
                   <a:txBody>
                     <a:bodyPr/>
@@ -24259,7 +25043,7 @@
                   </a:tcPr>
                 </a:tc>
               </a:tr>
-              <a:tr h="264025">
+              <a:tr h="221354">
                 <a:tc>
                   <a:txBody>
                     <a:bodyPr/>
@@ -24632,7 +25416,7 @@
                   </a:tcPr>
                 </a:tc>
               </a:tr>
-              <a:tr h="264025">
+              <a:tr h="221354">
                 <a:tc>
                   <a:txBody>
                     <a:bodyPr/>
@@ -25005,7 +25789,7 @@
                   </a:tcPr>
                 </a:tc>
               </a:tr>
-              <a:tr h="264025">
+              <a:tr h="221354">
                 <a:tc>
                   <a:txBody>
                     <a:bodyPr/>
@@ -25378,7 +26162,7 @@
                   </a:tcPr>
                 </a:tc>
               </a:tr>
-              <a:tr h="264025">
+              <a:tr h="221354">
                 <a:tc>
                   <a:txBody>
                     <a:bodyPr/>
@@ -25751,7 +26535,7 @@
                   </a:tcPr>
                 </a:tc>
               </a:tr>
-              <a:tr h="264025">
+              <a:tr h="221354">
                 <a:tc>
                   <a:txBody>
                     <a:bodyPr/>
@@ -26124,19 +26908,392 @@
                   </a:tcPr>
                 </a:tc>
               </a:tr>
+              <a:tr h="221354">
+                <a:tc>
+                  <a:txBody>
+                    <a:bodyPr/>
+                    <a:lstStyle/>
+                    <a:p>
+                      <a:pPr algn="l" indent="0" marL="0">
+                        <a:lnSpc>
+                          <a:spcPts val="911"/>
+                        </a:lnSpc>
+                        <a:buNone/>
+                      </a:pPr>
+                      <a:r>
+                        <a:rPr lang="en-US" sz="670" dirty="0">
+                          <a:solidFill>
+                            <a:srgbClr val="4A5565"/>
+                          </a:solidFill>
+                          <a:latin typeface="Poppins" pitchFamily="34" charset="0"/>
+                          <a:ea typeface="Poppins" pitchFamily="34" charset="-122"/>
+                          <a:cs typeface="Poppins" pitchFamily="34" charset="-120"/>
+                        </a:rPr>
+                        <a:t>Engagement lead, weekly check-in</a:t>
+                      </a:r>
+                      <a:endParaRPr lang="en-US" sz="670" dirty="0">
+                        <a:latin typeface="Poppins" charset="0"/>
+                        <a:ea typeface="Poppins" charset="0"/>
+                        <a:cs typeface="Poppins" charset="0"/>
+                      </a:endParaRPr>
+                    </a:p>
+                  </a:txBody>
+                  <a:tcPr marL="50400" marR="50400" marT="50400" marB="50400" anchor="t">
+                    <a:lnL w="0" cap="flat" cmpd="sng" algn="ctr">
+                      <a:noFill/>
+                    </a:lnL>
+                    <a:lnR w="0" cap="flat" cmpd="sng" algn="ctr">
+                      <a:noFill/>
+                    </a:lnR>
+                    <a:lnT w="0" cap="flat" cmpd="sng" algn="ctr">
+                      <a:noFill/>
+                    </a:lnT>
+                    <a:lnB w="7620" cap="flat" cmpd="sng" algn="ctr">
+                      <a:solidFill>
+                        <a:srgbClr val="E3E7EC"/>
+                      </a:solidFill>
+                      <a:prstDash val="solid"/>
+                      <a:round/>
+                      <a:headEnd type="none" w="med" len="med"/>
+                      <a:tailEnd type="none" w="med" len="med"/>
+                    </a:lnB>
+                    <a:solidFill>
+                      <a:srgbClr val="FFFFFF"/>
+                    </a:solidFill>
+                  </a:tcPr>
+                </a:tc>
+                <a:tc>
+                  <a:txBody>
+                    <a:bodyPr/>
+                    <a:lstStyle/>
+                    <a:p>
+                      <a:pPr algn="ctr" indent="0" marL="0">
+                        <a:lnSpc>
+                          <a:spcPts val="911"/>
+                        </a:lnSpc>
+                        <a:buNone/>
+                      </a:pPr>
+                      <a:r>
+                        <a:rPr lang="en-US" sz="670" dirty="0">
+                          <a:solidFill>
+                            <a:srgbClr val="4A5565"/>
+                          </a:solidFill>
+                          <a:latin typeface="Poppins" pitchFamily="34" charset="0"/>
+                          <a:ea typeface="Poppins" pitchFamily="34" charset="-122"/>
+                          <a:cs typeface="Poppins" pitchFamily="34" charset="-120"/>
+                        </a:rPr>
+                        <a:t>C</a:t>
+                      </a:r>
+                      <a:endParaRPr lang="en-US" sz="670" dirty="0">
+                        <a:latin typeface="Poppins" charset="0"/>
+                        <a:ea typeface="Poppins" charset="0"/>
+                        <a:cs typeface="Poppins" charset="0"/>
+                      </a:endParaRPr>
+                    </a:p>
+                  </a:txBody>
+                  <a:tcPr marL="50400" marR="50400" marT="50400" marB="50400" anchor="t">
+                    <a:lnL w="0" cap="flat" cmpd="sng" algn="ctr">
+                      <a:noFill/>
+                    </a:lnL>
+                    <a:lnR w="0" cap="flat" cmpd="sng" algn="ctr">
+                      <a:noFill/>
+                    </a:lnR>
+                    <a:lnT w="0" cap="flat" cmpd="sng" algn="ctr">
+                      <a:noFill/>
+                    </a:lnT>
+                    <a:lnB w="7620" cap="flat" cmpd="sng" algn="ctr">
+                      <a:solidFill>
+                        <a:srgbClr val="E3E7EC"/>
+                      </a:solidFill>
+                      <a:prstDash val="solid"/>
+                      <a:round/>
+                      <a:headEnd type="none" w="med" len="med"/>
+                      <a:tailEnd type="none" w="med" len="med"/>
+                    </a:lnB>
+                    <a:solidFill>
+                      <a:srgbClr val="FFFFFF"/>
+                    </a:solidFill>
+                  </a:tcPr>
+                </a:tc>
+                <a:tc>
+                  <a:txBody>
+                    <a:bodyPr/>
+                    <a:lstStyle/>
+                    <a:p>
+                      <a:pPr algn="ctr" indent="0" marL="0">
+                        <a:lnSpc>
+                          <a:spcPts val="911"/>
+                        </a:lnSpc>
+                        <a:buNone/>
+                      </a:pPr>
+                      <a:r>
+                        <a:rPr lang="en-US" sz="670" dirty="0">
+                          <a:solidFill>
+                            <a:srgbClr val="4A5565"/>
+                          </a:solidFill>
+                          <a:latin typeface="Poppins" pitchFamily="34" charset="0"/>
+                          <a:ea typeface="Poppins" pitchFamily="34" charset="-122"/>
+                          <a:cs typeface="Poppins" pitchFamily="34" charset="-120"/>
+                        </a:rPr>
+                        <a:t>C</a:t>
+                      </a:r>
+                      <a:endParaRPr lang="en-US" sz="670" dirty="0">
+                        <a:latin typeface="Poppins" charset="0"/>
+                        <a:ea typeface="Poppins" charset="0"/>
+                        <a:cs typeface="Poppins" charset="0"/>
+                      </a:endParaRPr>
+                    </a:p>
+                  </a:txBody>
+                  <a:tcPr marL="50400" marR="50400" marT="50400" marB="50400" anchor="t">
+                    <a:lnL w="0" cap="flat" cmpd="sng" algn="ctr">
+                      <a:noFill/>
+                    </a:lnL>
+                    <a:lnR w="0" cap="flat" cmpd="sng" algn="ctr">
+                      <a:noFill/>
+                    </a:lnR>
+                    <a:lnT w="0" cap="flat" cmpd="sng" algn="ctr">
+                      <a:noFill/>
+                    </a:lnT>
+                    <a:lnB w="7620" cap="flat" cmpd="sng" algn="ctr">
+                      <a:solidFill>
+                        <a:srgbClr val="E3E7EC"/>
+                      </a:solidFill>
+                      <a:prstDash val="solid"/>
+                      <a:round/>
+                      <a:headEnd type="none" w="med" len="med"/>
+                      <a:tailEnd type="none" w="med" len="med"/>
+                    </a:lnB>
+                    <a:solidFill>
+                      <a:srgbClr val="FFFFFF"/>
+                    </a:solidFill>
+                  </a:tcPr>
+                </a:tc>
+                <a:tc>
+                  <a:txBody>
+                    <a:bodyPr/>
+                    <a:lstStyle/>
+                    <a:p>
+                      <a:pPr algn="ctr" indent="0" marL="0">
+                        <a:lnSpc>
+                          <a:spcPts val="911"/>
+                        </a:lnSpc>
+                        <a:buNone/>
+                      </a:pPr>
+                      <a:r>
+                        <a:rPr lang="en-US" sz="670" dirty="0">
+                          <a:solidFill>
+                            <a:srgbClr val="4A5565"/>
+                          </a:solidFill>
+                          <a:latin typeface="Poppins" pitchFamily="34" charset="0"/>
+                          <a:ea typeface="Poppins" pitchFamily="34" charset="-122"/>
+                          <a:cs typeface="Poppins" pitchFamily="34" charset="-120"/>
+                        </a:rPr>
+                        <a:t>C</a:t>
+                      </a:r>
+                      <a:endParaRPr lang="en-US" sz="670" dirty="0">
+                        <a:latin typeface="Poppins" charset="0"/>
+                        <a:ea typeface="Poppins" charset="0"/>
+                        <a:cs typeface="Poppins" charset="0"/>
+                      </a:endParaRPr>
+                    </a:p>
+                  </a:txBody>
+                  <a:tcPr marL="50400" marR="50400" marT="50400" marB="50400" anchor="t">
+                    <a:lnL w="0" cap="flat" cmpd="sng" algn="ctr">
+                      <a:noFill/>
+                    </a:lnL>
+                    <a:lnR w="0" cap="flat" cmpd="sng" algn="ctr">
+                      <a:noFill/>
+                    </a:lnR>
+                    <a:lnT w="0" cap="flat" cmpd="sng" algn="ctr">
+                      <a:noFill/>
+                    </a:lnT>
+                    <a:lnB w="7620" cap="flat" cmpd="sng" algn="ctr">
+                      <a:solidFill>
+                        <a:srgbClr val="E3E7EC"/>
+                      </a:solidFill>
+                      <a:prstDash val="solid"/>
+                      <a:round/>
+                      <a:headEnd type="none" w="med" len="med"/>
+                      <a:tailEnd type="none" w="med" len="med"/>
+                    </a:lnB>
+                    <a:solidFill>
+                      <a:srgbClr val="FFFFFF"/>
+                    </a:solidFill>
+                  </a:tcPr>
+                </a:tc>
+                <a:tc>
+                  <a:txBody>
+                    <a:bodyPr/>
+                    <a:lstStyle/>
+                    <a:p>
+                      <a:pPr algn="ctr" indent="0" marL="0">
+                        <a:lnSpc>
+                          <a:spcPts val="911"/>
+                        </a:lnSpc>
+                        <a:buNone/>
+                      </a:pPr>
+                      <a:r>
+                        <a:rPr lang="en-US" sz="670" dirty="0">
+                          <a:solidFill>
+                            <a:srgbClr val="4A5565"/>
+                          </a:solidFill>
+                          <a:latin typeface="Poppins" pitchFamily="34" charset="0"/>
+                          <a:ea typeface="Poppins" pitchFamily="34" charset="-122"/>
+                          <a:cs typeface="Poppins" pitchFamily="34" charset="-120"/>
+                        </a:rPr>
+                        <a:t>C</a:t>
+                      </a:r>
+                      <a:endParaRPr lang="en-US" sz="670" dirty="0">
+                        <a:latin typeface="Poppins" charset="0"/>
+                        <a:ea typeface="Poppins" charset="0"/>
+                        <a:cs typeface="Poppins" charset="0"/>
+                      </a:endParaRPr>
+                    </a:p>
+                  </a:txBody>
+                  <a:tcPr marL="50400" marR="50400" marT="50400" marB="50400" anchor="t">
+                    <a:lnL w="0" cap="flat" cmpd="sng" algn="ctr">
+                      <a:noFill/>
+                    </a:lnL>
+                    <a:lnR w="0" cap="flat" cmpd="sng" algn="ctr">
+                      <a:noFill/>
+                    </a:lnR>
+                    <a:lnT w="0" cap="flat" cmpd="sng" algn="ctr">
+                      <a:noFill/>
+                    </a:lnT>
+                    <a:lnB w="7620" cap="flat" cmpd="sng" algn="ctr">
+                      <a:solidFill>
+                        <a:srgbClr val="E3E7EC"/>
+                      </a:solidFill>
+                      <a:prstDash val="solid"/>
+                      <a:round/>
+                      <a:headEnd type="none" w="med" len="med"/>
+                      <a:tailEnd type="none" w="med" len="med"/>
+                    </a:lnB>
+                    <a:solidFill>
+                      <a:srgbClr val="FFFFFF"/>
+                    </a:solidFill>
+                  </a:tcPr>
+                </a:tc>
+                <a:tc>
+                  <a:txBody>
+                    <a:bodyPr/>
+                    <a:lstStyle/>
+                    <a:p>
+                      <a:pPr algn="ctr" indent="0" marL="0">
+                        <a:lnSpc>
+                          <a:spcPts val="911"/>
+                        </a:lnSpc>
+                        <a:buNone/>
+                      </a:pPr>
+                      <a:r>
+                        <a:rPr lang="en-US" sz="670" b="1" dirty="0">
+                          <a:solidFill>
+                            <a:srgbClr val="0E171F"/>
+                          </a:solidFill>
+                          <a:latin typeface="Poppins" pitchFamily="34" charset="0"/>
+                          <a:ea typeface="Poppins" pitchFamily="34" charset="-122"/>
+                          <a:cs typeface="Poppins" pitchFamily="34" charset="-120"/>
+                        </a:rPr>
+                        <a:t>A/R</a:t>
+                      </a:r>
+                      <a:endParaRPr lang="en-US" sz="670" dirty="0">
+                        <a:latin typeface="Poppins" charset="0"/>
+                        <a:ea typeface="Poppins" charset="0"/>
+                        <a:cs typeface="Poppins" charset="0"/>
+                      </a:endParaRPr>
+                    </a:p>
+                  </a:txBody>
+                  <a:tcPr marL="50400" marR="50400" marT="50400" marB="50400" anchor="t">
+                    <a:lnL w="0" cap="flat" cmpd="sng" algn="ctr">
+                      <a:noFill/>
+                    </a:lnL>
+                    <a:lnR w="0" cap="flat" cmpd="sng" algn="ctr">
+                      <a:noFill/>
+                    </a:lnR>
+                    <a:lnT w="0" cap="flat" cmpd="sng" algn="ctr">
+                      <a:noFill/>
+                    </a:lnT>
+                    <a:lnB w="7620" cap="flat" cmpd="sng" algn="ctr">
+                      <a:solidFill>
+                        <a:srgbClr val="E3E7EC"/>
+                      </a:solidFill>
+                      <a:prstDash val="solid"/>
+                      <a:round/>
+                      <a:headEnd type="none" w="med" len="med"/>
+                      <a:tailEnd type="none" w="med" len="med"/>
+                    </a:lnB>
+                    <a:solidFill>
+                      <a:srgbClr val="FFFFFF"/>
+                    </a:solidFill>
+                  </a:tcPr>
+                </a:tc>
+                <a:tc>
+                  <a:txBody>
+                    <a:bodyPr/>
+                    <a:lstStyle/>
+                    <a:p>
+                      <a:pPr algn="ctr" indent="0" marL="0">
+                        <a:lnSpc>
+                          <a:spcPts val="911"/>
+                        </a:lnSpc>
+                        <a:buNone/>
+                      </a:pPr>
+                      <a:r>
+                        <a:rPr lang="en-US" sz="670" dirty="0">
+                          <a:solidFill>
+                            <a:srgbClr val="4A5565"/>
+                          </a:solidFill>
+                          <a:latin typeface="Poppins" pitchFamily="34" charset="0"/>
+                          <a:ea typeface="Poppins" pitchFamily="34" charset="-122"/>
+                          <a:cs typeface="Poppins" pitchFamily="34" charset="-120"/>
+                        </a:rPr>
+                        <a:t>C</a:t>
+                      </a:r>
+                      <a:endParaRPr lang="en-US" sz="670" dirty="0">
+                        <a:latin typeface="Poppins" charset="0"/>
+                        <a:ea typeface="Poppins" charset="0"/>
+                        <a:cs typeface="Poppins" charset="0"/>
+                      </a:endParaRPr>
+                    </a:p>
+                  </a:txBody>
+                  <a:tcPr marL="50400" marR="50400" marT="50400" marB="50400" anchor="t">
+                    <a:lnL w="0" cap="flat" cmpd="sng" algn="ctr">
+                      <a:noFill/>
+                    </a:lnL>
+                    <a:lnR w="0" cap="flat" cmpd="sng" algn="ctr">
+                      <a:noFill/>
+                    </a:lnR>
+                    <a:lnT w="0" cap="flat" cmpd="sng" algn="ctr">
+                      <a:noFill/>
+                    </a:lnT>
+                    <a:lnB w="7620" cap="flat" cmpd="sng" algn="ctr">
+                      <a:solidFill>
+                        <a:srgbClr val="E3E7EC"/>
+                      </a:solidFill>
+                      <a:prstDash val="solid"/>
+                      <a:round/>
+                      <a:headEnd type="none" w="med" len="med"/>
+                      <a:tailEnd type="none" w="med" len="med"/>
+                    </a:lnB>
+                    <a:solidFill>
+                      <a:srgbClr val="FFFFFF"/>
+                    </a:solidFill>
+                  </a:tcPr>
+                </a:tc>
+              </a:tr>
             </a:tbl>
           </a:graphicData>
         </a:graphic>
       </p:graphicFrame>
       <p:sp>
         <p:nvSpPr>
-          <p:cNvPr id="87" name="Shape 81"/>
+          <p:cNvPr id="94" name="Shape 88"/>
           <p:cNvSpPr/>
           <p:nvPr/>
         </p:nvSpPr>
         <p:spPr>
           <a:xfrm>
-            <a:off x="438898" y="10183264"/>
+            <a:off x="438898" y="10063249"/>
             <a:ext cx="9381773" cy="0"/>
           </a:xfrm>
           <a:prstGeom prst="line">
@@ -26153,14 +27310,14 @@
       </p:sp>
       <p:sp>
         <p:nvSpPr>
-          <p:cNvPr id="88" name="Text 82"/>
+          <p:cNvPr id="95" name="Text 89"/>
           <p:cNvSpPr txBox="1"/>
           <p:nvPr/>
         </p:nvSpPr>
         <p:spPr>
           <a:xfrm>
-            <a:off x="438898" y="10240864"/>
-            <a:ext cx="9381773" cy="120015"/>
+            <a:off x="438898" y="10120849"/>
+            <a:ext cx="9381773" cy="240030"/>
           </a:xfrm>
           <a:prstGeom prst="rect">
             <a:avLst/>
@@ -26187,7 +27344,7 @@
                 <a:ea typeface="Poppins" pitchFamily="34" charset="-122"/>
                 <a:cs typeface="Poppins" pitchFamily="34" charset="-120"/>
               </a:rPr>
-              <a:t>Draft for the next conversation. Wholesale has no R on purpose, that is the hire; brewer vs wholesale plus bar is Justin's call. Chris is trapped in production, and this matrix has to free him, not load him.</a:t>
+              <a:t>Draft until the first weekly check-in. Justin and Chris return their split of what Jewell owns and what Harry and Justin keep. Wholesale has no R on purpose, that is the hire. Chris is trapped in production, and this matrix has to free him, not load him.</a:t>
             </a:r>
             <a:endParaRPr lang="en-US" sz="700" dirty="0"/>
           </a:p>
@@ -26195,7 +27352,7 @@
       </p:sp>
       <p:sp>
         <p:nvSpPr>
-          <p:cNvPr id="89" name="Shape 83"/>
+          <p:cNvPr id="96" name="Shape 90"/>
           <p:cNvSpPr/>
           <p:nvPr/>
         </p:nvSpPr>
@@ -26220,7 +27377,7 @@
       </p:sp>
       <p:sp>
         <p:nvSpPr>
-          <p:cNvPr id="90" name="Text 84"/>
+          <p:cNvPr id="97" name="Text 91"/>
           <p:cNvSpPr txBox="1"/>
           <p:nvPr/>
         </p:nvSpPr>
@@ -26262,7 +27419,7 @@
       </p:sp>
       <p:sp>
         <p:nvSpPr>
-          <p:cNvPr id="91" name="Shape 85"/>
+          <p:cNvPr id="98" name="Shape 92"/>
           <p:cNvSpPr/>
           <p:nvPr/>
         </p:nvSpPr>
@@ -26287,7 +27444,7 @@
       </p:sp>
       <p:sp>
         <p:nvSpPr>
-          <p:cNvPr id="92" name="Text 86"/>
+          <p:cNvPr id="99" name="Text 93"/>
           <p:cNvSpPr txBox="1"/>
           <p:nvPr/>
         </p:nvSpPr>
@@ -26338,7 +27495,7 @@
                 <a:ea typeface="Poppins" pitchFamily="34" charset="-122"/>
                 <a:cs typeface="Poppins" pitchFamily="34" charset="-120"/>
               </a:rPr>
-              <a:t>Justin's commitments back. Still stands.</a:t>
+              <a:t>Justin's commitments back. Done.</a:t>
             </a:r>
             <a:endParaRPr lang="en-US" sz="730" dirty="0"/>
           </a:p>
@@ -26346,13 +27503,13 @@
       </p:sp>
       <p:sp>
         <p:nvSpPr>
-          <p:cNvPr id="93" name="Shape 87"/>
+          <p:cNvPr id="100" name="Shape 94"/>
           <p:cNvSpPr/>
           <p:nvPr/>
         </p:nvSpPr>
         <p:spPr>
           <a:xfrm>
-            <a:off x="10158970" y="8452620"/>
+            <a:off x="10158970" y="8321786"/>
             <a:ext cx="50400" cy="50400"/>
           </a:xfrm>
           <a:prstGeom prst="rect">
@@ -26371,13 +27528,13 @@
       </p:sp>
       <p:sp>
         <p:nvSpPr>
-          <p:cNvPr id="94" name="Text 88"/>
+          <p:cNvPr id="101" name="Text 95"/>
           <p:cNvSpPr txBox="1"/>
           <p:nvPr/>
         </p:nvSpPr>
         <p:spPr>
           <a:xfrm>
-            <a:off x="10266970" y="8416580"/>
+            <a:off x="10266970" y="8285746"/>
             <a:ext cx="4413737" cy="129794"/>
           </a:xfrm>
           <a:prstGeom prst="rect">
@@ -26405,7 +27562,7 @@
                 <a:ea typeface="Poppins" pitchFamily="34" charset="-122"/>
                 <a:cs typeface="Poppins" pitchFamily="34" charset="-120"/>
               </a:rPr>
-              <a:t>w/c 21 Sept. </a:t>
+              <a:t>Fri 18 Sept. </a:t>
             </a:r>
             <a:pPr indent="0" marL="0">
               <a:lnSpc>
@@ -26422,7 +27579,7 @@
                 <a:ea typeface="Poppins" pitchFamily="34" charset="-122"/>
                 <a:cs typeface="Poppins" pitchFamily="34" charset="-120"/>
               </a:rPr>
-              <a:t>Clent and Christy regroup, plan confirmed, owners named. Still stands.</a:t>
+              <a:t>Catch-up held. Priorities agreed, Christy leads, weekly rhythm agreed. Done.</a:t>
             </a:r>
             <a:endParaRPr lang="en-US" sz="730" dirty="0"/>
           </a:p>
@@ -26430,13 +27587,13 @@
       </p:sp>
       <p:sp>
         <p:nvSpPr>
-          <p:cNvPr id="95" name="Shape 89"/>
+          <p:cNvPr id="102" name="Shape 96"/>
           <p:cNvSpPr/>
           <p:nvPr/>
         </p:nvSpPr>
         <p:spPr>
           <a:xfrm>
-            <a:off x="10158970" y="8845642"/>
+            <a:off x="10158970" y="8583974"/>
             <a:ext cx="50400" cy="50400"/>
           </a:xfrm>
           <a:prstGeom prst="rect">
@@ -26455,14 +27612,14 @@
       </p:sp>
       <p:sp>
         <p:nvSpPr>
-          <p:cNvPr id="96" name="Text 90"/>
+          <p:cNvPr id="103" name="Text 97"/>
           <p:cNvSpPr txBox="1"/>
           <p:nvPr/>
         </p:nvSpPr>
         <p:spPr>
           <a:xfrm>
-            <a:off x="10266970" y="8809603"/>
-            <a:ext cx="4413737" cy="129794"/>
+            <a:off x="10266970" y="8547935"/>
+            <a:ext cx="4413737" cy="259588"/>
           </a:xfrm>
           <a:prstGeom prst="rect">
             <a:avLst/>
@@ -26489,7 +27646,7 @@
                 <a:ea typeface="Poppins" pitchFamily="34" charset="-122"/>
                 <a:cs typeface="Poppins" pitchFamily="34" charset="-120"/>
               </a:rPr>
-              <a:t>Mid-October. </a:t>
+              <a:t>w/c 28 Sept. </a:t>
             </a:r>
             <a:pPr indent="0" marL="0">
               <a:lnSpc>
@@ -26506,7 +27663,7 @@
                 <a:ea typeface="Poppins" pitchFamily="34" charset="-122"/>
                 <a:cs typeface="Poppins" pitchFamily="34" charset="-120"/>
               </a:rPr>
-              <a:t>30-day list closed, including meeting rhythm and agenda. Oktoberfest run.</a:t>
+              <a:t>Jewell returns the full package: this pack at v03 plus proposal with scoped costs. Confirm with Justin whether it lands before or after Oktoberfest on Thu 1 Oct.</a:t>
             </a:r>
             <a:endParaRPr lang="en-US" sz="730" dirty="0"/>
           </a:p>
@@ -26514,13 +27671,13 @@
       </p:sp>
       <p:sp>
         <p:nvSpPr>
-          <p:cNvPr id="97" name="Shape 91"/>
+          <p:cNvPr id="104" name="Shape 98"/>
           <p:cNvSpPr/>
           <p:nvPr/>
         </p:nvSpPr>
         <p:spPr>
           <a:xfrm>
-            <a:off x="10158970" y="9238665"/>
+            <a:off x="10158970" y="8975956"/>
             <a:ext cx="50400" cy="50400"/>
           </a:xfrm>
           <a:prstGeom prst="rect">
@@ -26539,13 +27696,13 @@
       </p:sp>
       <p:sp>
         <p:nvSpPr>
-          <p:cNvPr id="98" name="Text 92"/>
+          <p:cNvPr id="105" name="Text 99"/>
           <p:cNvSpPr txBox="1"/>
           <p:nvPr/>
         </p:nvSpPr>
         <p:spPr>
           <a:xfrm>
-            <a:off x="10266970" y="9202625"/>
+            <a:off x="10266970" y="8939917"/>
             <a:ext cx="4413737" cy="129794"/>
           </a:xfrm>
           <a:prstGeom prst="rect">
@@ -26573,7 +27730,7 @@
                 <a:ea typeface="Poppins" pitchFamily="34" charset="-122"/>
                 <a:cs typeface="Poppins" pitchFamily="34" charset="-120"/>
               </a:rPr>
-              <a:t>Mid-December. </a:t>
+              <a:t>First weekly check-in. </a:t>
             </a:r>
             <a:pPr indent="0" marL="0">
               <a:lnSpc>
@@ -26590,7 +27747,7 @@
                 <a:ea typeface="Poppins" pitchFamily="34" charset="-122"/>
                 <a:cs typeface="Poppins" pitchFamily="34" charset="-120"/>
               </a:rPr>
-              <a:t>Three-month list closed. Tech live, lease-to-buy launched.</a:t>
+              <a:t>Jewell split confirmed, RACI finalised, 250 date chosen.</a:t>
             </a:r>
             <a:endParaRPr lang="en-US" sz="730" dirty="0"/>
           </a:p>
@@ -26598,13 +27755,13 @@
       </p:sp>
       <p:sp>
         <p:nvSpPr>
-          <p:cNvPr id="99" name="Shape 93"/>
+          <p:cNvPr id="106" name="Shape 100"/>
           <p:cNvSpPr/>
           <p:nvPr/>
         </p:nvSpPr>
         <p:spPr>
           <a:xfrm>
-            <a:off x="10158970" y="9631687"/>
+            <a:off x="10158970" y="9238145"/>
             <a:ext cx="50400" cy="50400"/>
           </a:xfrm>
           <a:prstGeom prst="rect">
@@ -26623,13 +27780,13 @@
       </p:sp>
       <p:sp>
         <p:nvSpPr>
-          <p:cNvPr id="100" name="Text 94"/>
+          <p:cNvPr id="107" name="Text 101"/>
           <p:cNvSpPr txBox="1"/>
           <p:nvPr/>
         </p:nvSpPr>
         <p:spPr>
           <a:xfrm>
-            <a:off x="10266970" y="9595648"/>
+            <a:off x="10266970" y="9202105"/>
             <a:ext cx="4413737" cy="129794"/>
           </a:xfrm>
           <a:prstGeom prst="rect">
@@ -26657,7 +27814,7 @@
                 <a:ea typeface="Poppins" pitchFamily="34" charset="-122"/>
                 <a:cs typeface="Poppins" pitchFamily="34" charset="-120"/>
               </a:rPr>
-              <a:t>March 2027. </a:t>
+              <a:t>Mid-October. </a:t>
             </a:r>
             <a:pPr indent="0" marL="0">
               <a:lnSpc>
@@ -26674,7 +27831,7 @@
                 <a:ea typeface="Poppins" pitchFamily="34" charset="-122"/>
                 <a:cs typeface="Poppins" pitchFamily="34" charset="-120"/>
               </a:rPr>
-              <a:t>250 active refillers.</a:t>
+              <a:t>30-day list closed, including meeting rhythm and agenda. Oktoberfest run.</a:t>
             </a:r>
             <a:endParaRPr lang="en-US" sz="730" dirty="0"/>
           </a:p>
@@ -26682,13 +27839,13 @@
       </p:sp>
       <p:sp>
         <p:nvSpPr>
-          <p:cNvPr id="101" name="Shape 95"/>
+          <p:cNvPr id="108" name="Shape 102"/>
           <p:cNvSpPr/>
           <p:nvPr/>
         </p:nvSpPr>
         <p:spPr>
           <a:xfrm>
-            <a:off x="10158970" y="10024710"/>
+            <a:off x="10158970" y="9500333"/>
             <a:ext cx="50400" cy="50400"/>
           </a:xfrm>
           <a:prstGeom prst="rect">
@@ -26707,7 +27864,175 @@
       </p:sp>
       <p:sp>
         <p:nvSpPr>
-          <p:cNvPr id="102" name="Text 96"/>
+          <p:cNvPr id="109" name="Text 103"/>
+          <p:cNvSpPr txBox="1"/>
+          <p:nvPr/>
+        </p:nvSpPr>
+        <p:spPr>
+          <a:xfrm>
+            <a:off x="10266970" y="9464294"/>
+            <a:ext cx="4413737" cy="129794"/>
+          </a:xfrm>
+          <a:prstGeom prst="rect">
+            <a:avLst/>
+          </a:prstGeom>
+          <a:noFill/>
+          <a:ln/>
+        </p:spPr>
+        <p:txBody>
+          <a:bodyPr wrap="square" lIns="0" tIns="0" rIns="0" bIns="0" rtlCol="0" anchor="t"/>
+          <a:lstStyle/>
+          <a:p>
+            <a:pPr indent="0" marL="0">
+              <a:lnSpc>
+                <a:spcPts val="1022"/>
+              </a:lnSpc>
+              <a:buNone/>
+            </a:pPr>
+            <a:r>
+              <a:rPr lang="en-US" sz="730" b="1" dirty="0">
+                <a:solidFill>
+                  <a:srgbClr val="0E171F"/>
+                </a:solidFill>
+                <a:latin typeface="Poppins" pitchFamily="34" charset="0"/>
+                <a:ea typeface="Poppins" pitchFamily="34" charset="-122"/>
+                <a:cs typeface="Poppins" pitchFamily="34" charset="-120"/>
+              </a:rPr>
+              <a:t>Mid-December. </a:t>
+            </a:r>
+            <a:pPr indent="0" marL="0">
+              <a:lnSpc>
+                <a:spcPts val="1022"/>
+              </a:lnSpc>
+              <a:buNone/>
+            </a:pPr>
+            <a:r>
+              <a:rPr lang="en-US" sz="730" dirty="0">
+                <a:solidFill>
+                  <a:srgbClr val="4A5565"/>
+                </a:solidFill>
+                <a:latin typeface="Poppins" pitchFamily="34" charset="0"/>
+                <a:ea typeface="Poppins" pitchFamily="34" charset="-122"/>
+                <a:cs typeface="Poppins" pitchFamily="34" charset="-120"/>
+              </a:rPr>
+              <a:t>Three-month list closed. Tech live, lease-to-buy launched.</a:t>
+            </a:r>
+            <a:endParaRPr lang="en-US" sz="730" dirty="0"/>
+          </a:p>
+        </p:txBody>
+      </p:sp>
+      <p:sp>
+        <p:nvSpPr>
+          <p:cNvPr id="110" name="Shape 104"/>
+          <p:cNvSpPr/>
+          <p:nvPr/>
+        </p:nvSpPr>
+        <p:spPr>
+          <a:xfrm>
+            <a:off x="10158970" y="9762521"/>
+            <a:ext cx="50400" cy="50400"/>
+          </a:xfrm>
+          <a:prstGeom prst="rect">
+            <a:avLst/>
+          </a:prstGeom>
+          <a:solidFill>
+            <a:srgbClr val="0066FF"/>
+          </a:solidFill>
+          <a:ln w="12700">
+            <a:solidFill>
+              <a:srgbClr val="333333"/>
+            </a:solidFill>
+            <a:prstDash val="solid"/>
+          </a:ln>
+        </p:spPr>
+      </p:sp>
+      <p:sp>
+        <p:nvSpPr>
+          <p:cNvPr id="111" name="Text 105"/>
+          <p:cNvSpPr txBox="1"/>
+          <p:nvPr/>
+        </p:nvSpPr>
+        <p:spPr>
+          <a:xfrm>
+            <a:off x="10266970" y="9726482"/>
+            <a:ext cx="4413737" cy="129794"/>
+          </a:xfrm>
+          <a:prstGeom prst="rect">
+            <a:avLst/>
+          </a:prstGeom>
+          <a:noFill/>
+          <a:ln/>
+        </p:spPr>
+        <p:txBody>
+          <a:bodyPr wrap="square" lIns="0" tIns="0" rIns="0" bIns="0" rtlCol="0" anchor="t"/>
+          <a:lstStyle/>
+          <a:p>
+            <a:pPr indent="0" marL="0">
+              <a:lnSpc>
+                <a:spcPts val="1022"/>
+              </a:lnSpc>
+              <a:buNone/>
+            </a:pPr>
+            <a:r>
+              <a:rPr lang="en-US" sz="730" b="1" dirty="0">
+                <a:solidFill>
+                  <a:srgbClr val="0E171F"/>
+                </a:solidFill>
+                <a:latin typeface="Poppins" pitchFamily="34" charset="0"/>
+                <a:ea typeface="Poppins" pitchFamily="34" charset="-122"/>
+                <a:cs typeface="Poppins" pitchFamily="34" charset="-120"/>
+              </a:rPr>
+              <a:t>March 2027. </a:t>
+            </a:r>
+            <a:pPr indent="0" marL="0">
+              <a:lnSpc>
+                <a:spcPts val="1022"/>
+              </a:lnSpc>
+              <a:buNone/>
+            </a:pPr>
+            <a:r>
+              <a:rPr lang="en-US" sz="730" dirty="0">
+                <a:solidFill>
+                  <a:srgbClr val="4A5565"/>
+                </a:solidFill>
+                <a:latin typeface="Poppins" pitchFamily="34" charset="0"/>
+                <a:ea typeface="Poppins" pitchFamily="34" charset="-122"/>
+                <a:cs typeface="Poppins" pitchFamily="34" charset="-120"/>
+              </a:rPr>
+              <a:t>250 active refillers.</a:t>
+            </a:r>
+            <a:endParaRPr lang="en-US" sz="730" dirty="0"/>
+          </a:p>
+        </p:txBody>
+      </p:sp>
+      <p:sp>
+        <p:nvSpPr>
+          <p:cNvPr id="112" name="Shape 106"/>
+          <p:cNvSpPr/>
+          <p:nvPr/>
+        </p:nvSpPr>
+        <p:spPr>
+          <a:xfrm>
+            <a:off x="10158970" y="10024710"/>
+            <a:ext cx="50400" cy="50400"/>
+          </a:xfrm>
+          <a:prstGeom prst="rect">
+            <a:avLst/>
+          </a:prstGeom>
+          <a:solidFill>
+            <a:srgbClr val="0066FF"/>
+          </a:solidFill>
+          <a:ln w="12700">
+            <a:solidFill>
+              <a:srgbClr val="333333"/>
+            </a:solidFill>
+            <a:prstDash val="solid"/>
+          </a:ln>
+        </p:spPr>
+      </p:sp>
+      <p:sp>
+        <p:nvSpPr>
+          <p:cNvPr id="113" name="Text 107"/>
           <p:cNvSpPr txBox="1"/>
           <p:nvPr/>
         </p:nvSpPr>
@@ -26766,7 +28091,7 @@
       </p:sp>
       <p:sp>
         <p:nvSpPr>
-          <p:cNvPr id="103" name="Shape 97"/>
+          <p:cNvPr id="114" name="Shape 108"/>
           <p:cNvSpPr/>
           <p:nvPr/>
         </p:nvSpPr>
@@ -26789,7 +28114,7 @@
       </p:sp>
       <p:sp>
         <p:nvSpPr>
-          <p:cNvPr id="104" name="Text 98"/>
+          <p:cNvPr id="115" name="Text 109"/>
           <p:cNvSpPr txBox="1"/>
           <p:nvPr/>
         </p:nvSpPr>

--- a/00 Admin/11 Final Outputs/plan-on-a-page/TapThat_Plan-on-a-Page_A3.pptx
+++ b/00 Admin/11 Final Outputs/plan-on-a-page/TapThat_Plan-on-a-Page_A3.pptx
@@ -2890,7 +2890,7 @@
                 <a:ea typeface="Poppins" pitchFamily="34" charset="-122"/>
                 <a:cs typeface="Poppins" pitchFamily="34" charset="-120"/>
               </a:rPr>
-              <a:t>Justin's own 30-day call: a Taproom selling kegs, a Showroom selling beers, or an Event space doing both. Alongside it, clarity on who is buying, residential vs commercial, and where the energy goes.</a:t>
+              <a:t>Justin's own 30-day call: showroom or event space. Walk-ins are not the strategy. Alongside it, clarity on who is buying, residential vs commercial, and where the energy goes.</a:t>
             </a:r>
             <a:endParaRPr lang="en-US" sz="790" dirty="0"/>
           </a:p>
@@ -6125,7 +6125,7 @@
         <p:spPr>
           <a:xfrm>
             <a:off x="10266970" y="7617652"/>
-            <a:ext cx="4413737" cy="259588"/>
+            <a:ext cx="4413737" cy="129794"/>
           </a:xfrm>
           <a:prstGeom prst="rect">
             <a:avLst/>
@@ -6152,7 +6152,7 @@
                 <a:ea typeface="Poppins" pitchFamily="34" charset="-122"/>
                 <a:cs typeface="Poppins" pitchFamily="34" charset="-120"/>
               </a:rPr>
-              <a:t>Taproom, Showroom, or Event space doing both? </a:t>
+              <a:t>Showroom or event space? </a:t>
             </a:r>
             <a:pPr indent="0" marL="0">
               <a:lnSpc>
@@ -6169,7 +6169,7 @@
                 <a:ea typeface="Poppins" pitchFamily="34" charset="-122"/>
                 <a:cs typeface="Poppins" pitchFamily="34" charset="-120"/>
               </a:rPr>
-              <a:t>JP recommended pausing walk-in trade; Justin's own priorities keep the room trading.</a:t>
+              <a:t>Walk-ins are not the strategy. Justin's call inside 30 days.</a:t>
             </a:r>
             <a:endParaRPr lang="en-US" sz="730" dirty="0"/>
           </a:p>
@@ -6183,7 +6183,7 @@
         </p:nvSpPr>
         <p:spPr>
           <a:xfrm>
-            <a:off x="10158970" y="8205772"/>
+            <a:off x="10158970" y="8101936"/>
             <a:ext cx="50400" cy="50400"/>
           </a:xfrm>
           <a:prstGeom prst="rect">
@@ -6208,7 +6208,7 @@
         </p:nvSpPr>
         <p:spPr>
           <a:xfrm>
-            <a:off x="10266970" y="8169732"/>
+            <a:off x="10266970" y="8065897"/>
             <a:ext cx="4413737" cy="129794"/>
           </a:xfrm>
           <a:prstGeom prst="rect">
@@ -6250,7 +6250,7 @@
         </p:nvSpPr>
         <p:spPr>
           <a:xfrm>
-            <a:off x="10158970" y="8628058"/>
+            <a:off x="10158970" y="8550181"/>
             <a:ext cx="50400" cy="50400"/>
           </a:xfrm>
           <a:prstGeom prst="rect">
@@ -6275,7 +6275,7 @@
         </p:nvSpPr>
         <p:spPr>
           <a:xfrm>
-            <a:off x="10266970" y="8592018"/>
+            <a:off x="10266970" y="8514142"/>
             <a:ext cx="4413737" cy="129794"/>
           </a:xfrm>
           <a:prstGeom prst="rect">
@@ -6334,7 +6334,7 @@
         </p:nvSpPr>
         <p:spPr>
           <a:xfrm>
-            <a:off x="10158970" y="9050344"/>
+            <a:off x="10158970" y="8998426"/>
             <a:ext cx="50400" cy="50400"/>
           </a:xfrm>
           <a:prstGeom prst="rect">
@@ -6359,7 +6359,7 @@
         </p:nvSpPr>
         <p:spPr>
           <a:xfrm>
-            <a:off x="10266970" y="9014304"/>
+            <a:off x="10266970" y="8962387"/>
             <a:ext cx="4413737" cy="129794"/>
           </a:xfrm>
           <a:prstGeom prst="rect">
@@ -6401,7 +6401,7 @@
         </p:nvSpPr>
         <p:spPr>
           <a:xfrm>
-            <a:off x="10158970" y="9472630"/>
+            <a:off x="10158970" y="9446671"/>
             <a:ext cx="50400" cy="50400"/>
           </a:xfrm>
           <a:prstGeom prst="rect">
@@ -6426,7 +6426,7 @@
         </p:nvSpPr>
         <p:spPr>
           <a:xfrm>
-            <a:off x="10266970" y="9436590"/>
+            <a:off x="10266970" y="9410631"/>
             <a:ext cx="4413737" cy="129794"/>
           </a:xfrm>
           <a:prstGeom prst="rect">
@@ -8044,7 +8044,7 @@
                           <a:ea typeface="Poppins" pitchFamily="34" charset="-122"/>
                           <a:cs typeface="Poppins" pitchFamily="34" charset="-120"/>
                         </a:rPr>
-                        <a:t>Walk-ins, local business, functions and events</a:t>
+                        <a:t>Local business, functions and events</a:t>
                       </a:r>
                       <a:endParaRPr lang="en-US" sz="690" dirty="0">
                         <a:latin typeface="Poppins" charset="0"/>
@@ -10064,7 +10064,7 @@
                 <a:ea typeface="Poppins" pitchFamily="34" charset="-122"/>
                 <a:cs typeface="Poppins" pitchFamily="34" charset="-120"/>
               </a:rPr>
-              <a:t>The three-way shape question. </a:t>
+              <a:t>The shape question. </a:t>
             </a:r>
             <a:pPr indent="0" marL="0">
               <a:lnSpc>
@@ -10081,7 +10081,7 @@
                 <a:ea typeface="Poppins" pitchFamily="34" charset="-122"/>
                 <a:cs typeface="Poppins" pitchFamily="34" charset="-120"/>
               </a:rPr>
-              <a:t>Taproom, showroom or event space. Owner: Justin.</a:t>
+              <a:t>Showroom or event space. Owner: Justin.</a:t>
             </a:r>
             <a:endParaRPr lang="en-US" sz="800" dirty="0"/>
           </a:p>

--- a/00 Admin/11 Final Outputs/plan-on-a-page/TapThat_Plan-on-a-Page_A3.pptx
+++ b/00 Admin/11 Final Outputs/plan-on-a-page/TapThat_Plan-on-a-Page_A3.pptx
@@ -21072,7 +21072,7 @@
                 <a:ea typeface="Poppins" pitchFamily="34" charset="-122"/>
                 <a:cs typeface="Poppins" pitchFamily="34" charset="-120"/>
               </a:rPr>
-              <a:t>Justin's own taproom priorities: lunch and after-work trade from local business, and ticketed music events, not pausing walk-ins.</a:t>
+              <a:t>Justin's own taproom priorities: lunch and after-work trade from local business, and ticketed music events.</a:t>
             </a:r>
             <a:endParaRPr lang="en-US" sz="810" dirty="0"/>
           </a:p>

--- a/00 Admin/11 Final Outputs/plan-on-a-page/TapThat_Plan-on-a-Page_A3.pptx
+++ b/00 Admin/11 Final Outputs/plan-on-a-page/TapThat_Plan-on-a-Page_A3.pptx
@@ -1326,8 +1326,8 @@
         </p:nvSpPr>
         <p:spPr>
           <a:xfrm>
-            <a:off x="12656964" y="365760"/>
-            <a:ext cx="1186641" cy="251460"/>
+            <a:off x="12673633" y="365760"/>
+            <a:ext cx="1169972" cy="251460"/>
           </a:xfrm>
           <a:prstGeom prst="roundRect">
             <a:avLst>
@@ -1353,8 +1353,8 @@
         </p:nvSpPr>
         <p:spPr>
           <a:xfrm>
-            <a:off x="12656964" y="365760"/>
-            <a:ext cx="1186641" cy="251460"/>
+            <a:off x="12673633" y="365760"/>
+            <a:ext cx="1169972" cy="251460"/>
           </a:xfrm>
           <a:prstGeom prst="rect">
             <a:avLst/>
@@ -1392,8 +1392,8 @@
         </p:nvSpPr>
         <p:spPr>
           <a:xfrm>
-            <a:off x="11321238" y="365760"/>
-            <a:ext cx="1245725" cy="251460"/>
+            <a:off x="11415298" y="365760"/>
+            <a:ext cx="1168335" cy="251460"/>
           </a:xfrm>
           <a:prstGeom prst="roundRect">
             <a:avLst>
@@ -1419,8 +1419,8 @@
         </p:nvSpPr>
         <p:spPr>
           <a:xfrm>
-            <a:off x="11321238" y="365760"/>
-            <a:ext cx="1245725" cy="251460"/>
+            <a:off x="11415298" y="365760"/>
+            <a:ext cx="1168335" cy="251460"/>
           </a:xfrm>
           <a:prstGeom prst="rect">
             <a:avLst/>
@@ -1458,8 +1458,8 @@
         </p:nvSpPr>
         <p:spPr>
           <a:xfrm>
-            <a:off x="10486915" y="365760"/>
-            <a:ext cx="744323" cy="251460"/>
+            <a:off x="10604043" y="365760"/>
+            <a:ext cx="721255" cy="251460"/>
           </a:xfrm>
           <a:prstGeom prst="roundRect">
             <a:avLst>
@@ -1485,8 +1485,8 @@
         </p:nvSpPr>
         <p:spPr>
           <a:xfrm>
-            <a:off x="10486915" y="365760"/>
-            <a:ext cx="744323" cy="251460"/>
+            <a:off x="10604043" y="365760"/>
+            <a:ext cx="721255" cy="251460"/>
           </a:xfrm>
           <a:prstGeom prst="rect">
             <a:avLst/>
@@ -3083,7 +3083,7 @@
                 <a:ea typeface="Poppins" pitchFamily="34" charset="-122"/>
                 <a:cs typeface="Poppins" pitchFamily="34" charset="-120"/>
               </a:rPr>
-              <a:t>Home entertainment, not beer.</a:t>
+              <a:t>The best night in, on tap.</a:t>
             </a:r>
             <a:endParaRPr lang="en-US" sz="960" dirty="0"/>
           </a:p>
@@ -3098,7 +3098,7 @@
         <p:spPr>
           <a:xfrm>
             <a:off x="4119925" y="4679120"/>
-            <a:ext cx="3292328" cy="593954"/>
+            <a:ext cx="3292328" cy="742442"/>
           </a:xfrm>
           <a:prstGeom prst="rect">
             <a:avLst/>
@@ -3139,7 +3139,7 @@
         </p:nvSpPr>
         <p:spPr>
           <a:xfrm>
-            <a:off x="4119925" y="5337874"/>
+            <a:off x="4119925" y="5486362"/>
             <a:ext cx="3292328" cy="296977"/>
           </a:xfrm>
           <a:prstGeom prst="rect">
@@ -3184,7 +3184,7 @@
                 <a:ea typeface="Poppins" pitchFamily="34" charset="-122"/>
                 <a:cs typeface="Poppins" pitchFamily="34" charset="-120"/>
               </a:rPr>
-              <a:t>rewrite key messaging for each target market on that basis, inside 30 days, Christy to lead.</a:t>
+              <a:t>Christy works the line into key messaging for each target market, inside 30 days.</a:t>
             </a:r>
             <a:endParaRPr lang="en-US" sz="790" dirty="0"/>
           </a:p>
@@ -3736,7 +3736,7 @@
         <p:spPr>
           <a:xfrm>
             <a:off x="438898" y="7617652"/>
-            <a:ext cx="671338" cy="205740"/>
+            <a:ext cx="663748" cy="205740"/>
           </a:xfrm>
           <a:prstGeom prst="roundRect">
             <a:avLst>
@@ -3763,7 +3763,7 @@
         <p:spPr>
           <a:xfrm>
             <a:off x="438898" y="7617652"/>
-            <a:ext cx="671338" cy="205740"/>
+            <a:ext cx="663748" cy="205740"/>
           </a:xfrm>
           <a:prstGeom prst="rect">
             <a:avLst/>
@@ -3801,8 +3801,8 @@
         </p:nvSpPr>
         <p:spPr>
           <a:xfrm>
-            <a:off x="1274827" y="7604851"/>
-            <a:ext cx="3685807" cy="237744"/>
+            <a:off x="1267237" y="7604851"/>
+            <a:ext cx="3693397" cy="237744"/>
           </a:xfrm>
           <a:prstGeom prst="rect">
             <a:avLst/>
@@ -3843,8 +3843,8 @@
         </p:nvSpPr>
         <p:spPr>
           <a:xfrm>
-            <a:off x="438898" y="7983019"/>
-            <a:ext cx="671338" cy="205740"/>
+            <a:off x="438898" y="7927584"/>
+            <a:ext cx="663748" cy="205740"/>
           </a:xfrm>
           <a:prstGeom prst="roundRect">
             <a:avLst>
@@ -3870,8 +3870,8 @@
         </p:nvSpPr>
         <p:spPr>
           <a:xfrm>
-            <a:off x="438898" y="7983019"/>
-            <a:ext cx="671338" cy="205740"/>
+            <a:off x="438898" y="7927584"/>
+            <a:ext cx="663748" cy="205740"/>
           </a:xfrm>
           <a:prstGeom prst="rect">
             <a:avLst/>
@@ -3909,8 +3909,8 @@
         </p:nvSpPr>
         <p:spPr>
           <a:xfrm>
-            <a:off x="1274827" y="7970218"/>
-            <a:ext cx="3685807" cy="237744"/>
+            <a:off x="1267237" y="7914782"/>
+            <a:ext cx="3693397" cy="308610"/>
           </a:xfrm>
           <a:prstGeom prst="rect">
             <a:avLst/>
@@ -3951,8 +3951,8 @@
         </p:nvSpPr>
         <p:spPr>
           <a:xfrm>
-            <a:off x="438898" y="8348386"/>
-            <a:ext cx="671338" cy="205740"/>
+            <a:off x="438898" y="8308381"/>
+            <a:ext cx="663748" cy="205740"/>
           </a:xfrm>
           <a:prstGeom prst="roundRect">
             <a:avLst>
@@ -3978,8 +3978,8 @@
         </p:nvSpPr>
         <p:spPr>
           <a:xfrm>
-            <a:off x="438898" y="8348386"/>
-            <a:ext cx="671338" cy="205740"/>
+            <a:off x="438898" y="8308381"/>
+            <a:ext cx="663748" cy="205740"/>
           </a:xfrm>
           <a:prstGeom prst="rect">
             <a:avLst/>
@@ -4017,8 +4017,8 @@
         </p:nvSpPr>
         <p:spPr>
           <a:xfrm>
-            <a:off x="1274827" y="8335585"/>
-            <a:ext cx="3685807" cy="237744"/>
+            <a:off x="1267237" y="8295580"/>
+            <a:ext cx="3693397" cy="237744"/>
           </a:xfrm>
           <a:prstGeom prst="rect">
             <a:avLst/>
@@ -4059,8 +4059,8 @@
         </p:nvSpPr>
         <p:spPr>
           <a:xfrm>
-            <a:off x="438898" y="8713753"/>
-            <a:ext cx="671338" cy="205740"/>
+            <a:off x="438898" y="8618313"/>
+            <a:ext cx="663748" cy="205740"/>
           </a:xfrm>
           <a:prstGeom prst="roundRect">
             <a:avLst>
@@ -4086,8 +4086,8 @@
         </p:nvSpPr>
         <p:spPr>
           <a:xfrm>
-            <a:off x="438898" y="8713753"/>
-            <a:ext cx="671338" cy="205740"/>
+            <a:off x="438898" y="8618313"/>
+            <a:ext cx="663748" cy="205740"/>
           </a:xfrm>
           <a:prstGeom prst="rect">
             <a:avLst/>
@@ -4125,8 +4125,8 @@
         </p:nvSpPr>
         <p:spPr>
           <a:xfrm>
-            <a:off x="1274827" y="8700952"/>
-            <a:ext cx="3685807" cy="237744"/>
+            <a:off x="1267237" y="8605511"/>
+            <a:ext cx="3693397" cy="308610"/>
           </a:xfrm>
           <a:prstGeom prst="rect">
             <a:avLst/>
@@ -4167,8 +4167,8 @@
         </p:nvSpPr>
         <p:spPr>
           <a:xfrm>
-            <a:off x="438898" y="9079120"/>
-            <a:ext cx="671338" cy="205740"/>
+            <a:off x="438898" y="8999110"/>
+            <a:ext cx="663748" cy="205740"/>
           </a:xfrm>
           <a:prstGeom prst="roundRect">
             <a:avLst>
@@ -4194,8 +4194,8 @@
         </p:nvSpPr>
         <p:spPr>
           <a:xfrm>
-            <a:off x="438898" y="9079120"/>
-            <a:ext cx="671338" cy="205740"/>
+            <a:off x="438898" y="8999110"/>
+            <a:ext cx="663748" cy="205740"/>
           </a:xfrm>
           <a:prstGeom prst="rect">
             <a:avLst/>
@@ -4233,8 +4233,8 @@
         </p:nvSpPr>
         <p:spPr>
           <a:xfrm>
-            <a:off x="1274827" y="9066319"/>
-            <a:ext cx="3685807" cy="308610"/>
+            <a:off x="1267237" y="8986309"/>
+            <a:ext cx="3693397" cy="308610"/>
           </a:xfrm>
           <a:prstGeom prst="rect">
             <a:avLst/>
@@ -4275,8 +4275,8 @@
         </p:nvSpPr>
         <p:spPr>
           <a:xfrm>
-            <a:off x="438898" y="9515353"/>
-            <a:ext cx="671338" cy="205740"/>
+            <a:off x="438898" y="9379908"/>
+            <a:ext cx="663748" cy="205740"/>
           </a:xfrm>
           <a:prstGeom prst="roundRect">
             <a:avLst>
@@ -4302,8 +4302,8 @@
         </p:nvSpPr>
         <p:spPr>
           <a:xfrm>
-            <a:off x="438898" y="9515353"/>
-            <a:ext cx="671338" cy="205740"/>
+            <a:off x="438898" y="9379908"/>
+            <a:ext cx="663748" cy="205740"/>
           </a:xfrm>
           <a:prstGeom prst="rect">
             <a:avLst/>
@@ -4341,8 +4341,8 @@
         </p:nvSpPr>
         <p:spPr>
           <a:xfrm>
-            <a:off x="1274827" y="9502552"/>
-            <a:ext cx="3685807" cy="237744"/>
+            <a:off x="1267237" y="9367106"/>
+            <a:ext cx="3693397" cy="308610"/>
           </a:xfrm>
           <a:prstGeom prst="rect">
             <a:avLst/>
@@ -4383,8 +4383,8 @@
         </p:nvSpPr>
         <p:spPr>
           <a:xfrm>
-            <a:off x="438898" y="9880720"/>
-            <a:ext cx="671338" cy="205740"/>
+            <a:off x="438898" y="9760705"/>
+            <a:ext cx="663748" cy="205740"/>
           </a:xfrm>
           <a:prstGeom prst="roundRect">
             <a:avLst>
@@ -4410,8 +4410,8 @@
         </p:nvSpPr>
         <p:spPr>
           <a:xfrm>
-            <a:off x="438898" y="9880720"/>
-            <a:ext cx="671338" cy="205740"/>
+            <a:off x="438898" y="9760705"/>
+            <a:ext cx="663748" cy="205740"/>
           </a:xfrm>
           <a:prstGeom prst="rect">
             <a:avLst/>
@@ -4449,8 +4449,8 @@
         </p:nvSpPr>
         <p:spPr>
           <a:xfrm>
-            <a:off x="1274827" y="9867919"/>
-            <a:ext cx="3685807" cy="237744"/>
+            <a:off x="1267237" y="9747904"/>
+            <a:ext cx="3693397" cy="237744"/>
           </a:xfrm>
           <a:prstGeom prst="rect">
             <a:avLst/>
@@ -4491,7 +4491,7 @@
         </p:nvSpPr>
         <p:spPr>
           <a:xfrm>
-            <a:off x="438898" y="10183264"/>
+            <a:off x="438898" y="10063249"/>
             <a:ext cx="4521737" cy="0"/>
           </a:xfrm>
           <a:prstGeom prst="line">
@@ -4514,8 +4514,8 @@
         </p:nvSpPr>
         <p:spPr>
           <a:xfrm>
-            <a:off x="438898" y="10240864"/>
-            <a:ext cx="4521737" cy="120015"/>
+            <a:off x="438898" y="10120849"/>
+            <a:ext cx="4521737" cy="240030"/>
           </a:xfrm>
           <a:prstGeom prst="rect">
             <a:avLst/>
@@ -4638,9 +4638,9 @@
             <a:tbl>
               <a:tblPr/>
               <a:tblGrid>
-                <a:gridCol w="2271871"/>
-                <a:gridCol w="695445"/>
-                <a:gridCol w="1554421"/>
+                <a:gridCol w="2354867"/>
+                <a:gridCol w="625530"/>
+                <a:gridCol w="1541340"/>
               </a:tblGrid>
               <a:tr h="283976">
                 <a:tc>
@@ -6753,8 +6753,8 @@
         </p:nvSpPr>
         <p:spPr>
           <a:xfrm>
-            <a:off x="12656964" y="365760"/>
-            <a:ext cx="1186641" cy="251460"/>
+            <a:off x="12673633" y="365760"/>
+            <a:ext cx="1169972" cy="251460"/>
           </a:xfrm>
           <a:prstGeom prst="roundRect">
             <a:avLst>
@@ -6780,8 +6780,8 @@
         </p:nvSpPr>
         <p:spPr>
           <a:xfrm>
-            <a:off x="12656964" y="365760"/>
-            <a:ext cx="1186641" cy="251460"/>
+            <a:off x="12673633" y="365760"/>
+            <a:ext cx="1169972" cy="251460"/>
           </a:xfrm>
           <a:prstGeom prst="rect">
             <a:avLst/>
@@ -6819,8 +6819,8 @@
         </p:nvSpPr>
         <p:spPr>
           <a:xfrm>
-            <a:off x="11321238" y="365760"/>
-            <a:ext cx="1245725" cy="251460"/>
+            <a:off x="11415298" y="365760"/>
+            <a:ext cx="1168335" cy="251460"/>
           </a:xfrm>
           <a:prstGeom prst="roundRect">
             <a:avLst>
@@ -6846,8 +6846,8 @@
         </p:nvSpPr>
         <p:spPr>
           <a:xfrm>
-            <a:off x="11321238" y="365760"/>
-            <a:ext cx="1245725" cy="251460"/>
+            <a:off x="11415298" y="365760"/>
+            <a:ext cx="1168335" cy="251460"/>
           </a:xfrm>
           <a:prstGeom prst="rect">
             <a:avLst/>
@@ -6885,8 +6885,8 @@
         </p:nvSpPr>
         <p:spPr>
           <a:xfrm>
-            <a:off x="10259357" y="365760"/>
-            <a:ext cx="971882" cy="251460"/>
+            <a:off x="10393302" y="365760"/>
+            <a:ext cx="931996" cy="251460"/>
           </a:xfrm>
           <a:prstGeom prst="roundRect">
             <a:avLst>
@@ -6912,8 +6912,8 @@
         </p:nvSpPr>
         <p:spPr>
           <a:xfrm>
-            <a:off x="10259357" y="365760"/>
-            <a:ext cx="971882" cy="251460"/>
+            <a:off x="10393302" y="365760"/>
+            <a:ext cx="931996" cy="251460"/>
           </a:xfrm>
           <a:prstGeom prst="rect">
             <a:avLst/>
@@ -7067,7 +7067,7 @@
         <p:spPr>
           <a:xfrm>
             <a:off x="438898" y="1400636"/>
-            <a:ext cx="6951755" cy="204724"/>
+            <a:ext cx="6951755" cy="409448"/>
           </a:xfrm>
           <a:prstGeom prst="rect">
             <a:avLst/>
@@ -7108,7 +7108,7 @@
         </p:nvSpPr>
         <p:spPr>
           <a:xfrm>
-            <a:off x="438898" y="1745994"/>
+            <a:off x="438898" y="1920009"/>
             <a:ext cx="6951755" cy="462915"/>
           </a:xfrm>
           <a:prstGeom prst="rect">
@@ -7184,7 +7184,7 @@
         </p:nvSpPr>
         <p:spPr>
           <a:xfrm>
-            <a:off x="438898" y="2349543"/>
+            <a:off x="438898" y="2492850"/>
             <a:ext cx="6951755" cy="308610"/>
           </a:xfrm>
           <a:prstGeom prst="rect">
@@ -7243,7 +7243,7 @@
         </p:nvSpPr>
         <p:spPr>
           <a:xfrm>
-            <a:off x="438898" y="2798787"/>
+            <a:off x="438898" y="2911385"/>
             <a:ext cx="6951755" cy="462915"/>
           </a:xfrm>
           <a:prstGeom prst="rect">
@@ -7449,11 +7449,11 @@
             <a:tbl>
               <a:tblPr/>
               <a:tblGrid>
-                <a:gridCol w="926127"/>
-                <a:gridCol w="2995924"/>
-                <a:gridCol w="3029704"/>
+                <a:gridCol w="955066"/>
+                <a:gridCol w="2998344"/>
+                <a:gridCol w="2998344"/>
               </a:tblGrid>
-              <a:tr h="363770">
+              <a:tr h="324044">
                 <a:tc>
                   <a:txBody>
                     <a:bodyPr/>
@@ -7614,7 +7614,7 @@
                   </a:tcPr>
                 </a:tc>
               </a:tr>
-              <a:tr h="384522">
+              <a:tr h="344796">
                 <a:tc>
                   <a:txBody>
                     <a:bodyPr/>
@@ -7792,7 +7792,7 @@
                   </a:tcPr>
                 </a:tc>
               </a:tr>
-              <a:tr h="384522">
+              <a:tr h="463973">
                 <a:tc>
                   <a:txBody>
                     <a:bodyPr/>
@@ -7970,7 +7970,7 @@
                   </a:tcPr>
                 </a:tc>
               </a:tr>
-              <a:tr h="503698">
+              <a:tr h="583150">
                 <a:tc>
                   <a:txBody>
                     <a:bodyPr/>
@@ -8148,7 +8148,7 @@
                   </a:tcPr>
                 </a:tc>
               </a:tr>
-              <a:tr h="384522">
+              <a:tr h="344796">
                 <a:tc>
                   <a:txBody>
                     <a:bodyPr/>
@@ -8326,7 +8326,7 @@
                   </a:tcPr>
                 </a:tc>
               </a:tr>
-              <a:tr h="384522">
+              <a:tr h="344796">
                 <a:tc>
                   <a:txBody>
                     <a:bodyPr/>
@@ -8958,8 +8958,8 @@
         </p:nvSpPr>
         <p:spPr>
           <a:xfrm>
-            <a:off x="438898" y="5356662"/>
-            <a:ext cx="4521737" cy="308610"/>
+            <a:off x="438898" y="5333516"/>
+            <a:ext cx="4521737" cy="462915"/>
           </a:xfrm>
           <a:prstGeom prst="rect">
             <a:avLst/>
@@ -9000,7 +9000,7 @@
         </p:nvSpPr>
         <p:spPr>
           <a:xfrm>
-            <a:off x="438898" y="5805628"/>
+            <a:off x="438898" y="5913641"/>
             <a:ext cx="4521737" cy="462915"/>
           </a:xfrm>
           <a:prstGeom prst="rect">
@@ -9059,7 +9059,7 @@
         </p:nvSpPr>
         <p:spPr>
           <a:xfrm>
-            <a:off x="438898" y="6408899"/>
+            <a:off x="438898" y="6493766"/>
             <a:ext cx="4521737" cy="308610"/>
           </a:xfrm>
           <a:prstGeom prst="rect">
@@ -9292,7 +9292,7 @@
         </p:nvSpPr>
         <p:spPr>
           <a:xfrm>
-            <a:off x="5298934" y="4965971"/>
+            <a:off x="5298934" y="4952469"/>
             <a:ext cx="4521737" cy="308610"/>
           </a:xfrm>
           <a:prstGeom prst="rect">
@@ -9351,7 +9351,7 @@
         </p:nvSpPr>
         <p:spPr>
           <a:xfrm>
-            <a:off x="5298934" y="5375169"/>
+            <a:off x="5298934" y="5348165"/>
             <a:ext cx="4521737" cy="308610"/>
           </a:xfrm>
           <a:prstGeom prst="rect">
@@ -9410,7 +9410,7 @@
         </p:nvSpPr>
         <p:spPr>
           <a:xfrm>
-            <a:off x="5298934" y="5784366"/>
+            <a:off x="5298934" y="5743861"/>
             <a:ext cx="4521737" cy="308610"/>
           </a:xfrm>
           <a:prstGeom prst="rect">
@@ -9469,7 +9469,7 @@
         </p:nvSpPr>
         <p:spPr>
           <a:xfrm>
-            <a:off x="5298934" y="6193564"/>
+            <a:off x="5298934" y="6139558"/>
             <a:ext cx="4521737" cy="617220"/>
           </a:xfrm>
           <a:prstGeom prst="rect">
@@ -9528,7 +9528,7 @@
         </p:nvSpPr>
         <p:spPr>
           <a:xfrm>
-            <a:off x="5298934" y="7085747"/>
+            <a:off x="5298934" y="6965732"/>
             <a:ext cx="4521737" cy="0"/>
           </a:xfrm>
           <a:prstGeom prst="line">
@@ -9551,8 +9551,8 @@
         </p:nvSpPr>
         <p:spPr>
           <a:xfrm>
-            <a:off x="5298934" y="7143347"/>
-            <a:ext cx="4521737" cy="120015"/>
+            <a:off x="5298934" y="7023332"/>
+            <a:ext cx="4521737" cy="240030"/>
           </a:xfrm>
           <a:prstGeom prst="rect">
             <a:avLst/>
@@ -10750,7 +10750,7 @@
         </p:nvSpPr>
         <p:spPr>
           <a:xfrm>
-            <a:off x="7728952" y="8509701"/>
+            <a:off x="7728952" y="8460256"/>
             <a:ext cx="50400" cy="50400"/>
           </a:xfrm>
           <a:prstGeom prst="rect">
@@ -10775,7 +10775,7 @@
         </p:nvSpPr>
         <p:spPr>
           <a:xfrm>
-            <a:off x="7836952" y="8464391"/>
+            <a:off x="7836952" y="8414945"/>
             <a:ext cx="6843755" cy="148336"/>
           </a:xfrm>
           <a:prstGeom prst="rect">
@@ -10834,7 +10834,7 @@
         </p:nvSpPr>
         <p:spPr>
           <a:xfrm>
-            <a:off x="7728952" y="9202562"/>
+            <a:off x="7728952" y="9103672"/>
             <a:ext cx="50400" cy="50400"/>
           </a:xfrm>
           <a:prstGeom prst="rect">
@@ -10859,8 +10859,8 @@
         </p:nvSpPr>
         <p:spPr>
           <a:xfrm>
-            <a:off x="7836952" y="9157252"/>
-            <a:ext cx="6843755" cy="148336"/>
+            <a:off x="7836952" y="9058361"/>
+            <a:ext cx="6843755" cy="296672"/>
           </a:xfrm>
           <a:prstGeom prst="rect">
             <a:avLst/>
@@ -11186,8 +11186,8 @@
         </p:nvSpPr>
         <p:spPr>
           <a:xfrm>
-            <a:off x="12656964" y="365760"/>
-            <a:ext cx="1186641" cy="251460"/>
+            <a:off x="12673633" y="365760"/>
+            <a:ext cx="1169972" cy="251460"/>
           </a:xfrm>
           <a:prstGeom prst="roundRect">
             <a:avLst>
@@ -11213,8 +11213,8 @@
         </p:nvSpPr>
         <p:spPr>
           <a:xfrm>
-            <a:off x="12656964" y="365760"/>
-            <a:ext cx="1186641" cy="251460"/>
+            <a:off x="12673633" y="365760"/>
+            <a:ext cx="1169972" cy="251460"/>
           </a:xfrm>
           <a:prstGeom prst="rect">
             <a:avLst/>
@@ -11252,8 +11252,8 @@
         </p:nvSpPr>
         <p:spPr>
           <a:xfrm>
-            <a:off x="11321238" y="365760"/>
-            <a:ext cx="1245725" cy="251460"/>
+            <a:off x="11415298" y="365760"/>
+            <a:ext cx="1168335" cy="251460"/>
           </a:xfrm>
           <a:prstGeom prst="roundRect">
             <a:avLst>
@@ -11279,8 +11279,8 @@
         </p:nvSpPr>
         <p:spPr>
           <a:xfrm>
-            <a:off x="11321238" y="365760"/>
-            <a:ext cx="1245725" cy="251460"/>
+            <a:off x="11415298" y="365760"/>
+            <a:ext cx="1168335" cy="251460"/>
           </a:xfrm>
           <a:prstGeom prst="rect">
             <a:avLst/>
@@ -11318,8 +11318,8 @@
         </p:nvSpPr>
         <p:spPr>
           <a:xfrm>
-            <a:off x="10259357" y="365760"/>
-            <a:ext cx="971882" cy="251460"/>
+            <a:off x="10372317" y="365760"/>
+            <a:ext cx="952980" cy="251460"/>
           </a:xfrm>
           <a:prstGeom prst="roundRect">
             <a:avLst>
@@ -11345,8 +11345,8 @@
         </p:nvSpPr>
         <p:spPr>
           <a:xfrm>
-            <a:off x="10259357" y="365760"/>
-            <a:ext cx="971882" cy="251460"/>
+            <a:off x="10372317" y="365760"/>
+            <a:ext cx="952980" cy="251460"/>
           </a:xfrm>
           <a:prstGeom prst="rect">
             <a:avLst/>
@@ -11527,7 +11527,7 @@
                 <a:ea typeface="Poppins" pitchFamily="34" charset="-122"/>
                 <a:cs typeface="Poppins" pitchFamily="34" charset="-120"/>
               </a:rPr>
-              <a:t>Your place, the best catch-up on the street. Home entertainment, not beer.</a:t>
+              <a:t>The best night in, on tap.</a:t>
             </a:r>
             <a:endParaRPr lang="en-US" sz="1340" dirty="0"/>
           </a:p>
@@ -11541,8 +11541,8 @@
         </p:nvSpPr>
         <p:spPr>
           <a:xfrm>
-            <a:off x="438898" y="1752181"/>
-            <a:ext cx="6951755" cy="617220"/>
+            <a:off x="438898" y="1729035"/>
+            <a:ext cx="6951755" cy="771525"/>
           </a:xfrm>
           <a:prstGeom prst="rect">
             <a:avLst/>
@@ -11569,7 +11569,7 @@
                 <a:ea typeface="Poppins" pitchFamily="34" charset="-122"/>
                 <a:cs typeface="Poppins" pitchFamily="34" charset="-120"/>
               </a:rPr>
-              <a:t>Every household deserves beer on tap is Justin's line </a:t>
+              <a:t>Chosen on 24 September, from three drafts. </a:t>
             </a:r>
             <a:pPr indent="0" marL="0">
               <a:lnSpc>
@@ -11586,7 +11586,7 @@
                 <a:ea typeface="Poppins" pitchFamily="34" charset="-122"/>
                 <a:cs typeface="Poppins" pitchFamily="34" charset="-120"/>
               </a:rPr>
-              <a:t>and it stays as the ambition. It is not the brand idea. The brand idea is what the product does to an ordinary Saturday: it turns a catch-up into the one people talk about. That puts Tap That in the home entertainment business, beside the outdoor kitchen, the high-end barbecue and the coffee machine, not beside the bar fridge. Same move BMW made from cars to mobility, and it opens the same doors: partners, product and price.</a:t>
+              <a:t>Every household deserves beer on tap is Justin's line and it stays as the ambition. It is not the brand idea. The brand idea is what the product does to an ordinary Saturday: it turns a catch-up into the one people talk about. That puts Tap That in the home entertainment business, beside the outdoor kitchen, the high-end barbecue and the coffee machine, not beside the bar fridge. Same move BMW made from cars to mobility, and it opens the same doors: partners, product and price.</a:t>
             </a:r>
             <a:endParaRPr lang="en-US" sz="810" dirty="0"/>
           </a:p>
@@ -11600,7 +11600,7 @@
         </p:nvSpPr>
         <p:spPr>
           <a:xfrm>
-            <a:off x="438898" y="2509923"/>
+            <a:off x="438898" y="2617936"/>
             <a:ext cx="6951755" cy="308610"/>
           </a:xfrm>
           <a:prstGeom prst="rect">
@@ -11642,7 +11642,7 @@
         </p:nvSpPr>
         <p:spPr>
           <a:xfrm>
-            <a:off x="438898" y="2959054"/>
+            <a:off x="438898" y="3043922"/>
             <a:ext cx="6951755" cy="308610"/>
           </a:xfrm>
           <a:prstGeom prst="rect">
@@ -11752,7 +11752,7 @@
                 <a:ea typeface="Poppins" pitchFamily="34" charset="-122"/>
                 <a:cs typeface="Poppins" pitchFamily="34" charset="-120"/>
               </a:rPr>
-              <a:t>Nobody on the Gold Coast owns this category, in market or in search. Christy owns the wording; this is her draft to sign off.</a:t>
+              <a:t>Nobody on the Gold Coast owns this category, in market or in search. Christy works the line into key messaging for each target market inside 30 days.</a:t>
             </a:r>
             <a:endParaRPr lang="en-US" sz="700" dirty="0"/>
           </a:p>
@@ -12236,7 +12236,7 @@
         <p:spPr>
           <a:xfrm>
             <a:off x="438898" y="4322293"/>
-            <a:ext cx="4521737" cy="308610"/>
+            <a:ext cx="4521737" cy="462915"/>
           </a:xfrm>
           <a:prstGeom prst="rect">
             <a:avLst/>
@@ -12294,7 +12294,7 @@
         </p:nvSpPr>
         <p:spPr>
           <a:xfrm>
-            <a:off x="438898" y="4796503"/>
+            <a:off x="438898" y="4950808"/>
             <a:ext cx="4521737" cy="308610"/>
           </a:xfrm>
           <a:prstGeom prst="rect">
@@ -12353,7 +12353,7 @@
         </p:nvSpPr>
         <p:spPr>
           <a:xfrm>
-            <a:off x="438898" y="5270713"/>
+            <a:off x="438898" y="5425018"/>
             <a:ext cx="4521737" cy="308610"/>
           </a:xfrm>
           <a:prstGeom prst="rect">
@@ -12412,7 +12412,7 @@
         </p:nvSpPr>
         <p:spPr>
           <a:xfrm>
-            <a:off x="438898" y="7115057"/>
+            <a:off x="438898" y="6995042"/>
             <a:ext cx="4521737" cy="0"/>
           </a:xfrm>
           <a:prstGeom prst="line">
@@ -12435,8 +12435,8 @@
         </p:nvSpPr>
         <p:spPr>
           <a:xfrm>
-            <a:off x="438898" y="7172657"/>
-            <a:ext cx="4521737" cy="120015"/>
+            <a:off x="438898" y="7052642"/>
+            <a:ext cx="4521737" cy="240030"/>
           </a:xfrm>
           <a:prstGeom prst="rect">
             <a:avLst/>
@@ -13652,7 +13652,7 @@
         <p:spPr>
           <a:xfrm>
             <a:off x="546898" y="7800840"/>
-            <a:ext cx="6843755" cy="131648"/>
+            <a:ext cx="6843755" cy="263296"/>
           </a:xfrm>
           <a:prstGeom prst="rect">
             <a:avLst/>
@@ -13710,7 +13710,7 @@
         </p:nvSpPr>
         <p:spPr>
           <a:xfrm>
-            <a:off x="438898" y="8647270"/>
+            <a:off x="438898" y="8691153"/>
             <a:ext cx="50400" cy="50400"/>
           </a:xfrm>
           <a:prstGeom prst="rect">
@@ -13735,7 +13735,7 @@
         </p:nvSpPr>
         <p:spPr>
           <a:xfrm>
-            <a:off x="546898" y="8610303"/>
+            <a:off x="546898" y="8654186"/>
             <a:ext cx="6843755" cy="131648"/>
           </a:xfrm>
           <a:prstGeom prst="rect">
@@ -13794,7 +13794,7 @@
         </p:nvSpPr>
         <p:spPr>
           <a:xfrm>
-            <a:off x="438898" y="9456734"/>
+            <a:off x="438898" y="9412851"/>
             <a:ext cx="50400" cy="50400"/>
           </a:xfrm>
           <a:prstGeom prst="rect">
@@ -13819,7 +13819,7 @@
         </p:nvSpPr>
         <p:spPr>
           <a:xfrm>
-            <a:off x="546898" y="9419767"/>
+            <a:off x="546898" y="9375884"/>
             <a:ext cx="6843755" cy="131648"/>
           </a:xfrm>
           <a:prstGeom prst="rect">
@@ -13878,7 +13878,7 @@
         </p:nvSpPr>
         <p:spPr>
           <a:xfrm>
-            <a:off x="438898" y="10266197"/>
+            <a:off x="438898" y="10134549"/>
             <a:ext cx="50400" cy="50400"/>
           </a:xfrm>
           <a:prstGeom prst="rect">
@@ -13903,8 +13903,8 @@
         </p:nvSpPr>
         <p:spPr>
           <a:xfrm>
-            <a:off x="546898" y="10229231"/>
-            <a:ext cx="6843755" cy="131648"/>
+            <a:off x="546898" y="10097583"/>
+            <a:ext cx="6843755" cy="263296"/>
           </a:xfrm>
           <a:prstGeom prst="rect">
             <a:avLst/>
@@ -14030,7 +14030,7 @@
         <p:spPr>
           <a:xfrm>
             <a:off x="7728952" y="7800840"/>
-            <a:ext cx="6951755" cy="154305"/>
+            <a:ext cx="6951755" cy="308610"/>
           </a:xfrm>
           <a:prstGeom prst="rect">
             <a:avLst/>
@@ -14088,7 +14088,7 @@
         </p:nvSpPr>
         <p:spPr>
           <a:xfrm>
-            <a:off x="7728952" y="8120745"/>
+            <a:off x="7728952" y="8275050"/>
             <a:ext cx="6951755" cy="462915"/>
           </a:xfrm>
           <a:prstGeom prst="rect">
@@ -14147,8 +14147,8 @@
         </p:nvSpPr>
         <p:spPr>
           <a:xfrm>
-            <a:off x="7728952" y="8749260"/>
-            <a:ext cx="6951755" cy="154305"/>
+            <a:off x="7728952" y="8903565"/>
+            <a:ext cx="6951755" cy="308610"/>
           </a:xfrm>
           <a:prstGeom prst="rect">
             <a:avLst/>
@@ -14390,8 +14390,8 @@
         </p:nvSpPr>
         <p:spPr>
           <a:xfrm>
-            <a:off x="12656964" y="365760"/>
-            <a:ext cx="1186641" cy="251460"/>
+            <a:off x="12673633" y="365760"/>
+            <a:ext cx="1169972" cy="251460"/>
           </a:xfrm>
           <a:prstGeom prst="roundRect">
             <a:avLst>
@@ -14417,8 +14417,8 @@
         </p:nvSpPr>
         <p:spPr>
           <a:xfrm>
-            <a:off x="12656964" y="365760"/>
-            <a:ext cx="1186641" cy="251460"/>
+            <a:off x="12673633" y="365760"/>
+            <a:ext cx="1169972" cy="251460"/>
           </a:xfrm>
           <a:prstGeom prst="rect">
             <a:avLst/>
@@ -14456,8 +14456,8 @@
         </p:nvSpPr>
         <p:spPr>
           <a:xfrm>
-            <a:off x="11321238" y="365760"/>
-            <a:ext cx="1245725" cy="251460"/>
+            <a:off x="11415298" y="365760"/>
+            <a:ext cx="1168335" cy="251460"/>
           </a:xfrm>
           <a:prstGeom prst="roundRect">
             <a:avLst>
@@ -14483,8 +14483,8 @@
         </p:nvSpPr>
         <p:spPr>
           <a:xfrm>
-            <a:off x="11321238" y="365760"/>
-            <a:ext cx="1245725" cy="251460"/>
+            <a:off x="11415298" y="365760"/>
+            <a:ext cx="1168335" cy="251460"/>
           </a:xfrm>
           <a:prstGeom prst="rect">
             <a:avLst/>
@@ -14522,8 +14522,8 @@
         </p:nvSpPr>
         <p:spPr>
           <a:xfrm>
-            <a:off x="10259357" y="365760"/>
-            <a:ext cx="971882" cy="251460"/>
+            <a:off x="10371127" y="365760"/>
+            <a:ext cx="954171" cy="251460"/>
           </a:xfrm>
           <a:prstGeom prst="roundRect">
             <a:avLst>
@@ -14549,8 +14549,8 @@
         </p:nvSpPr>
         <p:spPr>
           <a:xfrm>
-            <a:off x="10259357" y="365760"/>
-            <a:ext cx="971882" cy="251460"/>
+            <a:off x="10371127" y="365760"/>
+            <a:ext cx="954171" cy="251460"/>
           </a:xfrm>
           <a:prstGeom prst="rect">
             <a:avLst/>
@@ -14612,7 +14612,7 @@
         <p:spPr>
           <a:xfrm>
             <a:off x="323698" y="1115568"/>
-            <a:ext cx="14472209" cy="2629105"/>
+            <a:ext cx="14472209" cy="2743414"/>
           </a:xfrm>
           <a:prstGeom prst="rect">
             <a:avLst/>
@@ -14745,8 +14745,8 @@
         </p:nvSpPr>
         <p:spPr>
           <a:xfrm>
-            <a:off x="438898" y="1728900"/>
-            <a:ext cx="2762042" cy="1658158"/>
+            <a:off x="438898" y="1658541"/>
+            <a:ext cx="2762042" cy="1842826"/>
           </a:xfrm>
           <a:prstGeom prst="rect">
             <a:avLst/>
@@ -14770,7 +14770,7 @@
         </p:nvSpPr>
         <p:spPr>
           <a:xfrm>
-            <a:off x="438898" y="1728900"/>
+            <a:off x="438898" y="1658541"/>
             <a:ext cx="2762042" cy="28800"/>
           </a:xfrm>
           <a:prstGeom prst="rect">
@@ -14795,7 +14795,7 @@
         </p:nvSpPr>
         <p:spPr>
           <a:xfrm>
-            <a:off x="532498" y="1822500"/>
+            <a:off x="532498" y="1752141"/>
             <a:ext cx="2574842" cy="108966"/>
           </a:xfrm>
           <a:prstGeom prst="rect">
@@ -14837,7 +14837,7 @@
         </p:nvSpPr>
         <p:spPr>
           <a:xfrm>
-            <a:off x="532498" y="1989066"/>
+            <a:off x="532498" y="1918707"/>
             <a:ext cx="2574842" cy="135331"/>
           </a:xfrm>
           <a:prstGeom prst="rect">
@@ -14879,7 +14879,7 @@
         </p:nvSpPr>
         <p:spPr>
           <a:xfrm>
-            <a:off x="532498" y="2189197"/>
+            <a:off x="532498" y="2118838"/>
             <a:ext cx="2574842" cy="270662"/>
           </a:xfrm>
           <a:prstGeom prst="rect">
@@ -14938,8 +14938,8 @@
         </p:nvSpPr>
         <p:spPr>
           <a:xfrm>
-            <a:off x="3308839" y="1728900"/>
-            <a:ext cx="2762042" cy="1658158"/>
+            <a:off x="3308839" y="1658541"/>
+            <a:ext cx="2762042" cy="1842826"/>
           </a:xfrm>
           <a:prstGeom prst="rect">
             <a:avLst/>
@@ -14963,7 +14963,7 @@
         </p:nvSpPr>
         <p:spPr>
           <a:xfrm>
-            <a:off x="3308839" y="1728900"/>
+            <a:off x="3308839" y="1658541"/>
             <a:ext cx="2762042" cy="28800"/>
           </a:xfrm>
           <a:prstGeom prst="rect">
@@ -14988,7 +14988,7 @@
         </p:nvSpPr>
         <p:spPr>
           <a:xfrm>
-            <a:off x="3402439" y="1822500"/>
+            <a:off x="3402439" y="1752141"/>
             <a:ext cx="2574842" cy="108966"/>
           </a:xfrm>
           <a:prstGeom prst="rect">
@@ -15030,8 +15030,8 @@
         </p:nvSpPr>
         <p:spPr>
           <a:xfrm>
-            <a:off x="3402439" y="1989066"/>
-            <a:ext cx="2574842" cy="405994"/>
+            <a:off x="3402439" y="1918707"/>
+            <a:ext cx="2574842" cy="541325"/>
           </a:xfrm>
           <a:prstGeom prst="rect">
             <a:avLst/>
@@ -15072,8 +15072,8 @@
         </p:nvSpPr>
         <p:spPr>
           <a:xfrm>
-            <a:off x="3402439" y="2459860"/>
-            <a:ext cx="2574842" cy="676656"/>
+            <a:off x="3402439" y="2524832"/>
+            <a:ext cx="2574842" cy="811987"/>
           </a:xfrm>
           <a:prstGeom prst="rect">
             <a:avLst/>
@@ -15131,8 +15131,8 @@
         </p:nvSpPr>
         <p:spPr>
           <a:xfrm>
-            <a:off x="6178781" y="1728900"/>
-            <a:ext cx="2762042" cy="1658158"/>
+            <a:off x="6178781" y="1658541"/>
+            <a:ext cx="2762042" cy="1842826"/>
           </a:xfrm>
           <a:prstGeom prst="rect">
             <a:avLst/>
@@ -15156,7 +15156,7 @@
         </p:nvSpPr>
         <p:spPr>
           <a:xfrm>
-            <a:off x="6178781" y="1728900"/>
+            <a:off x="6178781" y="1658541"/>
             <a:ext cx="2762042" cy="28800"/>
           </a:xfrm>
           <a:prstGeom prst="rect">
@@ -15181,7 +15181,7 @@
         </p:nvSpPr>
         <p:spPr>
           <a:xfrm>
-            <a:off x="6272381" y="1822500"/>
+            <a:off x="6272381" y="1752141"/>
             <a:ext cx="2574842" cy="108966"/>
           </a:xfrm>
           <a:prstGeom prst="rect">
@@ -15223,8 +15223,8 @@
         </p:nvSpPr>
         <p:spPr>
           <a:xfrm>
-            <a:off x="6272381" y="1989066"/>
-            <a:ext cx="2574842" cy="135331"/>
+            <a:off x="6272381" y="1918707"/>
+            <a:ext cx="2574842" cy="270662"/>
           </a:xfrm>
           <a:prstGeom prst="rect">
             <a:avLst/>
@@ -15265,7 +15265,7 @@
         </p:nvSpPr>
         <p:spPr>
           <a:xfrm>
-            <a:off x="6272381" y="2189197"/>
+            <a:off x="6272381" y="2254170"/>
             <a:ext cx="2574842" cy="270662"/>
           </a:xfrm>
           <a:prstGeom prst="rect">
@@ -15324,8 +15324,8 @@
         </p:nvSpPr>
         <p:spPr>
           <a:xfrm>
-            <a:off x="9048722" y="1728900"/>
-            <a:ext cx="2762042" cy="1658158"/>
+            <a:off x="9048722" y="1658541"/>
+            <a:ext cx="2762042" cy="1842826"/>
           </a:xfrm>
           <a:prstGeom prst="rect">
             <a:avLst/>
@@ -15349,7 +15349,7 @@
         </p:nvSpPr>
         <p:spPr>
           <a:xfrm>
-            <a:off x="9048722" y="1728900"/>
+            <a:off x="9048722" y="1658541"/>
             <a:ext cx="2762042" cy="28800"/>
           </a:xfrm>
           <a:prstGeom prst="rect">
@@ -15374,7 +15374,7 @@
         </p:nvSpPr>
         <p:spPr>
           <a:xfrm>
-            <a:off x="9142322" y="1822500"/>
+            <a:off x="9142322" y="1752141"/>
             <a:ext cx="2574842" cy="108966"/>
           </a:xfrm>
           <a:prstGeom prst="rect">
@@ -15416,7 +15416,7 @@
         </p:nvSpPr>
         <p:spPr>
           <a:xfrm>
-            <a:off x="9142322" y="1989066"/>
+            <a:off x="9142322" y="1918707"/>
             <a:ext cx="2574842" cy="270662"/>
           </a:xfrm>
           <a:prstGeom prst="rect">
@@ -15458,7 +15458,7 @@
         </p:nvSpPr>
         <p:spPr>
           <a:xfrm>
-            <a:off x="9142322" y="2324529"/>
+            <a:off x="9142322" y="2254170"/>
             <a:ext cx="2574842" cy="405994"/>
           </a:xfrm>
           <a:prstGeom prst="rect">
@@ -15517,8 +15517,8 @@
         </p:nvSpPr>
         <p:spPr>
           <a:xfrm>
-            <a:off x="11918664" y="1728900"/>
-            <a:ext cx="2762042" cy="1658158"/>
+            <a:off x="11918664" y="1658541"/>
+            <a:ext cx="2762042" cy="1842826"/>
           </a:xfrm>
           <a:prstGeom prst="rect">
             <a:avLst/>
@@ -15542,7 +15542,7 @@
         </p:nvSpPr>
         <p:spPr>
           <a:xfrm>
-            <a:off x="11918664" y="1728900"/>
+            <a:off x="11918664" y="1658541"/>
             <a:ext cx="2762042" cy="28800"/>
           </a:xfrm>
           <a:prstGeom prst="rect">
@@ -15567,7 +15567,7 @@
         </p:nvSpPr>
         <p:spPr>
           <a:xfrm>
-            <a:off x="12012264" y="1822500"/>
+            <a:off x="12012264" y="1752141"/>
             <a:ext cx="2574842" cy="108966"/>
           </a:xfrm>
           <a:prstGeom prst="rect">
@@ -15609,7 +15609,7 @@
         </p:nvSpPr>
         <p:spPr>
           <a:xfrm>
-            <a:off x="12012264" y="1989066"/>
+            <a:off x="12012264" y="1918707"/>
             <a:ext cx="2574842" cy="270662"/>
           </a:xfrm>
           <a:prstGeom prst="rect">
@@ -15651,8 +15651,8 @@
         </p:nvSpPr>
         <p:spPr>
           <a:xfrm>
-            <a:off x="12012264" y="2324529"/>
-            <a:ext cx="2574842" cy="270662"/>
+            <a:off x="12012264" y="2254170"/>
+            <a:ext cx="2574842" cy="405994"/>
           </a:xfrm>
           <a:prstGeom prst="rect">
             <a:avLst/>
@@ -15710,7 +15710,7 @@
         </p:nvSpPr>
         <p:spPr>
           <a:xfrm>
-            <a:off x="438898" y="3451858"/>
+            <a:off x="438898" y="3566167"/>
             <a:ext cx="14241809" cy="0"/>
           </a:xfrm>
           <a:prstGeom prst="line">
@@ -15733,7 +15733,7 @@
         </p:nvSpPr>
         <p:spPr>
           <a:xfrm>
-            <a:off x="438898" y="3509458"/>
+            <a:off x="438898" y="3623767"/>
             <a:ext cx="14241809" cy="120015"/>
           </a:xfrm>
           <a:prstGeom prst="rect">
@@ -15775,8 +15775,8 @@
         </p:nvSpPr>
         <p:spPr>
           <a:xfrm>
-            <a:off x="323698" y="3852572"/>
-            <a:ext cx="5967146" cy="3572153"/>
+            <a:off x="323698" y="3966881"/>
+            <a:ext cx="5967146" cy="3457845"/>
           </a:xfrm>
           <a:prstGeom prst="rect">
             <a:avLst/>
@@ -15800,7 +15800,7 @@
         </p:nvSpPr>
         <p:spPr>
           <a:xfrm>
-            <a:off x="438898" y="3967772"/>
+            <a:off x="438898" y="4082081"/>
             <a:ext cx="5736746" cy="112268"/>
           </a:xfrm>
           <a:prstGeom prst="rect">
@@ -15849,7 +15849,7 @@
           </p:nvPr>
         </p:nvGraphicFramePr>
         <p:xfrm>
-          <a:off x="438898" y="4137640"/>
+          <a:off x="438898" y="4251949"/>
           <a:ext cx="11339703" cy="914400"/>
         </p:xfrm>
         <a:graphic>
@@ -15860,7 +15860,7 @@
                 <a:gridCol w="2868373"/>
                 <a:gridCol w="2868373"/>
               </a:tblGrid>
-              <a:tr h="335796">
+              <a:tr h="292145">
                 <a:tc>
                   <a:txBody>
                     <a:bodyPr/>
@@ -15968,7 +15968,7 @@
                   </a:tcPr>
                 </a:tc>
               </a:tr>
-              <a:tr h="354820">
+              <a:tr h="311169">
                 <a:tc>
                   <a:txBody>
                     <a:bodyPr/>
@@ -16076,7 +16076,7 @@
                   </a:tcPr>
                 </a:tc>
               </a:tr>
-              <a:tr h="589719">
+              <a:tr h="546068">
                 <a:tc>
                   <a:txBody>
                     <a:bodyPr/>
@@ -16208,7 +16208,7 @@
                   </a:tcPr>
                 </a:tc>
               </a:tr>
-              <a:tr h="472270">
+              <a:tr h="428619">
                 <a:tc>
                   <a:txBody>
                     <a:bodyPr/>
@@ -16340,7 +16340,7 @@
                   </a:tcPr>
                 </a:tc>
               </a:tr>
-              <a:tr h="354820">
+              <a:tr h="428619">
                 <a:tc>
                   <a:txBody>
                     <a:bodyPr/>
@@ -16448,7 +16448,7 @@
                   </a:tcPr>
                 </a:tc>
               </a:tr>
-              <a:tr h="354820">
+              <a:tr h="311169">
                 <a:tc>
                   <a:txBody>
                     <a:bodyPr/>
@@ -16556,7 +16556,7 @@
                   </a:tcPr>
                 </a:tc>
               </a:tr>
-              <a:tr h="354820">
+              <a:tr h="428619">
                 <a:tc>
                   <a:txBody>
                     <a:bodyPr/>
@@ -16664,7 +16664,7 @@
                   </a:tcPr>
                 </a:tc>
               </a:tr>
-              <a:tr h="354820">
+              <a:tr h="311169">
                 <a:tc>
                   <a:txBody>
                     <a:bodyPr/>
@@ -16784,8 +16784,8 @@
         </p:nvSpPr>
         <p:spPr>
           <a:xfrm>
-            <a:off x="6398743" y="3852572"/>
-            <a:ext cx="8397164" cy="3572153"/>
+            <a:off x="6398743" y="3966881"/>
+            <a:ext cx="8397164" cy="3457845"/>
           </a:xfrm>
           <a:prstGeom prst="rect">
             <a:avLst/>
@@ -16809,7 +16809,7 @@
         </p:nvSpPr>
         <p:spPr>
           <a:xfrm>
-            <a:off x="6513943" y="3967772"/>
+            <a:off x="6513943" y="4082081"/>
             <a:ext cx="8166764" cy="112268"/>
           </a:xfrm>
           <a:prstGeom prst="rect">
@@ -16851,7 +16851,7 @@
         </p:nvSpPr>
         <p:spPr>
           <a:xfrm>
-            <a:off x="6513943" y="4137640"/>
+            <a:off x="6513943" y="4251949"/>
             <a:ext cx="8166764" cy="150724"/>
           </a:xfrm>
           <a:prstGeom prst="rect">
@@ -16893,7 +16893,7 @@
         </p:nvSpPr>
         <p:spPr>
           <a:xfrm>
-            <a:off x="6513943" y="4380333"/>
+            <a:off x="6513943" y="4487293"/>
             <a:ext cx="8166764" cy="308610"/>
           </a:xfrm>
           <a:prstGeom prst="rect">
@@ -16935,7 +16935,7 @@
         </p:nvSpPr>
         <p:spPr>
           <a:xfrm>
-            <a:off x="6513943" y="4780912"/>
+            <a:off x="6513943" y="4880524"/>
             <a:ext cx="8166764" cy="150724"/>
           </a:xfrm>
           <a:prstGeom prst="rect">
@@ -16977,7 +16977,7 @@
         </p:nvSpPr>
         <p:spPr>
           <a:xfrm>
-            <a:off x="6513943" y="5023605"/>
+            <a:off x="6513943" y="5115868"/>
             <a:ext cx="8166764" cy="154305"/>
           </a:xfrm>
           <a:prstGeom prst="rect">
@@ -17019,7 +17019,7 @@
         </p:nvSpPr>
         <p:spPr>
           <a:xfrm>
-            <a:off x="6513943" y="5269879"/>
+            <a:off x="6513943" y="5354794"/>
             <a:ext cx="8166764" cy="150724"/>
           </a:xfrm>
           <a:prstGeom prst="rect">
@@ -17061,7 +17061,7 @@
         </p:nvSpPr>
         <p:spPr>
           <a:xfrm>
-            <a:off x="6513943" y="5512572"/>
+            <a:off x="6513943" y="5590138"/>
             <a:ext cx="8166764" cy="308610"/>
           </a:xfrm>
           <a:prstGeom prst="rect">
@@ -17137,7 +17137,7 @@
         </p:nvSpPr>
         <p:spPr>
           <a:xfrm>
-            <a:off x="6513943" y="5913151"/>
+            <a:off x="6513943" y="5983369"/>
             <a:ext cx="8166764" cy="150724"/>
           </a:xfrm>
           <a:prstGeom prst="rect">
@@ -17179,7 +17179,7 @@
         </p:nvSpPr>
         <p:spPr>
           <a:xfrm>
-            <a:off x="6513943" y="6155843"/>
+            <a:off x="6513943" y="6218713"/>
             <a:ext cx="8166764" cy="617220"/>
           </a:xfrm>
           <a:prstGeom prst="rect">
@@ -17429,8 +17429,8 @@
         </p:nvSpPr>
         <p:spPr>
           <a:xfrm>
-            <a:off x="438898" y="8402800"/>
-            <a:ext cx="4521737" cy="617220"/>
+            <a:off x="438898" y="8356509"/>
+            <a:ext cx="4521737" cy="771525"/>
           </a:xfrm>
           <a:prstGeom prst="rect">
             <a:avLst/>
@@ -17488,8 +17488,8 @@
         </p:nvSpPr>
         <p:spPr>
           <a:xfrm>
-            <a:off x="438898" y="9142213"/>
-            <a:ext cx="4521737" cy="308610"/>
+            <a:off x="438898" y="9203935"/>
+            <a:ext cx="4521737" cy="462915"/>
           </a:xfrm>
           <a:prstGeom prst="rect">
             <a:avLst/>
@@ -17547,7 +17547,7 @@
         </p:nvSpPr>
         <p:spPr>
           <a:xfrm>
-            <a:off x="438898" y="9573015"/>
+            <a:off x="438898" y="9742751"/>
             <a:ext cx="4521737" cy="308610"/>
           </a:xfrm>
           <a:prstGeom prst="rect">
@@ -18025,7 +18025,7 @@
         <p:spPr>
           <a:xfrm>
             <a:off x="10158970" y="7817693"/>
-            <a:ext cx="2224868" cy="546122"/>
+            <a:ext cx="2224868" cy="458111"/>
           </a:xfrm>
           <a:prstGeom prst="rect">
             <a:avLst/>
@@ -18092,7 +18092,7 @@
         <p:spPr>
           <a:xfrm>
             <a:off x="10266970" y="8147113"/>
-            <a:ext cx="2008868" cy="176022"/>
+            <a:ext cx="2008868" cy="88011"/>
           </a:xfrm>
           <a:prstGeom prst="rect">
             <a:avLst/>
@@ -18134,7 +18134,7 @@
         <p:spPr>
           <a:xfrm>
             <a:off x="12455838" y="7817693"/>
-            <a:ext cx="2224868" cy="546122"/>
+            <a:ext cx="2224868" cy="458111"/>
           </a:xfrm>
           <a:prstGeom prst="rect">
             <a:avLst/>
@@ -18201,7 +18201,7 @@
         <p:spPr>
           <a:xfrm>
             <a:off x="12563838" y="8147113"/>
-            <a:ext cx="2008868" cy="176022"/>
+            <a:ext cx="2008868" cy="88011"/>
           </a:xfrm>
           <a:prstGeom prst="rect">
             <a:avLst/>
@@ -18242,8 +18242,8 @@
         </p:nvSpPr>
         <p:spPr>
           <a:xfrm>
-            <a:off x="10158970" y="8435815"/>
-            <a:ext cx="2224868" cy="546122"/>
+            <a:off x="10158970" y="8347804"/>
+            <a:ext cx="2224868" cy="458111"/>
           </a:xfrm>
           <a:prstGeom prst="rect">
             <a:avLst/>
@@ -18267,7 +18267,7 @@
         </p:nvSpPr>
         <p:spPr>
           <a:xfrm>
-            <a:off x="10266970" y="8522215"/>
+            <a:off x="10266970" y="8434204"/>
             <a:ext cx="2008868" cy="185420"/>
           </a:xfrm>
           <a:prstGeom prst="rect">
@@ -18309,8 +18309,8 @@
         </p:nvSpPr>
         <p:spPr>
           <a:xfrm>
-            <a:off x="10266970" y="8765235"/>
-            <a:ext cx="2008868" cy="176022"/>
+            <a:off x="10266970" y="8677224"/>
+            <a:ext cx="2008868" cy="88011"/>
           </a:xfrm>
           <a:prstGeom prst="rect">
             <a:avLst/>
@@ -18351,8 +18351,8 @@
         </p:nvSpPr>
         <p:spPr>
           <a:xfrm>
-            <a:off x="12455838" y="8435815"/>
-            <a:ext cx="2224868" cy="546122"/>
+            <a:off x="12455838" y="8347804"/>
+            <a:ext cx="2224868" cy="458111"/>
           </a:xfrm>
           <a:prstGeom prst="rect">
             <a:avLst/>
@@ -18376,7 +18376,7 @@
         </p:nvSpPr>
         <p:spPr>
           <a:xfrm>
-            <a:off x="12563838" y="8522215"/>
+            <a:off x="12563838" y="8434204"/>
             <a:ext cx="2008868" cy="185420"/>
           </a:xfrm>
           <a:prstGeom prst="rect">
@@ -18418,8 +18418,8 @@
         </p:nvSpPr>
         <p:spPr>
           <a:xfrm>
-            <a:off x="12563838" y="8765235"/>
-            <a:ext cx="2008868" cy="176022"/>
+            <a:off x="12563838" y="8677224"/>
+            <a:ext cx="2008868" cy="88011"/>
           </a:xfrm>
           <a:prstGeom prst="rect">
             <a:avLst/>
@@ -18460,7 +18460,7 @@
         </p:nvSpPr>
         <p:spPr>
           <a:xfrm>
-            <a:off x="10158970" y="9147537"/>
+            <a:off x="10158970" y="8971515"/>
             <a:ext cx="4521737" cy="308610"/>
           </a:xfrm>
           <a:prstGeom prst="rect">
@@ -18519,7 +18519,7 @@
         </p:nvSpPr>
         <p:spPr>
           <a:xfrm>
-            <a:off x="10158970" y="9621747"/>
+            <a:off x="10158970" y="9445725"/>
             <a:ext cx="4521737" cy="308610"/>
           </a:xfrm>
           <a:prstGeom prst="rect">
@@ -18697,8 +18697,8 @@
         </p:nvSpPr>
         <p:spPr>
           <a:xfrm>
-            <a:off x="12656964" y="365760"/>
-            <a:ext cx="1186641" cy="251460"/>
+            <a:off x="12673633" y="365760"/>
+            <a:ext cx="1169972" cy="251460"/>
           </a:xfrm>
           <a:prstGeom prst="roundRect">
             <a:avLst>
@@ -18724,8 +18724,8 @@
         </p:nvSpPr>
         <p:spPr>
           <a:xfrm>
-            <a:off x="12656964" y="365760"/>
-            <a:ext cx="1186641" cy="251460"/>
+            <a:off x="12673633" y="365760"/>
+            <a:ext cx="1169972" cy="251460"/>
           </a:xfrm>
           <a:prstGeom prst="rect">
             <a:avLst/>
@@ -18763,8 +18763,8 @@
         </p:nvSpPr>
         <p:spPr>
           <a:xfrm>
-            <a:off x="11321238" y="365760"/>
-            <a:ext cx="1245725" cy="251460"/>
+            <a:off x="11415298" y="365760"/>
+            <a:ext cx="1168335" cy="251460"/>
           </a:xfrm>
           <a:prstGeom prst="roundRect">
             <a:avLst>
@@ -18790,8 +18790,8 @@
         </p:nvSpPr>
         <p:spPr>
           <a:xfrm>
-            <a:off x="11321238" y="365760"/>
-            <a:ext cx="1245725" cy="251460"/>
+            <a:off x="11415298" y="365760"/>
+            <a:ext cx="1168335" cy="251460"/>
           </a:xfrm>
           <a:prstGeom prst="rect">
             <a:avLst/>
@@ -18829,8 +18829,8 @@
         </p:nvSpPr>
         <p:spPr>
           <a:xfrm>
-            <a:off x="10259357" y="365760"/>
-            <a:ext cx="971882" cy="251460"/>
+            <a:off x="10367853" y="365760"/>
+            <a:ext cx="957445" cy="251460"/>
           </a:xfrm>
           <a:prstGeom prst="roundRect">
             <a:avLst>
@@ -18856,8 +18856,8 @@
         </p:nvSpPr>
         <p:spPr>
           <a:xfrm>
-            <a:off x="10259357" y="365760"/>
-            <a:ext cx="971882" cy="251460"/>
+            <a:off x="10367853" y="365760"/>
+            <a:ext cx="957445" cy="251460"/>
           </a:xfrm>
           <a:prstGeom prst="rect">
             <a:avLst/>
@@ -19145,7 +19145,7 @@
         <p:spPr>
           <a:xfrm>
             <a:off x="626098" y="1659151"/>
-            <a:ext cx="3198728" cy="133452"/>
+            <a:ext cx="3198728" cy="266903"/>
           </a:xfrm>
           <a:prstGeom prst="rect">
             <a:avLst/>
@@ -19186,7 +19186,7 @@
         </p:nvSpPr>
         <p:spPr>
           <a:xfrm>
-            <a:off x="532498" y="1873671"/>
+            <a:off x="532498" y="2007122"/>
             <a:ext cx="50400" cy="50400"/>
           </a:xfrm>
           <a:prstGeom prst="rect">
@@ -19211,7 +19211,7 @@
         </p:nvSpPr>
         <p:spPr>
           <a:xfrm>
-            <a:off x="626098" y="1835803"/>
+            <a:off x="626098" y="1969254"/>
             <a:ext cx="3198728" cy="133452"/>
           </a:xfrm>
           <a:prstGeom prst="rect">
@@ -19253,7 +19253,7 @@
         </p:nvSpPr>
         <p:spPr>
           <a:xfrm>
-            <a:off x="532498" y="2050322"/>
+            <a:off x="532498" y="2183774"/>
             <a:ext cx="50400" cy="50400"/>
           </a:xfrm>
           <a:prstGeom prst="rect">
@@ -19278,7 +19278,7 @@
         </p:nvSpPr>
         <p:spPr>
           <a:xfrm>
-            <a:off x="626098" y="2012454"/>
+            <a:off x="626098" y="2145906"/>
             <a:ext cx="3198728" cy="133452"/>
           </a:xfrm>
           <a:prstGeom prst="rect">
@@ -19320,7 +19320,7 @@
         </p:nvSpPr>
         <p:spPr>
           <a:xfrm>
-            <a:off x="532498" y="2226974"/>
+            <a:off x="532498" y="2360426"/>
             <a:ext cx="50400" cy="50400"/>
           </a:xfrm>
           <a:prstGeom prst="rect">
@@ -19345,7 +19345,7 @@
         </p:nvSpPr>
         <p:spPr>
           <a:xfrm>
-            <a:off x="626098" y="2189106"/>
+            <a:off x="626098" y="2322557"/>
             <a:ext cx="3198728" cy="133452"/>
           </a:xfrm>
           <a:prstGeom prst="rect">
@@ -19387,7 +19387,7 @@
         </p:nvSpPr>
         <p:spPr>
           <a:xfrm>
-            <a:off x="532498" y="2403626"/>
+            <a:off x="532498" y="2537077"/>
             <a:ext cx="50400" cy="50400"/>
           </a:xfrm>
           <a:prstGeom prst="rect">
@@ -19412,7 +19412,7 @@
         </p:nvSpPr>
         <p:spPr>
           <a:xfrm>
-            <a:off x="626098" y="2365757"/>
+            <a:off x="626098" y="2499209"/>
             <a:ext cx="3198728" cy="133452"/>
           </a:xfrm>
           <a:prstGeom prst="rect">
@@ -19454,7 +19454,7 @@
         </p:nvSpPr>
         <p:spPr>
           <a:xfrm>
-            <a:off x="532498" y="2580277"/>
+            <a:off x="532498" y="2713729"/>
             <a:ext cx="50400" cy="50400"/>
           </a:xfrm>
           <a:prstGeom prst="rect">
@@ -19479,7 +19479,7 @@
         </p:nvSpPr>
         <p:spPr>
           <a:xfrm>
-            <a:off x="626098" y="2542409"/>
+            <a:off x="626098" y="2675861"/>
             <a:ext cx="3198728" cy="133452"/>
           </a:xfrm>
           <a:prstGeom prst="rect">
@@ -19521,7 +19521,7 @@
         </p:nvSpPr>
         <p:spPr>
           <a:xfrm>
-            <a:off x="532498" y="2756929"/>
+            <a:off x="532498" y="2890380"/>
             <a:ext cx="50400" cy="50400"/>
           </a:xfrm>
           <a:prstGeom prst="rect">
@@ -19546,7 +19546,7 @@
         </p:nvSpPr>
         <p:spPr>
           <a:xfrm>
-            <a:off x="626098" y="2719061"/>
+            <a:off x="626098" y="2852512"/>
             <a:ext cx="3198728" cy="133452"/>
           </a:xfrm>
           <a:prstGeom prst="rect">
@@ -20868,7 +20868,7 @@
         <p:spPr>
           <a:xfrm>
             <a:off x="438898" y="4071385"/>
-            <a:ext cx="4521737" cy="161239"/>
+            <a:ext cx="4521737" cy="322478"/>
           </a:xfrm>
           <a:prstGeom prst="rect">
             <a:avLst/>
@@ -20909,7 +20909,7 @@
         </p:nvSpPr>
         <p:spPr>
           <a:xfrm>
-            <a:off x="438898" y="4374372"/>
+            <a:off x="438898" y="4493325"/>
             <a:ext cx="4521737" cy="308610"/>
           </a:xfrm>
           <a:prstGeom prst="rect">
@@ -20968,8 +20968,8 @@
         </p:nvSpPr>
         <p:spPr>
           <a:xfrm>
-            <a:off x="438898" y="4824731"/>
-            <a:ext cx="4521737" cy="308610"/>
+            <a:off x="438898" y="4901397"/>
+            <a:ext cx="4521737" cy="462915"/>
           </a:xfrm>
           <a:prstGeom prst="rect">
             <a:avLst/>
@@ -21027,7 +21027,7 @@
         </p:nvSpPr>
         <p:spPr>
           <a:xfrm>
-            <a:off x="438898" y="5275089"/>
+            <a:off x="438898" y="5463774"/>
             <a:ext cx="4521737" cy="308610"/>
           </a:xfrm>
           <a:prstGeom prst="rect">
@@ -21086,8 +21086,8 @@
         </p:nvSpPr>
         <p:spPr>
           <a:xfrm>
-            <a:off x="438898" y="5725447"/>
-            <a:ext cx="4521737" cy="462915"/>
+            <a:off x="438898" y="5871846"/>
+            <a:ext cx="4521737" cy="617220"/>
           </a:xfrm>
           <a:prstGeom prst="rect">
             <a:avLst/>
@@ -21145,7 +21145,7 @@
         </p:nvSpPr>
         <p:spPr>
           <a:xfrm>
-            <a:off x="438898" y="6330111"/>
+            <a:off x="438898" y="6588528"/>
             <a:ext cx="4521737" cy="308610"/>
           </a:xfrm>
           <a:prstGeom prst="rect">
@@ -21351,9 +21351,9 @@
             <a:tbl>
               <a:tblPr/>
               <a:tblGrid>
-                <a:gridCol w="1769137"/>
-                <a:gridCol w="3336271"/>
-                <a:gridCol w="631337"/>
+                <a:gridCol w="1788819"/>
+                <a:gridCol w="3264525"/>
+                <a:gridCol w="683401"/>
               </a:tblGrid>
               <a:tr h="207590">
                 <a:tc>
@@ -23635,7 +23635,7 @@
         <p:spPr>
           <a:xfrm>
             <a:off x="11373979" y="4699900"/>
-            <a:ext cx="3306728" cy="617220"/>
+            <a:ext cx="3306728" cy="771525"/>
           </a:xfrm>
           <a:prstGeom prst="rect">
             <a:avLst/>
@@ -23693,8 +23693,8 @@
         </p:nvSpPr>
         <p:spPr>
           <a:xfrm>
-            <a:off x="11373979" y="5482720"/>
-            <a:ext cx="3306728" cy="617220"/>
+            <a:off x="11373979" y="5637025"/>
+            <a:ext cx="3306728" cy="771525"/>
           </a:xfrm>
           <a:prstGeom prst="rect">
             <a:avLst/>
@@ -23916,13 +23916,13 @@
             <a:tbl>
               <a:tblPr/>
               <a:tblGrid>
-                <a:gridCol w="3425197"/>
-                <a:gridCol w="1025001"/>
-                <a:gridCol w="931992"/>
-                <a:gridCol w="1002650"/>
-                <a:gridCol w="963716"/>
-                <a:gridCol w="1213181"/>
-                <a:gridCol w="820036"/>
+                <a:gridCol w="3783265"/>
+                <a:gridCol w="968252"/>
+                <a:gridCol w="878819"/>
+                <a:gridCol w="927794"/>
+                <a:gridCol w="889111"/>
+                <a:gridCol w="1127244"/>
+                <a:gridCol w="807287"/>
               </a:tblGrid>
               <a:tr h="204057">
                 <a:tc>
